--- a/ELSE26_TreasureHuntingInAzureWithKQL.pptx
+++ b/ELSE26_TreasureHuntingInAzureWithKQL.pptx
@@ -5,29 +5,29 @@
     <p:sldMasterId id="2147483648" r:id="rId4"/>
   </p:sldMasterIdLst>
   <p:notesMasterIdLst>
-    <p:notesMasterId r:id="rId34"/>
+    <p:notesMasterId r:id="rId33"/>
   </p:notesMasterIdLst>
   <p:handoutMasterIdLst>
-    <p:handoutMasterId r:id="rId35"/>
+    <p:handoutMasterId r:id="rId34"/>
   </p:handoutMasterIdLst>
   <p:sldIdLst>
     <p:sldId id="332" r:id="rId5"/>
-    <p:sldId id="333" r:id="rId6"/>
-    <p:sldId id="334" r:id="rId7"/>
-    <p:sldId id="335" r:id="rId8"/>
-    <p:sldId id="336" r:id="rId9"/>
-    <p:sldId id="337" r:id="rId10"/>
-    <p:sldId id="338" r:id="rId11"/>
-    <p:sldId id="339" r:id="rId12"/>
-    <p:sldId id="340" r:id="rId13"/>
-    <p:sldId id="341" r:id="rId14"/>
-    <p:sldId id="321" r:id="rId15"/>
-    <p:sldId id="342" r:id="rId16"/>
+    <p:sldId id="321" r:id="rId6"/>
+    <p:sldId id="342" r:id="rId7"/>
+    <p:sldId id="333" r:id="rId8"/>
+    <p:sldId id="334" r:id="rId9"/>
+    <p:sldId id="335" r:id="rId10"/>
+    <p:sldId id="336" r:id="rId11"/>
+    <p:sldId id="337" r:id="rId12"/>
+    <p:sldId id="338" r:id="rId13"/>
+    <p:sldId id="339" r:id="rId14"/>
+    <p:sldId id="340" r:id="rId15"/>
+    <p:sldId id="341" r:id="rId16"/>
     <p:sldId id="343" r:id="rId17"/>
     <p:sldId id="344" r:id="rId18"/>
     <p:sldId id="345" r:id="rId19"/>
-    <p:sldId id="346" r:id="rId20"/>
-    <p:sldId id="347" r:id="rId21"/>
+    <p:sldId id="358" r:id="rId20"/>
+    <p:sldId id="359" r:id="rId21"/>
     <p:sldId id="348" r:id="rId22"/>
     <p:sldId id="349" r:id="rId23"/>
     <p:sldId id="350" r:id="rId24"/>
@@ -38,8 +38,7 @@
     <p:sldId id="355" r:id="rId29"/>
     <p:sldId id="356" r:id="rId30"/>
     <p:sldId id="357" r:id="rId31"/>
-    <p:sldId id="358" r:id="rId32"/>
-    <p:sldId id="324" r:id="rId33"/>
+    <p:sldId id="324" r:id="rId32"/>
   </p:sldIdLst>
   <p:sldSz cx="18288000" cy="10287000"/>
   <p:notesSz cx="10287000" cy="18288000"/>
@@ -138,9 +137,11 @@
   <p:extLst>
     <p:ext uri="{521415D9-36F7-43E2-AB2F-B90AF26B5E84}">
       <p14:sectionLst xmlns:p14="http://schemas.microsoft.com/office/powerpoint/2010/main">
-        <p14:section name="Start" id="{C58087A3-450B-4B4E-A6A3-2715F27AE7DD}">
+        <p14:section name="Slides" id="{C58087A3-450B-4B4E-A6A3-2715F27AE7DD}">
           <p14:sldIdLst>
             <p14:sldId id="332"/>
+            <p14:sldId id="321"/>
+            <p14:sldId id="342"/>
             <p14:sldId id="333"/>
             <p14:sldId id="334"/>
             <p14:sldId id="335"/>
@@ -150,17 +151,11 @@
             <p14:sldId id="339"/>
             <p14:sldId id="340"/>
             <p14:sldId id="341"/>
-          </p14:sldIdLst>
-        </p14:section>
-        <p14:section name="Sponsors" id="{B4AE7E17-068D-47CF-BFEC-1852F34E12BB}">
-          <p14:sldIdLst>
-            <p14:sldId id="321"/>
-            <p14:sldId id="342"/>
             <p14:sldId id="343"/>
             <p14:sldId id="344"/>
             <p14:sldId id="345"/>
-            <p14:sldId id="346"/>
-            <p14:sldId id="347"/>
+            <p14:sldId id="358"/>
+            <p14:sldId id="359"/>
             <p14:sldId id="348"/>
             <p14:sldId id="349"/>
             <p14:sldId id="350"/>
@@ -171,7 +166,6 @@
             <p14:sldId id="355"/>
             <p14:sldId id="356"/>
             <p14:sldId id="357"/>
-            <p14:sldId id="358"/>
           </p14:sldIdLst>
         </p14:section>
         <p14:section name="Speaker presentation" id="{DD9F438E-6775-4DA2-9EF1-0D790C1E2A12}">
@@ -405,12 +399,12 @@
       <inkml:timestamp xml:id="ts0" timeString="2026-02-25T14:22:37.181"/>
     </inkml:context>
     <inkml:brush xml:id="br0">
-      <inkml:brushProperty name="width" value="0.1" units="cm"/>
-      <inkml:brushProperty name="height" value="0.1" units="cm"/>
+      <inkml:brushProperty name="width" value="0.28222" units="cm"/>
+      <inkml:brushProperty name="height" value="0.28222" units="cm"/>
       <inkml:brushProperty name="color" value="#EE2924"/>
     </inkml:brush>
   </inkml:definitions>
-  <inkml:trace contextRef="#ctx0" brushRef="#br0">1 1 24575,'221'19'0,"2"0"0,-2 0 0,-9-5 0,23 1 0,22-1 0,13 1 0,10 4 0,7 0 0,3 1-894,-67 1 0,8 0 1,4 2-1,2 2 0,8 0 1,2 3-1,3-4 0,6 3 1,1-1-1,1-2 0,5 0 787,-23-6 1,5 1-1,2-1 1,4-1 0,2 0-1,3 0 1,2-1-1,3 1 1,1 0 0,1 2-1,3 0 1,0 0-1,1 3 1,4 1-21,-26 1 0,2-2 0,5 1 1,4 2-1,0 2 0,1-2 0,2 2 1,1 1-1,2 1 0,-3-2 1,0 2-1,-2 1 0,0-1 0,-3 0 1,1 2-1,-9-2 0,2 0 127,22 5 0,0-1 0,1 3 0,-3-3 0,-2 3 0,-3 0 0,1-1 0,-4 0 0,-1 1 0,-2-1 0,-1 3 0,-4-3 0,0 3 0,-3 0-38,12-1 0,2 3 1,1 0-1,-3-1 1,-2 1-1,-5 1 1,-1-1-1,-5 2 1,-6-2-1,-7 1 1,-6-1-1,-11 1 38,69 16 0,-4-1 0,-11 3 0,-11-1 0,-16-3 0,-21-4 0,-29-3 0,33 13 0,-33-7 0,-58-12 0,-55-19 0</inkml:trace>
+  <inkml:trace contextRef="#ctx0" brushRef="#br0">1 1 24575,'355'30'0,"4"1"0,-4-1 0,-14-7 0,37 1 0,35-2 0,21 3 0,15 5 0,13 0 0,3 4-894,-106-1 0,11 0 1,9 5-1,2 1 0,12 2 1,5 3-1,3-4 0,10 3 1,2-2-1,3-1 0,6-2 787,-36-10 1,7 3-1,5-1 1,6-3 0,1 0-1,7 1 1,3-3-1,4 3 1,2-1 0,2 3-1,4 0 1,1 1-1,2 5 1,5 0-21,-41 2 0,2-1 0,9-1 1,7 5-1,-1 3 0,2-5 0,3 5 1,3 0-1,2 3 0,-6-3 1,1 3-1,-1 0 0,-2-1 0,-5 1 1,1 3-1,-13-3 0,2 0 127,36 8 0,0-2 0,2 4 0,-5-4 0,-5 5 0,-2-1 0,-1-1 0,-4 2 0,-3-1 0,-3-1 0,-1 5 0,-7-4 0,-1 4 0,-3 0-38,18-2 0,4 6 1,1-2-1,-4 1 1,-4 0-1,-7 2 1,-3-2-1,-8 4 1,-9-5-1,-11 4 1,-10-3-1,-17 2 38,110 25 0,-7 0 0,-16 3 0,-19 0 0,-25-7 0,-34-3 0,-47-7 0,54 20 0,-54-9 0,-93-22 0,-89-28 0</inkml:trace>
 </inkml:ink>
 </file>
 
@@ -435,10 +429,10 @@
     <inkml:brush xml:id="br0">
       <inkml:brushProperty name="width" value="0.1" units="cm"/>
       <inkml:brushProperty name="height" value="0.1" units="cm"/>
-      <inkml:brushProperty name="color" value="#4C4C5E"/>
+      <inkml:brushProperty name="color" value="#E3E3E3"/>
     </inkml:brush>
   </inkml:definitions>
-  <inkml:trace contextRef="#ctx0" brushRef="#br0">0 475 24575,'43'23'0,"2"2"0,-12 2 0,-1-1 0,10 11 0,-17-14 0,6 6 0,-17-14 0,-2-3 0,-7-5 0,1-4 0,-1 1 0,-2-3 0,4 4 0,0 0 0,5 2 0,2 1 0,3 4 0,5 2 0,3 4 0,-7-3 0,3 2 0,-11-7 0,3-1 0,-5-1 0,-1-1 0,0-2 0,0-2 0,-2-1 0,2-7 0,-4 0 0,2-3 0,-1-8 0,4-5 0,8-10 0,12-14 0,13-18 0,9-16 0,10-17 0,-8 3 0,-4 4 0,-8 17 0,-11 11 0,-3 9 0,-7 13 0,-4 7 0,-5 10 0,-1 8 0,-5 8 0,-3 4 0,-1 4 0</inkml:trace>
+  <inkml:trace contextRef="#ctx0" brushRef="#br0">0 713 24575,'65'35'0,"2"2"0,-17 4 0,-2-2 0,15 16 0,-26-20 0,10 9 0,-26-22 0,-3-4 0,-10-7 0,1-7 0,-2 2 0,-2-4 0,5 5 0,1 1 0,7 2 0,3 2 0,4 6 0,8 3 0,5 6 0,-11-4 0,4 2 0,-16-10 0,5-1 0,-8-2 0,-2-2 0,1-2 0,0-4 0,-4-1 0,4-10 0,-7-1 0,4-4 0,-2-12 0,6-7 0,12-16 0,18-20 0,19-28 0,14-24 0,15-25 0,-11 4 0,-7 7 0,-12 25 0,-17 16 0,-4 14 0,-10 19 0,-7 11 0,-7 15 0,-1 12 0,-8 12 0,-5 6 0,-1 6 0</inkml:trace>
 </inkml:ink>
 </file>
 
@@ -463,10 +457,10 @@
     <inkml:brush xml:id="br0">
       <inkml:brushProperty name="width" value="0.1" units="cm"/>
       <inkml:brushProperty name="height" value="0.1" units="cm"/>
-      <inkml:brushProperty name="color" value="#4C4C5E"/>
+      <inkml:brushProperty name="color" value="#E3E3E3"/>
     </inkml:brush>
   </inkml:definitions>
-  <inkml:trace contextRef="#ctx0" brushRef="#br0">0 0 24575,'51'81'0,"1"1"0,5 14 0,7 12 0,-8-10 0,6 12 0,3 4 0,-3-3-2828,7 18 1,-1-3 0,3 7 2827,-3-7 0,5 8 0,-2-1 0,-5-5 0,-1 2 0,-3-6 0,-1-1-66,-5-9 1,-2-2-1,-1-2 66,-9-17 0,-2-3 0,0-1 342,22 44 1,-5-6-343,-17-33 0,-1-7-71,-6-6 1,-2-4 70,11 38 0,-20-45 3784,-3-5-3784,-9-18 2537,-6-11-2537,-1-2 1583,-2-9-1583,0-6 231,-2-4-231,1-4 0,-2-6 0,0-5 0,0-8 0,-2 2 0,2-6 0,-1 7 0,-1 2 0,2 2 0</inkml:trace>
+  <inkml:trace contextRef="#ctx0" brushRef="#br0">0 0 24575,'77'122'0,"1"1"0,7 21 0,11 18 0,-12-15 0,9 18 0,5 6 0,-5-5-2828,10 28 1,-1-5 0,5 11 2827,-5-11 0,7 12 0,-2-2 0,-8-7 0,-1 3 0,-5-8 0,-2-3-66,-7-13 1,-3-3-1,-1-3 66,-14-25 0,-3-5 0,0-2 342,33 67 1,-8-9-343,-25-50 0,-1-11-71,-10-8 1,-2-7 70,16 58 0,-30-68 3784,-5-8-3784,-13-26 2537,-9-17-2537,-1-3 1583,-4-14-1583,1-8 231,-4-7-231,2-5 0,-3-10 0,0-7 0,0-12 0,-3 3 0,3-9 0,-1 11 0,-2 2 0,3 4 0</inkml:trace>
 </inkml:ink>
 </file>
 
@@ -491,10 +485,38 @@
     <inkml:brush xml:id="br0">
       <inkml:brushProperty name="width" value="0.1" units="cm"/>
       <inkml:brushProperty name="height" value="0.1" units="cm"/>
-      <inkml:brushProperty name="color" value="#4C4C5E"/>
+      <inkml:brushProperty name="color" value="#E3E3E3"/>
     </inkml:brush>
   </inkml:definitions>
-  <inkml:trace contextRef="#ctx0" brushRef="#br0">0 149 24575,'38'29'0,"6"6"0,30 30 0,-15-15 0,33 38 0,-33-31 0,-2 1 0,-14-12 0,-16-18 0,-8-4 0,-5-9 0,-5-7 0,-1-3 0,-4-1 0,1 1 0,-1-4 0,-1-8 0,-1-4 0,-2-11 0,1-35 0,7 0 0,4-33 0,14-2 0,-7 27 0,5-10 0,-8 35 0,-3 3 0,-4 10 0,-1 7 0,-4 6 0,-2 5 0,1 5 0,1 1 0,-1 2 0,2-2 0,-4-2 0,3 1 0,-1 1 0,-2-3 0,1 1 0,-2-1 0,0 2 0</inkml:trace>
+  <inkml:trace contextRef="#ctx0" brushRef="#br0">0 224 24575,'57'44'0,"9"8"0,45 46 0,-22-23 0,49 57 0,-49-46 0,-4 1 0,-20-18 0,-25-27 0,-11-6 0,-8-13 0,-8-11 0,-1-5 0,-6-1 0,2 2 0,-2-7 0,-2-11 0,-1-7 0,-3-16 0,2-52 0,10-1 0,6-49 0,21-4 0,-11 42 0,8-16 0,-12 53 0,-4 4 0,-7 16 0,-1 10 0,-6 9 0,-3 7 0,2 8 0,1 2 0,-2 2 0,4-2 0,-7-4 0,5 2 0,-1 2 0,-4-5 0,2 1 0,-3-1 0,0 3 0</inkml:trace>
+</inkml:ink>
+</file>
+
+<file path=ppt/ink/ink13.xml><?xml version="1.0" encoding="utf-8"?>
+<inkml:ink xmlns:inkml="http://www.w3.org/2003/InkML">
+  <inkml:definitions>
+    <inkml:context xml:id="ctx0">
+      <inkml:inkSource xml:id="inkSrc0">
+        <inkml:traceFormat>
+          <inkml:channel name="X" type="integer" min="-2.14748E9" max="2.14748E9" units="cm"/>
+          <inkml:channel name="Y" type="integer" min="-2.14748E9" max="2.14748E9" units="cm"/>
+        </inkml:traceFormat>
+        <inkml:channelProperties>
+          <inkml:channelProperty channel="X" name="resolution" value="1000" units="1/cm"/>
+          <inkml:channelProperty channel="Y" name="resolution" value="1000" units="1/cm"/>
+        </inkml:channelProperties>
+      </inkml:inkSource>
+      <inkml:timestamp xml:id="ts0" timeString="2026-02-25T19:16:25.248"/>
+    </inkml:context>
+    <inkml:brush xml:id="br0">
+      <inkml:brushProperty name="width" value="0.56444" units="cm"/>
+      <inkml:brushProperty name="height" value="1.12889" units="cm"/>
+      <inkml:brushProperty name="color" value="#ED2A24"/>
+      <inkml:brushProperty name="tip" value="rectangle"/>
+      <inkml:brushProperty name="rasterOp" value="maskPen"/>
+    </inkml:brush>
+  </inkml:definitions>
+  <inkml:trace contextRef="#ctx0" brushRef="#br0">1 167,'158'-4,"-10"1,22 1,-14 2,13 0,7 0,-25 0,5 0,8 0,11 0,-11 0,10 0,7 0,7 0,5 0,1 0,-26 0,1 0,2 0,5 0,2 0,8 0,11 0,8 0,-35 0,10 0,9 0,4 0,7 0,5 0,2 0,2 0,-1 0,1 0,-5 0,0 0,-9 0,-3 0,1 0,-1 0,-4 0,-2 0,-3 0,1 0,-1 0,2 0,1 0,-2 0,8 0,2 0,-8 0,6 0,6 0,-2 0,7 0,1 0,-3 0,-2 0,-1 0,-3 0,-4 0,-8 0,-5 0,-11 0,46 0,-12 0,-8 0,-5 0,-4 0,-7 0,2 0,-2 0,33 0,-6 0,-3 0,-3 0,-6 0,-5 0,2 0,-3 0,-6 0,-7 0,-5 0,6 0,-6 0,-6 0,-14 0,8 0,-12 0,-10 0,11 0,-10 0,-25 0,-13 0,29 0,-71 0,-31 0</inkml:trace>
 </inkml:ink>
 </file>
 
@@ -517,12 +539,12 @@
       <inkml:timestamp xml:id="ts0" timeString="2026-02-25T14:22:37.182"/>
     </inkml:context>
     <inkml:brush xml:id="br0">
-      <inkml:brushProperty name="width" value="0.1" units="cm"/>
-      <inkml:brushProperty name="height" value="0.1" units="cm"/>
+      <inkml:brushProperty name="width" value="0.28222" units="cm"/>
+      <inkml:brushProperty name="height" value="0.28222" units="cm"/>
       <inkml:brushProperty name="color" value="#EE2924"/>
     </inkml:brush>
   </inkml:definitions>
-  <inkml:trace contextRef="#ctx0" brushRef="#br0">1 1971 24575,'185'-38'0,"2"2"0,1-1 0,16 6 0,15 3 0,12-1 0,9 0 0,-45 1 0,4 2 0,8-3 0,8 0 0,11-1 0,11 3-1093,-13 6 1,13 0 0,10 0 0,10 2-1,3 0 1,7-1 0,1-1 0,0 0-1,-4-4 957,-35 2 1,0-2-1,2-2 1,-4 0-1,7 0 1,-2-2 0,6 1-1,1-1 1,6 2-1,7-3 1,7 3-9,-24 5 0,5-1 1,10-1-1,1 2 0,8 1 1,1-3-1,2 2 1,3-1-1,-1 0 0,1 0 1,-1 0-1,-3 0 0,-2 0 1,-3 0-1,-6-2 144,-3 0 0,-3 0 0,-4-2 0,0 0 0,-2-1 0,-3-1 0,2 2 0,-1 0 0,1 0 0,1 0 0,2 1 0,0 4 0,5-4 0,1 6-44,5-1 1,8 2 0,3 2 0,6-1 0,2 3 0,1-2 0,-1 3 0,-1-1-1,-1 1 1,-7 1 0,-5-1 0,-6 1 0,-8-2 0,-12 1 0,-9 1 43,62-8 0,-13 0 0,-13 1 0,-8-1 0,-9 2 0,-5 2 0,-5 5 0,1 2 0,49 3 0,12 7 0,-3 2 0,-30 3 0,-48 0 0,-70-2 0,-49-1 0,-92 6 0</inkml:trace>
+  <inkml:trace contextRef="#ctx0" brushRef="#br0">1 3167 24575,'298'-60'0,"1"2"0,4-2 0,25 10 0,25 6 0,17-3 0,16 0 0,-73 3 0,8 2 0,11-5 0,13 0 0,18 0 0,18 3-1093,-21 11 1,22-2 0,14 2 0,17 2-1,6 1 1,9-3 0,3-1 0,0 1-1,-7-8 957,-55 5 1,-2-5-1,4-1 1,-5-2-1,9 0 1,-2-3 0,10 3-1,1-3 1,10 3-1,11-3 1,11 3-9,-38 8 0,8 0 1,15-2-1,2 1 0,13 4 1,3-5-1,2 2 1,5 0-1,-2-2 0,2 1 1,-2 1-1,-4-2 0,-4 2 1,-4-2-1,-11-1 144,-4-2 0,-5 1 0,-6-4 0,0 1 0,-4-1 0,-4-3 0,4 3 0,-4 1 0,3-1 0,2 1 0,2 2 0,1 4 0,7-4 0,3 8-44,8 0 1,12 3 0,5 2 0,10 0 0,3 3 0,2-2 0,-2 4 0,-3-1-1,0 1 1,-12 2 0,-6-1 0,-12 2 0,-13-4 0,-17 1 0,-16 2 43,99-13 0,-20 1 0,-21 0 0,-12-1 0,-15 4 0,-10 3 0,-5 7 0,-1 4 0,81 5 0,18 11 0,-5 3 0,-48 5 0,-75 1 0,-114-5 0,-81-1 0,-146 11 0</inkml:trace>
 </inkml:ink>
 </file>
 
@@ -547,10 +569,10 @@
     <inkml:brush xml:id="br0">
       <inkml:brushProperty name="width" value="0.1" units="cm"/>
       <inkml:brushProperty name="height" value="0.1" units="cm"/>
-      <inkml:brushProperty name="color" value="#4C4C5E"/>
+      <inkml:brushProperty name="color" value="#E3E3E3"/>
     </inkml:brush>
   </inkml:definitions>
-  <inkml:trace contextRef="#ctx0" brushRef="#br0">0 1 24575,'6'58'0,"-2"52"0,-4 69 0,0 37 0,0-82 0,0 5 0,4 2 0,6 1-1053,7 16 1,5 4 1052,4-4 0,9-2 0,24 12 0,10-2 0,0-14 0,4-4 0,5-13 0,7-4 0,23 25 0,10-4 0,-3-23 0,13-1 0,-2-22 0,11 1 0,-1-4-834,30 18 0,3-7 834,30-3 0,-2-9 0,-52-30 0,1-3 0,13 6 0,-1-2 52,-16-13 0,-5 0-52,-1-4 0,-8-4 0,75 31 0,-48-27 937,-29-4-937,-39-18 1837,-32-11-1837,-31-7 895,-12-9-895,-8 3 0,-3-6 0,1 0 0</inkml:trace>
+  <inkml:trace contextRef="#ctx0" brushRef="#br0">0 1 24575,'9'87'0,"-3"78"0,-6 104 0,0 55 0,0-123 0,0 8 0,6 2 0,9 2-1053,10 24 1,8 7 1052,6-7 0,14-3 0,35 18 0,16-3 0,-1-21 0,7-6 0,7-19 0,10-7 0,35 39 0,15-7 0,-4-35 0,19-1 0,-3-33 0,16 2 0,-1-6-834,45 26 0,5-10 834,44-4 0,-2-14 0,-79-45 0,2-4 0,20 8 0,-2-2 52,-24-20 0,-8 0-52,-1-6 0,-12-6 0,113 46 0,-73-40 937,-43-6-937,-58-27 1837,-49-16-1837,-46-11 895,-18-14-895,-12 5 0,-4-9 0,1 0 0</inkml:trace>
 </inkml:ink>
 </file>
 
@@ -575,10 +597,10 @@
     <inkml:brush xml:id="br0">
       <inkml:brushProperty name="width" value="0.1" units="cm"/>
       <inkml:brushProperty name="height" value="0.1" units="cm"/>
-      <inkml:brushProperty name="color" value="#4C4C5E"/>
+      <inkml:brushProperty name="color" value="#E3E3E3"/>
     </inkml:brush>
   </inkml:definitions>
-  <inkml:trace contextRef="#ctx0" brushRef="#br0">1 833 24575,'53'0'0,"9"0"0,29 0 0,28 0 0,31 0 0,-48 0 0,-2 0 0,33 0 0,36 0 0,-94 0 0,9 0 0,-40 0 0,-12-3 0,-29-2 0,-3 0 0,-3 0 0,-2 1 0,4-2 0,-4 0 0,2 1 0,-3 0 0,-1-1 0,1 0 0,-4-3 0,-2-2 0,-3-5 0,-15-19 0,-12-16 0,-19-20 0,-29-29 0,15 24 0,-18-18 0,-21-10 0,51 43 0,-29-23 0,68 63 0,2 5 0,10 7 0,5 3 0,4 2 0,-2-1 0,2 1 0</inkml:trace>
+  <inkml:trace contextRef="#ctx0" brushRef="#br0">1 1250 24575,'80'0'0,"13"0"0,43 0 0,43 0 0,46 0 0,-72 0 0,-3 0 0,50 0 0,53 0 0,-140 0 0,13 0 0,-60 0 0,-18-4 0,-44-4 0,-4 1 0,-4-1 0,-4 2 0,7-3 0,-7 0 0,4 2 0,-5-1 0,-2-1 0,2 0 0,-6-4 0,-3-4 0,-4-7 0,-23-28 0,-18-25 0,-29-29 0,-43-44 0,23 35 0,-28-26 0,-31-15 0,76 65 0,-43-35 0,102 94 0,3 8 0,15 11 0,8 4 0,5 3 0,-2-2 0,2 2 0</inkml:trace>
 </inkml:ink>
 </file>
 
@@ -603,10 +625,10 @@
     <inkml:brush xml:id="br0">
       <inkml:brushProperty name="width" value="0.1" units="cm"/>
       <inkml:brushProperty name="height" value="0.1" units="cm"/>
-      <inkml:brushProperty name="color" value="#4C4C5E"/>
+      <inkml:brushProperty name="color" value="#E3E3E3"/>
     </inkml:brush>
   </inkml:definitions>
-  <inkml:trace contextRef="#ctx0" brushRef="#br0">1299 1 24575,'0'26'0,"0"24"0,0 34 0,0 18 0,0 24 0,-5 2 0,-3 16 0,-2 1-1758,-2 7 1,-1 1 0,-4 5 1757,3-26 0,-3 2 0,0 0 0,-3-7 0,-5 10 0,-4-9 0,-1 1-491,-4 0 1,-1-4 0,0 2 490,-4-5 0,-2 0 0,-1-2 0,-3 9 0,-1-2 0,1-5-548,-16 33 0,0-10 548,6-23 0,2-11-128,15-30 1,1-10 127,-19 29 3097,5-11-3097,14-31 2982,-1 2-2982,7-19 1601,8-8-1601,2-8 414,1 1-414,0-1 0,1-4 0,-1 6 0,10-13 0,-3 8 0,6-14 0,2 2 0,0-3 0,0-4 0,0-1 0,0-2 0,0 0 0,1-2 0,-1-1 0,2-4 0,-1 0 0,3 2 0,1 2 0,-2-2 0,2 0 0,0-1 0,0 2 0,0 1 0</inkml:trace>
+  <inkml:trace contextRef="#ctx0" brushRef="#br0">1950 1 24575,'0'39'0,"0"36"0,0 51 0,0 27 0,0 36 0,-7 3 0,-5 24 0,-3 2-1758,-3 10 1,-2 1 0,-5 8 1757,4-39 0,-5 3 0,1 0 0,-5-10 0,-8 14 0,-5-13 0,-2 2-491,-6-1 1,-2-5 0,1 2 490,-7-7 0,-3 0 0,-1-3 0,-4 14 0,-2-4 0,1-7-548,-23 50 0,-1-16 548,9-34 0,4-16-128,22-46 1,1-14 127,-28 43 3097,7-17-3097,22-46 2982,-2 3-2982,10-28 1601,13-13-1601,2-11 414,2 1-414,0-2 0,2-5 0,-2 8 0,15-19 0,-5 12 0,10-21 0,2 3 0,1-4 0,-1-6 0,1-2 0,-1-3 0,1 0 0,1-3 0,-2-2 0,4-6 0,-2 1 0,4 2 0,2 4 0,-3-4 0,3 1 0,0-2 0,0 3 0,0 1 0</inkml:trace>
 </inkml:ink>
 </file>
 
@@ -631,10 +653,10 @@
     <inkml:brush xml:id="br0">
       <inkml:brushProperty name="width" value="0.1" units="cm"/>
       <inkml:brushProperty name="height" value="0.1" units="cm"/>
-      <inkml:brushProperty name="color" value="#4C4C5E"/>
+      <inkml:brushProperty name="color" value="#E3E3E3"/>
     </inkml:brush>
   </inkml:definitions>
-  <inkml:trace contextRef="#ctx0" brushRef="#br0">45 1 24575,'0'30'0,"0"2"0,0 26 0,0-15 0,0 44 0,0-40 0,0 13 0,0-25 0,0-10 0,0-4 0,0-2 0,0-7 0,0 1 0,0-4 0,0-3 0,0 0 0,0-2 0,0-1 0,0 2 0,0-1 0,0 1 0,0-1 0,0 1 0,0-1 0,0-1 0,0 1 0,0 1 0,-1 1 0,-1 0 0,-1 0 0,2 0 0,-2 2 0,0 4 0,-2 13 0,1-1 0,-1 6 0,2-8 0,0-1 0,0-1 0,2-3 0,-2-4 0,1-3 0,1-4 0,-1-1 0,14-19 0,6 1 0,22-15 0,9 4 0,56-14 0,-28 10 0,27-9 0,-46 17 0,-4 0 0,-6 0 0,-5 3 0,-12 2 0,-8 6 0,-9 3 0,-5 2 0,-3 2 0,-2-1 0,1 2 0,4-2 0,3 0 0,5 0 0,-1-2 0,-1 2 0,-1 0 0,-2 1 0,-1-1 0,-2 1 0,-5 1 0,-2-4 0,-2 1 0</inkml:trace>
+  <inkml:trace contextRef="#ctx0" brushRef="#br0">68 1 24575,'0'45'0,"0"3"0,0 39 0,0-22 0,0 65 0,0-59 0,0 19 0,0-38 0,0-14 0,0-7 0,0-2 0,0-11 0,0 1 0,0-5 0,0-5 0,0 0 0,0-3 0,0-2 0,0 4 0,0-2 0,0 1 0,0-1 0,0 2 0,0-2 0,0-2 0,0 2 0,0 2 0,-2 1 0,-1 0 0,-1 0 0,2 0 0,-2 3 0,-1 6 0,-2 19 0,1-1 0,-2 9 0,4-12 0,-1-1 0,1-2 0,2-5 0,-2-5 0,1-5 0,1-6 0,-1-2 0,21-28 0,9 2 0,33-23 0,14 6 0,83-21 0,-41 15 0,40-14 0,-69 26 0,-6 0 0,-9 0 0,-7 5 0,-19 2 0,-11 10 0,-14 4 0,-8 3 0,-4 3 0,-3-2 0,2 4 0,5-4 0,5 1 0,8-1 0,-2-2 0,-2 2 0,-1 1 0,-3 1 0,-1-2 0,-4 2 0,-7 2 0,-3-7 0,-3 2 0</inkml:trace>
 </inkml:ink>
 </file>
 
@@ -659,10 +681,10 @@
     <inkml:brush xml:id="br0">
       <inkml:brushProperty name="width" value="0.1" units="cm"/>
       <inkml:brushProperty name="height" value="0.1" units="cm"/>
-      <inkml:brushProperty name="color" value="#4C4C5E"/>
+      <inkml:brushProperty name="color" value="#E3E3E3"/>
     </inkml:brush>
   </inkml:definitions>
-  <inkml:trace contextRef="#ctx0" brushRef="#br0">0 0 24575,'5'89'0,"-2"31"0,-3 5 0,0 8-460,0-33 0,0 5 460,0 20 0,0 16 0,0-3-1112,0-28 1,0-3 0,0 1 1111,0 3 0,0-2 0,0-1 0,0 39 0,0-15 940,0-1-940,0-29 0,0-37 0,0-16 399,0-25-399,0-24 2876,0-25-2876,0-5 39,0-11-39,0 7 0,0 11 0,0 3 0,0 11 0,0 3 0,0 3 0</inkml:trace>
+  <inkml:trace contextRef="#ctx0" brushRef="#br0">0 0 24575,'8'134'0,"-4"46"0,-4 7 0,0 13-460,0-50 0,0 7 460,0 31 0,0 23 0,0-4-1112,0-42 1,0-4 0,0 1 1111,0 5 0,0-4 0,0-1 0,0 59 0,0-23 940,0-2-940,0-43 0,0-55 0,0-25 399,0-37-399,0-36 2876,0-37-2876,0-8 39,0-17-39,0 11 0,0 17 0,0 4 0,0 16 0,0 5 0,0 5 0</inkml:trace>
 </inkml:ink>
 </file>
 
@@ -687,10 +709,10 @@
     <inkml:brush xml:id="br0">
       <inkml:brushProperty name="width" value="0.1" units="cm"/>
       <inkml:brushProperty name="height" value="0.1" units="cm"/>
-      <inkml:brushProperty name="color" value="#4C4C5E"/>
+      <inkml:brushProperty name="color" value="#E3E3E3"/>
     </inkml:brush>
   </inkml:definitions>
-  <inkml:trace contextRef="#ctx0" brushRef="#br0">1 0 24575,'5'18'0,"5"7"0,1-4 0,4 4 0,-3-5 0,-2 0 0,1-3 0,-2 0 0,-1-4 0,-2-3 0,-2-1 0,1 0 0,-2-1 0,0-3 0,1 1 0,-1 3 0,3 2 0,1 2 0,-1 0 0,1 2 0,-1-2 0,0-1 0,0-3 0,2 0 0,-4-2 0,2 1 0,-3-4 0,0 2 0,-1-1 0,1 0 0,-3 1 0,1-1 0,1 1 0,-1-2 0,3 2 0,-3-1 0,-1-1 0,3 0 0,-1 2 0,1 2 0,0-4 0,1 5 0,-4-3 0,3 1 0,-1 1 0,1-2 0,-2-2 0,2 2 0,-3 0 0,2-3 0,-1 1 0,1-1 0,1 0 0,-2 3 0,4 2 0,-4-4 0,2 3 0,-1-2 0,1 1 0,-2 1 0,1 1 0,1-1 0,-2-1 0,2-2 0,-1 2 0,1-3 0,0 0 0,2-3 0,-2 0 0,3 0 0,-2 0 0,1-1 0,2-5 0,1-2 0,2-2 0,4-2 0,1 0 0,3-1 0,0 0 0,2-1 0,1-3 0,3-3 0,2-2 0,4-4 0,-2 0 0,-1-2 0,3 2 0,15-20 0,-13 16 0,16-19 0,-23 26 0,5-5 0,-4 4 0,-4 5 0,-4 4 0,-6 5 0,-2 1 0,-3 3 0,-1 3 0,-1 0 0,-4 1 0,2-1 0</inkml:trace>
+  <inkml:trace contextRef="#ctx0" brushRef="#br0">1 0 24575,'8'27'0,"7"11"0,1-7 0,7 7 0,-5-8 0,-3 0 0,1-5 0,-2 1 0,-2-7 0,-3-4 0,-3-1 0,1-1 0,-2-1 0,-1-4 0,2 1 0,-1 4 0,4 4 0,1 2 0,-1 1 0,2 3 0,-2-4 0,0-1 0,0-4 0,3-1 0,-6-2 0,3 1 0,-5-6 0,1 3 0,-2-2 0,1 1 0,-4 1 0,2-2 0,1 2 0,-2-3 0,5 3 0,-4-1 0,-2-2 0,4 0 0,-1 3 0,2 3 0,-1-6 0,2 7 0,-6-4 0,5 2 0,-2 1 0,1-3 0,-2-3 0,2 3 0,-4 0 0,3-5 0,-1 2 0,1-1 0,1-1 0,-2 5 0,5 3 0,-5-6 0,2 5 0,-1-4 0,2 2 0,-4 2 0,2 1 0,2-2 0,-4-1 0,4-3 0,-2 3 0,1-4 0,1-1 0,2-4 0,-2 0 0,4 0 0,-3 0 0,1-1 0,4-8 0,1-3 0,3-3 0,6-3 0,2 0 0,4-2 0,0 1 0,3-2 0,1-5 0,5-4 0,3-3 0,6-6 0,-3 0 0,-1-3 0,4 3 0,23-30 0,-20 24 0,24-29 0,-35 40 0,8-8 0,-6 6 0,-6 7 0,-6 7 0,-9 7 0,-3 1 0,-4 5 0,-2 5 0,-2-1 0,-5 2 0,2-1 0</inkml:trace>
 </inkml:ink>
 </file>
 
@@ -715,10 +737,10 @@
     <inkml:brush xml:id="br0">
       <inkml:brushProperty name="width" value="0.1" units="cm"/>
       <inkml:brushProperty name="height" value="0.1" units="cm"/>
-      <inkml:brushProperty name="color" value="#4C4C5E"/>
+      <inkml:brushProperty name="color" value="#E3E3E3"/>
     </inkml:brush>
   </inkml:definitions>
-  <inkml:trace contextRef="#ctx0" brushRef="#br0">1 0 24575,'50'0'0,"60"11"0,-27 2 0,7 3-913,32 9 1,7 5 912,-28-3 0,2 5 0,9 4-1386,18 8 0,10 9 0,3 2 1,-7 1 1385,10 5 0,-6 1 0,9 6 0,-26-12 0,8 4 0,5 2 0,-4 1 0,-8-1 0,-2 5 0,-7-1 0,-4 1 0,3 1 0,-1-2 0,0 4 0,-1 0 0,-2-1 0,-6 1 0,-4 1 0,0 2 0,1 3 0,6 12 0,-1 2 0,0 5 0,-3 0 0,2 5 0,-3 3 0,-1 1 0,-2 1 0,-2-2 0,-3 0 0,-2 1 0,0 6 0,2 7 0,0 5 0,-5 0 0,-7-2 0,7 17 0,-8-4 0,-4-2-324,-11-12 0,-3 0 1,-1-2 323,-1 5 0,-1 0 0,-7-6-431,-4 7 0,-7-7 431,0-3 0,-3-4 0,-5-8 0,-5-6 420,10 53-420,-7-15 0,-7-22 3902,-11-34-3902,-7-26 3235,-4-21-3235,-3-9 1438,1-10-1438,-1-6 206,2-18-206,0-9 0,-2-43 0,0 36 0,0-18 0</inkml:trace>
+  <inkml:trace contextRef="#ctx0" brushRef="#br0">1 0 24575,'75'0'0,"90"17"0,-40 2 0,10 5-913,48 14 1,10 7 912,-41-5 0,2 8 0,14 6-1386,27 12 0,15 14 0,5 2 1,-11 2 1385,15 8 0,-9 1 0,13 9 0,-38-18 0,12 6 0,7 3 0,-6 1 0,-12-1 0,-3 8 0,-11-2 0,-5 1 0,4 2 0,-2-3 0,1 6 0,-2 0 0,-3-1 0,-9 1 0,-6 1 0,0 4 0,1 4 0,10 18 0,-2 3 0,0 7 0,-4 1 0,2 7 0,-4 4 0,-1 2 0,-4 2 0,-2-4 0,-5 1 0,-3 1 0,0 9 0,3 10 0,0 8 0,-8 0 0,-10-3 0,11 26 0,-13-7 0,-5-2-324,-17-19 0,-5 1 1,-1-4 323,-1 8 0,-2 0 0,-11-9-431,-5 11 0,-11-11 431,0-5 0,-5-5 0,-7-13 0,-7-8 420,14 79-420,-10-23 0,-10-32 3902,-17-52-3902,-11-38 3235,-5-32-3235,-5-14 1438,1-14-1438,-1-9 206,4-28-206,-1-13 0,-3-65 0,0 55 0,0-28 0</inkml:trace>
 </inkml:ink>
 </file>
 
@@ -7651,6 +7673,12 @@
           <a:lstStyle/>
           <a:p>
             <a:r>
+              <a:rPr>
+                <a:solidFill>
+                  <a:srgbClr val="F7F9FF"/>
+                </a:solidFill>
+                <a:latin typeface="Segoe UI Semibold"/>
+              </a:rPr>
               <a:t>Treasure Hunting in Azure with KQL as Your Map</a:t>
             </a:r>
           </a:p>
@@ -7666,17 +7694,18 @@
             <p:ph type="body" sz="quarter" idx="15"/>
           </p:nvPr>
         </p:nvSpPr>
-        <p:spPr>
-          <a:xfrm>
-            <a:off x="1388942" y="4868337"/>
-            <a:ext cx="9799638" cy="1358427"/>
-          </a:xfrm>
-        </p:spPr>
+        <p:spPr/>
         <p:txBody>
           <a:bodyPr/>
           <a:lstStyle/>
           <a:p>
             <a:r>
+              <a:rPr sz="1700">
+                <a:solidFill>
+                  <a:srgbClr val="B8C4DC"/>
+                </a:solidFill>
+                <a:latin typeface="Segoe UI"/>
+              </a:rPr>
               <a:t>Kusto Query Language (KQL) combined with Azure Resource Graph provides a fast, powerful way to explore, analyze, and gain insights across your cloud environment.</a:t>
             </a:r>
           </a:p>
@@ -7698,6 +7727,12 @@
           <a:lstStyle/>
           <a:p>
             <a:r>
+              <a:rPr>
+                <a:solidFill>
+                  <a:srgbClr val="F7F9FF"/>
+                </a:solidFill>
+                <a:latin typeface="Segoe UI Semibold"/>
+              </a:rPr>
               <a:t>Emanuel Palm</a:t>
             </a:r>
           </a:p>
@@ -7719,26 +7754,23 @@
           <a:lstStyle/>
           <a:p>
             <a:r>
-              <a:rPr dirty="0"/>
-              <a:t>Cloud Specialist </a:t>
-            </a:r>
-            <a:r>
-              <a:rPr lang="sv-SE" dirty="0"/>
-              <a:t>&amp; Microsoft MVP </a:t>
-            </a:r>
-            <a:r>
-              <a:rPr dirty="0"/>
-              <a:t>@ Unwonted</a:t>
+              <a:rPr>
+                <a:solidFill>
+                  <a:srgbClr val="B8C4DC"/>
+                </a:solidFill>
+                <a:latin typeface="Segoe UI"/>
+              </a:rPr>
+              <a:t>Cloud Specialist &amp; Microsoft MVP @ Unwonted</a:t>
             </a:r>
           </a:p>
         </p:txBody>
       </p:sp>
       <p:pic>
         <p:nvPicPr>
-          <p:cNvPr id="3" name="Picture Placeholder 2">
+          <p:cNvPr id="13" name="Picture Placeholder 12">
             <a:extLst>
               <a:ext uri="{FF2B5EF4-FFF2-40B4-BE49-F238E27FC236}">
-                <a16:creationId xmlns:a16="http://schemas.microsoft.com/office/drawing/2014/main" id="{A51F6C49-5D01-A1B8-427C-D7F286278A56}"/>
+                <a16:creationId xmlns:a16="http://schemas.microsoft.com/office/drawing/2014/main" id="{361FA97F-EE2A-8548-B0FA-E232B9915430}"/>
               </a:ext>
             </a:extLst>
           </p:cNvPr>
@@ -7751,20 +7783,26 @@
         </p:nvPicPr>
         <p:blipFill>
           <a:blip r:embed="rId2"/>
-          <a:srcRect t="745" b="745"/>
+          <a:srcRect l="20" r="20"/>
           <a:stretch>
             <a:fillRect/>
           </a:stretch>
         </p:blipFill>
         <p:spPr>
-          <a:prstGeom prst="ellipse">
+          <a:prstGeom prst="rect">
             <a:avLst/>
           </a:prstGeom>
         </p:spPr>
       </p:pic>
       <p:sp>
         <p:nvSpPr>
-          <p:cNvPr id="10" name="Rounded Rectangle 9"/>
+          <p:cNvPr id="2" name="Rounded Rectangle 1">
+            <a:extLst>
+              <a:ext uri="{FF2B5EF4-FFF2-40B4-BE49-F238E27FC236}">
+                <a16:creationId xmlns:a16="http://schemas.microsoft.com/office/drawing/2014/main" id="{3C4690BC-0726-219F-251F-BE783DF80408}"/>
+              </a:ext>
+            </a:extLst>
+          </p:cNvPr>
           <p:cNvSpPr/>
           <p:nvPr/>
         </p:nvSpPr>
@@ -7822,7 +7860,13 @@
       </p:sp>
       <p:sp>
         <p:nvSpPr>
-          <p:cNvPr id="11" name="TextBox 10"/>
+          <p:cNvPr id="3" name="TextBox 2">
+            <a:extLst>
+              <a:ext uri="{FF2B5EF4-FFF2-40B4-BE49-F238E27FC236}">
+                <a16:creationId xmlns:a16="http://schemas.microsoft.com/office/drawing/2014/main" id="{6A3A5774-A9C6-232C-7D84-B00C009DDF70}"/>
+              </a:ext>
+            </a:extLst>
+          </p:cNvPr>
           <p:cNvSpPr txBox="1"/>
           <p:nvPr/>
         </p:nvSpPr>
@@ -7892,7 +7936,7 @@
           <p:cNvPr id="4" name="Text Placeholder 3">
             <a:extLst>
               <a:ext uri="{FF2B5EF4-FFF2-40B4-BE49-F238E27FC236}">
-                <a16:creationId xmlns:a16="http://schemas.microsoft.com/office/drawing/2014/main" id="{CF7FEE12-8347-5D39-99D9-D35877CE5234}"/>
+                <a16:creationId xmlns:a16="http://schemas.microsoft.com/office/drawing/2014/main" id="{3A2BFC87-617F-41C4-21AA-42F9877EBF13}"/>
               </a:ext>
             </a:extLst>
           </p:cNvPr>
@@ -8075,7 +8119,7 @@
           <p:cNvPr id="12" name="Text Placeholder 2">
             <a:extLst>
               <a:ext uri="{FF2B5EF4-FFF2-40B4-BE49-F238E27FC236}">
-                <a16:creationId xmlns:a16="http://schemas.microsoft.com/office/drawing/2014/main" id="{286C4B09-27B9-FC65-D9A6-C77EB4C8F2CF}"/>
+                <a16:creationId xmlns:a16="http://schemas.microsoft.com/office/drawing/2014/main" id="{B05D79E5-A5B3-563A-FEF5-B505B7C4D762}"/>
               </a:ext>
             </a:extLst>
           </p:cNvPr>
@@ -8254,6 +8298,378 @@
 </file>
 
 <file path=ppt/slides/slide10.xml><?xml version="1.0" encoding="utf-8"?>
+<p:sld xmlns:a="http://schemas.openxmlformats.org/drawingml/2006/main" xmlns:r="http://schemas.openxmlformats.org/officeDocument/2006/relationships" xmlns:p="http://schemas.openxmlformats.org/presentationml/2006/main">
+  <p:cSld>
+    <p:spTree>
+      <p:nvGrpSpPr>
+        <p:cNvPr id="1" name=""/>
+        <p:cNvGrpSpPr/>
+        <p:nvPr/>
+      </p:nvGrpSpPr>
+      <p:grpSpPr>
+        <a:xfrm>
+          <a:off x="0" y="0"/>
+          <a:ext cx="0" cy="0"/>
+          <a:chOff x="0" y="0"/>
+          <a:chExt cx="0" cy="0"/>
+        </a:xfrm>
+      </p:grpSpPr>
+      <p:sp>
+        <p:nvSpPr>
+          <p:cNvPr id="9000" name="Title 1"/>
+          <p:cNvSpPr>
+            <a:spLocks noGrp="1"/>
+          </p:cNvSpPr>
+          <p:nvPr>
+            <p:ph type="title"/>
+          </p:nvPr>
+        </p:nvSpPr>
+        <p:spPr/>
+        <p:txBody>
+          <a:bodyPr/>
+          <a:lstStyle/>
+          <a:p>
+            <a:r>
+              <a:rPr>
+                <a:solidFill>
+                  <a:srgbClr val="F7F9FF"/>
+                </a:solidFill>
+                <a:latin typeface="Segoe UI Semibold"/>
+              </a:rPr>
+              <a:t>boosted Azure Resource Graph Explorer</a:t>
+            </a:r>
+          </a:p>
+        </p:txBody>
+      </p:sp>
+      <p:pic>
+        <p:nvPicPr>
+          <p:cNvPr id="16" name="Picture 4" descr="This Is Brilliant But I Like This Meme Generator - Piñata Farms - The best  meme generator and meme maker for video &amp; image memes">
+            <a:extLst>
+              <a:ext uri="{FF2B5EF4-FFF2-40B4-BE49-F238E27FC236}">
+                <a16:creationId xmlns:a16="http://schemas.microsoft.com/office/drawing/2014/main" id="{6A31C904-A99E-D34D-E70B-4C7C4807118A}"/>
+              </a:ext>
+            </a:extLst>
+          </p:cNvPr>
+          <p:cNvPicPr>
+            <a:picLocks noChangeAspect="1" noChangeArrowheads="1"/>
+          </p:cNvPicPr>
+          <p:nvPr/>
+        </p:nvPicPr>
+        <p:blipFill>
+          <a:blip r:embed="rId2">
+            <a:extLst>
+              <a:ext uri="{28A0092B-C50C-407E-A947-70E740481C1C}">
+                <a14:useLocalDpi xmlns:a14="http://schemas.microsoft.com/office/drawing/2010/main" val="0"/>
+              </a:ext>
+            </a:extLst>
+          </a:blip>
+          <a:srcRect/>
+          <a:stretch>
+            <a:fillRect/>
+          </a:stretch>
+        </p:blipFill>
+        <p:spPr bwMode="auto">
+          <a:xfrm>
+            <a:off x="5923676" y="2300000"/>
+            <a:ext cx="6440647" cy="6650000"/>
+          </a:xfrm>
+          <a:prstGeom prst="rect">
+            <a:avLst/>
+          </a:prstGeom>
+          <a:noFill/>
+          <a:extLst>
+            <a:ext uri="{909E8E84-426E-40DD-AFC4-6F175D3DCCD1}">
+              <a14:hiddenFill xmlns:a14="http://schemas.microsoft.com/office/drawing/2010/main">
+                <a:solidFill>
+                  <a:srgbClr val="FFFFFF"/>
+                </a:solidFill>
+              </a14:hiddenFill>
+            </a:ext>
+          </a:extLst>
+        </p:spPr>
+      </p:pic>
+      <p:pic>
+        <p:nvPicPr>
+          <p:cNvPr id="19" name="Picture 18" descr="A blue ribbon with a black background&#10;&#10;AI-generated content may be incorrect.">
+            <a:extLst>
+              <a:ext uri="{FF2B5EF4-FFF2-40B4-BE49-F238E27FC236}">
+                <a16:creationId xmlns:a16="http://schemas.microsoft.com/office/drawing/2014/main" id="{CC9367BF-57A2-F5B6-9A60-BE8CF9921220}"/>
+              </a:ext>
+            </a:extLst>
+          </p:cNvPr>
+          <p:cNvPicPr>
+            <a:picLocks noChangeAspect="1"/>
+          </p:cNvPicPr>
+          <p:nvPr/>
+        </p:nvPicPr>
+        <p:blipFill>
+          <a:blip r:embed="rId3"/>
+          <a:stretch>
+            <a:fillRect/>
+          </a:stretch>
+        </p:blipFill>
+        <p:spPr>
+          <a:xfrm>
+            <a:off x="6827974" y="3450528"/>
+            <a:ext cx="1483201" cy="1483201"/>
+          </a:xfrm>
+          <a:prstGeom prst="rect">
+            <a:avLst/>
+          </a:prstGeom>
+        </p:spPr>
+      </p:pic>
+      <p:pic>
+        <p:nvPicPr>
+          <p:cNvPr id="6" name="Picture 5">
+            <a:extLst>
+              <a:ext uri="{FF2B5EF4-FFF2-40B4-BE49-F238E27FC236}">
+                <a16:creationId xmlns:a16="http://schemas.microsoft.com/office/drawing/2014/main" id="{BDF83C9C-37D4-E7E7-F44B-75FCD17F3375}"/>
+              </a:ext>
+            </a:extLst>
+          </p:cNvPr>
+          <p:cNvPicPr>
+            <a:picLocks noChangeAspect="1"/>
+          </p:cNvPicPr>
+          <p:nvPr/>
+        </p:nvPicPr>
+        <p:blipFill>
+          <a:blip r:embed="rId4">
+            <a:extLst>
+              <a:ext uri="{28A0092B-C50C-407E-A947-70E740481C1C}">
+                <a14:useLocalDpi xmlns:a14="http://schemas.microsoft.com/office/drawing/2010/main" val="0"/>
+              </a:ext>
+            </a:extLst>
+          </a:blip>
+          <a:srcRect/>
+          <a:stretch/>
+        </p:blipFill>
+        <p:spPr>
+          <a:xfrm>
+            <a:off x="9215473" y="3769629"/>
+            <a:ext cx="1744869" cy="965398"/>
+          </a:xfrm>
+          <a:prstGeom prst="rect">
+            <a:avLst/>
+          </a:prstGeom>
+        </p:spPr>
+      </p:pic>
+      <p:pic>
+        <p:nvPicPr>
+          <p:cNvPr id="7" name="Picture 6" descr="A blue ribbon with a black background&#10;&#10;AI-generated content may be incorrect.">
+            <a:extLst>
+              <a:ext uri="{FF2B5EF4-FFF2-40B4-BE49-F238E27FC236}">
+                <a16:creationId xmlns:a16="http://schemas.microsoft.com/office/drawing/2014/main" id="{E094AAB9-C33C-F3C4-8ACB-075506385765}"/>
+              </a:ext>
+            </a:extLst>
+          </p:cNvPr>
+          <p:cNvPicPr>
+            <a:picLocks noChangeAspect="1"/>
+          </p:cNvPicPr>
+          <p:nvPr/>
+        </p:nvPicPr>
+        <p:blipFill>
+          <a:blip r:embed="rId3"/>
+          <a:stretch>
+            <a:fillRect/>
+          </a:stretch>
+        </p:blipFill>
+        <p:spPr>
+          <a:xfrm>
+            <a:off x="6747832" y="6621639"/>
+            <a:ext cx="1483201" cy="1483201"/>
+          </a:xfrm>
+          <a:prstGeom prst="rect">
+            <a:avLst/>
+          </a:prstGeom>
+        </p:spPr>
+      </p:pic>
+      <p:pic>
+        <p:nvPicPr>
+          <p:cNvPr id="8" name="Picture 7">
+            <a:extLst>
+              <a:ext uri="{FF2B5EF4-FFF2-40B4-BE49-F238E27FC236}">
+                <a16:creationId xmlns:a16="http://schemas.microsoft.com/office/drawing/2014/main" id="{10449811-F8E8-775D-039F-401BE5657426}"/>
+              </a:ext>
+            </a:extLst>
+          </p:cNvPr>
+          <p:cNvPicPr>
+            <a:picLocks noChangeAspect="1"/>
+          </p:cNvPicPr>
+          <p:nvPr/>
+        </p:nvPicPr>
+        <p:blipFill>
+          <a:blip r:embed="rId4">
+            <a:extLst>
+              <a:ext uri="{28A0092B-C50C-407E-A947-70E740481C1C}">
+                <a14:useLocalDpi xmlns:a14="http://schemas.microsoft.com/office/drawing/2010/main" val="0"/>
+              </a:ext>
+            </a:extLst>
+          </a:blip>
+          <a:srcRect/>
+          <a:stretch/>
+        </p:blipFill>
+        <p:spPr>
+          <a:xfrm>
+            <a:off x="9184532" y="7082320"/>
+            <a:ext cx="1744869" cy="965398"/>
+          </a:xfrm>
+          <a:prstGeom prst="rect">
+            <a:avLst/>
+          </a:prstGeom>
+        </p:spPr>
+      </p:pic>
+    </p:spTree>
+  </p:cSld>
+  <p:clrMapOvr>
+    <a:masterClrMapping/>
+  </p:clrMapOvr>
+  <mc:AlternateContent xmlns:mc="http://schemas.openxmlformats.org/markup-compatibility/2006" xmlns:p159="http://schemas.microsoft.com/office/powerpoint/2015/09/main">
+    <mc:Choice Requires="p159">
+      <p:transition spd="slow">
+        <p159:morph option="byObject"/>
+      </p:transition>
+    </mc:Choice>
+    <mc:Fallback xmlns="">
+      <p:transition spd="slow">
+        <p:fade/>
+      </p:transition>
+    </mc:Fallback>
+  </mc:AlternateContent>
+</p:sld>
+</file>
+
+<file path=ppt/slides/slide11.xml><?xml version="1.0" encoding="utf-8"?>
+<p:sld xmlns:a="http://schemas.openxmlformats.org/drawingml/2006/main" xmlns:r="http://schemas.openxmlformats.org/officeDocument/2006/relationships" xmlns:p="http://schemas.openxmlformats.org/presentationml/2006/main">
+  <p:cSld>
+    <p:spTree>
+      <p:nvGrpSpPr>
+        <p:cNvPr id="1" name=""/>
+        <p:cNvGrpSpPr/>
+        <p:nvPr/>
+      </p:nvGrpSpPr>
+      <p:grpSpPr>
+        <a:xfrm>
+          <a:off x="0" y="0"/>
+          <a:ext cx="0" cy="0"/>
+          <a:chOff x="0" y="0"/>
+          <a:chExt cx="0" cy="0"/>
+        </a:xfrm>
+      </p:grpSpPr>
+      <p:sp>
+        <p:nvSpPr>
+          <p:cNvPr id="9000" name="Title 1"/>
+          <p:cNvSpPr>
+            <a:spLocks noGrp="1"/>
+          </p:cNvSpPr>
+          <p:nvPr>
+            <p:ph type="title"/>
+          </p:nvPr>
+        </p:nvSpPr>
+        <p:spPr/>
+        <p:txBody>
+          <a:bodyPr/>
+          <a:lstStyle/>
+          <a:p>
+            <a:r>
+              <a:rPr>
+                <a:solidFill>
+                  <a:srgbClr val="F7F9FF"/>
+                </a:solidFill>
+                <a:latin typeface="Segoe UI Semibold"/>
+              </a:rPr>
+              <a:t>boosted Azure Resource Graph Explorer</a:t>
+            </a:r>
+          </a:p>
+        </p:txBody>
+      </p:sp>
+      <p:pic>
+        <p:nvPicPr>
+          <p:cNvPr id="6" name="Picture 2">
+            <a:extLst>
+              <a:ext uri="{FF2B5EF4-FFF2-40B4-BE49-F238E27FC236}">
+                <a16:creationId xmlns:a16="http://schemas.microsoft.com/office/drawing/2014/main" id="{F0570B4F-9C27-AE55-962E-15762E0BD4BB}"/>
+              </a:ext>
+            </a:extLst>
+          </p:cNvPr>
+          <p:cNvPicPr>
+            <a:picLocks noChangeAspect="1" noChangeArrowheads="1"/>
+          </p:cNvPicPr>
+          <p:nvPr/>
+        </p:nvPicPr>
+        <p:blipFill>
+          <a:blip r:embed="rId2">
+            <a:extLst>
+              <a:ext uri="{28A0092B-C50C-407E-A947-70E740481C1C}">
+                <a14:useLocalDpi xmlns:a14="http://schemas.microsoft.com/office/drawing/2010/main" val="0"/>
+              </a:ext>
+            </a:extLst>
+          </a:blip>
+          <a:srcRect/>
+          <a:stretch>
+            <a:fillRect/>
+          </a:stretch>
+        </p:blipFill>
+        <p:spPr bwMode="auto">
+          <a:xfrm>
+            <a:off x="6984468" y="2875248"/>
+            <a:ext cx="4536504" cy="4536504"/>
+          </a:xfrm>
+          <a:prstGeom prst="snip2DiagRect">
+            <a:avLst/>
+          </a:prstGeom>
+          <a:solidFill>
+            <a:srgbClr val="FFFFFF">
+              <a:shade val="85000"/>
+            </a:srgbClr>
+          </a:solidFill>
+          <a:ln w="133350" cap="sq">
+            <a:solidFill>
+              <a:srgbClr val="FFFFFF"/>
+            </a:solidFill>
+            <a:miter lim="800000"/>
+          </a:ln>
+          <a:effectLst>
+            <a:outerShdw blurRad="88900" algn="tl" rotWithShape="0">
+              <a:srgbClr val="000000">
+                <a:alpha val="45000"/>
+              </a:srgbClr>
+            </a:outerShdw>
+          </a:effectLst>
+          <a:scene3d>
+            <a:camera prst="orthographicFront"/>
+            <a:lightRig rig="twoPt" dir="t">
+              <a:rot lat="0" lon="0" rev="7200000"/>
+            </a:lightRig>
+          </a:scene3d>
+          <a:sp3d>
+            <a:bevelT w="25400" h="19050"/>
+            <a:contourClr>
+              <a:srgbClr val="FFFFFF"/>
+            </a:contourClr>
+          </a:sp3d>
+        </p:spPr>
+      </p:pic>
+    </p:spTree>
+  </p:cSld>
+  <p:clrMapOvr>
+    <a:masterClrMapping/>
+  </p:clrMapOvr>
+  <mc:AlternateContent xmlns:mc="http://schemas.openxmlformats.org/markup-compatibility/2006" xmlns:p159="http://schemas.microsoft.com/office/powerpoint/2015/09/main">
+    <mc:Choice Requires="p159">
+      <p:transition spd="slow">
+        <p159:morph option="byObject"/>
+      </p:transition>
+    </mc:Choice>
+    <mc:Fallback xmlns="">
+      <p:transition spd="slow">
+        <p:fade/>
+      </p:transition>
+    </mc:Fallback>
+  </mc:AlternateContent>
+</p:sld>
+</file>
+
+<file path=ppt/slides/slide12.xml><?xml version="1.0" encoding="utf-8"?>
 <p:sld xmlns:a="http://schemas.openxmlformats.org/drawingml/2006/main" xmlns:r="http://schemas.openxmlformats.org/officeDocument/2006/relationships" xmlns:p="http://schemas.openxmlformats.org/presentationml/2006/main">
   <p:cSld>
     <p:spTree>
@@ -8368,399 +8784,6 @@
 </p:sld>
 </file>
 
-<file path=ppt/slides/slide11.xml><?xml version="1.0" encoding="utf-8"?>
-<p:sld xmlns:a="http://schemas.openxmlformats.org/drawingml/2006/main" xmlns:r="http://schemas.openxmlformats.org/officeDocument/2006/relationships" xmlns:p="http://schemas.openxmlformats.org/presentationml/2006/main">
-  <p:cSld>
-    <p:spTree>
-      <p:nvGrpSpPr>
-        <p:cNvPr id="1" name=""/>
-        <p:cNvGrpSpPr/>
-        <p:nvPr/>
-      </p:nvGrpSpPr>
-      <p:grpSpPr>
-        <a:xfrm>
-          <a:off x="0" y="0"/>
-          <a:ext cx="0" cy="0"/>
-          <a:chOff x="0" y="0"/>
-          <a:chExt cx="0" cy="0"/>
-        </a:xfrm>
-      </p:grpSpPr>
-    </p:spTree>
-    <p:extLst>
-      <p:ext uri="{BB962C8B-B14F-4D97-AF65-F5344CB8AC3E}">
-        <p14:creationId xmlns:p14="http://schemas.microsoft.com/office/powerpoint/2010/main" val="1403250273"/>
-      </p:ext>
-    </p:extLst>
-  </p:cSld>
-  <p:clrMapOvr>
-    <a:masterClrMapping/>
-  </p:clrMapOvr>
-</p:sld>
-</file>
-
-<file path=ppt/slides/slide12.xml><?xml version="1.0" encoding="utf-8"?>
-<p:sld xmlns:a="http://schemas.openxmlformats.org/drawingml/2006/main" xmlns:r="http://schemas.openxmlformats.org/officeDocument/2006/relationships" xmlns:p="http://schemas.openxmlformats.org/presentationml/2006/main">
-  <p:cSld>
-    <p:spTree>
-      <p:nvGrpSpPr>
-        <p:cNvPr id="1" name=""/>
-        <p:cNvGrpSpPr/>
-        <p:nvPr/>
-      </p:nvGrpSpPr>
-      <p:grpSpPr>
-        <a:xfrm>
-          <a:off x="0" y="0"/>
-          <a:ext cx="0" cy="0"/>
-          <a:chOff x="0" y="0"/>
-          <a:chExt cx="0" cy="0"/>
-        </a:xfrm>
-      </p:grpSpPr>
-      <p:sp>
-        <p:nvSpPr>
-          <p:cNvPr id="9000" name="Text Placeholder 1"/>
-          <p:cNvSpPr>
-            <a:spLocks noGrp="1"/>
-          </p:cNvSpPr>
-          <p:nvPr>
-            <p:ph type="body" sz="quarter" idx="11"/>
-          </p:nvPr>
-        </p:nvSpPr>
-        <p:spPr/>
-        <p:txBody>
-          <a:bodyPr/>
-          <a:lstStyle/>
-          <a:p>
-            <a:r>
-              <a:t>Emanuel Palm</a:t>
-            </a:r>
-          </a:p>
-        </p:txBody>
-      </p:sp>
-      <p:sp>
-        <p:nvSpPr>
-          <p:cNvPr id="9001" name="Text Placeholder 2"/>
-          <p:cNvSpPr>
-            <a:spLocks noGrp="1"/>
-          </p:cNvSpPr>
-          <p:nvPr>
-            <p:ph type="body" sz="quarter" idx="13"/>
-          </p:nvPr>
-        </p:nvSpPr>
-        <p:spPr/>
-        <p:txBody>
-          <a:bodyPr/>
-          <a:lstStyle/>
-          <a:p>
-            <a:r>
-              <a:rPr lang="en-US" dirty="0"/>
-              <a:t>💙 Everything-as-Code</a:t>
-            </a:r>
-          </a:p>
-          <a:p>
-            <a:r>
-              <a:rPr lang="en-US" dirty="0"/>
-              <a:t>📦 Makes modules &amp; tools</a:t>
-            </a:r>
-          </a:p>
-          <a:p>
-            <a:r>
-              <a:rPr lang="en-US" dirty="0"/>
-              <a:t>📃 Fan of Open Source</a:t>
-            </a:r>
-          </a:p>
-        </p:txBody>
-      </p:sp>
-      <p:sp>
-        <p:nvSpPr>
-          <p:cNvPr id="9003" name="Text Placeholder 4"/>
-          <p:cNvSpPr>
-            <a:spLocks noGrp="1"/>
-          </p:cNvSpPr>
-          <p:nvPr>
-            <p:ph type="body" sz="quarter" idx="15"/>
-          </p:nvPr>
-        </p:nvSpPr>
-        <p:spPr/>
-        <p:txBody>
-          <a:bodyPr/>
-          <a:lstStyle/>
-          <a:p>
-            <a:r>
-              <a:t>Cloud Specialist @ Unwonted</a:t>
-            </a:r>
-          </a:p>
-        </p:txBody>
-      </p:sp>
-      <p:pic>
-        <p:nvPicPr>
-          <p:cNvPr id="9004" name="Picture Placeholder 5" descr="Emanuel Palm.png"/>
-          <p:cNvPicPr>
-            <a:picLocks noGrp="1" noChangeAspect="1"/>
-          </p:cNvPicPr>
-          <p:nvPr>
-            <p:ph type="pic" sz="quarter" idx="22"/>
-          </p:nvPr>
-        </p:nvPicPr>
-        <p:blipFill>
-          <a:blip r:embed="rId2"/>
-          <a:srcRect t="748" b="748"/>
-          <a:stretch>
-            <a:fillRect/>
-          </a:stretch>
-        </p:blipFill>
-        <p:spPr/>
-      </p:pic>
-      <p:grpSp>
-        <p:nvGrpSpPr>
-          <p:cNvPr id="12" name="Group 11">
-            <a:extLst>
-              <a:ext uri="{FF2B5EF4-FFF2-40B4-BE49-F238E27FC236}">
-                <a16:creationId xmlns:a16="http://schemas.microsoft.com/office/drawing/2014/main" id="{002EC189-BAB5-A069-D15C-6BCC0ED0CA3E}"/>
-              </a:ext>
-            </a:extLst>
-          </p:cNvPr>
-          <p:cNvGrpSpPr/>
-          <p:nvPr/>
-        </p:nvGrpSpPr>
-        <p:grpSpPr>
-          <a:xfrm>
-            <a:off x="1274902" y="7150000"/>
-            <a:ext cx="2200000" cy="511955"/>
-            <a:chOff x="9775935" y="6229126"/>
-            <a:chExt cx="1691379" cy="393596"/>
-          </a:xfrm>
-        </p:grpSpPr>
-        <p:pic>
-          <p:nvPicPr>
-            <p:cNvPr id="13" name="Graphic 56">
-              <a:extLst>
-                <a:ext uri="{FF2B5EF4-FFF2-40B4-BE49-F238E27FC236}">
-                  <a16:creationId xmlns:a16="http://schemas.microsoft.com/office/drawing/2014/main" id="{2A2DC6F3-9A88-72E8-D65C-2960114891CD}"/>
-                </a:ext>
-              </a:extLst>
-            </p:cNvPr>
-            <p:cNvPicPr>
-              <a:picLocks noChangeAspect="1"/>
-            </p:cNvPicPr>
-            <p:nvPr/>
-          </p:nvPicPr>
-          <p:blipFill>
-            <a:blip>
-              <a:extLst>
-                <a:ext uri="{96DAC541-7B7A-43D3-8B79-37D633B846F1}">
-                  <asvg:svgBlip xmlns:asvg="http://schemas.microsoft.com/office/drawing/2016/SVG/main" r:embed="rId3"/>
-                </a:ext>
-              </a:extLst>
-            </a:blip>
-            <a:srcRect/>
-            <a:stretch/>
-          </p:blipFill>
-          <p:spPr>
-            <a:xfrm>
-              <a:off x="10280577" y="6229126"/>
-              <a:ext cx="391207" cy="383223"/>
-            </a:xfrm>
-            <a:prstGeom prst="rect">
-              <a:avLst/>
-            </a:prstGeom>
-            <a:effectLst/>
-          </p:spPr>
-        </p:pic>
-        <p:pic>
-          <p:nvPicPr>
-            <p:cNvPr id="14" name="Graphic 56">
-              <a:extLst>
-                <a:ext uri="{FF2B5EF4-FFF2-40B4-BE49-F238E27FC236}">
-                  <a16:creationId xmlns:a16="http://schemas.microsoft.com/office/drawing/2014/main" id="{3F619B66-E565-FA04-2496-F7DC352A9BB8}"/>
-                </a:ext>
-              </a:extLst>
-            </p:cNvPr>
-            <p:cNvPicPr>
-              <a:picLocks noChangeAspect="1"/>
-            </p:cNvPicPr>
-            <p:nvPr/>
-          </p:nvPicPr>
-          <p:blipFill>
-            <a:blip r:embed="rId4"/>
-            <a:srcRect/>
-            <a:stretch/>
-          </p:blipFill>
-          <p:spPr>
-            <a:xfrm>
-              <a:off x="10696834" y="6263498"/>
-              <a:ext cx="320788" cy="327874"/>
-            </a:xfrm>
-            <a:prstGeom prst="rect">
-              <a:avLst/>
-            </a:prstGeom>
-            <a:effectLst/>
-          </p:spPr>
-        </p:pic>
-        <p:pic>
-          <p:nvPicPr>
-            <p:cNvPr id="15" name="Picture 14" descr="A black and white logo&#10;&#10;Description automatically generated">
-              <a:extLst>
-                <a:ext uri="{FF2B5EF4-FFF2-40B4-BE49-F238E27FC236}">
-                  <a16:creationId xmlns:a16="http://schemas.microsoft.com/office/drawing/2014/main" id="{0B82BB6F-ADC7-9511-BB28-0CDDA5B50003}"/>
-                </a:ext>
-              </a:extLst>
-            </p:cNvPr>
-            <p:cNvPicPr>
-              <a:picLocks noChangeAspect="1"/>
-            </p:cNvPicPr>
-            <p:nvPr/>
-          </p:nvPicPr>
-          <p:blipFill>
-            <a:blip r:embed="rId5"/>
-            <a:stretch>
-              <a:fillRect/>
-            </a:stretch>
-          </p:blipFill>
-          <p:spPr>
-            <a:xfrm>
-              <a:off x="11083688" y="6239096"/>
-              <a:ext cx="383626" cy="383626"/>
-            </a:xfrm>
-            <a:prstGeom prst="rect">
-              <a:avLst/>
-            </a:prstGeom>
-          </p:spPr>
-        </p:pic>
-        <p:pic>
-          <p:nvPicPr>
-            <p:cNvPr id="16" name="Picture 15" descr="A blue butterfly on a black background&#10;&#10;AI-generated content may be incorrect.">
-              <a:extLst>
-                <a:ext uri="{FF2B5EF4-FFF2-40B4-BE49-F238E27FC236}">
-                  <a16:creationId xmlns:a16="http://schemas.microsoft.com/office/drawing/2014/main" id="{0FCF77FA-238D-FBC0-366F-94F44C3B36E2}"/>
-                </a:ext>
-              </a:extLst>
-            </p:cNvPr>
-            <p:cNvPicPr>
-              <a:picLocks noChangeAspect="1"/>
-            </p:cNvPicPr>
-            <p:nvPr/>
-          </p:nvPicPr>
-          <p:blipFill>
-            <a:blip r:embed="rId6">
-              <a:biLevel thresh="25000"/>
-              <a:extLst>
-                <a:ext uri="{28A0092B-C50C-407E-A947-70E740481C1C}">
-                  <a14:useLocalDpi xmlns:a14="http://schemas.microsoft.com/office/drawing/2010/main" val="0"/>
-                </a:ext>
-              </a:extLst>
-            </a:blip>
-            <a:stretch>
-              <a:fillRect/>
-            </a:stretch>
-          </p:blipFill>
-          <p:spPr>
-            <a:xfrm>
-              <a:off x="9775935" y="6240132"/>
-              <a:ext cx="438576" cy="382589"/>
-            </a:xfrm>
-            <a:prstGeom prst="rect">
-              <a:avLst/>
-            </a:prstGeom>
-            <a:noFill/>
-            <a:ln>
-              <a:noFill/>
-            </a:ln>
-          </p:spPr>
-        </p:pic>
-      </p:grpSp>
-      <p:sp>
-        <p:nvSpPr>
-          <p:cNvPr id="9005" name="TextBox 9004"/>
-          <p:cNvSpPr txBox="1"/>
-          <p:nvPr/>
-        </p:nvSpPr>
-        <p:spPr>
-          <a:xfrm>
-            <a:off x="3474902" y="7150000"/>
-            <a:ext cx="2649764" cy="523220"/>
-          </a:xfrm>
-          <a:prstGeom prst="rect">
-            <a:avLst/>
-          </a:prstGeom>
-          <a:noFill/>
-        </p:spPr>
-        <p:txBody>
-          <a:bodyPr wrap="none" anchor="ctr">
-            <a:spAutoFit/>
-          </a:bodyPr>
-          <a:lstStyle/>
-          <a:p>
-            <a:r>
-              <a:rPr sz="2800" dirty="0">
-                <a:solidFill>
-                  <a:srgbClr val="E3E3E3"/>
-                </a:solidFill>
-                <a:latin typeface="Segoe UI"/>
-              </a:rPr>
-              <a:t>@</a:t>
-            </a:r>
-            <a:r>
-              <a:rPr sz="2800" dirty="0" err="1">
-                <a:solidFill>
-                  <a:srgbClr val="E3E3E3"/>
-                </a:solidFill>
-                <a:latin typeface="Segoe UI"/>
-              </a:rPr>
-              <a:t>PalmEmanuel</a:t>
-            </a:r>
-            <a:endParaRPr sz="2800" dirty="0">
-              <a:solidFill>
-                <a:srgbClr val="E3E3E3"/>
-              </a:solidFill>
-              <a:latin typeface="Segoe UI"/>
-            </a:endParaRPr>
-          </a:p>
-        </p:txBody>
-      </p:sp>
-      <p:pic>
-        <p:nvPicPr>
-          <p:cNvPr id="6" name="Picture 5" descr="A logo with a white cloud and a colorful circle&#10;&#10;Description automatically generated">
-            <a:extLst>
-              <a:ext uri="{FF2B5EF4-FFF2-40B4-BE49-F238E27FC236}">
-                <a16:creationId xmlns:a16="http://schemas.microsoft.com/office/drawing/2014/main" id="{2BED39B6-1FCD-A92F-1634-0E73D80CDF88}"/>
-              </a:ext>
-            </a:extLst>
-          </p:cNvPr>
-          <p:cNvPicPr>
-            <a:picLocks noChangeAspect="1"/>
-          </p:cNvPicPr>
-          <p:nvPr/>
-        </p:nvPicPr>
-        <p:blipFill>
-          <a:blip r:embed="rId7">
-            <a:extLst>
-              <a:ext uri="{28A0092B-C50C-407E-A947-70E740481C1C}">
-                <a14:useLocalDpi xmlns:a14="http://schemas.microsoft.com/office/drawing/2010/main" val="0"/>
-              </a:ext>
-            </a:extLst>
-          </a:blip>
-          <a:stretch>
-            <a:fillRect/>
-          </a:stretch>
-        </p:blipFill>
-        <p:spPr>
-          <a:xfrm>
-            <a:off x="15156703" y="6207943"/>
-            <a:ext cx="2400000" cy="2400000"/>
-          </a:xfrm>
-          <a:prstGeom prst="rect">
-            <a:avLst/>
-          </a:prstGeom>
-        </p:spPr>
-      </p:pic>
-    </p:spTree>
-  </p:cSld>
-  <p:clrMapOvr>
-    <a:masterClrMapping/>
-  </p:clrMapOvr>
-</p:sld>
-</file>
-
 <file path=ppt/slides/slide13.xml><?xml version="1.0" encoding="utf-8"?>
 <p:sld xmlns:a="http://schemas.openxmlformats.org/drawingml/2006/main" xmlns:r="http://schemas.openxmlformats.org/officeDocument/2006/relationships" xmlns:p="http://schemas.openxmlformats.org/presentationml/2006/main">
   <p:cSld>
@@ -8794,6 +8817,12 @@
           <a:lstStyle/>
           <a:p>
             <a:r>
+              <a:rPr>
+                <a:solidFill>
+                  <a:srgbClr val="F7F9FF"/>
+                </a:solidFill>
+                <a:latin typeface="Segoe UI Semibold"/>
+              </a:rPr>
               <a:t>Ways to use Azure Resource Graph</a:t>
             </a:r>
           </a:p>
@@ -9607,6 +9636,12 @@
           <a:lstStyle/>
           <a:p>
             <a:r>
+              <a:rPr dirty="0">
+                <a:solidFill>
+                  <a:srgbClr val="F7F9FF"/>
+                </a:solidFill>
+                <a:latin typeface="Segoe UI Semibold"/>
+              </a:rPr>
               <a:t>ARG KQL Syntax</a:t>
             </a:r>
           </a:p>
@@ -9628,7 +9663,7 @@
         </p:nvSpPr>
         <p:spPr>
           <a:xfrm>
-            <a:off x="3155745" y="1697157"/>
+            <a:off x="3155745" y="2039815"/>
             <a:ext cx="7551632" cy="4537294"/>
           </a:xfrm>
           <a:prstGeom prst="rect">
@@ -9669,7 +9704,7 @@
               <a:buChar char="§"/>
               <a:defRPr sz="4800" kern="1200">
                 <a:solidFill>
-                  <a:srgbClr val="60B1E3"/>
+                  <a:srgbClr val="62D5FF"/>
                 </a:solidFill>
                 <a:latin typeface="+mn-lt"/>
                 <a:ea typeface="+mn-ea"/>
@@ -9810,6 +9845,9 @@
             </a:pPr>
             <a:r>
               <a:rPr lang="en-US" sz="4200" dirty="0">
+                <a:solidFill>
+                  <a:srgbClr val="FFC000"/>
+                </a:solidFill>
                 <a:latin typeface="Cascadia Code" panose="020B0609020000020004" pitchFamily="34" charset="0"/>
                 <a:ea typeface="Cascadia Code" panose="020B0609020000020004" pitchFamily="34" charset="0"/>
                 <a:cs typeface="Cascadia Code" panose="020B0609020000020004" pitchFamily="34" charset="0"/>
@@ -9821,7 +9859,7 @@
             <a:r>
               <a:rPr lang="en-US" sz="3000" dirty="0">
                 <a:solidFill>
-                  <a:srgbClr val="60B1E3"/>
+                  <a:schemeClr val="bg2"/>
                 </a:solidFill>
                 <a:latin typeface="Cascadia Code" panose="020B0609020000020004" pitchFamily="34" charset="0"/>
                 <a:ea typeface="Cascadia Code" panose="020B0609020000020004" pitchFamily="34" charset="0"/>
@@ -9834,7 +9872,7 @@
             <a:r>
               <a:rPr lang="en-US" sz="3000" dirty="0" err="1">
                 <a:solidFill>
-                  <a:srgbClr val="60B1E3"/>
+                  <a:schemeClr val="bg2"/>
                 </a:solidFill>
                 <a:latin typeface="Cascadia Code" panose="020B0609020000020004" pitchFamily="34" charset="0"/>
                 <a:ea typeface="Cascadia Code" panose="020B0609020000020004" pitchFamily="34" charset="0"/>
@@ -9844,7 +9882,7 @@
             </a:r>
             <a:endParaRPr lang="en-US" sz="3000" dirty="0">
               <a:solidFill>
-                <a:srgbClr val="60B1E3"/>
+                <a:schemeClr val="bg2"/>
               </a:solidFill>
               <a:latin typeface="Cascadia Code" panose="020B0609020000020004" pitchFamily="34" charset="0"/>
               <a:ea typeface="Cascadia Code" panose="020B0609020000020004" pitchFamily="34" charset="0"/>
@@ -9855,7 +9893,7 @@
             <a:r>
               <a:rPr lang="en-US" sz="3000" dirty="0" err="1">
                 <a:solidFill>
-                  <a:srgbClr val="60B1E3"/>
+                  <a:schemeClr val="bg2"/>
                 </a:solidFill>
                 <a:latin typeface="Cascadia Code" panose="020B0609020000020004" pitchFamily="34" charset="0"/>
                 <a:ea typeface="Cascadia Code" panose="020B0609020000020004" pitchFamily="34" charset="0"/>
@@ -9865,7 +9903,7 @@
             </a:r>
             <a:endParaRPr lang="en-US" sz="3000" dirty="0">
               <a:solidFill>
-                <a:srgbClr val="60B1E3"/>
+                <a:schemeClr val="bg2"/>
               </a:solidFill>
               <a:latin typeface="Cascadia Code" panose="020B0609020000020004" pitchFamily="34" charset="0"/>
               <a:ea typeface="Cascadia Code" panose="020B0609020000020004" pitchFamily="34" charset="0"/>
@@ -9876,7 +9914,7 @@
             <a:r>
               <a:rPr lang="en-US" sz="3000" dirty="0" err="1">
                 <a:solidFill>
-                  <a:srgbClr val="60B1E3"/>
+                  <a:schemeClr val="bg2"/>
                 </a:solidFill>
                 <a:latin typeface="Cascadia Code" panose="020B0609020000020004" pitchFamily="34" charset="0"/>
                 <a:ea typeface="Cascadia Code" panose="020B0609020000020004" pitchFamily="34" charset="0"/>
@@ -9886,7 +9924,7 @@
             </a:r>
             <a:endParaRPr lang="en-US" sz="3000" dirty="0">
               <a:solidFill>
-                <a:srgbClr val="60B1E3"/>
+                <a:schemeClr val="bg2"/>
               </a:solidFill>
               <a:latin typeface="Cascadia Code" panose="020B0609020000020004" pitchFamily="34" charset="0"/>
               <a:ea typeface="Cascadia Code" panose="020B0609020000020004" pitchFamily="34" charset="0"/>
@@ -9911,7 +9949,7 @@
         </p:nvSpPr>
         <p:spPr>
           <a:xfrm>
-            <a:off x="10346704" y="1697157"/>
+            <a:off x="10346704" y="2039815"/>
             <a:ext cx="5510516" cy="4083996"/>
           </a:xfrm>
           <a:prstGeom prst="rect">
@@ -10074,7 +10112,7 @@
             <a:r>
               <a:rPr lang="en-US" sz="4200" dirty="0">
                 <a:solidFill>
-                  <a:schemeClr val="tx1"/>
+                  <a:srgbClr val="FFC000"/>
                 </a:solidFill>
                 <a:latin typeface="Cascadia Code" panose="020B0609020000020004" pitchFamily="34" charset="0"/>
                 <a:ea typeface="Cascadia Code" panose="020B0609020000020004" pitchFamily="34" charset="0"/>
@@ -10094,7 +10132,7 @@
             <a:r>
               <a:rPr lang="en-US" dirty="0" err="1">
                 <a:solidFill>
-                  <a:srgbClr val="60B1E3"/>
+                  <a:schemeClr val="bg2"/>
                 </a:solidFill>
                 <a:latin typeface="Cascadia Code" panose="020B0609020000020004" pitchFamily="34" charset="0"/>
                 <a:ea typeface="Cascadia Code" panose="020B0609020000020004" pitchFamily="34" charset="0"/>
@@ -10105,7 +10143,7 @@
             <a:r>
               <a:rPr lang="en-US" dirty="0">
                 <a:solidFill>
-                  <a:srgbClr val="60B1E3"/>
+                  <a:schemeClr val="bg2"/>
                 </a:solidFill>
                 <a:latin typeface="Cascadia Code" panose="020B0609020000020004" pitchFamily="34" charset="0"/>
                 <a:ea typeface="Cascadia Code" panose="020B0609020000020004" pitchFamily="34" charset="0"/>
@@ -10125,7 +10163,7 @@
             <a:r>
               <a:rPr lang="en-US" dirty="0" err="1">
                 <a:solidFill>
-                  <a:srgbClr val="60B1E3"/>
+                  <a:schemeClr val="bg2"/>
                 </a:solidFill>
                 <a:latin typeface="Cascadia Code" panose="020B0609020000020004" pitchFamily="34" charset="0"/>
                 <a:ea typeface="Cascadia Code" panose="020B0609020000020004" pitchFamily="34" charset="0"/>
@@ -10136,7 +10174,7 @@
             <a:r>
               <a:rPr lang="en-US" dirty="0">
                 <a:solidFill>
-                  <a:srgbClr val="60B1E3"/>
+                  <a:schemeClr val="bg2"/>
                 </a:solidFill>
                 <a:latin typeface="Cascadia Code" panose="020B0609020000020004" pitchFamily="34" charset="0"/>
                 <a:ea typeface="Cascadia Code" panose="020B0609020000020004" pitchFamily="34" charset="0"/>
@@ -10156,7 +10194,7 @@
             <a:r>
               <a:rPr lang="en-US" dirty="0">
                 <a:solidFill>
-                  <a:srgbClr val="60B1E3"/>
+                  <a:schemeClr val="bg2"/>
                 </a:solidFill>
                 <a:latin typeface="Cascadia Code" panose="020B0609020000020004" pitchFamily="34" charset="0"/>
                 <a:ea typeface="Cascadia Code" panose="020B0609020000020004" pitchFamily="34" charset="0"/>
@@ -10176,7 +10214,7 @@
             <a:r>
               <a:rPr lang="en-US" dirty="0">
                 <a:solidFill>
-                  <a:srgbClr val="60B1E3"/>
+                  <a:schemeClr val="bg2"/>
                 </a:solidFill>
                 <a:latin typeface="Cascadia Code" panose="020B0609020000020004" pitchFamily="34" charset="0"/>
                 <a:ea typeface="Cascadia Code" panose="020B0609020000020004" pitchFamily="34" charset="0"/>
@@ -10186,7 +10224,7 @@
             </a:r>
             <a:endParaRPr lang="en-US" sz="4200" dirty="0">
               <a:solidFill>
-                <a:srgbClr val="60B1E3"/>
+                <a:schemeClr val="bg2"/>
               </a:solidFill>
               <a:latin typeface="Cascadia Code" panose="020B0609020000020004" pitchFamily="34" charset="0"/>
               <a:ea typeface="Cascadia Code" panose="020B0609020000020004" pitchFamily="34" charset="0"/>
@@ -10203,7 +10241,7 @@
             </a:pPr>
             <a:endParaRPr lang="en-US" dirty="0">
               <a:solidFill>
-                <a:srgbClr val="60B1E3"/>
+                <a:schemeClr val="bg2"/>
               </a:solidFill>
               <a:latin typeface="Cascadia Code" panose="020B0609020000020004" pitchFamily="34" charset="0"/>
               <a:ea typeface="Cascadia Code" panose="020B0609020000020004" pitchFamily="34" charset="0"/>
@@ -10228,7 +10266,7 @@
         </p:nvSpPr>
         <p:spPr>
           <a:xfrm>
-            <a:off x="10346704" y="5951762"/>
+            <a:off x="10346704" y="6294420"/>
             <a:ext cx="5510516" cy="4270656"/>
           </a:xfrm>
           <a:prstGeom prst="rect">
@@ -10391,7 +10429,7 @@
             <a:r>
               <a:rPr lang="en-US" sz="4200" dirty="0">
                 <a:solidFill>
-                  <a:schemeClr val="tx1"/>
+                  <a:srgbClr val="FFC000"/>
                 </a:solidFill>
                 <a:latin typeface="Cascadia Code" panose="020B0609020000020004" pitchFamily="34" charset="0"/>
                 <a:ea typeface="Cascadia Code" panose="020B0609020000020004" pitchFamily="34" charset="0"/>
@@ -10411,7 +10449,7 @@
             <a:r>
               <a:rPr lang="en-US" dirty="0">
                 <a:solidFill>
-                  <a:srgbClr val="60B1E3"/>
+                  <a:schemeClr val="bg2"/>
                 </a:solidFill>
                 <a:latin typeface="Cascadia Code" panose="020B0609020000020004" pitchFamily="34" charset="0"/>
                 <a:ea typeface="Cascadia Code" panose="020B0609020000020004" pitchFamily="34" charset="0"/>
@@ -10431,7 +10469,7 @@
             <a:r>
               <a:rPr lang="en-US" dirty="0">
                 <a:solidFill>
-                  <a:srgbClr val="60B1E3"/>
+                  <a:schemeClr val="bg2"/>
                 </a:solidFill>
                 <a:latin typeface="Cascadia Code" panose="020B0609020000020004" pitchFamily="34" charset="0"/>
                 <a:ea typeface="Cascadia Code" panose="020B0609020000020004" pitchFamily="34" charset="0"/>
@@ -10451,7 +10489,7 @@
             <a:r>
               <a:rPr lang="en-US" dirty="0">
                 <a:solidFill>
-                  <a:srgbClr val="60B1E3"/>
+                  <a:schemeClr val="bg2"/>
                 </a:solidFill>
                 <a:latin typeface="Cascadia Code" panose="020B0609020000020004" pitchFamily="34" charset="0"/>
                 <a:ea typeface="Cascadia Code" panose="020B0609020000020004" pitchFamily="34" charset="0"/>
@@ -10471,7 +10509,7 @@
             <a:r>
               <a:rPr lang="en-US" dirty="0">
                 <a:solidFill>
-                  <a:srgbClr val="60B1E3"/>
+                  <a:schemeClr val="bg2"/>
                 </a:solidFill>
                 <a:latin typeface="Cascadia Code" panose="020B0609020000020004" pitchFamily="34" charset="0"/>
                 <a:ea typeface="Cascadia Code" panose="020B0609020000020004" pitchFamily="34" charset="0"/>
@@ -10498,7 +10536,7 @@
         </p:nvSpPr>
         <p:spPr>
           <a:xfrm>
-            <a:off x="3155745" y="5903636"/>
+            <a:off x="3155745" y="6246294"/>
             <a:ext cx="7551632" cy="4537294"/>
           </a:xfrm>
           <a:prstGeom prst="rect">
@@ -10661,7 +10699,7 @@
             <a:r>
               <a:rPr lang="en-US" sz="4200" dirty="0">
                 <a:solidFill>
-                  <a:schemeClr val="tx1"/>
+                  <a:srgbClr val="FFC000"/>
                 </a:solidFill>
                 <a:latin typeface="Cascadia Code" panose="020B0609020000020004" pitchFamily="34" charset="0"/>
                 <a:ea typeface="Cascadia Code" panose="020B0609020000020004" pitchFamily="34" charset="0"/>
@@ -10681,7 +10719,7 @@
             <a:r>
               <a:rPr lang="en-US" dirty="0">
                 <a:solidFill>
-                  <a:srgbClr val="60B1E3"/>
+                  <a:schemeClr val="bg2"/>
                 </a:solidFill>
                 <a:latin typeface="Cascadia Code" panose="020B0609020000020004" pitchFamily="34" charset="0"/>
                 <a:ea typeface="Cascadia Code" panose="020B0609020000020004" pitchFamily="34" charset="0"/>
@@ -10701,7 +10739,7 @@
             <a:r>
               <a:rPr lang="en-US" dirty="0">
                 <a:solidFill>
-                  <a:srgbClr val="60B1E3"/>
+                  <a:schemeClr val="bg2"/>
                 </a:solidFill>
                 <a:latin typeface="Cascadia Code" panose="020B0609020000020004" pitchFamily="34" charset="0"/>
                 <a:ea typeface="Cascadia Code" panose="020B0609020000020004" pitchFamily="34" charset="0"/>
@@ -10721,7 +10759,7 @@
             <a:r>
               <a:rPr lang="en-US" dirty="0">
                 <a:solidFill>
-                  <a:srgbClr val="60B1E3"/>
+                  <a:schemeClr val="bg2"/>
                 </a:solidFill>
                 <a:latin typeface="Cascadia Code" panose="020B0609020000020004" pitchFamily="34" charset="0"/>
                 <a:ea typeface="Cascadia Code" panose="020B0609020000020004" pitchFamily="34" charset="0"/>
@@ -10741,7 +10779,7 @@
             <a:r>
               <a:rPr lang="en-US" dirty="0">
                 <a:solidFill>
-                  <a:srgbClr val="60B1E3"/>
+                  <a:schemeClr val="bg2"/>
                 </a:solidFill>
                 <a:latin typeface="Cascadia Code" panose="020B0609020000020004" pitchFamily="34" charset="0"/>
                 <a:ea typeface="Cascadia Code" panose="020B0609020000020004" pitchFamily="34" charset="0"/>
@@ -10766,8 +10804,8 @@
         </p:nvSpPr>
         <p:spPr>
           <a:xfrm>
-            <a:off x="3489764" y="2438882"/>
-            <a:ext cx="2891164" cy="600165"/>
+            <a:off x="3390374" y="2781540"/>
+            <a:ext cx="2891164" cy="553998"/>
           </a:xfrm>
           <a:prstGeom prst="rect">
             <a:avLst/>
@@ -10786,7 +10824,7 @@
             <a:r>
               <a:rPr lang="en-US" sz="3000" dirty="0">
                 <a:solidFill>
-                  <a:srgbClr val="60B1E3"/>
+                  <a:schemeClr val="bg2"/>
                 </a:solidFill>
                 <a:latin typeface="Cascadia Code" panose="020B0609020000020004" pitchFamily="34" charset="0"/>
                 <a:ea typeface="Cascadia Code" panose="020B0609020000020004" pitchFamily="34" charset="0"/>
@@ -10797,7 +10835,7 @@
             <a:r>
               <a:rPr lang="en-US" sz="3000" b="0" dirty="0">
                 <a:solidFill>
-                  <a:srgbClr val="60B1E3"/>
+                  <a:schemeClr val="bg2"/>
                 </a:solidFill>
                 <a:effectLst/>
                 <a:latin typeface="Cascadia Code" panose="020B0609020000020004" pitchFamily="34" charset="0"/>
@@ -10823,8 +10861,8 @@
         </p:nvSpPr>
         <p:spPr>
           <a:xfrm>
-            <a:off x="3506092" y="6646155"/>
-            <a:ext cx="1785424" cy="600165"/>
+            <a:off x="3506092" y="6988813"/>
+            <a:ext cx="1785424" cy="553998"/>
           </a:xfrm>
           <a:prstGeom prst="rect">
             <a:avLst/>
@@ -10840,7 +10878,7 @@
             <a:r>
               <a:rPr lang="en-US" sz="3000" b="0" dirty="0">
                 <a:solidFill>
-                  <a:srgbClr val="60B1E3"/>
+                  <a:schemeClr val="bg2"/>
                 </a:solidFill>
                 <a:effectLst/>
                 <a:latin typeface="Cascadia Code" panose="020B0609020000020004" pitchFamily="34" charset="0"/>
@@ -10851,7 +10889,7 @@
             </a:r>
             <a:endParaRPr lang="en-US" sz="3000" dirty="0">
               <a:solidFill>
-                <a:srgbClr val="60B1E3"/>
+                <a:schemeClr val="bg2"/>
               </a:solidFill>
               <a:latin typeface="Cascadia Code" panose="020B0609020000020004" pitchFamily="34" charset="0"/>
               <a:ea typeface="Cascadia Code" panose="020B0609020000020004" pitchFamily="34" charset="0"/>
@@ -10874,8 +10912,8 @@
         </p:nvSpPr>
         <p:spPr>
           <a:xfrm>
-            <a:off x="3506092" y="7229991"/>
-            <a:ext cx="2697730" cy="600165"/>
+            <a:off x="3506092" y="7572649"/>
+            <a:ext cx="2697730" cy="553998"/>
           </a:xfrm>
           <a:prstGeom prst="rect">
             <a:avLst/>
@@ -10891,7 +10929,7 @@
             <a:r>
               <a:rPr lang="en-US" sz="3000" b="0" dirty="0">
                 <a:solidFill>
-                  <a:srgbClr val="60B1E3"/>
+                  <a:schemeClr val="bg2"/>
                 </a:solidFill>
                 <a:effectLst/>
                 <a:latin typeface="Cascadia Code" panose="020B0609020000020004" pitchFamily="34" charset="0"/>
@@ -10902,7 +10940,7 @@
             </a:r>
             <a:endParaRPr lang="en-US" sz="3000" dirty="0">
               <a:solidFill>
-                <a:srgbClr val="60B1E3"/>
+                <a:schemeClr val="bg2"/>
               </a:solidFill>
               <a:latin typeface="Cascadia Code" panose="020B0609020000020004" pitchFamily="34" charset="0"/>
               <a:ea typeface="Cascadia Code" panose="020B0609020000020004" pitchFamily="34" charset="0"/>
@@ -10925,8 +10963,8 @@
         </p:nvSpPr>
         <p:spPr>
           <a:xfrm>
-            <a:off x="10686734" y="4053668"/>
-            <a:ext cx="2559652" cy="600165"/>
+            <a:off x="10686734" y="4396326"/>
+            <a:ext cx="2559652" cy="553998"/>
           </a:xfrm>
           <a:prstGeom prst="rect">
             <a:avLst/>
@@ -10942,7 +10980,7 @@
             <a:r>
               <a:rPr lang="en-US" sz="3000" b="0" dirty="0">
                 <a:solidFill>
-                  <a:srgbClr val="60B1E3"/>
+                  <a:schemeClr val="bg2"/>
                 </a:solidFill>
                 <a:effectLst/>
                 <a:latin typeface="Cascadia Code" panose="020B0609020000020004" pitchFamily="34" charset="0"/>
@@ -10953,7 +10991,7 @@
             </a:r>
             <a:endParaRPr lang="en-US" sz="3000" dirty="0">
               <a:solidFill>
-                <a:srgbClr val="60B1E3"/>
+                <a:schemeClr val="bg2"/>
               </a:solidFill>
               <a:latin typeface="Cascadia Code" panose="020B0609020000020004" pitchFamily="34" charset="0"/>
               <a:ea typeface="Cascadia Code" panose="020B0609020000020004" pitchFamily="34" charset="0"/>
@@ -10976,8 +11014,8 @@
         </p:nvSpPr>
         <p:spPr>
           <a:xfrm>
-            <a:off x="11596264" y="4053668"/>
-            <a:ext cx="1096862" cy="600165"/>
+            <a:off x="11596264" y="4396326"/>
+            <a:ext cx="1096862" cy="553998"/>
           </a:xfrm>
           <a:prstGeom prst="rect">
             <a:avLst/>
@@ -10993,7 +11031,7 @@
             <a:r>
               <a:rPr lang="en-US" sz="3000" b="0" dirty="0">
                 <a:solidFill>
-                  <a:srgbClr val="60B1E3"/>
+                  <a:schemeClr val="bg2"/>
                 </a:solidFill>
                 <a:effectLst/>
                 <a:latin typeface="Cascadia Code" panose="020B0609020000020004" pitchFamily="34" charset="0"/>
@@ -11004,7 +11042,7 @@
             </a:r>
             <a:endParaRPr lang="en-US" sz="3000" dirty="0">
               <a:solidFill>
-                <a:srgbClr val="60B1E3"/>
+                <a:schemeClr val="bg2"/>
               </a:solidFill>
               <a:latin typeface="Cascadia Code" panose="020B0609020000020004" pitchFamily="34" charset="0"/>
               <a:ea typeface="Cascadia Code" panose="020B0609020000020004" pitchFamily="34" charset="0"/>
@@ -11027,7 +11065,7 @@
         </p:nvSpPr>
         <p:spPr>
           <a:xfrm>
-            <a:off x="10707375" y="6680157"/>
+            <a:off x="10707375" y="7022815"/>
             <a:ext cx="2088038" cy="600165"/>
           </a:xfrm>
           <a:prstGeom prst="rect">
@@ -11044,7 +11082,7 @@
             <a:r>
               <a:rPr lang="en-US" sz="3000" b="0" dirty="0">
                 <a:solidFill>
-                  <a:srgbClr val="60B1E3"/>
+                  <a:srgbClr val="62D5FF"/>
                 </a:solidFill>
                 <a:effectLst/>
                 <a:latin typeface="Cascadia Code" panose="020B0609020000020004" pitchFamily="34" charset="0"/>
@@ -11055,7 +11093,7 @@
             </a:r>
             <a:endParaRPr lang="en-US" sz="3000" dirty="0">
               <a:solidFill>
-                <a:srgbClr val="60B1E3"/>
+                <a:srgbClr val="62D5FF"/>
               </a:solidFill>
               <a:latin typeface="Cascadia Code" panose="020B0609020000020004" pitchFamily="34" charset="0"/>
               <a:ea typeface="Cascadia Code" panose="020B0609020000020004" pitchFamily="34" charset="0"/>
@@ -11078,8 +11116,8 @@
         </p:nvSpPr>
         <p:spPr>
           <a:xfrm>
-            <a:off x="10707376" y="6678812"/>
-            <a:ext cx="2088038" cy="600165"/>
+            <a:off x="10707376" y="7021470"/>
+            <a:ext cx="2088038" cy="553998"/>
           </a:xfrm>
           <a:prstGeom prst="rect">
             <a:avLst/>
@@ -11095,7 +11133,7 @@
             <a:r>
               <a:rPr lang="en-US" sz="3000" b="0" dirty="0">
                 <a:solidFill>
-                  <a:srgbClr val="60B1E3"/>
+                  <a:schemeClr val="bg2"/>
                 </a:solidFill>
                 <a:effectLst/>
                 <a:latin typeface="Cascadia Code" panose="020B0609020000020004" pitchFamily="34" charset="0"/>
@@ -11106,7 +11144,7 @@
             </a:r>
             <a:endParaRPr lang="en-US" sz="3000" dirty="0">
               <a:solidFill>
-                <a:srgbClr val="60B1E3"/>
+                <a:schemeClr val="bg2"/>
               </a:solidFill>
               <a:latin typeface="Cascadia Code" panose="020B0609020000020004" pitchFamily="34" charset="0"/>
               <a:ea typeface="Cascadia Code" panose="020B0609020000020004" pitchFamily="34" charset="0"/>
@@ -13196,6 +13234,12 @@
           <a:lstStyle/>
           <a:p>
             <a:r>
+              <a:rPr>
+                <a:solidFill>
+                  <a:srgbClr val="F7F9FF"/>
+                </a:solidFill>
+                <a:latin typeface="Segoe UI Semibold"/>
+              </a:rPr>
               <a:t>Example Query</a:t>
             </a:r>
           </a:p>
@@ -13211,12 +13255,18 @@
             <p:ph type="body" sz="quarter" idx="26"/>
           </p:nvPr>
         </p:nvSpPr>
-        <p:spPr/>
+        <p:spPr>
+          <a:xfrm>
+            <a:off x="1176913" y="2703443"/>
+            <a:ext cx="15585333" cy="4333461"/>
+          </a:xfrm>
+        </p:spPr>
         <p:txBody>
           <a:bodyPr/>
           <a:lstStyle/>
           <a:p>
             <a:r>
+              <a:rPr dirty="0"/>
               <a:t> </a:t>
             </a:r>
           </a:p>
@@ -13460,7 +13510,7 @@
                 <a:effectLst/>
                 <a:latin typeface="Cascadia Code" panose="020B0609020000020004" pitchFamily="34" charset="0"/>
               </a:rPr>
-              <a:t>  </a:t>
+              <a:t>     </a:t>
             </a:r>
             <a:r>
               <a:rPr lang="en-US" sz="4200" b="0" dirty="0">
@@ -13894,7 +13944,7 @@
       </p:sp>
       <p:sp>
         <p:nvSpPr>
-          <p:cNvPr id="17" name="Rectangle 16">
+          <p:cNvPr id="17" name="Rectangle 16" hidden="1">
             <a:extLst>
               <a:ext uri="{FF2B5EF4-FFF2-40B4-BE49-F238E27FC236}">
                 <a16:creationId xmlns:a16="http://schemas.microsoft.com/office/drawing/2014/main" id="{1C2D776B-EFB1-F739-8539-4BB1FBB7F74F}"/>
@@ -13960,92 +14010,6 @@
       </p:transition>
     </mc:Fallback>
   </mc:AlternateContent>
-  <p:timing>
-    <p:tnLst>
-      <p:par>
-        <p:cTn id="1" dur="indefinite" restart="never" nodeType="tmRoot">
-          <p:childTnLst>
-            <p:seq concurrent="1" nextAc="seek">
-              <p:cTn id="2" dur="indefinite" nodeType="mainSeq">
-                <p:childTnLst>
-                  <p:par>
-                    <p:cTn id="3" fill="hold">
-                      <p:stCondLst>
-                        <p:cond delay="indefinite"/>
-                      </p:stCondLst>
-                      <p:childTnLst>
-                        <p:par>
-                          <p:cTn id="4" fill="hold">
-                            <p:stCondLst>
-                              <p:cond delay="0"/>
-                            </p:stCondLst>
-                            <p:childTnLst>
-                              <p:par>
-                                <p:cTn id="5" presetID="10" presetClass="entr" presetSubtype="0" fill="hold" grpId="0" nodeType="clickEffect">
-                                  <p:stCondLst>
-                                    <p:cond delay="0"/>
-                                  </p:stCondLst>
-                                  <p:childTnLst>
-                                    <p:set>
-                                      <p:cBhvr>
-                                        <p:cTn id="6" dur="1" fill="hold">
-                                          <p:stCondLst>
-                                            <p:cond delay="0"/>
-                                          </p:stCondLst>
-                                        </p:cTn>
-                                        <p:tgtEl>
-                                          <p:spTgt spid="17"/>
-                                        </p:tgtEl>
-                                        <p:attrNameLst>
-                                          <p:attrName>style.visibility</p:attrName>
-                                        </p:attrNameLst>
-                                      </p:cBhvr>
-                                      <p:to>
-                                        <p:strVal val="visible"/>
-                                      </p:to>
-                                    </p:set>
-                                    <p:animEffect transition="in" filter="fade">
-                                      <p:cBhvr>
-                                        <p:cTn id="7" dur="500"/>
-                                        <p:tgtEl>
-                                          <p:spTgt spid="17"/>
-                                        </p:tgtEl>
-                                      </p:cBhvr>
-                                    </p:animEffect>
-                                  </p:childTnLst>
-                                </p:cTn>
-                              </p:par>
-                            </p:childTnLst>
-                          </p:cTn>
-                        </p:par>
-                      </p:childTnLst>
-                    </p:cTn>
-                  </p:par>
-                </p:childTnLst>
-              </p:cTn>
-              <p:prevCondLst>
-                <p:cond evt="onPrev" delay="0">
-                  <p:tgtEl>
-                    <p:sldTgt/>
-                  </p:tgtEl>
-                </p:cond>
-              </p:prevCondLst>
-              <p:nextCondLst>
-                <p:cond evt="onNext" delay="0">
-                  <p:tgtEl>
-                    <p:sldTgt/>
-                  </p:tgtEl>
-                </p:cond>
-              </p:nextCondLst>
-            </p:seq>
-          </p:childTnLst>
-        </p:cTn>
-      </p:par>
-    </p:tnLst>
-    <p:bldLst>
-      <p:bldP spid="17" grpId="0" animBg="1"/>
-    </p:bldLst>
-  </p:timing>
 </p:sld>
 </file>
 
@@ -14054,7 +14018,13 @@
   <p:cSld>
     <p:spTree>
       <p:nvGrpSpPr>
-        <p:cNvPr id="1" name=""/>
+        <p:cNvPr id="1" name="">
+          <a:extLst>
+            <a:ext uri="{FF2B5EF4-FFF2-40B4-BE49-F238E27FC236}">
+              <a16:creationId xmlns:a16="http://schemas.microsoft.com/office/drawing/2014/main" id="{B4E4CB7F-B94A-307E-E45A-B2F893E79D06}"/>
+            </a:ext>
+          </a:extLst>
+        </p:cNvPr>
         <p:cNvGrpSpPr/>
         <p:nvPr/>
       </p:nvGrpSpPr>
@@ -14068,7 +14038,13 @@
       </p:grpSpPr>
       <p:sp>
         <p:nvSpPr>
-          <p:cNvPr id="24" name="Title 1"/>
+          <p:cNvPr id="24" name="Title 1">
+            <a:extLst>
+              <a:ext uri="{FF2B5EF4-FFF2-40B4-BE49-F238E27FC236}">
+                <a16:creationId xmlns:a16="http://schemas.microsoft.com/office/drawing/2014/main" id="{86382ECC-6D30-A031-3705-556B6C9BF76B}"/>
+              </a:ext>
+            </a:extLst>
+          </p:cNvPr>
           <p:cNvSpPr>
             <a:spLocks noGrp="1"/>
           </p:cNvSpPr>
@@ -14082,6 +14058,12 @@
           <a:lstStyle/>
           <a:p>
             <a:r>
+              <a:rPr>
+                <a:solidFill>
+                  <a:srgbClr val="F7F9FF"/>
+                </a:solidFill>
+                <a:latin typeface="Segoe UI Semibold"/>
+              </a:rPr>
               <a:t>Example Query</a:t>
             </a:r>
           </a:p>
@@ -14089,7 +14071,13 @@
       </p:sp>
       <p:sp>
         <p:nvSpPr>
-          <p:cNvPr id="9001" name="Text Placeholder 2"/>
+          <p:cNvPr id="9001" name="Text Placeholder 2">
+            <a:extLst>
+              <a:ext uri="{FF2B5EF4-FFF2-40B4-BE49-F238E27FC236}">
+                <a16:creationId xmlns:a16="http://schemas.microsoft.com/office/drawing/2014/main" id="{DD4E156B-6152-A351-C610-0F8DE7762F21}"/>
+              </a:ext>
+            </a:extLst>
+          </p:cNvPr>
           <p:cNvSpPr>
             <a:spLocks noGrp="1"/>
           </p:cNvSpPr>
@@ -14097,12 +14085,18 @@
             <p:ph type="body" sz="quarter" idx="26"/>
           </p:nvPr>
         </p:nvSpPr>
-        <p:spPr/>
+        <p:spPr>
+          <a:xfrm>
+            <a:off x="1176913" y="2703443"/>
+            <a:ext cx="15585333" cy="4333461"/>
+          </a:xfrm>
+        </p:spPr>
         <p:txBody>
           <a:bodyPr/>
           <a:lstStyle/>
           <a:p>
             <a:r>
+              <a:rPr dirty="0"/>
               <a:t> </a:t>
             </a:r>
           </a:p>
@@ -14113,7 +14107,7 @@
           <p:cNvPr id="9" name="TextBox 8">
             <a:extLst>
               <a:ext uri="{FF2B5EF4-FFF2-40B4-BE49-F238E27FC236}">
-                <a16:creationId xmlns:a16="http://schemas.microsoft.com/office/drawing/2014/main" id="{1C2F058C-C8BA-328F-C80A-57C857F92933}"/>
+                <a16:creationId xmlns:a16="http://schemas.microsoft.com/office/drawing/2014/main" id="{48F93366-81D9-E31C-72D4-326FD69573E4}"/>
               </a:ext>
             </a:extLst>
           </p:cNvPr>
@@ -14346,7 +14340,7 @@
                 <a:effectLst/>
                 <a:latin typeface="Cascadia Code" panose="020B0609020000020004" pitchFamily="34" charset="0"/>
               </a:rPr>
-              <a:t>  </a:t>
+              <a:t>     </a:t>
             </a:r>
             <a:r>
               <a:rPr lang="en-US" sz="4200" b="0" dirty="0">
@@ -14463,7 +14457,7 @@
           <p:cNvPr id="10" name="TextBox 9">
             <a:extLst>
               <a:ext uri="{FF2B5EF4-FFF2-40B4-BE49-F238E27FC236}">
-                <a16:creationId xmlns:a16="http://schemas.microsoft.com/office/drawing/2014/main" id="{D35BF316-40C9-F5CB-11BB-3F8D01C89078}"/>
+                <a16:creationId xmlns:a16="http://schemas.microsoft.com/office/drawing/2014/main" id="{E30F52B6-3DEC-02AE-3DDA-43311F67EA1C}"/>
               </a:ext>
             </a:extLst>
           </p:cNvPr>
@@ -14507,7 +14501,7 @@
           <p:cNvPr id="11" name="TextBox 10">
             <a:extLst>
               <a:ext uri="{FF2B5EF4-FFF2-40B4-BE49-F238E27FC236}">
-                <a16:creationId xmlns:a16="http://schemas.microsoft.com/office/drawing/2014/main" id="{C262DF33-5442-59DC-326A-F5115D7BAE0A}"/>
+                <a16:creationId xmlns:a16="http://schemas.microsoft.com/office/drawing/2014/main" id="{EBF59285-B431-B503-9BD4-87FD080C4F69}"/>
               </a:ext>
             </a:extLst>
           </p:cNvPr>
@@ -14553,7 +14547,7 @@
           <p:cNvPr id="12" name="TextBox 11">
             <a:extLst>
               <a:ext uri="{FF2B5EF4-FFF2-40B4-BE49-F238E27FC236}">
-                <a16:creationId xmlns:a16="http://schemas.microsoft.com/office/drawing/2014/main" id="{5BB528D5-6E0F-4C48-7AE7-892D41AF4846}"/>
+                <a16:creationId xmlns:a16="http://schemas.microsoft.com/office/drawing/2014/main" id="{03C37FAF-96BB-0AF1-D0A9-EDEC68037B67}"/>
               </a:ext>
             </a:extLst>
           </p:cNvPr>
@@ -14599,7 +14593,7 @@
           <p:cNvPr id="13" name="TextBox 12">
             <a:extLst>
               <a:ext uri="{FF2B5EF4-FFF2-40B4-BE49-F238E27FC236}">
-                <a16:creationId xmlns:a16="http://schemas.microsoft.com/office/drawing/2014/main" id="{F42EA6A5-0D22-D5B2-50C1-76EC16E398C8}"/>
+                <a16:creationId xmlns:a16="http://schemas.microsoft.com/office/drawing/2014/main" id="{551A2CDA-C6EF-4AE8-CCA3-6A25D27D5B9D}"/>
               </a:ext>
             </a:extLst>
           </p:cNvPr>
@@ -14645,7 +14639,7 @@
           <p:cNvPr id="14" name="TextBox 13">
             <a:extLst>
               <a:ext uri="{FF2B5EF4-FFF2-40B4-BE49-F238E27FC236}">
-                <a16:creationId xmlns:a16="http://schemas.microsoft.com/office/drawing/2014/main" id="{2FADD74D-3462-8918-08EF-BFD9EA7C8D56}"/>
+                <a16:creationId xmlns:a16="http://schemas.microsoft.com/office/drawing/2014/main" id="{52E665FC-061F-67D3-B85A-B9B5DDE5F73A}"/>
               </a:ext>
             </a:extLst>
           </p:cNvPr>
@@ -14691,7 +14685,7 @@
           <p:cNvPr id="15" name="TextBox 14">
             <a:extLst>
               <a:ext uri="{FF2B5EF4-FFF2-40B4-BE49-F238E27FC236}">
-                <a16:creationId xmlns:a16="http://schemas.microsoft.com/office/drawing/2014/main" id="{F82F5E15-9CF2-D207-D8FA-882FF68A3DD2}"/>
+                <a16:creationId xmlns:a16="http://schemas.microsoft.com/office/drawing/2014/main" id="{5E492CE0-CB0E-3FBD-3698-A3F45290878A}"/>
               </a:ext>
             </a:extLst>
           </p:cNvPr>
@@ -14737,7 +14731,7 @@
           <p:cNvPr id="16" name="TextBox 15">
             <a:extLst>
               <a:ext uri="{FF2B5EF4-FFF2-40B4-BE49-F238E27FC236}">
-                <a16:creationId xmlns:a16="http://schemas.microsoft.com/office/drawing/2014/main" id="{151EE222-2974-7BF6-0930-94395AC57FFA}"/>
+                <a16:creationId xmlns:a16="http://schemas.microsoft.com/office/drawing/2014/main" id="{1ED2C0A3-5112-B295-D6F4-A3BE34B10EB7}"/>
               </a:ext>
             </a:extLst>
           </p:cNvPr>
@@ -14780,20 +14774,22 @@
       </p:sp>
       <p:sp>
         <p:nvSpPr>
-          <p:cNvPr id="17" name="Rectangle 16">
+          <p:cNvPr id="3" name="Text Placeholder 2">
             <a:extLst>
               <a:ext uri="{FF2B5EF4-FFF2-40B4-BE49-F238E27FC236}">
-                <a16:creationId xmlns:a16="http://schemas.microsoft.com/office/drawing/2014/main" id="{3EEEC8FC-3E71-3FFF-FFBC-E6D69B8D4DD4}"/>
+                <a16:creationId xmlns:a16="http://schemas.microsoft.com/office/drawing/2014/main" id="{761AFDB6-47C7-67F8-B179-C250DB322167}"/>
               </a:ext>
             </a:extLst>
           </p:cNvPr>
-          <p:cNvSpPr/>
+          <p:cNvSpPr txBox="1">
+            <a:spLocks/>
+          </p:cNvSpPr>
           <p:nvPr/>
         </p:nvSpPr>
         <p:spPr>
           <a:xfrm>
-            <a:off x="2119764" y="4890318"/>
-            <a:ext cx="13737454" cy="2723824"/>
+            <a:off x="1311097" y="4094311"/>
+            <a:ext cx="15201021" cy="2246854"/>
           </a:xfrm>
           <a:prstGeom prst="rect">
             <a:avLst/>
@@ -14801,97 +14797,174 @@
           <a:solidFill>
             <a:srgbClr val="000000"/>
           </a:solidFill>
-          <a:ln>
-            <a:noFill/>
-          </a:ln>
-          <a:effectLst/>
         </p:spPr>
-        <p:style>
-          <a:lnRef idx="1">
-            <a:schemeClr val="accent1"/>
-          </a:lnRef>
-          <a:fillRef idx="3">
-            <a:schemeClr val="accent1"/>
-          </a:fillRef>
-          <a:effectRef idx="2">
-            <a:schemeClr val="accent1"/>
-          </a:effectRef>
-          <a:fontRef idx="minor">
-            <a:schemeClr val="lt1"/>
-          </a:fontRef>
-        </p:style>
         <p:txBody>
-          <a:bodyPr rtlCol="0" anchor="ctr"/>
-          <a:lstStyle/>
-          <a:p>
-            <a:pPr algn="ctr"/>
-            <a:endParaRPr lang="en-US" dirty="0"/>
-          </a:p>
-        </p:txBody>
-      </p:sp>
-      <p:sp>
-        <p:nvSpPr>
-          <p:cNvPr id="2" name="Rectangle 1">
-            <a:extLst>
-              <a:ext uri="{FF2B5EF4-FFF2-40B4-BE49-F238E27FC236}">
-                <a16:creationId xmlns:a16="http://schemas.microsoft.com/office/drawing/2014/main" id="{12579806-532D-E745-8F49-50083F4AFD2D}"/>
-              </a:ext>
-            </a:extLst>
-          </p:cNvPr>
-          <p:cNvSpPr/>
-          <p:nvPr/>
-        </p:nvSpPr>
-        <p:spPr>
-          <a:xfrm>
-            <a:off x="2119764" y="3140235"/>
-            <a:ext cx="13737454" cy="1009604"/>
-          </a:xfrm>
-          <a:prstGeom prst="rect">
-            <a:avLst/>
-          </a:prstGeom>
-          <a:solidFill>
-            <a:srgbClr val="000000"/>
-          </a:solidFill>
-          <a:ln>
-            <a:noFill/>
-          </a:ln>
-          <a:effectLst/>
-        </p:spPr>
-        <p:style>
-          <a:lnRef idx="1">
-            <a:schemeClr val="accent1"/>
-          </a:lnRef>
-          <a:fillRef idx="3">
-            <a:schemeClr val="accent1"/>
-          </a:fillRef>
-          <a:effectRef idx="2">
-            <a:schemeClr val="accent1"/>
-          </a:effectRef>
-          <a:fontRef idx="minor">
-            <a:schemeClr val="lt1"/>
-          </a:fontRef>
-        </p:style>
-        <p:txBody>
-          <a:bodyPr rtlCol="0" anchor="ctr"/>
-          <a:lstStyle/>
-          <a:p>
-            <a:pPr algn="ctr"/>
+          <a:bodyPr vert="horz" lIns="91440" tIns="45720" rIns="91440" bIns="45720" rtlCol="0">
+            <a:normAutofit/>
+          </a:bodyPr>
+          <a:lstStyle>
+            <a:lvl1pPr marL="0" indent="0" algn="l" defTabSz="914400" rtl="0" eaLnBrk="1" latinLnBrk="0" hangingPunct="1">
+              <a:spcBef>
+                <a:spcPts val="0"/>
+              </a:spcBef>
+              <a:buFont typeface="Arial" pitchFamily="34" charset="0"/>
+              <a:buNone/>
+              <a:defRPr sz="2400" kern="1200">
+                <a:solidFill>
+                  <a:schemeClr val="bg2"/>
+                </a:solidFill>
+                <a:latin typeface="Consolas" panose="020B0609020204030204" pitchFamily="49" charset="0"/>
+                <a:ea typeface="+mn-ea"/>
+                <a:cs typeface="+mn-cs"/>
+              </a:defRPr>
+            </a:lvl1pPr>
+            <a:lvl2pPr marL="742950" indent="-285750" algn="l" defTabSz="914400" rtl="0" eaLnBrk="1" latinLnBrk="0" hangingPunct="1">
+              <a:spcBef>
+                <a:spcPts val="0"/>
+              </a:spcBef>
+              <a:buFont typeface="Arial" pitchFamily="34" charset="0"/>
+              <a:buChar char="–"/>
+              <a:defRPr sz="2700" kern="1200">
+                <a:solidFill>
+                  <a:srgbClr val="010101"/>
+                </a:solidFill>
+                <a:latin typeface="+mn-lt"/>
+                <a:ea typeface="+mn-ea"/>
+                <a:cs typeface="+mn-cs"/>
+              </a:defRPr>
+            </a:lvl2pPr>
+            <a:lvl3pPr marL="1143000" indent="-228600" algn="l" defTabSz="914400" rtl="0" eaLnBrk="1" latinLnBrk="0" hangingPunct="1">
+              <a:spcBef>
+                <a:spcPts val="0"/>
+              </a:spcBef>
+              <a:buFont typeface="Arial" pitchFamily="34" charset="0"/>
+              <a:buChar char="•"/>
+              <a:defRPr sz="2400" kern="1200">
+                <a:solidFill>
+                  <a:srgbClr val="010101"/>
+                </a:solidFill>
+                <a:latin typeface="+mn-lt"/>
+                <a:ea typeface="+mn-ea"/>
+                <a:cs typeface="+mn-cs"/>
+              </a:defRPr>
+            </a:lvl3pPr>
+            <a:lvl4pPr marL="1600200" indent="-228600" algn="l" defTabSz="914400" rtl="0" eaLnBrk="1" latinLnBrk="0" hangingPunct="1">
+              <a:spcBef>
+                <a:spcPts val="0"/>
+              </a:spcBef>
+              <a:buFont typeface="Arial" pitchFamily="34" charset="0"/>
+              <a:buChar char="–"/>
+              <a:defRPr sz="2100" kern="1200">
+                <a:solidFill>
+                  <a:srgbClr val="010101"/>
+                </a:solidFill>
+                <a:latin typeface="+mn-lt"/>
+                <a:ea typeface="+mn-ea"/>
+                <a:cs typeface="+mn-cs"/>
+              </a:defRPr>
+            </a:lvl4pPr>
+            <a:lvl5pPr marL="2057400" indent="-228600" algn="l" defTabSz="914400" rtl="0" eaLnBrk="1" latinLnBrk="0" hangingPunct="1">
+              <a:spcBef>
+                <a:spcPts val="0"/>
+              </a:spcBef>
+              <a:buFont typeface="Arial" pitchFamily="34" charset="0"/>
+              <a:buChar char="»"/>
+              <a:defRPr sz="2100" kern="1200">
+                <a:solidFill>
+                  <a:srgbClr val="010101"/>
+                </a:solidFill>
+                <a:latin typeface="+mn-lt"/>
+                <a:ea typeface="+mn-ea"/>
+                <a:cs typeface="+mn-cs"/>
+              </a:defRPr>
+            </a:lvl5pPr>
+            <a:lvl6pPr marL="2514600" indent="-228600" algn="l" defTabSz="914400" rtl="0" eaLnBrk="1" latinLnBrk="0" hangingPunct="1">
+              <a:spcBef>
+                <a:spcPct val="20000"/>
+              </a:spcBef>
+              <a:buFont typeface="Arial" pitchFamily="34" charset="0"/>
+              <a:buChar char="•"/>
+              <a:defRPr sz="2000" kern="1200">
+                <a:solidFill>
+                  <a:schemeClr val="tx1"/>
+                </a:solidFill>
+                <a:latin typeface="+mn-lt"/>
+                <a:ea typeface="+mn-ea"/>
+                <a:cs typeface="+mn-cs"/>
+              </a:defRPr>
+            </a:lvl6pPr>
+            <a:lvl7pPr marL="2971800" indent="-228600" algn="l" defTabSz="914400" rtl="0" eaLnBrk="1" latinLnBrk="0" hangingPunct="1">
+              <a:spcBef>
+                <a:spcPct val="20000"/>
+              </a:spcBef>
+              <a:buFont typeface="Arial" pitchFamily="34" charset="0"/>
+              <a:buChar char="•"/>
+              <a:defRPr sz="2000" kern="1200">
+                <a:solidFill>
+                  <a:schemeClr val="tx1"/>
+                </a:solidFill>
+                <a:latin typeface="+mn-lt"/>
+                <a:ea typeface="+mn-ea"/>
+                <a:cs typeface="+mn-cs"/>
+              </a:defRPr>
+            </a:lvl7pPr>
+            <a:lvl8pPr marL="3429000" indent="-228600" algn="l" defTabSz="914400" rtl="0" eaLnBrk="1" latinLnBrk="0" hangingPunct="1">
+              <a:spcBef>
+                <a:spcPct val="20000"/>
+              </a:spcBef>
+              <a:buFont typeface="Arial" pitchFamily="34" charset="0"/>
+              <a:buChar char="•"/>
+              <a:defRPr sz="2000" kern="1200">
+                <a:solidFill>
+                  <a:schemeClr val="tx1"/>
+                </a:solidFill>
+                <a:latin typeface="+mn-lt"/>
+                <a:ea typeface="+mn-ea"/>
+                <a:cs typeface="+mn-cs"/>
+              </a:defRPr>
+            </a:lvl8pPr>
+            <a:lvl9pPr marL="3886200" indent="-228600" algn="l" defTabSz="914400" rtl="0" eaLnBrk="1" latinLnBrk="0" hangingPunct="1">
+              <a:spcBef>
+                <a:spcPct val="20000"/>
+              </a:spcBef>
+              <a:buFont typeface="Arial" pitchFamily="34" charset="0"/>
+              <a:buChar char="•"/>
+              <a:defRPr sz="2000" kern="1200">
+                <a:solidFill>
+                  <a:schemeClr val="tx1"/>
+                </a:solidFill>
+                <a:latin typeface="+mn-lt"/>
+                <a:ea typeface="+mn-ea"/>
+                <a:cs typeface="+mn-cs"/>
+              </a:defRPr>
+            </a:lvl9pPr>
+          </a:lstStyle>
+          <a:p>
+            <a:r>
+              <a:rPr lang="en-US"/>
+              <a:t> </a:t>
+            </a:r>
             <a:endParaRPr lang="en-US" dirty="0"/>
           </a:p>
         </p:txBody>
       </p:sp>
     </p:spTree>
+    <p:extLst>
+      <p:ext uri="{BB962C8B-B14F-4D97-AF65-F5344CB8AC3E}">
+        <p14:creationId xmlns:p14="http://schemas.microsoft.com/office/powerpoint/2010/main" val="41312979"/>
+      </p:ext>
+    </p:extLst>
   </p:cSld>
   <p:clrMapOvr>
     <a:masterClrMapping/>
   </p:clrMapOvr>
-  <mc:AlternateContent xmlns:mc="http://schemas.openxmlformats.org/markup-compatibility/2006" xmlns:p159="http://schemas.microsoft.com/office/powerpoint/2015/09/main">
-    <mc:Choice Requires="p159">
+  <mc:AlternateContent xmlns:mc="http://schemas.openxmlformats.org/markup-compatibility/2006">
+    <mc:Choice xmlns:p159="http://schemas.microsoft.com/office/powerpoint/2015/09/main" Requires="p159">
       <p:transition spd="slow">
         <p159:morph option="byObject"/>
       </p:transition>
     </mc:Choice>
-    <mc:Fallback xmlns="">
+    <mc:Fallback>
       <p:transition spd="slow">
         <p:fade/>
       </p:transition>
@@ -14905,7 +14978,13 @@
   <p:cSld>
     <p:spTree>
       <p:nvGrpSpPr>
-        <p:cNvPr id="1" name=""/>
+        <p:cNvPr id="1" name="">
+          <a:extLst>
+            <a:ext uri="{FF2B5EF4-FFF2-40B4-BE49-F238E27FC236}">
+              <a16:creationId xmlns:a16="http://schemas.microsoft.com/office/drawing/2014/main" id="{91C758E0-FC7D-8264-7764-AA797BA8337B}"/>
+            </a:ext>
+          </a:extLst>
+        </p:cNvPr>
         <p:cNvGrpSpPr/>
         <p:nvPr/>
       </p:nvGrpSpPr>
@@ -14919,7 +14998,13 @@
       </p:grpSpPr>
       <p:sp>
         <p:nvSpPr>
-          <p:cNvPr id="24" name="Title 1"/>
+          <p:cNvPr id="24" name="Title 1">
+            <a:extLst>
+              <a:ext uri="{FF2B5EF4-FFF2-40B4-BE49-F238E27FC236}">
+                <a16:creationId xmlns:a16="http://schemas.microsoft.com/office/drawing/2014/main" id="{E3DA0142-4AAF-0A8E-E4DE-861AD3DBC8A1}"/>
+              </a:ext>
+            </a:extLst>
+          </p:cNvPr>
           <p:cNvSpPr>
             <a:spLocks noGrp="1"/>
           </p:cNvSpPr>
@@ -14933,6 +15018,12 @@
           <a:lstStyle/>
           <a:p>
             <a:r>
+              <a:rPr>
+                <a:solidFill>
+                  <a:srgbClr val="F7F9FF"/>
+                </a:solidFill>
+                <a:latin typeface="Segoe UI Semibold"/>
+              </a:rPr>
               <a:t>Example Query</a:t>
             </a:r>
           </a:p>
@@ -14940,7 +15031,13 @@
       </p:sp>
       <p:sp>
         <p:nvSpPr>
-          <p:cNvPr id="9001" name="Text Placeholder 2"/>
+          <p:cNvPr id="9001" name="Text Placeholder 2">
+            <a:extLst>
+              <a:ext uri="{FF2B5EF4-FFF2-40B4-BE49-F238E27FC236}">
+                <a16:creationId xmlns:a16="http://schemas.microsoft.com/office/drawing/2014/main" id="{0BB2C1B4-0641-433F-BFA9-205AC8180C0D}"/>
+              </a:ext>
+            </a:extLst>
+          </p:cNvPr>
           <p:cNvSpPr>
             <a:spLocks noGrp="1"/>
           </p:cNvSpPr>
@@ -14948,12 +15045,18 @@
             <p:ph type="body" sz="quarter" idx="26"/>
           </p:nvPr>
         </p:nvSpPr>
-        <p:spPr/>
+        <p:spPr>
+          <a:xfrm>
+            <a:off x="1176913" y="2703443"/>
+            <a:ext cx="15585333" cy="4333461"/>
+          </a:xfrm>
+        </p:spPr>
         <p:txBody>
           <a:bodyPr/>
           <a:lstStyle/>
           <a:p>
             <a:r>
+              <a:rPr dirty="0"/>
               <a:t> </a:t>
             </a:r>
           </a:p>
@@ -14961,14 +15064,20 @@
       </p:sp>
       <p:sp>
         <p:nvSpPr>
-          <p:cNvPr id="9002" name="TextBox 9001"/>
+          <p:cNvPr id="9" name="TextBox 8">
+            <a:extLst>
+              <a:ext uri="{FF2B5EF4-FFF2-40B4-BE49-F238E27FC236}">
+                <a16:creationId xmlns:a16="http://schemas.microsoft.com/office/drawing/2014/main" id="{9BEC412D-F38A-7751-EEFE-19D24C5A7DC3}"/>
+              </a:ext>
+            </a:extLst>
+          </p:cNvPr>
           <p:cNvSpPr txBox="1"/>
           <p:nvPr/>
         </p:nvSpPr>
         <p:spPr>
           <a:xfrm>
-            <a:off x="2200000" y="3400000"/>
-            <a:ext cx="14000000" cy="3100000"/>
+            <a:off x="2119767" y="3450040"/>
+            <a:ext cx="14857136" cy="2723823"/>
           </a:xfrm>
           <a:prstGeom prst="rect">
             <a:avLst/>
@@ -14976,194 +15085,1022 @@
           <a:noFill/>
         </p:spPr>
         <p:txBody>
-          <a:bodyPr wrap="none" lIns="0" tIns="0" rIns="0" bIns="0">
+          <a:bodyPr wrap="square">
             <a:spAutoFit/>
           </a:bodyPr>
           <a:lstStyle/>
           <a:p>
-            <a:r>
-              <a:rPr sz="3400">
+            <a:pPr>
+              <a:buNone/>
+            </a:pPr>
+            <a:endParaRPr lang="en-US" sz="4200" b="0" dirty="0">
+              <a:solidFill>
+                <a:srgbClr val="8C8C8C"/>
+              </a:solidFill>
+              <a:effectLst/>
+              <a:latin typeface="Cascadia Code" panose="020B0609020000020004" pitchFamily="34" charset="0"/>
+            </a:endParaRPr>
+          </a:p>
+          <a:p>
+            <a:pPr>
+              <a:buNone/>
+            </a:pPr>
+            <a:r>
+              <a:rPr lang="en-US" sz="4200" b="0" dirty="0">
+                <a:solidFill>
+                  <a:srgbClr val="8C8C8C"/>
+                </a:solidFill>
+                <a:effectLst/>
+                <a:latin typeface="Cascadia Code" panose="020B0609020000020004" pitchFamily="34" charset="0"/>
+              </a:rPr>
+              <a:t>| </a:t>
+            </a:r>
+            <a:r>
+              <a:rPr lang="en-US" sz="4200" dirty="0">
+                <a:solidFill>
+                  <a:srgbClr val="C586C0"/>
+                </a:solidFill>
+                <a:latin typeface="Cascadia Code" panose="020B0609020000020004" pitchFamily="34" charset="0"/>
+              </a:rPr>
+              <a:t>     </a:t>
+            </a:r>
+            <a:r>
+              <a:rPr lang="en-US" sz="4200" b="0" dirty="0">
+                <a:solidFill>
+                  <a:srgbClr val="8C8C8C"/>
+                </a:solidFill>
+                <a:effectLst/>
+                <a:latin typeface="Cascadia Code" panose="020B0609020000020004" pitchFamily="34" charset="0"/>
+              </a:rPr>
+              <a:t> </a:t>
+            </a:r>
+            <a:r>
+              <a:rPr lang="en-US" sz="4200" b="0" dirty="0">
                 <a:solidFill>
                   <a:srgbClr val="569CD6"/>
                 </a:solidFill>
-                <a:latin typeface="Cascadia Code"/>
+                <a:effectLst/>
+                <a:latin typeface="Cascadia Code" panose="020B0609020000020004" pitchFamily="34" charset="0"/>
+              </a:rPr>
+              <a:t>type</a:t>
+            </a:r>
+            <a:r>
+              <a:rPr lang="en-US" sz="4200" b="0" dirty="0">
+                <a:solidFill>
+                  <a:srgbClr val="8C8C8C"/>
+                </a:solidFill>
+                <a:effectLst/>
+                <a:latin typeface="Cascadia Code" panose="020B0609020000020004" pitchFamily="34" charset="0"/>
+              </a:rPr>
+              <a:t> </a:t>
+            </a:r>
+            <a:r>
+              <a:rPr lang="en-US" sz="4200" b="0" dirty="0">
+                <a:solidFill>
+                  <a:schemeClr val="tx1"/>
+                </a:solidFill>
+                <a:effectLst/>
+                <a:latin typeface="Cascadia Code" panose="020B0609020000020004" pitchFamily="34" charset="0"/>
+              </a:rPr>
+              <a:t>==</a:t>
+            </a:r>
+            <a:r>
+              <a:rPr lang="en-US" sz="4200" b="0" dirty="0">
+                <a:solidFill>
+                  <a:srgbClr val="8C8C8C"/>
+                </a:solidFill>
+                <a:effectLst/>
+                <a:latin typeface="Cascadia Code" panose="020B0609020000020004" pitchFamily="34" charset="0"/>
+              </a:rPr>
+              <a:t> </a:t>
+            </a:r>
+            <a:r>
+              <a:rPr lang="en-US" sz="4200" dirty="0">
+                <a:solidFill>
+                  <a:srgbClr val="CE9178"/>
+                </a:solidFill>
+                <a:latin typeface="Cascadia Code" panose="020B0609020000020004" pitchFamily="34" charset="0"/>
+              </a:rPr>
+              <a:t>‘</a:t>
+            </a:r>
+            <a:r>
+              <a:rPr lang="en-US" sz="4200" b="0" dirty="0" err="1">
+                <a:solidFill>
+                  <a:srgbClr val="CE9178"/>
+                </a:solidFill>
+                <a:effectLst/>
+                <a:latin typeface="Cascadia Code" panose="020B0609020000020004" pitchFamily="34" charset="0"/>
+              </a:rPr>
+              <a:t>microsoft.keyvault</a:t>
+            </a:r>
+            <a:r>
+              <a:rPr lang="en-US" sz="4200" b="0" dirty="0">
+                <a:solidFill>
+                  <a:srgbClr val="CE9178"/>
+                </a:solidFill>
+                <a:effectLst/>
+                <a:latin typeface="Cascadia Code" panose="020B0609020000020004" pitchFamily="34" charset="0"/>
+              </a:rPr>
+              <a:t>/vaults’</a:t>
+            </a:r>
+          </a:p>
+          <a:p>
+            <a:pPr>
+              <a:buNone/>
+            </a:pPr>
+            <a:r>
+              <a:rPr lang="en-US" sz="4200" b="0" dirty="0">
+                <a:solidFill>
+                  <a:srgbClr val="569CD6"/>
+                </a:solidFill>
+                <a:effectLst/>
+                <a:latin typeface="Cascadia Code" panose="020B0609020000020004" pitchFamily="34" charset="0"/>
+              </a:rPr>
+              <a:t>            name</a:t>
+            </a:r>
+            <a:r>
+              <a:rPr lang="en-US" sz="4200" b="0" dirty="0">
+                <a:solidFill>
+                  <a:srgbClr val="C586C0"/>
+                </a:solidFill>
+                <a:effectLst/>
+                <a:latin typeface="Cascadia Code" panose="020B0609020000020004" pitchFamily="34" charset="0"/>
+              </a:rPr>
+              <a:t>        </a:t>
+            </a:r>
+            <a:r>
+              <a:rPr lang="en-US" sz="4200" b="0" dirty="0">
+                <a:solidFill>
+                  <a:srgbClr val="8C8C8C"/>
+                </a:solidFill>
+                <a:effectLst/>
+                <a:latin typeface="Cascadia Code" panose="020B0609020000020004" pitchFamily="34" charset="0"/>
+              </a:rPr>
+              <a:t>  </a:t>
+            </a:r>
+            <a:r>
+              <a:rPr lang="en-US" sz="4200" dirty="0">
+                <a:solidFill>
+                  <a:srgbClr val="CE9178"/>
+                </a:solidFill>
+                <a:latin typeface="Cascadia Code" panose="020B0609020000020004" pitchFamily="34" charset="0"/>
+              </a:rPr>
+              <a:t>‘</a:t>
+            </a:r>
+            <a:r>
+              <a:rPr lang="en-US" sz="4200" b="0" dirty="0" err="1">
+                <a:solidFill>
+                  <a:srgbClr val="CE9178"/>
+                </a:solidFill>
+                <a:effectLst/>
+                <a:latin typeface="Cascadia Code" panose="020B0609020000020004" pitchFamily="34" charset="0"/>
+              </a:rPr>
+              <a:t>kv</a:t>
+            </a:r>
+            <a:r>
+              <a:rPr lang="en-US" sz="4200" b="0" dirty="0">
+                <a:solidFill>
+                  <a:srgbClr val="CE9178"/>
+                </a:solidFill>
+                <a:effectLst/>
+                <a:latin typeface="Cascadia Code" panose="020B0609020000020004" pitchFamily="34" charset="0"/>
+              </a:rPr>
+              <a:t>’</a:t>
+            </a:r>
+          </a:p>
+          <a:p>
+            <a:pPr>
+              <a:buNone/>
+            </a:pPr>
+            <a:r>
+              <a:rPr lang="en-US" sz="4200" b="0" dirty="0">
+                <a:solidFill>
+                  <a:srgbClr val="569CD6"/>
+                </a:solidFill>
+                <a:effectLst/>
+                <a:latin typeface="Cascadia Code" panose="020B0609020000020004" pitchFamily="34" charset="0"/>
+              </a:rPr>
+              <a:t>		    </a:t>
+            </a:r>
+            <a:r>
+              <a:rPr lang="en-US" sz="4200" b="0" dirty="0">
+                <a:solidFill>
+                  <a:srgbClr val="8C8C8C"/>
+                </a:solidFill>
+                <a:effectLst/>
+                <a:latin typeface="Cascadia Code" panose="020B0609020000020004" pitchFamily="34" charset="0"/>
+              </a:rPr>
+              <a:t> </a:t>
+            </a:r>
+            <a:r>
+              <a:rPr lang="en-US" sz="4200" b="0" dirty="0">
+                <a:solidFill>
+                  <a:srgbClr val="DCDCAA"/>
+                </a:solidFill>
+                <a:effectLst/>
+                <a:latin typeface="Cascadia Code" panose="020B0609020000020004" pitchFamily="34" charset="0"/>
+              </a:rPr>
+              <a:t>     </a:t>
+            </a:r>
+            <a:r>
+              <a:rPr lang="en-US" sz="4200" b="0" dirty="0">
+                <a:solidFill>
+                  <a:schemeClr val="tx1"/>
+                </a:solidFill>
+                <a:effectLst/>
+                <a:latin typeface="Cascadia Code" panose="020B0609020000020004" pitchFamily="34" charset="0"/>
+              </a:rPr>
+              <a:t>tags</a:t>
+            </a:r>
+            <a:r>
+              <a:rPr lang="en-US" sz="4200" b="0" dirty="0">
+                <a:solidFill>
+                  <a:srgbClr val="6A9955"/>
+                </a:solidFill>
+                <a:effectLst/>
+                <a:latin typeface="Cascadia Code" panose="020B0609020000020004" pitchFamily="34" charset="0"/>
+              </a:rPr>
+              <a:t>[</a:t>
+            </a:r>
+            <a:r>
+              <a:rPr lang="en-US" sz="4200" dirty="0">
+                <a:solidFill>
+                  <a:srgbClr val="CE9178"/>
+                </a:solidFill>
+                <a:latin typeface="Cascadia Code" panose="020B0609020000020004" pitchFamily="34" charset="0"/>
+              </a:rPr>
+              <a:t>‘</a:t>
+            </a:r>
+            <a:r>
+              <a:rPr lang="en-US" sz="4200" b="0" dirty="0">
+                <a:solidFill>
+                  <a:srgbClr val="CE9178"/>
+                </a:solidFill>
+                <a:effectLst/>
+                <a:latin typeface="Cascadia Code" panose="020B0609020000020004" pitchFamily="34" charset="0"/>
+              </a:rPr>
+              <a:t>env</a:t>
+            </a:r>
+            <a:r>
+              <a:rPr lang="en-US" sz="4200" dirty="0">
+                <a:solidFill>
+                  <a:srgbClr val="CE9178"/>
+                </a:solidFill>
+                <a:latin typeface="Cascadia Code" panose="020B0609020000020004" pitchFamily="34" charset="0"/>
+              </a:rPr>
+              <a:t>’</a:t>
+            </a:r>
+            <a:r>
+              <a:rPr lang="en-US" sz="4200" b="0" dirty="0">
+                <a:solidFill>
+                  <a:srgbClr val="6A9955"/>
+                </a:solidFill>
+                <a:effectLst/>
+                <a:latin typeface="Cascadia Code" panose="020B0609020000020004" pitchFamily="34" charset="0"/>
+              </a:rPr>
+              <a:t>]</a:t>
+            </a:r>
+            <a:r>
+              <a:rPr lang="en-US" sz="4200" b="0" dirty="0">
+                <a:solidFill>
+                  <a:srgbClr val="8C8C8C"/>
+                </a:solidFill>
+                <a:effectLst/>
+                <a:latin typeface="Cascadia Code" panose="020B0609020000020004" pitchFamily="34" charset="0"/>
+              </a:rPr>
+              <a:t> </a:t>
+            </a:r>
+            <a:r>
+              <a:rPr lang="en-US" sz="4200" b="0" dirty="0">
+                <a:solidFill>
+                  <a:schemeClr val="tx1"/>
+                </a:solidFill>
+                <a:effectLst/>
+                <a:latin typeface="Cascadia Code" panose="020B0609020000020004" pitchFamily="34" charset="0"/>
+              </a:rPr>
+              <a:t>==</a:t>
+            </a:r>
+            <a:r>
+              <a:rPr lang="en-US" sz="4200" b="0" dirty="0">
+                <a:solidFill>
+                  <a:srgbClr val="8C8C8C"/>
+                </a:solidFill>
+                <a:effectLst/>
+                <a:latin typeface="Cascadia Code" panose="020B0609020000020004" pitchFamily="34" charset="0"/>
+              </a:rPr>
+              <a:t> </a:t>
+            </a:r>
+            <a:r>
+              <a:rPr lang="en-US" sz="4200" dirty="0">
+                <a:solidFill>
+                  <a:srgbClr val="CE9178"/>
+                </a:solidFill>
+                <a:latin typeface="Cascadia Code" panose="020B0609020000020004" pitchFamily="34" charset="0"/>
+              </a:rPr>
+              <a:t>‘</a:t>
+            </a:r>
+            <a:r>
+              <a:rPr lang="en-US" sz="4200" b="0" dirty="0">
+                <a:solidFill>
+                  <a:srgbClr val="CE9178"/>
+                </a:solidFill>
+                <a:effectLst/>
+                <a:latin typeface="Cascadia Code" panose="020B0609020000020004" pitchFamily="34" charset="0"/>
+              </a:rPr>
+              <a:t>prod’</a:t>
+            </a:r>
+          </a:p>
+        </p:txBody>
+      </p:sp>
+      <p:sp>
+        <p:nvSpPr>
+          <p:cNvPr id="10" name="TextBox 9">
+            <a:extLst>
+              <a:ext uri="{FF2B5EF4-FFF2-40B4-BE49-F238E27FC236}">
+                <a16:creationId xmlns:a16="http://schemas.microsoft.com/office/drawing/2014/main" id="{CA0C27CC-1AFC-917F-5554-AE8ABD4C148B}"/>
+              </a:ext>
+            </a:extLst>
+          </p:cNvPr>
+          <p:cNvSpPr txBox="1"/>
+          <p:nvPr/>
+        </p:nvSpPr>
+        <p:spPr>
+          <a:xfrm>
+            <a:off x="2119768" y="3450040"/>
+            <a:ext cx="3105345" cy="784830"/>
+          </a:xfrm>
+          <a:prstGeom prst="rect">
+            <a:avLst/>
+          </a:prstGeom>
+          <a:noFill/>
+        </p:spPr>
+        <p:txBody>
+          <a:bodyPr wrap="square">
+            <a:spAutoFit/>
+          </a:bodyPr>
+          <a:lstStyle/>
+          <a:p>
+            <a:pPr>
+              <a:buNone/>
+            </a:pPr>
+            <a:r>
+              <a:rPr lang="en-US" sz="4200" b="0" dirty="0">
+                <a:solidFill>
+                  <a:srgbClr val="569CD6"/>
+                </a:solidFill>
+                <a:effectLst/>
+                <a:latin typeface="Cascadia Code" panose="020B0609020000020004" pitchFamily="34" charset="0"/>
               </a:rPr>
               <a:t>Resources</a:t>
             </a:r>
           </a:p>
-          <a:p>
-            <a:r>
-              <a:rPr sz="3400">
-                <a:solidFill>
-                  <a:srgbClr val="8C8C8C"/>
-                </a:solidFill>
-                <a:latin typeface="Cascadia Code"/>
-              </a:rPr>
-              <a:t>| </a:t>
-            </a:r>
-            <a:r>
-              <a:rPr sz="3400">
+        </p:txBody>
+      </p:sp>
+      <p:sp>
+        <p:nvSpPr>
+          <p:cNvPr id="11" name="TextBox 10">
+            <a:extLst>
+              <a:ext uri="{FF2B5EF4-FFF2-40B4-BE49-F238E27FC236}">
+                <a16:creationId xmlns:a16="http://schemas.microsoft.com/office/drawing/2014/main" id="{A1E20C84-96A5-0BEF-F7CB-E3C8B35CD828}"/>
+              </a:ext>
+            </a:extLst>
+          </p:cNvPr>
+          <p:cNvSpPr txBox="1"/>
+          <p:nvPr/>
+        </p:nvSpPr>
+        <p:spPr>
+          <a:xfrm>
+            <a:off x="2736075" y="4105488"/>
+            <a:ext cx="1948978" cy="784830"/>
+          </a:xfrm>
+          <a:prstGeom prst="rect">
+            <a:avLst/>
+          </a:prstGeom>
+          <a:noFill/>
+        </p:spPr>
+        <p:txBody>
+          <a:bodyPr wrap="square">
+            <a:spAutoFit/>
+          </a:bodyPr>
+          <a:lstStyle/>
+          <a:p>
+            <a:r>
+              <a:rPr lang="en-US" sz="4200" b="0" i="1" dirty="0">
                 <a:solidFill>
                   <a:srgbClr val="C586C0"/>
                 </a:solidFill>
-                <a:latin typeface="Cascadia Code"/>
-              </a:rPr>
-              <a:t>where </a:t>
-            </a:r>
-            <a:r>
-              <a:rPr sz="3400">
+                <a:effectLst/>
+                <a:latin typeface="Cascadia Code" panose="020B0609020000020004" pitchFamily="34" charset="0"/>
+              </a:rPr>
+              <a:t>where</a:t>
+            </a:r>
+            <a:endParaRPr lang="en-US" sz="4200" i="1" dirty="0">
+              <a:solidFill>
+                <a:srgbClr val="C586C0"/>
+              </a:solidFill>
+            </a:endParaRPr>
+          </a:p>
+        </p:txBody>
+      </p:sp>
+      <p:sp>
+        <p:nvSpPr>
+          <p:cNvPr id="12" name="TextBox 11">
+            <a:extLst>
+              <a:ext uri="{FF2B5EF4-FFF2-40B4-BE49-F238E27FC236}">
+                <a16:creationId xmlns:a16="http://schemas.microsoft.com/office/drawing/2014/main" id="{9A92436B-8AF2-8B0A-A046-071BF3081F7B}"/>
+              </a:ext>
+            </a:extLst>
+          </p:cNvPr>
+          <p:cNvSpPr txBox="1"/>
+          <p:nvPr/>
+        </p:nvSpPr>
+        <p:spPr>
+          <a:xfrm>
+            <a:off x="7444600" y="4743970"/>
+            <a:ext cx="2920532" cy="784830"/>
+          </a:xfrm>
+          <a:prstGeom prst="rect">
+            <a:avLst/>
+          </a:prstGeom>
+          <a:noFill/>
+        </p:spPr>
+        <p:txBody>
+          <a:bodyPr wrap="square">
+            <a:spAutoFit/>
+          </a:bodyPr>
+          <a:lstStyle/>
+          <a:p>
+            <a:r>
+              <a:rPr lang="en-US" sz="4200" b="0" i="1" dirty="0">
+                <a:solidFill>
+                  <a:srgbClr val="C586C0"/>
+                </a:solidFill>
+                <a:effectLst/>
+                <a:latin typeface="Cascadia Code" panose="020B0609020000020004" pitchFamily="34" charset="0"/>
+              </a:rPr>
+              <a:t>contains </a:t>
+            </a:r>
+            <a:endParaRPr lang="en-US" sz="4200" i="1" dirty="0">
+              <a:solidFill>
+                <a:srgbClr val="C586C0"/>
+              </a:solidFill>
+            </a:endParaRPr>
+          </a:p>
+        </p:txBody>
+      </p:sp>
+      <p:sp>
+        <p:nvSpPr>
+          <p:cNvPr id="13" name="TextBox 12">
+            <a:extLst>
+              <a:ext uri="{FF2B5EF4-FFF2-40B4-BE49-F238E27FC236}">
+                <a16:creationId xmlns:a16="http://schemas.microsoft.com/office/drawing/2014/main" id="{0415D5A5-9C53-75E6-B868-BD14BA2F1F59}"/>
+              </a:ext>
+            </a:extLst>
+          </p:cNvPr>
+          <p:cNvSpPr txBox="1"/>
+          <p:nvPr/>
+        </p:nvSpPr>
+        <p:spPr>
+          <a:xfrm>
+            <a:off x="5858170" y="5384283"/>
+            <a:ext cx="1555329" cy="784830"/>
+          </a:xfrm>
+          <a:prstGeom prst="rect">
+            <a:avLst/>
+          </a:prstGeom>
+          <a:noFill/>
+        </p:spPr>
+        <p:txBody>
+          <a:bodyPr wrap="square">
+            <a:spAutoFit/>
+          </a:bodyPr>
+          <a:lstStyle/>
+          <a:p>
+            <a:r>
+              <a:rPr lang="en-US" sz="4200" b="0" dirty="0">
                 <a:solidFill>
                   <a:srgbClr val="569CD6"/>
                 </a:solidFill>
-                <a:latin typeface="Cascadia Code"/>
-              </a:rPr>
-              <a:t>type</a:t>
-            </a:r>
-            <a:r>
-              <a:rPr sz="3400">
-                <a:solidFill>
-                  <a:srgbClr val="E3E3E3"/>
-                </a:solidFill>
-                <a:latin typeface="Cascadia Code"/>
-              </a:rPr>
-              <a:t> == </a:t>
-            </a:r>
-            <a:r>
-              <a:rPr sz="3400">
-                <a:solidFill>
-                  <a:srgbClr val="CE9178"/>
-                </a:solidFill>
-                <a:latin typeface="Cascadia Code"/>
-              </a:rPr>
-              <a:t>'microsoft.keyvault/vaults'</a:t>
-            </a:r>
-          </a:p>
-          <a:p>
-            <a:r>
-              <a:rPr sz="3400">
-                <a:solidFill>
-                  <a:srgbClr val="8C8C8C"/>
-                </a:solidFill>
-                <a:latin typeface="Cascadia Code"/>
-              </a:rPr>
-              <a:t>| </a:t>
-            </a:r>
-            <a:r>
-              <a:rPr sz="3400">
+                <a:effectLst/>
+                <a:latin typeface="Cascadia Code" panose="020B0609020000020004" pitchFamily="34" charset="0"/>
+              </a:rPr>
+              <a:t>not(</a:t>
+            </a:r>
+            <a:endParaRPr lang="en-US" sz="4200" dirty="0">
+              <a:solidFill>
+                <a:srgbClr val="569CD6"/>
+              </a:solidFill>
+            </a:endParaRPr>
+          </a:p>
+        </p:txBody>
+      </p:sp>
+      <p:sp>
+        <p:nvSpPr>
+          <p:cNvPr id="14" name="TextBox 13">
+            <a:extLst>
+              <a:ext uri="{FF2B5EF4-FFF2-40B4-BE49-F238E27FC236}">
+                <a16:creationId xmlns:a16="http://schemas.microsoft.com/office/drawing/2014/main" id="{835615C9-96A1-A0C3-9B92-045D07166395}"/>
+              </a:ext>
+            </a:extLst>
+          </p:cNvPr>
+          <p:cNvSpPr txBox="1"/>
+          <p:nvPr/>
+        </p:nvSpPr>
+        <p:spPr>
+          <a:xfrm>
+            <a:off x="13534346" y="5384283"/>
+            <a:ext cx="666489" cy="784830"/>
+          </a:xfrm>
+          <a:prstGeom prst="rect">
+            <a:avLst/>
+          </a:prstGeom>
+          <a:noFill/>
+        </p:spPr>
+        <p:txBody>
+          <a:bodyPr wrap="square">
+            <a:spAutoFit/>
+          </a:bodyPr>
+          <a:lstStyle/>
+          <a:p>
+            <a:r>
+              <a:rPr lang="en-US" sz="4200" b="0" dirty="0">
+                <a:solidFill>
+                  <a:srgbClr val="569CD6"/>
+                </a:solidFill>
+                <a:effectLst/>
+                <a:latin typeface="Cascadia Code" panose="020B0609020000020004" pitchFamily="34" charset="0"/>
+              </a:rPr>
+              <a:t>)</a:t>
+            </a:r>
+            <a:endParaRPr lang="en-US" sz="4200" dirty="0">
+              <a:solidFill>
+                <a:srgbClr val="569CD6"/>
+              </a:solidFill>
+            </a:endParaRPr>
+          </a:p>
+        </p:txBody>
+      </p:sp>
+      <p:sp>
+        <p:nvSpPr>
+          <p:cNvPr id="15" name="TextBox 14">
+            <a:extLst>
+              <a:ext uri="{FF2B5EF4-FFF2-40B4-BE49-F238E27FC236}">
+                <a16:creationId xmlns:a16="http://schemas.microsoft.com/office/drawing/2014/main" id="{60FEF789-B641-A127-D612-48FEB77DCE07}"/>
+              </a:ext>
+            </a:extLst>
+          </p:cNvPr>
+          <p:cNvSpPr txBox="1"/>
+          <p:nvPr/>
+        </p:nvSpPr>
+        <p:spPr>
+          <a:xfrm>
+            <a:off x="4666980" y="4739374"/>
+            <a:ext cx="1268760" cy="784830"/>
+          </a:xfrm>
+          <a:prstGeom prst="rect">
+            <a:avLst/>
+          </a:prstGeom>
+          <a:noFill/>
+        </p:spPr>
+        <p:txBody>
+          <a:bodyPr wrap="square">
+            <a:spAutoFit/>
+          </a:bodyPr>
+          <a:lstStyle/>
+          <a:p>
+            <a:r>
+              <a:rPr lang="en-US" sz="4200" b="0" dirty="0">
                 <a:solidFill>
                   <a:srgbClr val="C586C0"/>
                 </a:solidFill>
-                <a:latin typeface="Cascadia Code"/>
-              </a:rPr>
-              <a:t>and </a:t>
-            </a:r>
-            <a:r>
-              <a:rPr sz="3400">
-                <a:solidFill>
-                  <a:srgbClr val="569CD6"/>
-                </a:solidFill>
-                <a:latin typeface="Cascadia Code"/>
-              </a:rPr>
-              <a:t>name </a:t>
-            </a:r>
-            <a:r>
-              <a:rPr sz="3400">
+                <a:effectLst/>
+                <a:latin typeface="Cascadia Code" panose="020B0609020000020004" pitchFamily="34" charset="0"/>
+              </a:rPr>
+              <a:t>and</a:t>
+            </a:r>
+            <a:endParaRPr lang="en-US" sz="4200" dirty="0">
+              <a:solidFill>
+                <a:srgbClr val="C586C0"/>
+              </a:solidFill>
+            </a:endParaRPr>
+          </a:p>
+        </p:txBody>
+      </p:sp>
+      <p:sp>
+        <p:nvSpPr>
+          <p:cNvPr id="16" name="TextBox 15">
+            <a:extLst>
+              <a:ext uri="{FF2B5EF4-FFF2-40B4-BE49-F238E27FC236}">
+                <a16:creationId xmlns:a16="http://schemas.microsoft.com/office/drawing/2014/main" id="{2BAC3FA7-3DBD-C454-BB80-FC2EBC25E212}"/>
+              </a:ext>
+            </a:extLst>
+          </p:cNvPr>
+          <p:cNvSpPr txBox="1"/>
+          <p:nvPr/>
+        </p:nvSpPr>
+        <p:spPr>
+          <a:xfrm>
+            <a:off x="4646430" y="5384283"/>
+            <a:ext cx="1268760" cy="784830"/>
+          </a:xfrm>
+          <a:prstGeom prst="rect">
+            <a:avLst/>
+          </a:prstGeom>
+          <a:noFill/>
+        </p:spPr>
+        <p:txBody>
+          <a:bodyPr wrap="square">
+            <a:spAutoFit/>
+          </a:bodyPr>
+          <a:lstStyle/>
+          <a:p>
+            <a:r>
+              <a:rPr lang="en-US" sz="4200" b="0" dirty="0">
                 <a:solidFill>
                   <a:srgbClr val="C586C0"/>
                 </a:solidFill>
-                <a:latin typeface="Cascadia Code"/>
-              </a:rPr>
-              <a:t>contains </a:t>
-            </a:r>
-            <a:r>
-              <a:rPr sz="3400">
-                <a:solidFill>
-                  <a:srgbClr val="CE9178"/>
-                </a:solidFill>
-                <a:latin typeface="Cascadia Code"/>
-              </a:rPr>
-              <a:t>'kv'</a:t>
-            </a:r>
-          </a:p>
-          <a:p>
-            <a:r>
-              <a:rPr sz="3400">
-                <a:solidFill>
-                  <a:srgbClr val="8C8C8C"/>
-                </a:solidFill>
-                <a:latin typeface="Cascadia Code"/>
-              </a:rPr>
-              <a:t>| </a:t>
-            </a:r>
-            <a:r>
-              <a:rPr sz="3400">
-                <a:solidFill>
-                  <a:srgbClr val="C586C0"/>
-                </a:solidFill>
-                <a:latin typeface="Cascadia Code"/>
-              </a:rPr>
-              <a:t>and not(</a:t>
-            </a:r>
-            <a:r>
-              <a:rPr sz="3400">
-                <a:solidFill>
-                  <a:srgbClr val="569CD6"/>
-                </a:solidFill>
-                <a:latin typeface="Cascadia Code"/>
-              </a:rPr>
-              <a:t>tags</a:t>
-            </a:r>
-            <a:r>
-              <a:rPr sz="3400">
-                <a:solidFill>
-                  <a:srgbClr val="CE9178"/>
-                </a:solidFill>
-                <a:latin typeface="Cascadia Code"/>
-              </a:rPr>
-              <a:t>['env']</a:t>
-            </a:r>
-            <a:r>
-              <a:rPr sz="3400">
-                <a:solidFill>
-                  <a:srgbClr val="E3E3E3"/>
-                </a:solidFill>
-                <a:latin typeface="Cascadia Code"/>
-              </a:rPr>
-              <a:t> == </a:t>
-            </a:r>
-            <a:r>
-              <a:rPr sz="3400">
-                <a:solidFill>
-                  <a:srgbClr val="CE9178"/>
-                </a:solidFill>
-                <a:latin typeface="Cascadia Code"/>
-              </a:rPr>
-              <a:t>'prod'</a:t>
-            </a:r>
-            <a:r>
-              <a:rPr sz="3400">
-                <a:solidFill>
-                  <a:srgbClr val="E3E3E3"/>
-                </a:solidFill>
-                <a:latin typeface="Cascadia Code"/>
-              </a:rPr>
-              <a:t>)</a:t>
-            </a:r>
+                <a:effectLst/>
+                <a:latin typeface="Cascadia Code" panose="020B0609020000020004" pitchFamily="34" charset="0"/>
+              </a:rPr>
+              <a:t>and</a:t>
+            </a:r>
+            <a:endParaRPr lang="en-US" sz="4200" dirty="0">
+              <a:solidFill>
+                <a:srgbClr val="C586C0"/>
+              </a:solidFill>
+            </a:endParaRPr>
+          </a:p>
+        </p:txBody>
+      </p:sp>
+      <p:sp>
+        <p:nvSpPr>
+          <p:cNvPr id="3" name="Text Placeholder 2">
+            <a:extLst>
+              <a:ext uri="{FF2B5EF4-FFF2-40B4-BE49-F238E27FC236}">
+                <a16:creationId xmlns:a16="http://schemas.microsoft.com/office/drawing/2014/main" id="{BD792173-6A74-742B-6797-D6697828DAE7}"/>
+              </a:ext>
+            </a:extLst>
+          </p:cNvPr>
+          <p:cNvSpPr txBox="1">
+            <a:spLocks/>
+          </p:cNvSpPr>
+          <p:nvPr/>
+        </p:nvSpPr>
+        <p:spPr>
+          <a:xfrm>
+            <a:off x="1311097" y="2921255"/>
+            <a:ext cx="15201021" cy="1164279"/>
+          </a:xfrm>
+          <a:prstGeom prst="rect">
+            <a:avLst/>
+          </a:prstGeom>
+          <a:solidFill>
+            <a:srgbClr val="000000"/>
+          </a:solidFill>
+        </p:spPr>
+        <p:txBody>
+          <a:bodyPr vert="horz" lIns="91440" tIns="45720" rIns="91440" bIns="45720" rtlCol="0">
+            <a:normAutofit/>
+          </a:bodyPr>
+          <a:lstStyle>
+            <a:lvl1pPr marL="0" indent="0" algn="l" defTabSz="914400" rtl="0" eaLnBrk="1" latinLnBrk="0" hangingPunct="1">
+              <a:spcBef>
+                <a:spcPts val="0"/>
+              </a:spcBef>
+              <a:buFont typeface="Arial" pitchFamily="34" charset="0"/>
+              <a:buNone/>
+              <a:defRPr sz="2400" kern="1200">
+                <a:solidFill>
+                  <a:schemeClr val="bg2"/>
+                </a:solidFill>
+                <a:latin typeface="Consolas" panose="020B0609020204030204" pitchFamily="49" charset="0"/>
+                <a:ea typeface="+mn-ea"/>
+                <a:cs typeface="+mn-cs"/>
+              </a:defRPr>
+            </a:lvl1pPr>
+            <a:lvl2pPr marL="742950" indent="-285750" algn="l" defTabSz="914400" rtl="0" eaLnBrk="1" latinLnBrk="0" hangingPunct="1">
+              <a:spcBef>
+                <a:spcPts val="0"/>
+              </a:spcBef>
+              <a:buFont typeface="Arial" pitchFamily="34" charset="0"/>
+              <a:buChar char="–"/>
+              <a:defRPr sz="2700" kern="1200">
+                <a:solidFill>
+                  <a:srgbClr val="010101"/>
+                </a:solidFill>
+                <a:latin typeface="+mn-lt"/>
+                <a:ea typeface="+mn-ea"/>
+                <a:cs typeface="+mn-cs"/>
+              </a:defRPr>
+            </a:lvl2pPr>
+            <a:lvl3pPr marL="1143000" indent="-228600" algn="l" defTabSz="914400" rtl="0" eaLnBrk="1" latinLnBrk="0" hangingPunct="1">
+              <a:spcBef>
+                <a:spcPts val="0"/>
+              </a:spcBef>
+              <a:buFont typeface="Arial" pitchFamily="34" charset="0"/>
+              <a:buChar char="•"/>
+              <a:defRPr sz="2400" kern="1200">
+                <a:solidFill>
+                  <a:srgbClr val="010101"/>
+                </a:solidFill>
+                <a:latin typeface="+mn-lt"/>
+                <a:ea typeface="+mn-ea"/>
+                <a:cs typeface="+mn-cs"/>
+              </a:defRPr>
+            </a:lvl3pPr>
+            <a:lvl4pPr marL="1600200" indent="-228600" algn="l" defTabSz="914400" rtl="0" eaLnBrk="1" latinLnBrk="0" hangingPunct="1">
+              <a:spcBef>
+                <a:spcPts val="0"/>
+              </a:spcBef>
+              <a:buFont typeface="Arial" pitchFamily="34" charset="0"/>
+              <a:buChar char="–"/>
+              <a:defRPr sz="2100" kern="1200">
+                <a:solidFill>
+                  <a:srgbClr val="010101"/>
+                </a:solidFill>
+                <a:latin typeface="+mn-lt"/>
+                <a:ea typeface="+mn-ea"/>
+                <a:cs typeface="+mn-cs"/>
+              </a:defRPr>
+            </a:lvl4pPr>
+            <a:lvl5pPr marL="2057400" indent="-228600" algn="l" defTabSz="914400" rtl="0" eaLnBrk="1" latinLnBrk="0" hangingPunct="1">
+              <a:spcBef>
+                <a:spcPts val="0"/>
+              </a:spcBef>
+              <a:buFont typeface="Arial" pitchFamily="34" charset="0"/>
+              <a:buChar char="»"/>
+              <a:defRPr sz="2100" kern="1200">
+                <a:solidFill>
+                  <a:srgbClr val="010101"/>
+                </a:solidFill>
+                <a:latin typeface="+mn-lt"/>
+                <a:ea typeface="+mn-ea"/>
+                <a:cs typeface="+mn-cs"/>
+              </a:defRPr>
+            </a:lvl5pPr>
+            <a:lvl6pPr marL="2514600" indent="-228600" algn="l" defTabSz="914400" rtl="0" eaLnBrk="1" latinLnBrk="0" hangingPunct="1">
+              <a:spcBef>
+                <a:spcPct val="20000"/>
+              </a:spcBef>
+              <a:buFont typeface="Arial" pitchFamily="34" charset="0"/>
+              <a:buChar char="•"/>
+              <a:defRPr sz="2000" kern="1200">
+                <a:solidFill>
+                  <a:schemeClr val="tx1"/>
+                </a:solidFill>
+                <a:latin typeface="+mn-lt"/>
+                <a:ea typeface="+mn-ea"/>
+                <a:cs typeface="+mn-cs"/>
+              </a:defRPr>
+            </a:lvl6pPr>
+            <a:lvl7pPr marL="2971800" indent="-228600" algn="l" defTabSz="914400" rtl="0" eaLnBrk="1" latinLnBrk="0" hangingPunct="1">
+              <a:spcBef>
+                <a:spcPct val="20000"/>
+              </a:spcBef>
+              <a:buFont typeface="Arial" pitchFamily="34" charset="0"/>
+              <a:buChar char="•"/>
+              <a:defRPr sz="2000" kern="1200">
+                <a:solidFill>
+                  <a:schemeClr val="tx1"/>
+                </a:solidFill>
+                <a:latin typeface="+mn-lt"/>
+                <a:ea typeface="+mn-ea"/>
+                <a:cs typeface="+mn-cs"/>
+              </a:defRPr>
+            </a:lvl7pPr>
+            <a:lvl8pPr marL="3429000" indent="-228600" algn="l" defTabSz="914400" rtl="0" eaLnBrk="1" latinLnBrk="0" hangingPunct="1">
+              <a:spcBef>
+                <a:spcPct val="20000"/>
+              </a:spcBef>
+              <a:buFont typeface="Arial" pitchFamily="34" charset="0"/>
+              <a:buChar char="•"/>
+              <a:defRPr sz="2000" kern="1200">
+                <a:solidFill>
+                  <a:schemeClr val="tx1"/>
+                </a:solidFill>
+                <a:latin typeface="+mn-lt"/>
+                <a:ea typeface="+mn-ea"/>
+                <a:cs typeface="+mn-cs"/>
+              </a:defRPr>
+            </a:lvl8pPr>
+            <a:lvl9pPr marL="3886200" indent="-228600" algn="l" defTabSz="914400" rtl="0" eaLnBrk="1" latinLnBrk="0" hangingPunct="1">
+              <a:spcBef>
+                <a:spcPct val="20000"/>
+              </a:spcBef>
+              <a:buFont typeface="Arial" pitchFamily="34" charset="0"/>
+              <a:buChar char="•"/>
+              <a:defRPr sz="2000" kern="1200">
+                <a:solidFill>
+                  <a:schemeClr val="tx1"/>
+                </a:solidFill>
+                <a:latin typeface="+mn-lt"/>
+                <a:ea typeface="+mn-ea"/>
+                <a:cs typeface="+mn-cs"/>
+              </a:defRPr>
+            </a:lvl9pPr>
+          </a:lstStyle>
+          <a:p>
+            <a:r>
+              <a:rPr lang="en-US"/>
+              <a:t> </a:t>
+            </a:r>
+            <a:endParaRPr lang="en-US" dirty="0"/>
+          </a:p>
+        </p:txBody>
+      </p:sp>
+      <p:sp>
+        <p:nvSpPr>
+          <p:cNvPr id="4" name="Text Placeholder 2">
+            <a:extLst>
+              <a:ext uri="{FF2B5EF4-FFF2-40B4-BE49-F238E27FC236}">
+                <a16:creationId xmlns:a16="http://schemas.microsoft.com/office/drawing/2014/main" id="{AE0DC083-91C4-F32D-C5ED-647D51ABDF8B}"/>
+              </a:ext>
+            </a:extLst>
+          </p:cNvPr>
+          <p:cNvSpPr txBox="1">
+            <a:spLocks/>
+          </p:cNvSpPr>
+          <p:nvPr/>
+        </p:nvSpPr>
+        <p:spPr>
+          <a:xfrm>
+            <a:off x="1311097" y="6201467"/>
+            <a:ext cx="15201021" cy="139698"/>
+          </a:xfrm>
+          <a:prstGeom prst="rect">
+            <a:avLst/>
+          </a:prstGeom>
+          <a:solidFill>
+            <a:srgbClr val="000000"/>
+          </a:solidFill>
+        </p:spPr>
+        <p:txBody>
+          <a:bodyPr vert="horz" lIns="91440" tIns="45720" rIns="91440" bIns="45720" rtlCol="0">
+            <a:normAutofit fontScale="25000" lnSpcReduction="20000"/>
+          </a:bodyPr>
+          <a:lstStyle>
+            <a:lvl1pPr marL="0" indent="0" algn="l" defTabSz="914400" rtl="0" eaLnBrk="1" latinLnBrk="0" hangingPunct="1">
+              <a:spcBef>
+                <a:spcPts val="0"/>
+              </a:spcBef>
+              <a:buFont typeface="Arial" pitchFamily="34" charset="0"/>
+              <a:buNone/>
+              <a:defRPr sz="2400" kern="1200">
+                <a:solidFill>
+                  <a:schemeClr val="bg2"/>
+                </a:solidFill>
+                <a:latin typeface="Consolas" panose="020B0609020204030204" pitchFamily="49" charset="0"/>
+                <a:ea typeface="+mn-ea"/>
+                <a:cs typeface="+mn-cs"/>
+              </a:defRPr>
+            </a:lvl1pPr>
+            <a:lvl2pPr marL="742950" indent="-285750" algn="l" defTabSz="914400" rtl="0" eaLnBrk="1" latinLnBrk="0" hangingPunct="1">
+              <a:spcBef>
+                <a:spcPts val="0"/>
+              </a:spcBef>
+              <a:buFont typeface="Arial" pitchFamily="34" charset="0"/>
+              <a:buChar char="–"/>
+              <a:defRPr sz="2700" kern="1200">
+                <a:solidFill>
+                  <a:srgbClr val="010101"/>
+                </a:solidFill>
+                <a:latin typeface="+mn-lt"/>
+                <a:ea typeface="+mn-ea"/>
+                <a:cs typeface="+mn-cs"/>
+              </a:defRPr>
+            </a:lvl2pPr>
+            <a:lvl3pPr marL="1143000" indent="-228600" algn="l" defTabSz="914400" rtl="0" eaLnBrk="1" latinLnBrk="0" hangingPunct="1">
+              <a:spcBef>
+                <a:spcPts val="0"/>
+              </a:spcBef>
+              <a:buFont typeface="Arial" pitchFamily="34" charset="0"/>
+              <a:buChar char="•"/>
+              <a:defRPr sz="2400" kern="1200">
+                <a:solidFill>
+                  <a:srgbClr val="010101"/>
+                </a:solidFill>
+                <a:latin typeface="+mn-lt"/>
+                <a:ea typeface="+mn-ea"/>
+                <a:cs typeface="+mn-cs"/>
+              </a:defRPr>
+            </a:lvl3pPr>
+            <a:lvl4pPr marL="1600200" indent="-228600" algn="l" defTabSz="914400" rtl="0" eaLnBrk="1" latinLnBrk="0" hangingPunct="1">
+              <a:spcBef>
+                <a:spcPts val="0"/>
+              </a:spcBef>
+              <a:buFont typeface="Arial" pitchFamily="34" charset="0"/>
+              <a:buChar char="–"/>
+              <a:defRPr sz="2100" kern="1200">
+                <a:solidFill>
+                  <a:srgbClr val="010101"/>
+                </a:solidFill>
+                <a:latin typeface="+mn-lt"/>
+                <a:ea typeface="+mn-ea"/>
+                <a:cs typeface="+mn-cs"/>
+              </a:defRPr>
+            </a:lvl4pPr>
+            <a:lvl5pPr marL="2057400" indent="-228600" algn="l" defTabSz="914400" rtl="0" eaLnBrk="1" latinLnBrk="0" hangingPunct="1">
+              <a:spcBef>
+                <a:spcPts val="0"/>
+              </a:spcBef>
+              <a:buFont typeface="Arial" pitchFamily="34" charset="0"/>
+              <a:buChar char="»"/>
+              <a:defRPr sz="2100" kern="1200">
+                <a:solidFill>
+                  <a:srgbClr val="010101"/>
+                </a:solidFill>
+                <a:latin typeface="+mn-lt"/>
+                <a:ea typeface="+mn-ea"/>
+                <a:cs typeface="+mn-cs"/>
+              </a:defRPr>
+            </a:lvl5pPr>
+            <a:lvl6pPr marL="2514600" indent="-228600" algn="l" defTabSz="914400" rtl="0" eaLnBrk="1" latinLnBrk="0" hangingPunct="1">
+              <a:spcBef>
+                <a:spcPct val="20000"/>
+              </a:spcBef>
+              <a:buFont typeface="Arial" pitchFamily="34" charset="0"/>
+              <a:buChar char="•"/>
+              <a:defRPr sz="2000" kern="1200">
+                <a:solidFill>
+                  <a:schemeClr val="tx1"/>
+                </a:solidFill>
+                <a:latin typeface="+mn-lt"/>
+                <a:ea typeface="+mn-ea"/>
+                <a:cs typeface="+mn-cs"/>
+              </a:defRPr>
+            </a:lvl6pPr>
+            <a:lvl7pPr marL="2971800" indent="-228600" algn="l" defTabSz="914400" rtl="0" eaLnBrk="1" latinLnBrk="0" hangingPunct="1">
+              <a:spcBef>
+                <a:spcPct val="20000"/>
+              </a:spcBef>
+              <a:buFont typeface="Arial" pitchFamily="34" charset="0"/>
+              <a:buChar char="•"/>
+              <a:defRPr sz="2000" kern="1200">
+                <a:solidFill>
+                  <a:schemeClr val="tx1"/>
+                </a:solidFill>
+                <a:latin typeface="+mn-lt"/>
+                <a:ea typeface="+mn-ea"/>
+                <a:cs typeface="+mn-cs"/>
+              </a:defRPr>
+            </a:lvl7pPr>
+            <a:lvl8pPr marL="3429000" indent="-228600" algn="l" defTabSz="914400" rtl="0" eaLnBrk="1" latinLnBrk="0" hangingPunct="1">
+              <a:spcBef>
+                <a:spcPct val="20000"/>
+              </a:spcBef>
+              <a:buFont typeface="Arial" pitchFamily="34" charset="0"/>
+              <a:buChar char="•"/>
+              <a:defRPr sz="2000" kern="1200">
+                <a:solidFill>
+                  <a:schemeClr val="tx1"/>
+                </a:solidFill>
+                <a:latin typeface="+mn-lt"/>
+                <a:ea typeface="+mn-ea"/>
+                <a:cs typeface="+mn-cs"/>
+              </a:defRPr>
+            </a:lvl8pPr>
+            <a:lvl9pPr marL="3886200" indent="-228600" algn="l" defTabSz="914400" rtl="0" eaLnBrk="1" latinLnBrk="0" hangingPunct="1">
+              <a:spcBef>
+                <a:spcPct val="20000"/>
+              </a:spcBef>
+              <a:buFont typeface="Arial" pitchFamily="34" charset="0"/>
+              <a:buChar char="•"/>
+              <a:defRPr sz="2000" kern="1200">
+                <a:solidFill>
+                  <a:schemeClr val="tx1"/>
+                </a:solidFill>
+                <a:latin typeface="+mn-lt"/>
+                <a:ea typeface="+mn-ea"/>
+                <a:cs typeface="+mn-cs"/>
+              </a:defRPr>
+            </a:lvl9pPr>
+          </a:lstStyle>
+          <a:p>
+            <a:r>
+              <a:rPr lang="en-US"/>
+              <a:t> </a:t>
+            </a:r>
+            <a:endParaRPr lang="en-US" dirty="0"/>
           </a:p>
         </p:txBody>
       </p:sp>
     </p:spTree>
+    <p:extLst>
+      <p:ext uri="{BB962C8B-B14F-4D97-AF65-F5344CB8AC3E}">
+        <p14:creationId xmlns:p14="http://schemas.microsoft.com/office/powerpoint/2010/main" val="3690661129"/>
+      </p:ext>
+    </p:extLst>
   </p:cSld>
   <p:clrMapOvr>
     <a:masterClrMapping/>
   </p:clrMapOvr>
-  <mc:AlternateContent xmlns:mc="http://schemas.openxmlformats.org/markup-compatibility/2006" xmlns:p159="http://schemas.microsoft.com/office/powerpoint/2015/09/main">
-    <mc:Choice Requires="p159">
+  <mc:AlternateContent xmlns:mc="http://schemas.openxmlformats.org/markup-compatibility/2006">
+    <mc:Choice xmlns:p159="http://schemas.microsoft.com/office/powerpoint/2015/09/main" Requires="p159">
       <p:transition spd="slow">
         <p159:morph option="byObject"/>
       </p:transition>
     </mc:Choice>
-    <mc:Fallback xmlns="">
+    <mc:Fallback>
       <p:transition spd="slow">
         <p:fade/>
       </p:transition>
@@ -15251,6 +16188,12 @@
           <a:lstStyle/>
           <a:p>
             <a:r>
+              <a:rPr>
+                <a:solidFill>
+                  <a:srgbClr val="F7F9FF"/>
+                </a:solidFill>
+                <a:latin typeface="Segoe UI Semibold"/>
+              </a:rPr>
               <a:t>Sharing Queries</a:t>
             </a:r>
           </a:p>
@@ -15831,7 +16774,7 @@
             <a:r>
               <a:rPr lang="en-US" sz="4800" dirty="0">
                 <a:solidFill>
-                  <a:srgbClr val="60B1E3"/>
+                  <a:srgbClr val="62D5FF"/>
                 </a:solidFill>
                 <a:latin typeface="Cascadia Code" panose="020B0609020000020004" pitchFamily="34" charset="0"/>
                 <a:ea typeface="Cascadia Code" panose="020B0609020000020004" pitchFamily="34" charset="0"/>
@@ -15842,7 +16785,7 @@
             <a:r>
               <a:rPr lang="en-US" sz="4800" dirty="0" err="1">
                 <a:solidFill>
-                  <a:srgbClr val="60B1E3"/>
+                  <a:srgbClr val="62D5FF"/>
                 </a:solidFill>
                 <a:latin typeface="Cascadia Code" panose="020B0609020000020004" pitchFamily="34" charset="0"/>
                 <a:ea typeface="Cascadia Code" panose="020B0609020000020004" pitchFamily="34" charset="0"/>
@@ -15852,7 +16795,7 @@
             </a:r>
             <a:endParaRPr lang="en-US" sz="4800" dirty="0">
               <a:solidFill>
-                <a:srgbClr val="60B1E3"/>
+                <a:srgbClr val="62D5FF"/>
               </a:solidFill>
               <a:latin typeface="Cascadia Code" panose="020B0609020000020004" pitchFamily="34" charset="0"/>
               <a:ea typeface="Cascadia Code" panose="020B0609020000020004" pitchFamily="34" charset="0"/>
@@ -15881,8 +16824,8 @@
             <a:chExt cx="908469" cy="938631"/>
           </a:xfrm>
         </p:grpSpPr>
-        <mc:AlternateContent xmlns:mc="http://schemas.openxmlformats.org/markup-compatibility/2006" xmlns:p14="http://schemas.microsoft.com/office/powerpoint/2010/main">
-          <mc:Choice Requires="p14">
+        <mc:AlternateContent xmlns:mc="http://schemas.openxmlformats.org/markup-compatibility/2006">
+          <mc:Choice xmlns:p14="http://schemas.microsoft.com/office/powerpoint/2010/main" Requires="p14">
             <p:contentPart p14:bwMode="auto" r:id="rId5">
               <p14:nvContentPartPr>
                 <p14:cNvPr id="19" name="Ink 18">
@@ -15901,7 +16844,7 @@
               </p14:xfrm>
             </p:contentPart>
           </mc:Choice>
-          <mc:Fallback xmlns="">
+          <mc:Fallback>
             <p:pic>
               <p:nvPicPr>
                 <p:cNvPr id="19" name="Ink 18">
@@ -15922,8 +16865,8 @@
               </p:blipFill>
               <p:spPr>
                 <a:xfrm rot="21010720">
-                  <a:off x="2015164" y="3459592"/>
-                  <a:ext cx="828415" cy="958035"/>
+                  <a:off x="2018551" y="3462861"/>
+                  <a:ext cx="821709" cy="951562"/>
                 </a:xfrm>
                 <a:prstGeom prst="rect">
                   <a:avLst/>
@@ -15932,8 +16875,8 @@
             </p:pic>
           </mc:Fallback>
         </mc:AlternateContent>
-        <mc:AlternateContent xmlns:mc="http://schemas.openxmlformats.org/markup-compatibility/2006" xmlns:p14="http://schemas.microsoft.com/office/powerpoint/2010/main">
-          <mc:Choice Requires="p14">
+        <mc:AlternateContent xmlns:mc="http://schemas.openxmlformats.org/markup-compatibility/2006">
+          <mc:Choice xmlns:p14="http://schemas.microsoft.com/office/powerpoint/2010/main" Requires="p14">
             <p:contentPart p14:bwMode="auto" r:id="rId7">
               <p14:nvContentPartPr>
                 <p14:cNvPr id="20" name="Ink 19">
@@ -15952,7 +16895,7 @@
               </p14:xfrm>
             </p:contentPart>
           </mc:Choice>
-          <mc:Fallback xmlns="">
+          <mc:Fallback>
             <p:pic>
               <p:nvPicPr>
                 <p:cNvPr id="20" name="Ink 19">
@@ -15973,8 +16916,8 @@
               </p:blipFill>
               <p:spPr>
                 <a:xfrm>
-                  <a:off x="2675948" y="4172538"/>
-                  <a:ext cx="267812" cy="182841"/>
+                  <a:off x="2679337" y="4175805"/>
+                  <a:ext cx="261101" cy="176374"/>
                 </a:xfrm>
                 <a:prstGeom prst="rect">
                   <a:avLst/>
@@ -16250,8 +17193,8 @@
             <a:chExt cx="1519842" cy="1625150"/>
           </a:xfrm>
         </p:grpSpPr>
-        <mc:AlternateContent xmlns:mc="http://schemas.openxmlformats.org/markup-compatibility/2006" xmlns:p14="http://schemas.microsoft.com/office/powerpoint/2010/main">
-          <mc:Choice Requires="p14">
+        <mc:AlternateContent xmlns:mc="http://schemas.openxmlformats.org/markup-compatibility/2006">
+          <mc:Choice xmlns:p14="http://schemas.microsoft.com/office/powerpoint/2010/main" Requires="p14">
             <p:contentPart p14:bwMode="auto" r:id="rId17">
               <p14:nvContentPartPr>
                 <p14:cNvPr id="28" name="Ink 27">
@@ -16270,7 +17213,7 @@
               </p14:xfrm>
             </p:contentPart>
           </mc:Choice>
-          <mc:Fallback xmlns="">
+          <mc:Fallback>
             <p:pic>
               <p:nvPicPr>
                 <p:cNvPr id="28" name="Ink 27">
@@ -16291,8 +17234,8 @@
               </p:blipFill>
               <p:spPr>
                 <a:xfrm rot="926643">
-                  <a:off x="5084722" y="2996451"/>
-                  <a:ext cx="1543422" cy="1427498"/>
+                  <a:off x="5088693" y="3000508"/>
+                  <a:ext cx="1535560" cy="1419466"/>
                 </a:xfrm>
                 <a:prstGeom prst="rect">
                   <a:avLst/>
@@ -16301,8 +17244,8 @@
             </p:pic>
           </mc:Fallback>
         </mc:AlternateContent>
-        <mc:AlternateContent xmlns:mc="http://schemas.openxmlformats.org/markup-compatibility/2006" xmlns:p14="http://schemas.microsoft.com/office/powerpoint/2010/main">
-          <mc:Choice Requires="p14">
+        <mc:AlternateContent xmlns:mc="http://schemas.openxmlformats.org/markup-compatibility/2006">
+          <mc:Choice xmlns:p14="http://schemas.microsoft.com/office/powerpoint/2010/main" Requires="p14">
             <p:contentPart p14:bwMode="auto" r:id="rId19">
               <p14:nvContentPartPr>
                 <p14:cNvPr id="29" name="Ink 28">
@@ -16321,7 +17264,7 @@
               </p14:xfrm>
             </p:contentPart>
           </mc:Choice>
-          <mc:Fallback xmlns="">
+          <mc:Fallback>
             <p:pic>
               <p:nvPicPr>
                 <p:cNvPr id="29" name="Ink 28">
@@ -16342,8 +17285,8 @@
               </p:blipFill>
               <p:spPr>
                 <a:xfrm rot="531316">
-                  <a:off x="6279831" y="4414305"/>
-                  <a:ext cx="255327" cy="231643"/>
+                  <a:off x="6283810" y="4418127"/>
+                  <a:ext cx="247449" cy="223593"/>
                 </a:xfrm>
                 <a:prstGeom prst="rect">
                   <a:avLst/>
@@ -16420,8 +17363,8 @@
             <a:chExt cx="507960" cy="951480"/>
           </a:xfrm>
         </p:grpSpPr>
-        <mc:AlternateContent xmlns:mc="http://schemas.openxmlformats.org/markup-compatibility/2006" xmlns:p14="http://schemas.microsoft.com/office/powerpoint/2010/main">
-          <mc:Choice Requires="p14">
+        <mc:AlternateContent xmlns:mc="http://schemas.openxmlformats.org/markup-compatibility/2006">
+          <mc:Choice xmlns:p14="http://schemas.microsoft.com/office/powerpoint/2010/main" Requires="p14">
             <p:contentPart p14:bwMode="auto" r:id="rId22">
               <p14:nvContentPartPr>
                 <p14:cNvPr id="32" name="Ink 31">
@@ -16440,7 +17383,7 @@
               </p14:xfrm>
             </p:contentPart>
           </mc:Choice>
-          <mc:Fallback xmlns="">
+          <mc:Fallback>
             <p:pic>
               <p:nvPicPr>
                 <p:cNvPr id="32" name="Ink 31">
@@ -16461,8 +17404,8 @@
               </p:blipFill>
               <p:spPr>
                 <a:xfrm>
-                  <a:off x="4930492" y="3347740"/>
-                  <a:ext cx="459545" cy="933457"/>
+                  <a:off x="4934462" y="3351798"/>
+                  <a:ext cx="451683" cy="925422"/>
                 </a:xfrm>
                 <a:prstGeom prst="rect">
                   <a:avLst/>
@@ -16471,8 +17414,8 @@
             </p:pic>
           </mc:Fallback>
         </mc:AlternateContent>
-        <mc:AlternateContent xmlns:mc="http://schemas.openxmlformats.org/markup-compatibility/2006" xmlns:p14="http://schemas.microsoft.com/office/powerpoint/2010/main">
-          <mc:Choice Requires="p14">
+        <mc:AlternateContent xmlns:mc="http://schemas.openxmlformats.org/markup-compatibility/2006">
+          <mc:Choice xmlns:p14="http://schemas.microsoft.com/office/powerpoint/2010/main" Requires="p14">
             <p:contentPart p14:bwMode="auto" r:id="rId24">
               <p14:nvContentPartPr>
                 <p14:cNvPr id="33" name="Ink 32">
@@ -16491,7 +17434,7 @@
               </p14:xfrm>
             </p:contentPart>
           </mc:Choice>
-          <mc:Fallback xmlns="">
+          <mc:Fallback>
             <p:pic>
               <p:nvPicPr>
                 <p:cNvPr id="33" name="Ink 32">
@@ -16512,8 +17455,8 @@
               </p:blipFill>
               <p:spPr>
                 <a:xfrm>
-                  <a:off x="5264573" y="4136490"/>
-                  <a:ext cx="197461" cy="186836"/>
+                  <a:off x="5268543" y="4140558"/>
+                  <a:ext cx="189601" cy="178781"/>
                 </a:xfrm>
                 <a:prstGeom prst="rect">
                   <a:avLst/>
@@ -17195,75 +18138,12 @@
           <a:chExt cx="0" cy="0"/>
         </a:xfrm>
       </p:grpSpPr>
-      <p:sp>
-        <p:nvSpPr>
-          <p:cNvPr id="7" name="Title 1"/>
-          <p:cNvSpPr>
-            <a:spLocks noGrp="1"/>
-          </p:cNvSpPr>
-          <p:nvPr>
-            <p:ph type="title"/>
-          </p:nvPr>
-        </p:nvSpPr>
-        <p:spPr/>
-        <p:txBody>
-          <a:bodyPr/>
-          <a:lstStyle/>
-          <a:p>
-            <a:r>
-              <a:t>What’s a pirate’s favorite Azure service? 🏴‍☠️</a:t>
-            </a:r>
-          </a:p>
-        </p:txBody>
-      </p:sp>
-      <p:pic>
-        <p:nvPicPr>
-          <p:cNvPr id="9" name="Picture 2" descr="High Quality Gives Pause Pirate Blank Meme Template">
-            <a:extLst>
-              <a:ext uri="{FF2B5EF4-FFF2-40B4-BE49-F238E27FC236}">
-                <a16:creationId xmlns:a16="http://schemas.microsoft.com/office/drawing/2014/main" id="{1D0ED9F0-2367-3E2E-9A6B-F2A82C6B3D2D}"/>
-              </a:ext>
-            </a:extLst>
-          </p:cNvPr>
-          <p:cNvPicPr>
-            <a:picLocks noChangeAspect="1" noChangeArrowheads="1"/>
-          </p:cNvPicPr>
-          <p:nvPr/>
-        </p:nvPicPr>
-        <p:blipFill rotWithShape="1">
-          <a:blip r:embed="rId2">
-            <a:extLst>
-              <a:ext uri="{28A0092B-C50C-407E-A947-70E740481C1C}">
-                <a14:useLocalDpi xmlns:a14="http://schemas.microsoft.com/office/drawing/2010/main" val="0"/>
-              </a:ext>
-            </a:extLst>
-          </a:blip>
-          <a:srcRect b="802"/>
-          <a:stretch>
-            <a:fillRect/>
-          </a:stretch>
-        </p:blipFill>
-        <p:spPr bwMode="auto">
-          <a:xfrm>
-            <a:off x="13835126" y="2212136"/>
-            <a:ext cx="3767074" cy="3290978"/>
-          </a:xfrm>
-          <a:prstGeom prst="rect">
-            <a:avLst/>
-          </a:prstGeom>
-          <a:noFill/>
-          <a:extLst>
-            <a:ext uri="{909E8E84-426E-40DD-AFC4-6F175D3DCCD1}">
-              <a14:hiddenFill xmlns:a14="http://schemas.microsoft.com/office/drawing/2010/main">
-                <a:solidFill>
-                  <a:srgbClr val="FFFFFF"/>
-                </a:solidFill>
-              </a14:hiddenFill>
-            </a:ext>
-          </a:extLst>
-        </p:spPr>
-      </p:pic>
     </p:spTree>
+    <p:extLst>
+      <p:ext uri="{BB962C8B-B14F-4D97-AF65-F5344CB8AC3E}">
+        <p14:creationId xmlns:p14="http://schemas.microsoft.com/office/powerpoint/2010/main" val="1544377309"/>
+      </p:ext>
+    </p:extLst>
   </p:cSld>
   <p:clrMapOvr>
     <a:masterClrMapping/>
@@ -17304,6 +18184,12 @@
           <a:lstStyle/>
           <a:p>
             <a:r>
+              <a:rPr>
+                <a:solidFill>
+                  <a:srgbClr val="F7F9FF"/>
+                </a:solidFill>
+                <a:latin typeface="Segoe UI Semibold"/>
+              </a:rPr>
               <a:t>Tips &amp; Tricks</a:t>
             </a:r>
           </a:p>
@@ -17319,86 +18205,188 @@
             <p:ph sz="quarter" idx="10"/>
           </p:nvPr>
         </p:nvSpPr>
-        <p:spPr/>
+        <p:spPr>
+          <a:xfrm>
+            <a:off x="241300" y="2220913"/>
+            <a:ext cx="16396804" cy="6742112"/>
+          </a:xfrm>
+        </p:spPr>
         <p:txBody>
-          <a:bodyPr/>
+          <a:bodyPr>
+            <a:normAutofit/>
+          </a:bodyPr>
           <a:lstStyle/>
           <a:p>
-            <a:r>
-              <a:rPr lang="en-US" dirty="0"/>
+            <a:pPr marL="457200" indent="-457200">
+              <a:buFont typeface="Arial" panose="020B0604020202020204" pitchFamily="34" charset="0"/>
+              <a:buChar char="•"/>
+            </a:pPr>
+            <a:r>
+              <a:rPr lang="en-US" sz="4800" dirty="0">
+                <a:solidFill>
+                  <a:srgbClr val="E3E8F2"/>
+                </a:solidFill>
+                <a:latin typeface="Segoe UI"/>
+              </a:rPr>
               <a:t>The </a:t>
             </a:r>
             <a:r>
-              <a:rPr lang="en-US" dirty="0">
-                <a:latin typeface="Cascadia Code" panose="020B0609020000020004" pitchFamily="34" charset="0"/>
+              <a:rPr lang="en-US" sz="4800" dirty="0">
+                <a:solidFill>
+                  <a:srgbClr val="E3E8F2"/>
+                </a:solidFill>
+                <a:latin typeface="Segoe UI" panose="020B0609020000020004" pitchFamily="34" charset="0"/>
                 <a:ea typeface="Cascadia Code" panose="020B0609020000020004" pitchFamily="34" charset="0"/>
                 <a:cs typeface="Cascadia Code" panose="020B0609020000020004" pitchFamily="34" charset="0"/>
               </a:rPr>
               <a:t>Resources</a:t>
             </a:r>
             <a:r>
-              <a:rPr lang="en-US" dirty="0"/>
+              <a:rPr lang="en-US" sz="4800" dirty="0">
+                <a:solidFill>
+                  <a:srgbClr val="E3E8F2"/>
+                </a:solidFill>
+                <a:latin typeface="Segoe UI"/>
+              </a:rPr>
               <a:t> table is the default, no need to specify it</a:t>
             </a:r>
-          </a:p>
-          <a:p>
-            <a:r>
-              <a:rPr lang="en-US" dirty="0"/>
+            <a:endParaRPr sz="4800" dirty="0">
+              <a:solidFill>
+                <a:srgbClr val="E3E8F2"/>
+              </a:solidFill>
+              <a:latin typeface="Segoe UI"/>
+            </a:endParaRPr>
+          </a:p>
+          <a:p>
+            <a:pPr marL="457200" indent="-457200">
+              <a:buFont typeface="Arial" panose="020B0604020202020204" pitchFamily="34" charset="0"/>
+              <a:buChar char="•"/>
+            </a:pPr>
+            <a:r>
+              <a:rPr lang="en-US" sz="4800" dirty="0">
+                <a:solidFill>
+                  <a:srgbClr val="E3E8F2"/>
+                </a:solidFill>
+                <a:latin typeface="Segoe UI"/>
+              </a:rPr>
               <a:t>Hidden </a:t>
             </a:r>
             <a:r>
-              <a:rPr lang="en-US" dirty="0" err="1">
-                <a:latin typeface="Cascadia Code" panose="020B0609020000020004" pitchFamily="34" charset="0"/>
+              <a:rPr lang="en-US" sz="4800" dirty="0" err="1">
+                <a:solidFill>
+                  <a:srgbClr val="E3E8F2"/>
+                </a:solidFill>
+                <a:latin typeface="Segoe UI" panose="020B0609020000020004" pitchFamily="34" charset="0"/>
                 <a:ea typeface="Cascadia Code" panose="020B0609020000020004" pitchFamily="34" charset="0"/>
                 <a:cs typeface="Cascadia Code" panose="020B0609020000020004" pitchFamily="34" charset="0"/>
               </a:rPr>
               <a:t>SystemData</a:t>
             </a:r>
             <a:r>
-              <a:rPr lang="en-US" dirty="0"/>
+              <a:rPr lang="en-US" sz="4800" dirty="0">
+                <a:solidFill>
+                  <a:srgbClr val="E3E8F2"/>
+                </a:solidFill>
+                <a:latin typeface="Segoe UI"/>
+              </a:rPr>
               <a:t> property for resource metadata</a:t>
             </a:r>
+            <a:endParaRPr sz="4800" dirty="0">
+              <a:solidFill>
+                <a:srgbClr val="E3E8F2"/>
+              </a:solidFill>
+              <a:latin typeface="Segoe UI"/>
+            </a:endParaRPr>
           </a:p>
           <a:p>
             <a:pPr lvl="1"/>
             <a:r>
-              <a:rPr lang="en-US" dirty="0"/>
+              <a:rPr lang="en-US" sz="4400" dirty="0">
+                <a:solidFill>
+                  <a:srgbClr val="E3E8F2"/>
+                </a:solidFill>
+                <a:latin typeface="Segoe UI"/>
+              </a:rPr>
               <a:t>If supported by the resource – Check API version</a:t>
             </a:r>
-          </a:p>
-          <a:p>
-            <a:r>
-              <a:rPr lang="en-US" dirty="0"/>
+            <a:endParaRPr sz="4400" dirty="0">
+              <a:solidFill>
+                <a:srgbClr val="E3E8F2"/>
+              </a:solidFill>
+              <a:latin typeface="Segoe UI"/>
+            </a:endParaRPr>
+          </a:p>
+          <a:p>
+            <a:pPr marL="457200" indent="-457200">
+              <a:buFont typeface="Arial" panose="020B0604020202020204" pitchFamily="34" charset="0"/>
+              <a:buChar char="•"/>
+            </a:pPr>
+            <a:r>
+              <a:rPr lang="en-US" sz="4800" dirty="0">
+                <a:solidFill>
+                  <a:srgbClr val="E3E8F2"/>
+                </a:solidFill>
+                <a:latin typeface="Segoe UI"/>
+              </a:rPr>
               <a:t>Shared queries can be used inside queries with </a:t>
             </a:r>
             <a:r>
-              <a:rPr lang="en-US" b="1" dirty="0">
+              <a:rPr lang="en-US" sz="4800" b="1" dirty="0">
+                <a:solidFill>
+                  <a:srgbClr val="F7F9FF"/>
+                </a:solidFill>
                 <a:ea typeface="Cascadia Code" panose="020B0609020000020004" pitchFamily="34" charset="0"/>
                 <a:cs typeface="Cascadia Code" panose="020B0609020000020004" pitchFamily="34" charset="0"/>
               </a:rPr>
               <a:t>{{ }}</a:t>
             </a:r>
             <a:r>
-              <a:rPr lang="en-US" dirty="0"/>
+              <a:rPr lang="en-US" sz="4800" dirty="0">
+                <a:solidFill>
+                  <a:srgbClr val="E3E8F2"/>
+                </a:solidFill>
+                <a:latin typeface="Segoe UI"/>
+              </a:rPr>
               <a:t> syntax</a:t>
             </a:r>
-          </a:p>
-          <a:p>
-            <a:r>
-              <a:rPr lang="en-US" dirty="0"/>
+            <a:endParaRPr sz="4800" dirty="0">
+              <a:solidFill>
+                <a:srgbClr val="E3E8F2"/>
+              </a:solidFill>
+              <a:latin typeface="Segoe UI"/>
+            </a:endParaRPr>
+          </a:p>
+          <a:p>
+            <a:pPr marL="457200" indent="-457200">
+              <a:buFont typeface="Arial" panose="020B0604020202020204" pitchFamily="34" charset="0"/>
+              <a:buChar char="•"/>
+            </a:pPr>
+            <a:r>
+              <a:rPr lang="en-US" sz="4800" dirty="0">
+                <a:solidFill>
+                  <a:srgbClr val="E3E8F2"/>
+                </a:solidFill>
+                <a:latin typeface="Segoe UI"/>
+              </a:rPr>
               <a:t>You can use ARG from Log Analytics with </a:t>
             </a:r>
             <a:r>
-              <a:rPr lang="en-US" dirty="0" err="1">
-                <a:latin typeface="Cascadia Code" panose="020B0609020000020004" pitchFamily="34" charset="0"/>
+              <a:rPr lang="en-US" sz="4800" dirty="0" err="1">
+                <a:solidFill>
+                  <a:srgbClr val="E3E8F2"/>
+                </a:solidFill>
+                <a:latin typeface="Segoe UI" panose="020B0609020000020004" pitchFamily="34" charset="0"/>
                 <a:ea typeface="Cascadia Code" panose="020B0609020000020004" pitchFamily="34" charset="0"/>
                 <a:cs typeface="Cascadia Code" panose="020B0609020000020004" pitchFamily="34" charset="0"/>
               </a:rPr>
               <a:t>arg</a:t>
             </a:r>
             <a:r>
-              <a:rPr lang="en-US" dirty="0">
-                <a:latin typeface="Cascadia Code" panose="020B0609020000020004" pitchFamily="34" charset="0"/>
+              <a:rPr lang="en-US" sz="4800" dirty="0">
+                <a:solidFill>
+                  <a:srgbClr val="E3E8F2"/>
+                </a:solidFill>
+                <a:latin typeface="Segoe UI" panose="020B0609020000020004" pitchFamily="34" charset="0"/>
                 <a:ea typeface="Cascadia Code" panose="020B0609020000020004" pitchFamily="34" charset="0"/>
                 <a:cs typeface="Cascadia Code" panose="020B0609020000020004" pitchFamily="34" charset="0"/>
               </a:rPr>
@@ -17408,14 +18396,29 @@
           <a:p>
             <a:pPr lvl="1"/>
             <a:r>
-              <a:rPr lang="en-US" dirty="0"/>
+              <a:rPr lang="en-US" sz="4400" dirty="0">
+                <a:solidFill>
+                  <a:srgbClr val="E3E8F2"/>
+                </a:solidFill>
+                <a:latin typeface="Segoe UI"/>
+              </a:rPr>
               <a:t>But not yet* with </a:t>
             </a:r>
             <a:r>
-              <a:rPr lang="en-US" dirty="0" err="1"/>
+              <a:rPr lang="en-US" sz="4400" dirty="0" err="1">
+                <a:solidFill>
+                  <a:srgbClr val="E3E8F2"/>
+                </a:solidFill>
+                <a:latin typeface="Segoe UI"/>
+              </a:rPr>
               <a:t>bARGE</a:t>
             </a:r>
-            <a:endParaRPr lang="en-US" dirty="0"/>
+            <a:endParaRPr lang="en-US" sz="4400" dirty="0">
+              <a:solidFill>
+                <a:srgbClr val="E3E8F2"/>
+              </a:solidFill>
+              <a:latin typeface="Segoe UI"/>
+            </a:endParaRPr>
           </a:p>
         </p:txBody>
       </p:sp>
@@ -17998,6 +19001,12 @@
           <a:lstStyle/>
           <a:p>
             <a:r>
+              <a:rPr dirty="0">
+                <a:solidFill>
+                  <a:srgbClr val="F7F9FF"/>
+                </a:solidFill>
+                <a:latin typeface="Segoe UI Semibold"/>
+              </a:rPr>
               <a:t>Alerts with Azure Resource Graph</a:t>
             </a:r>
           </a:p>
@@ -18013,123 +19022,295 @@
             <p:ph sz="quarter" idx="10"/>
           </p:nvPr>
         </p:nvSpPr>
-        <p:spPr/>
+        <p:spPr>
+          <a:xfrm>
+            <a:off x="241300" y="2220913"/>
+            <a:ext cx="16655222" cy="6742112"/>
+          </a:xfrm>
+        </p:spPr>
         <p:txBody>
-          <a:bodyPr/>
+          <a:bodyPr>
+            <a:noAutofit/>
+          </a:bodyPr>
           <a:lstStyle/>
           <a:p>
-            <a:r>
-              <a:rPr lang="en-US" dirty="0"/>
+            <a:pPr marL="685800" indent="-685800">
+              <a:buFont typeface="Arial" panose="020B0604020202020204" pitchFamily="34" charset="0"/>
+              <a:buChar char="•"/>
+            </a:pPr>
+            <a:r>
+              <a:rPr lang="en-US" sz="4800" dirty="0">
+                <a:solidFill>
+                  <a:srgbClr val="E3E8F2"/>
+                </a:solidFill>
+                <a:latin typeface="Segoe UI"/>
+              </a:rPr>
               <a:t>Don’t forget Azure Policy</a:t>
             </a:r>
+            <a:endParaRPr sz="4800" dirty="0">
+              <a:solidFill>
+                <a:srgbClr val="E3E8F2"/>
+              </a:solidFill>
+              <a:latin typeface="Segoe UI"/>
+            </a:endParaRPr>
           </a:p>
           <a:p>
             <a:pPr lvl="1"/>
             <a:r>
-              <a:rPr lang="en-US" dirty="0"/>
+              <a:rPr lang="en-US" sz="4400" dirty="0">
+                <a:solidFill>
+                  <a:srgbClr val="E3E8F2"/>
+                </a:solidFill>
+                <a:latin typeface="Segoe UI"/>
+              </a:rPr>
               <a:t>Alerts are </a:t>
             </a:r>
             <a:r>
-              <a:rPr lang="en-US" b="1" dirty="0"/>
+              <a:rPr lang="en-US" sz="4400" b="1" dirty="0">
+                <a:solidFill>
+                  <a:srgbClr val="F7F9FF"/>
+                </a:solidFill>
+                <a:latin typeface="Segoe UI"/>
+              </a:rPr>
               <a:t>reactive</a:t>
             </a:r>
-          </a:p>
-          <a:p>
-            <a:r>
-              <a:rPr lang="en-US" dirty="0"/>
+            <a:endParaRPr sz="4400" dirty="0">
+              <a:solidFill>
+                <a:srgbClr val="E3E8F2"/>
+              </a:solidFill>
+              <a:latin typeface="Segoe UI"/>
+            </a:endParaRPr>
+          </a:p>
+          <a:p>
+            <a:pPr marL="685800" indent="-685800">
+              <a:buFont typeface="Arial" panose="020B0604020202020204" pitchFamily="34" charset="0"/>
+              <a:buChar char="•"/>
+            </a:pPr>
+            <a:r>
+              <a:rPr lang="en-US" sz="4800" dirty="0">
+                <a:solidFill>
+                  <a:srgbClr val="E3E8F2"/>
+                </a:solidFill>
+                <a:latin typeface="Segoe UI"/>
+              </a:rPr>
               <a:t>Examples of potentially interesting ARG alerts</a:t>
             </a:r>
+            <a:endParaRPr sz="4800" dirty="0">
+              <a:solidFill>
+                <a:srgbClr val="E3E8F2"/>
+              </a:solidFill>
+              <a:latin typeface="Segoe UI"/>
+            </a:endParaRPr>
           </a:p>
           <a:p>
             <a:pPr lvl="1"/>
             <a:r>
-              <a:rPr lang="en-US" dirty="0"/>
+              <a:rPr lang="en-US" sz="4400" dirty="0">
+                <a:solidFill>
+                  <a:srgbClr val="E3E8F2"/>
+                </a:solidFill>
+                <a:latin typeface="Segoe UI"/>
+              </a:rPr>
               <a:t>FinOps – Someone creates </a:t>
             </a:r>
             <a:r>
-              <a:rPr lang="en-US" b="1" dirty="0"/>
+              <a:rPr lang="en-US" sz="4400" b="1" dirty="0">
+                <a:solidFill>
+                  <a:srgbClr val="F7F9FF"/>
+                </a:solidFill>
+                <a:latin typeface="Segoe UI"/>
+              </a:rPr>
               <a:t>allowed</a:t>
             </a:r>
             <a:r>
-              <a:rPr lang="en-US" dirty="0"/>
+              <a:rPr lang="en-US" sz="4400" dirty="0">
+                <a:solidFill>
+                  <a:srgbClr val="E3E8F2"/>
+                </a:solidFill>
+                <a:latin typeface="Segoe UI"/>
+              </a:rPr>
               <a:t>, but high-cost resources</a:t>
             </a:r>
+            <a:endParaRPr sz="4400" dirty="0">
+              <a:solidFill>
+                <a:srgbClr val="E3E8F2"/>
+              </a:solidFill>
+              <a:latin typeface="Segoe UI"/>
+            </a:endParaRPr>
           </a:p>
           <a:p>
             <a:pPr lvl="1"/>
             <a:r>
-              <a:rPr lang="en-US" dirty="0"/>
+              <a:rPr lang="en-US" sz="4400" dirty="0">
+                <a:solidFill>
+                  <a:srgbClr val="E3E8F2"/>
+                </a:solidFill>
+                <a:latin typeface="Segoe UI"/>
+              </a:rPr>
               <a:t>Operational – </a:t>
             </a:r>
             <a:r>
-              <a:rPr lang="en-US" b="1" dirty="0" err="1">
-                <a:latin typeface="Cascadia Code" panose="020B0609020000020004" pitchFamily="34" charset="0"/>
+              <a:rPr lang="en-US" sz="4400" b="1" dirty="0" err="1">
+                <a:solidFill>
+                  <a:srgbClr val="F7F9FF"/>
+                </a:solidFill>
+                <a:latin typeface="Segoe UI" panose="020B0609020000020004" pitchFamily="34" charset="0"/>
                 <a:ea typeface="Cascadia Code" panose="020B0609020000020004" pitchFamily="34" charset="0"/>
                 <a:cs typeface="Cascadia Code" panose="020B0609020000020004" pitchFamily="34" charset="0"/>
               </a:rPr>
               <a:t>ResourceChanges</a:t>
             </a:r>
             <a:r>
-              <a:rPr lang="en-US" dirty="0"/>
+              <a:rPr lang="en-US" sz="4400" dirty="0">
+                <a:solidFill>
+                  <a:srgbClr val="E3E8F2"/>
+                </a:solidFill>
+                <a:latin typeface="Segoe UI"/>
+              </a:rPr>
               <a:t> in sensitive scopes</a:t>
             </a:r>
+            <a:endParaRPr sz="4400" dirty="0">
+              <a:solidFill>
+                <a:srgbClr val="E3E8F2"/>
+              </a:solidFill>
+              <a:latin typeface="Segoe UI"/>
+            </a:endParaRPr>
           </a:p>
           <a:p>
             <a:pPr lvl="1"/>
             <a:r>
-              <a:rPr lang="en-US" dirty="0"/>
+              <a:rPr lang="en-US" sz="4400" dirty="0">
+                <a:solidFill>
+                  <a:srgbClr val="E3E8F2"/>
+                </a:solidFill>
+                <a:latin typeface="Segoe UI"/>
+              </a:rPr>
               <a:t>Security – Resource-related events, permissions and roles</a:t>
             </a:r>
-          </a:p>
-          <a:p>
-            <a:r>
-              <a:rPr lang="en-US" dirty="0"/>
+            <a:endParaRPr sz="4400" dirty="0">
+              <a:solidFill>
+                <a:srgbClr val="E3E8F2"/>
+              </a:solidFill>
+              <a:latin typeface="Segoe UI"/>
+            </a:endParaRPr>
+          </a:p>
+          <a:p>
+            <a:pPr marL="685800" indent="-685800">
+              <a:buFont typeface="Arial" panose="020B0604020202020204" pitchFamily="34" charset="0"/>
+              <a:buChar char="•"/>
+            </a:pPr>
+            <a:r>
+              <a:rPr lang="en-US" sz="4800" dirty="0">
+                <a:solidFill>
+                  <a:srgbClr val="E3E8F2"/>
+                </a:solidFill>
+                <a:latin typeface="Segoe UI"/>
+              </a:rPr>
               <a:t>Alerts need access permissions for ARG</a:t>
             </a:r>
-          </a:p>
-          <a:p>
-            <a:r>
-              <a:rPr lang="en-US" dirty="0"/>
+            <a:endParaRPr sz="4800" dirty="0">
+              <a:solidFill>
+                <a:srgbClr val="E3E8F2"/>
+              </a:solidFill>
+              <a:latin typeface="Segoe UI"/>
+            </a:endParaRPr>
+          </a:p>
+          <a:p>
+            <a:pPr marL="685800" indent="-685800">
+              <a:buFont typeface="Arial" panose="020B0604020202020204" pitchFamily="34" charset="0"/>
+              <a:buChar char="•"/>
+            </a:pPr>
+            <a:r>
+              <a:rPr lang="en-US" sz="4800" dirty="0">
+                <a:solidFill>
+                  <a:srgbClr val="E3E8F2"/>
+                </a:solidFill>
+                <a:latin typeface="Segoe UI"/>
+              </a:rPr>
               <a:t>Limitations</a:t>
             </a:r>
+            <a:endParaRPr sz="4800" dirty="0">
+              <a:solidFill>
+                <a:srgbClr val="E3E8F2"/>
+              </a:solidFill>
+              <a:latin typeface="Segoe UI"/>
+            </a:endParaRPr>
           </a:p>
           <a:p>
             <a:pPr lvl="1"/>
             <a:r>
-              <a:rPr lang="en-US" dirty="0"/>
+              <a:rPr lang="en-US" sz="4400" dirty="0">
+                <a:solidFill>
+                  <a:srgbClr val="E3E8F2"/>
+                </a:solidFill>
+                <a:latin typeface="Segoe UI"/>
+              </a:rPr>
               <a:t>Cannot </a:t>
             </a:r>
             <a:r>
-              <a:rPr lang="en-US" b="1" dirty="0">
-                <a:latin typeface="Cascadia Code" panose="020B0609020000020004" pitchFamily="34" charset="0"/>
+              <a:rPr lang="en-US" sz="4400" b="1" dirty="0">
+                <a:solidFill>
+                  <a:srgbClr val="F7F9FF"/>
+                </a:solidFill>
+                <a:latin typeface="Segoe UI" panose="020B0609020000020004" pitchFamily="34" charset="0"/>
                 <a:ea typeface="Cascadia Code" panose="020B0609020000020004" pitchFamily="34" charset="0"/>
                 <a:cs typeface="Cascadia Code" panose="020B0609020000020004" pitchFamily="34" charset="0"/>
               </a:rPr>
               <a:t>join</a:t>
             </a:r>
             <a:r>
-              <a:rPr lang="en-US" dirty="0"/>
+              <a:rPr lang="en-US" sz="4400" dirty="0">
+                <a:solidFill>
+                  <a:srgbClr val="E3E8F2"/>
+                </a:solidFill>
+                <a:latin typeface="Segoe UI"/>
+              </a:rPr>
               <a:t> multiple ARG tables, </a:t>
             </a:r>
             <a:r>
-              <a:rPr lang="en-US" b="1" dirty="0">
-                <a:latin typeface="Cascadia Code" panose="020B0609020000020004" pitchFamily="34" charset="0"/>
+              <a:rPr lang="en-US" sz="4400" b="1" dirty="0">
+                <a:solidFill>
+                  <a:srgbClr val="F7F9FF"/>
+                </a:solidFill>
+                <a:latin typeface="Segoe UI" panose="020B0609020000020004" pitchFamily="34" charset="0"/>
                 <a:ea typeface="Cascadia Code" panose="020B0609020000020004" pitchFamily="34" charset="0"/>
                 <a:cs typeface="Cascadia Code" panose="020B0609020000020004" pitchFamily="34" charset="0"/>
               </a:rPr>
               <a:t>union</a:t>
             </a:r>
             <a:r>
-              <a:rPr lang="en-US" dirty="0"/>
+              <a:rPr lang="en-US" sz="4400" dirty="0">
+                <a:solidFill>
+                  <a:srgbClr val="E3E8F2"/>
+                </a:solidFill>
+                <a:latin typeface="Segoe UI"/>
+              </a:rPr>
               <a:t> works</a:t>
             </a:r>
+            <a:endParaRPr sz="4400" dirty="0">
+              <a:solidFill>
+                <a:srgbClr val="E3E8F2"/>
+              </a:solidFill>
+              <a:latin typeface="Segoe UI"/>
+            </a:endParaRPr>
           </a:p>
           <a:p>
             <a:pPr lvl="1"/>
             <a:r>
-              <a:rPr lang="en-US" dirty="0"/>
+              <a:rPr lang="en-US" sz="4400" dirty="0">
+                <a:solidFill>
+                  <a:srgbClr val="E3E8F2"/>
+                </a:solidFill>
+                <a:latin typeface="Segoe UI"/>
+              </a:rPr>
               <a:t>Only 1000 records</a:t>
             </a:r>
+            <a:endParaRPr sz="4400" dirty="0">
+              <a:solidFill>
+                <a:srgbClr val="E3E8F2"/>
+              </a:solidFill>
+              <a:latin typeface="Segoe UI"/>
+            </a:endParaRPr>
           </a:p>
         </p:txBody>
       </p:sp>
@@ -19173,6 +20354,12 @@
           <a:lstStyle/>
           <a:p>
             <a:r>
+              <a:rPr>
+                <a:solidFill>
+                  <a:srgbClr val="F7F9FF"/>
+                </a:solidFill>
+                <a:latin typeface="Segoe UI Semibold"/>
+              </a:rPr>
               <a:t>Limitations</a:t>
             </a:r>
           </a:p>
@@ -19235,7 +20422,7 @@
               <a:buChar char="§"/>
               <a:defRPr sz="4800" kern="1200">
                 <a:solidFill>
-                  <a:srgbClr val="60B1E3"/>
+                  <a:srgbClr val="62D5FF"/>
                 </a:solidFill>
                 <a:latin typeface="+mn-lt"/>
                 <a:ea typeface="+mn-ea"/>
@@ -19371,81 +20558,97 @@
           </a:lstStyle>
           <a:p>
             <a:r>
-              <a:rPr lang="en-US" dirty="0"/>
+              <a:rPr lang="en-US" sz="6000" dirty="0">
+                <a:latin typeface="Segoe UI" panose="020B0502040204020203" pitchFamily="34" charset="0"/>
+                <a:cs typeface="Segoe UI" panose="020B0502040204020203" pitchFamily="34" charset="0"/>
+              </a:rPr>
               <a:t>1000 records per query response</a:t>
             </a:r>
           </a:p>
           <a:p>
             <a:pPr lvl="1"/>
             <a:r>
-              <a:rPr lang="en-US" dirty="0">
-                <a:solidFill>
-                  <a:srgbClr val="60B1E3"/>
-                </a:solidFill>
+              <a:rPr lang="en-US" sz="5400" dirty="0">
+                <a:solidFill>
+                  <a:srgbClr val="FFC000"/>
+                </a:solidFill>
+                <a:latin typeface="Segoe UI" panose="020B0502040204020203" pitchFamily="34" charset="0"/>
+                <a:cs typeface="Segoe UI" panose="020B0502040204020203" pitchFamily="34" charset="0"/>
               </a:rPr>
               <a:t>Implement pagination</a:t>
             </a:r>
           </a:p>
           <a:p>
             <a:r>
-              <a:rPr lang="en-US" dirty="0"/>
+              <a:rPr lang="en-US" sz="6000" dirty="0">
+                <a:latin typeface="Segoe UI" panose="020B0502040204020203" pitchFamily="34" charset="0"/>
+                <a:cs typeface="Segoe UI" panose="020B0502040204020203" pitchFamily="34" charset="0"/>
+              </a:rPr>
               <a:t>      15 queries /     5 seconds /     User</a:t>
             </a:r>
-            <a:endParaRPr lang="en-US" sz="4800" dirty="0"/>
+            <a:endParaRPr lang="en-US" dirty="0">
+              <a:latin typeface="Segoe UI" panose="020B0502040204020203" pitchFamily="34" charset="0"/>
+              <a:cs typeface="Segoe UI" panose="020B0502040204020203" pitchFamily="34" charset="0"/>
+            </a:endParaRPr>
           </a:p>
           <a:p>
             <a:pPr lvl="1"/>
             <a:r>
-              <a:rPr lang="en-US" sz="4200" dirty="0">
-                <a:solidFill>
-                  <a:srgbClr val="60B1E3"/>
-                </a:solidFill>
-                <a:latin typeface="Cascadia Code" panose="020B0609020000020004" pitchFamily="34" charset="0"/>
+              <a:rPr lang="en-US" sz="4400" dirty="0">
+                <a:solidFill>
+                  <a:srgbClr val="FFC000"/>
+                </a:solidFill>
+                <a:latin typeface="Segoe UI" panose="020B0502040204020203" pitchFamily="34" charset="0"/>
                 <a:ea typeface="Cascadia Code" panose="020B0609020000020004" pitchFamily="34" charset="0"/>
-                <a:cs typeface="Cascadia Code" panose="020B0609020000020004" pitchFamily="34" charset="0"/>
+                <a:cs typeface="Segoe UI" panose="020B0502040204020203" pitchFamily="34" charset="0"/>
               </a:rPr>
               <a:t>x-</a:t>
             </a:r>
             <a:r>
-              <a:rPr lang="en-US" sz="4200" dirty="0" err="1">
-                <a:solidFill>
-                  <a:srgbClr val="60B1E3"/>
-                </a:solidFill>
-                <a:latin typeface="Cascadia Code" panose="020B0609020000020004" pitchFamily="34" charset="0"/>
+              <a:rPr lang="en-US" sz="4400" dirty="0" err="1">
+                <a:solidFill>
+                  <a:srgbClr val="FFC000"/>
+                </a:solidFill>
+                <a:latin typeface="Segoe UI" panose="020B0502040204020203" pitchFamily="34" charset="0"/>
                 <a:ea typeface="Cascadia Code" panose="020B0609020000020004" pitchFamily="34" charset="0"/>
-                <a:cs typeface="Cascadia Code" panose="020B0609020000020004" pitchFamily="34" charset="0"/>
+                <a:cs typeface="Segoe UI" panose="020B0502040204020203" pitchFamily="34" charset="0"/>
               </a:rPr>
               <a:t>ms</a:t>
             </a:r>
             <a:r>
-              <a:rPr lang="en-US" sz="4200" dirty="0">
-                <a:solidFill>
-                  <a:srgbClr val="60B1E3"/>
-                </a:solidFill>
-                <a:latin typeface="Cascadia Code" panose="020B0609020000020004" pitchFamily="34" charset="0"/>
+              <a:rPr lang="en-US" sz="4400" dirty="0">
+                <a:solidFill>
+                  <a:srgbClr val="FFC000"/>
+                </a:solidFill>
+                <a:latin typeface="Segoe UI" panose="020B0502040204020203" pitchFamily="34" charset="0"/>
                 <a:ea typeface="Cascadia Code" panose="020B0609020000020004" pitchFamily="34" charset="0"/>
-                <a:cs typeface="Cascadia Code" panose="020B0609020000020004" pitchFamily="34" charset="0"/>
+                <a:cs typeface="Segoe UI" panose="020B0502040204020203" pitchFamily="34" charset="0"/>
               </a:rPr>
               <a:t>-user-quota-remaining</a:t>
             </a:r>
-            <a:endParaRPr lang="en-US" sz="4200" dirty="0">
+            <a:endParaRPr lang="en-US" sz="4400" dirty="0">
               <a:solidFill>
-                <a:srgbClr val="60B1E3"/>
+                <a:srgbClr val="FFC000"/>
               </a:solidFill>
+              <a:latin typeface="Segoe UI" panose="020B0502040204020203" pitchFamily="34" charset="0"/>
+              <a:cs typeface="Segoe UI" panose="020B0502040204020203" pitchFamily="34" charset="0"/>
             </a:endParaRPr>
           </a:p>
           <a:p>
             <a:r>
-              <a:rPr lang="en-US" dirty="0"/>
+              <a:rPr lang="en-US" sz="6000" dirty="0">
+                <a:latin typeface="Segoe UI" panose="020B0502040204020203" pitchFamily="34" charset="0"/>
+                <a:cs typeface="Segoe UI" panose="020B0502040204020203" pitchFamily="34" charset="0"/>
+              </a:rPr>
               <a:t>10 000 subscriptions limit for wide queries</a:t>
             </a:r>
           </a:p>
           <a:p>
             <a:pPr lvl="1"/>
-            <a:endParaRPr lang="en-US" dirty="0">
-              <a:latin typeface="Cascadia Code" panose="020B0609020000020004" pitchFamily="34" charset="0"/>
+            <a:endParaRPr lang="en-US" sz="5400" dirty="0">
+              <a:latin typeface="Segoe UI" panose="020B0502040204020203" pitchFamily="34" charset="0"/>
               <a:ea typeface="Cascadia Code" panose="020B0609020000020004" pitchFamily="34" charset="0"/>
-              <a:cs typeface="Cascadia Code" panose="020B0609020000020004" pitchFamily="34" charset="0"/>
+              <a:cs typeface="Segoe UI" panose="020B0502040204020203" pitchFamily="34" charset="0"/>
             </a:endParaRPr>
           </a:p>
         </p:txBody>
@@ -19478,7 +20681,7 @@
         </p:blipFill>
         <p:spPr>
           <a:xfrm>
-            <a:off x="10045820" y="3709989"/>
+            <a:off x="12129875" y="3923815"/>
             <a:ext cx="561414" cy="561414"/>
           </a:xfrm>
           <a:prstGeom prst="rect">
@@ -19514,7 +20717,7 @@
         </p:blipFill>
         <p:spPr>
           <a:xfrm>
-            <a:off x="6100983" y="3709990"/>
+            <a:off x="7174409" y="3923815"/>
             <a:ext cx="559659" cy="559659"/>
           </a:xfrm>
           <a:prstGeom prst="rect">
@@ -19550,7 +20753,7 @@
         </p:blipFill>
         <p:spPr>
           <a:xfrm>
-            <a:off x="2023104" y="3709989"/>
+            <a:off x="2218942" y="3907305"/>
             <a:ext cx="559660" cy="559660"/>
           </a:xfrm>
           <a:prstGeom prst="rect">
@@ -20256,6 +21459,12 @@
           <a:lstStyle/>
           <a:p>
             <a:r>
+              <a:rPr>
+                <a:solidFill>
+                  <a:srgbClr val="F7F9FF"/>
+                </a:solidFill>
+                <a:latin typeface="Segoe UI Semibold"/>
+              </a:rPr>
               <a:t>ARG GET/LIST API</a:t>
             </a:r>
           </a:p>
@@ -20263,14 +21472,20 @@
       </p:sp>
       <p:sp>
         <p:nvSpPr>
-          <p:cNvPr id="3" name="TextBox 2"/>
+          <p:cNvPr id="16" name="TextBox 15">
+            <a:extLst>
+              <a:ext uri="{FF2B5EF4-FFF2-40B4-BE49-F238E27FC236}">
+                <a16:creationId xmlns:a16="http://schemas.microsoft.com/office/drawing/2014/main" id="{F77F2C32-9279-3B2A-622D-D0E6FA54F214}"/>
+              </a:ext>
+            </a:extLst>
+          </p:cNvPr>
           <p:cNvSpPr txBox="1"/>
           <p:nvPr/>
         </p:nvSpPr>
         <p:spPr>
           <a:xfrm>
-            <a:off x="1250000" y="2350000"/>
-            <a:ext cx="12500000" cy="2600000"/>
+            <a:off x="1656614" y="3616221"/>
+            <a:ext cx="20383500" cy="769441"/>
           </a:xfrm>
           <a:prstGeom prst="rect">
             <a:avLst/>
@@ -20278,50 +21493,1533 @@
           <a:noFill/>
         </p:spPr>
         <p:txBody>
-          <a:bodyPr wrap="none" lIns="0" tIns="0" rIns="0" bIns="0">
+          <a:bodyPr wrap="square">
             <a:spAutoFit/>
           </a:bodyPr>
           <a:lstStyle/>
           <a:p>
-            <a:r>
-              <a:rPr sz="2400">
-                <a:solidFill>
-                  <a:srgbClr val="E3E3E3"/>
-                </a:solidFill>
-                <a:latin typeface="Segoe UI Light"/>
-              </a:rPr>
-              <a:t>4,000 queries per minute, per user, per subscription</a:t>
-            </a:r>
-          </a:p>
-          <a:p>
-            <a:r>
-              <a:rPr sz="2400">
-                <a:solidFill>
-                  <a:srgbClr val="E3E3E3"/>
-                </a:solidFill>
-                <a:latin typeface="Segoe UI Light"/>
-              </a:rPr>
-              <a:t>Redirect ARM API requests to Azure Resource Graph</a:t>
-            </a:r>
-          </a:p>
-          <a:p>
-            <a:r>
-              <a:rPr sz="2400">
-                <a:solidFill>
-                  <a:srgbClr val="E3E3E3"/>
-                </a:solidFill>
-                <a:latin typeface="Segoe UI Light"/>
-              </a:rPr>
-              <a:t>Append &amp;useResourceGraph=true</a:t>
+            <a:pPr lvl="1"/>
+            <a:r>
+              <a:rPr lang="en-US" sz="4400" dirty="0">
+                <a:solidFill>
+                  <a:srgbClr val="FFC000"/>
+                </a:solidFill>
+                <a:latin typeface="Cascadia Code" panose="020B0609020000020004" pitchFamily="34" charset="0"/>
+                <a:ea typeface="Cascadia Code" panose="020B0609020000020004" pitchFamily="34" charset="0"/>
+                <a:cs typeface="Cascadia Code" panose="020B0609020000020004" pitchFamily="34" charset="0"/>
+              </a:rPr>
+              <a:t>&amp;</a:t>
+            </a:r>
+            <a:r>
+              <a:rPr lang="en-US" sz="4400" dirty="0" err="1">
+                <a:solidFill>
+                  <a:srgbClr val="FFC000"/>
+                </a:solidFill>
+                <a:latin typeface="Cascadia Code" panose="020B0609020000020004" pitchFamily="34" charset="0"/>
+                <a:ea typeface="Cascadia Code" panose="020B0609020000020004" pitchFamily="34" charset="0"/>
+                <a:cs typeface="Cascadia Code" panose="020B0609020000020004" pitchFamily="34" charset="0"/>
+              </a:rPr>
+              <a:t>useResourceGraph</a:t>
+            </a:r>
+            <a:r>
+              <a:rPr lang="en-US" sz="4400" dirty="0">
+                <a:solidFill>
+                  <a:srgbClr val="FFC000"/>
+                </a:solidFill>
+                <a:latin typeface="Cascadia Code" panose="020B0609020000020004" pitchFamily="34" charset="0"/>
+                <a:ea typeface="Cascadia Code" panose="020B0609020000020004" pitchFamily="34" charset="0"/>
+                <a:cs typeface="Cascadia Code" panose="020B0609020000020004" pitchFamily="34" charset="0"/>
+              </a:rPr>
+              <a:t>=true</a:t>
             </a:r>
           </a:p>
         </p:txBody>
       </p:sp>
+      <p:sp>
+        <p:nvSpPr>
+          <p:cNvPr id="9" name="Text Placeholder 2">
+            <a:extLst>
+              <a:ext uri="{FF2B5EF4-FFF2-40B4-BE49-F238E27FC236}">
+                <a16:creationId xmlns:a16="http://schemas.microsoft.com/office/drawing/2014/main" id="{0C43A0E4-6EE2-3987-D81A-2078AC7F43B2}"/>
+              </a:ext>
+            </a:extLst>
+          </p:cNvPr>
+          <p:cNvSpPr txBox="1">
+            <a:spLocks/>
+          </p:cNvSpPr>
+          <p:nvPr/>
+        </p:nvSpPr>
+        <p:spPr>
+          <a:xfrm>
+            <a:off x="1394574" y="1910806"/>
+            <a:ext cx="16731396" cy="3995738"/>
+          </a:xfrm>
+          <a:prstGeom prst="rect">
+            <a:avLst/>
+          </a:prstGeom>
+        </p:spPr>
+        <p:txBody>
+          <a:bodyPr/>
+          <a:lstStyle>
+            <a:lvl1pPr marL="228600" indent="-228600" algn="l" defTabSz="914400" rtl="0" eaLnBrk="1" latinLnBrk="0" hangingPunct="1">
+              <a:lnSpc>
+                <a:spcPct val="90000"/>
+              </a:lnSpc>
+              <a:spcBef>
+                <a:spcPts val="1500"/>
+              </a:spcBef>
+              <a:buFont typeface="Wingdings" panose="05000000000000000000" pitchFamily="2" charset="2"/>
+              <a:buChar char="§"/>
+              <a:defRPr sz="5400" kern="1200">
+                <a:solidFill>
+                  <a:schemeClr val="tx1"/>
+                </a:solidFill>
+                <a:latin typeface="+mn-lt"/>
+                <a:ea typeface="+mn-ea"/>
+                <a:cs typeface="+mn-cs"/>
+              </a:defRPr>
+            </a:lvl1pPr>
+            <a:lvl2pPr marL="685800" indent="-228600" algn="l" defTabSz="914400" rtl="0" eaLnBrk="1" latinLnBrk="0" hangingPunct="1">
+              <a:lnSpc>
+                <a:spcPct val="90000"/>
+              </a:lnSpc>
+              <a:spcBef>
+                <a:spcPts val="750"/>
+              </a:spcBef>
+              <a:buFont typeface="Wingdings" panose="05000000000000000000" pitchFamily="2" charset="2"/>
+              <a:buChar char="§"/>
+              <a:defRPr sz="4800" kern="1200">
+                <a:solidFill>
+                  <a:srgbClr val="62D5FF"/>
+                </a:solidFill>
+                <a:latin typeface="+mn-lt"/>
+                <a:ea typeface="+mn-ea"/>
+                <a:cs typeface="+mn-cs"/>
+              </a:defRPr>
+            </a:lvl2pPr>
+            <a:lvl3pPr marL="1143000" indent="-228600" algn="l" defTabSz="914400" rtl="0" eaLnBrk="1" latinLnBrk="0" hangingPunct="1">
+              <a:lnSpc>
+                <a:spcPct val="90000"/>
+              </a:lnSpc>
+              <a:spcBef>
+                <a:spcPts val="750"/>
+              </a:spcBef>
+              <a:buFont typeface="Wingdings" panose="05000000000000000000" pitchFamily="2" charset="2"/>
+              <a:buChar char="§"/>
+              <a:defRPr sz="4200" kern="1200">
+                <a:solidFill>
+                  <a:schemeClr val="tx1"/>
+                </a:solidFill>
+                <a:latin typeface="+mn-lt"/>
+                <a:ea typeface="+mn-ea"/>
+                <a:cs typeface="+mn-cs"/>
+              </a:defRPr>
+            </a:lvl3pPr>
+            <a:lvl4pPr marL="1600200" indent="-228600" algn="l" defTabSz="914400" rtl="0" eaLnBrk="1" latinLnBrk="0" hangingPunct="1">
+              <a:lnSpc>
+                <a:spcPct val="90000"/>
+              </a:lnSpc>
+              <a:spcBef>
+                <a:spcPts val="750"/>
+              </a:spcBef>
+              <a:buFont typeface="Wingdings" panose="05000000000000000000" pitchFamily="2" charset="2"/>
+              <a:buChar char="§"/>
+              <a:defRPr sz="3600" kern="1200">
+                <a:solidFill>
+                  <a:schemeClr val="tx1"/>
+                </a:solidFill>
+                <a:latin typeface="+mn-lt"/>
+                <a:ea typeface="+mn-ea"/>
+                <a:cs typeface="+mn-cs"/>
+              </a:defRPr>
+            </a:lvl4pPr>
+            <a:lvl5pPr marL="2057400" indent="-228600" algn="l" defTabSz="914400" rtl="0" eaLnBrk="1" latinLnBrk="0" hangingPunct="1">
+              <a:lnSpc>
+                <a:spcPct val="90000"/>
+              </a:lnSpc>
+              <a:spcBef>
+                <a:spcPts val="750"/>
+              </a:spcBef>
+              <a:buFont typeface="Wingdings" panose="05000000000000000000" pitchFamily="2" charset="2"/>
+              <a:buChar char="§"/>
+              <a:defRPr sz="3600" kern="1200">
+                <a:solidFill>
+                  <a:schemeClr val="tx1"/>
+                </a:solidFill>
+                <a:latin typeface="+mn-lt"/>
+                <a:ea typeface="+mn-ea"/>
+                <a:cs typeface="+mn-cs"/>
+              </a:defRPr>
+            </a:lvl5pPr>
+            <a:lvl6pPr marL="2514600" indent="-228600" algn="l" defTabSz="914400" rtl="0" eaLnBrk="1" latinLnBrk="0" hangingPunct="1">
+              <a:lnSpc>
+                <a:spcPct val="90000"/>
+              </a:lnSpc>
+              <a:spcBef>
+                <a:spcPts val="750"/>
+              </a:spcBef>
+              <a:buFont typeface="Arial" panose="020B0604020202020204" pitchFamily="34" charset="0"/>
+              <a:buChar char="•"/>
+              <a:defRPr sz="2700" kern="1200">
+                <a:solidFill>
+                  <a:schemeClr val="tx1"/>
+                </a:solidFill>
+                <a:latin typeface="+mn-lt"/>
+                <a:ea typeface="+mn-ea"/>
+                <a:cs typeface="+mn-cs"/>
+              </a:defRPr>
+            </a:lvl6pPr>
+            <a:lvl7pPr marL="2971800" indent="-228600" algn="l" defTabSz="914400" rtl="0" eaLnBrk="1" latinLnBrk="0" hangingPunct="1">
+              <a:lnSpc>
+                <a:spcPct val="90000"/>
+              </a:lnSpc>
+              <a:spcBef>
+                <a:spcPts val="750"/>
+              </a:spcBef>
+              <a:buFont typeface="Arial" panose="020B0604020202020204" pitchFamily="34" charset="0"/>
+              <a:buChar char="•"/>
+              <a:defRPr sz="2700" kern="1200">
+                <a:solidFill>
+                  <a:schemeClr val="tx1"/>
+                </a:solidFill>
+                <a:latin typeface="+mn-lt"/>
+                <a:ea typeface="+mn-ea"/>
+                <a:cs typeface="+mn-cs"/>
+              </a:defRPr>
+            </a:lvl7pPr>
+            <a:lvl8pPr marL="3429000" indent="-228600" algn="l" defTabSz="914400" rtl="0" eaLnBrk="1" latinLnBrk="0" hangingPunct="1">
+              <a:lnSpc>
+                <a:spcPct val="90000"/>
+              </a:lnSpc>
+              <a:spcBef>
+                <a:spcPts val="750"/>
+              </a:spcBef>
+              <a:buFont typeface="Arial" panose="020B0604020202020204" pitchFamily="34" charset="0"/>
+              <a:buChar char="•"/>
+              <a:defRPr sz="2700" kern="1200">
+                <a:solidFill>
+                  <a:schemeClr val="tx1"/>
+                </a:solidFill>
+                <a:latin typeface="+mn-lt"/>
+                <a:ea typeface="+mn-ea"/>
+                <a:cs typeface="+mn-cs"/>
+              </a:defRPr>
+            </a:lvl8pPr>
+            <a:lvl9pPr marL="3886200" indent="-228600" algn="l" defTabSz="914400" rtl="0" eaLnBrk="1" latinLnBrk="0" hangingPunct="1">
+              <a:lnSpc>
+                <a:spcPct val="90000"/>
+              </a:lnSpc>
+              <a:spcBef>
+                <a:spcPts val="750"/>
+              </a:spcBef>
+              <a:buFont typeface="Arial" panose="020B0604020202020204" pitchFamily="34" charset="0"/>
+              <a:buChar char="•"/>
+              <a:defRPr sz="2700" kern="1200">
+                <a:solidFill>
+                  <a:schemeClr val="tx1"/>
+                </a:solidFill>
+                <a:latin typeface="+mn-lt"/>
+                <a:ea typeface="+mn-ea"/>
+                <a:cs typeface="+mn-cs"/>
+              </a:defRPr>
+            </a:lvl9pPr>
+          </a:lstStyle>
+          <a:p>
+            <a:r>
+              <a:rPr lang="en-US" dirty="0">
+                <a:latin typeface="Segoe UI" panose="020B0502040204020203" pitchFamily="34" charset="0"/>
+                <a:cs typeface="Segoe UI" panose="020B0502040204020203" pitchFamily="34" charset="0"/>
+              </a:rPr>
+              <a:t>    4000 queries /     Minute /    User /    Subscription</a:t>
+            </a:r>
+          </a:p>
+          <a:p>
+            <a:r>
+              <a:rPr lang="en-US" dirty="0">
+                <a:latin typeface="Segoe UI" panose="020B0502040204020203" pitchFamily="34" charset="0"/>
+                <a:cs typeface="Segoe UI" panose="020B0502040204020203" pitchFamily="34" charset="0"/>
+              </a:rPr>
+              <a:t>Redirect ARM API requests to ARG</a:t>
+            </a:r>
+            <a:endParaRPr lang="en-US" sz="7200" dirty="0">
+              <a:latin typeface="Segoe UI" panose="020B0502040204020203" pitchFamily="34" charset="0"/>
+              <a:cs typeface="Segoe UI" panose="020B0502040204020203" pitchFamily="34" charset="0"/>
+            </a:endParaRPr>
+          </a:p>
+          <a:p>
+            <a:pPr lvl="1"/>
+            <a:r>
+              <a:rPr lang="en-US" sz="4400" dirty="0">
+                <a:solidFill>
+                  <a:srgbClr val="FFC000"/>
+                </a:solidFill>
+                <a:latin typeface="Cascadia Code" panose="020B0609020000020004" pitchFamily="34" charset="0"/>
+                <a:ea typeface="Cascadia Code" panose="020B0609020000020004" pitchFamily="34" charset="0"/>
+                <a:cs typeface="Cascadia Code" panose="020B0609020000020004" pitchFamily="34" charset="0"/>
+              </a:rPr>
+              <a:t>&amp;</a:t>
+            </a:r>
+            <a:r>
+              <a:rPr lang="en-US" sz="4400" dirty="0" err="1">
+                <a:solidFill>
+                  <a:srgbClr val="FFC000"/>
+                </a:solidFill>
+                <a:latin typeface="Cascadia Code" panose="020B0609020000020004" pitchFamily="34" charset="0"/>
+                <a:ea typeface="Cascadia Code" panose="020B0609020000020004" pitchFamily="34" charset="0"/>
+                <a:cs typeface="Cascadia Code" panose="020B0609020000020004" pitchFamily="34" charset="0"/>
+              </a:rPr>
+              <a:t>useResourceGraph</a:t>
+            </a:r>
+            <a:r>
+              <a:rPr lang="en-US" sz="4400" dirty="0">
+                <a:solidFill>
+                  <a:srgbClr val="FFC000"/>
+                </a:solidFill>
+                <a:latin typeface="Cascadia Code" panose="020B0609020000020004" pitchFamily="34" charset="0"/>
+                <a:ea typeface="Cascadia Code" panose="020B0609020000020004" pitchFamily="34" charset="0"/>
+                <a:cs typeface="Cascadia Code" panose="020B0609020000020004" pitchFamily="34" charset="0"/>
+              </a:rPr>
+              <a:t>=true</a:t>
+            </a:r>
+          </a:p>
+          <a:p>
+            <a:endParaRPr lang="en-US" sz="7200" dirty="0">
+              <a:latin typeface="Segoe UI" panose="020B0502040204020203" pitchFamily="34" charset="0"/>
+              <a:ea typeface="Cascadia Code" panose="020B0609020000020004" pitchFamily="34" charset="0"/>
+              <a:cs typeface="Segoe UI" panose="020B0502040204020203" pitchFamily="34" charset="0"/>
+            </a:endParaRPr>
+          </a:p>
+        </p:txBody>
+      </p:sp>
+      <p:pic>
+        <p:nvPicPr>
+          <p:cNvPr id="11" name="Graphic 10">
+            <a:extLst>
+              <a:ext uri="{FF2B5EF4-FFF2-40B4-BE49-F238E27FC236}">
+                <a16:creationId xmlns:a16="http://schemas.microsoft.com/office/drawing/2014/main" id="{243CD4FA-086F-2E47-80B8-B2E7B9629EA1}"/>
+              </a:ext>
+            </a:extLst>
+          </p:cNvPr>
+          <p:cNvPicPr>
+            <a:picLocks noChangeAspect="1"/>
+          </p:cNvPicPr>
+          <p:nvPr/>
+        </p:nvPicPr>
+        <p:blipFill>
+          <a:blip>
+            <a:extLst>
+              <a:ext uri="{96DAC541-7B7A-43D3-8B79-37D633B846F1}">
+                <asvg:svgBlip xmlns:asvg="http://schemas.microsoft.com/office/drawing/2016/SVG/main" r:embed="rId3"/>
+              </a:ext>
+            </a:extLst>
+          </a:blip>
+          <a:stretch>
+            <a:fillRect/>
+          </a:stretch>
+        </p:blipFill>
+        <p:spPr>
+          <a:xfrm>
+            <a:off x="1862277" y="2027042"/>
+            <a:ext cx="486998" cy="486998"/>
+          </a:xfrm>
+          <a:prstGeom prst="rect">
+            <a:avLst/>
+          </a:prstGeom>
+        </p:spPr>
+      </p:pic>
+      <p:pic>
+        <p:nvPicPr>
+          <p:cNvPr id="12" name="Graphic 11">
+            <a:extLst>
+              <a:ext uri="{FF2B5EF4-FFF2-40B4-BE49-F238E27FC236}">
+                <a16:creationId xmlns:a16="http://schemas.microsoft.com/office/drawing/2014/main" id="{763EE619-C949-E3AA-9CB4-9BB1B8996071}"/>
+              </a:ext>
+            </a:extLst>
+          </p:cNvPr>
+          <p:cNvPicPr>
+            <a:picLocks noChangeAspect="1"/>
+          </p:cNvPicPr>
+          <p:nvPr/>
+        </p:nvPicPr>
+        <p:blipFill>
+          <a:blip>
+            <a:extLst>
+              <a:ext uri="{96DAC541-7B7A-43D3-8B79-37D633B846F1}">
+                <asvg:svgBlip xmlns:asvg="http://schemas.microsoft.com/office/drawing/2016/SVG/main" r:embed="rId4"/>
+              </a:ext>
+            </a:extLst>
+          </a:blip>
+          <a:stretch>
+            <a:fillRect/>
+          </a:stretch>
+        </p:blipFill>
+        <p:spPr>
+          <a:xfrm>
+            <a:off x="7015435" y="2021698"/>
+            <a:ext cx="559659" cy="559659"/>
+          </a:xfrm>
+          <a:prstGeom prst="rect">
+            <a:avLst/>
+          </a:prstGeom>
+        </p:spPr>
+      </p:pic>
+      <p:pic>
+        <p:nvPicPr>
+          <p:cNvPr id="13" name="Graphic 12">
+            <a:extLst>
+              <a:ext uri="{FF2B5EF4-FFF2-40B4-BE49-F238E27FC236}">
+                <a16:creationId xmlns:a16="http://schemas.microsoft.com/office/drawing/2014/main" id="{AF07CBE8-3AC7-A3FB-231E-E06EBFD18FCF}"/>
+              </a:ext>
+            </a:extLst>
+          </p:cNvPr>
+          <p:cNvPicPr>
+            <a:picLocks noChangeAspect="1"/>
+          </p:cNvPicPr>
+          <p:nvPr/>
+        </p:nvPicPr>
+        <p:blipFill>
+          <a:blip>
+            <a:extLst>
+              <a:ext uri="{96DAC541-7B7A-43D3-8B79-37D633B846F1}">
+                <asvg:svgBlip xmlns:asvg="http://schemas.microsoft.com/office/drawing/2016/SVG/main" r:embed="rId5"/>
+              </a:ext>
+            </a:extLst>
+          </a:blip>
+          <a:stretch>
+            <a:fillRect/>
+          </a:stretch>
+        </p:blipFill>
+        <p:spPr>
+          <a:xfrm>
+            <a:off x="10432201" y="2014432"/>
+            <a:ext cx="561414" cy="561414"/>
+          </a:xfrm>
+          <a:prstGeom prst="rect">
+            <a:avLst/>
+          </a:prstGeom>
+        </p:spPr>
+      </p:pic>
+      <p:pic>
+        <p:nvPicPr>
+          <p:cNvPr id="14" name="Graphic 13">
+            <a:extLst>
+              <a:ext uri="{FF2B5EF4-FFF2-40B4-BE49-F238E27FC236}">
+                <a16:creationId xmlns:a16="http://schemas.microsoft.com/office/drawing/2014/main" id="{6A2EEE24-EC98-848A-69E2-A5AC911DC99A}"/>
+              </a:ext>
+            </a:extLst>
+          </p:cNvPr>
+          <p:cNvPicPr>
+            <a:picLocks noChangeAspect="1"/>
+          </p:cNvPicPr>
+          <p:nvPr/>
+        </p:nvPicPr>
+        <p:blipFill>
+          <a:blip>
+            <a:extLst>
+              <a:ext uri="{96DAC541-7B7A-43D3-8B79-37D633B846F1}">
+                <asvg:svgBlip xmlns:asvg="http://schemas.microsoft.com/office/drawing/2016/SVG/main" r:embed="rId6"/>
+              </a:ext>
+            </a:extLst>
+          </a:blip>
+          <a:stretch>
+            <a:fillRect/>
+          </a:stretch>
+        </p:blipFill>
+        <p:spPr>
+          <a:xfrm>
+            <a:off x="13059751" y="1993438"/>
+            <a:ext cx="593964" cy="593964"/>
+          </a:xfrm>
+          <a:prstGeom prst="rect">
+            <a:avLst/>
+          </a:prstGeom>
+        </p:spPr>
+      </p:pic>
+      <p:sp>
+        <p:nvSpPr>
+          <p:cNvPr id="15" name="TextBox 14">
+            <a:extLst>
+              <a:ext uri="{FF2B5EF4-FFF2-40B4-BE49-F238E27FC236}">
+                <a16:creationId xmlns:a16="http://schemas.microsoft.com/office/drawing/2014/main" id="{D4F3BCEE-1FF4-5C8E-3AC2-523C622502DD}"/>
+              </a:ext>
+            </a:extLst>
+          </p:cNvPr>
+          <p:cNvSpPr txBox="1"/>
+          <p:nvPr/>
+        </p:nvSpPr>
+        <p:spPr>
+          <a:xfrm>
+            <a:off x="18288000" y="4986472"/>
+            <a:ext cx="56313996" cy="692498"/>
+          </a:xfrm>
+          <a:prstGeom prst="rect">
+            <a:avLst/>
+          </a:prstGeom>
+          <a:noFill/>
+        </p:spPr>
+        <p:txBody>
+          <a:bodyPr wrap="square">
+            <a:spAutoFit/>
+          </a:bodyPr>
+          <a:lstStyle/>
+          <a:p>
+            <a:r>
+              <a:rPr lang="en-US" sz="3600" dirty="0">
+                <a:solidFill>
+                  <a:schemeClr val="tx1"/>
+                </a:solidFill>
+                <a:latin typeface="Cascadia Code" panose="020B0609020000020004" pitchFamily="34" charset="0"/>
+                <a:ea typeface="Cascadia Code" panose="020B0609020000020004" pitchFamily="34" charset="0"/>
+                <a:cs typeface="Cascadia Code" panose="020B0609020000020004" pitchFamily="34" charset="0"/>
+              </a:rPr>
+              <a:t>https://</a:t>
+            </a:r>
+            <a:r>
+              <a:rPr lang="en-US" sz="3600" dirty="0" err="1">
+                <a:solidFill>
+                  <a:schemeClr val="tx1"/>
+                </a:solidFill>
+                <a:latin typeface="Cascadia Code" panose="020B0609020000020004" pitchFamily="34" charset="0"/>
+                <a:ea typeface="Cascadia Code" panose="020B0609020000020004" pitchFamily="34" charset="0"/>
+                <a:cs typeface="Cascadia Code" panose="020B0609020000020004" pitchFamily="34" charset="0"/>
+              </a:rPr>
+              <a:t>management.azure.com</a:t>
+            </a:r>
+            <a:r>
+              <a:rPr lang="en-US" sz="3600" dirty="0">
+                <a:solidFill>
+                  <a:schemeClr val="tx1"/>
+                </a:solidFill>
+                <a:latin typeface="Cascadia Code" panose="020B0609020000020004" pitchFamily="34" charset="0"/>
+                <a:ea typeface="Cascadia Code" panose="020B0609020000020004" pitchFamily="34" charset="0"/>
+                <a:cs typeface="Cascadia Code" panose="020B0609020000020004" pitchFamily="34" charset="0"/>
+              </a:rPr>
+              <a:t>/subscriptions/{</a:t>
+            </a:r>
+            <a:r>
+              <a:rPr lang="en-US" sz="3600" dirty="0" err="1">
+                <a:solidFill>
+                  <a:schemeClr val="tx1"/>
+                </a:solidFill>
+                <a:latin typeface="Cascadia Code" panose="020B0609020000020004" pitchFamily="34" charset="0"/>
+                <a:ea typeface="Cascadia Code" panose="020B0609020000020004" pitchFamily="34" charset="0"/>
+                <a:cs typeface="Cascadia Code" panose="020B0609020000020004" pitchFamily="34" charset="0"/>
+              </a:rPr>
+              <a:t>subscriptionId</a:t>
+            </a:r>
+            <a:r>
+              <a:rPr lang="en-US" sz="3600" dirty="0">
+                <a:solidFill>
+                  <a:schemeClr val="tx1"/>
+                </a:solidFill>
+                <a:latin typeface="Cascadia Code" panose="020B0609020000020004" pitchFamily="34" charset="0"/>
+                <a:ea typeface="Cascadia Code" panose="020B0609020000020004" pitchFamily="34" charset="0"/>
+                <a:cs typeface="Cascadia Code" panose="020B0609020000020004" pitchFamily="34" charset="0"/>
+              </a:rPr>
+              <a:t>}/</a:t>
+            </a:r>
+            <a:r>
+              <a:rPr lang="en-US" sz="3600" dirty="0" err="1">
+                <a:solidFill>
+                  <a:schemeClr val="tx1"/>
+                </a:solidFill>
+                <a:latin typeface="Cascadia Code" panose="020B0609020000020004" pitchFamily="34" charset="0"/>
+                <a:ea typeface="Cascadia Code" panose="020B0609020000020004" pitchFamily="34" charset="0"/>
+                <a:cs typeface="Cascadia Code" panose="020B0609020000020004" pitchFamily="34" charset="0"/>
+              </a:rPr>
+              <a:t>resourceGroups</a:t>
+            </a:r>
+            <a:r>
+              <a:rPr lang="en-US" sz="3600" dirty="0">
+                <a:solidFill>
+                  <a:schemeClr val="tx1"/>
+                </a:solidFill>
+                <a:latin typeface="Cascadia Code" panose="020B0609020000020004" pitchFamily="34" charset="0"/>
+                <a:ea typeface="Cascadia Code" panose="020B0609020000020004" pitchFamily="34" charset="0"/>
+                <a:cs typeface="Cascadia Code" panose="020B0609020000020004" pitchFamily="34" charset="0"/>
+              </a:rPr>
+              <a:t>/{</a:t>
+            </a:r>
+            <a:r>
+              <a:rPr lang="en-US" sz="3600" dirty="0" err="1">
+                <a:solidFill>
+                  <a:schemeClr val="tx1"/>
+                </a:solidFill>
+                <a:latin typeface="Cascadia Code" panose="020B0609020000020004" pitchFamily="34" charset="0"/>
+                <a:ea typeface="Cascadia Code" panose="020B0609020000020004" pitchFamily="34" charset="0"/>
+                <a:cs typeface="Cascadia Code" panose="020B0609020000020004" pitchFamily="34" charset="0"/>
+              </a:rPr>
+              <a:t>resourceGroup</a:t>
+            </a:r>
+            <a:r>
+              <a:rPr lang="en-US" sz="3600" dirty="0">
+                <a:solidFill>
+                  <a:schemeClr val="tx1"/>
+                </a:solidFill>
+                <a:latin typeface="Cascadia Code" panose="020B0609020000020004" pitchFamily="34" charset="0"/>
+                <a:ea typeface="Cascadia Code" panose="020B0609020000020004" pitchFamily="34" charset="0"/>
+                <a:cs typeface="Cascadia Code" panose="020B0609020000020004" pitchFamily="34" charset="0"/>
+              </a:rPr>
+              <a:t>}/providers/{</a:t>
+            </a:r>
+            <a:r>
+              <a:rPr lang="en-US" sz="3600" dirty="0" err="1">
+                <a:solidFill>
+                  <a:schemeClr val="tx1"/>
+                </a:solidFill>
+                <a:latin typeface="Cascadia Code" panose="020B0609020000020004" pitchFamily="34" charset="0"/>
+                <a:ea typeface="Cascadia Code" panose="020B0609020000020004" pitchFamily="34" charset="0"/>
+                <a:cs typeface="Cascadia Code" panose="020B0609020000020004" pitchFamily="34" charset="0"/>
+              </a:rPr>
+              <a:t>providerNamespace</a:t>
+            </a:r>
+            <a:r>
+              <a:rPr lang="en-US" sz="3600" dirty="0">
+                <a:solidFill>
+                  <a:schemeClr val="tx1"/>
+                </a:solidFill>
+                <a:latin typeface="Cascadia Code" panose="020B0609020000020004" pitchFamily="34" charset="0"/>
+                <a:ea typeface="Cascadia Code" panose="020B0609020000020004" pitchFamily="34" charset="0"/>
+                <a:cs typeface="Cascadia Code" panose="020B0609020000020004" pitchFamily="34" charset="0"/>
+              </a:rPr>
+              <a:t>}/{</a:t>
+            </a:r>
+            <a:r>
+              <a:rPr lang="en-US" sz="3600" dirty="0" err="1">
+                <a:solidFill>
+                  <a:schemeClr val="tx1"/>
+                </a:solidFill>
+                <a:latin typeface="Cascadia Code" panose="020B0609020000020004" pitchFamily="34" charset="0"/>
+                <a:ea typeface="Cascadia Code" panose="020B0609020000020004" pitchFamily="34" charset="0"/>
+                <a:cs typeface="Cascadia Code" panose="020B0609020000020004" pitchFamily="34" charset="0"/>
+              </a:rPr>
+              <a:t>resourceType</a:t>
+            </a:r>
+            <a:r>
+              <a:rPr lang="en-US" sz="3600" dirty="0">
+                <a:solidFill>
+                  <a:schemeClr val="tx1"/>
+                </a:solidFill>
+                <a:latin typeface="Cascadia Code" panose="020B0609020000020004" pitchFamily="34" charset="0"/>
+                <a:ea typeface="Cascadia Code" panose="020B0609020000020004" pitchFamily="34" charset="0"/>
+                <a:cs typeface="Cascadia Code" panose="020B0609020000020004" pitchFamily="34" charset="0"/>
+              </a:rPr>
+              <a:t>}/{</a:t>
+            </a:r>
+            <a:r>
+              <a:rPr lang="en-US" sz="3600" dirty="0" err="1">
+                <a:solidFill>
+                  <a:schemeClr val="tx1"/>
+                </a:solidFill>
+                <a:latin typeface="Cascadia Code" panose="020B0609020000020004" pitchFamily="34" charset="0"/>
+                <a:ea typeface="Cascadia Code" panose="020B0609020000020004" pitchFamily="34" charset="0"/>
+                <a:cs typeface="Cascadia Code" panose="020B0609020000020004" pitchFamily="34" charset="0"/>
+              </a:rPr>
+              <a:t>resourceName</a:t>
+            </a:r>
+            <a:r>
+              <a:rPr lang="en-US" sz="3600" dirty="0">
+                <a:solidFill>
+                  <a:schemeClr val="tx1"/>
+                </a:solidFill>
+                <a:latin typeface="Cascadia Code" panose="020B0609020000020004" pitchFamily="34" charset="0"/>
+                <a:ea typeface="Cascadia Code" panose="020B0609020000020004" pitchFamily="34" charset="0"/>
+                <a:cs typeface="Cascadia Code" panose="020B0609020000020004" pitchFamily="34" charset="0"/>
+              </a:rPr>
+              <a:t>}?</a:t>
+            </a:r>
+            <a:r>
+              <a:rPr lang="en-US" sz="3600" dirty="0" err="1">
+                <a:solidFill>
+                  <a:schemeClr val="tx1"/>
+                </a:solidFill>
+                <a:latin typeface="Cascadia Code" panose="020B0609020000020004" pitchFamily="34" charset="0"/>
+                <a:ea typeface="Cascadia Code" panose="020B0609020000020004" pitchFamily="34" charset="0"/>
+                <a:cs typeface="Cascadia Code" panose="020B0609020000020004" pitchFamily="34" charset="0"/>
+              </a:rPr>
+              <a:t>api</a:t>
+            </a:r>
+            <a:r>
+              <a:rPr lang="en-US" sz="3600" dirty="0">
+                <a:solidFill>
+                  <a:schemeClr val="tx1"/>
+                </a:solidFill>
+                <a:latin typeface="Cascadia Code" panose="020B0609020000020004" pitchFamily="34" charset="0"/>
+                <a:ea typeface="Cascadia Code" panose="020B0609020000020004" pitchFamily="34" charset="0"/>
+                <a:cs typeface="Cascadia Code" panose="020B0609020000020004" pitchFamily="34" charset="0"/>
+              </a:rPr>
+              <a:t>-version={</a:t>
+            </a:r>
+            <a:r>
+              <a:rPr lang="en-US" sz="3600" dirty="0" err="1">
+                <a:solidFill>
+                  <a:schemeClr val="tx1"/>
+                </a:solidFill>
+                <a:latin typeface="Cascadia Code" panose="020B0609020000020004" pitchFamily="34" charset="0"/>
+                <a:ea typeface="Cascadia Code" panose="020B0609020000020004" pitchFamily="34" charset="0"/>
+                <a:cs typeface="Cascadia Code" panose="020B0609020000020004" pitchFamily="34" charset="0"/>
+              </a:rPr>
+              <a:t>apiVersion</a:t>
+            </a:r>
+            <a:r>
+              <a:rPr lang="en-US" sz="3600" dirty="0">
+                <a:solidFill>
+                  <a:schemeClr val="tx1"/>
+                </a:solidFill>
+                <a:latin typeface="Cascadia Code" panose="020B0609020000020004" pitchFamily="34" charset="0"/>
+                <a:ea typeface="Cascadia Code" panose="020B0609020000020004" pitchFamily="34" charset="0"/>
+                <a:cs typeface="Cascadia Code" panose="020B0609020000020004" pitchFamily="34" charset="0"/>
+              </a:rPr>
+              <a:t>}</a:t>
+            </a:r>
+          </a:p>
+        </p:txBody>
+      </p:sp>
+      <mc:AlternateContent xmlns:mc="http://schemas.openxmlformats.org/markup-compatibility/2006">
+        <mc:Choice xmlns:p14="http://schemas.microsoft.com/office/powerpoint/2010/main" Requires="p14">
+          <p:contentPart p14:bwMode="auto" r:id="rId7">
+            <p14:nvContentPartPr>
+              <p14:cNvPr id="17" name="Ink 16">
+                <a:extLst>
+                  <a:ext uri="{FF2B5EF4-FFF2-40B4-BE49-F238E27FC236}">
+                    <a16:creationId xmlns:a16="http://schemas.microsoft.com/office/drawing/2014/main" id="{1CE5AFF3-CBD6-A855-E63A-13A9225C4E1A}"/>
+                  </a:ext>
+                </a:extLst>
+              </p14:cNvPr>
+              <p14:cNvContentPartPr/>
+              <p14:nvPr/>
+            </p14:nvContentPartPr>
+            <p14:xfrm>
+              <a:off x="1736126" y="5391792"/>
+              <a:ext cx="6210633" cy="3780"/>
+            </p14:xfrm>
+          </p:contentPart>
+        </mc:Choice>
+        <mc:Fallback>
+          <p:pic>
+            <p:nvPicPr>
+              <p:cNvPr id="17" name="Ink 16">
+                <a:extLst>
+                  <a:ext uri="{FF2B5EF4-FFF2-40B4-BE49-F238E27FC236}">
+                    <a16:creationId xmlns:a16="http://schemas.microsoft.com/office/drawing/2014/main" id="{1CE5AFF3-CBD6-A855-E63A-13A9225C4E1A}"/>
+                  </a:ext>
+                </a:extLst>
+              </p:cNvPr>
+              <p:cNvPicPr/>
+              <p:nvPr/>
+            </p:nvPicPr>
+            <p:blipFill>
+              <a:blip r:embed="rId8"/>
+              <a:stretch>
+                <a:fillRect/>
+              </a:stretch>
+            </p:blipFill>
+            <p:spPr>
+              <a:xfrm>
+                <a:off x="1634607" y="5178600"/>
+                <a:ext cx="6413310" cy="430164"/>
+              </a:xfrm>
+              <a:prstGeom prst="rect">
+                <a:avLst/>
+              </a:prstGeom>
+            </p:spPr>
+          </p:pic>
+        </mc:Fallback>
+      </mc:AlternateContent>
     </p:spTree>
   </p:cSld>
   <p:clrMapOvr>
     <a:masterClrMapping/>
   </p:clrMapOvr>
+  <p:timing>
+    <p:tnLst>
+      <p:par>
+        <p:cTn id="1" dur="indefinite" restart="never" nodeType="tmRoot">
+          <p:childTnLst>
+            <p:seq concurrent="1" nextAc="seek">
+              <p:cTn id="2" dur="indefinite" nodeType="mainSeq">
+                <p:childTnLst>
+                  <p:par>
+                    <p:cTn id="3" fill="hold">
+                      <p:stCondLst>
+                        <p:cond delay="indefinite"/>
+                      </p:stCondLst>
+                      <p:childTnLst>
+                        <p:par>
+                          <p:cTn id="4" fill="hold">
+                            <p:stCondLst>
+                              <p:cond delay="0"/>
+                            </p:stCondLst>
+                            <p:childTnLst>
+                              <p:par>
+                                <p:cTn id="5" presetID="10" presetClass="entr" presetSubtype="0" fill="hold" grpId="0" nodeType="clickEffect">
+                                  <p:stCondLst>
+                                    <p:cond delay="0"/>
+                                  </p:stCondLst>
+                                  <p:childTnLst>
+                                    <p:set>
+                                      <p:cBhvr>
+                                        <p:cTn id="6" dur="1" fill="hold">
+                                          <p:stCondLst>
+                                            <p:cond delay="0"/>
+                                          </p:stCondLst>
+                                        </p:cTn>
+                                        <p:tgtEl>
+                                          <p:spTgt spid="9">
+                                            <p:txEl>
+                                              <p:pRg st="0" end="0"/>
+                                            </p:txEl>
+                                          </p:spTgt>
+                                        </p:tgtEl>
+                                        <p:attrNameLst>
+                                          <p:attrName>style.visibility</p:attrName>
+                                        </p:attrNameLst>
+                                      </p:cBhvr>
+                                      <p:to>
+                                        <p:strVal val="visible"/>
+                                      </p:to>
+                                    </p:set>
+                                    <p:animEffect transition="in" filter="fade">
+                                      <p:cBhvr>
+                                        <p:cTn id="7" dur="500"/>
+                                        <p:tgtEl>
+                                          <p:spTgt spid="9">
+                                            <p:txEl>
+                                              <p:pRg st="0" end="0"/>
+                                            </p:txEl>
+                                          </p:spTgt>
+                                        </p:tgtEl>
+                                      </p:cBhvr>
+                                    </p:animEffect>
+                                  </p:childTnLst>
+                                </p:cTn>
+                              </p:par>
+                              <p:par>
+                                <p:cTn id="8" presetID="10" presetClass="entr" presetSubtype="0" fill="hold" nodeType="withEffect">
+                                  <p:stCondLst>
+                                    <p:cond delay="0"/>
+                                  </p:stCondLst>
+                                  <p:childTnLst>
+                                    <p:set>
+                                      <p:cBhvr>
+                                        <p:cTn id="9" dur="1" fill="hold">
+                                          <p:stCondLst>
+                                            <p:cond delay="0"/>
+                                          </p:stCondLst>
+                                        </p:cTn>
+                                        <p:tgtEl>
+                                          <p:spTgt spid="11"/>
+                                        </p:tgtEl>
+                                        <p:attrNameLst>
+                                          <p:attrName>style.visibility</p:attrName>
+                                        </p:attrNameLst>
+                                      </p:cBhvr>
+                                      <p:to>
+                                        <p:strVal val="visible"/>
+                                      </p:to>
+                                    </p:set>
+                                    <p:animEffect transition="in" filter="fade">
+                                      <p:cBhvr>
+                                        <p:cTn id="10" dur="500"/>
+                                        <p:tgtEl>
+                                          <p:spTgt spid="11"/>
+                                        </p:tgtEl>
+                                      </p:cBhvr>
+                                    </p:animEffect>
+                                  </p:childTnLst>
+                                </p:cTn>
+                              </p:par>
+                              <p:par>
+                                <p:cTn id="11" presetID="10" presetClass="entr" presetSubtype="0" fill="hold" nodeType="withEffect">
+                                  <p:stCondLst>
+                                    <p:cond delay="0"/>
+                                  </p:stCondLst>
+                                  <p:childTnLst>
+                                    <p:set>
+                                      <p:cBhvr>
+                                        <p:cTn id="12" dur="1" fill="hold">
+                                          <p:stCondLst>
+                                            <p:cond delay="0"/>
+                                          </p:stCondLst>
+                                        </p:cTn>
+                                        <p:tgtEl>
+                                          <p:spTgt spid="12"/>
+                                        </p:tgtEl>
+                                        <p:attrNameLst>
+                                          <p:attrName>style.visibility</p:attrName>
+                                        </p:attrNameLst>
+                                      </p:cBhvr>
+                                      <p:to>
+                                        <p:strVal val="visible"/>
+                                      </p:to>
+                                    </p:set>
+                                    <p:animEffect transition="in" filter="fade">
+                                      <p:cBhvr>
+                                        <p:cTn id="13" dur="500"/>
+                                        <p:tgtEl>
+                                          <p:spTgt spid="12"/>
+                                        </p:tgtEl>
+                                      </p:cBhvr>
+                                    </p:animEffect>
+                                  </p:childTnLst>
+                                </p:cTn>
+                              </p:par>
+                              <p:par>
+                                <p:cTn id="14" presetID="10" presetClass="entr" presetSubtype="0" fill="hold" nodeType="withEffect">
+                                  <p:stCondLst>
+                                    <p:cond delay="0"/>
+                                  </p:stCondLst>
+                                  <p:childTnLst>
+                                    <p:set>
+                                      <p:cBhvr>
+                                        <p:cTn id="15" dur="1" fill="hold">
+                                          <p:stCondLst>
+                                            <p:cond delay="0"/>
+                                          </p:stCondLst>
+                                        </p:cTn>
+                                        <p:tgtEl>
+                                          <p:spTgt spid="13"/>
+                                        </p:tgtEl>
+                                        <p:attrNameLst>
+                                          <p:attrName>style.visibility</p:attrName>
+                                        </p:attrNameLst>
+                                      </p:cBhvr>
+                                      <p:to>
+                                        <p:strVal val="visible"/>
+                                      </p:to>
+                                    </p:set>
+                                    <p:animEffect transition="in" filter="fade">
+                                      <p:cBhvr>
+                                        <p:cTn id="16" dur="500"/>
+                                        <p:tgtEl>
+                                          <p:spTgt spid="13"/>
+                                        </p:tgtEl>
+                                      </p:cBhvr>
+                                    </p:animEffect>
+                                  </p:childTnLst>
+                                </p:cTn>
+                              </p:par>
+                              <p:par>
+                                <p:cTn id="17" presetID="10" presetClass="entr" presetSubtype="0" fill="hold" nodeType="withEffect">
+                                  <p:stCondLst>
+                                    <p:cond delay="0"/>
+                                  </p:stCondLst>
+                                  <p:childTnLst>
+                                    <p:set>
+                                      <p:cBhvr>
+                                        <p:cTn id="18" dur="1" fill="hold">
+                                          <p:stCondLst>
+                                            <p:cond delay="0"/>
+                                          </p:stCondLst>
+                                        </p:cTn>
+                                        <p:tgtEl>
+                                          <p:spTgt spid="14"/>
+                                        </p:tgtEl>
+                                        <p:attrNameLst>
+                                          <p:attrName>style.visibility</p:attrName>
+                                        </p:attrNameLst>
+                                      </p:cBhvr>
+                                      <p:to>
+                                        <p:strVal val="visible"/>
+                                      </p:to>
+                                    </p:set>
+                                    <p:animEffect transition="in" filter="fade">
+                                      <p:cBhvr>
+                                        <p:cTn id="19" dur="500"/>
+                                        <p:tgtEl>
+                                          <p:spTgt spid="14"/>
+                                        </p:tgtEl>
+                                      </p:cBhvr>
+                                    </p:animEffect>
+                                  </p:childTnLst>
+                                </p:cTn>
+                              </p:par>
+                            </p:childTnLst>
+                          </p:cTn>
+                        </p:par>
+                      </p:childTnLst>
+                    </p:cTn>
+                  </p:par>
+                  <p:par>
+                    <p:cTn id="20" fill="hold">
+                      <p:stCondLst>
+                        <p:cond delay="indefinite"/>
+                      </p:stCondLst>
+                      <p:childTnLst>
+                        <p:par>
+                          <p:cTn id="21" fill="hold">
+                            <p:stCondLst>
+                              <p:cond delay="0"/>
+                            </p:stCondLst>
+                            <p:childTnLst>
+                              <p:par>
+                                <p:cTn id="22" presetID="10" presetClass="entr" presetSubtype="0" fill="hold" grpId="0" nodeType="clickEffect">
+                                  <p:stCondLst>
+                                    <p:cond delay="0"/>
+                                  </p:stCondLst>
+                                  <p:childTnLst>
+                                    <p:set>
+                                      <p:cBhvr>
+                                        <p:cTn id="23" dur="1" fill="hold">
+                                          <p:stCondLst>
+                                            <p:cond delay="0"/>
+                                          </p:stCondLst>
+                                        </p:cTn>
+                                        <p:tgtEl>
+                                          <p:spTgt spid="9">
+                                            <p:txEl>
+                                              <p:pRg st="1" end="1"/>
+                                            </p:txEl>
+                                          </p:spTgt>
+                                        </p:tgtEl>
+                                        <p:attrNameLst>
+                                          <p:attrName>style.visibility</p:attrName>
+                                        </p:attrNameLst>
+                                      </p:cBhvr>
+                                      <p:to>
+                                        <p:strVal val="visible"/>
+                                      </p:to>
+                                    </p:set>
+                                    <p:animEffect transition="in" filter="fade">
+                                      <p:cBhvr>
+                                        <p:cTn id="24" dur="500"/>
+                                        <p:tgtEl>
+                                          <p:spTgt spid="9">
+                                            <p:txEl>
+                                              <p:pRg st="1" end="1"/>
+                                            </p:txEl>
+                                          </p:spTgt>
+                                        </p:tgtEl>
+                                      </p:cBhvr>
+                                    </p:animEffect>
+                                  </p:childTnLst>
+                                </p:cTn>
+                              </p:par>
+                              <p:par>
+                                <p:cTn id="25" presetID="9" presetClass="emph" presetSubtype="0" grpId="2" nodeType="withEffect">
+                                  <p:stCondLst>
+                                    <p:cond delay="0"/>
+                                  </p:stCondLst>
+                                  <p:childTnLst>
+                                    <p:set>
+                                      <p:cBhvr>
+                                        <p:cTn id="26" dur="indefinite"/>
+                                        <p:tgtEl>
+                                          <p:spTgt spid="9">
+                                            <p:txEl>
+                                              <p:pRg st="0" end="0"/>
+                                            </p:txEl>
+                                          </p:spTgt>
+                                        </p:tgtEl>
+                                        <p:attrNameLst>
+                                          <p:attrName>style.opacity</p:attrName>
+                                        </p:attrNameLst>
+                                      </p:cBhvr>
+                                      <p:to>
+                                        <p:strVal val="0.5"/>
+                                      </p:to>
+                                    </p:set>
+                                    <p:animEffect filter="image" prLst="opacity: 0.5">
+                                      <p:cBhvr rctx="IE">
+                                        <p:cTn id="27" dur="indefinite"/>
+                                        <p:tgtEl>
+                                          <p:spTgt spid="9">
+                                            <p:txEl>
+                                              <p:pRg st="0" end="0"/>
+                                            </p:txEl>
+                                          </p:spTgt>
+                                        </p:tgtEl>
+                                      </p:cBhvr>
+                                    </p:animEffect>
+                                  </p:childTnLst>
+                                </p:cTn>
+                              </p:par>
+                              <p:par>
+                                <p:cTn id="28" presetID="9" presetClass="emph" presetSubtype="0" nodeType="withEffect">
+                                  <p:stCondLst>
+                                    <p:cond delay="0"/>
+                                  </p:stCondLst>
+                                  <p:childTnLst>
+                                    <p:set>
+                                      <p:cBhvr>
+                                        <p:cTn id="29" dur="indefinite"/>
+                                        <p:tgtEl>
+                                          <p:spTgt spid="11"/>
+                                        </p:tgtEl>
+                                        <p:attrNameLst>
+                                          <p:attrName>style.opacity</p:attrName>
+                                        </p:attrNameLst>
+                                      </p:cBhvr>
+                                      <p:to>
+                                        <p:strVal val="0.5"/>
+                                      </p:to>
+                                    </p:set>
+                                    <p:animEffect filter="image" prLst="opacity: 0.5">
+                                      <p:cBhvr rctx="IE">
+                                        <p:cTn id="30" dur="indefinite"/>
+                                        <p:tgtEl>
+                                          <p:spTgt spid="11"/>
+                                        </p:tgtEl>
+                                      </p:cBhvr>
+                                    </p:animEffect>
+                                  </p:childTnLst>
+                                </p:cTn>
+                              </p:par>
+                              <p:par>
+                                <p:cTn id="31" presetID="9" presetClass="emph" presetSubtype="0" nodeType="withEffect">
+                                  <p:stCondLst>
+                                    <p:cond delay="0"/>
+                                  </p:stCondLst>
+                                  <p:childTnLst>
+                                    <p:set>
+                                      <p:cBhvr>
+                                        <p:cTn id="32" dur="indefinite"/>
+                                        <p:tgtEl>
+                                          <p:spTgt spid="12"/>
+                                        </p:tgtEl>
+                                        <p:attrNameLst>
+                                          <p:attrName>style.opacity</p:attrName>
+                                        </p:attrNameLst>
+                                      </p:cBhvr>
+                                      <p:to>
+                                        <p:strVal val="0.5"/>
+                                      </p:to>
+                                    </p:set>
+                                    <p:animEffect filter="image" prLst="opacity: 0.5">
+                                      <p:cBhvr rctx="IE">
+                                        <p:cTn id="33" dur="indefinite"/>
+                                        <p:tgtEl>
+                                          <p:spTgt spid="12"/>
+                                        </p:tgtEl>
+                                      </p:cBhvr>
+                                    </p:animEffect>
+                                  </p:childTnLst>
+                                </p:cTn>
+                              </p:par>
+                              <p:par>
+                                <p:cTn id="34" presetID="9" presetClass="emph" presetSubtype="0" nodeType="withEffect">
+                                  <p:stCondLst>
+                                    <p:cond delay="0"/>
+                                  </p:stCondLst>
+                                  <p:childTnLst>
+                                    <p:set>
+                                      <p:cBhvr>
+                                        <p:cTn id="35" dur="indefinite"/>
+                                        <p:tgtEl>
+                                          <p:spTgt spid="13"/>
+                                        </p:tgtEl>
+                                        <p:attrNameLst>
+                                          <p:attrName>style.opacity</p:attrName>
+                                        </p:attrNameLst>
+                                      </p:cBhvr>
+                                      <p:to>
+                                        <p:strVal val="0.5"/>
+                                      </p:to>
+                                    </p:set>
+                                    <p:animEffect filter="image" prLst="opacity: 0.5">
+                                      <p:cBhvr rctx="IE">
+                                        <p:cTn id="36" dur="indefinite"/>
+                                        <p:tgtEl>
+                                          <p:spTgt spid="13"/>
+                                        </p:tgtEl>
+                                      </p:cBhvr>
+                                    </p:animEffect>
+                                  </p:childTnLst>
+                                </p:cTn>
+                              </p:par>
+                              <p:par>
+                                <p:cTn id="37" presetID="9" presetClass="emph" presetSubtype="0" nodeType="withEffect">
+                                  <p:stCondLst>
+                                    <p:cond delay="0"/>
+                                  </p:stCondLst>
+                                  <p:childTnLst>
+                                    <p:set>
+                                      <p:cBhvr>
+                                        <p:cTn id="38" dur="indefinite"/>
+                                        <p:tgtEl>
+                                          <p:spTgt spid="14"/>
+                                        </p:tgtEl>
+                                        <p:attrNameLst>
+                                          <p:attrName>style.opacity</p:attrName>
+                                        </p:attrNameLst>
+                                      </p:cBhvr>
+                                      <p:to>
+                                        <p:strVal val="0.5"/>
+                                      </p:to>
+                                    </p:set>
+                                    <p:animEffect filter="image" prLst="opacity: 0.5">
+                                      <p:cBhvr rctx="IE">
+                                        <p:cTn id="39" dur="indefinite"/>
+                                        <p:tgtEl>
+                                          <p:spTgt spid="14"/>
+                                        </p:tgtEl>
+                                      </p:cBhvr>
+                                    </p:animEffect>
+                                  </p:childTnLst>
+                                </p:cTn>
+                              </p:par>
+                            </p:childTnLst>
+                          </p:cTn>
+                        </p:par>
+                      </p:childTnLst>
+                    </p:cTn>
+                  </p:par>
+                  <p:par>
+                    <p:cTn id="40" fill="hold">
+                      <p:stCondLst>
+                        <p:cond delay="indefinite"/>
+                      </p:stCondLst>
+                      <p:childTnLst>
+                        <p:par>
+                          <p:cTn id="41" fill="hold">
+                            <p:stCondLst>
+                              <p:cond delay="0"/>
+                            </p:stCondLst>
+                            <p:childTnLst>
+                              <p:par>
+                                <p:cTn id="42" presetID="10" presetClass="entr" presetSubtype="0" fill="hold" grpId="0" nodeType="clickEffect">
+                                  <p:stCondLst>
+                                    <p:cond delay="0"/>
+                                  </p:stCondLst>
+                                  <p:childTnLst>
+                                    <p:set>
+                                      <p:cBhvr>
+                                        <p:cTn id="43" dur="1" fill="hold">
+                                          <p:stCondLst>
+                                            <p:cond delay="0"/>
+                                          </p:stCondLst>
+                                        </p:cTn>
+                                        <p:tgtEl>
+                                          <p:spTgt spid="9">
+                                            <p:txEl>
+                                              <p:pRg st="2" end="2"/>
+                                            </p:txEl>
+                                          </p:spTgt>
+                                        </p:tgtEl>
+                                        <p:attrNameLst>
+                                          <p:attrName>style.visibility</p:attrName>
+                                        </p:attrNameLst>
+                                      </p:cBhvr>
+                                      <p:to>
+                                        <p:strVal val="visible"/>
+                                      </p:to>
+                                    </p:set>
+                                    <p:animEffect transition="in" filter="fade">
+                                      <p:cBhvr>
+                                        <p:cTn id="44" dur="500"/>
+                                        <p:tgtEl>
+                                          <p:spTgt spid="9">
+                                            <p:txEl>
+                                              <p:pRg st="2" end="2"/>
+                                            </p:txEl>
+                                          </p:spTgt>
+                                        </p:tgtEl>
+                                      </p:cBhvr>
+                                    </p:animEffect>
+                                  </p:childTnLst>
+                                </p:cTn>
+                              </p:par>
+                              <p:par>
+                                <p:cTn id="45" presetID="10" presetClass="entr" presetSubtype="0" fill="hold" grpId="1" nodeType="withEffect">
+                                  <p:stCondLst>
+                                    <p:cond delay="0"/>
+                                  </p:stCondLst>
+                                  <p:childTnLst>
+                                    <p:set>
+                                      <p:cBhvr>
+                                        <p:cTn id="46" dur="1" fill="hold">
+                                          <p:stCondLst>
+                                            <p:cond delay="0"/>
+                                          </p:stCondLst>
+                                        </p:cTn>
+                                        <p:tgtEl>
+                                          <p:spTgt spid="16"/>
+                                        </p:tgtEl>
+                                        <p:attrNameLst>
+                                          <p:attrName>style.visibility</p:attrName>
+                                        </p:attrNameLst>
+                                      </p:cBhvr>
+                                      <p:to>
+                                        <p:strVal val="visible"/>
+                                      </p:to>
+                                    </p:set>
+                                    <p:animEffect transition="in" filter="fade">
+                                      <p:cBhvr>
+                                        <p:cTn id="47" dur="500"/>
+                                        <p:tgtEl>
+                                          <p:spTgt spid="16"/>
+                                        </p:tgtEl>
+                                      </p:cBhvr>
+                                    </p:animEffect>
+                                  </p:childTnLst>
+                                </p:cTn>
+                              </p:par>
+                            </p:childTnLst>
+                          </p:cTn>
+                        </p:par>
+                      </p:childTnLst>
+                    </p:cTn>
+                  </p:par>
+                  <p:par>
+                    <p:cTn id="48" fill="hold">
+                      <p:stCondLst>
+                        <p:cond delay="indefinite"/>
+                      </p:stCondLst>
+                      <p:childTnLst>
+                        <p:par>
+                          <p:cTn id="49" fill="hold">
+                            <p:stCondLst>
+                              <p:cond delay="0"/>
+                            </p:stCondLst>
+                            <p:childTnLst>
+                              <p:par>
+                                <p:cTn id="50" presetID="0" presetClass="path" presetSubtype="0" decel="50000" fill="hold" grpId="0" nodeType="clickEffect">
+                                  <p:stCondLst>
+                                    <p:cond delay="0"/>
+                                  </p:stCondLst>
+                                  <p:childTnLst>
+                                    <p:animMotion origin="layout" path="M -3.33333E-6 2.96296E-6 L -3.12252 2.96296E-6 " pathEditMode="relative" rAng="0" ptsTypes="AA">
+                                      <p:cBhvr>
+                                        <p:cTn id="51" dur="10000" fill="hold"/>
+                                        <p:tgtEl>
+                                          <p:spTgt spid="15"/>
+                                        </p:tgtEl>
+                                        <p:attrNameLst>
+                                          <p:attrName>ppt_x</p:attrName>
+                                          <p:attrName>ppt_y</p:attrName>
+                                        </p:attrNameLst>
+                                      </p:cBhvr>
+                                      <p:rCtr x="-156133" y="0"/>
+                                    </p:animMotion>
+                                  </p:childTnLst>
+                                </p:cTn>
+                              </p:par>
+                            </p:childTnLst>
+                          </p:cTn>
+                        </p:par>
+                      </p:childTnLst>
+                    </p:cTn>
+                  </p:par>
+                  <p:par>
+                    <p:cTn id="52" fill="hold">
+                      <p:stCondLst>
+                        <p:cond delay="indefinite"/>
+                      </p:stCondLst>
+                      <p:childTnLst>
+                        <p:par>
+                          <p:cTn id="53" fill="hold">
+                            <p:stCondLst>
+                              <p:cond delay="0"/>
+                            </p:stCondLst>
+                            <p:childTnLst>
+                              <p:par>
+                                <p:cTn id="54" presetID="10" presetClass="exit" presetSubtype="0" fill="hold" grpId="1" nodeType="clickEffect">
+                                  <p:stCondLst>
+                                    <p:cond delay="0"/>
+                                  </p:stCondLst>
+                                  <p:childTnLst>
+                                    <p:animEffect transition="out" filter="fade">
+                                      <p:cBhvr>
+                                        <p:cTn id="55" dur="500"/>
+                                        <p:tgtEl>
+                                          <p:spTgt spid="9">
+                                            <p:txEl>
+                                              <p:pRg st="2" end="2"/>
+                                            </p:txEl>
+                                          </p:spTgt>
+                                        </p:tgtEl>
+                                      </p:cBhvr>
+                                    </p:animEffect>
+                                    <p:set>
+                                      <p:cBhvr>
+                                        <p:cTn id="56" dur="1" fill="hold">
+                                          <p:stCondLst>
+                                            <p:cond delay="499"/>
+                                          </p:stCondLst>
+                                        </p:cTn>
+                                        <p:tgtEl>
+                                          <p:spTgt spid="9">
+                                            <p:txEl>
+                                              <p:pRg st="2" end="2"/>
+                                            </p:txEl>
+                                          </p:spTgt>
+                                        </p:tgtEl>
+                                        <p:attrNameLst>
+                                          <p:attrName>style.visibility</p:attrName>
+                                        </p:attrNameLst>
+                                      </p:cBhvr>
+                                      <p:to>
+                                        <p:strVal val="hidden"/>
+                                      </p:to>
+                                    </p:set>
+                                  </p:childTnLst>
+                                </p:cTn>
+                              </p:par>
+                              <p:par>
+                                <p:cTn id="57" presetID="9" presetClass="emph" presetSubtype="0" grpId="2" nodeType="withEffect">
+                                  <p:stCondLst>
+                                    <p:cond delay="0"/>
+                                  </p:stCondLst>
+                                  <p:childTnLst>
+                                    <p:set>
+                                      <p:cBhvr>
+                                        <p:cTn id="58" dur="indefinite"/>
+                                        <p:tgtEl>
+                                          <p:spTgt spid="9">
+                                            <p:txEl>
+                                              <p:pRg st="1" end="1"/>
+                                            </p:txEl>
+                                          </p:spTgt>
+                                        </p:tgtEl>
+                                        <p:attrNameLst>
+                                          <p:attrName>style.opacity</p:attrName>
+                                        </p:attrNameLst>
+                                      </p:cBhvr>
+                                      <p:to>
+                                        <p:strVal val="0.5"/>
+                                      </p:to>
+                                    </p:set>
+                                    <p:animEffect filter="image" prLst="opacity: 0.5">
+                                      <p:cBhvr rctx="IE">
+                                        <p:cTn id="59" dur="indefinite"/>
+                                        <p:tgtEl>
+                                          <p:spTgt spid="9">
+                                            <p:txEl>
+                                              <p:pRg st="1" end="1"/>
+                                            </p:txEl>
+                                          </p:spTgt>
+                                        </p:tgtEl>
+                                      </p:cBhvr>
+                                    </p:animEffect>
+                                  </p:childTnLst>
+                                </p:cTn>
+                              </p:par>
+                              <p:par>
+                                <p:cTn id="60" presetID="50" presetClass="path" presetSubtype="0" accel="50000" decel="50000" fill="hold" grpId="0" nodeType="withEffect">
+                                  <p:stCondLst>
+                                    <p:cond delay="500"/>
+                                  </p:stCondLst>
+                                  <p:childTnLst>
+                                    <p:animMotion origin="layout" path="M 3.33333E-6 1.11111E-6 L 0.16328 1.11111E-6 C 0.23706 1.11111E-6 0.32925 0.03364 0.32925 0.06204 L 0.32925 0.12901 " pathEditMode="relative" rAng="0" ptsTypes="AAAA">
+                                      <p:cBhvr>
+                                        <p:cTn id="61" dur="1500" fill="hold"/>
+                                        <p:tgtEl>
+                                          <p:spTgt spid="16"/>
+                                        </p:tgtEl>
+                                        <p:attrNameLst>
+                                          <p:attrName>ppt_x</p:attrName>
+                                          <p:attrName>ppt_y</p:attrName>
+                                        </p:attrNameLst>
+                                      </p:cBhvr>
+                                      <p:rCtr x="16458" y="6451"/>
+                                    </p:animMotion>
+                                  </p:childTnLst>
+                                </p:cTn>
+                              </p:par>
+                            </p:childTnLst>
+                          </p:cTn>
+                        </p:par>
+                      </p:childTnLst>
+                    </p:cTn>
+                  </p:par>
+                  <p:par>
+                    <p:cTn id="62" fill="hold">
+                      <p:stCondLst>
+                        <p:cond delay="indefinite"/>
+                      </p:stCondLst>
+                      <p:childTnLst>
+                        <p:par>
+                          <p:cTn id="63" fill="hold">
+                            <p:stCondLst>
+                              <p:cond delay="0"/>
+                            </p:stCondLst>
+                            <p:childTnLst>
+                              <p:par>
+                                <p:cTn id="64" presetID="63" presetClass="entr" presetSubtype="0" fill="hold" nodeType="clickEffect">
+                                  <p:stCondLst>
+                                    <p:cond delay="0"/>
+                                  </p:stCondLst>
+                                  <p:childTnLst>
+                                    <p:set>
+                                      <p:cBhvr>
+                                        <p:cTn id="65" dur="1" fill="hold">
+                                          <p:stCondLst>
+                                            <p:cond delay="0"/>
+                                          </p:stCondLst>
+                                        </p:cTn>
+                                        <p:tgtEl>
+                                          <p:spTgt spid="17"/>
+                                        </p:tgtEl>
+                                        <p:attrNameLst>
+                                          <p:attrName>style.visibility</p:attrName>
+                                        </p:attrNameLst>
+                                      </p:cBhvr>
+                                      <p:to>
+                                        <p:strVal val="visible"/>
+                                      </p:to>
+                                    </p:set>
+                                    <p:anim calcmode="lin" valueType="num">
+                                      <p:cBhvr>
+                                        <p:cTn id="66" dur="500" fill="hold"/>
+                                        <p:tgtEl>
+                                          <p:spTgt spid="17"/>
+                                        </p:tgtEl>
+                                        <p:attrNameLst>
+                                          <p:attrName>drawProgress</p:attrName>
+                                        </p:attrNameLst>
+                                      </p:cBhvr>
+                                      <p:tavLst>
+                                        <p:tav tm="0">
+                                          <p:val>
+                                            <p:fltVal val="0"/>
+                                          </p:val>
+                                        </p:tav>
+                                        <p:tav tm="100000">
+                                          <p:val>
+                                            <p:fltVal val="1"/>
+                                          </p:val>
+                                        </p:tav>
+                                      </p:tavLst>
+                                    </p:anim>
+                                  </p:childTnLst>
+                                </p:cTn>
+                              </p:par>
+                            </p:childTnLst>
+                          </p:cTn>
+                        </p:par>
+                      </p:childTnLst>
+                    </p:cTn>
+                  </p:par>
+                </p:childTnLst>
+              </p:cTn>
+              <p:prevCondLst>
+                <p:cond evt="onPrev" delay="0">
+                  <p:tgtEl>
+                    <p:sldTgt/>
+                  </p:tgtEl>
+                </p:cond>
+              </p:prevCondLst>
+              <p:nextCondLst>
+                <p:cond evt="onNext" delay="0">
+                  <p:tgtEl>
+                    <p:sldTgt/>
+                  </p:tgtEl>
+                </p:cond>
+              </p:nextCondLst>
+            </p:seq>
+          </p:childTnLst>
+        </p:cTn>
+      </p:par>
+    </p:tnLst>
+    <p:bldLst>
+      <p:bldP spid="16" grpId="0"/>
+      <p:bldP spid="16" grpId="1"/>
+      <p:bldP spid="9" grpId="0" uiExpand="1" build="p"/>
+      <p:bldP spid="9" grpId="1" uiExpand="1" build="p"/>
+      <p:bldP spid="9" grpId="2" uiExpand="1" build="p"/>
+      <p:bldP spid="15" grpId="0"/>
+    </p:bldLst>
+  </p:timing>
 </p:sld>
 </file>
 
@@ -20358,6 +23056,12 @@
           <a:lstStyle/>
           <a:p>
             <a:r>
+              <a:rPr>
+                <a:solidFill>
+                  <a:srgbClr val="F7F9FF"/>
+                </a:solidFill>
+                <a:latin typeface="Segoe UI Semibold"/>
+              </a:rPr>
               <a:t>Azure Resource Graph in Dashboards</a:t>
             </a:r>
           </a:p>
@@ -20480,54 +23184,100 @@
             <p:ph type="body" sz="quarter" idx="10"/>
           </p:nvPr>
         </p:nvSpPr>
-        <p:spPr/>
+        <p:spPr>
+          <a:xfrm>
+            <a:off x="844550" y="3836988"/>
+            <a:ext cx="17125398" cy="4081462"/>
+          </a:xfrm>
+        </p:spPr>
         <p:txBody>
-          <a:bodyPr/>
+          <a:bodyPr>
+            <a:noAutofit/>
+          </a:bodyPr>
           <a:lstStyle/>
           <a:p>
             <a:r>
-              <a:rPr lang="en-US" dirty="0"/>
-              <a:t>Navigate the cloudy sea</a:t>
+              <a:rPr lang="en-US" sz="4400" dirty="0">
+                <a:latin typeface="Segoe UI" panose="020B0502040204020203" pitchFamily="34" charset="0"/>
+                <a:cs typeface="Segoe UI" panose="020B0502040204020203" pitchFamily="34" charset="0"/>
+              </a:rPr>
+              <a:t> Navigate the cloudy sea</a:t>
             </a:r>
           </a:p>
           <a:p>
             <a:pPr lvl="1"/>
             <a:r>
-              <a:rPr lang="en-US" dirty="0"/>
-              <a:t>ARG lets you query at scale</a:t>
-            </a:r>
-          </a:p>
-          <a:p>
-            <a:r>
-              <a:rPr lang="en-US" dirty="0"/>
-              <a:t>Find hidden treasures</a:t>
+              <a:rPr lang="en-US" sz="4000" dirty="0">
+                <a:solidFill>
+                  <a:srgbClr val="FFC000"/>
+                </a:solidFill>
+                <a:latin typeface="Segoe UI" panose="020B0502040204020203" pitchFamily="34" charset="0"/>
+                <a:cs typeface="Segoe UI" panose="020B0502040204020203" pitchFamily="34" charset="0"/>
+              </a:rPr>
+              <a:t> ARG lets you query at scale</a:t>
+            </a:r>
+          </a:p>
+          <a:p>
+            <a:r>
+              <a:rPr lang="en-US" sz="4400" dirty="0">
+                <a:latin typeface="Segoe UI" panose="020B0502040204020203" pitchFamily="34" charset="0"/>
+                <a:cs typeface="Segoe UI" panose="020B0502040204020203" pitchFamily="34" charset="0"/>
+              </a:rPr>
+              <a:t> Find hidden treasures</a:t>
             </a:r>
           </a:p>
           <a:p>
             <a:pPr lvl="1"/>
             <a:r>
-              <a:rPr lang="en-US" dirty="0"/>
-              <a:t>Identify differences, misconfigurations, details</a:t>
-            </a:r>
-          </a:p>
-          <a:p>
-            <a:r>
-              <a:rPr lang="en-US" dirty="0"/>
-              <a:t>Hoist your sails anywhere</a:t>
+              <a:rPr lang="en-US" sz="4000" dirty="0">
+                <a:solidFill>
+                  <a:srgbClr val="FFC000"/>
+                </a:solidFill>
+                <a:latin typeface="Segoe UI" panose="020B0502040204020203" pitchFamily="34" charset="0"/>
+                <a:cs typeface="Segoe UI" panose="020B0502040204020203" pitchFamily="34" charset="0"/>
+              </a:rPr>
+              <a:t> Identify differences, misconfigurations, details</a:t>
+            </a:r>
+          </a:p>
+          <a:p>
+            <a:r>
+              <a:rPr lang="en-US" sz="4400" dirty="0">
+                <a:latin typeface="Segoe UI" panose="020B0502040204020203" pitchFamily="34" charset="0"/>
+                <a:cs typeface="Segoe UI" panose="020B0502040204020203" pitchFamily="34" charset="0"/>
+              </a:rPr>
+              <a:t> Hoist your sails anywhere</a:t>
             </a:r>
           </a:p>
           <a:p>
             <a:pPr lvl="1"/>
             <a:r>
-              <a:rPr lang="en-US" dirty="0"/>
-              <a:t>Use from Portal, VS Code (</a:t>
-            </a:r>
-            <a:r>
-              <a:rPr lang="en-US" dirty="0" err="1"/>
+              <a:rPr lang="en-US" sz="4000" dirty="0">
+                <a:solidFill>
+                  <a:srgbClr val="FFC000"/>
+                </a:solidFill>
+                <a:latin typeface="Segoe UI" panose="020B0502040204020203" pitchFamily="34" charset="0"/>
+                <a:cs typeface="Segoe UI" panose="020B0502040204020203" pitchFamily="34" charset="0"/>
+              </a:rPr>
+              <a:t> Use from Portal, VS Code (</a:t>
+            </a:r>
+            <a:r>
+              <a:rPr lang="en-US" sz="4000" dirty="0" err="1">
+                <a:solidFill>
+                  <a:srgbClr val="FFC000"/>
+                </a:solidFill>
+                <a:latin typeface="Segoe UI" panose="020B0502040204020203" pitchFamily="34" charset="0"/>
+                <a:cs typeface="Segoe UI" panose="020B0502040204020203" pitchFamily="34" charset="0"/>
+              </a:rPr>
               <a:t>bARGE</a:t>
             </a:r>
             <a:r>
-              <a:rPr lang="en-US" dirty="0"/>
+              <a:rPr lang="en-US" sz="4000" dirty="0">
+                <a:solidFill>
+                  <a:srgbClr val="FFC000"/>
+                </a:solidFill>
+                <a:latin typeface="Segoe UI" panose="020B0502040204020203" pitchFamily="34" charset="0"/>
+                <a:cs typeface="Segoe UI" panose="020B0502040204020203" pitchFamily="34" charset="0"/>
+              </a:rPr>
               <a:t>), CLI, dashboards, alerts and more</a:t>
             </a:r>
           </a:p>
@@ -20547,7 +23297,7 @@
         </p:nvGrpSpPr>
         <p:grpSpPr>
           <a:xfrm>
-            <a:off x="11600000" y="7900000"/>
+            <a:off x="229635" y="9470382"/>
             <a:ext cx="2200000" cy="511955"/>
             <a:chOff x="9775935" y="6229126"/>
             <a:chExt cx="1691379" cy="393596"/>
@@ -20699,8 +23449,8 @@
         </p:nvSpPr>
         <p:spPr>
           <a:xfrm>
-            <a:off x="13980000" y="7870000"/>
-            <a:ext cx="2500000" cy="520000"/>
+            <a:off x="2429635" y="9444628"/>
+            <a:ext cx="3085525" cy="584775"/>
           </a:xfrm>
           <a:prstGeom prst="rect">
             <a:avLst/>
@@ -20714,11 +23464,11 @@
           <a:lstStyle/>
           <a:p>
             <a:r>
-              <a:rPr sz="1600">
-                <a:solidFill>
-                  <a:srgbClr val="E3E3E3"/>
-                </a:solidFill>
-                <a:latin typeface="Segoe UI"/>
+              <a:rPr sz="3200">
+                <a:solidFill>
+                  <a:schemeClr val="bg1"/>
+                </a:solidFill>
+                <a:latin typeface="Segoe UI Semibold"/>
               </a:rPr>
               <a:t>@PalmEmanuel</a:t>
             </a:r>
@@ -21252,64 +24002,298 @@
           <a:chExt cx="0" cy="0"/>
         </a:xfrm>
       </p:grpSpPr>
+      <p:grpSp>
+        <p:nvGrpSpPr>
+          <p:cNvPr id="2" name="Group 1">
+            <a:extLst>
+              <a:ext uri="{FF2B5EF4-FFF2-40B4-BE49-F238E27FC236}">
+                <a16:creationId xmlns:a16="http://schemas.microsoft.com/office/drawing/2014/main" id="{4D30FCED-6A26-C869-1852-E7E9783BE1A6}"/>
+              </a:ext>
+            </a:extLst>
+          </p:cNvPr>
+          <p:cNvGrpSpPr/>
+          <p:nvPr/>
+        </p:nvGrpSpPr>
+        <p:grpSpPr>
+          <a:xfrm>
+            <a:off x="229635" y="9470382"/>
+            <a:ext cx="2200000" cy="511955"/>
+            <a:chOff x="9775935" y="6229126"/>
+            <a:chExt cx="1691379" cy="393596"/>
+          </a:xfrm>
+        </p:grpSpPr>
+        <p:pic>
+          <p:nvPicPr>
+            <p:cNvPr id="3" name="Graphic 56">
+              <a:extLst>
+                <a:ext uri="{FF2B5EF4-FFF2-40B4-BE49-F238E27FC236}">
+                  <a16:creationId xmlns:a16="http://schemas.microsoft.com/office/drawing/2014/main" id="{56F63DA3-E4B5-D269-F128-461B5BED7591}"/>
+                </a:ext>
+              </a:extLst>
+            </p:cNvPr>
+            <p:cNvPicPr>
+              <a:picLocks noChangeAspect="1"/>
+            </p:cNvPicPr>
+            <p:nvPr/>
+          </p:nvPicPr>
+          <p:blipFill>
+            <a:blip>
+              <a:extLst>
+                <a:ext uri="{96DAC541-7B7A-43D3-8B79-37D633B846F1}">
+                  <asvg:svgBlip xmlns:asvg="http://schemas.microsoft.com/office/drawing/2016/SVG/main" r:embed="rId2"/>
+                </a:ext>
+              </a:extLst>
+            </a:blip>
+            <a:srcRect/>
+            <a:stretch/>
+          </p:blipFill>
+          <p:spPr>
+            <a:xfrm>
+              <a:off x="10280577" y="6229126"/>
+              <a:ext cx="391207" cy="383223"/>
+            </a:xfrm>
+            <a:prstGeom prst="rect">
+              <a:avLst/>
+            </a:prstGeom>
+            <a:effectLst/>
+          </p:spPr>
+        </p:pic>
+        <p:pic>
+          <p:nvPicPr>
+            <p:cNvPr id="4" name="Graphic 56">
+              <a:extLst>
+                <a:ext uri="{FF2B5EF4-FFF2-40B4-BE49-F238E27FC236}">
+                  <a16:creationId xmlns:a16="http://schemas.microsoft.com/office/drawing/2014/main" id="{0ED27AC0-458C-D405-C99E-499AD74E4CA5}"/>
+                </a:ext>
+              </a:extLst>
+            </p:cNvPr>
+            <p:cNvPicPr>
+              <a:picLocks noChangeAspect="1"/>
+            </p:cNvPicPr>
+            <p:nvPr/>
+          </p:nvPicPr>
+          <p:blipFill>
+            <a:blip r:embed="rId3"/>
+            <a:srcRect/>
+            <a:stretch/>
+          </p:blipFill>
+          <p:spPr>
+            <a:xfrm>
+              <a:off x="10696834" y="6263498"/>
+              <a:ext cx="320788" cy="327874"/>
+            </a:xfrm>
+            <a:prstGeom prst="rect">
+              <a:avLst/>
+            </a:prstGeom>
+            <a:effectLst/>
+          </p:spPr>
+        </p:pic>
+        <p:pic>
+          <p:nvPicPr>
+            <p:cNvPr id="5" name="Picture 4" descr="A black and white logo&#10;&#10;Description automatically generated">
+              <a:extLst>
+                <a:ext uri="{FF2B5EF4-FFF2-40B4-BE49-F238E27FC236}">
+                  <a16:creationId xmlns:a16="http://schemas.microsoft.com/office/drawing/2014/main" id="{3FAC62A5-E83C-A16E-969B-9FFC1A38C36D}"/>
+                </a:ext>
+              </a:extLst>
+            </p:cNvPr>
+            <p:cNvPicPr>
+              <a:picLocks noChangeAspect="1"/>
+            </p:cNvPicPr>
+            <p:nvPr/>
+          </p:nvPicPr>
+          <p:blipFill>
+            <a:blip r:embed="rId4"/>
+            <a:stretch>
+              <a:fillRect/>
+            </a:stretch>
+          </p:blipFill>
+          <p:spPr>
+            <a:xfrm>
+              <a:off x="11083688" y="6239096"/>
+              <a:ext cx="383626" cy="383626"/>
+            </a:xfrm>
+            <a:prstGeom prst="rect">
+              <a:avLst/>
+            </a:prstGeom>
+          </p:spPr>
+        </p:pic>
+        <p:pic>
+          <p:nvPicPr>
+            <p:cNvPr id="6" name="Picture 5" descr="A blue butterfly on a black background&#10;&#10;AI-generated content may be incorrect.">
+              <a:extLst>
+                <a:ext uri="{FF2B5EF4-FFF2-40B4-BE49-F238E27FC236}">
+                  <a16:creationId xmlns:a16="http://schemas.microsoft.com/office/drawing/2014/main" id="{7FE79C4E-2EBB-134E-8167-23C467B45D5D}"/>
+                </a:ext>
+              </a:extLst>
+            </p:cNvPr>
+            <p:cNvPicPr>
+              <a:picLocks noChangeAspect="1"/>
+            </p:cNvPicPr>
+            <p:nvPr/>
+          </p:nvPicPr>
+          <p:blipFill>
+            <a:blip r:embed="rId5">
+              <a:biLevel thresh="25000"/>
+              <a:extLst>
+                <a:ext uri="{28A0092B-C50C-407E-A947-70E740481C1C}">
+                  <a14:useLocalDpi xmlns:a14="http://schemas.microsoft.com/office/drawing/2010/main" val="0"/>
+                </a:ext>
+              </a:extLst>
+            </a:blip>
+            <a:stretch>
+              <a:fillRect/>
+            </a:stretch>
+          </p:blipFill>
+          <p:spPr>
+            <a:xfrm>
+              <a:off x="9775935" y="6240132"/>
+              <a:ext cx="438576" cy="382589"/>
+            </a:xfrm>
+            <a:prstGeom prst="rect">
+              <a:avLst/>
+            </a:prstGeom>
+            <a:noFill/>
+            <a:ln>
+              <a:noFill/>
+            </a:ln>
+          </p:spPr>
+        </p:pic>
+      </p:grpSp>
       <p:sp>
         <p:nvSpPr>
-          <p:cNvPr id="9" name="Title 1"/>
-          <p:cNvSpPr>
-            <a:spLocks noGrp="1"/>
-          </p:cNvSpPr>
-          <p:nvPr>
-            <p:ph type="title"/>
-          </p:nvPr>
-        </p:nvSpPr>
-        <p:spPr/>
-        <p:txBody>
-          <a:bodyPr/>
-          <a:lstStyle/>
-          <a:p>
-            <a:r>
-              <a:t>Q &amp; A!</a:t>
-            </a:r>
-          </a:p>
-        </p:txBody>
-      </p:sp>
-      <p:sp>
-        <p:nvSpPr>
-          <p:cNvPr id="510" name="QR backing"/>
-          <p:cNvSpPr/>
+          <p:cNvPr id="7" name="TextBox 6">
+            <a:extLst>
+              <a:ext uri="{FF2B5EF4-FFF2-40B4-BE49-F238E27FC236}">
+                <a16:creationId xmlns:a16="http://schemas.microsoft.com/office/drawing/2014/main" id="{B4D16807-9713-89B3-49D6-E6EDEC60F881}"/>
+              </a:ext>
+            </a:extLst>
+          </p:cNvPr>
+          <p:cNvSpPr txBox="1"/>
           <p:nvPr/>
         </p:nvSpPr>
         <p:spPr>
           <a:xfrm>
-            <a:off x="738672" y="4599429"/>
-            <a:ext cx="5076780" cy="5076780"/>
+            <a:off x="2429635" y="9444628"/>
+            <a:ext cx="3085525" cy="584775"/>
           </a:xfrm>
-          <a:prstGeom prst="roundRect">
-            <a:avLst>
-              <a:gd name="adj" fmla="val 6000"/>
-            </a:avLst>
+          <a:prstGeom prst="rect">
+            <a:avLst/>
           </a:prstGeom>
-          <a:solidFill>
-            <a:srgbClr val="FFFFFF"/>
-          </a:solidFill>
-          <a:ln>
-            <a:noFill/>
-          </a:ln>
+          <a:noFill/>
         </p:spPr>
         <p:txBody>
-          <a:bodyPr/>
+          <a:bodyPr wrap="none" anchor="ctr">
+            <a:spAutoFit/>
+          </a:bodyPr>
           <a:lstStyle/>
           <a:p>
-            <a:endParaRPr lang="en-US"/>
+            <a:r>
+              <a:rPr sz="3200">
+                <a:solidFill>
+                  <a:schemeClr val="bg1"/>
+                </a:solidFill>
+                <a:latin typeface="Segoe UI Semibold"/>
+              </a:rPr>
+              <a:t>@PalmEmanuel</a:t>
+            </a:r>
           </a:p>
         </p:txBody>
       </p:sp>
+      <p:grpSp>
+        <p:nvGrpSpPr>
+          <p:cNvPr id="11" name="Group 10">
+            <a:extLst>
+              <a:ext uri="{FF2B5EF4-FFF2-40B4-BE49-F238E27FC236}">
+                <a16:creationId xmlns:a16="http://schemas.microsoft.com/office/drawing/2014/main" id="{9C8904DA-0200-A947-917F-60A13689379C}"/>
+              </a:ext>
+            </a:extLst>
+          </p:cNvPr>
+          <p:cNvGrpSpPr/>
+          <p:nvPr/>
+        </p:nvGrpSpPr>
+        <p:grpSpPr>
+          <a:xfrm>
+            <a:off x="14556915" y="332960"/>
+            <a:ext cx="3419526" cy="3419526"/>
+            <a:chOff x="7400741" y="3486246"/>
+            <a:chExt cx="5076780" cy="5076780"/>
+          </a:xfrm>
+        </p:grpSpPr>
+        <p:sp>
+          <p:nvSpPr>
+            <p:cNvPr id="8" name="QR backing">
+              <a:extLst>
+                <a:ext uri="{FF2B5EF4-FFF2-40B4-BE49-F238E27FC236}">
+                  <a16:creationId xmlns:a16="http://schemas.microsoft.com/office/drawing/2014/main" id="{E4CA1D24-B6D3-939B-87DD-83409CE3FB95}"/>
+                </a:ext>
+              </a:extLst>
+            </p:cNvPr>
+            <p:cNvSpPr/>
+            <p:nvPr/>
+          </p:nvSpPr>
+          <p:spPr>
+            <a:xfrm>
+              <a:off x="7400741" y="3486246"/>
+              <a:ext cx="5076780" cy="5076780"/>
+            </a:xfrm>
+            <a:prstGeom prst="roundRect">
+              <a:avLst>
+                <a:gd name="adj" fmla="val 6000"/>
+              </a:avLst>
+            </a:prstGeom>
+            <a:solidFill>
+              <a:srgbClr val="FFFFFF"/>
+            </a:solidFill>
+            <a:ln>
+              <a:noFill/>
+            </a:ln>
+          </p:spPr>
+          <p:txBody>
+            <a:bodyPr/>
+            <a:lstStyle/>
+            <a:p>
+              <a:endParaRPr lang="en-US"/>
+            </a:p>
+          </p:txBody>
+        </p:sp>
+        <p:pic>
+          <p:nvPicPr>
+            <p:cNvPr id="9" name="Picture 8" descr="A qr code with a black and white background&#10;&#10;AI-generated content may be incorrect.">
+              <a:extLst>
+                <a:ext uri="{FF2B5EF4-FFF2-40B4-BE49-F238E27FC236}">
+                  <a16:creationId xmlns:a16="http://schemas.microsoft.com/office/drawing/2014/main" id="{75984715-474D-2D16-96EC-5B497BFD279F}"/>
+                </a:ext>
+              </a:extLst>
+            </p:cNvPr>
+            <p:cNvPicPr>
+              <a:picLocks noChangeAspect="1"/>
+            </p:cNvPicPr>
+            <p:nvPr/>
+          </p:nvPicPr>
+          <p:blipFill>
+            <a:blip r:embed="rId6"/>
+            <a:stretch>
+              <a:fillRect/>
+            </a:stretch>
+          </p:blipFill>
+          <p:spPr>
+            <a:xfrm>
+              <a:off x="7520741" y="3606246"/>
+              <a:ext cx="4836780" cy="4836780"/>
+            </a:xfrm>
+            <a:prstGeom prst="rect">
+              <a:avLst/>
+            </a:prstGeom>
+          </p:spPr>
+        </p:pic>
+      </p:grpSp>
       <p:pic>
         <p:nvPicPr>
-          <p:cNvPr id="10" name="Picture 9" descr="A qr code with a black and white background&#10;&#10;AI-generated content may be incorrect.">
+          <p:cNvPr id="10" name="Graphique 5">
             <a:extLst>
               <a:ext uri="{FF2B5EF4-FFF2-40B4-BE49-F238E27FC236}">
-                <a16:creationId xmlns:a16="http://schemas.microsoft.com/office/drawing/2014/main" id="{4E6443B0-86E8-6485-FE58-973B0772CC30}"/>
+                <a16:creationId xmlns:a16="http://schemas.microsoft.com/office/drawing/2014/main" id="{3DF91375-B0F1-C253-0A0D-D8DCA7A52313}"/>
               </a:ext>
             </a:extLst>
           </p:cNvPr>
@@ -21319,15 +24303,21 @@
           <p:nvPr/>
         </p:nvPicPr>
         <p:blipFill>
-          <a:blip r:embed="rId2"/>
+          <a:blip>
+            <a:extLst>
+              <a:ext uri="{96DAC541-7B7A-43D3-8B79-37D633B846F1}">
+                <asvg:svgBlip xmlns:asvg="http://schemas.microsoft.com/office/drawing/2016/SVG/main" r:embed="rId7"/>
+              </a:ext>
+            </a:extLst>
+          </a:blip>
           <a:stretch>
             <a:fillRect/>
           </a:stretch>
         </p:blipFill>
         <p:spPr>
-          <a:xfrm>
-            <a:off x="858672" y="4719429"/>
-            <a:ext cx="4836780" cy="4836780"/>
+          <a:xfrm rot="16200000">
+            <a:off x="16329512" y="3870571"/>
+            <a:ext cx="1136252" cy="1261921"/>
           </a:xfrm>
           <a:prstGeom prst="rect">
             <a:avLst/>
@@ -21339,7 +24329,7 @@
           <p:cNvPr id="12" name="TextBox 11">
             <a:extLst>
               <a:ext uri="{FF2B5EF4-FFF2-40B4-BE49-F238E27FC236}">
-                <a16:creationId xmlns:a16="http://schemas.microsoft.com/office/drawing/2014/main" id="{17729297-A698-1EC1-A33D-BE6321A3B165}"/>
+                <a16:creationId xmlns:a16="http://schemas.microsoft.com/office/drawing/2014/main" id="{7BB4FD82-F3E0-2967-7D90-89B7A0CE0C5E}"/>
               </a:ext>
             </a:extLst>
           </p:cNvPr>
@@ -21348,7 +24338,7 @@
         </p:nvSpPr>
         <p:spPr>
           <a:xfrm>
-            <a:off x="5695452" y="8178842"/>
+            <a:off x="11118441" y="4501532"/>
             <a:ext cx="6858000" cy="877162"/>
           </a:xfrm>
           <a:prstGeom prst="rect">
@@ -21395,43 +24385,12 @@
           </a:p>
         </p:txBody>
       </p:sp>
-      <p:pic>
-        <p:nvPicPr>
-          <p:cNvPr id="13" name="Graphique 5">
-            <a:extLst>
-              <a:ext uri="{FF2B5EF4-FFF2-40B4-BE49-F238E27FC236}">
-                <a16:creationId xmlns:a16="http://schemas.microsoft.com/office/drawing/2014/main" id="{2E721800-49C7-3E4F-4034-5E2868F2B5D8}"/>
-              </a:ext>
-            </a:extLst>
-          </p:cNvPr>
-          <p:cNvPicPr>
-            <a:picLocks noChangeAspect="1"/>
-          </p:cNvPicPr>
-          <p:nvPr/>
-        </p:nvPicPr>
-        <p:blipFill>
-          <a:blip>
-            <a:extLst>
-              <a:ext uri="{96DAC541-7B7A-43D3-8B79-37D633B846F1}">
-                <asvg:svgBlip xmlns:asvg="http://schemas.microsoft.com/office/drawing/2016/SVG/main" r:embed="rId3"/>
-              </a:ext>
-            </a:extLst>
-          </a:blip>
-          <a:stretch>
-            <a:fillRect/>
-          </a:stretch>
-        </p:blipFill>
-        <p:spPr>
-          <a:xfrm rot="10800000">
-            <a:off x="5899790" y="5336380"/>
-            <a:ext cx="2559393" cy="2842461"/>
-          </a:xfrm>
-          <a:prstGeom prst="rect">
-            <a:avLst/>
-          </a:prstGeom>
-        </p:spPr>
-      </p:pic>
     </p:spTree>
+    <p:extLst>
+      <p:ext uri="{BB962C8B-B14F-4D97-AF65-F5344CB8AC3E}">
+        <p14:creationId xmlns:p14="http://schemas.microsoft.com/office/powerpoint/2010/main" val="75440203"/>
+      </p:ext>
+    </p:extLst>
   </p:cSld>
   <p:clrMapOvr>
     <a:masterClrMapping/>
@@ -21439,7 +24398,7 @@
 </p:sld>
 </file>
 
-<file path=ppt/slides/slide29.xml><?xml version="1.0" encoding="utf-8"?>
+<file path=ppt/slides/slide3.xml><?xml version="1.0" encoding="utf-8"?>
 <p:sld xmlns:a="http://schemas.openxmlformats.org/drawingml/2006/main" xmlns:r="http://schemas.openxmlformats.org/officeDocument/2006/relationships" xmlns:p="http://schemas.openxmlformats.org/presentationml/2006/main">
   <p:cSld>
     <p:spTree>
@@ -21456,10 +24415,374 @@
           <a:chExt cx="0" cy="0"/>
         </a:xfrm>
       </p:grpSpPr>
+      <p:sp>
+        <p:nvSpPr>
+          <p:cNvPr id="9000" name="Text Placeholder 1"/>
+          <p:cNvSpPr>
+            <a:spLocks noGrp="1"/>
+          </p:cNvSpPr>
+          <p:nvPr>
+            <p:ph type="body" sz="quarter" idx="11"/>
+          </p:nvPr>
+        </p:nvSpPr>
+        <p:spPr/>
+        <p:txBody>
+          <a:bodyPr/>
+          <a:lstStyle/>
+          <a:p>
+            <a:r>
+              <a:t>Emanuel Palm</a:t>
+            </a:r>
+          </a:p>
+        </p:txBody>
+      </p:sp>
+      <p:sp>
+        <p:nvSpPr>
+          <p:cNvPr id="9001" name="Text Placeholder 2"/>
+          <p:cNvSpPr>
+            <a:spLocks noGrp="1"/>
+          </p:cNvSpPr>
+          <p:nvPr>
+            <p:ph type="body" sz="quarter" idx="13"/>
+          </p:nvPr>
+        </p:nvSpPr>
+        <p:spPr>
+          <a:xfrm>
+            <a:off x="1274902" y="3333922"/>
+            <a:ext cx="10210363" cy="3205349"/>
+          </a:xfrm>
+        </p:spPr>
+        <p:txBody>
+          <a:bodyPr/>
+          <a:lstStyle/>
+          <a:p>
+            <a:r>
+              <a:rPr lang="en-US" dirty="0">
+                <a:solidFill>
+                  <a:srgbClr val="E3E8F2"/>
+                </a:solidFill>
+                <a:latin typeface="Segoe UI"/>
+              </a:rPr>
+              <a:t>💙 Everything-as-Code</a:t>
+            </a:r>
+            <a:endParaRPr dirty="0">
+              <a:solidFill>
+                <a:srgbClr val="E3E8F2"/>
+              </a:solidFill>
+              <a:latin typeface="Segoe UI"/>
+            </a:endParaRPr>
+          </a:p>
+          <a:p>
+            <a:r>
+              <a:rPr lang="en-US" dirty="0">
+                <a:solidFill>
+                  <a:srgbClr val="E3E8F2"/>
+                </a:solidFill>
+                <a:latin typeface="Segoe UI"/>
+              </a:rPr>
+              <a:t>📦 Makes modules &amp; tools</a:t>
+            </a:r>
+            <a:endParaRPr dirty="0">
+              <a:solidFill>
+                <a:srgbClr val="E3E8F2"/>
+              </a:solidFill>
+              <a:latin typeface="Segoe UI"/>
+            </a:endParaRPr>
+          </a:p>
+          <a:p>
+            <a:r>
+              <a:rPr lang="en-US" dirty="0">
+                <a:solidFill>
+                  <a:srgbClr val="E3E8F2"/>
+                </a:solidFill>
+                <a:latin typeface="Segoe UI"/>
+              </a:rPr>
+              <a:t>📃 Fan of Open Source</a:t>
+            </a:r>
+          </a:p>
+        </p:txBody>
+      </p:sp>
+      <p:sp>
+        <p:nvSpPr>
+          <p:cNvPr id="9003" name="Text Placeholder 4"/>
+          <p:cNvSpPr>
+            <a:spLocks noGrp="1"/>
+          </p:cNvSpPr>
+          <p:nvPr>
+            <p:ph type="body" sz="quarter" idx="15"/>
+          </p:nvPr>
+        </p:nvSpPr>
+        <p:spPr/>
+        <p:txBody>
+          <a:bodyPr/>
+          <a:lstStyle/>
+          <a:p>
+            <a:r>
+              <a:rPr dirty="0"/>
+              <a:t>Cloud Specialist </a:t>
+            </a:r>
+            <a:r>
+              <a:rPr lang="sv-SE" dirty="0"/>
+              <a:t>&amp; Microsoft MVP </a:t>
+            </a:r>
+            <a:r>
+              <a:rPr dirty="0"/>
+              <a:t>@ Unwonted</a:t>
+            </a:r>
+          </a:p>
+        </p:txBody>
+      </p:sp>
+      <p:pic>
+        <p:nvPicPr>
+          <p:cNvPr id="9004" name="Picture Placeholder 5" descr="speakerpng"/>
+          <p:cNvPicPr>
+            <a:picLocks noGrp="1" noChangeAspect="1"/>
+          </p:cNvPicPr>
+          <p:nvPr>
+            <p:ph type="pic" sz="quarter" idx="22"/>
+          </p:nvPr>
+        </p:nvPicPr>
+        <p:blipFill>
+          <a:blip r:embed="rId2"/>
+          <a:srcRect t="748" b="748"/>
+          <a:stretch>
+            <a:fillRect/>
+          </a:stretch>
+        </p:blipFill>
+        <p:spPr/>
+      </p:pic>
+      <p:grpSp>
+        <p:nvGrpSpPr>
+          <p:cNvPr id="12" name="Group 11">
+            <a:extLst>
+              <a:ext uri="{FF2B5EF4-FFF2-40B4-BE49-F238E27FC236}">
+                <a16:creationId xmlns:a16="http://schemas.microsoft.com/office/drawing/2014/main" id="{002EC189-BAB5-A069-D15C-6BCC0ED0CA3E}"/>
+              </a:ext>
+            </a:extLst>
+          </p:cNvPr>
+          <p:cNvGrpSpPr/>
+          <p:nvPr/>
+        </p:nvGrpSpPr>
+        <p:grpSpPr>
+          <a:xfrm>
+            <a:off x="1274902" y="6911462"/>
+            <a:ext cx="2200000" cy="511955"/>
+            <a:chOff x="9775935" y="6229126"/>
+            <a:chExt cx="1691379" cy="393596"/>
+          </a:xfrm>
+        </p:grpSpPr>
+        <p:pic>
+          <p:nvPicPr>
+            <p:cNvPr id="13" name="Graphic 56">
+              <a:extLst>
+                <a:ext uri="{FF2B5EF4-FFF2-40B4-BE49-F238E27FC236}">
+                  <a16:creationId xmlns:a16="http://schemas.microsoft.com/office/drawing/2014/main" id="{2A2DC6F3-9A88-72E8-D65C-2960114891CD}"/>
+                </a:ext>
+              </a:extLst>
+            </p:cNvPr>
+            <p:cNvPicPr>
+              <a:picLocks noChangeAspect="1"/>
+            </p:cNvPicPr>
+            <p:nvPr/>
+          </p:nvPicPr>
+          <p:blipFill>
+            <a:blip>
+              <a:extLst>
+                <a:ext uri="{96DAC541-7B7A-43D3-8B79-37D633B846F1}">
+                  <asvg:svgBlip xmlns:asvg="http://schemas.microsoft.com/office/drawing/2016/SVG/main" r:embed="rId3"/>
+                </a:ext>
+              </a:extLst>
+            </a:blip>
+            <a:srcRect/>
+            <a:stretch/>
+          </p:blipFill>
+          <p:spPr>
+            <a:xfrm>
+              <a:off x="10280577" y="6229126"/>
+              <a:ext cx="391207" cy="383223"/>
+            </a:xfrm>
+            <a:prstGeom prst="rect">
+              <a:avLst/>
+            </a:prstGeom>
+            <a:effectLst/>
+          </p:spPr>
+        </p:pic>
+        <p:pic>
+          <p:nvPicPr>
+            <p:cNvPr id="14" name="Graphic 56">
+              <a:extLst>
+                <a:ext uri="{FF2B5EF4-FFF2-40B4-BE49-F238E27FC236}">
+                  <a16:creationId xmlns:a16="http://schemas.microsoft.com/office/drawing/2014/main" id="{3F619B66-E565-FA04-2496-F7DC352A9BB8}"/>
+                </a:ext>
+              </a:extLst>
+            </p:cNvPr>
+            <p:cNvPicPr>
+              <a:picLocks noChangeAspect="1"/>
+            </p:cNvPicPr>
+            <p:nvPr/>
+          </p:nvPicPr>
+          <p:blipFill>
+            <a:blip r:embed="rId4"/>
+            <a:srcRect/>
+            <a:stretch/>
+          </p:blipFill>
+          <p:spPr>
+            <a:xfrm>
+              <a:off x="10696834" y="6263498"/>
+              <a:ext cx="320788" cy="327874"/>
+            </a:xfrm>
+            <a:prstGeom prst="rect">
+              <a:avLst/>
+            </a:prstGeom>
+            <a:effectLst/>
+          </p:spPr>
+        </p:pic>
+        <p:pic>
+          <p:nvPicPr>
+            <p:cNvPr id="15" name="Picture 14" descr="A black and white logo&#10;&#10;Description automatically generated">
+              <a:extLst>
+                <a:ext uri="{FF2B5EF4-FFF2-40B4-BE49-F238E27FC236}">
+                  <a16:creationId xmlns:a16="http://schemas.microsoft.com/office/drawing/2014/main" id="{0B82BB6F-ADC7-9511-BB28-0CDDA5B50003}"/>
+                </a:ext>
+              </a:extLst>
+            </p:cNvPr>
+            <p:cNvPicPr>
+              <a:picLocks noChangeAspect="1"/>
+            </p:cNvPicPr>
+            <p:nvPr/>
+          </p:nvPicPr>
+          <p:blipFill>
+            <a:blip r:embed="rId5"/>
+            <a:stretch>
+              <a:fillRect/>
+            </a:stretch>
+          </p:blipFill>
+          <p:spPr>
+            <a:xfrm>
+              <a:off x="11083688" y="6239096"/>
+              <a:ext cx="383626" cy="383626"/>
+            </a:xfrm>
+            <a:prstGeom prst="rect">
+              <a:avLst/>
+            </a:prstGeom>
+          </p:spPr>
+        </p:pic>
+        <p:pic>
+          <p:nvPicPr>
+            <p:cNvPr id="16" name="Picture 15" descr="A blue butterfly on a black background&#10;&#10;AI-generated content may be incorrect.">
+              <a:extLst>
+                <a:ext uri="{FF2B5EF4-FFF2-40B4-BE49-F238E27FC236}">
+                  <a16:creationId xmlns:a16="http://schemas.microsoft.com/office/drawing/2014/main" id="{0FCF77FA-238D-FBC0-366F-94F44C3B36E2}"/>
+                </a:ext>
+              </a:extLst>
+            </p:cNvPr>
+            <p:cNvPicPr>
+              <a:picLocks noChangeAspect="1"/>
+            </p:cNvPicPr>
+            <p:nvPr/>
+          </p:nvPicPr>
+          <p:blipFill>
+            <a:blip r:embed="rId6">
+              <a:biLevel thresh="25000"/>
+              <a:extLst>
+                <a:ext uri="{28A0092B-C50C-407E-A947-70E740481C1C}">
+                  <a14:useLocalDpi xmlns:a14="http://schemas.microsoft.com/office/drawing/2010/main" val="0"/>
+                </a:ext>
+              </a:extLst>
+            </a:blip>
+            <a:stretch>
+              <a:fillRect/>
+            </a:stretch>
+          </p:blipFill>
+          <p:spPr>
+            <a:xfrm>
+              <a:off x="9775935" y="6240132"/>
+              <a:ext cx="438576" cy="382589"/>
+            </a:xfrm>
+            <a:prstGeom prst="rect">
+              <a:avLst/>
+            </a:prstGeom>
+            <a:noFill/>
+            <a:ln>
+              <a:noFill/>
+            </a:ln>
+          </p:spPr>
+        </p:pic>
+      </p:grpSp>
+      <p:sp>
+        <p:nvSpPr>
+          <p:cNvPr id="9005" name="TextBox 9004"/>
+          <p:cNvSpPr txBox="1"/>
+          <p:nvPr/>
+        </p:nvSpPr>
+        <p:spPr>
+          <a:xfrm>
+            <a:off x="3529486" y="6837527"/>
+            <a:ext cx="3443571" cy="646331"/>
+          </a:xfrm>
+          <a:prstGeom prst="rect">
+            <a:avLst/>
+          </a:prstGeom>
+          <a:noFill/>
+        </p:spPr>
+        <p:txBody>
+          <a:bodyPr wrap="none" anchor="ctr">
+            <a:spAutoFit/>
+          </a:bodyPr>
+          <a:lstStyle/>
+          <a:p>
+            <a:r>
+              <a:rPr sz="3600">
+                <a:solidFill>
+                  <a:srgbClr val="E3E8F2"/>
+                </a:solidFill>
+                <a:latin typeface="Segoe UI Semibold"/>
+              </a:rPr>
+              <a:t>@PalmEmanuel</a:t>
+            </a:r>
+          </a:p>
+        </p:txBody>
+      </p:sp>
+      <p:pic>
+        <p:nvPicPr>
+          <p:cNvPr id="6" name="Picture 5" descr="A logo with a white cloud and a colorful circle&#10;&#10;Description automatically generated">
+            <a:extLst>
+              <a:ext uri="{FF2B5EF4-FFF2-40B4-BE49-F238E27FC236}">
+                <a16:creationId xmlns:a16="http://schemas.microsoft.com/office/drawing/2014/main" id="{2BED39B6-1FCD-A92F-1634-0E73D80CDF88}"/>
+              </a:ext>
+            </a:extLst>
+          </p:cNvPr>
+          <p:cNvPicPr>
+            <a:picLocks noChangeAspect="1"/>
+          </p:cNvPicPr>
+          <p:nvPr/>
+        </p:nvPicPr>
+        <p:blipFill>
+          <a:blip r:embed="rId7">
+            <a:extLst>
+              <a:ext uri="{28A0092B-C50C-407E-A947-70E740481C1C}">
+                <a14:useLocalDpi xmlns:a14="http://schemas.microsoft.com/office/drawing/2010/main" val="0"/>
+              </a:ext>
+            </a:extLst>
+          </a:blip>
+          <a:stretch>
+            <a:fillRect/>
+          </a:stretch>
+        </p:blipFill>
+        <p:spPr>
+          <a:xfrm>
+            <a:off x="15150000" y="5650000"/>
+            <a:ext cx="2400000" cy="2400000"/>
+          </a:xfrm>
+          <a:prstGeom prst="rect">
+            <a:avLst/>
+          </a:prstGeom>
+        </p:spPr>
+      </p:pic>
     </p:spTree>
     <p:extLst>
       <p:ext uri="{BB962C8B-B14F-4D97-AF65-F5344CB8AC3E}">
-        <p14:creationId xmlns:p14="http://schemas.microsoft.com/office/powerpoint/2010/main" val="75440203"/>
+        <p14:creationId xmlns:p14="http://schemas.microsoft.com/office/powerpoint/2010/main" val="2153370203"/>
       </p:ext>
     </p:extLst>
   </p:cSld>
@@ -21469,7 +24792,106 @@
 </p:sld>
 </file>
 
-<file path=ppt/slides/slide3.xml><?xml version="1.0" encoding="utf-8"?>
+<file path=ppt/slides/slide4.xml><?xml version="1.0" encoding="utf-8"?>
+<p:sld xmlns:a="http://schemas.openxmlformats.org/drawingml/2006/main" xmlns:r="http://schemas.openxmlformats.org/officeDocument/2006/relationships" xmlns:p="http://schemas.openxmlformats.org/presentationml/2006/main">
+  <p:cSld>
+    <p:spTree>
+      <p:nvGrpSpPr>
+        <p:cNvPr id="1" name=""/>
+        <p:cNvGrpSpPr/>
+        <p:nvPr/>
+      </p:nvGrpSpPr>
+      <p:grpSpPr>
+        <a:xfrm>
+          <a:off x="0" y="0"/>
+          <a:ext cx="0" cy="0"/>
+          <a:chOff x="0" y="0"/>
+          <a:chExt cx="0" cy="0"/>
+        </a:xfrm>
+      </p:grpSpPr>
+      <p:sp>
+        <p:nvSpPr>
+          <p:cNvPr id="7" name="Title 1"/>
+          <p:cNvSpPr>
+            <a:spLocks noGrp="1"/>
+          </p:cNvSpPr>
+          <p:nvPr>
+            <p:ph type="title"/>
+          </p:nvPr>
+        </p:nvSpPr>
+        <p:spPr/>
+        <p:txBody>
+          <a:bodyPr/>
+          <a:lstStyle/>
+          <a:p>
+            <a:r>
+              <a:rPr>
+                <a:solidFill>
+                  <a:srgbClr val="F7F9FF"/>
+                </a:solidFill>
+                <a:latin typeface="Segoe UI Semibold"/>
+              </a:rPr>
+              <a:t>What’s a pirate’s favorite Azure service? 🏴‍☠️</a:t>
+            </a:r>
+          </a:p>
+        </p:txBody>
+      </p:sp>
+      <p:pic>
+        <p:nvPicPr>
+          <p:cNvPr id="9" name="Picture 2" descr="High Quality Gives Pause Pirate Blank Meme Template">
+            <a:extLst>
+              <a:ext uri="{FF2B5EF4-FFF2-40B4-BE49-F238E27FC236}">
+                <a16:creationId xmlns:a16="http://schemas.microsoft.com/office/drawing/2014/main" id="{1D0ED9F0-2367-3E2E-9A6B-F2A82C6B3D2D}"/>
+              </a:ext>
+            </a:extLst>
+          </p:cNvPr>
+          <p:cNvPicPr>
+            <a:picLocks noChangeAspect="1" noChangeArrowheads="1"/>
+          </p:cNvPicPr>
+          <p:nvPr/>
+        </p:nvPicPr>
+        <p:blipFill rotWithShape="1">
+          <a:blip r:embed="rId2">
+            <a:extLst>
+              <a:ext uri="{28A0092B-C50C-407E-A947-70E740481C1C}">
+                <a14:useLocalDpi xmlns:a14="http://schemas.microsoft.com/office/drawing/2010/main" val="0"/>
+              </a:ext>
+            </a:extLst>
+          </a:blip>
+          <a:srcRect b="802"/>
+          <a:stretch>
+            <a:fillRect/>
+          </a:stretch>
+        </p:blipFill>
+        <p:spPr bwMode="auto">
+          <a:xfrm>
+            <a:off x="11305811" y="2393185"/>
+            <a:ext cx="6296389" cy="5500629"/>
+          </a:xfrm>
+          <a:prstGeom prst="rect">
+            <a:avLst/>
+          </a:prstGeom>
+          <a:noFill/>
+          <a:extLst>
+            <a:ext uri="{909E8E84-426E-40DD-AFC4-6F175D3DCCD1}">
+              <a14:hiddenFill xmlns:a14="http://schemas.microsoft.com/office/drawing/2010/main">
+                <a:solidFill>
+                  <a:srgbClr val="FFFFFF"/>
+                </a:solidFill>
+              </a14:hiddenFill>
+            </a:ext>
+          </a:extLst>
+        </p:spPr>
+      </p:pic>
+    </p:spTree>
+  </p:cSld>
+  <p:clrMapOvr>
+    <a:masterClrMapping/>
+  </p:clrMapOvr>
+</p:sld>
+</file>
+
+<file path=ppt/slides/slide5.xml><?xml version="1.0" encoding="utf-8"?>
 <p:sld xmlns:a="http://schemas.openxmlformats.org/drawingml/2006/main" xmlns:r="http://schemas.openxmlformats.org/officeDocument/2006/relationships" xmlns:p="http://schemas.openxmlformats.org/presentationml/2006/main">
   <p:cSld>
     <p:spTree>
@@ -21561,7 +24983,7 @@
           </a:solidFill>
           <a:ln w="38100">
             <a:solidFill>
-              <a:srgbClr val="ED2A24"/>
+              <a:schemeClr val="bg1"/>
             </a:solidFill>
           </a:ln>
         </p:spPr>
@@ -21584,7 +25006,11 @@
           <a:lstStyle/>
           <a:p>
             <a:pPr algn="ctr"/>
-            <a:endParaRPr lang="en-US"/>
+            <a:endParaRPr lang="en-US">
+              <a:solidFill>
+                <a:schemeClr val="bg1"/>
+              </a:solidFill>
+            </a:endParaRPr>
           </a:p>
         </p:txBody>
       </p:sp>
@@ -21632,6 +25058,9 @@
           <a:p>
             <a:r>
               <a:rPr lang="en-US" sz="14400" dirty="0">
+                <a:solidFill>
+                  <a:schemeClr val="bg1"/>
+                </a:solidFill>
                 <a:latin typeface="+mn-lt"/>
               </a:rPr>
               <a:t>A</a:t>
@@ -21683,6 +25112,9 @@
           <a:p>
             <a:r>
               <a:rPr lang="en-US" sz="14400" dirty="0">
+                <a:solidFill>
+                  <a:schemeClr val="bg1"/>
+                </a:solidFill>
                 <a:latin typeface="+mn-lt"/>
               </a:rPr>
               <a:t>R</a:t>
@@ -21734,6 +25166,9 @@
           <a:p>
             <a:r>
               <a:rPr lang="en-US" sz="14400" dirty="0">
+                <a:solidFill>
+                  <a:schemeClr val="bg1"/>
+                </a:solidFill>
                 <a:latin typeface="+mn-lt"/>
               </a:rPr>
               <a:t>G</a:t>
@@ -21761,7 +25196,7 @@
 </p:sld>
 </file>
 
-<file path=ppt/slides/slide4.xml><?xml version="1.0" encoding="utf-8"?>
+<file path=ppt/slides/slide6.xml><?xml version="1.0" encoding="utf-8"?>
 <p:sld xmlns:a="http://schemas.openxmlformats.org/drawingml/2006/main" xmlns:r="http://schemas.openxmlformats.org/officeDocument/2006/relationships" xmlns:p="http://schemas.openxmlformats.org/presentationml/2006/main">
   <p:cSld>
     <p:spTree>
@@ -21794,6 +25229,12 @@
           <a:lstStyle/>
           <a:p>
             <a:r>
+              <a:rPr>
+                <a:solidFill>
+                  <a:srgbClr val="F7F9FF"/>
+                </a:solidFill>
+                <a:latin typeface="Segoe UI Semibold"/>
+              </a:rPr>
               <a:t>Azure Resource Graph</a:t>
             </a:r>
           </a:p>
@@ -21809,61 +25250,165 @@
             <p:ph sz="quarter" idx="10"/>
           </p:nvPr>
         </p:nvSpPr>
-        <p:spPr/>
+        <p:spPr>
+          <a:xfrm>
+            <a:off x="241300" y="2220913"/>
+            <a:ext cx="15482404" cy="6742112"/>
+          </a:xfrm>
+        </p:spPr>
         <p:txBody>
-          <a:bodyPr/>
+          <a:bodyPr>
+            <a:normAutofit/>
+          </a:bodyPr>
           <a:lstStyle/>
           <a:p>
-            <a:r>
-              <a:rPr lang="en-US" dirty="0"/>
+            <a:pPr marL="457200" indent="-457200">
+              <a:buFont typeface="Arial" panose="020B0604020202020204" pitchFamily="34" charset="0"/>
+              <a:buChar char="•"/>
+            </a:pPr>
+            <a:r>
+              <a:rPr lang="en-US" sz="4800" dirty="0">
+                <a:solidFill>
+                  <a:srgbClr val="E3E8F2"/>
+                </a:solidFill>
+                <a:latin typeface="Segoe UI"/>
+              </a:rPr>
               <a:t>Query the Azure management plane</a:t>
             </a:r>
+            <a:endParaRPr sz="4800" dirty="0">
+              <a:solidFill>
+                <a:srgbClr val="E3E8F2"/>
+              </a:solidFill>
+              <a:latin typeface="Segoe UI"/>
+            </a:endParaRPr>
           </a:p>
           <a:p>
             <a:pPr lvl="1"/>
             <a:r>
-              <a:rPr lang="en-US" dirty="0"/>
+              <a:rPr lang="en-US" sz="4400" dirty="0">
+                <a:solidFill>
+                  <a:srgbClr val="E3E8F2"/>
+                </a:solidFill>
+                <a:latin typeface="Segoe UI"/>
+              </a:rPr>
               <a:t>Across management groups and subscriptions</a:t>
             </a:r>
-          </a:p>
-          <a:p>
-            <a:r>
-              <a:rPr lang="en-US" dirty="0"/>
+            <a:endParaRPr sz="4400" dirty="0">
+              <a:solidFill>
+                <a:srgbClr val="E3E8F2"/>
+              </a:solidFill>
+              <a:latin typeface="Segoe UI"/>
+            </a:endParaRPr>
+          </a:p>
+          <a:p>
+            <a:pPr marL="457200" indent="-457200">
+              <a:buFont typeface="Arial" panose="020B0604020202020204" pitchFamily="34" charset="0"/>
+              <a:buChar char="•"/>
+            </a:pPr>
+            <a:r>
+              <a:rPr lang="en-US" sz="4800" dirty="0">
+                <a:solidFill>
+                  <a:srgbClr val="E3E8F2"/>
+                </a:solidFill>
+                <a:latin typeface="Segoe UI"/>
+              </a:rPr>
               <a:t>Uses Kusto Query Language (KQL)</a:t>
             </a:r>
+            <a:endParaRPr sz="4800" dirty="0">
+              <a:solidFill>
+                <a:srgbClr val="E3E8F2"/>
+              </a:solidFill>
+              <a:latin typeface="Segoe UI"/>
+            </a:endParaRPr>
           </a:p>
           <a:p>
             <a:pPr lvl="1"/>
             <a:r>
-              <a:rPr lang="en-US" dirty="0"/>
+              <a:rPr lang="en-US" sz="4400" dirty="0">
+                <a:solidFill>
+                  <a:srgbClr val="E3E8F2"/>
+                </a:solidFill>
+                <a:latin typeface="Segoe UI"/>
+              </a:rPr>
               <a:t>A subset of the KQL supported by</a:t>
             </a:r>
             <a:br>
-              <a:rPr lang="en-US" dirty="0"/>
+              <a:rPr lang="en-US" sz="4400" dirty="0">
+                <a:solidFill>
+                  <a:schemeClr val="bg1"/>
+                </a:solidFill>
+                <a:latin typeface="Segoe UI"/>
+              </a:rPr>
             </a:br>
             <a:r>
-              <a:rPr lang="en-US" dirty="0">
+              <a:rPr lang="en-US" sz="4400" dirty="0">
                 <a:solidFill>
                   <a:schemeClr val="bg1"/>
                 </a:solidFill>
+                <a:latin typeface="Segoe UI"/>
               </a:rPr>
               <a:t>	Azure Monitor/Log Analytics, Data Explorer, Sentinel</a:t>
             </a:r>
-          </a:p>
-          <a:p>
-            <a:r>
-              <a:rPr lang="en-US" dirty="0"/>
+            <a:endParaRPr sz="4400" dirty="0">
+              <a:solidFill>
+                <a:schemeClr val="bg1"/>
+              </a:solidFill>
+              <a:latin typeface="Segoe UI"/>
+            </a:endParaRPr>
+          </a:p>
+          <a:p>
+            <a:pPr marL="457200" indent="-457200">
+              <a:buFont typeface="Arial" panose="020B0604020202020204" pitchFamily="34" charset="0"/>
+              <a:buChar char="•"/>
+            </a:pPr>
+            <a:r>
+              <a:rPr lang="en-US" sz="4800" dirty="0">
+                <a:solidFill>
+                  <a:srgbClr val="E3E8F2"/>
+                </a:solidFill>
+                <a:latin typeface="Segoe UI"/>
+              </a:rPr>
               <a:t>Based on Azure RBAC with your own permissions</a:t>
             </a:r>
-          </a:p>
-          <a:p>
-            <a:r>
-              <a:rPr lang="en-US" dirty="0"/>
+            <a:endParaRPr sz="4800" dirty="0">
+              <a:solidFill>
+                <a:srgbClr val="E3E8F2"/>
+              </a:solidFill>
+              <a:latin typeface="Segoe UI"/>
+            </a:endParaRPr>
+          </a:p>
+          <a:p>
+            <a:pPr marL="457200" indent="-457200">
+              <a:buFont typeface="Arial" panose="020B0604020202020204" pitchFamily="34" charset="0"/>
+              <a:buChar char="•"/>
+            </a:pPr>
+            <a:r>
+              <a:rPr lang="en-US" sz="4800" dirty="0">
+                <a:solidFill>
+                  <a:srgbClr val="E3E8F2"/>
+                </a:solidFill>
+                <a:latin typeface="Segoe UI"/>
+              </a:rPr>
               <a:t>Flexible usage through tooling</a:t>
             </a:r>
-          </a:p>
-          <a:p>
-            <a:endParaRPr lang="en-US" dirty="0"/>
+            <a:endParaRPr sz="4800" dirty="0">
+              <a:solidFill>
+                <a:srgbClr val="E3E8F2"/>
+              </a:solidFill>
+              <a:latin typeface="Segoe UI"/>
+            </a:endParaRPr>
+          </a:p>
+          <a:p>
+            <a:pPr marL="457200" indent="-457200">
+              <a:buFont typeface="Arial" panose="020B0604020202020204" pitchFamily="34" charset="0"/>
+              <a:buChar char="•"/>
+            </a:pPr>
+            <a:endParaRPr lang="en-US" sz="4800" dirty="0">
+              <a:solidFill>
+                <a:srgbClr val="E3E8F2"/>
+              </a:solidFill>
+              <a:latin typeface="Segoe UI"/>
+            </a:endParaRPr>
           </a:p>
         </p:txBody>
       </p:sp>
@@ -21924,7 +25469,7 @@
               <a:buChar char="§"/>
               <a:defRPr sz="4800" kern="1200">
                 <a:solidFill>
-                  <a:srgbClr val="60B1E3"/>
+                  <a:srgbClr val="62D5FF"/>
                 </a:solidFill>
                 <a:latin typeface="+mn-lt"/>
                 <a:ea typeface="+mn-ea"/>
@@ -22113,8 +25658,8 @@
         </p:nvGrpSpPr>
         <p:grpSpPr>
           <a:xfrm rot="21437984">
-            <a:off x="1031962" y="3884364"/>
-            <a:ext cx="8093582" cy="974269"/>
+            <a:off x="1194286" y="4738350"/>
+            <a:ext cx="13007921" cy="1565836"/>
             <a:chOff x="4156776" y="2579638"/>
             <a:chExt cx="3130629" cy="425056"/>
           </a:xfrm>
@@ -22905,7 +26450,7 @@
 </p:sld>
 </file>
 
-<file path=ppt/slides/slide5.xml><?xml version="1.0" encoding="utf-8"?>
+<file path=ppt/slides/slide7.xml><?xml version="1.0" encoding="utf-8"?>
 <p:sld xmlns:a="http://schemas.openxmlformats.org/drawingml/2006/main" xmlns:r="http://schemas.openxmlformats.org/officeDocument/2006/relationships" xmlns:p="http://schemas.openxmlformats.org/presentationml/2006/main">
   <p:cSld>
     <p:spTree>
@@ -22938,6 +26483,12 @@
           <a:lstStyle/>
           <a:p>
             <a:r>
+              <a:rPr>
+                <a:solidFill>
+                  <a:srgbClr val="F7F9FF"/>
+                </a:solidFill>
+                <a:latin typeface="Segoe UI Semibold"/>
+              </a:rPr>
               <a:t>Azure Resource Graph Explorer</a:t>
             </a:r>
           </a:p>
@@ -22999,7 +26550,7 @@
 </p:sld>
 </file>
 
-<file path=ppt/slides/slide6.xml><?xml version="1.0" encoding="utf-8"?>
+<file path=ppt/slides/slide8.xml><?xml version="1.0" encoding="utf-8"?>
 <p:sld xmlns:a="http://schemas.openxmlformats.org/drawingml/2006/main" xmlns:r="http://schemas.openxmlformats.org/officeDocument/2006/relationships" xmlns:p="http://schemas.openxmlformats.org/presentationml/2006/main">
   <p:cSld>
     <p:spTree>
@@ -23032,6 +26583,12 @@
           <a:lstStyle/>
           <a:p>
             <a:r>
+              <a:rPr>
+                <a:solidFill>
+                  <a:srgbClr val="F7F9FF"/>
+                </a:solidFill>
+                <a:latin typeface="Segoe UI Semibold"/>
+              </a:rPr>
               <a:t>Azure Resource Graph Explorer</a:t>
             </a:r>
           </a:p>
@@ -23092,7 +26649,7 @@
 </p:sld>
 </file>
 
-<file path=ppt/slides/slide7.xml><?xml version="1.0" encoding="utf-8"?>
+<file path=ppt/slides/slide9.xml><?xml version="1.0" encoding="utf-8"?>
 <p:sld xmlns:a="http://schemas.openxmlformats.org/drawingml/2006/main" xmlns:r="http://schemas.openxmlformats.org/officeDocument/2006/relationships" xmlns:p="http://schemas.openxmlformats.org/presentationml/2006/main">
   <p:cSld>
     <p:spTree>
@@ -23125,6 +26682,12 @@
           <a:lstStyle/>
           <a:p>
             <a:r>
+              <a:rPr>
+                <a:solidFill>
+                  <a:srgbClr val="F7F9FF"/>
+                </a:solidFill>
+                <a:latin typeface="Segoe UI Semibold"/>
+              </a:rPr>
               <a:t>Azure Resource Graph Explorer</a:t>
             </a:r>
           </a:p>
@@ -23628,366 +27191,6 @@
       <p:bldP spid="8" grpId="1" animBg="1"/>
     </p:bldLst>
   </p:timing>
-</p:sld>
-</file>
-
-<file path=ppt/slides/slide8.xml><?xml version="1.0" encoding="utf-8"?>
-<p:sld xmlns:a="http://schemas.openxmlformats.org/drawingml/2006/main" xmlns:r="http://schemas.openxmlformats.org/officeDocument/2006/relationships" xmlns:p="http://schemas.openxmlformats.org/presentationml/2006/main">
-  <p:cSld>
-    <p:spTree>
-      <p:nvGrpSpPr>
-        <p:cNvPr id="1" name=""/>
-        <p:cNvGrpSpPr/>
-        <p:nvPr/>
-      </p:nvGrpSpPr>
-      <p:grpSpPr>
-        <a:xfrm>
-          <a:off x="0" y="0"/>
-          <a:ext cx="0" cy="0"/>
-          <a:chOff x="0" y="0"/>
-          <a:chExt cx="0" cy="0"/>
-        </a:xfrm>
-      </p:grpSpPr>
-      <p:sp>
-        <p:nvSpPr>
-          <p:cNvPr id="9000" name="Title 1"/>
-          <p:cNvSpPr>
-            <a:spLocks noGrp="1"/>
-          </p:cNvSpPr>
-          <p:nvPr>
-            <p:ph type="title"/>
-          </p:nvPr>
-        </p:nvSpPr>
-        <p:spPr/>
-        <p:txBody>
-          <a:bodyPr/>
-          <a:lstStyle/>
-          <a:p>
-            <a:r>
-              <a:t>boosted Azure Resource Graph Explorer</a:t>
-            </a:r>
-          </a:p>
-        </p:txBody>
-      </p:sp>
-      <p:pic>
-        <p:nvPicPr>
-          <p:cNvPr id="16" name="Picture 4" descr="This Is Brilliant But I Like This Meme Generator - Piñata Farms - The best  meme generator and meme maker for video &amp; image memes">
-            <a:extLst>
-              <a:ext uri="{FF2B5EF4-FFF2-40B4-BE49-F238E27FC236}">
-                <a16:creationId xmlns:a16="http://schemas.microsoft.com/office/drawing/2014/main" id="{6A31C904-A99E-D34D-E70B-4C7C4807118A}"/>
-              </a:ext>
-            </a:extLst>
-          </p:cNvPr>
-          <p:cNvPicPr>
-            <a:picLocks noChangeAspect="1" noChangeArrowheads="1"/>
-          </p:cNvPicPr>
-          <p:nvPr/>
-        </p:nvPicPr>
-        <p:blipFill>
-          <a:blip r:embed="rId2">
-            <a:extLst>
-              <a:ext uri="{28A0092B-C50C-407E-A947-70E740481C1C}">
-                <a14:useLocalDpi xmlns:a14="http://schemas.microsoft.com/office/drawing/2010/main" val="0"/>
-              </a:ext>
-            </a:extLst>
-          </a:blip>
-          <a:srcRect/>
-          <a:stretch>
-            <a:fillRect/>
-          </a:stretch>
-        </p:blipFill>
-        <p:spPr bwMode="auto">
-          <a:xfrm>
-            <a:off x="5923676" y="2300000"/>
-            <a:ext cx="6440647" cy="6650000"/>
-          </a:xfrm>
-          <a:prstGeom prst="rect">
-            <a:avLst/>
-          </a:prstGeom>
-          <a:noFill/>
-          <a:extLst>
-            <a:ext uri="{909E8E84-426E-40DD-AFC4-6F175D3DCCD1}">
-              <a14:hiddenFill xmlns:a14="http://schemas.microsoft.com/office/drawing/2010/main">
-                <a:solidFill>
-                  <a:srgbClr val="FFFFFF"/>
-                </a:solidFill>
-              </a14:hiddenFill>
-            </a:ext>
-          </a:extLst>
-        </p:spPr>
-      </p:pic>
-      <p:pic>
-        <p:nvPicPr>
-          <p:cNvPr id="19" name="Picture 18" descr="A blue ribbon with a black background&#10;&#10;AI-generated content may be incorrect.">
-            <a:extLst>
-              <a:ext uri="{FF2B5EF4-FFF2-40B4-BE49-F238E27FC236}">
-                <a16:creationId xmlns:a16="http://schemas.microsoft.com/office/drawing/2014/main" id="{CC9367BF-57A2-F5B6-9A60-BE8CF9921220}"/>
-              </a:ext>
-            </a:extLst>
-          </p:cNvPr>
-          <p:cNvPicPr>
-            <a:picLocks noChangeAspect="1"/>
-          </p:cNvPicPr>
-          <p:nvPr/>
-        </p:nvPicPr>
-        <p:blipFill>
-          <a:blip r:embed="rId3"/>
-          <a:stretch>
-            <a:fillRect/>
-          </a:stretch>
-        </p:blipFill>
-        <p:spPr>
-          <a:xfrm>
-            <a:off x="6827974" y="3450528"/>
-            <a:ext cx="1483201" cy="1483201"/>
-          </a:xfrm>
-          <a:prstGeom prst="rect">
-            <a:avLst/>
-          </a:prstGeom>
-        </p:spPr>
-      </p:pic>
-      <p:pic>
-        <p:nvPicPr>
-          <p:cNvPr id="6" name="Picture 5">
-            <a:extLst>
-              <a:ext uri="{FF2B5EF4-FFF2-40B4-BE49-F238E27FC236}">
-                <a16:creationId xmlns:a16="http://schemas.microsoft.com/office/drawing/2014/main" id="{BDF83C9C-37D4-E7E7-F44B-75FCD17F3375}"/>
-              </a:ext>
-            </a:extLst>
-          </p:cNvPr>
-          <p:cNvPicPr>
-            <a:picLocks noChangeAspect="1"/>
-          </p:cNvPicPr>
-          <p:nvPr/>
-        </p:nvPicPr>
-        <p:blipFill>
-          <a:blip r:embed="rId4">
-            <a:extLst>
-              <a:ext uri="{28A0092B-C50C-407E-A947-70E740481C1C}">
-                <a14:useLocalDpi xmlns:a14="http://schemas.microsoft.com/office/drawing/2010/main" val="0"/>
-              </a:ext>
-            </a:extLst>
-          </a:blip>
-          <a:srcRect/>
-          <a:stretch/>
-        </p:blipFill>
-        <p:spPr>
-          <a:xfrm>
-            <a:off x="9215473" y="3769629"/>
-            <a:ext cx="1744869" cy="965398"/>
-          </a:xfrm>
-          <a:prstGeom prst="rect">
-            <a:avLst/>
-          </a:prstGeom>
-        </p:spPr>
-      </p:pic>
-      <p:pic>
-        <p:nvPicPr>
-          <p:cNvPr id="7" name="Picture 6" descr="A blue ribbon with a black background&#10;&#10;AI-generated content may be incorrect.">
-            <a:extLst>
-              <a:ext uri="{FF2B5EF4-FFF2-40B4-BE49-F238E27FC236}">
-                <a16:creationId xmlns:a16="http://schemas.microsoft.com/office/drawing/2014/main" id="{E094AAB9-C33C-F3C4-8ACB-075506385765}"/>
-              </a:ext>
-            </a:extLst>
-          </p:cNvPr>
-          <p:cNvPicPr>
-            <a:picLocks noChangeAspect="1"/>
-          </p:cNvPicPr>
-          <p:nvPr/>
-        </p:nvPicPr>
-        <p:blipFill>
-          <a:blip r:embed="rId3"/>
-          <a:stretch>
-            <a:fillRect/>
-          </a:stretch>
-        </p:blipFill>
-        <p:spPr>
-          <a:xfrm>
-            <a:off x="6747832" y="6621639"/>
-            <a:ext cx="1483201" cy="1483201"/>
-          </a:xfrm>
-          <a:prstGeom prst="rect">
-            <a:avLst/>
-          </a:prstGeom>
-        </p:spPr>
-      </p:pic>
-      <p:pic>
-        <p:nvPicPr>
-          <p:cNvPr id="8" name="Picture 7">
-            <a:extLst>
-              <a:ext uri="{FF2B5EF4-FFF2-40B4-BE49-F238E27FC236}">
-                <a16:creationId xmlns:a16="http://schemas.microsoft.com/office/drawing/2014/main" id="{10449811-F8E8-775D-039F-401BE5657426}"/>
-              </a:ext>
-            </a:extLst>
-          </p:cNvPr>
-          <p:cNvPicPr>
-            <a:picLocks noChangeAspect="1"/>
-          </p:cNvPicPr>
-          <p:nvPr/>
-        </p:nvPicPr>
-        <p:blipFill>
-          <a:blip r:embed="rId4">
-            <a:extLst>
-              <a:ext uri="{28A0092B-C50C-407E-A947-70E740481C1C}">
-                <a14:useLocalDpi xmlns:a14="http://schemas.microsoft.com/office/drawing/2010/main" val="0"/>
-              </a:ext>
-            </a:extLst>
-          </a:blip>
-          <a:srcRect/>
-          <a:stretch/>
-        </p:blipFill>
-        <p:spPr>
-          <a:xfrm>
-            <a:off x="9184532" y="7082320"/>
-            <a:ext cx="1744869" cy="965398"/>
-          </a:xfrm>
-          <a:prstGeom prst="rect">
-            <a:avLst/>
-          </a:prstGeom>
-        </p:spPr>
-      </p:pic>
-    </p:spTree>
-  </p:cSld>
-  <p:clrMapOvr>
-    <a:masterClrMapping/>
-  </p:clrMapOvr>
-  <mc:AlternateContent xmlns:mc="http://schemas.openxmlformats.org/markup-compatibility/2006" xmlns:p159="http://schemas.microsoft.com/office/powerpoint/2015/09/main">
-    <mc:Choice Requires="p159">
-      <p:transition spd="slow">
-        <p159:morph option="byObject"/>
-      </p:transition>
-    </mc:Choice>
-    <mc:Fallback xmlns="">
-      <p:transition spd="slow">
-        <p:fade/>
-      </p:transition>
-    </mc:Fallback>
-  </mc:AlternateContent>
-</p:sld>
-</file>
-
-<file path=ppt/slides/slide9.xml><?xml version="1.0" encoding="utf-8"?>
-<p:sld xmlns:a="http://schemas.openxmlformats.org/drawingml/2006/main" xmlns:r="http://schemas.openxmlformats.org/officeDocument/2006/relationships" xmlns:p="http://schemas.openxmlformats.org/presentationml/2006/main">
-  <p:cSld>
-    <p:spTree>
-      <p:nvGrpSpPr>
-        <p:cNvPr id="1" name=""/>
-        <p:cNvGrpSpPr/>
-        <p:nvPr/>
-      </p:nvGrpSpPr>
-      <p:grpSpPr>
-        <a:xfrm>
-          <a:off x="0" y="0"/>
-          <a:ext cx="0" cy="0"/>
-          <a:chOff x="0" y="0"/>
-          <a:chExt cx="0" cy="0"/>
-        </a:xfrm>
-      </p:grpSpPr>
-      <p:sp>
-        <p:nvSpPr>
-          <p:cNvPr id="9000" name="Title 1"/>
-          <p:cNvSpPr>
-            <a:spLocks noGrp="1"/>
-          </p:cNvSpPr>
-          <p:nvPr>
-            <p:ph type="title"/>
-          </p:nvPr>
-        </p:nvSpPr>
-        <p:spPr/>
-        <p:txBody>
-          <a:bodyPr/>
-          <a:lstStyle/>
-          <a:p>
-            <a:r>
-              <a:t>boosted Azure Resource Graph Explorer</a:t>
-            </a:r>
-          </a:p>
-        </p:txBody>
-      </p:sp>
-      <p:pic>
-        <p:nvPicPr>
-          <p:cNvPr id="6" name="Picture 2">
-            <a:extLst>
-              <a:ext uri="{FF2B5EF4-FFF2-40B4-BE49-F238E27FC236}">
-                <a16:creationId xmlns:a16="http://schemas.microsoft.com/office/drawing/2014/main" id="{F0570B4F-9C27-AE55-962E-15762E0BD4BB}"/>
-              </a:ext>
-            </a:extLst>
-          </p:cNvPr>
-          <p:cNvPicPr>
-            <a:picLocks noChangeAspect="1" noChangeArrowheads="1"/>
-          </p:cNvPicPr>
-          <p:nvPr/>
-        </p:nvPicPr>
-        <p:blipFill>
-          <a:blip r:embed="rId2">
-            <a:extLst>
-              <a:ext uri="{28A0092B-C50C-407E-A947-70E740481C1C}">
-                <a14:useLocalDpi xmlns:a14="http://schemas.microsoft.com/office/drawing/2010/main" val="0"/>
-              </a:ext>
-            </a:extLst>
-          </a:blip>
-          <a:srcRect/>
-          <a:stretch>
-            <a:fillRect/>
-          </a:stretch>
-        </p:blipFill>
-        <p:spPr bwMode="auto">
-          <a:xfrm>
-            <a:off x="6984468" y="2875248"/>
-            <a:ext cx="4536504" cy="4536504"/>
-          </a:xfrm>
-          <a:prstGeom prst="snip2DiagRect">
-            <a:avLst/>
-          </a:prstGeom>
-          <a:solidFill>
-            <a:srgbClr val="FFFFFF">
-              <a:shade val="85000"/>
-            </a:srgbClr>
-          </a:solidFill>
-          <a:ln w="133350" cap="sq">
-            <a:solidFill>
-              <a:srgbClr val="FFFFFF"/>
-            </a:solidFill>
-            <a:miter lim="800000"/>
-          </a:ln>
-          <a:effectLst>
-            <a:outerShdw blurRad="88900" algn="tl" rotWithShape="0">
-              <a:srgbClr val="000000">
-                <a:alpha val="45000"/>
-              </a:srgbClr>
-            </a:outerShdw>
-          </a:effectLst>
-          <a:scene3d>
-            <a:camera prst="orthographicFront"/>
-            <a:lightRig rig="twoPt" dir="t">
-              <a:rot lat="0" lon="0" rev="7200000"/>
-            </a:lightRig>
-          </a:scene3d>
-          <a:sp3d>
-            <a:bevelT w="25400" h="19050"/>
-            <a:contourClr>
-              <a:srgbClr val="FFFFFF"/>
-            </a:contourClr>
-          </a:sp3d>
-        </p:spPr>
-      </p:pic>
-    </p:spTree>
-  </p:cSld>
-  <p:clrMapOvr>
-    <a:masterClrMapping/>
-  </p:clrMapOvr>
-  <mc:AlternateContent xmlns:mc="http://schemas.openxmlformats.org/markup-compatibility/2006" xmlns:p159="http://schemas.microsoft.com/office/powerpoint/2015/09/main">
-    <mc:Choice Requires="p159">
-      <p:transition spd="slow">
-        <p159:morph option="byObject"/>
-      </p:transition>
-    </mc:Choice>
-    <mc:Fallback xmlns="">
-      <p:transition spd="slow">
-        <p:fade/>
-      </p:transition>
-    </mc:Fallback>
-  </mc:AlternateContent>
 </p:sld>
 </file>
 

--- a/ELSE26_TreasureHuntingInAzureWithKQL.pptx
+++ b/ELSE26_TreasureHuntingInAzureWithKQL.pptx
@@ -5,10 +5,10 @@
     <p:sldMasterId id="2147483648" r:id="rId4"/>
   </p:sldMasterIdLst>
   <p:notesMasterIdLst>
-    <p:notesMasterId r:id="rId33"/>
+    <p:notesMasterId r:id="rId35"/>
   </p:notesMasterIdLst>
   <p:handoutMasterIdLst>
-    <p:handoutMasterId r:id="rId34"/>
+    <p:handoutMasterId r:id="rId36"/>
   </p:handoutMasterIdLst>
   <p:sldIdLst>
     <p:sldId id="332" r:id="rId5"/>
@@ -28,17 +28,19 @@
     <p:sldId id="345" r:id="rId19"/>
     <p:sldId id="358" r:id="rId20"/>
     <p:sldId id="359" r:id="rId21"/>
-    <p:sldId id="348" r:id="rId22"/>
-    <p:sldId id="349" r:id="rId23"/>
-    <p:sldId id="350" r:id="rId24"/>
-    <p:sldId id="351" r:id="rId25"/>
-    <p:sldId id="352" r:id="rId26"/>
-    <p:sldId id="353" r:id="rId27"/>
-    <p:sldId id="354" r:id="rId28"/>
-    <p:sldId id="355" r:id="rId29"/>
-    <p:sldId id="356" r:id="rId30"/>
-    <p:sldId id="357" r:id="rId31"/>
-    <p:sldId id="324" r:id="rId32"/>
+    <p:sldId id="361" r:id="rId22"/>
+    <p:sldId id="348" r:id="rId23"/>
+    <p:sldId id="360" r:id="rId24"/>
+    <p:sldId id="349" r:id="rId25"/>
+    <p:sldId id="350" r:id="rId26"/>
+    <p:sldId id="351" r:id="rId27"/>
+    <p:sldId id="352" r:id="rId28"/>
+    <p:sldId id="353" r:id="rId29"/>
+    <p:sldId id="354" r:id="rId30"/>
+    <p:sldId id="355" r:id="rId31"/>
+    <p:sldId id="356" r:id="rId32"/>
+    <p:sldId id="357" r:id="rId33"/>
+    <p:sldId id="324" r:id="rId34"/>
   </p:sldIdLst>
   <p:sldSz cx="18288000" cy="10287000"/>
   <p:notesSz cx="10287000" cy="18288000"/>
@@ -156,7 +158,9 @@
             <p14:sldId id="345"/>
             <p14:sldId id="358"/>
             <p14:sldId id="359"/>
+            <p14:sldId id="361"/>
             <p14:sldId id="348"/>
+            <p14:sldId id="360"/>
             <p14:sldId id="349"/>
             <p14:sldId id="350"/>
             <p14:sldId id="351"/>
@@ -874,7 +878,13 @@
   <p:cSld>
     <p:spTree>
       <p:nvGrpSpPr>
-        <p:cNvPr id="1" name=""/>
+        <p:cNvPr id="1" name="">
+          <a:extLst>
+            <a:ext uri="{FF2B5EF4-FFF2-40B4-BE49-F238E27FC236}">
+              <a16:creationId xmlns:a16="http://schemas.microsoft.com/office/drawing/2014/main" id="{4DB5CD2E-A2C4-3439-809F-8A953B031E9D}"/>
+            </a:ext>
+          </a:extLst>
+        </p:cNvPr>
         <p:cNvGrpSpPr/>
         <p:nvPr/>
       </p:nvGrpSpPr>
@@ -888,7 +898,13 @@
       </p:grpSpPr>
       <p:sp>
         <p:nvSpPr>
-          <p:cNvPr id="3" name="Notes Placeholder 2"/>
+          <p:cNvPr id="3" name="Notes Placeholder 2">
+            <a:extLst>
+              <a:ext uri="{FF2B5EF4-FFF2-40B4-BE49-F238E27FC236}">
+                <a16:creationId xmlns:a16="http://schemas.microsoft.com/office/drawing/2014/main" id="{01C53951-E9EE-0524-A290-7EB829B26AB8}"/>
+              </a:ext>
+            </a:extLst>
+          </p:cNvPr>
           <p:cNvSpPr>
             <a:spLocks noGrp="1"/>
           </p:cNvSpPr>
@@ -901,31 +917,16 @@
           <a:bodyPr/>
           <a:lstStyle/>
           <a:p>
-            <a:r>
-              <a:t>https://learn.microsoft.com/en-us/azure/governance/resource-graph/concepts/query-language#resource-graph-tables</a:t>
-            </a:r>
-          </a:p>
-          <a:p>
-            <a:r>
-              <a:t>https://learn.microsoft.com/en-us/azure/azure-monitor/logs/azure-monitor-data-explorer-proxy#query-data-in-azure-resource-graph-by-using-arg-preview</a:t>
-            </a:r>
-          </a:p>
-          <a:p>
-            <a:r>
-              <a:t>https://learn.microsoft.com/en-us/azure/azure-monitor/logs/azure-monitor-data-explorer-proxy#azure-resource-graph-cross-service-query-considerations</a:t>
-            </a:r>
-          </a:p>
-          <a:p>
-            <a:r>
-              <a:t>https://learn.microsoft.com/en-us/azure/governance/resource-graph/concepts/query-language#resource-graph-custom-language-elements</a:t>
-            </a:r>
-          </a:p>
-          <a:p>
-            <a:endParaRPr/>
+            <a:endParaRPr dirty="0"/>
           </a:p>
         </p:txBody>
       </p:sp>
     </p:spTree>
+    <p:extLst>
+      <p:ext uri="{BB962C8B-B14F-4D97-AF65-F5344CB8AC3E}">
+        <p14:creationId xmlns:p14="http://schemas.microsoft.com/office/powerpoint/2010/main" val="732823381"/>
+      </p:ext>
+    </p:extLst>
   </p:cSld>
   <p:clrMapOvr>
     <a:masterClrMapping/>
@@ -966,7 +967,7 @@
           <a:lstStyle/>
           <a:p>
             <a:r>
-              <a:t>https://learn.microsoft.com/en-gb/azure/governance/resource-graph/alerts-query-quickstart?tabs=azure-resource-graph</a:t>
+              <a:t>https://learn.microsoft.com/en-us/azure/governance/resource-graph/concepts/query-language#resource-graph-tables</a:t>
             </a:r>
           </a:p>
           <a:p>
@@ -977,6 +978,11 @@
           <a:p>
             <a:r>
               <a:t>https://learn.microsoft.com/en-us/azure/azure-monitor/logs/azure-monitor-data-explorer-proxy#azure-resource-graph-cross-service-query-considerations</a:t>
+            </a:r>
+          </a:p>
+          <a:p>
+            <a:r>
+              <a:t>https://learn.microsoft.com/en-us/azure/governance/resource-graph/concepts/query-language#resource-graph-custom-language-elements</a:t>
             </a:r>
           </a:p>
           <a:p>
@@ -993,6 +999,65 @@
 </file>
 
 <file path=ppt/notesSlides/notesSlide3.xml><?xml version="1.0" encoding="utf-8"?>
+<p:notes xmlns:a="http://schemas.openxmlformats.org/drawingml/2006/main" xmlns:r="http://schemas.openxmlformats.org/officeDocument/2006/relationships" xmlns:p="http://schemas.openxmlformats.org/presentationml/2006/main">
+  <p:cSld>
+    <p:spTree>
+      <p:nvGrpSpPr>
+        <p:cNvPr id="1" name=""/>
+        <p:cNvGrpSpPr/>
+        <p:nvPr/>
+      </p:nvGrpSpPr>
+      <p:grpSpPr>
+        <a:xfrm>
+          <a:off x="0" y="0"/>
+          <a:ext cx="0" cy="0"/>
+          <a:chOff x="0" y="0"/>
+          <a:chExt cx="0" cy="0"/>
+        </a:xfrm>
+      </p:grpSpPr>
+      <p:sp>
+        <p:nvSpPr>
+          <p:cNvPr id="3" name="Notes Placeholder 2"/>
+          <p:cNvSpPr>
+            <a:spLocks noGrp="1"/>
+          </p:cNvSpPr>
+          <p:nvPr>
+            <p:ph type="body" idx="1"/>
+          </p:nvPr>
+        </p:nvSpPr>
+        <p:spPr/>
+        <p:txBody>
+          <a:bodyPr/>
+          <a:lstStyle/>
+          <a:p>
+            <a:r>
+              <a:t>https://learn.microsoft.com/en-gb/azure/governance/resource-graph/alerts-query-quickstart?tabs=azure-resource-graph</a:t>
+            </a:r>
+          </a:p>
+          <a:p>
+            <a:r>
+              <a:t>https://learn.microsoft.com/en-us/azure/azure-monitor/logs/azure-monitor-data-explorer-proxy#query-data-in-azure-resource-graph-by-using-arg-preview</a:t>
+            </a:r>
+          </a:p>
+          <a:p>
+            <a:r>
+              <a:t>https://learn.microsoft.com/en-us/azure/azure-monitor/logs/azure-monitor-data-explorer-proxy#azure-resource-graph-cross-service-query-considerations</a:t>
+            </a:r>
+          </a:p>
+          <a:p>
+            <a:endParaRPr/>
+          </a:p>
+        </p:txBody>
+      </p:sp>
+    </p:spTree>
+  </p:cSld>
+  <p:clrMapOvr>
+    <a:masterClrMapping/>
+  </p:clrMapOvr>
+</p:notes>
+</file>
+
+<file path=ppt/notesSlides/notesSlide4.xml><?xml version="1.0" encoding="utf-8"?>
 <p:notes xmlns:a="http://schemas.openxmlformats.org/drawingml/2006/main" xmlns:r="http://schemas.openxmlformats.org/officeDocument/2006/relationships" xmlns:p="http://schemas.openxmlformats.org/presentationml/2006/main">
   <p:cSld>
     <p:spTree>
@@ -13220,6 +13285,60 @@
       </p:grpSpPr>
       <p:sp>
         <p:nvSpPr>
+          <p:cNvPr id="4" name="Rounded Rectangle 3">
+            <a:extLst>
+              <a:ext uri="{FF2B5EF4-FFF2-40B4-BE49-F238E27FC236}">
+                <a16:creationId xmlns:a16="http://schemas.microsoft.com/office/drawing/2014/main" id="{1373B5EF-6E7F-9405-042D-0782E9DCD816}"/>
+              </a:ext>
+            </a:extLst>
+          </p:cNvPr>
+          <p:cNvSpPr/>
+          <p:nvPr/>
+        </p:nvSpPr>
+        <p:spPr>
+          <a:xfrm>
+            <a:off x="1148316" y="2700670"/>
+            <a:ext cx="15608596" cy="4359349"/>
+          </a:xfrm>
+          <a:prstGeom prst="roundRect">
+            <a:avLst/>
+          </a:prstGeom>
+          <a:solidFill>
+            <a:schemeClr val="bg1">
+              <a:lumMod val="10000"/>
+            </a:schemeClr>
+          </a:solidFill>
+          <a:ln>
+            <a:noFill/>
+          </a:ln>
+        </p:spPr>
+        <p:style>
+          <a:lnRef idx="2">
+            <a:schemeClr val="accent1">
+              <a:shade val="15000"/>
+            </a:schemeClr>
+          </a:lnRef>
+          <a:fillRef idx="1">
+            <a:schemeClr val="accent1"/>
+          </a:fillRef>
+          <a:effectRef idx="0">
+            <a:schemeClr val="accent1"/>
+          </a:effectRef>
+          <a:fontRef idx="minor">
+            <a:schemeClr val="lt1"/>
+          </a:fontRef>
+        </p:style>
+        <p:txBody>
+          <a:bodyPr rtlCol="0" anchor="ctr"/>
+          <a:lstStyle/>
+          <a:p>
+            <a:pPr algn="ctr"/>
+            <a:endParaRPr lang="en-US"/>
+          </a:p>
+        </p:txBody>
+      </p:sp>
+      <p:sp>
+        <p:nvSpPr>
           <p:cNvPr id="24" name="Title 1"/>
           <p:cNvSpPr>
             <a:spLocks noGrp="1"/>
@@ -13241,33 +13360,6 @@
                 <a:latin typeface="Segoe UI Semibold"/>
               </a:rPr>
               <a:t>Example Query</a:t>
-            </a:r>
-          </a:p>
-        </p:txBody>
-      </p:sp>
-      <p:sp>
-        <p:nvSpPr>
-          <p:cNvPr id="9001" name="Text Placeholder 2"/>
-          <p:cNvSpPr>
-            <a:spLocks noGrp="1"/>
-          </p:cNvSpPr>
-          <p:nvPr>
-            <p:ph type="body" sz="quarter" idx="26"/>
-          </p:nvPr>
-        </p:nvSpPr>
-        <p:spPr>
-          <a:xfrm>
-            <a:off x="1176913" y="2703443"/>
-            <a:ext cx="15585333" cy="4333461"/>
-          </a:xfrm>
-        </p:spPr>
-        <p:txBody>
-          <a:bodyPr/>
-          <a:lstStyle/>
-          <a:p>
-            <a:r>
-              <a:rPr dirty="0"/>
-              <a:t> </a:t>
             </a:r>
           </a:p>
         </p:txBody>
@@ -14038,6 +14130,60 @@
       </p:grpSpPr>
       <p:sp>
         <p:nvSpPr>
+          <p:cNvPr id="5" name="Rounded Rectangle 4">
+            <a:extLst>
+              <a:ext uri="{FF2B5EF4-FFF2-40B4-BE49-F238E27FC236}">
+                <a16:creationId xmlns:a16="http://schemas.microsoft.com/office/drawing/2014/main" id="{FDA5C55D-6A85-6D5D-C063-0072298D92D7}"/>
+              </a:ext>
+            </a:extLst>
+          </p:cNvPr>
+          <p:cNvSpPr/>
+          <p:nvPr/>
+        </p:nvSpPr>
+        <p:spPr>
+          <a:xfrm>
+            <a:off x="1148316" y="2700670"/>
+            <a:ext cx="15608596" cy="4359349"/>
+          </a:xfrm>
+          <a:prstGeom prst="roundRect">
+            <a:avLst/>
+          </a:prstGeom>
+          <a:solidFill>
+            <a:schemeClr val="bg1">
+              <a:lumMod val="10000"/>
+            </a:schemeClr>
+          </a:solidFill>
+          <a:ln>
+            <a:noFill/>
+          </a:ln>
+        </p:spPr>
+        <p:style>
+          <a:lnRef idx="2">
+            <a:schemeClr val="accent1">
+              <a:shade val="15000"/>
+            </a:schemeClr>
+          </a:lnRef>
+          <a:fillRef idx="1">
+            <a:schemeClr val="accent1"/>
+          </a:fillRef>
+          <a:effectRef idx="0">
+            <a:schemeClr val="accent1"/>
+          </a:effectRef>
+          <a:fontRef idx="minor">
+            <a:schemeClr val="lt1"/>
+          </a:fontRef>
+        </p:style>
+        <p:txBody>
+          <a:bodyPr rtlCol="0" anchor="ctr"/>
+          <a:lstStyle/>
+          <a:p>
+            <a:pPr algn="ctr"/>
+            <a:endParaRPr lang="en-US"/>
+          </a:p>
+        </p:txBody>
+      </p:sp>
+      <p:sp>
+        <p:nvSpPr>
           <p:cNvPr id="24" name="Title 1">
             <a:extLst>
               <a:ext uri="{FF2B5EF4-FFF2-40B4-BE49-F238E27FC236}">
@@ -14065,39 +14211,6 @@
                 <a:latin typeface="Segoe UI Semibold"/>
               </a:rPr>
               <a:t>Example Query</a:t>
-            </a:r>
-          </a:p>
-        </p:txBody>
-      </p:sp>
-      <p:sp>
-        <p:nvSpPr>
-          <p:cNvPr id="9001" name="Text Placeholder 2">
-            <a:extLst>
-              <a:ext uri="{FF2B5EF4-FFF2-40B4-BE49-F238E27FC236}">
-                <a16:creationId xmlns:a16="http://schemas.microsoft.com/office/drawing/2014/main" id="{DD4E156B-6152-A351-C610-0F8DE7762F21}"/>
-              </a:ext>
-            </a:extLst>
-          </p:cNvPr>
-          <p:cNvSpPr>
-            <a:spLocks noGrp="1"/>
-          </p:cNvSpPr>
-          <p:nvPr>
-            <p:ph type="body" sz="quarter" idx="26"/>
-          </p:nvPr>
-        </p:nvSpPr>
-        <p:spPr>
-          <a:xfrm>
-            <a:off x="1176913" y="2703443"/>
-            <a:ext cx="15585333" cy="4333461"/>
-          </a:xfrm>
-        </p:spPr>
-        <p:txBody>
-          <a:bodyPr/>
-          <a:lstStyle/>
-          <a:p>
-            <a:r>
-              <a:rPr dirty="0"/>
-              <a:t> </a:t>
             </a:r>
           </a:p>
         </p:txBody>
@@ -14774,177 +14887,56 @@
       </p:sp>
       <p:sp>
         <p:nvSpPr>
-          <p:cNvPr id="3" name="Text Placeholder 2">
+          <p:cNvPr id="6" name="Rounded Rectangle 5">
             <a:extLst>
               <a:ext uri="{FF2B5EF4-FFF2-40B4-BE49-F238E27FC236}">
-                <a16:creationId xmlns:a16="http://schemas.microsoft.com/office/drawing/2014/main" id="{761AFDB6-47C7-67F8-B179-C250DB322167}"/>
+                <a16:creationId xmlns:a16="http://schemas.microsoft.com/office/drawing/2014/main" id="{B0BC994C-2758-88B2-7A4B-27D239F8D532}"/>
               </a:ext>
             </a:extLst>
           </p:cNvPr>
-          <p:cNvSpPr txBox="1">
-            <a:spLocks/>
-          </p:cNvSpPr>
+          <p:cNvSpPr/>
           <p:nvPr/>
         </p:nvSpPr>
         <p:spPr>
           <a:xfrm>
-            <a:off x="1311097" y="4094311"/>
-            <a:ext cx="15201021" cy="2246854"/>
+            <a:off x="1825428" y="4094311"/>
+            <a:ext cx="14637144" cy="2074802"/>
           </a:xfrm>
-          <a:prstGeom prst="rect">
+          <a:prstGeom prst="roundRect">
             <a:avLst/>
           </a:prstGeom>
           <a:solidFill>
-            <a:srgbClr val="000000"/>
+            <a:schemeClr val="bg1">
+              <a:lumMod val="10000"/>
+              <a:alpha val="90000"/>
+            </a:schemeClr>
           </a:solidFill>
+          <a:ln>
+            <a:noFill/>
+          </a:ln>
         </p:spPr>
+        <p:style>
+          <a:lnRef idx="2">
+            <a:schemeClr val="accent1">
+              <a:shade val="15000"/>
+            </a:schemeClr>
+          </a:lnRef>
+          <a:fillRef idx="1">
+            <a:schemeClr val="accent1"/>
+          </a:fillRef>
+          <a:effectRef idx="0">
+            <a:schemeClr val="accent1"/>
+          </a:effectRef>
+          <a:fontRef idx="minor">
+            <a:schemeClr val="lt1"/>
+          </a:fontRef>
+        </p:style>
         <p:txBody>
-          <a:bodyPr vert="horz" lIns="91440" tIns="45720" rIns="91440" bIns="45720" rtlCol="0">
-            <a:normAutofit/>
-          </a:bodyPr>
-          <a:lstStyle>
-            <a:lvl1pPr marL="0" indent="0" algn="l" defTabSz="914400" rtl="0" eaLnBrk="1" latinLnBrk="0" hangingPunct="1">
-              <a:spcBef>
-                <a:spcPts val="0"/>
-              </a:spcBef>
-              <a:buFont typeface="Arial" pitchFamily="34" charset="0"/>
-              <a:buNone/>
-              <a:defRPr sz="2400" kern="1200">
-                <a:solidFill>
-                  <a:schemeClr val="bg2"/>
-                </a:solidFill>
-                <a:latin typeface="Consolas" panose="020B0609020204030204" pitchFamily="49" charset="0"/>
-                <a:ea typeface="+mn-ea"/>
-                <a:cs typeface="+mn-cs"/>
-              </a:defRPr>
-            </a:lvl1pPr>
-            <a:lvl2pPr marL="742950" indent="-285750" algn="l" defTabSz="914400" rtl="0" eaLnBrk="1" latinLnBrk="0" hangingPunct="1">
-              <a:spcBef>
-                <a:spcPts val="0"/>
-              </a:spcBef>
-              <a:buFont typeface="Arial" pitchFamily="34" charset="0"/>
-              <a:buChar char="–"/>
-              <a:defRPr sz="2700" kern="1200">
-                <a:solidFill>
-                  <a:srgbClr val="010101"/>
-                </a:solidFill>
-                <a:latin typeface="+mn-lt"/>
-                <a:ea typeface="+mn-ea"/>
-                <a:cs typeface="+mn-cs"/>
-              </a:defRPr>
-            </a:lvl2pPr>
-            <a:lvl3pPr marL="1143000" indent="-228600" algn="l" defTabSz="914400" rtl="0" eaLnBrk="1" latinLnBrk="0" hangingPunct="1">
-              <a:spcBef>
-                <a:spcPts val="0"/>
-              </a:spcBef>
-              <a:buFont typeface="Arial" pitchFamily="34" charset="0"/>
-              <a:buChar char="•"/>
-              <a:defRPr sz="2400" kern="1200">
-                <a:solidFill>
-                  <a:srgbClr val="010101"/>
-                </a:solidFill>
-                <a:latin typeface="+mn-lt"/>
-                <a:ea typeface="+mn-ea"/>
-                <a:cs typeface="+mn-cs"/>
-              </a:defRPr>
-            </a:lvl3pPr>
-            <a:lvl4pPr marL="1600200" indent="-228600" algn="l" defTabSz="914400" rtl="0" eaLnBrk="1" latinLnBrk="0" hangingPunct="1">
-              <a:spcBef>
-                <a:spcPts val="0"/>
-              </a:spcBef>
-              <a:buFont typeface="Arial" pitchFamily="34" charset="0"/>
-              <a:buChar char="–"/>
-              <a:defRPr sz="2100" kern="1200">
-                <a:solidFill>
-                  <a:srgbClr val="010101"/>
-                </a:solidFill>
-                <a:latin typeface="+mn-lt"/>
-                <a:ea typeface="+mn-ea"/>
-                <a:cs typeface="+mn-cs"/>
-              </a:defRPr>
-            </a:lvl4pPr>
-            <a:lvl5pPr marL="2057400" indent="-228600" algn="l" defTabSz="914400" rtl="0" eaLnBrk="1" latinLnBrk="0" hangingPunct="1">
-              <a:spcBef>
-                <a:spcPts val="0"/>
-              </a:spcBef>
-              <a:buFont typeface="Arial" pitchFamily="34" charset="0"/>
-              <a:buChar char="»"/>
-              <a:defRPr sz="2100" kern="1200">
-                <a:solidFill>
-                  <a:srgbClr val="010101"/>
-                </a:solidFill>
-                <a:latin typeface="+mn-lt"/>
-                <a:ea typeface="+mn-ea"/>
-                <a:cs typeface="+mn-cs"/>
-              </a:defRPr>
-            </a:lvl5pPr>
-            <a:lvl6pPr marL="2514600" indent="-228600" algn="l" defTabSz="914400" rtl="0" eaLnBrk="1" latinLnBrk="0" hangingPunct="1">
-              <a:spcBef>
-                <a:spcPct val="20000"/>
-              </a:spcBef>
-              <a:buFont typeface="Arial" pitchFamily="34" charset="0"/>
-              <a:buChar char="•"/>
-              <a:defRPr sz="2000" kern="1200">
-                <a:solidFill>
-                  <a:schemeClr val="tx1"/>
-                </a:solidFill>
-                <a:latin typeface="+mn-lt"/>
-                <a:ea typeface="+mn-ea"/>
-                <a:cs typeface="+mn-cs"/>
-              </a:defRPr>
-            </a:lvl6pPr>
-            <a:lvl7pPr marL="2971800" indent="-228600" algn="l" defTabSz="914400" rtl="0" eaLnBrk="1" latinLnBrk="0" hangingPunct="1">
-              <a:spcBef>
-                <a:spcPct val="20000"/>
-              </a:spcBef>
-              <a:buFont typeface="Arial" pitchFamily="34" charset="0"/>
-              <a:buChar char="•"/>
-              <a:defRPr sz="2000" kern="1200">
-                <a:solidFill>
-                  <a:schemeClr val="tx1"/>
-                </a:solidFill>
-                <a:latin typeface="+mn-lt"/>
-                <a:ea typeface="+mn-ea"/>
-                <a:cs typeface="+mn-cs"/>
-              </a:defRPr>
-            </a:lvl7pPr>
-            <a:lvl8pPr marL="3429000" indent="-228600" algn="l" defTabSz="914400" rtl="0" eaLnBrk="1" latinLnBrk="0" hangingPunct="1">
-              <a:spcBef>
-                <a:spcPct val="20000"/>
-              </a:spcBef>
-              <a:buFont typeface="Arial" pitchFamily="34" charset="0"/>
-              <a:buChar char="•"/>
-              <a:defRPr sz="2000" kern="1200">
-                <a:solidFill>
-                  <a:schemeClr val="tx1"/>
-                </a:solidFill>
-                <a:latin typeface="+mn-lt"/>
-                <a:ea typeface="+mn-ea"/>
-                <a:cs typeface="+mn-cs"/>
-              </a:defRPr>
-            </a:lvl8pPr>
-            <a:lvl9pPr marL="3886200" indent="-228600" algn="l" defTabSz="914400" rtl="0" eaLnBrk="1" latinLnBrk="0" hangingPunct="1">
-              <a:spcBef>
-                <a:spcPct val="20000"/>
-              </a:spcBef>
-              <a:buFont typeface="Arial" pitchFamily="34" charset="0"/>
-              <a:buChar char="•"/>
-              <a:defRPr sz="2000" kern="1200">
-                <a:solidFill>
-                  <a:schemeClr val="tx1"/>
-                </a:solidFill>
-                <a:latin typeface="+mn-lt"/>
-                <a:ea typeface="+mn-ea"/>
-                <a:cs typeface="+mn-cs"/>
-              </a:defRPr>
-            </a:lvl9pPr>
-          </a:lstStyle>
-          <a:p>
-            <a:r>
-              <a:rPr lang="en-US"/>
-              <a:t> </a:t>
-            </a:r>
-            <a:endParaRPr lang="en-US" dirty="0"/>
+          <a:bodyPr rtlCol="0" anchor="ctr"/>
+          <a:lstStyle/>
+          <a:p>
+            <a:pPr algn="ctr"/>
+            <a:endParaRPr lang="en-US"/>
           </a:p>
         </p:txBody>
       </p:sp>
@@ -14958,13 +14950,13 @@
   <p:clrMapOvr>
     <a:masterClrMapping/>
   </p:clrMapOvr>
-  <mc:AlternateContent xmlns:mc="http://schemas.openxmlformats.org/markup-compatibility/2006">
-    <mc:Choice xmlns:p159="http://schemas.microsoft.com/office/powerpoint/2015/09/main" Requires="p159">
+  <mc:AlternateContent xmlns:mc="http://schemas.openxmlformats.org/markup-compatibility/2006" xmlns:p159="http://schemas.microsoft.com/office/powerpoint/2015/09/main">
+    <mc:Choice Requires="p159">
       <p:transition spd="slow">
         <p159:morph option="byObject"/>
       </p:transition>
     </mc:Choice>
-    <mc:Fallback>
+    <mc:Fallback xmlns="">
       <p:transition spd="slow">
         <p:fade/>
       </p:transition>
@@ -14998,6 +14990,60 @@
       </p:grpSpPr>
       <p:sp>
         <p:nvSpPr>
+          <p:cNvPr id="6" name="Rounded Rectangle 5">
+            <a:extLst>
+              <a:ext uri="{FF2B5EF4-FFF2-40B4-BE49-F238E27FC236}">
+                <a16:creationId xmlns:a16="http://schemas.microsoft.com/office/drawing/2014/main" id="{EC6F8B0F-64BD-88C6-435B-98F85A45E0BB}"/>
+              </a:ext>
+            </a:extLst>
+          </p:cNvPr>
+          <p:cNvSpPr/>
+          <p:nvPr/>
+        </p:nvSpPr>
+        <p:spPr>
+          <a:xfrm>
+            <a:off x="1148316" y="2700670"/>
+            <a:ext cx="15608596" cy="4359349"/>
+          </a:xfrm>
+          <a:prstGeom prst="roundRect">
+            <a:avLst/>
+          </a:prstGeom>
+          <a:solidFill>
+            <a:schemeClr val="bg1">
+              <a:lumMod val="10000"/>
+            </a:schemeClr>
+          </a:solidFill>
+          <a:ln>
+            <a:noFill/>
+          </a:ln>
+        </p:spPr>
+        <p:style>
+          <a:lnRef idx="2">
+            <a:schemeClr val="accent1">
+              <a:shade val="15000"/>
+            </a:schemeClr>
+          </a:lnRef>
+          <a:fillRef idx="1">
+            <a:schemeClr val="accent1"/>
+          </a:fillRef>
+          <a:effectRef idx="0">
+            <a:schemeClr val="accent1"/>
+          </a:effectRef>
+          <a:fontRef idx="minor">
+            <a:schemeClr val="lt1"/>
+          </a:fontRef>
+        </p:style>
+        <p:txBody>
+          <a:bodyPr rtlCol="0" anchor="ctr"/>
+          <a:lstStyle/>
+          <a:p>
+            <a:pPr algn="ctr"/>
+            <a:endParaRPr lang="en-US"/>
+          </a:p>
+        </p:txBody>
+      </p:sp>
+      <p:sp>
+        <p:nvSpPr>
           <p:cNvPr id="24" name="Title 1">
             <a:extLst>
               <a:ext uri="{FF2B5EF4-FFF2-40B4-BE49-F238E27FC236}">
@@ -15025,39 +15071,6 @@
                 <a:latin typeface="Segoe UI Semibold"/>
               </a:rPr>
               <a:t>Example Query</a:t>
-            </a:r>
-          </a:p>
-        </p:txBody>
-      </p:sp>
-      <p:sp>
-        <p:nvSpPr>
-          <p:cNvPr id="9001" name="Text Placeholder 2">
-            <a:extLst>
-              <a:ext uri="{FF2B5EF4-FFF2-40B4-BE49-F238E27FC236}">
-                <a16:creationId xmlns:a16="http://schemas.microsoft.com/office/drawing/2014/main" id="{0BB2C1B4-0641-433F-BFA9-205AC8180C0D}"/>
-              </a:ext>
-            </a:extLst>
-          </p:cNvPr>
-          <p:cNvSpPr>
-            <a:spLocks noGrp="1"/>
-          </p:cNvSpPr>
-          <p:nvPr>
-            <p:ph type="body" sz="quarter" idx="26"/>
-          </p:nvPr>
-        </p:nvSpPr>
-        <p:spPr>
-          <a:xfrm>
-            <a:off x="1176913" y="2703443"/>
-            <a:ext cx="15585333" cy="4333461"/>
-          </a:xfrm>
-        </p:spPr>
-        <p:txBody>
-          <a:bodyPr/>
-          <a:lstStyle/>
-          <a:p>
-            <a:r>
-              <a:rPr dirty="0"/>
-              <a:t> </a:t>
             </a:r>
           </a:p>
         </p:txBody>
@@ -15734,353 +15747,111 @@
       </p:sp>
       <p:sp>
         <p:nvSpPr>
-          <p:cNvPr id="3" name="Text Placeholder 2">
+          <p:cNvPr id="7" name="Rounded Rectangle 6">
             <a:extLst>
               <a:ext uri="{FF2B5EF4-FFF2-40B4-BE49-F238E27FC236}">
-                <a16:creationId xmlns:a16="http://schemas.microsoft.com/office/drawing/2014/main" id="{BD792173-6A74-742B-6797-D6697828DAE7}"/>
+                <a16:creationId xmlns:a16="http://schemas.microsoft.com/office/drawing/2014/main" id="{CA4601FA-0B1C-EA8B-7418-94A3673908D3}"/>
               </a:ext>
             </a:extLst>
           </p:cNvPr>
-          <p:cNvSpPr txBox="1">
-            <a:spLocks/>
-          </p:cNvSpPr>
+          <p:cNvSpPr/>
           <p:nvPr/>
         </p:nvSpPr>
         <p:spPr>
           <a:xfrm>
-            <a:off x="1311097" y="2921255"/>
-            <a:ext cx="15201021" cy="1164279"/>
+            <a:off x="1825428" y="4890317"/>
+            <a:ext cx="14637144" cy="1278795"/>
           </a:xfrm>
-          <a:prstGeom prst="rect">
+          <a:prstGeom prst="roundRect">
             <a:avLst/>
           </a:prstGeom>
           <a:solidFill>
-            <a:srgbClr val="000000"/>
+            <a:schemeClr val="bg1">
+              <a:lumMod val="10000"/>
+              <a:alpha val="90000"/>
+            </a:schemeClr>
           </a:solidFill>
+          <a:ln>
+            <a:noFill/>
+          </a:ln>
         </p:spPr>
+        <p:style>
+          <a:lnRef idx="2">
+            <a:schemeClr val="accent1">
+              <a:shade val="15000"/>
+            </a:schemeClr>
+          </a:lnRef>
+          <a:fillRef idx="1">
+            <a:schemeClr val="accent1"/>
+          </a:fillRef>
+          <a:effectRef idx="0">
+            <a:schemeClr val="accent1"/>
+          </a:effectRef>
+          <a:fontRef idx="minor">
+            <a:schemeClr val="lt1"/>
+          </a:fontRef>
+        </p:style>
         <p:txBody>
-          <a:bodyPr vert="horz" lIns="91440" tIns="45720" rIns="91440" bIns="45720" rtlCol="0">
-            <a:normAutofit/>
-          </a:bodyPr>
-          <a:lstStyle>
-            <a:lvl1pPr marL="0" indent="0" algn="l" defTabSz="914400" rtl="0" eaLnBrk="1" latinLnBrk="0" hangingPunct="1">
-              <a:spcBef>
-                <a:spcPts val="0"/>
-              </a:spcBef>
-              <a:buFont typeface="Arial" pitchFamily="34" charset="0"/>
-              <a:buNone/>
-              <a:defRPr sz="2400" kern="1200">
-                <a:solidFill>
-                  <a:schemeClr val="bg2"/>
-                </a:solidFill>
-                <a:latin typeface="Consolas" panose="020B0609020204030204" pitchFamily="49" charset="0"/>
-                <a:ea typeface="+mn-ea"/>
-                <a:cs typeface="+mn-cs"/>
-              </a:defRPr>
-            </a:lvl1pPr>
-            <a:lvl2pPr marL="742950" indent="-285750" algn="l" defTabSz="914400" rtl="0" eaLnBrk="1" latinLnBrk="0" hangingPunct="1">
-              <a:spcBef>
-                <a:spcPts val="0"/>
-              </a:spcBef>
-              <a:buFont typeface="Arial" pitchFamily="34" charset="0"/>
-              <a:buChar char="–"/>
-              <a:defRPr sz="2700" kern="1200">
-                <a:solidFill>
-                  <a:srgbClr val="010101"/>
-                </a:solidFill>
-                <a:latin typeface="+mn-lt"/>
-                <a:ea typeface="+mn-ea"/>
-                <a:cs typeface="+mn-cs"/>
-              </a:defRPr>
-            </a:lvl2pPr>
-            <a:lvl3pPr marL="1143000" indent="-228600" algn="l" defTabSz="914400" rtl="0" eaLnBrk="1" latinLnBrk="0" hangingPunct="1">
-              <a:spcBef>
-                <a:spcPts val="0"/>
-              </a:spcBef>
-              <a:buFont typeface="Arial" pitchFamily="34" charset="0"/>
-              <a:buChar char="•"/>
-              <a:defRPr sz="2400" kern="1200">
-                <a:solidFill>
-                  <a:srgbClr val="010101"/>
-                </a:solidFill>
-                <a:latin typeface="+mn-lt"/>
-                <a:ea typeface="+mn-ea"/>
-                <a:cs typeface="+mn-cs"/>
-              </a:defRPr>
-            </a:lvl3pPr>
-            <a:lvl4pPr marL="1600200" indent="-228600" algn="l" defTabSz="914400" rtl="0" eaLnBrk="1" latinLnBrk="0" hangingPunct="1">
-              <a:spcBef>
-                <a:spcPts val="0"/>
-              </a:spcBef>
-              <a:buFont typeface="Arial" pitchFamily="34" charset="0"/>
-              <a:buChar char="–"/>
-              <a:defRPr sz="2100" kern="1200">
-                <a:solidFill>
-                  <a:srgbClr val="010101"/>
-                </a:solidFill>
-                <a:latin typeface="+mn-lt"/>
-                <a:ea typeface="+mn-ea"/>
-                <a:cs typeface="+mn-cs"/>
-              </a:defRPr>
-            </a:lvl4pPr>
-            <a:lvl5pPr marL="2057400" indent="-228600" algn="l" defTabSz="914400" rtl="0" eaLnBrk="1" latinLnBrk="0" hangingPunct="1">
-              <a:spcBef>
-                <a:spcPts val="0"/>
-              </a:spcBef>
-              <a:buFont typeface="Arial" pitchFamily="34" charset="0"/>
-              <a:buChar char="»"/>
-              <a:defRPr sz="2100" kern="1200">
-                <a:solidFill>
-                  <a:srgbClr val="010101"/>
-                </a:solidFill>
-                <a:latin typeface="+mn-lt"/>
-                <a:ea typeface="+mn-ea"/>
-                <a:cs typeface="+mn-cs"/>
-              </a:defRPr>
-            </a:lvl5pPr>
-            <a:lvl6pPr marL="2514600" indent="-228600" algn="l" defTabSz="914400" rtl="0" eaLnBrk="1" latinLnBrk="0" hangingPunct="1">
-              <a:spcBef>
-                <a:spcPct val="20000"/>
-              </a:spcBef>
-              <a:buFont typeface="Arial" pitchFamily="34" charset="0"/>
-              <a:buChar char="•"/>
-              <a:defRPr sz="2000" kern="1200">
-                <a:solidFill>
-                  <a:schemeClr val="tx1"/>
-                </a:solidFill>
-                <a:latin typeface="+mn-lt"/>
-                <a:ea typeface="+mn-ea"/>
-                <a:cs typeface="+mn-cs"/>
-              </a:defRPr>
-            </a:lvl6pPr>
-            <a:lvl7pPr marL="2971800" indent="-228600" algn="l" defTabSz="914400" rtl="0" eaLnBrk="1" latinLnBrk="0" hangingPunct="1">
-              <a:spcBef>
-                <a:spcPct val="20000"/>
-              </a:spcBef>
-              <a:buFont typeface="Arial" pitchFamily="34" charset="0"/>
-              <a:buChar char="•"/>
-              <a:defRPr sz="2000" kern="1200">
-                <a:solidFill>
-                  <a:schemeClr val="tx1"/>
-                </a:solidFill>
-                <a:latin typeface="+mn-lt"/>
-                <a:ea typeface="+mn-ea"/>
-                <a:cs typeface="+mn-cs"/>
-              </a:defRPr>
-            </a:lvl7pPr>
-            <a:lvl8pPr marL="3429000" indent="-228600" algn="l" defTabSz="914400" rtl="0" eaLnBrk="1" latinLnBrk="0" hangingPunct="1">
-              <a:spcBef>
-                <a:spcPct val="20000"/>
-              </a:spcBef>
-              <a:buFont typeface="Arial" pitchFamily="34" charset="0"/>
-              <a:buChar char="•"/>
-              <a:defRPr sz="2000" kern="1200">
-                <a:solidFill>
-                  <a:schemeClr val="tx1"/>
-                </a:solidFill>
-                <a:latin typeface="+mn-lt"/>
-                <a:ea typeface="+mn-ea"/>
-                <a:cs typeface="+mn-cs"/>
-              </a:defRPr>
-            </a:lvl8pPr>
-            <a:lvl9pPr marL="3886200" indent="-228600" algn="l" defTabSz="914400" rtl="0" eaLnBrk="1" latinLnBrk="0" hangingPunct="1">
-              <a:spcBef>
-                <a:spcPct val="20000"/>
-              </a:spcBef>
-              <a:buFont typeface="Arial" pitchFamily="34" charset="0"/>
-              <a:buChar char="•"/>
-              <a:defRPr sz="2000" kern="1200">
-                <a:solidFill>
-                  <a:schemeClr val="tx1"/>
-                </a:solidFill>
-                <a:latin typeface="+mn-lt"/>
-                <a:ea typeface="+mn-ea"/>
-                <a:cs typeface="+mn-cs"/>
-              </a:defRPr>
-            </a:lvl9pPr>
-          </a:lstStyle>
-          <a:p>
-            <a:r>
-              <a:rPr lang="en-US"/>
-              <a:t> </a:t>
-            </a:r>
-            <a:endParaRPr lang="en-US" dirty="0"/>
+          <a:bodyPr rtlCol="0" anchor="ctr"/>
+          <a:lstStyle/>
+          <a:p>
+            <a:pPr algn="ctr"/>
+            <a:endParaRPr lang="en-US"/>
           </a:p>
         </p:txBody>
       </p:sp>
       <p:sp>
         <p:nvSpPr>
-          <p:cNvPr id="4" name="Text Placeholder 2">
+          <p:cNvPr id="17" name="Rounded Rectangle 16">
             <a:extLst>
               <a:ext uri="{FF2B5EF4-FFF2-40B4-BE49-F238E27FC236}">
-                <a16:creationId xmlns:a16="http://schemas.microsoft.com/office/drawing/2014/main" id="{AE0DC083-91C4-F32D-C5ED-647D51ABDF8B}"/>
+                <a16:creationId xmlns:a16="http://schemas.microsoft.com/office/drawing/2014/main" id="{F6C195F6-C386-5669-1A66-AE15F8A398E5}"/>
               </a:ext>
             </a:extLst>
           </p:cNvPr>
-          <p:cNvSpPr txBox="1">
-            <a:spLocks/>
-          </p:cNvSpPr>
+          <p:cNvSpPr/>
           <p:nvPr/>
         </p:nvSpPr>
         <p:spPr>
           <a:xfrm>
-            <a:off x="1311097" y="6201467"/>
-            <a:ext cx="15201021" cy="139698"/>
+            <a:off x="1828973" y="2881741"/>
+            <a:ext cx="14637144" cy="1278795"/>
           </a:xfrm>
-          <a:prstGeom prst="rect">
+          <a:prstGeom prst="roundRect">
             <a:avLst/>
           </a:prstGeom>
           <a:solidFill>
-            <a:srgbClr val="000000"/>
+            <a:schemeClr val="bg1">
+              <a:lumMod val="10000"/>
+              <a:alpha val="90000"/>
+            </a:schemeClr>
           </a:solidFill>
+          <a:ln>
+            <a:noFill/>
+          </a:ln>
         </p:spPr>
+        <p:style>
+          <a:lnRef idx="2">
+            <a:schemeClr val="accent1">
+              <a:shade val="15000"/>
+            </a:schemeClr>
+          </a:lnRef>
+          <a:fillRef idx="1">
+            <a:schemeClr val="accent1"/>
+          </a:fillRef>
+          <a:effectRef idx="0">
+            <a:schemeClr val="accent1"/>
+          </a:effectRef>
+          <a:fontRef idx="minor">
+            <a:schemeClr val="lt1"/>
+          </a:fontRef>
+        </p:style>
         <p:txBody>
-          <a:bodyPr vert="horz" lIns="91440" tIns="45720" rIns="91440" bIns="45720" rtlCol="0">
-            <a:normAutofit fontScale="25000" lnSpcReduction="20000"/>
-          </a:bodyPr>
-          <a:lstStyle>
-            <a:lvl1pPr marL="0" indent="0" algn="l" defTabSz="914400" rtl="0" eaLnBrk="1" latinLnBrk="0" hangingPunct="1">
-              <a:spcBef>
-                <a:spcPts val="0"/>
-              </a:spcBef>
-              <a:buFont typeface="Arial" pitchFamily="34" charset="0"/>
-              <a:buNone/>
-              <a:defRPr sz="2400" kern="1200">
-                <a:solidFill>
-                  <a:schemeClr val="bg2"/>
-                </a:solidFill>
-                <a:latin typeface="Consolas" panose="020B0609020204030204" pitchFamily="49" charset="0"/>
-                <a:ea typeface="+mn-ea"/>
-                <a:cs typeface="+mn-cs"/>
-              </a:defRPr>
-            </a:lvl1pPr>
-            <a:lvl2pPr marL="742950" indent="-285750" algn="l" defTabSz="914400" rtl="0" eaLnBrk="1" latinLnBrk="0" hangingPunct="1">
-              <a:spcBef>
-                <a:spcPts val="0"/>
-              </a:spcBef>
-              <a:buFont typeface="Arial" pitchFamily="34" charset="0"/>
-              <a:buChar char="–"/>
-              <a:defRPr sz="2700" kern="1200">
-                <a:solidFill>
-                  <a:srgbClr val="010101"/>
-                </a:solidFill>
-                <a:latin typeface="+mn-lt"/>
-                <a:ea typeface="+mn-ea"/>
-                <a:cs typeface="+mn-cs"/>
-              </a:defRPr>
-            </a:lvl2pPr>
-            <a:lvl3pPr marL="1143000" indent="-228600" algn="l" defTabSz="914400" rtl="0" eaLnBrk="1" latinLnBrk="0" hangingPunct="1">
-              <a:spcBef>
-                <a:spcPts val="0"/>
-              </a:spcBef>
-              <a:buFont typeface="Arial" pitchFamily="34" charset="0"/>
-              <a:buChar char="•"/>
-              <a:defRPr sz="2400" kern="1200">
-                <a:solidFill>
-                  <a:srgbClr val="010101"/>
-                </a:solidFill>
-                <a:latin typeface="+mn-lt"/>
-                <a:ea typeface="+mn-ea"/>
-                <a:cs typeface="+mn-cs"/>
-              </a:defRPr>
-            </a:lvl3pPr>
-            <a:lvl4pPr marL="1600200" indent="-228600" algn="l" defTabSz="914400" rtl="0" eaLnBrk="1" latinLnBrk="0" hangingPunct="1">
-              <a:spcBef>
-                <a:spcPts val="0"/>
-              </a:spcBef>
-              <a:buFont typeface="Arial" pitchFamily="34" charset="0"/>
-              <a:buChar char="–"/>
-              <a:defRPr sz="2100" kern="1200">
-                <a:solidFill>
-                  <a:srgbClr val="010101"/>
-                </a:solidFill>
-                <a:latin typeface="+mn-lt"/>
-                <a:ea typeface="+mn-ea"/>
-                <a:cs typeface="+mn-cs"/>
-              </a:defRPr>
-            </a:lvl4pPr>
-            <a:lvl5pPr marL="2057400" indent="-228600" algn="l" defTabSz="914400" rtl="0" eaLnBrk="1" latinLnBrk="0" hangingPunct="1">
-              <a:spcBef>
-                <a:spcPts val="0"/>
-              </a:spcBef>
-              <a:buFont typeface="Arial" pitchFamily="34" charset="0"/>
-              <a:buChar char="»"/>
-              <a:defRPr sz="2100" kern="1200">
-                <a:solidFill>
-                  <a:srgbClr val="010101"/>
-                </a:solidFill>
-                <a:latin typeface="+mn-lt"/>
-                <a:ea typeface="+mn-ea"/>
-                <a:cs typeface="+mn-cs"/>
-              </a:defRPr>
-            </a:lvl5pPr>
-            <a:lvl6pPr marL="2514600" indent="-228600" algn="l" defTabSz="914400" rtl="0" eaLnBrk="1" latinLnBrk="0" hangingPunct="1">
-              <a:spcBef>
-                <a:spcPct val="20000"/>
-              </a:spcBef>
-              <a:buFont typeface="Arial" pitchFamily="34" charset="0"/>
-              <a:buChar char="•"/>
-              <a:defRPr sz="2000" kern="1200">
-                <a:solidFill>
-                  <a:schemeClr val="tx1"/>
-                </a:solidFill>
-                <a:latin typeface="+mn-lt"/>
-                <a:ea typeface="+mn-ea"/>
-                <a:cs typeface="+mn-cs"/>
-              </a:defRPr>
-            </a:lvl6pPr>
-            <a:lvl7pPr marL="2971800" indent="-228600" algn="l" defTabSz="914400" rtl="0" eaLnBrk="1" latinLnBrk="0" hangingPunct="1">
-              <a:spcBef>
-                <a:spcPct val="20000"/>
-              </a:spcBef>
-              <a:buFont typeface="Arial" pitchFamily="34" charset="0"/>
-              <a:buChar char="•"/>
-              <a:defRPr sz="2000" kern="1200">
-                <a:solidFill>
-                  <a:schemeClr val="tx1"/>
-                </a:solidFill>
-                <a:latin typeface="+mn-lt"/>
-                <a:ea typeface="+mn-ea"/>
-                <a:cs typeface="+mn-cs"/>
-              </a:defRPr>
-            </a:lvl7pPr>
-            <a:lvl8pPr marL="3429000" indent="-228600" algn="l" defTabSz="914400" rtl="0" eaLnBrk="1" latinLnBrk="0" hangingPunct="1">
-              <a:spcBef>
-                <a:spcPct val="20000"/>
-              </a:spcBef>
-              <a:buFont typeface="Arial" pitchFamily="34" charset="0"/>
-              <a:buChar char="•"/>
-              <a:defRPr sz="2000" kern="1200">
-                <a:solidFill>
-                  <a:schemeClr val="tx1"/>
-                </a:solidFill>
-                <a:latin typeface="+mn-lt"/>
-                <a:ea typeface="+mn-ea"/>
-                <a:cs typeface="+mn-cs"/>
-              </a:defRPr>
-            </a:lvl8pPr>
-            <a:lvl9pPr marL="3886200" indent="-228600" algn="l" defTabSz="914400" rtl="0" eaLnBrk="1" latinLnBrk="0" hangingPunct="1">
-              <a:spcBef>
-                <a:spcPct val="20000"/>
-              </a:spcBef>
-              <a:buFont typeface="Arial" pitchFamily="34" charset="0"/>
-              <a:buChar char="•"/>
-              <a:defRPr sz="2000" kern="1200">
-                <a:solidFill>
-                  <a:schemeClr val="tx1"/>
-                </a:solidFill>
-                <a:latin typeface="+mn-lt"/>
-                <a:ea typeface="+mn-ea"/>
-                <a:cs typeface="+mn-cs"/>
-              </a:defRPr>
-            </a:lvl9pPr>
-          </a:lstStyle>
-          <a:p>
-            <a:r>
-              <a:rPr lang="en-US"/>
-              <a:t> </a:t>
-            </a:r>
-            <a:endParaRPr lang="en-US" dirty="0"/>
+          <a:bodyPr rtlCol="0" anchor="ctr"/>
+          <a:lstStyle/>
+          <a:p>
+            <a:pPr algn="ctr"/>
+            <a:endParaRPr lang="en-US"/>
           </a:p>
         </p:txBody>
       </p:sp>
@@ -16088,6 +15859,921 @@
     <p:extLst>
       <p:ext uri="{BB962C8B-B14F-4D97-AF65-F5344CB8AC3E}">
         <p14:creationId xmlns:p14="http://schemas.microsoft.com/office/powerpoint/2010/main" val="3690661129"/>
+      </p:ext>
+    </p:extLst>
+  </p:cSld>
+  <p:clrMapOvr>
+    <a:masterClrMapping/>
+  </p:clrMapOvr>
+  <mc:AlternateContent xmlns:mc="http://schemas.openxmlformats.org/markup-compatibility/2006" xmlns:p159="http://schemas.microsoft.com/office/powerpoint/2015/09/main">
+    <mc:Choice Requires="p159">
+      <p:transition spd="slow">
+        <p159:morph option="byObject"/>
+      </p:transition>
+    </mc:Choice>
+    <mc:Fallback xmlns="">
+      <p:transition spd="slow">
+        <p:fade/>
+      </p:transition>
+    </mc:Fallback>
+  </mc:AlternateContent>
+</p:sld>
+</file>
+
+<file path=ppt/slides/slide18.xml><?xml version="1.0" encoding="utf-8"?>
+<p:sld xmlns:a="http://schemas.openxmlformats.org/drawingml/2006/main" xmlns:r="http://schemas.openxmlformats.org/officeDocument/2006/relationships" xmlns:p="http://schemas.openxmlformats.org/presentationml/2006/main">
+  <p:cSld>
+    <p:spTree>
+      <p:nvGrpSpPr>
+        <p:cNvPr id="1" name="">
+          <a:extLst>
+            <a:ext uri="{FF2B5EF4-FFF2-40B4-BE49-F238E27FC236}">
+              <a16:creationId xmlns:a16="http://schemas.microsoft.com/office/drawing/2014/main" id="{DD10BF1D-E5F4-C810-2337-CC84D711538E}"/>
+            </a:ext>
+          </a:extLst>
+        </p:cNvPr>
+        <p:cNvGrpSpPr/>
+        <p:nvPr/>
+      </p:nvGrpSpPr>
+      <p:grpSpPr>
+        <a:xfrm>
+          <a:off x="0" y="0"/>
+          <a:ext cx="0" cy="0"/>
+          <a:chOff x="0" y="0"/>
+          <a:chExt cx="0" cy="0"/>
+        </a:xfrm>
+      </p:grpSpPr>
+      <p:sp>
+        <p:nvSpPr>
+          <p:cNvPr id="6" name="Rounded Rectangle 5">
+            <a:extLst>
+              <a:ext uri="{FF2B5EF4-FFF2-40B4-BE49-F238E27FC236}">
+                <a16:creationId xmlns:a16="http://schemas.microsoft.com/office/drawing/2014/main" id="{58A784B9-CAE5-8EF9-B688-5E8E5B24C41B}"/>
+              </a:ext>
+            </a:extLst>
+          </p:cNvPr>
+          <p:cNvSpPr/>
+          <p:nvPr/>
+        </p:nvSpPr>
+        <p:spPr>
+          <a:xfrm>
+            <a:off x="1148316" y="2700670"/>
+            <a:ext cx="15608596" cy="4359349"/>
+          </a:xfrm>
+          <a:prstGeom prst="roundRect">
+            <a:avLst/>
+          </a:prstGeom>
+          <a:solidFill>
+            <a:schemeClr val="bg1">
+              <a:lumMod val="10000"/>
+            </a:schemeClr>
+          </a:solidFill>
+          <a:ln>
+            <a:noFill/>
+          </a:ln>
+        </p:spPr>
+        <p:style>
+          <a:lnRef idx="2">
+            <a:schemeClr val="accent1">
+              <a:shade val="15000"/>
+            </a:schemeClr>
+          </a:lnRef>
+          <a:fillRef idx="1">
+            <a:schemeClr val="accent1"/>
+          </a:fillRef>
+          <a:effectRef idx="0">
+            <a:schemeClr val="accent1"/>
+          </a:effectRef>
+          <a:fontRef idx="minor">
+            <a:schemeClr val="lt1"/>
+          </a:fontRef>
+        </p:style>
+        <p:txBody>
+          <a:bodyPr rtlCol="0" anchor="ctr"/>
+          <a:lstStyle/>
+          <a:p>
+            <a:pPr algn="ctr"/>
+            <a:endParaRPr lang="en-US"/>
+          </a:p>
+        </p:txBody>
+      </p:sp>
+      <p:sp>
+        <p:nvSpPr>
+          <p:cNvPr id="24" name="Title 1">
+            <a:extLst>
+              <a:ext uri="{FF2B5EF4-FFF2-40B4-BE49-F238E27FC236}">
+                <a16:creationId xmlns:a16="http://schemas.microsoft.com/office/drawing/2014/main" id="{4E09E3DB-7262-6D3C-D2E7-4675BF21BBE1}"/>
+              </a:ext>
+            </a:extLst>
+          </p:cNvPr>
+          <p:cNvSpPr>
+            <a:spLocks noGrp="1"/>
+          </p:cNvSpPr>
+          <p:nvPr>
+            <p:ph type="title"/>
+          </p:nvPr>
+        </p:nvSpPr>
+        <p:spPr/>
+        <p:txBody>
+          <a:bodyPr/>
+          <a:lstStyle/>
+          <a:p>
+            <a:r>
+              <a:rPr>
+                <a:solidFill>
+                  <a:srgbClr val="F7F9FF"/>
+                </a:solidFill>
+                <a:latin typeface="Segoe UI Semibold"/>
+              </a:rPr>
+              <a:t>Example Query</a:t>
+            </a:r>
+          </a:p>
+        </p:txBody>
+      </p:sp>
+      <p:sp>
+        <p:nvSpPr>
+          <p:cNvPr id="9" name="TextBox 8">
+            <a:extLst>
+              <a:ext uri="{FF2B5EF4-FFF2-40B4-BE49-F238E27FC236}">
+                <a16:creationId xmlns:a16="http://schemas.microsoft.com/office/drawing/2014/main" id="{20B4CB03-01BB-D4BC-BBAA-C25D0734DFDB}"/>
+              </a:ext>
+            </a:extLst>
+          </p:cNvPr>
+          <p:cNvSpPr txBox="1"/>
+          <p:nvPr/>
+        </p:nvSpPr>
+        <p:spPr>
+          <a:xfrm>
+            <a:off x="2119767" y="3450040"/>
+            <a:ext cx="14857136" cy="2723823"/>
+          </a:xfrm>
+          <a:prstGeom prst="rect">
+            <a:avLst/>
+          </a:prstGeom>
+          <a:noFill/>
+        </p:spPr>
+        <p:txBody>
+          <a:bodyPr wrap="square">
+            <a:spAutoFit/>
+          </a:bodyPr>
+          <a:lstStyle/>
+          <a:p>
+            <a:pPr>
+              <a:buNone/>
+            </a:pPr>
+            <a:endParaRPr lang="en-US" sz="4200" b="0" dirty="0">
+              <a:solidFill>
+                <a:srgbClr val="8C8C8C"/>
+              </a:solidFill>
+              <a:effectLst/>
+              <a:latin typeface="Cascadia Code" panose="020B0609020000020004" pitchFamily="34" charset="0"/>
+            </a:endParaRPr>
+          </a:p>
+          <a:p>
+            <a:pPr>
+              <a:buNone/>
+            </a:pPr>
+            <a:r>
+              <a:rPr lang="en-US" sz="4200" b="0" dirty="0">
+                <a:solidFill>
+                  <a:srgbClr val="8C8C8C"/>
+                </a:solidFill>
+                <a:effectLst/>
+                <a:latin typeface="Cascadia Code" panose="020B0609020000020004" pitchFamily="34" charset="0"/>
+              </a:rPr>
+              <a:t>| </a:t>
+            </a:r>
+            <a:r>
+              <a:rPr lang="en-US" sz="4200" dirty="0">
+                <a:solidFill>
+                  <a:srgbClr val="C586C0"/>
+                </a:solidFill>
+                <a:latin typeface="Cascadia Code" panose="020B0609020000020004" pitchFamily="34" charset="0"/>
+              </a:rPr>
+              <a:t>     </a:t>
+            </a:r>
+            <a:r>
+              <a:rPr lang="en-US" sz="4200" b="0" dirty="0">
+                <a:solidFill>
+                  <a:srgbClr val="8C8C8C"/>
+                </a:solidFill>
+                <a:effectLst/>
+                <a:latin typeface="Cascadia Code" panose="020B0609020000020004" pitchFamily="34" charset="0"/>
+              </a:rPr>
+              <a:t> </a:t>
+            </a:r>
+            <a:r>
+              <a:rPr lang="en-US" sz="4200" b="0" dirty="0">
+                <a:solidFill>
+                  <a:srgbClr val="569CD6"/>
+                </a:solidFill>
+                <a:effectLst/>
+                <a:latin typeface="Cascadia Code" panose="020B0609020000020004" pitchFamily="34" charset="0"/>
+              </a:rPr>
+              <a:t>type</a:t>
+            </a:r>
+            <a:r>
+              <a:rPr lang="en-US" sz="4200" b="0" dirty="0">
+                <a:solidFill>
+                  <a:srgbClr val="8C8C8C"/>
+                </a:solidFill>
+                <a:effectLst/>
+                <a:latin typeface="Cascadia Code" panose="020B0609020000020004" pitchFamily="34" charset="0"/>
+              </a:rPr>
+              <a:t> </a:t>
+            </a:r>
+            <a:r>
+              <a:rPr lang="en-US" sz="4200" b="0" dirty="0">
+                <a:solidFill>
+                  <a:schemeClr val="tx1"/>
+                </a:solidFill>
+                <a:effectLst/>
+                <a:latin typeface="Cascadia Code" panose="020B0609020000020004" pitchFamily="34" charset="0"/>
+              </a:rPr>
+              <a:t>==</a:t>
+            </a:r>
+            <a:r>
+              <a:rPr lang="en-US" sz="4200" b="0" dirty="0">
+                <a:solidFill>
+                  <a:srgbClr val="8C8C8C"/>
+                </a:solidFill>
+                <a:effectLst/>
+                <a:latin typeface="Cascadia Code" panose="020B0609020000020004" pitchFamily="34" charset="0"/>
+              </a:rPr>
+              <a:t> </a:t>
+            </a:r>
+            <a:r>
+              <a:rPr lang="en-US" sz="4200" dirty="0">
+                <a:solidFill>
+                  <a:srgbClr val="CE9178"/>
+                </a:solidFill>
+                <a:latin typeface="Cascadia Code" panose="020B0609020000020004" pitchFamily="34" charset="0"/>
+              </a:rPr>
+              <a:t>‘</a:t>
+            </a:r>
+            <a:r>
+              <a:rPr lang="en-US" sz="4200" b="0" dirty="0" err="1">
+                <a:solidFill>
+                  <a:srgbClr val="CE9178"/>
+                </a:solidFill>
+                <a:effectLst/>
+                <a:latin typeface="Cascadia Code" panose="020B0609020000020004" pitchFamily="34" charset="0"/>
+              </a:rPr>
+              <a:t>microsoft.keyvault</a:t>
+            </a:r>
+            <a:r>
+              <a:rPr lang="en-US" sz="4200" b="0" dirty="0">
+                <a:solidFill>
+                  <a:srgbClr val="CE9178"/>
+                </a:solidFill>
+                <a:effectLst/>
+                <a:latin typeface="Cascadia Code" panose="020B0609020000020004" pitchFamily="34" charset="0"/>
+              </a:rPr>
+              <a:t>/vaults’</a:t>
+            </a:r>
+          </a:p>
+          <a:p>
+            <a:pPr>
+              <a:buNone/>
+            </a:pPr>
+            <a:r>
+              <a:rPr lang="en-US" sz="4200" b="0" dirty="0">
+                <a:solidFill>
+                  <a:srgbClr val="569CD6"/>
+                </a:solidFill>
+                <a:effectLst/>
+                <a:latin typeface="Cascadia Code" panose="020B0609020000020004" pitchFamily="34" charset="0"/>
+              </a:rPr>
+              <a:t>            name</a:t>
+            </a:r>
+            <a:r>
+              <a:rPr lang="en-US" sz="4200" b="0" dirty="0">
+                <a:solidFill>
+                  <a:srgbClr val="C586C0"/>
+                </a:solidFill>
+                <a:effectLst/>
+                <a:latin typeface="Cascadia Code" panose="020B0609020000020004" pitchFamily="34" charset="0"/>
+              </a:rPr>
+              <a:t>        </a:t>
+            </a:r>
+            <a:r>
+              <a:rPr lang="en-US" sz="4200" b="0" dirty="0">
+                <a:solidFill>
+                  <a:srgbClr val="8C8C8C"/>
+                </a:solidFill>
+                <a:effectLst/>
+                <a:latin typeface="Cascadia Code" panose="020B0609020000020004" pitchFamily="34" charset="0"/>
+              </a:rPr>
+              <a:t>  </a:t>
+            </a:r>
+            <a:r>
+              <a:rPr lang="en-US" sz="4200" dirty="0">
+                <a:solidFill>
+                  <a:srgbClr val="CE9178"/>
+                </a:solidFill>
+                <a:latin typeface="Cascadia Code" panose="020B0609020000020004" pitchFamily="34" charset="0"/>
+              </a:rPr>
+              <a:t>‘</a:t>
+            </a:r>
+            <a:r>
+              <a:rPr lang="en-US" sz="4200" b="0" dirty="0" err="1">
+                <a:solidFill>
+                  <a:srgbClr val="CE9178"/>
+                </a:solidFill>
+                <a:effectLst/>
+                <a:latin typeface="Cascadia Code" panose="020B0609020000020004" pitchFamily="34" charset="0"/>
+              </a:rPr>
+              <a:t>kv</a:t>
+            </a:r>
+            <a:r>
+              <a:rPr lang="en-US" sz="4200" b="0" dirty="0">
+                <a:solidFill>
+                  <a:srgbClr val="CE9178"/>
+                </a:solidFill>
+                <a:effectLst/>
+                <a:latin typeface="Cascadia Code" panose="020B0609020000020004" pitchFamily="34" charset="0"/>
+              </a:rPr>
+              <a:t>’</a:t>
+            </a:r>
+          </a:p>
+          <a:p>
+            <a:pPr>
+              <a:buNone/>
+            </a:pPr>
+            <a:r>
+              <a:rPr lang="en-US" sz="4200" b="0" dirty="0">
+                <a:solidFill>
+                  <a:srgbClr val="569CD6"/>
+                </a:solidFill>
+                <a:effectLst/>
+                <a:latin typeface="Cascadia Code" panose="020B0609020000020004" pitchFamily="34" charset="0"/>
+              </a:rPr>
+              <a:t>		    </a:t>
+            </a:r>
+            <a:r>
+              <a:rPr lang="en-US" sz="4200" b="0" dirty="0">
+                <a:solidFill>
+                  <a:srgbClr val="8C8C8C"/>
+                </a:solidFill>
+                <a:effectLst/>
+                <a:latin typeface="Cascadia Code" panose="020B0609020000020004" pitchFamily="34" charset="0"/>
+              </a:rPr>
+              <a:t> </a:t>
+            </a:r>
+            <a:r>
+              <a:rPr lang="en-US" sz="4200" b="0" dirty="0">
+                <a:solidFill>
+                  <a:srgbClr val="DCDCAA"/>
+                </a:solidFill>
+                <a:effectLst/>
+                <a:latin typeface="Cascadia Code" panose="020B0609020000020004" pitchFamily="34" charset="0"/>
+              </a:rPr>
+              <a:t>     </a:t>
+            </a:r>
+            <a:r>
+              <a:rPr lang="en-US" sz="4200" b="0" dirty="0">
+                <a:solidFill>
+                  <a:schemeClr val="tx1"/>
+                </a:solidFill>
+                <a:effectLst/>
+                <a:latin typeface="Cascadia Code" panose="020B0609020000020004" pitchFamily="34" charset="0"/>
+              </a:rPr>
+              <a:t>tags</a:t>
+            </a:r>
+            <a:r>
+              <a:rPr lang="en-US" sz="4200" b="0" dirty="0">
+                <a:solidFill>
+                  <a:srgbClr val="6A9955"/>
+                </a:solidFill>
+                <a:effectLst/>
+                <a:latin typeface="Cascadia Code" panose="020B0609020000020004" pitchFamily="34" charset="0"/>
+              </a:rPr>
+              <a:t>[</a:t>
+            </a:r>
+            <a:r>
+              <a:rPr lang="en-US" sz="4200" dirty="0">
+                <a:solidFill>
+                  <a:srgbClr val="CE9178"/>
+                </a:solidFill>
+                <a:latin typeface="Cascadia Code" panose="020B0609020000020004" pitchFamily="34" charset="0"/>
+              </a:rPr>
+              <a:t>‘</a:t>
+            </a:r>
+            <a:r>
+              <a:rPr lang="en-US" sz="4200" b="0" dirty="0">
+                <a:solidFill>
+                  <a:srgbClr val="CE9178"/>
+                </a:solidFill>
+                <a:effectLst/>
+                <a:latin typeface="Cascadia Code" panose="020B0609020000020004" pitchFamily="34" charset="0"/>
+              </a:rPr>
+              <a:t>env</a:t>
+            </a:r>
+            <a:r>
+              <a:rPr lang="en-US" sz="4200" dirty="0">
+                <a:solidFill>
+                  <a:srgbClr val="CE9178"/>
+                </a:solidFill>
+                <a:latin typeface="Cascadia Code" panose="020B0609020000020004" pitchFamily="34" charset="0"/>
+              </a:rPr>
+              <a:t>’</a:t>
+            </a:r>
+            <a:r>
+              <a:rPr lang="en-US" sz="4200" b="0" dirty="0">
+                <a:solidFill>
+                  <a:srgbClr val="6A9955"/>
+                </a:solidFill>
+                <a:effectLst/>
+                <a:latin typeface="Cascadia Code" panose="020B0609020000020004" pitchFamily="34" charset="0"/>
+              </a:rPr>
+              <a:t>]</a:t>
+            </a:r>
+            <a:r>
+              <a:rPr lang="en-US" sz="4200" b="0" dirty="0">
+                <a:solidFill>
+                  <a:srgbClr val="8C8C8C"/>
+                </a:solidFill>
+                <a:effectLst/>
+                <a:latin typeface="Cascadia Code" panose="020B0609020000020004" pitchFamily="34" charset="0"/>
+              </a:rPr>
+              <a:t> </a:t>
+            </a:r>
+            <a:r>
+              <a:rPr lang="en-US" sz="4200" b="0" dirty="0">
+                <a:solidFill>
+                  <a:schemeClr val="tx1"/>
+                </a:solidFill>
+                <a:effectLst/>
+                <a:latin typeface="Cascadia Code" panose="020B0609020000020004" pitchFamily="34" charset="0"/>
+              </a:rPr>
+              <a:t>==</a:t>
+            </a:r>
+            <a:r>
+              <a:rPr lang="en-US" sz="4200" b="0" dirty="0">
+                <a:solidFill>
+                  <a:srgbClr val="8C8C8C"/>
+                </a:solidFill>
+                <a:effectLst/>
+                <a:latin typeface="Cascadia Code" panose="020B0609020000020004" pitchFamily="34" charset="0"/>
+              </a:rPr>
+              <a:t> </a:t>
+            </a:r>
+            <a:r>
+              <a:rPr lang="en-US" sz="4200" dirty="0">
+                <a:solidFill>
+                  <a:srgbClr val="CE9178"/>
+                </a:solidFill>
+                <a:latin typeface="Cascadia Code" panose="020B0609020000020004" pitchFamily="34" charset="0"/>
+              </a:rPr>
+              <a:t>‘</a:t>
+            </a:r>
+            <a:r>
+              <a:rPr lang="en-US" sz="4200" b="0" dirty="0">
+                <a:solidFill>
+                  <a:srgbClr val="CE9178"/>
+                </a:solidFill>
+                <a:effectLst/>
+                <a:latin typeface="Cascadia Code" panose="020B0609020000020004" pitchFamily="34" charset="0"/>
+              </a:rPr>
+              <a:t>prod’</a:t>
+            </a:r>
+          </a:p>
+        </p:txBody>
+      </p:sp>
+      <p:sp>
+        <p:nvSpPr>
+          <p:cNvPr id="10" name="TextBox 9">
+            <a:extLst>
+              <a:ext uri="{FF2B5EF4-FFF2-40B4-BE49-F238E27FC236}">
+                <a16:creationId xmlns:a16="http://schemas.microsoft.com/office/drawing/2014/main" id="{A0CD9330-DD98-7095-2124-7FDDF8A02901}"/>
+              </a:ext>
+            </a:extLst>
+          </p:cNvPr>
+          <p:cNvSpPr txBox="1"/>
+          <p:nvPr/>
+        </p:nvSpPr>
+        <p:spPr>
+          <a:xfrm>
+            <a:off x="2119768" y="3450040"/>
+            <a:ext cx="3105345" cy="784830"/>
+          </a:xfrm>
+          <a:prstGeom prst="rect">
+            <a:avLst/>
+          </a:prstGeom>
+          <a:noFill/>
+        </p:spPr>
+        <p:txBody>
+          <a:bodyPr wrap="square">
+            <a:spAutoFit/>
+          </a:bodyPr>
+          <a:lstStyle/>
+          <a:p>
+            <a:pPr>
+              <a:buNone/>
+            </a:pPr>
+            <a:r>
+              <a:rPr lang="en-US" sz="4200" b="0" dirty="0">
+                <a:solidFill>
+                  <a:srgbClr val="569CD6"/>
+                </a:solidFill>
+                <a:effectLst/>
+                <a:latin typeface="Cascadia Code" panose="020B0609020000020004" pitchFamily="34" charset="0"/>
+              </a:rPr>
+              <a:t>Resources</a:t>
+            </a:r>
+          </a:p>
+        </p:txBody>
+      </p:sp>
+      <p:sp>
+        <p:nvSpPr>
+          <p:cNvPr id="11" name="TextBox 10">
+            <a:extLst>
+              <a:ext uri="{FF2B5EF4-FFF2-40B4-BE49-F238E27FC236}">
+                <a16:creationId xmlns:a16="http://schemas.microsoft.com/office/drawing/2014/main" id="{353CA74F-B782-EB23-627E-FDD7F844A170}"/>
+              </a:ext>
+            </a:extLst>
+          </p:cNvPr>
+          <p:cNvSpPr txBox="1"/>
+          <p:nvPr/>
+        </p:nvSpPr>
+        <p:spPr>
+          <a:xfrm>
+            <a:off x="2736075" y="4105488"/>
+            <a:ext cx="1948978" cy="784830"/>
+          </a:xfrm>
+          <a:prstGeom prst="rect">
+            <a:avLst/>
+          </a:prstGeom>
+          <a:noFill/>
+        </p:spPr>
+        <p:txBody>
+          <a:bodyPr wrap="square">
+            <a:spAutoFit/>
+          </a:bodyPr>
+          <a:lstStyle/>
+          <a:p>
+            <a:r>
+              <a:rPr lang="en-US" sz="4200" b="0" i="1" dirty="0">
+                <a:solidFill>
+                  <a:srgbClr val="C586C0"/>
+                </a:solidFill>
+                <a:effectLst/>
+                <a:latin typeface="Cascadia Code" panose="020B0609020000020004" pitchFamily="34" charset="0"/>
+              </a:rPr>
+              <a:t>where</a:t>
+            </a:r>
+            <a:endParaRPr lang="en-US" sz="4200" i="1" dirty="0">
+              <a:solidFill>
+                <a:srgbClr val="C586C0"/>
+              </a:solidFill>
+            </a:endParaRPr>
+          </a:p>
+        </p:txBody>
+      </p:sp>
+      <p:sp>
+        <p:nvSpPr>
+          <p:cNvPr id="12" name="TextBox 11">
+            <a:extLst>
+              <a:ext uri="{FF2B5EF4-FFF2-40B4-BE49-F238E27FC236}">
+                <a16:creationId xmlns:a16="http://schemas.microsoft.com/office/drawing/2014/main" id="{FA5C3FC9-CC35-A219-53C9-8BCD7EC0675B}"/>
+              </a:ext>
+            </a:extLst>
+          </p:cNvPr>
+          <p:cNvSpPr txBox="1"/>
+          <p:nvPr/>
+        </p:nvSpPr>
+        <p:spPr>
+          <a:xfrm>
+            <a:off x="7444600" y="4743970"/>
+            <a:ext cx="2920532" cy="784830"/>
+          </a:xfrm>
+          <a:prstGeom prst="rect">
+            <a:avLst/>
+          </a:prstGeom>
+          <a:noFill/>
+        </p:spPr>
+        <p:txBody>
+          <a:bodyPr wrap="square">
+            <a:spAutoFit/>
+          </a:bodyPr>
+          <a:lstStyle/>
+          <a:p>
+            <a:r>
+              <a:rPr lang="en-US" sz="4200" b="0" i="1" dirty="0">
+                <a:solidFill>
+                  <a:srgbClr val="C586C0"/>
+                </a:solidFill>
+                <a:effectLst/>
+                <a:latin typeface="Cascadia Code" panose="020B0609020000020004" pitchFamily="34" charset="0"/>
+              </a:rPr>
+              <a:t>contains </a:t>
+            </a:r>
+            <a:endParaRPr lang="en-US" sz="4200" i="1" dirty="0">
+              <a:solidFill>
+                <a:srgbClr val="C586C0"/>
+              </a:solidFill>
+            </a:endParaRPr>
+          </a:p>
+        </p:txBody>
+      </p:sp>
+      <p:sp>
+        <p:nvSpPr>
+          <p:cNvPr id="13" name="TextBox 12">
+            <a:extLst>
+              <a:ext uri="{FF2B5EF4-FFF2-40B4-BE49-F238E27FC236}">
+                <a16:creationId xmlns:a16="http://schemas.microsoft.com/office/drawing/2014/main" id="{3C6926FE-C351-FDDB-9921-31A2D206C68C}"/>
+              </a:ext>
+            </a:extLst>
+          </p:cNvPr>
+          <p:cNvSpPr txBox="1"/>
+          <p:nvPr/>
+        </p:nvSpPr>
+        <p:spPr>
+          <a:xfrm>
+            <a:off x="5858170" y="5384283"/>
+            <a:ext cx="1555329" cy="784830"/>
+          </a:xfrm>
+          <a:prstGeom prst="rect">
+            <a:avLst/>
+          </a:prstGeom>
+          <a:noFill/>
+        </p:spPr>
+        <p:txBody>
+          <a:bodyPr wrap="square">
+            <a:spAutoFit/>
+          </a:bodyPr>
+          <a:lstStyle/>
+          <a:p>
+            <a:r>
+              <a:rPr lang="en-US" sz="4200" b="0" dirty="0">
+                <a:solidFill>
+                  <a:srgbClr val="569CD6"/>
+                </a:solidFill>
+                <a:effectLst/>
+                <a:latin typeface="Cascadia Code" panose="020B0609020000020004" pitchFamily="34" charset="0"/>
+              </a:rPr>
+              <a:t>not(</a:t>
+            </a:r>
+            <a:endParaRPr lang="en-US" sz="4200" dirty="0">
+              <a:solidFill>
+                <a:srgbClr val="569CD6"/>
+              </a:solidFill>
+            </a:endParaRPr>
+          </a:p>
+        </p:txBody>
+      </p:sp>
+      <p:sp>
+        <p:nvSpPr>
+          <p:cNvPr id="14" name="TextBox 13">
+            <a:extLst>
+              <a:ext uri="{FF2B5EF4-FFF2-40B4-BE49-F238E27FC236}">
+                <a16:creationId xmlns:a16="http://schemas.microsoft.com/office/drawing/2014/main" id="{E6E11991-F148-6DB8-7255-91ED1479F2B4}"/>
+              </a:ext>
+            </a:extLst>
+          </p:cNvPr>
+          <p:cNvSpPr txBox="1"/>
+          <p:nvPr/>
+        </p:nvSpPr>
+        <p:spPr>
+          <a:xfrm>
+            <a:off x="13534346" y="5384283"/>
+            <a:ext cx="666489" cy="784830"/>
+          </a:xfrm>
+          <a:prstGeom prst="rect">
+            <a:avLst/>
+          </a:prstGeom>
+          <a:noFill/>
+        </p:spPr>
+        <p:txBody>
+          <a:bodyPr wrap="square">
+            <a:spAutoFit/>
+          </a:bodyPr>
+          <a:lstStyle/>
+          <a:p>
+            <a:r>
+              <a:rPr lang="en-US" sz="4200" b="0" dirty="0">
+                <a:solidFill>
+                  <a:srgbClr val="569CD6"/>
+                </a:solidFill>
+                <a:effectLst/>
+                <a:latin typeface="Cascadia Code" panose="020B0609020000020004" pitchFamily="34" charset="0"/>
+              </a:rPr>
+              <a:t>)</a:t>
+            </a:r>
+            <a:endParaRPr lang="en-US" sz="4200" dirty="0">
+              <a:solidFill>
+                <a:srgbClr val="569CD6"/>
+              </a:solidFill>
+            </a:endParaRPr>
+          </a:p>
+        </p:txBody>
+      </p:sp>
+      <p:sp>
+        <p:nvSpPr>
+          <p:cNvPr id="15" name="TextBox 14">
+            <a:extLst>
+              <a:ext uri="{FF2B5EF4-FFF2-40B4-BE49-F238E27FC236}">
+                <a16:creationId xmlns:a16="http://schemas.microsoft.com/office/drawing/2014/main" id="{600CDE26-844A-4D5E-84D9-D40FF1D7C271}"/>
+              </a:ext>
+            </a:extLst>
+          </p:cNvPr>
+          <p:cNvSpPr txBox="1"/>
+          <p:nvPr/>
+        </p:nvSpPr>
+        <p:spPr>
+          <a:xfrm>
+            <a:off x="4666980" y="4739374"/>
+            <a:ext cx="1268760" cy="784830"/>
+          </a:xfrm>
+          <a:prstGeom prst="rect">
+            <a:avLst/>
+          </a:prstGeom>
+          <a:noFill/>
+        </p:spPr>
+        <p:txBody>
+          <a:bodyPr wrap="square">
+            <a:spAutoFit/>
+          </a:bodyPr>
+          <a:lstStyle/>
+          <a:p>
+            <a:r>
+              <a:rPr lang="en-US" sz="4200" b="0" dirty="0">
+                <a:solidFill>
+                  <a:srgbClr val="C586C0"/>
+                </a:solidFill>
+                <a:effectLst/>
+                <a:latin typeface="Cascadia Code" panose="020B0609020000020004" pitchFamily="34" charset="0"/>
+              </a:rPr>
+              <a:t>and</a:t>
+            </a:r>
+            <a:endParaRPr lang="en-US" sz="4200" dirty="0">
+              <a:solidFill>
+                <a:srgbClr val="C586C0"/>
+              </a:solidFill>
+            </a:endParaRPr>
+          </a:p>
+        </p:txBody>
+      </p:sp>
+      <p:sp>
+        <p:nvSpPr>
+          <p:cNvPr id="16" name="TextBox 15">
+            <a:extLst>
+              <a:ext uri="{FF2B5EF4-FFF2-40B4-BE49-F238E27FC236}">
+                <a16:creationId xmlns:a16="http://schemas.microsoft.com/office/drawing/2014/main" id="{D396449D-4F1F-7EC6-7BE7-37F6445CA68B}"/>
+              </a:ext>
+            </a:extLst>
+          </p:cNvPr>
+          <p:cNvSpPr txBox="1"/>
+          <p:nvPr/>
+        </p:nvSpPr>
+        <p:spPr>
+          <a:xfrm>
+            <a:off x="4646430" y="5384283"/>
+            <a:ext cx="1268760" cy="784830"/>
+          </a:xfrm>
+          <a:prstGeom prst="rect">
+            <a:avLst/>
+          </a:prstGeom>
+          <a:noFill/>
+        </p:spPr>
+        <p:txBody>
+          <a:bodyPr wrap="square">
+            <a:spAutoFit/>
+          </a:bodyPr>
+          <a:lstStyle/>
+          <a:p>
+            <a:r>
+              <a:rPr lang="en-US" sz="4200" b="0" dirty="0">
+                <a:solidFill>
+                  <a:srgbClr val="C586C0"/>
+                </a:solidFill>
+                <a:effectLst/>
+                <a:latin typeface="Cascadia Code" panose="020B0609020000020004" pitchFamily="34" charset="0"/>
+              </a:rPr>
+              <a:t>and</a:t>
+            </a:r>
+            <a:endParaRPr lang="en-US" sz="4200" dirty="0">
+              <a:solidFill>
+                <a:srgbClr val="C586C0"/>
+              </a:solidFill>
+            </a:endParaRPr>
+          </a:p>
+        </p:txBody>
+      </p:sp>
+      <p:sp>
+        <p:nvSpPr>
+          <p:cNvPr id="7" name="Rounded Rectangle 6">
+            <a:extLst>
+              <a:ext uri="{FF2B5EF4-FFF2-40B4-BE49-F238E27FC236}">
+                <a16:creationId xmlns:a16="http://schemas.microsoft.com/office/drawing/2014/main" id="{0BAC7EAC-7CA4-A7BB-6FE9-DA3896A4F5B0}"/>
+              </a:ext>
+            </a:extLst>
+          </p:cNvPr>
+          <p:cNvSpPr/>
+          <p:nvPr/>
+        </p:nvSpPr>
+        <p:spPr>
+          <a:xfrm>
+            <a:off x="1825428" y="6185059"/>
+            <a:ext cx="14637144" cy="360066"/>
+          </a:xfrm>
+          <a:prstGeom prst="roundRect">
+            <a:avLst/>
+          </a:prstGeom>
+          <a:solidFill>
+            <a:schemeClr val="bg1">
+              <a:lumMod val="10000"/>
+              <a:alpha val="79881"/>
+            </a:schemeClr>
+          </a:solidFill>
+          <a:ln>
+            <a:noFill/>
+          </a:ln>
+        </p:spPr>
+        <p:style>
+          <a:lnRef idx="2">
+            <a:schemeClr val="accent1">
+              <a:shade val="15000"/>
+            </a:schemeClr>
+          </a:lnRef>
+          <a:fillRef idx="1">
+            <a:schemeClr val="accent1"/>
+          </a:fillRef>
+          <a:effectRef idx="0">
+            <a:schemeClr val="accent1"/>
+          </a:effectRef>
+          <a:fontRef idx="minor">
+            <a:schemeClr val="lt1"/>
+          </a:fontRef>
+        </p:style>
+        <p:txBody>
+          <a:bodyPr rtlCol="0" anchor="ctr"/>
+          <a:lstStyle/>
+          <a:p>
+            <a:pPr algn="ctr"/>
+            <a:endParaRPr lang="en-US"/>
+          </a:p>
+        </p:txBody>
+      </p:sp>
+      <p:sp>
+        <p:nvSpPr>
+          <p:cNvPr id="17" name="Rounded Rectangle 16">
+            <a:extLst>
+              <a:ext uri="{FF2B5EF4-FFF2-40B4-BE49-F238E27FC236}">
+                <a16:creationId xmlns:a16="http://schemas.microsoft.com/office/drawing/2014/main" id="{47FB71F2-B05E-896B-59E7-4B0CD0259CF9}"/>
+              </a:ext>
+            </a:extLst>
+          </p:cNvPr>
+          <p:cNvSpPr/>
+          <p:nvPr/>
+        </p:nvSpPr>
+        <p:spPr>
+          <a:xfrm>
+            <a:off x="1828973" y="2881741"/>
+            <a:ext cx="14637144" cy="1987648"/>
+          </a:xfrm>
+          <a:prstGeom prst="roundRect">
+            <a:avLst/>
+          </a:prstGeom>
+          <a:solidFill>
+            <a:schemeClr val="bg1">
+              <a:lumMod val="10000"/>
+              <a:alpha val="90000"/>
+            </a:schemeClr>
+          </a:solidFill>
+          <a:ln>
+            <a:noFill/>
+          </a:ln>
+        </p:spPr>
+        <p:style>
+          <a:lnRef idx="2">
+            <a:schemeClr val="accent1">
+              <a:shade val="15000"/>
+            </a:schemeClr>
+          </a:lnRef>
+          <a:fillRef idx="1">
+            <a:schemeClr val="accent1"/>
+          </a:fillRef>
+          <a:effectRef idx="0">
+            <a:schemeClr val="accent1"/>
+          </a:effectRef>
+          <a:fontRef idx="minor">
+            <a:schemeClr val="lt1"/>
+          </a:fontRef>
+        </p:style>
+        <p:txBody>
+          <a:bodyPr rtlCol="0" anchor="ctr"/>
+          <a:lstStyle/>
+          <a:p>
+            <a:pPr algn="ctr"/>
+            <a:endParaRPr lang="en-US"/>
+          </a:p>
+        </p:txBody>
+      </p:sp>
+    </p:spTree>
+    <p:extLst>
+      <p:ext uri="{BB962C8B-B14F-4D97-AF65-F5344CB8AC3E}">
+        <p14:creationId xmlns:p14="http://schemas.microsoft.com/office/powerpoint/2010/main" val="1965639803"/>
       </p:ext>
     </p:extLst>
   </p:cSld>
@@ -16109,7 +16795,7 @@
 </p:sld>
 </file>
 
-<file path=ppt/slides/slide18.xml><?xml version="1.0" encoding="utf-8"?>
+<file path=ppt/slides/slide19.xml><?xml version="1.0" encoding="utf-8"?>
 <p:sld xmlns:a="http://schemas.openxmlformats.org/drawingml/2006/main" xmlns:r="http://schemas.openxmlformats.org/officeDocument/2006/relationships" xmlns:p="http://schemas.openxmlformats.org/presentationml/2006/main">
   <p:cSld>
     <p:spTree>
@@ -16155,7 +16841,782 @@
 </p:sld>
 </file>
 
-<file path=ppt/slides/slide19.xml><?xml version="1.0" encoding="utf-8"?>
+<file path=ppt/slides/slide2.xml><?xml version="1.0" encoding="utf-8"?>
+<p:sld xmlns:a="http://schemas.openxmlformats.org/drawingml/2006/main" xmlns:r="http://schemas.openxmlformats.org/officeDocument/2006/relationships" xmlns:p="http://schemas.openxmlformats.org/presentationml/2006/main">
+  <p:cSld>
+    <p:spTree>
+      <p:nvGrpSpPr>
+        <p:cNvPr id="1" name=""/>
+        <p:cNvGrpSpPr/>
+        <p:nvPr/>
+      </p:nvGrpSpPr>
+      <p:grpSpPr>
+        <a:xfrm>
+          <a:off x="0" y="0"/>
+          <a:ext cx="0" cy="0"/>
+          <a:chOff x="0" y="0"/>
+          <a:chExt cx="0" cy="0"/>
+        </a:xfrm>
+      </p:grpSpPr>
+    </p:spTree>
+    <p:extLst>
+      <p:ext uri="{BB962C8B-B14F-4D97-AF65-F5344CB8AC3E}">
+        <p14:creationId xmlns:p14="http://schemas.microsoft.com/office/powerpoint/2010/main" val="1544377309"/>
+      </p:ext>
+    </p:extLst>
+  </p:cSld>
+  <p:clrMapOvr>
+    <a:masterClrMapping/>
+  </p:clrMapOvr>
+</p:sld>
+</file>
+
+<file path=ppt/slides/slide20.xml><?xml version="1.0" encoding="utf-8"?>
+<p:sld xmlns:a="http://schemas.openxmlformats.org/drawingml/2006/main" xmlns:r="http://schemas.openxmlformats.org/officeDocument/2006/relationships" xmlns:p="http://schemas.openxmlformats.org/presentationml/2006/main">
+  <p:cSld>
+    <p:spTree>
+      <p:nvGrpSpPr>
+        <p:cNvPr id="1" name="">
+          <a:extLst>
+            <a:ext uri="{FF2B5EF4-FFF2-40B4-BE49-F238E27FC236}">
+              <a16:creationId xmlns:a16="http://schemas.microsoft.com/office/drawing/2014/main" id="{18EFE75E-61BA-DA8C-74D1-D03A12AEA38B}"/>
+            </a:ext>
+          </a:extLst>
+        </p:cNvPr>
+        <p:cNvGrpSpPr/>
+        <p:nvPr/>
+      </p:nvGrpSpPr>
+      <p:grpSpPr>
+        <a:xfrm>
+          <a:off x="0" y="0"/>
+          <a:ext cx="0" cy="0"/>
+          <a:chOff x="0" y="0"/>
+          <a:chExt cx="0" cy="0"/>
+        </a:xfrm>
+      </p:grpSpPr>
+      <p:sp>
+        <p:nvSpPr>
+          <p:cNvPr id="2" name="Title 1">
+            <a:extLst>
+              <a:ext uri="{FF2B5EF4-FFF2-40B4-BE49-F238E27FC236}">
+                <a16:creationId xmlns:a16="http://schemas.microsoft.com/office/drawing/2014/main" id="{83BF89DE-6F4E-950A-F393-5F7274F3C7F1}"/>
+              </a:ext>
+            </a:extLst>
+          </p:cNvPr>
+          <p:cNvSpPr>
+            <a:spLocks noGrp="1"/>
+          </p:cNvSpPr>
+          <p:nvPr>
+            <p:ph type="title"/>
+          </p:nvPr>
+        </p:nvSpPr>
+        <p:spPr/>
+        <p:txBody>
+          <a:bodyPr/>
+          <a:lstStyle/>
+          <a:p>
+            <a:r>
+              <a:rPr lang="sv-SE" dirty="0" err="1">
+                <a:solidFill>
+                  <a:srgbClr val="F7F9FF"/>
+                </a:solidFill>
+                <a:latin typeface="Segoe UI Semibold"/>
+              </a:rPr>
+              <a:t>Unsupported</a:t>
+            </a:r>
+            <a:r>
+              <a:rPr lang="sv-SE" dirty="0">
+                <a:solidFill>
+                  <a:srgbClr val="F7F9FF"/>
+                </a:solidFill>
+                <a:latin typeface="Segoe UI Semibold"/>
+              </a:rPr>
+              <a:t> KQL Syntax in ARG</a:t>
+            </a:r>
+            <a:endParaRPr dirty="0">
+              <a:solidFill>
+                <a:srgbClr val="F7F9FF"/>
+              </a:solidFill>
+              <a:latin typeface="Segoe UI Semibold"/>
+            </a:endParaRPr>
+          </a:p>
+        </p:txBody>
+      </p:sp>
+      <p:sp>
+        <p:nvSpPr>
+          <p:cNvPr id="5" name="Content Placeholder 2">
+            <a:extLst>
+              <a:ext uri="{FF2B5EF4-FFF2-40B4-BE49-F238E27FC236}">
+                <a16:creationId xmlns:a16="http://schemas.microsoft.com/office/drawing/2014/main" id="{51F04EAD-AD0F-434D-D1F6-97C86266EBF1}"/>
+              </a:ext>
+            </a:extLst>
+          </p:cNvPr>
+          <p:cNvSpPr>
+            <a:spLocks noGrp="1"/>
+          </p:cNvSpPr>
+          <p:nvPr>
+            <p:ph sz="quarter" idx="10"/>
+          </p:nvPr>
+        </p:nvSpPr>
+        <p:spPr>
+          <a:xfrm>
+            <a:off x="241300" y="2220913"/>
+            <a:ext cx="18643048" cy="6742112"/>
+          </a:xfrm>
+        </p:spPr>
+        <p:txBody>
+          <a:bodyPr>
+            <a:normAutofit/>
+          </a:bodyPr>
+          <a:lstStyle/>
+          <a:p>
+            <a:pPr marL="457200" indent="-457200">
+              <a:buFont typeface="Arial" panose="020B0604020202020204" pitchFamily="34" charset="0"/>
+              <a:buChar char="•"/>
+            </a:pPr>
+            <a:r>
+              <a:rPr lang="en-US" sz="4400" dirty="0">
+                <a:solidFill>
+                  <a:srgbClr val="FFC000"/>
+                </a:solidFill>
+                <a:latin typeface="Cascadia Code" panose="020B0609020000020004" pitchFamily="34" charset="0"/>
+                <a:ea typeface="Cascadia Code" panose="020B0609020000020004" pitchFamily="34" charset="0"/>
+                <a:cs typeface="Cascadia Code" panose="020B0609020000020004" pitchFamily="34" charset="0"/>
+              </a:rPr>
+              <a:t>let</a:t>
+            </a:r>
+            <a:r>
+              <a:rPr lang="en-US" sz="4400" dirty="0">
+                <a:solidFill>
+                  <a:srgbClr val="E3E8F2"/>
+                </a:solidFill>
+                <a:latin typeface="Segoe UI"/>
+              </a:rPr>
+              <a:t> - No variables or temporary tables</a:t>
+            </a:r>
+          </a:p>
+          <a:p>
+            <a:pPr marL="457200" indent="-457200">
+              <a:buFont typeface="Arial" panose="020B0604020202020204" pitchFamily="34" charset="0"/>
+              <a:buChar char="•"/>
+            </a:pPr>
+            <a:r>
+              <a:rPr lang="en-US" sz="4400" dirty="0">
+                <a:solidFill>
+                  <a:srgbClr val="E3E8F2"/>
+                </a:solidFill>
+                <a:latin typeface="Segoe UI"/>
+              </a:rPr>
+              <a:t>No data sources, only resource tables allowed</a:t>
+            </a:r>
+          </a:p>
+          <a:p>
+            <a:pPr marL="457200" indent="-457200">
+              <a:buFont typeface="Arial" panose="020B0604020202020204" pitchFamily="34" charset="0"/>
+              <a:buChar char="•"/>
+            </a:pPr>
+            <a:r>
+              <a:rPr lang="en-US" sz="4400" dirty="0">
+                <a:solidFill>
+                  <a:srgbClr val="E3E8F2"/>
+                </a:solidFill>
+                <a:latin typeface="Segoe UI"/>
+              </a:rPr>
+              <a:t>No complex math, graphs, data things</a:t>
+            </a:r>
+          </a:p>
+          <a:p>
+            <a:pPr marL="457200" indent="-457200">
+              <a:buFont typeface="Arial" panose="020B0604020202020204" pitchFamily="34" charset="0"/>
+              <a:buChar char="•"/>
+            </a:pPr>
+            <a:r>
+              <a:rPr lang="en-US" sz="4400" dirty="0">
+                <a:solidFill>
+                  <a:srgbClr val="E3E8F2"/>
+                </a:solidFill>
+                <a:latin typeface="Segoe UI"/>
+              </a:rPr>
+              <a:t>A bunch of other unsupported things too</a:t>
+            </a:r>
+          </a:p>
+          <a:p>
+            <a:pPr marL="0" indent="0"/>
+            <a:endParaRPr lang="en-US" sz="4400" dirty="0">
+              <a:solidFill>
+                <a:srgbClr val="E3E8F2"/>
+              </a:solidFill>
+              <a:latin typeface="Segoe UI"/>
+            </a:endParaRPr>
+          </a:p>
+          <a:p>
+            <a:pPr marL="0" indent="0"/>
+            <a:endParaRPr lang="en-US" sz="4400" dirty="0">
+              <a:solidFill>
+                <a:srgbClr val="E3E8F2"/>
+              </a:solidFill>
+              <a:latin typeface="Segoe UI"/>
+            </a:endParaRPr>
+          </a:p>
+          <a:p>
+            <a:pPr marL="0" indent="0"/>
+            <a:endParaRPr lang="en-US" sz="4400" dirty="0">
+              <a:solidFill>
+                <a:srgbClr val="E3E8F2"/>
+              </a:solidFill>
+              <a:latin typeface="Segoe UI"/>
+            </a:endParaRPr>
+          </a:p>
+          <a:p>
+            <a:pPr marL="0" indent="0"/>
+            <a:endParaRPr lang="en-US" sz="4400" dirty="0">
+              <a:solidFill>
+                <a:srgbClr val="E3E8F2"/>
+              </a:solidFill>
+              <a:latin typeface="Segoe UI"/>
+            </a:endParaRPr>
+          </a:p>
+          <a:p>
+            <a:pPr marL="0" indent="0"/>
+            <a:r>
+              <a:rPr lang="en-US" sz="5400" dirty="0">
+                <a:solidFill>
+                  <a:srgbClr val="FFC000"/>
+                </a:solidFill>
+                <a:latin typeface="Segoe UI"/>
+              </a:rPr>
+              <a:t>There’s unfortunately no list of exactly what is supported :(</a:t>
+            </a:r>
+            <a:endParaRPr lang="en-US" sz="4400" dirty="0">
+              <a:solidFill>
+                <a:srgbClr val="FFC000"/>
+              </a:solidFill>
+              <a:latin typeface="Segoe UI"/>
+            </a:endParaRPr>
+          </a:p>
+          <a:p>
+            <a:pPr marL="457200" indent="-457200">
+              <a:buFont typeface="Arial" panose="020B0604020202020204" pitchFamily="34" charset="0"/>
+              <a:buChar char="•"/>
+            </a:pPr>
+            <a:endParaRPr lang="en-US" sz="4400" dirty="0">
+              <a:solidFill>
+                <a:srgbClr val="E3E8F2"/>
+              </a:solidFill>
+              <a:latin typeface="Segoe UI"/>
+            </a:endParaRPr>
+          </a:p>
+        </p:txBody>
+      </p:sp>
+    </p:spTree>
+    <p:extLst>
+      <p:ext uri="{BB962C8B-B14F-4D97-AF65-F5344CB8AC3E}">
+        <p14:creationId xmlns:p14="http://schemas.microsoft.com/office/powerpoint/2010/main" val="728102020"/>
+      </p:ext>
+    </p:extLst>
+  </p:cSld>
+  <p:clrMapOvr>
+    <a:masterClrMapping/>
+  </p:clrMapOvr>
+  <p:timing>
+    <p:tnLst>
+      <p:par>
+        <p:cTn id="1" dur="indefinite" restart="never" nodeType="tmRoot">
+          <p:childTnLst>
+            <p:seq concurrent="1" nextAc="seek">
+              <p:cTn id="2" dur="indefinite" nodeType="mainSeq">
+                <p:childTnLst>
+                  <p:par>
+                    <p:cTn id="3" fill="hold">
+                      <p:stCondLst>
+                        <p:cond delay="indefinite"/>
+                      </p:stCondLst>
+                      <p:childTnLst>
+                        <p:par>
+                          <p:cTn id="4" fill="hold">
+                            <p:stCondLst>
+                              <p:cond delay="0"/>
+                            </p:stCondLst>
+                            <p:childTnLst>
+                              <p:par>
+                                <p:cTn id="5" presetID="10" presetClass="entr" presetSubtype="0" fill="hold" grpId="0" nodeType="clickEffect">
+                                  <p:stCondLst>
+                                    <p:cond delay="0"/>
+                                  </p:stCondLst>
+                                  <p:childTnLst>
+                                    <p:set>
+                                      <p:cBhvr>
+                                        <p:cTn id="6" dur="1" fill="hold">
+                                          <p:stCondLst>
+                                            <p:cond delay="0"/>
+                                          </p:stCondLst>
+                                        </p:cTn>
+                                        <p:tgtEl>
+                                          <p:spTgt spid="5">
+                                            <p:txEl>
+                                              <p:pRg st="0" end="0"/>
+                                            </p:txEl>
+                                          </p:spTgt>
+                                        </p:tgtEl>
+                                        <p:attrNameLst>
+                                          <p:attrName>style.visibility</p:attrName>
+                                        </p:attrNameLst>
+                                      </p:cBhvr>
+                                      <p:to>
+                                        <p:strVal val="visible"/>
+                                      </p:to>
+                                    </p:set>
+                                    <p:animEffect transition="in" filter="fade">
+                                      <p:cBhvr>
+                                        <p:cTn id="7" dur="500"/>
+                                        <p:tgtEl>
+                                          <p:spTgt spid="5">
+                                            <p:txEl>
+                                              <p:pRg st="0" end="0"/>
+                                            </p:txEl>
+                                          </p:spTgt>
+                                        </p:tgtEl>
+                                      </p:cBhvr>
+                                    </p:animEffect>
+                                  </p:childTnLst>
+                                </p:cTn>
+                              </p:par>
+                            </p:childTnLst>
+                          </p:cTn>
+                        </p:par>
+                      </p:childTnLst>
+                    </p:cTn>
+                  </p:par>
+                  <p:par>
+                    <p:cTn id="8" fill="hold">
+                      <p:stCondLst>
+                        <p:cond delay="indefinite"/>
+                      </p:stCondLst>
+                      <p:childTnLst>
+                        <p:par>
+                          <p:cTn id="9" fill="hold">
+                            <p:stCondLst>
+                              <p:cond delay="0"/>
+                            </p:stCondLst>
+                            <p:childTnLst>
+                              <p:par>
+                                <p:cTn id="10" presetID="10" presetClass="entr" presetSubtype="0" fill="hold" grpId="0" nodeType="clickEffect">
+                                  <p:stCondLst>
+                                    <p:cond delay="0"/>
+                                  </p:stCondLst>
+                                  <p:childTnLst>
+                                    <p:set>
+                                      <p:cBhvr>
+                                        <p:cTn id="11" dur="1" fill="hold">
+                                          <p:stCondLst>
+                                            <p:cond delay="0"/>
+                                          </p:stCondLst>
+                                        </p:cTn>
+                                        <p:tgtEl>
+                                          <p:spTgt spid="5">
+                                            <p:txEl>
+                                              <p:pRg st="1" end="1"/>
+                                            </p:txEl>
+                                          </p:spTgt>
+                                        </p:tgtEl>
+                                        <p:attrNameLst>
+                                          <p:attrName>style.visibility</p:attrName>
+                                        </p:attrNameLst>
+                                      </p:cBhvr>
+                                      <p:to>
+                                        <p:strVal val="visible"/>
+                                      </p:to>
+                                    </p:set>
+                                    <p:animEffect transition="in" filter="fade">
+                                      <p:cBhvr>
+                                        <p:cTn id="12" dur="500"/>
+                                        <p:tgtEl>
+                                          <p:spTgt spid="5">
+                                            <p:txEl>
+                                              <p:pRg st="1" end="1"/>
+                                            </p:txEl>
+                                          </p:spTgt>
+                                        </p:tgtEl>
+                                      </p:cBhvr>
+                                    </p:animEffect>
+                                  </p:childTnLst>
+                                </p:cTn>
+                              </p:par>
+                              <p:par>
+                                <p:cTn id="13" presetID="9" presetClass="emph" presetSubtype="0" grpId="1" nodeType="withEffect">
+                                  <p:stCondLst>
+                                    <p:cond delay="0"/>
+                                  </p:stCondLst>
+                                  <p:childTnLst>
+                                    <p:set>
+                                      <p:cBhvr>
+                                        <p:cTn id="14" dur="indefinite"/>
+                                        <p:tgtEl>
+                                          <p:spTgt spid="5">
+                                            <p:txEl>
+                                              <p:pRg st="0" end="0"/>
+                                            </p:txEl>
+                                          </p:spTgt>
+                                        </p:tgtEl>
+                                        <p:attrNameLst>
+                                          <p:attrName>style.opacity</p:attrName>
+                                        </p:attrNameLst>
+                                      </p:cBhvr>
+                                      <p:to>
+                                        <p:strVal val="0.5"/>
+                                      </p:to>
+                                    </p:set>
+                                    <p:animEffect filter="image" prLst="opacity: 0.5">
+                                      <p:cBhvr rctx="IE">
+                                        <p:cTn id="15" dur="indefinite"/>
+                                        <p:tgtEl>
+                                          <p:spTgt spid="5">
+                                            <p:txEl>
+                                              <p:pRg st="0" end="0"/>
+                                            </p:txEl>
+                                          </p:spTgt>
+                                        </p:tgtEl>
+                                      </p:cBhvr>
+                                    </p:animEffect>
+                                  </p:childTnLst>
+                                </p:cTn>
+                              </p:par>
+                            </p:childTnLst>
+                          </p:cTn>
+                        </p:par>
+                      </p:childTnLst>
+                    </p:cTn>
+                  </p:par>
+                  <p:par>
+                    <p:cTn id="16" fill="hold">
+                      <p:stCondLst>
+                        <p:cond delay="indefinite"/>
+                      </p:stCondLst>
+                      <p:childTnLst>
+                        <p:par>
+                          <p:cTn id="17" fill="hold">
+                            <p:stCondLst>
+                              <p:cond delay="0"/>
+                            </p:stCondLst>
+                            <p:childTnLst>
+                              <p:par>
+                                <p:cTn id="18" presetID="10" presetClass="entr" presetSubtype="0" fill="hold" grpId="0" nodeType="clickEffect">
+                                  <p:stCondLst>
+                                    <p:cond delay="0"/>
+                                  </p:stCondLst>
+                                  <p:childTnLst>
+                                    <p:set>
+                                      <p:cBhvr>
+                                        <p:cTn id="19" dur="1" fill="hold">
+                                          <p:stCondLst>
+                                            <p:cond delay="0"/>
+                                          </p:stCondLst>
+                                        </p:cTn>
+                                        <p:tgtEl>
+                                          <p:spTgt spid="5">
+                                            <p:txEl>
+                                              <p:pRg st="2" end="2"/>
+                                            </p:txEl>
+                                          </p:spTgt>
+                                        </p:tgtEl>
+                                        <p:attrNameLst>
+                                          <p:attrName>style.visibility</p:attrName>
+                                        </p:attrNameLst>
+                                      </p:cBhvr>
+                                      <p:to>
+                                        <p:strVal val="visible"/>
+                                      </p:to>
+                                    </p:set>
+                                    <p:animEffect transition="in" filter="fade">
+                                      <p:cBhvr>
+                                        <p:cTn id="20" dur="500"/>
+                                        <p:tgtEl>
+                                          <p:spTgt spid="5">
+                                            <p:txEl>
+                                              <p:pRg st="2" end="2"/>
+                                            </p:txEl>
+                                          </p:spTgt>
+                                        </p:tgtEl>
+                                      </p:cBhvr>
+                                    </p:animEffect>
+                                  </p:childTnLst>
+                                </p:cTn>
+                              </p:par>
+                              <p:par>
+                                <p:cTn id="21" presetID="9" presetClass="emph" presetSubtype="0" grpId="1" nodeType="withEffect">
+                                  <p:stCondLst>
+                                    <p:cond delay="0"/>
+                                  </p:stCondLst>
+                                  <p:childTnLst>
+                                    <p:set>
+                                      <p:cBhvr>
+                                        <p:cTn id="22" dur="indefinite"/>
+                                        <p:tgtEl>
+                                          <p:spTgt spid="5">
+                                            <p:txEl>
+                                              <p:pRg st="1" end="1"/>
+                                            </p:txEl>
+                                          </p:spTgt>
+                                        </p:tgtEl>
+                                        <p:attrNameLst>
+                                          <p:attrName>style.opacity</p:attrName>
+                                        </p:attrNameLst>
+                                      </p:cBhvr>
+                                      <p:to>
+                                        <p:strVal val="0.5"/>
+                                      </p:to>
+                                    </p:set>
+                                    <p:animEffect filter="image" prLst="opacity: 0.5">
+                                      <p:cBhvr rctx="IE">
+                                        <p:cTn id="23" dur="indefinite"/>
+                                        <p:tgtEl>
+                                          <p:spTgt spid="5">
+                                            <p:txEl>
+                                              <p:pRg st="1" end="1"/>
+                                            </p:txEl>
+                                          </p:spTgt>
+                                        </p:tgtEl>
+                                      </p:cBhvr>
+                                    </p:animEffect>
+                                  </p:childTnLst>
+                                </p:cTn>
+                              </p:par>
+                            </p:childTnLst>
+                          </p:cTn>
+                        </p:par>
+                      </p:childTnLst>
+                    </p:cTn>
+                  </p:par>
+                  <p:par>
+                    <p:cTn id="24" fill="hold">
+                      <p:stCondLst>
+                        <p:cond delay="indefinite"/>
+                      </p:stCondLst>
+                      <p:childTnLst>
+                        <p:par>
+                          <p:cTn id="25" fill="hold">
+                            <p:stCondLst>
+                              <p:cond delay="0"/>
+                            </p:stCondLst>
+                            <p:childTnLst>
+                              <p:par>
+                                <p:cTn id="26" presetID="10" presetClass="entr" presetSubtype="0" fill="hold" grpId="0" nodeType="clickEffect">
+                                  <p:stCondLst>
+                                    <p:cond delay="0"/>
+                                  </p:stCondLst>
+                                  <p:childTnLst>
+                                    <p:set>
+                                      <p:cBhvr>
+                                        <p:cTn id="27" dur="1" fill="hold">
+                                          <p:stCondLst>
+                                            <p:cond delay="0"/>
+                                          </p:stCondLst>
+                                        </p:cTn>
+                                        <p:tgtEl>
+                                          <p:spTgt spid="5">
+                                            <p:txEl>
+                                              <p:pRg st="3" end="3"/>
+                                            </p:txEl>
+                                          </p:spTgt>
+                                        </p:tgtEl>
+                                        <p:attrNameLst>
+                                          <p:attrName>style.visibility</p:attrName>
+                                        </p:attrNameLst>
+                                      </p:cBhvr>
+                                      <p:to>
+                                        <p:strVal val="visible"/>
+                                      </p:to>
+                                    </p:set>
+                                    <p:animEffect transition="in" filter="fade">
+                                      <p:cBhvr>
+                                        <p:cTn id="28" dur="500"/>
+                                        <p:tgtEl>
+                                          <p:spTgt spid="5">
+                                            <p:txEl>
+                                              <p:pRg st="3" end="3"/>
+                                            </p:txEl>
+                                          </p:spTgt>
+                                        </p:tgtEl>
+                                      </p:cBhvr>
+                                    </p:animEffect>
+                                  </p:childTnLst>
+                                </p:cTn>
+                              </p:par>
+                              <p:par>
+                                <p:cTn id="29" presetID="9" presetClass="emph" presetSubtype="0" grpId="1" nodeType="withEffect">
+                                  <p:stCondLst>
+                                    <p:cond delay="0"/>
+                                  </p:stCondLst>
+                                  <p:childTnLst>
+                                    <p:set>
+                                      <p:cBhvr>
+                                        <p:cTn id="30" dur="indefinite"/>
+                                        <p:tgtEl>
+                                          <p:spTgt spid="5">
+                                            <p:txEl>
+                                              <p:pRg st="2" end="2"/>
+                                            </p:txEl>
+                                          </p:spTgt>
+                                        </p:tgtEl>
+                                        <p:attrNameLst>
+                                          <p:attrName>style.opacity</p:attrName>
+                                        </p:attrNameLst>
+                                      </p:cBhvr>
+                                      <p:to>
+                                        <p:strVal val="0.5"/>
+                                      </p:to>
+                                    </p:set>
+                                    <p:animEffect filter="image" prLst="opacity: 0.5">
+                                      <p:cBhvr rctx="IE">
+                                        <p:cTn id="31" dur="indefinite"/>
+                                        <p:tgtEl>
+                                          <p:spTgt spid="5">
+                                            <p:txEl>
+                                              <p:pRg st="2" end="2"/>
+                                            </p:txEl>
+                                          </p:spTgt>
+                                        </p:tgtEl>
+                                      </p:cBhvr>
+                                    </p:animEffect>
+                                  </p:childTnLst>
+                                </p:cTn>
+                              </p:par>
+                            </p:childTnLst>
+                          </p:cTn>
+                        </p:par>
+                      </p:childTnLst>
+                    </p:cTn>
+                  </p:par>
+                  <p:par>
+                    <p:cTn id="32" fill="hold">
+                      <p:stCondLst>
+                        <p:cond delay="indefinite"/>
+                      </p:stCondLst>
+                      <p:childTnLst>
+                        <p:par>
+                          <p:cTn id="33" fill="hold">
+                            <p:stCondLst>
+                              <p:cond delay="0"/>
+                            </p:stCondLst>
+                            <p:childTnLst>
+                              <p:par>
+                                <p:cTn id="34" presetID="10" presetClass="entr" presetSubtype="0" fill="hold" grpId="0" nodeType="clickEffect">
+                                  <p:stCondLst>
+                                    <p:cond delay="0"/>
+                                  </p:stCondLst>
+                                  <p:childTnLst>
+                                    <p:set>
+                                      <p:cBhvr>
+                                        <p:cTn id="35" dur="1" fill="hold">
+                                          <p:stCondLst>
+                                            <p:cond delay="0"/>
+                                          </p:stCondLst>
+                                        </p:cTn>
+                                        <p:tgtEl>
+                                          <p:spTgt spid="5">
+                                            <p:txEl>
+                                              <p:pRg st="8" end="8"/>
+                                            </p:txEl>
+                                          </p:spTgt>
+                                        </p:tgtEl>
+                                        <p:attrNameLst>
+                                          <p:attrName>style.visibility</p:attrName>
+                                        </p:attrNameLst>
+                                      </p:cBhvr>
+                                      <p:to>
+                                        <p:strVal val="visible"/>
+                                      </p:to>
+                                    </p:set>
+                                    <p:animEffect transition="in" filter="fade">
+                                      <p:cBhvr>
+                                        <p:cTn id="36" dur="500"/>
+                                        <p:tgtEl>
+                                          <p:spTgt spid="5">
+                                            <p:txEl>
+                                              <p:pRg st="8" end="8"/>
+                                            </p:txEl>
+                                          </p:spTgt>
+                                        </p:tgtEl>
+                                      </p:cBhvr>
+                                    </p:animEffect>
+                                  </p:childTnLst>
+                                </p:cTn>
+                              </p:par>
+                              <p:par>
+                                <p:cTn id="37" presetID="9" presetClass="emph" presetSubtype="0" grpId="1" nodeType="withEffect">
+                                  <p:stCondLst>
+                                    <p:cond delay="0"/>
+                                  </p:stCondLst>
+                                  <p:childTnLst>
+                                    <p:set>
+                                      <p:cBhvr>
+                                        <p:cTn id="38" dur="indefinite"/>
+                                        <p:tgtEl>
+                                          <p:spTgt spid="5">
+                                            <p:txEl>
+                                              <p:pRg st="3" end="3"/>
+                                            </p:txEl>
+                                          </p:spTgt>
+                                        </p:tgtEl>
+                                        <p:attrNameLst>
+                                          <p:attrName>style.opacity</p:attrName>
+                                        </p:attrNameLst>
+                                      </p:cBhvr>
+                                      <p:to>
+                                        <p:strVal val="0.5"/>
+                                      </p:to>
+                                    </p:set>
+                                    <p:animEffect filter="image" prLst="opacity: 0.5">
+                                      <p:cBhvr rctx="IE">
+                                        <p:cTn id="39" dur="indefinite"/>
+                                        <p:tgtEl>
+                                          <p:spTgt spid="5">
+                                            <p:txEl>
+                                              <p:pRg st="3" end="3"/>
+                                            </p:txEl>
+                                          </p:spTgt>
+                                        </p:tgtEl>
+                                      </p:cBhvr>
+                                    </p:animEffect>
+                                  </p:childTnLst>
+                                </p:cTn>
+                              </p:par>
+                            </p:childTnLst>
+                          </p:cTn>
+                        </p:par>
+                      </p:childTnLst>
+                    </p:cTn>
+                  </p:par>
+                </p:childTnLst>
+              </p:cTn>
+              <p:prevCondLst>
+                <p:cond evt="onPrev" delay="0">
+                  <p:tgtEl>
+                    <p:sldTgt/>
+                  </p:tgtEl>
+                </p:cond>
+              </p:prevCondLst>
+              <p:nextCondLst>
+                <p:cond evt="onNext" delay="0">
+                  <p:tgtEl>
+                    <p:sldTgt/>
+                  </p:tgtEl>
+                </p:cond>
+              </p:nextCondLst>
+            </p:seq>
+          </p:childTnLst>
+        </p:cTn>
+      </p:par>
+    </p:tnLst>
+    <p:bldLst>
+      <p:bldP spid="5" grpId="0" uiExpand="1" build="p"/>
+      <p:bldP spid="5" grpId="1" uiExpand="1" build="p"/>
+    </p:bldLst>
+  </p:timing>
+</p:sld>
+</file>
+
+<file path=ppt/slides/slide21.xml><?xml version="1.0" encoding="utf-8"?>
 <p:sld xmlns:a="http://schemas.openxmlformats.org/drawingml/2006/main" xmlns:r="http://schemas.openxmlformats.org/officeDocument/2006/relationships" xmlns:p="http://schemas.openxmlformats.org/presentationml/2006/main">
   <p:cSld>
     <p:spTree>
@@ -16214,7 +17675,7 @@
         <p:spPr>
           <a:xfrm>
             <a:off x="2391386" y="8663788"/>
-            <a:ext cx="13502828" cy="507831"/>
+            <a:ext cx="13502828" cy="461665"/>
           </a:xfrm>
           <a:prstGeom prst="rect">
             <a:avLst/>
@@ -16231,7 +17692,7 @@
             <a:r>
               <a:rPr lang="en-US" sz="2400" dirty="0" err="1">
                 <a:solidFill>
-                  <a:schemeClr val="tx1"/>
+                  <a:srgbClr val="FFC000"/>
                 </a:solidFill>
                 <a:latin typeface="Cascadia Code" panose="020B0609020000020004" pitchFamily="34" charset="0"/>
                 <a:ea typeface="Cascadia Code" panose="020B0609020000020004" pitchFamily="34" charset="0"/>
@@ -16242,7 +17703,7 @@
             <a:r>
               <a:rPr lang="en-US" sz="2400" dirty="0">
                 <a:solidFill>
-                  <a:schemeClr val="tx1"/>
+                  <a:srgbClr val="FFC000"/>
                 </a:solidFill>
                 <a:latin typeface="Cascadia Code" panose="020B0609020000020004" pitchFamily="34" charset="0"/>
                 <a:ea typeface="Cascadia Code" panose="020B0609020000020004" pitchFamily="34" charset="0"/>
@@ -16253,7 +17714,7 @@
             <a:r>
               <a:rPr lang="en-US" sz="2400" dirty="0" err="1">
                 <a:solidFill>
-                  <a:schemeClr val="tx1"/>
+                  <a:srgbClr val="FFC000"/>
                 </a:solidFill>
                 <a:latin typeface="Cascadia Code" panose="020B0609020000020004" pitchFamily="34" charset="0"/>
                 <a:ea typeface="Cascadia Code" panose="020B0609020000020004" pitchFamily="34" charset="0"/>
@@ -16264,7 +17725,7 @@
             <a:r>
               <a:rPr lang="en-US" sz="2400" dirty="0">
                 <a:solidFill>
-                  <a:schemeClr val="tx1"/>
+                  <a:srgbClr val="FFC000"/>
                 </a:solidFill>
                 <a:latin typeface="Cascadia Code" panose="020B0609020000020004" pitchFamily="34" charset="0"/>
                 <a:ea typeface="Cascadia Code" panose="020B0609020000020004" pitchFamily="34" charset="0"/>
@@ -16439,7 +17900,7 @@
         <p:spPr>
           <a:xfrm>
             <a:off x="4710672" y="8148609"/>
-            <a:ext cx="8868864" cy="507831"/>
+            <a:ext cx="8868864" cy="461665"/>
           </a:xfrm>
           <a:prstGeom prst="rect">
             <a:avLst/>
@@ -16456,7 +17917,7 @@
             <a:r>
               <a:rPr lang="en-US" sz="2400" dirty="0" err="1">
                 <a:solidFill>
-                  <a:schemeClr val="tx1"/>
+                  <a:srgbClr val="FFC000"/>
                 </a:solidFill>
                 <a:latin typeface="Cascadia Code" panose="020B0609020000020004" pitchFamily="34" charset="0"/>
                 <a:ea typeface="Cascadia Code" panose="020B0609020000020004" pitchFamily="34" charset="0"/>
@@ -16467,7 +17928,7 @@
             <a:r>
               <a:rPr lang="en-US" sz="2400" dirty="0">
                 <a:solidFill>
-                  <a:schemeClr val="tx1"/>
+                  <a:srgbClr val="FFC000"/>
                 </a:solidFill>
                 <a:latin typeface="Cascadia Code" panose="020B0609020000020004" pitchFamily="34" charset="0"/>
                 <a:ea typeface="Cascadia Code" panose="020B0609020000020004" pitchFamily="34" charset="0"/>
@@ -16714,7 +18175,7 @@
         <p:spPr>
           <a:xfrm>
             <a:off x="7570524" y="7647574"/>
-            <a:ext cx="3144554" cy="507831"/>
+            <a:ext cx="3144554" cy="461665"/>
           </a:xfrm>
           <a:prstGeom prst="rect">
             <a:avLst/>
@@ -16731,7 +18192,7 @@
             <a:r>
               <a:rPr lang="en-US" sz="2400" dirty="0">
                 <a:solidFill>
-                  <a:schemeClr val="tx1"/>
+                  <a:srgbClr val="FFC000"/>
                 </a:solidFill>
                 <a:latin typeface="Cascadia Code" panose="020B0609020000020004" pitchFamily="34" charset="0"/>
                 <a:ea typeface="Cascadia Code" panose="020B0609020000020004" pitchFamily="34" charset="0"/>
@@ -16757,7 +18218,7 @@
         <p:spPr>
           <a:xfrm>
             <a:off x="16389220" y="0"/>
-            <a:ext cx="1898780" cy="877162"/>
+            <a:ext cx="1898780" cy="830997"/>
           </a:xfrm>
           <a:prstGeom prst="rect">
             <a:avLst/>
@@ -16774,7 +18235,7 @@
             <a:r>
               <a:rPr lang="en-US" sz="4800" dirty="0">
                 <a:solidFill>
-                  <a:srgbClr val="62D5FF"/>
+                  <a:srgbClr val="FFC000"/>
                 </a:solidFill>
                 <a:latin typeface="Cascadia Code" panose="020B0609020000020004" pitchFamily="34" charset="0"/>
                 <a:ea typeface="Cascadia Code" panose="020B0609020000020004" pitchFamily="34" charset="0"/>
@@ -16785,7 +18246,7 @@
             <a:r>
               <a:rPr lang="en-US" sz="4800" dirty="0" err="1">
                 <a:solidFill>
-                  <a:srgbClr val="62D5FF"/>
+                  <a:srgbClr val="FFC000"/>
                 </a:solidFill>
                 <a:latin typeface="Cascadia Code" panose="020B0609020000020004" pitchFamily="34" charset="0"/>
                 <a:ea typeface="Cascadia Code" panose="020B0609020000020004" pitchFamily="34" charset="0"/>
@@ -16795,7 +18256,7 @@
             </a:r>
             <a:endParaRPr lang="en-US" sz="4800" dirty="0">
               <a:solidFill>
-                <a:srgbClr val="62D5FF"/>
+                <a:srgbClr val="FFC000"/>
               </a:solidFill>
               <a:latin typeface="Cascadia Code" panose="020B0609020000020004" pitchFamily="34" charset="0"/>
               <a:ea typeface="Cascadia Code" panose="020B0609020000020004" pitchFamily="34" charset="0"/>
@@ -16824,8 +18285,8 @@
             <a:chExt cx="908469" cy="938631"/>
           </a:xfrm>
         </p:grpSpPr>
-        <mc:AlternateContent xmlns:mc="http://schemas.openxmlformats.org/markup-compatibility/2006">
-          <mc:Choice xmlns:p14="http://schemas.microsoft.com/office/powerpoint/2010/main" Requires="p14">
+        <mc:AlternateContent xmlns:mc="http://schemas.openxmlformats.org/markup-compatibility/2006" xmlns:p14="http://schemas.microsoft.com/office/powerpoint/2010/main">
+          <mc:Choice Requires="p14">
             <p:contentPart p14:bwMode="auto" r:id="rId5">
               <p14:nvContentPartPr>
                 <p14:cNvPr id="19" name="Ink 18">
@@ -16844,7 +18305,7 @@
               </p14:xfrm>
             </p:contentPart>
           </mc:Choice>
-          <mc:Fallback>
+          <mc:Fallback xmlns="">
             <p:pic>
               <p:nvPicPr>
                 <p:cNvPr id="19" name="Ink 18">
@@ -16875,8 +18336,8 @@
             </p:pic>
           </mc:Fallback>
         </mc:AlternateContent>
-        <mc:AlternateContent xmlns:mc="http://schemas.openxmlformats.org/markup-compatibility/2006">
-          <mc:Choice xmlns:p14="http://schemas.microsoft.com/office/powerpoint/2010/main" Requires="p14">
+        <mc:AlternateContent xmlns:mc="http://schemas.openxmlformats.org/markup-compatibility/2006" xmlns:p14="http://schemas.microsoft.com/office/powerpoint/2010/main">
+          <mc:Choice Requires="p14">
             <p:contentPart p14:bwMode="auto" r:id="rId7">
               <p14:nvContentPartPr>
                 <p14:cNvPr id="20" name="Ink 19">
@@ -16895,7 +18356,7 @@
               </p14:xfrm>
             </p:contentPart>
           </mc:Choice>
-          <mc:Fallback>
+          <mc:Fallback xmlns="">
             <p:pic>
               <p:nvPicPr>
                 <p:cNvPr id="20" name="Ink 19">
@@ -17193,8 +18654,8 @@
             <a:chExt cx="1519842" cy="1625150"/>
           </a:xfrm>
         </p:grpSpPr>
-        <mc:AlternateContent xmlns:mc="http://schemas.openxmlformats.org/markup-compatibility/2006">
-          <mc:Choice xmlns:p14="http://schemas.microsoft.com/office/powerpoint/2010/main" Requires="p14">
+        <mc:AlternateContent xmlns:mc="http://schemas.openxmlformats.org/markup-compatibility/2006" xmlns:p14="http://schemas.microsoft.com/office/powerpoint/2010/main">
+          <mc:Choice Requires="p14">
             <p:contentPart p14:bwMode="auto" r:id="rId17">
               <p14:nvContentPartPr>
                 <p14:cNvPr id="28" name="Ink 27">
@@ -17213,7 +18674,7 @@
               </p14:xfrm>
             </p:contentPart>
           </mc:Choice>
-          <mc:Fallback>
+          <mc:Fallback xmlns="">
             <p:pic>
               <p:nvPicPr>
                 <p:cNvPr id="28" name="Ink 27">
@@ -17244,8 +18705,8 @@
             </p:pic>
           </mc:Fallback>
         </mc:AlternateContent>
-        <mc:AlternateContent xmlns:mc="http://schemas.openxmlformats.org/markup-compatibility/2006">
-          <mc:Choice xmlns:p14="http://schemas.microsoft.com/office/powerpoint/2010/main" Requires="p14">
+        <mc:AlternateContent xmlns:mc="http://schemas.openxmlformats.org/markup-compatibility/2006" xmlns:p14="http://schemas.microsoft.com/office/powerpoint/2010/main">
+          <mc:Choice Requires="p14">
             <p:contentPart p14:bwMode="auto" r:id="rId19">
               <p14:nvContentPartPr>
                 <p14:cNvPr id="29" name="Ink 28">
@@ -17264,7 +18725,7 @@
               </p14:xfrm>
             </p:contentPart>
           </mc:Choice>
-          <mc:Fallback>
+          <mc:Fallback xmlns="">
             <p:pic>
               <p:nvPicPr>
                 <p:cNvPr id="29" name="Ink 28">
@@ -17363,8 +18824,8 @@
             <a:chExt cx="507960" cy="951480"/>
           </a:xfrm>
         </p:grpSpPr>
-        <mc:AlternateContent xmlns:mc="http://schemas.openxmlformats.org/markup-compatibility/2006">
-          <mc:Choice xmlns:p14="http://schemas.microsoft.com/office/powerpoint/2010/main" Requires="p14">
+        <mc:AlternateContent xmlns:mc="http://schemas.openxmlformats.org/markup-compatibility/2006" xmlns:p14="http://schemas.microsoft.com/office/powerpoint/2010/main">
+          <mc:Choice Requires="p14">
             <p:contentPart p14:bwMode="auto" r:id="rId22">
               <p14:nvContentPartPr>
                 <p14:cNvPr id="32" name="Ink 31">
@@ -17383,7 +18844,7 @@
               </p14:xfrm>
             </p:contentPart>
           </mc:Choice>
-          <mc:Fallback>
+          <mc:Fallback xmlns="">
             <p:pic>
               <p:nvPicPr>
                 <p:cNvPr id="32" name="Ink 31">
@@ -17414,8 +18875,8 @@
             </p:pic>
           </mc:Fallback>
         </mc:AlternateContent>
-        <mc:AlternateContent xmlns:mc="http://schemas.openxmlformats.org/markup-compatibility/2006">
-          <mc:Choice xmlns:p14="http://schemas.microsoft.com/office/powerpoint/2010/main" Requires="p14">
+        <mc:AlternateContent xmlns:mc="http://schemas.openxmlformats.org/markup-compatibility/2006" xmlns:p14="http://schemas.microsoft.com/office/powerpoint/2010/main">
+          <mc:Choice Requires="p14">
             <p:contentPart p14:bwMode="auto" r:id="rId24">
               <p14:nvContentPartPr>
                 <p14:cNvPr id="33" name="Ink 32">
@@ -17434,7 +18895,7 @@
               </p14:xfrm>
             </p:contentPart>
           </mc:Choice>
-          <mc:Fallback>
+          <mc:Fallback xmlns="">
             <p:pic>
               <p:nvPicPr>
                 <p:cNvPr id="33" name="Ink 32">
@@ -18121,37 +19582,7 @@
 </p:sld>
 </file>
 
-<file path=ppt/slides/slide2.xml><?xml version="1.0" encoding="utf-8"?>
-<p:sld xmlns:a="http://schemas.openxmlformats.org/drawingml/2006/main" xmlns:r="http://schemas.openxmlformats.org/officeDocument/2006/relationships" xmlns:p="http://schemas.openxmlformats.org/presentationml/2006/main">
-  <p:cSld>
-    <p:spTree>
-      <p:nvGrpSpPr>
-        <p:cNvPr id="1" name=""/>
-        <p:cNvGrpSpPr/>
-        <p:nvPr/>
-      </p:nvGrpSpPr>
-      <p:grpSpPr>
-        <a:xfrm>
-          <a:off x="0" y="0"/>
-          <a:ext cx="0" cy="0"/>
-          <a:chOff x="0" y="0"/>
-          <a:chExt cx="0" cy="0"/>
-        </a:xfrm>
-      </p:grpSpPr>
-    </p:spTree>
-    <p:extLst>
-      <p:ext uri="{BB962C8B-B14F-4D97-AF65-F5344CB8AC3E}">
-        <p14:creationId xmlns:p14="http://schemas.microsoft.com/office/powerpoint/2010/main" val="1544377309"/>
-      </p:ext>
-    </p:extLst>
-  </p:cSld>
-  <p:clrMapOvr>
-    <a:masterClrMapping/>
-  </p:clrMapOvr>
-</p:sld>
-</file>
-
-<file path=ppt/slides/slide20.xml><?xml version="1.0" encoding="utf-8"?>
+<file path=ppt/slides/slide22.xml><?xml version="1.0" encoding="utf-8"?>
 <p:sld xmlns:a="http://schemas.openxmlformats.org/drawingml/2006/main" xmlns:r="http://schemas.openxmlformats.org/officeDocument/2006/relationships" xmlns:p="http://schemas.openxmlformats.org/presentationml/2006/main">
   <p:cSld>
     <p:spTree>
@@ -18207,8 +19638,8 @@
         </p:nvSpPr>
         <p:spPr>
           <a:xfrm>
-            <a:off x="241300" y="2220913"/>
-            <a:ext cx="16396804" cy="6742112"/>
+            <a:off x="241299" y="2220913"/>
+            <a:ext cx="18514534" cy="6742112"/>
           </a:xfrm>
         </p:spPr>
         <p:txBody>
@@ -18233,9 +19664,9 @@
             <a:r>
               <a:rPr lang="en-US" sz="4800" dirty="0">
                 <a:solidFill>
-                  <a:srgbClr val="E3E8F2"/>
-                </a:solidFill>
-                <a:latin typeface="Segoe UI" panose="020B0609020000020004" pitchFamily="34" charset="0"/>
+                  <a:srgbClr val="FFC000"/>
+                </a:solidFill>
+                <a:latin typeface="Cascadia Code" panose="020B0609020000020004" pitchFamily="34" charset="0"/>
                 <a:ea typeface="Cascadia Code" panose="020B0609020000020004" pitchFamily="34" charset="0"/>
                 <a:cs typeface="Cascadia Code" panose="020B0609020000020004" pitchFamily="34" charset="0"/>
               </a:rPr>
@@ -18274,9 +19705,9 @@
             <a:r>
               <a:rPr lang="en-US" sz="4800" dirty="0" err="1">
                 <a:solidFill>
-                  <a:srgbClr val="E3E8F2"/>
-                </a:solidFill>
-                <a:latin typeface="Segoe UI" panose="020B0609020000020004" pitchFamily="34" charset="0"/>
+                  <a:srgbClr val="FFC000"/>
+                </a:solidFill>
+                <a:latin typeface="Cascadia Code" panose="020B0609020000020004" pitchFamily="34" charset="0"/>
                 <a:ea typeface="Cascadia Code" panose="020B0609020000020004" pitchFamily="34" charset="0"/>
                 <a:cs typeface="Cascadia Code" panose="020B0609020000020004" pitchFamily="34" charset="0"/>
               </a:rPr>
@@ -18333,8 +19764,9 @@
             <a:r>
               <a:rPr lang="en-US" sz="4800" b="1" dirty="0">
                 <a:solidFill>
-                  <a:srgbClr val="F7F9FF"/>
-                </a:solidFill>
+                  <a:srgbClr val="FFC000"/>
+                </a:solidFill>
+                <a:latin typeface="Cascadia Code" panose="020B0609020000020004" pitchFamily="34" charset="0"/>
                 <a:ea typeface="Cascadia Code" panose="020B0609020000020004" pitchFamily="34" charset="0"/>
                 <a:cs typeface="Cascadia Code" panose="020B0609020000020004" pitchFamily="34" charset="0"/>
               </a:rPr>
@@ -18373,9 +19805,9 @@
             <a:r>
               <a:rPr lang="en-US" sz="4800" dirty="0" err="1">
                 <a:solidFill>
-                  <a:srgbClr val="E3E8F2"/>
-                </a:solidFill>
-                <a:latin typeface="Segoe UI" panose="020B0609020000020004" pitchFamily="34" charset="0"/>
+                  <a:srgbClr val="FFC000"/>
+                </a:solidFill>
+                <a:latin typeface="Cascadia Code" panose="020B0609020000020004" pitchFamily="34" charset="0"/>
                 <a:ea typeface="Cascadia Code" panose="020B0609020000020004" pitchFamily="34" charset="0"/>
                 <a:cs typeface="Cascadia Code" panose="020B0609020000020004" pitchFamily="34" charset="0"/>
               </a:rPr>
@@ -18384,9 +19816,9 @@
             <a:r>
               <a:rPr lang="en-US" sz="4800" dirty="0">
                 <a:solidFill>
-                  <a:srgbClr val="E3E8F2"/>
-                </a:solidFill>
-                <a:latin typeface="Segoe UI" panose="020B0609020000020004" pitchFamily="34" charset="0"/>
+                  <a:srgbClr val="FFC000"/>
+                </a:solidFill>
+                <a:latin typeface="Cascadia Code" panose="020B0609020000020004" pitchFamily="34" charset="0"/>
                 <a:ea typeface="Cascadia Code" panose="020B0609020000020004" pitchFamily="34" charset="0"/>
                 <a:cs typeface="Cascadia Code" panose="020B0609020000020004" pitchFamily="34" charset="0"/>
               </a:rPr>
@@ -18968,7 +20400,7 @@
 </p:sld>
 </file>
 
-<file path=ppt/slides/slide21.xml><?xml version="1.0" encoding="utf-8"?>
+<file path=ppt/slides/slide23.xml><?xml version="1.0" encoding="utf-8"?>
 <p:sld xmlns:a="http://schemas.openxmlformats.org/drawingml/2006/main" xmlns:r="http://schemas.openxmlformats.org/officeDocument/2006/relationships" xmlns:p="http://schemas.openxmlformats.org/presentationml/2006/main">
   <p:cSld>
     <p:spTree>
@@ -19152,9 +20584,9 @@
             <a:r>
               <a:rPr lang="en-US" sz="4400" b="1" dirty="0" err="1">
                 <a:solidFill>
-                  <a:srgbClr val="F7F9FF"/>
-                </a:solidFill>
-                <a:latin typeface="Segoe UI" panose="020B0609020000020004" pitchFamily="34" charset="0"/>
+                  <a:srgbClr val="FFC000"/>
+                </a:solidFill>
+                <a:latin typeface="Cascadia Code" panose="020B0609020000020004" pitchFamily="34" charset="0"/>
                 <a:ea typeface="Cascadia Code" panose="020B0609020000020004" pitchFamily="34" charset="0"/>
                 <a:cs typeface="Cascadia Code" panose="020B0609020000020004" pitchFamily="34" charset="0"/>
               </a:rPr>
@@ -20275,7 +21707,7 @@
 </p:sld>
 </file>
 
-<file path=ppt/slides/slide22.xml><?xml version="1.0" encoding="utf-8"?>
+<file path=ppt/slides/slide24.xml><?xml version="1.0" encoding="utf-8"?>
 <p:sld xmlns:a="http://schemas.openxmlformats.org/drawingml/2006/main" xmlns:r="http://schemas.openxmlformats.org/officeDocument/2006/relationships" xmlns:p="http://schemas.openxmlformats.org/presentationml/2006/main">
   <p:cSld>
     <p:spTree>
@@ -20321,7 +21753,7 @@
 </p:sld>
 </file>
 
-<file path=ppt/slides/slide23.xml><?xml version="1.0" encoding="utf-8"?>
+<file path=ppt/slides/slide25.xml><?xml version="1.0" encoding="utf-8"?>
 <p:sld xmlns:a="http://schemas.openxmlformats.org/drawingml/2006/main" xmlns:r="http://schemas.openxmlformats.org/officeDocument/2006/relationships" xmlns:p="http://schemas.openxmlformats.org/presentationml/2006/main">
   <p:cSld>
     <p:spTree>
@@ -20354,7 +21786,16 @@
           <a:lstStyle/>
           <a:p>
             <a:r>
-              <a:rPr>
+              <a:rPr lang="sv-SE" dirty="0">
+                <a:solidFill>
+                  <a:srgbClr val="F7F9FF"/>
+                </a:solidFill>
+                <a:latin typeface="Segoe UI Semibold"/>
+              </a:rPr>
+              <a:t>ARG </a:t>
+            </a:r>
+            <a:r>
+              <a:rPr dirty="0">
                 <a:solidFill>
                   <a:srgbClr val="F7F9FF"/>
                 </a:solidFill>
@@ -20575,6 +22016,16 @@
                 <a:latin typeface="Segoe UI" panose="020B0502040204020203" pitchFamily="34" charset="0"/>
                 <a:cs typeface="Segoe UI" panose="020B0502040204020203" pitchFamily="34" charset="0"/>
               </a:rPr>
+              <a:t> </a:t>
+            </a:r>
+            <a:r>
+              <a:rPr lang="en-US" dirty="0">
+                <a:solidFill>
+                  <a:srgbClr val="FFC000"/>
+                </a:solidFill>
+                <a:latin typeface="Segoe UI" panose="020B0502040204020203" pitchFamily="34" charset="0"/>
+                <a:cs typeface="Segoe UI" panose="020B0502040204020203" pitchFamily="34" charset="0"/>
+              </a:rPr>
               <a:t>Implement pagination</a:t>
             </a:r>
           </a:p>
@@ -20594,7 +22045,7 @@
           <a:p>
             <a:pPr lvl="1"/>
             <a:r>
-              <a:rPr lang="en-US" sz="4400" dirty="0">
+              <a:rPr lang="en-US" sz="4000" dirty="0">
                 <a:solidFill>
                   <a:srgbClr val="FFC000"/>
                 </a:solidFill>
@@ -20602,10 +22053,10 @@
                 <a:ea typeface="Cascadia Code" panose="020B0609020000020004" pitchFamily="34" charset="0"/>
                 <a:cs typeface="Segoe UI" panose="020B0502040204020203" pitchFamily="34" charset="0"/>
               </a:rPr>
-              <a:t>x-</a:t>
-            </a:r>
-            <a:r>
-              <a:rPr lang="en-US" sz="4400" dirty="0" err="1">
+              <a:t> </a:t>
+            </a:r>
+            <a:r>
+              <a:rPr lang="en-US" dirty="0">
                 <a:solidFill>
                   <a:srgbClr val="FFC000"/>
                 </a:solidFill>
@@ -20613,10 +22064,10 @@
                 <a:ea typeface="Cascadia Code" panose="020B0609020000020004" pitchFamily="34" charset="0"/>
                 <a:cs typeface="Segoe UI" panose="020B0502040204020203" pitchFamily="34" charset="0"/>
               </a:rPr>
-              <a:t>ms</a:t>
-            </a:r>
-            <a:r>
-              <a:rPr lang="en-US" sz="4400" dirty="0">
+              <a:t>x-</a:t>
+            </a:r>
+            <a:r>
+              <a:rPr lang="en-US" dirty="0" err="1">
                 <a:solidFill>
                   <a:srgbClr val="FFC000"/>
                 </a:solidFill>
@@ -20624,9 +22075,20 @@
                 <a:ea typeface="Cascadia Code" panose="020B0609020000020004" pitchFamily="34" charset="0"/>
                 <a:cs typeface="Segoe UI" panose="020B0502040204020203" pitchFamily="34" charset="0"/>
               </a:rPr>
+              <a:t>ms</a:t>
+            </a:r>
+            <a:r>
+              <a:rPr lang="en-US" dirty="0">
+                <a:solidFill>
+                  <a:srgbClr val="FFC000"/>
+                </a:solidFill>
+                <a:latin typeface="Segoe UI" panose="020B0502040204020203" pitchFamily="34" charset="0"/>
+                <a:ea typeface="Cascadia Code" panose="020B0609020000020004" pitchFamily="34" charset="0"/>
+                <a:cs typeface="Segoe UI" panose="020B0502040204020203" pitchFamily="34" charset="0"/>
+              </a:rPr>
               <a:t>-user-quota-remaining</a:t>
             </a:r>
-            <a:endParaRPr lang="en-US" sz="4400" dirty="0">
+            <a:endParaRPr lang="en-US" dirty="0">
               <a:solidFill>
                 <a:srgbClr val="FFC000"/>
               </a:solidFill>
@@ -21426,7 +22888,7 @@
 </p:sld>
 </file>
 
-<file path=ppt/slides/slide24.xml><?xml version="1.0" encoding="utf-8"?>
+<file path=ppt/slides/slide26.xml><?xml version="1.0" encoding="utf-8"?>
 <p:sld xmlns:a="http://schemas.openxmlformats.org/drawingml/2006/main" xmlns:r="http://schemas.openxmlformats.org/officeDocument/2006/relationships" xmlns:p="http://schemas.openxmlformats.org/presentationml/2006/main">
   <p:cSld>
     <p:spTree>
@@ -22175,8 +23637,8 @@
           </a:p>
         </p:txBody>
       </p:sp>
-      <mc:AlternateContent xmlns:mc="http://schemas.openxmlformats.org/markup-compatibility/2006">
-        <mc:Choice xmlns:p14="http://schemas.microsoft.com/office/powerpoint/2010/main" Requires="p14">
+      <mc:AlternateContent xmlns:mc="http://schemas.openxmlformats.org/markup-compatibility/2006" xmlns:p14="http://schemas.microsoft.com/office/powerpoint/2010/main">
+        <mc:Choice Requires="p14">
           <p:contentPart p14:bwMode="auto" r:id="rId7">
             <p14:nvContentPartPr>
               <p14:cNvPr id="17" name="Ink 16">
@@ -22195,7 +23657,7 @@
             </p14:xfrm>
           </p:contentPart>
         </mc:Choice>
-        <mc:Fallback>
+        <mc:Fallback xmlns="">
           <p:pic>
             <p:nvPicPr>
               <p:cNvPr id="17" name="Ink 16">
@@ -23023,7 +24485,7 @@
 </p:sld>
 </file>
 
-<file path=ppt/slides/slide25.xml><?xml version="1.0" encoding="utf-8"?>
+<file path=ppt/slides/slide27.xml><?xml version="1.0" encoding="utf-8"?>
 <p:sld xmlns:a="http://schemas.openxmlformats.org/drawingml/2006/main" xmlns:r="http://schemas.openxmlformats.org/officeDocument/2006/relationships" xmlns:p="http://schemas.openxmlformats.org/presentationml/2006/main">
   <p:cSld>
     <p:spTree>
@@ -23056,13 +24518,22 @@
           <a:lstStyle/>
           <a:p>
             <a:r>
-              <a:rPr>
+              <a:rPr lang="sv-SE" dirty="0">
                 <a:solidFill>
                   <a:srgbClr val="F7F9FF"/>
                 </a:solidFill>
                 <a:latin typeface="Segoe UI Semibold"/>
               </a:rPr>
-              <a:t>Azure Resource Graph in Dashboards</a:t>
+              <a:t>ARG </a:t>
+            </a:r>
+            <a:r>
+              <a:rPr dirty="0">
+                <a:solidFill>
+                  <a:srgbClr val="F7F9FF"/>
+                </a:solidFill>
+                <a:latin typeface="Segoe UI Semibold"/>
+              </a:rPr>
+              <a:t>in Dashboards</a:t>
             </a:r>
           </a:p>
         </p:txBody>
@@ -23095,7 +24566,7 @@
         </p:blipFill>
         <p:spPr>
           <a:xfrm>
-            <a:off x="4893468" y="892968"/>
+            <a:off x="4893468" y="1364255"/>
             <a:ext cx="8501064" cy="8501064"/>
           </a:xfrm>
           <a:prstGeom prst="rect">
@@ -23111,7 +24582,7 @@
 </p:sld>
 </file>
 
-<file path=ppt/slides/slide26.xml><?xml version="1.0" encoding="utf-8"?>
+<file path=ppt/slides/slide28.xml><?xml version="1.0" encoding="utf-8"?>
 <p:sld xmlns:a="http://schemas.openxmlformats.org/drawingml/2006/main" xmlns:r="http://schemas.openxmlformats.org/officeDocument/2006/relationships" xmlns:p="http://schemas.openxmlformats.org/presentationml/2006/main">
   <p:cSld>
     <p:spTree>
@@ -23157,7 +24628,7 @@
 </p:sld>
 </file>
 
-<file path=ppt/slides/slide27.xml><?xml version="1.0" encoding="utf-8"?>
+<file path=ppt/slides/slide29.xml><?xml version="1.0" encoding="utf-8"?>
 <p:sld xmlns:a="http://schemas.openxmlformats.org/drawingml/2006/main" xmlns:r="http://schemas.openxmlformats.org/officeDocument/2006/relationships" xmlns:p="http://schemas.openxmlformats.org/presentationml/2006/main">
   <p:cSld>
     <p:spTree>
@@ -23985,7 +25456,749 @@
 </p:sld>
 </file>
 
-<file path=ppt/slides/slide28.xml><?xml version="1.0" encoding="utf-8"?>
+<file path=ppt/slides/slide3.xml><?xml version="1.0" encoding="utf-8"?>
+<p:sld xmlns:a="http://schemas.openxmlformats.org/drawingml/2006/main" xmlns:r="http://schemas.openxmlformats.org/officeDocument/2006/relationships" xmlns:p="http://schemas.openxmlformats.org/presentationml/2006/main">
+  <p:cSld>
+    <p:spTree>
+      <p:nvGrpSpPr>
+        <p:cNvPr id="1" name=""/>
+        <p:cNvGrpSpPr/>
+        <p:nvPr/>
+      </p:nvGrpSpPr>
+      <p:grpSpPr>
+        <a:xfrm>
+          <a:off x="0" y="0"/>
+          <a:ext cx="0" cy="0"/>
+          <a:chOff x="0" y="0"/>
+          <a:chExt cx="0" cy="0"/>
+        </a:xfrm>
+      </p:grpSpPr>
+      <p:sp>
+        <p:nvSpPr>
+          <p:cNvPr id="9000" name="Text Placeholder 1"/>
+          <p:cNvSpPr>
+            <a:spLocks noGrp="1"/>
+          </p:cNvSpPr>
+          <p:nvPr>
+            <p:ph type="body" sz="quarter" idx="11"/>
+          </p:nvPr>
+        </p:nvSpPr>
+        <p:spPr/>
+        <p:txBody>
+          <a:bodyPr/>
+          <a:lstStyle/>
+          <a:p>
+            <a:r>
+              <a:rPr dirty="0">
+                <a:latin typeface="Segoe UI" panose="020B0502040204020203" pitchFamily="34" charset="0"/>
+                <a:cs typeface="Segoe UI" panose="020B0502040204020203" pitchFamily="34" charset="0"/>
+              </a:rPr>
+              <a:t>Emanuel Palm</a:t>
+            </a:r>
+          </a:p>
+        </p:txBody>
+      </p:sp>
+      <p:sp>
+        <p:nvSpPr>
+          <p:cNvPr id="9001" name="Text Placeholder 2"/>
+          <p:cNvSpPr>
+            <a:spLocks noGrp="1"/>
+          </p:cNvSpPr>
+          <p:nvPr>
+            <p:ph type="body" sz="quarter" idx="13"/>
+          </p:nvPr>
+        </p:nvSpPr>
+        <p:spPr>
+          <a:xfrm>
+            <a:off x="1274902" y="3333922"/>
+            <a:ext cx="10210363" cy="3205349"/>
+          </a:xfrm>
+        </p:spPr>
+        <p:txBody>
+          <a:bodyPr/>
+          <a:lstStyle/>
+          <a:p>
+            <a:pPr>
+              <a:lnSpc>
+                <a:spcPct val="150000"/>
+              </a:lnSpc>
+            </a:pPr>
+            <a:r>
+              <a:rPr lang="en-US" dirty="0">
+                <a:solidFill>
+                  <a:srgbClr val="E3E8F2"/>
+                </a:solidFill>
+                <a:latin typeface="Segoe UI"/>
+              </a:rPr>
+              <a:t>💙 Everything-as-Code</a:t>
+            </a:r>
+            <a:endParaRPr dirty="0">
+              <a:solidFill>
+                <a:srgbClr val="E3E8F2"/>
+              </a:solidFill>
+              <a:latin typeface="Segoe UI"/>
+            </a:endParaRPr>
+          </a:p>
+          <a:p>
+            <a:pPr>
+              <a:lnSpc>
+                <a:spcPct val="150000"/>
+              </a:lnSpc>
+            </a:pPr>
+            <a:r>
+              <a:rPr lang="en-US" dirty="0">
+                <a:solidFill>
+                  <a:srgbClr val="E3E8F2"/>
+                </a:solidFill>
+                <a:latin typeface="Segoe UI"/>
+              </a:rPr>
+              <a:t>📦 Makes modules &amp; tools</a:t>
+            </a:r>
+            <a:endParaRPr dirty="0">
+              <a:solidFill>
+                <a:srgbClr val="E3E8F2"/>
+              </a:solidFill>
+              <a:latin typeface="Segoe UI"/>
+            </a:endParaRPr>
+          </a:p>
+          <a:p>
+            <a:pPr>
+              <a:lnSpc>
+                <a:spcPct val="150000"/>
+              </a:lnSpc>
+            </a:pPr>
+            <a:r>
+              <a:rPr lang="en-US" dirty="0">
+                <a:solidFill>
+                  <a:srgbClr val="E3E8F2"/>
+                </a:solidFill>
+                <a:latin typeface="Segoe UI"/>
+              </a:rPr>
+              <a:t>📃 Fan of Open Source</a:t>
+            </a:r>
+          </a:p>
+        </p:txBody>
+      </p:sp>
+      <p:sp>
+        <p:nvSpPr>
+          <p:cNvPr id="9003" name="Text Placeholder 4"/>
+          <p:cNvSpPr>
+            <a:spLocks noGrp="1"/>
+          </p:cNvSpPr>
+          <p:nvPr>
+            <p:ph type="body" sz="quarter" idx="15"/>
+          </p:nvPr>
+        </p:nvSpPr>
+        <p:spPr/>
+        <p:txBody>
+          <a:bodyPr/>
+          <a:lstStyle/>
+          <a:p>
+            <a:r>
+              <a:rPr sz="2800" dirty="0">
+                <a:latin typeface="Segoe UI" panose="020B0502040204020203" pitchFamily="34" charset="0"/>
+                <a:cs typeface="Segoe UI" panose="020B0502040204020203" pitchFamily="34" charset="0"/>
+              </a:rPr>
+              <a:t>Cloud Specialist </a:t>
+            </a:r>
+            <a:r>
+              <a:rPr lang="sv-SE" sz="2800" dirty="0">
+                <a:latin typeface="Segoe UI" panose="020B0502040204020203" pitchFamily="34" charset="0"/>
+                <a:cs typeface="Segoe UI" panose="020B0502040204020203" pitchFamily="34" charset="0"/>
+              </a:rPr>
+              <a:t>&amp; Microsoft MVP </a:t>
+            </a:r>
+            <a:r>
+              <a:rPr sz="2800" dirty="0">
+                <a:latin typeface="Segoe UI" panose="020B0502040204020203" pitchFamily="34" charset="0"/>
+                <a:cs typeface="Segoe UI" panose="020B0502040204020203" pitchFamily="34" charset="0"/>
+              </a:rPr>
+              <a:t>@ </a:t>
+            </a:r>
+            <a:r>
+              <a:rPr sz="2800" dirty="0">
+                <a:solidFill>
+                  <a:srgbClr val="FFC000"/>
+                </a:solidFill>
+                <a:latin typeface="Segoe UI" panose="020B0502040204020203" pitchFamily="34" charset="0"/>
+                <a:cs typeface="Segoe UI" panose="020B0502040204020203" pitchFamily="34" charset="0"/>
+              </a:rPr>
+              <a:t>Unwonted</a:t>
+            </a:r>
+          </a:p>
+        </p:txBody>
+      </p:sp>
+      <p:pic>
+        <p:nvPicPr>
+          <p:cNvPr id="9004" name="Picture Placeholder 5" descr="speakerpng"/>
+          <p:cNvPicPr>
+            <a:picLocks noGrp="1" noChangeAspect="1"/>
+          </p:cNvPicPr>
+          <p:nvPr>
+            <p:ph type="pic" sz="quarter" idx="22"/>
+          </p:nvPr>
+        </p:nvPicPr>
+        <p:blipFill>
+          <a:blip r:embed="rId2"/>
+          <a:srcRect t="748" b="748"/>
+          <a:stretch>
+            <a:fillRect/>
+          </a:stretch>
+        </p:blipFill>
+        <p:spPr>
+          <a:xfrm>
+            <a:off x="13849356" y="1074553"/>
+            <a:ext cx="4154328" cy="4092197"/>
+          </a:xfrm>
+        </p:spPr>
+      </p:pic>
+      <p:grpSp>
+        <p:nvGrpSpPr>
+          <p:cNvPr id="12" name="Group 11">
+            <a:extLst>
+              <a:ext uri="{FF2B5EF4-FFF2-40B4-BE49-F238E27FC236}">
+                <a16:creationId xmlns:a16="http://schemas.microsoft.com/office/drawing/2014/main" id="{002EC189-BAB5-A069-D15C-6BCC0ED0CA3E}"/>
+              </a:ext>
+            </a:extLst>
+          </p:cNvPr>
+          <p:cNvGrpSpPr/>
+          <p:nvPr/>
+        </p:nvGrpSpPr>
+        <p:grpSpPr>
+          <a:xfrm>
+            <a:off x="1274902" y="6911462"/>
+            <a:ext cx="2200000" cy="511955"/>
+            <a:chOff x="9775935" y="6229126"/>
+            <a:chExt cx="1691379" cy="393596"/>
+          </a:xfrm>
+        </p:grpSpPr>
+        <p:pic>
+          <p:nvPicPr>
+            <p:cNvPr id="13" name="Graphic 56">
+              <a:extLst>
+                <a:ext uri="{FF2B5EF4-FFF2-40B4-BE49-F238E27FC236}">
+                  <a16:creationId xmlns:a16="http://schemas.microsoft.com/office/drawing/2014/main" id="{2A2DC6F3-9A88-72E8-D65C-2960114891CD}"/>
+                </a:ext>
+              </a:extLst>
+            </p:cNvPr>
+            <p:cNvPicPr>
+              <a:picLocks noChangeAspect="1"/>
+            </p:cNvPicPr>
+            <p:nvPr/>
+          </p:nvPicPr>
+          <p:blipFill>
+            <a:blip>
+              <a:extLst>
+                <a:ext uri="{96DAC541-7B7A-43D3-8B79-37D633B846F1}">
+                  <asvg:svgBlip xmlns:asvg="http://schemas.microsoft.com/office/drawing/2016/SVG/main" r:embed="rId3"/>
+                </a:ext>
+              </a:extLst>
+            </a:blip>
+            <a:srcRect/>
+            <a:stretch/>
+          </p:blipFill>
+          <p:spPr>
+            <a:xfrm>
+              <a:off x="10280577" y="6229126"/>
+              <a:ext cx="391207" cy="383223"/>
+            </a:xfrm>
+            <a:prstGeom prst="rect">
+              <a:avLst/>
+            </a:prstGeom>
+            <a:effectLst/>
+          </p:spPr>
+        </p:pic>
+        <p:pic>
+          <p:nvPicPr>
+            <p:cNvPr id="14" name="Graphic 56">
+              <a:extLst>
+                <a:ext uri="{FF2B5EF4-FFF2-40B4-BE49-F238E27FC236}">
+                  <a16:creationId xmlns:a16="http://schemas.microsoft.com/office/drawing/2014/main" id="{3F619B66-E565-FA04-2496-F7DC352A9BB8}"/>
+                </a:ext>
+              </a:extLst>
+            </p:cNvPr>
+            <p:cNvPicPr>
+              <a:picLocks noChangeAspect="1"/>
+            </p:cNvPicPr>
+            <p:nvPr/>
+          </p:nvPicPr>
+          <p:blipFill>
+            <a:blip r:embed="rId4"/>
+            <a:srcRect/>
+            <a:stretch/>
+          </p:blipFill>
+          <p:spPr>
+            <a:xfrm>
+              <a:off x="10696834" y="6263498"/>
+              <a:ext cx="320788" cy="327874"/>
+            </a:xfrm>
+            <a:prstGeom prst="rect">
+              <a:avLst/>
+            </a:prstGeom>
+            <a:effectLst/>
+          </p:spPr>
+        </p:pic>
+        <p:pic>
+          <p:nvPicPr>
+            <p:cNvPr id="15" name="Picture 14" descr="A black and white logo&#10;&#10;Description automatically generated">
+              <a:extLst>
+                <a:ext uri="{FF2B5EF4-FFF2-40B4-BE49-F238E27FC236}">
+                  <a16:creationId xmlns:a16="http://schemas.microsoft.com/office/drawing/2014/main" id="{0B82BB6F-ADC7-9511-BB28-0CDDA5B50003}"/>
+                </a:ext>
+              </a:extLst>
+            </p:cNvPr>
+            <p:cNvPicPr>
+              <a:picLocks noChangeAspect="1"/>
+            </p:cNvPicPr>
+            <p:nvPr/>
+          </p:nvPicPr>
+          <p:blipFill>
+            <a:blip r:embed="rId5"/>
+            <a:stretch>
+              <a:fillRect/>
+            </a:stretch>
+          </p:blipFill>
+          <p:spPr>
+            <a:xfrm>
+              <a:off x="11083688" y="6239096"/>
+              <a:ext cx="383626" cy="383626"/>
+            </a:xfrm>
+            <a:prstGeom prst="rect">
+              <a:avLst/>
+            </a:prstGeom>
+          </p:spPr>
+        </p:pic>
+        <p:pic>
+          <p:nvPicPr>
+            <p:cNvPr id="16" name="Picture 15" descr="A blue butterfly on a black background&#10;&#10;AI-generated content may be incorrect.">
+              <a:extLst>
+                <a:ext uri="{FF2B5EF4-FFF2-40B4-BE49-F238E27FC236}">
+                  <a16:creationId xmlns:a16="http://schemas.microsoft.com/office/drawing/2014/main" id="{0FCF77FA-238D-FBC0-366F-94F44C3B36E2}"/>
+                </a:ext>
+              </a:extLst>
+            </p:cNvPr>
+            <p:cNvPicPr>
+              <a:picLocks noChangeAspect="1"/>
+            </p:cNvPicPr>
+            <p:nvPr/>
+          </p:nvPicPr>
+          <p:blipFill>
+            <a:blip r:embed="rId6">
+              <a:biLevel thresh="25000"/>
+              <a:extLst>
+                <a:ext uri="{28A0092B-C50C-407E-A947-70E740481C1C}">
+                  <a14:useLocalDpi xmlns:a14="http://schemas.microsoft.com/office/drawing/2010/main" val="0"/>
+                </a:ext>
+              </a:extLst>
+            </a:blip>
+            <a:stretch>
+              <a:fillRect/>
+            </a:stretch>
+          </p:blipFill>
+          <p:spPr>
+            <a:xfrm>
+              <a:off x="9775935" y="6240132"/>
+              <a:ext cx="438576" cy="382589"/>
+            </a:xfrm>
+            <a:prstGeom prst="rect">
+              <a:avLst/>
+            </a:prstGeom>
+            <a:noFill/>
+            <a:ln>
+              <a:noFill/>
+            </a:ln>
+          </p:spPr>
+        </p:pic>
+      </p:grpSp>
+      <p:sp>
+        <p:nvSpPr>
+          <p:cNvPr id="9005" name="TextBox 9004"/>
+          <p:cNvSpPr txBox="1"/>
+          <p:nvPr/>
+        </p:nvSpPr>
+        <p:spPr>
+          <a:xfrm>
+            <a:off x="3529486" y="6837527"/>
+            <a:ext cx="3443571" cy="646331"/>
+          </a:xfrm>
+          <a:prstGeom prst="rect">
+            <a:avLst/>
+          </a:prstGeom>
+          <a:noFill/>
+        </p:spPr>
+        <p:txBody>
+          <a:bodyPr wrap="none" anchor="ctr">
+            <a:spAutoFit/>
+          </a:bodyPr>
+          <a:lstStyle/>
+          <a:p>
+            <a:r>
+              <a:rPr sz="3600">
+                <a:solidFill>
+                  <a:srgbClr val="E3E8F2"/>
+                </a:solidFill>
+                <a:latin typeface="Segoe UI Semibold"/>
+              </a:rPr>
+              <a:t>@PalmEmanuel</a:t>
+            </a:r>
+          </a:p>
+        </p:txBody>
+      </p:sp>
+      <p:pic>
+        <p:nvPicPr>
+          <p:cNvPr id="6" name="Picture 5" descr="A logo with a white cloud and a colorful circle&#10;&#10;Description automatically generated">
+            <a:extLst>
+              <a:ext uri="{FF2B5EF4-FFF2-40B4-BE49-F238E27FC236}">
+                <a16:creationId xmlns:a16="http://schemas.microsoft.com/office/drawing/2014/main" id="{2BED39B6-1FCD-A92F-1634-0E73D80CDF88}"/>
+              </a:ext>
+            </a:extLst>
+          </p:cNvPr>
+          <p:cNvPicPr>
+            <a:picLocks noChangeAspect="1"/>
+          </p:cNvPicPr>
+          <p:nvPr/>
+        </p:nvPicPr>
+        <p:blipFill>
+          <a:blip r:embed="rId7">
+            <a:extLst>
+              <a:ext uri="{28A0092B-C50C-407E-A947-70E740481C1C}">
+                <a14:useLocalDpi xmlns:a14="http://schemas.microsoft.com/office/drawing/2010/main" val="0"/>
+              </a:ext>
+            </a:extLst>
+          </a:blip>
+          <a:stretch>
+            <a:fillRect/>
+          </a:stretch>
+        </p:blipFill>
+        <p:spPr>
+          <a:xfrm>
+            <a:off x="14133671" y="6075080"/>
+            <a:ext cx="3585697" cy="3585697"/>
+          </a:xfrm>
+          <a:prstGeom prst="rect">
+            <a:avLst/>
+          </a:prstGeom>
+        </p:spPr>
+      </p:pic>
+      <p:sp>
+        <p:nvSpPr>
+          <p:cNvPr id="2" name="TextBox 1">
+            <a:extLst>
+              <a:ext uri="{FF2B5EF4-FFF2-40B4-BE49-F238E27FC236}">
+                <a16:creationId xmlns:a16="http://schemas.microsoft.com/office/drawing/2014/main" id="{6C7ECB76-DFAC-4C64-E4FA-0B3F83F73000}"/>
+              </a:ext>
+            </a:extLst>
+          </p:cNvPr>
+          <p:cNvSpPr txBox="1"/>
+          <p:nvPr/>
+        </p:nvSpPr>
+        <p:spPr>
+          <a:xfrm>
+            <a:off x="981228" y="5521082"/>
+            <a:ext cx="4987348" cy="1107996"/>
+          </a:xfrm>
+          <a:prstGeom prst="rect">
+            <a:avLst/>
+          </a:prstGeom>
+          <a:noFill/>
+        </p:spPr>
+        <p:txBody>
+          <a:bodyPr wrap="square" rtlCol="0">
+            <a:spAutoFit/>
+          </a:bodyPr>
+          <a:lstStyle/>
+          <a:p>
+            <a:pPr algn="ctr"/>
+            <a:r>
+              <a:rPr lang="sv-SE" sz="6600" dirty="0"/>
+              <a:t>🏃</a:t>
+            </a:r>
+            <a:r>
+              <a:rPr lang="en-US" sz="6600" dirty="0"/>
+              <a:t>🧗🥏🍰🧙</a:t>
+            </a:r>
+          </a:p>
+        </p:txBody>
+      </p:sp>
+    </p:spTree>
+    <p:extLst>
+      <p:ext uri="{BB962C8B-B14F-4D97-AF65-F5344CB8AC3E}">
+        <p14:creationId xmlns:p14="http://schemas.microsoft.com/office/powerpoint/2010/main" val="2153370203"/>
+      </p:ext>
+    </p:extLst>
+  </p:cSld>
+  <p:clrMapOvr>
+    <a:masterClrMapping/>
+  </p:clrMapOvr>
+  <p:timing>
+    <p:tnLst>
+      <p:par>
+        <p:cTn id="1" dur="indefinite" restart="never" nodeType="tmRoot">
+          <p:childTnLst>
+            <p:seq concurrent="1" nextAc="seek">
+              <p:cTn id="2" dur="indefinite" nodeType="mainSeq">
+                <p:childTnLst>
+                  <p:par>
+                    <p:cTn id="3" fill="hold">
+                      <p:stCondLst>
+                        <p:cond delay="indefinite"/>
+                      </p:stCondLst>
+                      <p:childTnLst>
+                        <p:par>
+                          <p:cTn id="4" fill="hold">
+                            <p:stCondLst>
+                              <p:cond delay="0"/>
+                            </p:stCondLst>
+                            <p:childTnLst>
+                              <p:par>
+                                <p:cTn id="5" presetID="10" presetClass="entr" presetSubtype="0" fill="hold" grpId="0" nodeType="clickEffect">
+                                  <p:stCondLst>
+                                    <p:cond delay="0"/>
+                                  </p:stCondLst>
+                                  <p:childTnLst>
+                                    <p:set>
+                                      <p:cBhvr>
+                                        <p:cTn id="6" dur="1" fill="hold">
+                                          <p:stCondLst>
+                                            <p:cond delay="0"/>
+                                          </p:stCondLst>
+                                        </p:cTn>
+                                        <p:tgtEl>
+                                          <p:spTgt spid="9001">
+                                            <p:txEl>
+                                              <p:pRg st="0" end="0"/>
+                                            </p:txEl>
+                                          </p:spTgt>
+                                        </p:tgtEl>
+                                        <p:attrNameLst>
+                                          <p:attrName>style.visibility</p:attrName>
+                                        </p:attrNameLst>
+                                      </p:cBhvr>
+                                      <p:to>
+                                        <p:strVal val="visible"/>
+                                      </p:to>
+                                    </p:set>
+                                    <p:animEffect transition="in" filter="fade">
+                                      <p:cBhvr>
+                                        <p:cTn id="7" dur="500"/>
+                                        <p:tgtEl>
+                                          <p:spTgt spid="9001">
+                                            <p:txEl>
+                                              <p:pRg st="0" end="0"/>
+                                            </p:txEl>
+                                          </p:spTgt>
+                                        </p:tgtEl>
+                                      </p:cBhvr>
+                                    </p:animEffect>
+                                  </p:childTnLst>
+                                </p:cTn>
+                              </p:par>
+                            </p:childTnLst>
+                          </p:cTn>
+                        </p:par>
+                      </p:childTnLst>
+                    </p:cTn>
+                  </p:par>
+                  <p:par>
+                    <p:cTn id="8" fill="hold">
+                      <p:stCondLst>
+                        <p:cond delay="indefinite"/>
+                      </p:stCondLst>
+                      <p:childTnLst>
+                        <p:par>
+                          <p:cTn id="9" fill="hold">
+                            <p:stCondLst>
+                              <p:cond delay="0"/>
+                            </p:stCondLst>
+                            <p:childTnLst>
+                              <p:par>
+                                <p:cTn id="10" presetID="10" presetClass="entr" presetSubtype="0" fill="hold" grpId="0" nodeType="clickEffect">
+                                  <p:stCondLst>
+                                    <p:cond delay="0"/>
+                                  </p:stCondLst>
+                                  <p:childTnLst>
+                                    <p:set>
+                                      <p:cBhvr>
+                                        <p:cTn id="11" dur="1" fill="hold">
+                                          <p:stCondLst>
+                                            <p:cond delay="0"/>
+                                          </p:stCondLst>
+                                        </p:cTn>
+                                        <p:tgtEl>
+                                          <p:spTgt spid="9001">
+                                            <p:txEl>
+                                              <p:pRg st="1" end="1"/>
+                                            </p:txEl>
+                                          </p:spTgt>
+                                        </p:tgtEl>
+                                        <p:attrNameLst>
+                                          <p:attrName>style.visibility</p:attrName>
+                                        </p:attrNameLst>
+                                      </p:cBhvr>
+                                      <p:to>
+                                        <p:strVal val="visible"/>
+                                      </p:to>
+                                    </p:set>
+                                    <p:animEffect transition="in" filter="fade">
+                                      <p:cBhvr>
+                                        <p:cTn id="12" dur="500"/>
+                                        <p:tgtEl>
+                                          <p:spTgt spid="9001">
+                                            <p:txEl>
+                                              <p:pRg st="1" end="1"/>
+                                            </p:txEl>
+                                          </p:spTgt>
+                                        </p:tgtEl>
+                                      </p:cBhvr>
+                                    </p:animEffect>
+                                  </p:childTnLst>
+                                </p:cTn>
+                              </p:par>
+                            </p:childTnLst>
+                          </p:cTn>
+                        </p:par>
+                      </p:childTnLst>
+                    </p:cTn>
+                  </p:par>
+                  <p:par>
+                    <p:cTn id="13" fill="hold">
+                      <p:stCondLst>
+                        <p:cond delay="indefinite"/>
+                      </p:stCondLst>
+                      <p:childTnLst>
+                        <p:par>
+                          <p:cTn id="14" fill="hold">
+                            <p:stCondLst>
+                              <p:cond delay="0"/>
+                            </p:stCondLst>
+                            <p:childTnLst>
+                              <p:par>
+                                <p:cTn id="15" presetID="10" presetClass="entr" presetSubtype="0" fill="hold" grpId="0" nodeType="clickEffect">
+                                  <p:stCondLst>
+                                    <p:cond delay="0"/>
+                                  </p:stCondLst>
+                                  <p:childTnLst>
+                                    <p:set>
+                                      <p:cBhvr>
+                                        <p:cTn id="16" dur="1" fill="hold">
+                                          <p:stCondLst>
+                                            <p:cond delay="0"/>
+                                          </p:stCondLst>
+                                        </p:cTn>
+                                        <p:tgtEl>
+                                          <p:spTgt spid="9001">
+                                            <p:txEl>
+                                              <p:pRg st="2" end="2"/>
+                                            </p:txEl>
+                                          </p:spTgt>
+                                        </p:tgtEl>
+                                        <p:attrNameLst>
+                                          <p:attrName>style.visibility</p:attrName>
+                                        </p:attrNameLst>
+                                      </p:cBhvr>
+                                      <p:to>
+                                        <p:strVal val="visible"/>
+                                      </p:to>
+                                    </p:set>
+                                    <p:animEffect transition="in" filter="fade">
+                                      <p:cBhvr>
+                                        <p:cTn id="17" dur="500"/>
+                                        <p:tgtEl>
+                                          <p:spTgt spid="9001">
+                                            <p:txEl>
+                                              <p:pRg st="2" end="2"/>
+                                            </p:txEl>
+                                          </p:spTgt>
+                                        </p:tgtEl>
+                                      </p:cBhvr>
+                                    </p:animEffect>
+                                  </p:childTnLst>
+                                </p:cTn>
+                              </p:par>
+                            </p:childTnLst>
+                          </p:cTn>
+                        </p:par>
+                      </p:childTnLst>
+                    </p:cTn>
+                  </p:par>
+                  <p:par>
+                    <p:cTn id="18" fill="hold">
+                      <p:stCondLst>
+                        <p:cond delay="indefinite"/>
+                      </p:stCondLst>
+                      <p:childTnLst>
+                        <p:par>
+                          <p:cTn id="19" fill="hold">
+                            <p:stCondLst>
+                              <p:cond delay="0"/>
+                            </p:stCondLst>
+                            <p:childTnLst>
+                              <p:par>
+                                <p:cTn id="20" presetID="1" presetClass="entr" presetSubtype="0" fill="hold" grpId="0" nodeType="clickEffect">
+                                  <p:stCondLst>
+                                    <p:cond delay="100"/>
+                                  </p:stCondLst>
+                                  <p:iterate type="lt">
+                                    <p:tmAbs val="500"/>
+                                  </p:iterate>
+                                  <p:childTnLst>
+                                    <p:set>
+                                      <p:cBhvr>
+                                        <p:cTn id="21" dur="1" fill="hold">
+                                          <p:stCondLst>
+                                            <p:cond delay="0"/>
+                                          </p:stCondLst>
+                                        </p:cTn>
+                                        <p:tgtEl>
+                                          <p:spTgt spid="2"/>
+                                        </p:tgtEl>
+                                        <p:attrNameLst>
+                                          <p:attrName>style.visibility</p:attrName>
+                                        </p:attrNameLst>
+                                      </p:cBhvr>
+                                      <p:to>
+                                        <p:strVal val="visible"/>
+                                      </p:to>
+                                    </p:set>
+                                  </p:childTnLst>
+                                </p:cTn>
+                              </p:par>
+                            </p:childTnLst>
+                          </p:cTn>
+                        </p:par>
+                      </p:childTnLst>
+                    </p:cTn>
+                  </p:par>
+                </p:childTnLst>
+              </p:cTn>
+              <p:prevCondLst>
+                <p:cond evt="onPrev" delay="0">
+                  <p:tgtEl>
+                    <p:sldTgt/>
+                  </p:tgtEl>
+                </p:cond>
+              </p:prevCondLst>
+              <p:nextCondLst>
+                <p:cond evt="onNext" delay="0">
+                  <p:tgtEl>
+                    <p:sldTgt/>
+                  </p:tgtEl>
+                </p:cond>
+              </p:nextCondLst>
+            </p:seq>
+          </p:childTnLst>
+        </p:cTn>
+      </p:par>
+    </p:tnLst>
+    <p:bldLst>
+      <p:bldP spid="9001" grpId="0" build="p"/>
+      <p:bldP spid="2" grpId="0"/>
+    </p:bldLst>
+  </p:timing>
+</p:sld>
+</file>
+
+<file path=ppt/slides/slide30.xml><?xml version="1.0" encoding="utf-8"?>
 <p:sld xmlns:a="http://schemas.openxmlformats.org/drawingml/2006/main" xmlns:r="http://schemas.openxmlformats.org/officeDocument/2006/relationships" xmlns:p="http://schemas.openxmlformats.org/presentationml/2006/main">
   <p:cSld>
     <p:spTree>
@@ -24398,400 +26611,6 @@
 </p:sld>
 </file>
 
-<file path=ppt/slides/slide3.xml><?xml version="1.0" encoding="utf-8"?>
-<p:sld xmlns:a="http://schemas.openxmlformats.org/drawingml/2006/main" xmlns:r="http://schemas.openxmlformats.org/officeDocument/2006/relationships" xmlns:p="http://schemas.openxmlformats.org/presentationml/2006/main">
-  <p:cSld>
-    <p:spTree>
-      <p:nvGrpSpPr>
-        <p:cNvPr id="1" name=""/>
-        <p:cNvGrpSpPr/>
-        <p:nvPr/>
-      </p:nvGrpSpPr>
-      <p:grpSpPr>
-        <a:xfrm>
-          <a:off x="0" y="0"/>
-          <a:ext cx="0" cy="0"/>
-          <a:chOff x="0" y="0"/>
-          <a:chExt cx="0" cy="0"/>
-        </a:xfrm>
-      </p:grpSpPr>
-      <p:sp>
-        <p:nvSpPr>
-          <p:cNvPr id="9000" name="Text Placeholder 1"/>
-          <p:cNvSpPr>
-            <a:spLocks noGrp="1"/>
-          </p:cNvSpPr>
-          <p:nvPr>
-            <p:ph type="body" sz="quarter" idx="11"/>
-          </p:nvPr>
-        </p:nvSpPr>
-        <p:spPr/>
-        <p:txBody>
-          <a:bodyPr/>
-          <a:lstStyle/>
-          <a:p>
-            <a:r>
-              <a:t>Emanuel Palm</a:t>
-            </a:r>
-          </a:p>
-        </p:txBody>
-      </p:sp>
-      <p:sp>
-        <p:nvSpPr>
-          <p:cNvPr id="9001" name="Text Placeholder 2"/>
-          <p:cNvSpPr>
-            <a:spLocks noGrp="1"/>
-          </p:cNvSpPr>
-          <p:nvPr>
-            <p:ph type="body" sz="quarter" idx="13"/>
-          </p:nvPr>
-        </p:nvSpPr>
-        <p:spPr>
-          <a:xfrm>
-            <a:off x="1274902" y="3333922"/>
-            <a:ext cx="10210363" cy="3205349"/>
-          </a:xfrm>
-        </p:spPr>
-        <p:txBody>
-          <a:bodyPr/>
-          <a:lstStyle/>
-          <a:p>
-            <a:r>
-              <a:rPr lang="en-US" dirty="0">
-                <a:solidFill>
-                  <a:srgbClr val="E3E8F2"/>
-                </a:solidFill>
-                <a:latin typeface="Segoe UI"/>
-              </a:rPr>
-              <a:t>💙 Everything-as-Code</a:t>
-            </a:r>
-            <a:endParaRPr dirty="0">
-              <a:solidFill>
-                <a:srgbClr val="E3E8F2"/>
-              </a:solidFill>
-              <a:latin typeface="Segoe UI"/>
-            </a:endParaRPr>
-          </a:p>
-          <a:p>
-            <a:r>
-              <a:rPr lang="en-US" dirty="0">
-                <a:solidFill>
-                  <a:srgbClr val="E3E8F2"/>
-                </a:solidFill>
-                <a:latin typeface="Segoe UI"/>
-              </a:rPr>
-              <a:t>📦 Makes modules &amp; tools</a:t>
-            </a:r>
-            <a:endParaRPr dirty="0">
-              <a:solidFill>
-                <a:srgbClr val="E3E8F2"/>
-              </a:solidFill>
-              <a:latin typeface="Segoe UI"/>
-            </a:endParaRPr>
-          </a:p>
-          <a:p>
-            <a:r>
-              <a:rPr lang="en-US" dirty="0">
-                <a:solidFill>
-                  <a:srgbClr val="E3E8F2"/>
-                </a:solidFill>
-                <a:latin typeface="Segoe UI"/>
-              </a:rPr>
-              <a:t>📃 Fan of Open Source</a:t>
-            </a:r>
-          </a:p>
-        </p:txBody>
-      </p:sp>
-      <p:sp>
-        <p:nvSpPr>
-          <p:cNvPr id="9003" name="Text Placeholder 4"/>
-          <p:cNvSpPr>
-            <a:spLocks noGrp="1"/>
-          </p:cNvSpPr>
-          <p:nvPr>
-            <p:ph type="body" sz="quarter" idx="15"/>
-          </p:nvPr>
-        </p:nvSpPr>
-        <p:spPr/>
-        <p:txBody>
-          <a:bodyPr/>
-          <a:lstStyle/>
-          <a:p>
-            <a:r>
-              <a:rPr dirty="0"/>
-              <a:t>Cloud Specialist </a:t>
-            </a:r>
-            <a:r>
-              <a:rPr lang="sv-SE" dirty="0"/>
-              <a:t>&amp; Microsoft MVP </a:t>
-            </a:r>
-            <a:r>
-              <a:rPr dirty="0"/>
-              <a:t>@ Unwonted</a:t>
-            </a:r>
-          </a:p>
-        </p:txBody>
-      </p:sp>
-      <p:pic>
-        <p:nvPicPr>
-          <p:cNvPr id="9004" name="Picture Placeholder 5" descr="speakerpng"/>
-          <p:cNvPicPr>
-            <a:picLocks noGrp="1" noChangeAspect="1"/>
-          </p:cNvPicPr>
-          <p:nvPr>
-            <p:ph type="pic" sz="quarter" idx="22"/>
-          </p:nvPr>
-        </p:nvPicPr>
-        <p:blipFill>
-          <a:blip r:embed="rId2"/>
-          <a:srcRect t="748" b="748"/>
-          <a:stretch>
-            <a:fillRect/>
-          </a:stretch>
-        </p:blipFill>
-        <p:spPr/>
-      </p:pic>
-      <p:grpSp>
-        <p:nvGrpSpPr>
-          <p:cNvPr id="12" name="Group 11">
-            <a:extLst>
-              <a:ext uri="{FF2B5EF4-FFF2-40B4-BE49-F238E27FC236}">
-                <a16:creationId xmlns:a16="http://schemas.microsoft.com/office/drawing/2014/main" id="{002EC189-BAB5-A069-D15C-6BCC0ED0CA3E}"/>
-              </a:ext>
-            </a:extLst>
-          </p:cNvPr>
-          <p:cNvGrpSpPr/>
-          <p:nvPr/>
-        </p:nvGrpSpPr>
-        <p:grpSpPr>
-          <a:xfrm>
-            <a:off x="1274902" y="6911462"/>
-            <a:ext cx="2200000" cy="511955"/>
-            <a:chOff x="9775935" y="6229126"/>
-            <a:chExt cx="1691379" cy="393596"/>
-          </a:xfrm>
-        </p:grpSpPr>
-        <p:pic>
-          <p:nvPicPr>
-            <p:cNvPr id="13" name="Graphic 56">
-              <a:extLst>
-                <a:ext uri="{FF2B5EF4-FFF2-40B4-BE49-F238E27FC236}">
-                  <a16:creationId xmlns:a16="http://schemas.microsoft.com/office/drawing/2014/main" id="{2A2DC6F3-9A88-72E8-D65C-2960114891CD}"/>
-                </a:ext>
-              </a:extLst>
-            </p:cNvPr>
-            <p:cNvPicPr>
-              <a:picLocks noChangeAspect="1"/>
-            </p:cNvPicPr>
-            <p:nvPr/>
-          </p:nvPicPr>
-          <p:blipFill>
-            <a:blip>
-              <a:extLst>
-                <a:ext uri="{96DAC541-7B7A-43D3-8B79-37D633B846F1}">
-                  <asvg:svgBlip xmlns:asvg="http://schemas.microsoft.com/office/drawing/2016/SVG/main" r:embed="rId3"/>
-                </a:ext>
-              </a:extLst>
-            </a:blip>
-            <a:srcRect/>
-            <a:stretch/>
-          </p:blipFill>
-          <p:spPr>
-            <a:xfrm>
-              <a:off x="10280577" y="6229126"/>
-              <a:ext cx="391207" cy="383223"/>
-            </a:xfrm>
-            <a:prstGeom prst="rect">
-              <a:avLst/>
-            </a:prstGeom>
-            <a:effectLst/>
-          </p:spPr>
-        </p:pic>
-        <p:pic>
-          <p:nvPicPr>
-            <p:cNvPr id="14" name="Graphic 56">
-              <a:extLst>
-                <a:ext uri="{FF2B5EF4-FFF2-40B4-BE49-F238E27FC236}">
-                  <a16:creationId xmlns:a16="http://schemas.microsoft.com/office/drawing/2014/main" id="{3F619B66-E565-FA04-2496-F7DC352A9BB8}"/>
-                </a:ext>
-              </a:extLst>
-            </p:cNvPr>
-            <p:cNvPicPr>
-              <a:picLocks noChangeAspect="1"/>
-            </p:cNvPicPr>
-            <p:nvPr/>
-          </p:nvPicPr>
-          <p:blipFill>
-            <a:blip r:embed="rId4"/>
-            <a:srcRect/>
-            <a:stretch/>
-          </p:blipFill>
-          <p:spPr>
-            <a:xfrm>
-              <a:off x="10696834" y="6263498"/>
-              <a:ext cx="320788" cy="327874"/>
-            </a:xfrm>
-            <a:prstGeom prst="rect">
-              <a:avLst/>
-            </a:prstGeom>
-            <a:effectLst/>
-          </p:spPr>
-        </p:pic>
-        <p:pic>
-          <p:nvPicPr>
-            <p:cNvPr id="15" name="Picture 14" descr="A black and white logo&#10;&#10;Description automatically generated">
-              <a:extLst>
-                <a:ext uri="{FF2B5EF4-FFF2-40B4-BE49-F238E27FC236}">
-                  <a16:creationId xmlns:a16="http://schemas.microsoft.com/office/drawing/2014/main" id="{0B82BB6F-ADC7-9511-BB28-0CDDA5B50003}"/>
-                </a:ext>
-              </a:extLst>
-            </p:cNvPr>
-            <p:cNvPicPr>
-              <a:picLocks noChangeAspect="1"/>
-            </p:cNvPicPr>
-            <p:nvPr/>
-          </p:nvPicPr>
-          <p:blipFill>
-            <a:blip r:embed="rId5"/>
-            <a:stretch>
-              <a:fillRect/>
-            </a:stretch>
-          </p:blipFill>
-          <p:spPr>
-            <a:xfrm>
-              <a:off x="11083688" y="6239096"/>
-              <a:ext cx="383626" cy="383626"/>
-            </a:xfrm>
-            <a:prstGeom prst="rect">
-              <a:avLst/>
-            </a:prstGeom>
-          </p:spPr>
-        </p:pic>
-        <p:pic>
-          <p:nvPicPr>
-            <p:cNvPr id="16" name="Picture 15" descr="A blue butterfly on a black background&#10;&#10;AI-generated content may be incorrect.">
-              <a:extLst>
-                <a:ext uri="{FF2B5EF4-FFF2-40B4-BE49-F238E27FC236}">
-                  <a16:creationId xmlns:a16="http://schemas.microsoft.com/office/drawing/2014/main" id="{0FCF77FA-238D-FBC0-366F-94F44C3B36E2}"/>
-                </a:ext>
-              </a:extLst>
-            </p:cNvPr>
-            <p:cNvPicPr>
-              <a:picLocks noChangeAspect="1"/>
-            </p:cNvPicPr>
-            <p:nvPr/>
-          </p:nvPicPr>
-          <p:blipFill>
-            <a:blip r:embed="rId6">
-              <a:biLevel thresh="25000"/>
-              <a:extLst>
-                <a:ext uri="{28A0092B-C50C-407E-A947-70E740481C1C}">
-                  <a14:useLocalDpi xmlns:a14="http://schemas.microsoft.com/office/drawing/2010/main" val="0"/>
-                </a:ext>
-              </a:extLst>
-            </a:blip>
-            <a:stretch>
-              <a:fillRect/>
-            </a:stretch>
-          </p:blipFill>
-          <p:spPr>
-            <a:xfrm>
-              <a:off x="9775935" y="6240132"/>
-              <a:ext cx="438576" cy="382589"/>
-            </a:xfrm>
-            <a:prstGeom prst="rect">
-              <a:avLst/>
-            </a:prstGeom>
-            <a:noFill/>
-            <a:ln>
-              <a:noFill/>
-            </a:ln>
-          </p:spPr>
-        </p:pic>
-      </p:grpSp>
-      <p:sp>
-        <p:nvSpPr>
-          <p:cNvPr id="9005" name="TextBox 9004"/>
-          <p:cNvSpPr txBox="1"/>
-          <p:nvPr/>
-        </p:nvSpPr>
-        <p:spPr>
-          <a:xfrm>
-            <a:off x="3529486" y="6837527"/>
-            <a:ext cx="3443571" cy="646331"/>
-          </a:xfrm>
-          <a:prstGeom prst="rect">
-            <a:avLst/>
-          </a:prstGeom>
-          <a:noFill/>
-        </p:spPr>
-        <p:txBody>
-          <a:bodyPr wrap="none" anchor="ctr">
-            <a:spAutoFit/>
-          </a:bodyPr>
-          <a:lstStyle/>
-          <a:p>
-            <a:r>
-              <a:rPr sz="3600">
-                <a:solidFill>
-                  <a:srgbClr val="E3E8F2"/>
-                </a:solidFill>
-                <a:latin typeface="Segoe UI Semibold"/>
-              </a:rPr>
-              <a:t>@PalmEmanuel</a:t>
-            </a:r>
-          </a:p>
-        </p:txBody>
-      </p:sp>
-      <p:pic>
-        <p:nvPicPr>
-          <p:cNvPr id="6" name="Picture 5" descr="A logo with a white cloud and a colorful circle&#10;&#10;Description automatically generated">
-            <a:extLst>
-              <a:ext uri="{FF2B5EF4-FFF2-40B4-BE49-F238E27FC236}">
-                <a16:creationId xmlns:a16="http://schemas.microsoft.com/office/drawing/2014/main" id="{2BED39B6-1FCD-A92F-1634-0E73D80CDF88}"/>
-              </a:ext>
-            </a:extLst>
-          </p:cNvPr>
-          <p:cNvPicPr>
-            <a:picLocks noChangeAspect="1"/>
-          </p:cNvPicPr>
-          <p:nvPr/>
-        </p:nvPicPr>
-        <p:blipFill>
-          <a:blip r:embed="rId7">
-            <a:extLst>
-              <a:ext uri="{28A0092B-C50C-407E-A947-70E740481C1C}">
-                <a14:useLocalDpi xmlns:a14="http://schemas.microsoft.com/office/drawing/2010/main" val="0"/>
-              </a:ext>
-            </a:extLst>
-          </a:blip>
-          <a:stretch>
-            <a:fillRect/>
-          </a:stretch>
-        </p:blipFill>
-        <p:spPr>
-          <a:xfrm>
-            <a:off x="15150000" y="5650000"/>
-            <a:ext cx="2400000" cy="2400000"/>
-          </a:xfrm>
-          <a:prstGeom prst="rect">
-            <a:avLst/>
-          </a:prstGeom>
-        </p:spPr>
-      </p:pic>
-    </p:spTree>
-    <p:extLst>
-      <p:ext uri="{BB962C8B-B14F-4D97-AF65-F5344CB8AC3E}">
-        <p14:creationId xmlns:p14="http://schemas.microsoft.com/office/powerpoint/2010/main" val="2153370203"/>
-      </p:ext>
-    </p:extLst>
-  </p:cSld>
-  <p:clrMapOvr>
-    <a:masterClrMapping/>
-  </p:clrMapOvr>
-</p:sld>
-</file>
-
 <file path=ppt/slides/slide4.xml><?xml version="1.0" encoding="utf-8"?>
 <p:sld xmlns:a="http://schemas.openxmlformats.org/drawingml/2006/main" xmlns:r="http://schemas.openxmlformats.org/officeDocument/2006/relationships" xmlns:p="http://schemas.openxmlformats.org/presentationml/2006/main">
   <p:cSld>
@@ -24819,13 +26638,18 @@
             <p:ph type="title"/>
           </p:nvPr>
         </p:nvSpPr>
-        <p:spPr/>
+        <p:spPr>
+          <a:xfrm>
+            <a:off x="162030" y="1042065"/>
+            <a:ext cx="15773400" cy="1351120"/>
+          </a:xfrm>
+        </p:spPr>
         <p:txBody>
           <a:bodyPr/>
           <a:lstStyle/>
           <a:p>
             <a:r>
-              <a:rPr>
+              <a:rPr dirty="0">
                 <a:solidFill>
                   <a:srgbClr val="F7F9FF"/>
                 </a:solidFill>
@@ -24865,7 +26689,7 @@
         </p:blipFill>
         <p:spPr bwMode="auto">
           <a:xfrm>
-            <a:off x="11305811" y="2393185"/>
+            <a:off x="11305811" y="2733427"/>
             <a:ext cx="6296389" cy="5500629"/>
           </a:xfrm>
           <a:prstGeom prst="rect">
@@ -24908,271 +26732,240 @@
           <a:chExt cx="0" cy="0"/>
         </a:xfrm>
       </p:grpSpPr>
-      <p:pic>
-        <p:nvPicPr>
-          <p:cNvPr id="20" name="Picture 2">
+      <p:grpSp>
+        <p:nvGrpSpPr>
+          <p:cNvPr id="2" name="Group 1">
             <a:extLst>
               <a:ext uri="{FF2B5EF4-FFF2-40B4-BE49-F238E27FC236}">
-                <a16:creationId xmlns:a16="http://schemas.microsoft.com/office/drawing/2014/main" id="{E6F99858-075A-997D-66E3-98A1C41317AE}"/>
+                <a16:creationId xmlns:a16="http://schemas.microsoft.com/office/drawing/2014/main" id="{DBA7A6D9-1164-7C38-674E-C3F7EB33EAD5}"/>
               </a:ext>
             </a:extLst>
           </p:cNvPr>
-          <p:cNvPicPr>
-            <a:picLocks noChangeAspect="1" noChangeArrowheads="1"/>
-          </p:cNvPicPr>
+          <p:cNvGrpSpPr/>
           <p:nvPr/>
-        </p:nvPicPr>
-        <p:blipFill>
-          <a:blip r:embed="rId2">
+        </p:nvGrpSpPr>
+        <p:grpSpPr>
+          <a:xfrm>
+            <a:off x="874823" y="893333"/>
+            <a:ext cx="16538354" cy="8500334"/>
+            <a:chOff x="896088" y="1155153"/>
+            <a:chExt cx="10515924" cy="5404944"/>
+          </a:xfrm>
+        </p:grpSpPr>
+        <p:pic>
+          <p:nvPicPr>
+            <p:cNvPr id="20" name="Picture 2">
+              <a:extLst>
+                <a:ext uri="{FF2B5EF4-FFF2-40B4-BE49-F238E27FC236}">
+                  <a16:creationId xmlns:a16="http://schemas.microsoft.com/office/drawing/2014/main" id="{E6F99858-075A-997D-66E3-98A1C41317AE}"/>
+                </a:ext>
+              </a:extLst>
+            </p:cNvPr>
+            <p:cNvPicPr>
+              <a:picLocks noChangeAspect="1" noChangeArrowheads="1"/>
+            </p:cNvPicPr>
+            <p:nvPr/>
+          </p:nvPicPr>
+          <p:blipFill>
+            <a:blip r:embed="rId2">
+              <a:extLst>
+                <a:ext uri="{28A0092B-C50C-407E-A947-70E740481C1C}">
+                  <a14:useLocalDpi xmlns:a14="http://schemas.microsoft.com/office/drawing/2010/main" val="0"/>
+                </a:ext>
+              </a:extLst>
+            </a:blip>
+            <a:srcRect/>
+            <a:stretch>
+              <a:fillRect/>
+            </a:stretch>
+          </p:blipFill>
+          <p:spPr bwMode="auto">
+            <a:xfrm>
+              <a:off x="896088" y="1928812"/>
+              <a:ext cx="3353991" cy="3857625"/>
+            </a:xfrm>
+            <a:prstGeom prst="rect">
+              <a:avLst/>
+            </a:prstGeom>
+            <a:noFill/>
             <a:extLst>
-              <a:ext uri="{28A0092B-C50C-407E-A947-70E740481C1C}">
-                <a14:useLocalDpi xmlns:a14="http://schemas.microsoft.com/office/drawing/2010/main" val="0"/>
+              <a:ext uri="{909E8E84-426E-40DD-AFC4-6F175D3DCCD1}">
+                <a14:hiddenFill xmlns:a14="http://schemas.microsoft.com/office/drawing/2010/main">
+                  <a:solidFill>
+                    <a:srgbClr val="FFFFFF"/>
+                  </a:solidFill>
+                </a14:hiddenFill>
               </a:ext>
             </a:extLst>
-          </a:blip>
-          <a:srcRect/>
-          <a:stretch>
-            <a:fillRect/>
-          </a:stretch>
-        </p:blipFill>
-        <p:spPr bwMode="auto">
+          </p:spPr>
+        </p:pic>
+        <p:sp>
+          <p:nvSpPr>
+            <p:cNvPr id="21" name="Oval Callout 20">
+              <a:extLst>
+                <a:ext uri="{FF2B5EF4-FFF2-40B4-BE49-F238E27FC236}">
+                  <a16:creationId xmlns:a16="http://schemas.microsoft.com/office/drawing/2014/main" id="{D93BEDC6-93EF-6770-071A-33789CF790CF}"/>
+                </a:ext>
+              </a:extLst>
+            </p:cNvPr>
+            <p:cNvSpPr/>
+            <p:nvPr/>
+          </p:nvSpPr>
+          <p:spPr>
+            <a:xfrm>
+              <a:off x="4957072" y="1155153"/>
+              <a:ext cx="6432367" cy="5404944"/>
+            </a:xfrm>
+            <a:prstGeom prst="wedgeEllipseCallout">
+              <a:avLst>
+                <a:gd name="adj1" fmla="val -77266"/>
+                <a:gd name="adj2" fmla="val -1974"/>
+              </a:avLst>
+            </a:prstGeom>
+            <a:solidFill>
+              <a:srgbClr val="1E3480"/>
+            </a:solidFill>
+            <a:ln w="38100">
+              <a:solidFill>
+                <a:schemeClr val="bg1"/>
+              </a:solidFill>
+            </a:ln>
+          </p:spPr>
+          <p:style>
+            <a:lnRef idx="1">
+              <a:schemeClr val="accent1"/>
+            </a:lnRef>
+            <a:fillRef idx="3">
+              <a:schemeClr val="accent1"/>
+            </a:fillRef>
+            <a:effectRef idx="2">
+              <a:schemeClr val="accent1"/>
+            </a:effectRef>
+            <a:fontRef idx="minor">
+              <a:schemeClr val="lt1"/>
+            </a:fontRef>
+          </p:style>
+          <p:txBody>
+            <a:bodyPr rtlCol="0" anchor="ctr"/>
+            <a:lstStyle/>
+            <a:p>
+              <a:pPr algn="ctr"/>
+              <a:endParaRPr lang="en-US">
+                <a:solidFill>
+                  <a:schemeClr val="bg1"/>
+                </a:solidFill>
+              </a:endParaRPr>
+            </a:p>
+          </p:txBody>
+        </p:sp>
+        <p:sp>
+          <p:nvSpPr>
+            <p:cNvPr id="22" name="Title 1">
+              <a:extLst>
+                <a:ext uri="{FF2B5EF4-FFF2-40B4-BE49-F238E27FC236}">
+                  <a16:creationId xmlns:a16="http://schemas.microsoft.com/office/drawing/2014/main" id="{BF1EAD2E-0E5A-04AB-0808-45ACB6E4D9F6}"/>
+                </a:ext>
+              </a:extLst>
+            </p:cNvPr>
+            <p:cNvSpPr txBox="1">
+              <a:spLocks/>
+            </p:cNvSpPr>
+            <p:nvPr/>
+          </p:nvSpPr>
+          <p:spPr>
+            <a:xfrm>
+              <a:off x="4957072" y="1748610"/>
+              <a:ext cx="6454940" cy="3672408"/>
+            </a:xfrm>
+            <a:prstGeom prst="rect">
+              <a:avLst/>
+            </a:prstGeom>
+          </p:spPr>
+          <p:txBody>
+            <a:bodyPr vert="horz" lIns="137160" tIns="68580" rIns="137160" bIns="68580" rtlCol="0" anchor="ctr">
+              <a:normAutofit fontScale="97500"/>
+            </a:bodyPr>
+            <a:lstStyle>
+              <a:lvl1pPr algn="ctr" defTabSz="457200" rtl="0" eaLnBrk="1" latinLnBrk="0" hangingPunct="1">
+                <a:spcBef>
+                  <a:spcPct val="0"/>
+                </a:spcBef>
+                <a:buNone/>
+                <a:defRPr sz="4800" kern="1200" baseline="0">
+                  <a:solidFill>
+                    <a:srgbClr val="ED2A24"/>
+                  </a:solidFill>
+                  <a:ea typeface="+mj-ea"/>
+                </a:defRPr>
+              </a:lvl1pPr>
+            </a:lstStyle>
+            <a:p>
+              <a:r>
+                <a:rPr lang="en-US" sz="22300" dirty="0">
+                  <a:solidFill>
+                    <a:srgbClr val="FFC000"/>
+                  </a:solidFill>
+                  <a:latin typeface="+mn-lt"/>
+                </a:rPr>
+                <a:t>ARG!</a:t>
+              </a:r>
+              <a:br>
+                <a:rPr lang="en-US" sz="13100" dirty="0">
+                  <a:solidFill>
+                    <a:schemeClr val="bg1"/>
+                  </a:solidFill>
+                  <a:latin typeface="+mn-lt"/>
+                </a:rPr>
+              </a:br>
+              <a:endParaRPr lang="en-US" sz="13100" dirty="0">
+                <a:solidFill>
+                  <a:schemeClr val="bg1"/>
+                </a:solidFill>
+                <a:latin typeface="+mn-lt"/>
+              </a:endParaRPr>
+            </a:p>
+          </p:txBody>
+        </p:sp>
+      </p:grpSp>
+      <p:sp>
+        <p:nvSpPr>
+          <p:cNvPr id="4" name="TextBox 3">
+            <a:extLst>
+              <a:ext uri="{FF2B5EF4-FFF2-40B4-BE49-F238E27FC236}">
+                <a16:creationId xmlns:a16="http://schemas.microsoft.com/office/drawing/2014/main" id="{F117F934-05AB-1EA0-51C4-8F6D2BF505DE}"/>
+              </a:ext>
+            </a:extLst>
+          </p:cNvPr>
+          <p:cNvSpPr txBox="1"/>
+          <p:nvPr/>
+        </p:nvSpPr>
+        <p:spPr>
           <a:xfrm>
-            <a:off x="896088" y="1928812"/>
-            <a:ext cx="3353991" cy="3857625"/>
+            <a:off x="7765347" y="4997854"/>
+            <a:ext cx="9144000" cy="3416320"/>
           </a:xfrm>
           <a:prstGeom prst="rect">
             <a:avLst/>
           </a:prstGeom>
           <a:noFill/>
-          <a:extLst>
-            <a:ext uri="{909E8E84-426E-40DD-AFC4-6F175D3DCCD1}">
-              <a14:hiddenFill xmlns:a14="http://schemas.microsoft.com/office/drawing/2010/main">
-                <a:solidFill>
-                  <a:srgbClr val="FFFFFF"/>
-                </a:solidFill>
-              </a14:hiddenFill>
-            </a:ext>
-          </a:extLst>
-        </p:spPr>
-      </p:pic>
-      <p:sp>
-        <p:nvSpPr>
-          <p:cNvPr id="21" name="Oval Callout 20">
-            <a:extLst>
-              <a:ext uri="{FF2B5EF4-FFF2-40B4-BE49-F238E27FC236}">
-                <a16:creationId xmlns:a16="http://schemas.microsoft.com/office/drawing/2014/main" id="{D93BEDC6-93EF-6770-071A-33789CF790CF}"/>
-              </a:ext>
-            </a:extLst>
-          </p:cNvPr>
-          <p:cNvSpPr/>
-          <p:nvPr/>
-        </p:nvSpPr>
-        <p:spPr>
-          <a:xfrm>
-            <a:off x="4506544" y="2372460"/>
-            <a:ext cx="4702910" cy="2970330"/>
-          </a:xfrm>
-          <a:prstGeom prst="wedgeEllipseCallout">
-            <a:avLst>
-              <a:gd name="adj1" fmla="val -77266"/>
-              <a:gd name="adj2" fmla="val -1974"/>
-            </a:avLst>
-          </a:prstGeom>
-          <a:solidFill>
-            <a:srgbClr val="1E3480"/>
-          </a:solidFill>
-          <a:ln w="38100">
-            <a:solidFill>
-              <a:schemeClr val="bg1"/>
-            </a:solidFill>
-          </a:ln>
-        </p:spPr>
-        <p:style>
-          <a:lnRef idx="1">
-            <a:schemeClr val="accent1"/>
-          </a:lnRef>
-          <a:fillRef idx="3">
-            <a:schemeClr val="accent1"/>
-          </a:fillRef>
-          <a:effectRef idx="2">
-            <a:schemeClr val="accent1"/>
-          </a:effectRef>
-          <a:fontRef idx="minor">
-            <a:schemeClr val="lt1"/>
-          </a:fontRef>
-        </p:style>
-        <p:txBody>
-          <a:bodyPr rtlCol="0" anchor="ctr"/>
-          <a:lstStyle/>
-          <a:p>
-            <a:pPr algn="ctr"/>
-            <a:endParaRPr lang="en-US">
-              <a:solidFill>
-                <a:schemeClr val="bg1"/>
-              </a:solidFill>
-            </a:endParaRPr>
-          </a:p>
-        </p:txBody>
-      </p:sp>
-      <p:sp>
-        <p:nvSpPr>
-          <p:cNvPr id="22" name="Title 1">
-            <a:extLst>
-              <a:ext uri="{FF2B5EF4-FFF2-40B4-BE49-F238E27FC236}">
-                <a16:creationId xmlns:a16="http://schemas.microsoft.com/office/drawing/2014/main" id="{BF1EAD2E-0E5A-04AB-0808-45ACB6E4D9F6}"/>
-              </a:ext>
-            </a:extLst>
-          </p:cNvPr>
-          <p:cNvSpPr txBox="1">
-            <a:spLocks/>
-          </p:cNvSpPr>
-          <p:nvPr/>
-        </p:nvSpPr>
-        <p:spPr>
-          <a:xfrm>
-            <a:off x="3536246" y="2021421"/>
-            <a:ext cx="4148811" cy="3672408"/>
-          </a:xfrm>
-          <a:prstGeom prst="rect">
-            <a:avLst/>
-          </a:prstGeom>
         </p:spPr>
         <p:txBody>
-          <a:bodyPr vert="horz" lIns="137160" tIns="68580" rIns="137160" bIns="68580" rtlCol="0" anchor="ctr">
-            <a:normAutofit fontScale="97500"/>
+          <a:bodyPr wrap="square">
+            <a:spAutoFit/>
           </a:bodyPr>
-          <a:lstStyle>
-            <a:lvl1pPr algn="ctr" defTabSz="457200" rtl="0" eaLnBrk="1" latinLnBrk="0" hangingPunct="1">
-              <a:spcBef>
-                <a:spcPct val="0"/>
-              </a:spcBef>
-              <a:buNone/>
-              <a:defRPr sz="4800" kern="1200" baseline="0">
-                <a:solidFill>
-                  <a:srgbClr val="ED2A24"/>
-                </a:solidFill>
-                <a:ea typeface="+mj-ea"/>
-              </a:defRPr>
-            </a:lvl1pPr>
-          </a:lstStyle>
-          <a:p>
-            <a:r>
-              <a:rPr lang="en-US" sz="14400" dirty="0">
+          <a:lstStyle/>
+          <a:p>
+            <a:pPr algn="ctr"/>
+            <a:r>
+              <a:rPr lang="en-US" sz="7200" dirty="0">
                 <a:solidFill>
                   <a:schemeClr val="bg1"/>
                 </a:solidFill>
                 <a:latin typeface="+mn-lt"/>
               </a:rPr>
-              <a:t>A</a:t>
-            </a:r>
-          </a:p>
-        </p:txBody>
-      </p:sp>
-      <p:sp>
-        <p:nvSpPr>
-          <p:cNvPr id="23" name="Title 1">
-            <a:extLst>
-              <a:ext uri="{FF2B5EF4-FFF2-40B4-BE49-F238E27FC236}">
-                <a16:creationId xmlns:a16="http://schemas.microsoft.com/office/drawing/2014/main" id="{D5CE04DE-3FA9-C3A9-3DD9-36F0BEECB87E}"/>
-              </a:ext>
-            </a:extLst>
-          </p:cNvPr>
-          <p:cNvSpPr txBox="1">
-            <a:spLocks/>
-          </p:cNvSpPr>
-          <p:nvPr/>
-        </p:nvSpPr>
-        <p:spPr>
-          <a:xfrm>
-            <a:off x="4963911" y="2237445"/>
-            <a:ext cx="3788178" cy="3240360"/>
-          </a:xfrm>
-          <a:prstGeom prst="rect">
-            <a:avLst/>
-          </a:prstGeom>
-        </p:spPr>
-        <p:txBody>
-          <a:bodyPr vert="horz" lIns="137160" tIns="68580" rIns="137160" bIns="68580" rtlCol="0" anchor="ctr">
-            <a:normAutofit fontScale="97500"/>
-          </a:bodyPr>
-          <a:lstStyle>
-            <a:lvl1pPr algn="ctr" defTabSz="457200" rtl="0" eaLnBrk="1" latinLnBrk="0" hangingPunct="1">
-              <a:spcBef>
-                <a:spcPct val="0"/>
-              </a:spcBef>
-              <a:buNone/>
-              <a:defRPr sz="4800" kern="1200" baseline="0">
-                <a:solidFill>
-                  <a:srgbClr val="ED2A24"/>
-                </a:solidFill>
-                <a:ea typeface="+mj-ea"/>
-              </a:defRPr>
-            </a:lvl1pPr>
-          </a:lstStyle>
-          <a:p>
-            <a:r>
-              <a:rPr lang="en-US" sz="14400" dirty="0">
-                <a:solidFill>
-                  <a:schemeClr val="bg1"/>
-                </a:solidFill>
-                <a:latin typeface="+mn-lt"/>
-              </a:rPr>
-              <a:t>R</a:t>
-            </a:r>
-          </a:p>
-        </p:txBody>
-      </p:sp>
-      <p:sp>
-        <p:nvSpPr>
-          <p:cNvPr id="24" name="Title 1">
-            <a:extLst>
-              <a:ext uri="{FF2B5EF4-FFF2-40B4-BE49-F238E27FC236}">
-                <a16:creationId xmlns:a16="http://schemas.microsoft.com/office/drawing/2014/main" id="{00E303E2-67DF-192F-0971-490E748E4A7D}"/>
-              </a:ext>
-            </a:extLst>
-          </p:cNvPr>
-          <p:cNvSpPr txBox="1">
-            <a:spLocks/>
-          </p:cNvSpPr>
-          <p:nvPr/>
-        </p:nvSpPr>
-        <p:spPr>
-          <a:xfrm>
-            <a:off x="6101916" y="2237445"/>
-            <a:ext cx="3996444" cy="3240360"/>
-          </a:xfrm>
-          <a:prstGeom prst="rect">
-            <a:avLst/>
-          </a:prstGeom>
-        </p:spPr>
-        <p:txBody>
-          <a:bodyPr vert="horz" lIns="137160" tIns="68580" rIns="137160" bIns="68580" rtlCol="0" anchor="ctr">
-            <a:normAutofit fontScale="97500"/>
-          </a:bodyPr>
-          <a:lstStyle>
-            <a:lvl1pPr algn="ctr" defTabSz="457200" rtl="0" eaLnBrk="1" latinLnBrk="0" hangingPunct="1">
-              <a:spcBef>
-                <a:spcPct val="0"/>
-              </a:spcBef>
-              <a:buNone/>
-              <a:defRPr sz="4800" kern="1200" baseline="0">
-                <a:solidFill>
-                  <a:srgbClr val="ED2A24"/>
-                </a:solidFill>
-                <a:ea typeface="+mj-ea"/>
-              </a:defRPr>
-            </a:lvl1pPr>
-          </a:lstStyle>
-          <a:p>
-            <a:r>
-              <a:rPr lang="en-US" sz="14400" dirty="0">
-                <a:solidFill>
-                  <a:schemeClr val="bg1"/>
-                </a:solidFill>
-                <a:latin typeface="+mn-lt"/>
-              </a:rPr>
-              <a:t>G</a:t>
-            </a:r>
+              <a:t>Please raise your hand at any point if you have a question!</a:t>
+            </a:r>
+            <a:endParaRPr lang="en-US" sz="1600" dirty="0"/>
           </a:p>
         </p:txBody>
       </p:sp>
@@ -25181,18 +26974,104 @@
   <p:clrMapOvr>
     <a:masterClrMapping/>
   </p:clrMapOvr>
-  <mc:AlternateContent xmlns:mc="http://schemas.openxmlformats.org/markup-compatibility/2006" xmlns:p159="http://schemas.microsoft.com/office/powerpoint/2015/09/main">
-    <mc:Choice Requires="p159">
+  <mc:AlternateContent xmlns:mc="http://schemas.openxmlformats.org/markup-compatibility/2006">
+    <mc:Choice xmlns:p159="http://schemas.microsoft.com/office/powerpoint/2015/09/main" Requires="p159">
       <p:transition xmlns:p14="http://schemas.microsoft.com/office/powerpoint/2010/main" spd="slow" p14:dur="2000">
         <p159:morph option="byObject"/>
       </p:transition>
     </mc:Choice>
-    <mc:Fallback xmlns="">
+    <mc:Fallback>
       <p:transition spd="slow">
         <p:fade/>
       </p:transition>
     </mc:Fallback>
   </mc:AlternateContent>
+  <p:timing>
+    <p:tnLst>
+      <p:par>
+        <p:cTn id="1" dur="indefinite" restart="never" nodeType="tmRoot">
+          <p:childTnLst>
+            <p:seq concurrent="1" nextAc="seek">
+              <p:cTn id="2" dur="indefinite" nodeType="mainSeq">
+                <p:childTnLst>
+                  <p:par>
+                    <p:cTn id="3" fill="hold">
+                      <p:stCondLst>
+                        <p:cond delay="indefinite"/>
+                      </p:stCondLst>
+                      <p:childTnLst>
+                        <p:par>
+                          <p:cTn id="4" fill="hold">
+                            <p:stCondLst>
+                              <p:cond delay="0"/>
+                            </p:stCondLst>
+                            <p:childTnLst>
+                              <p:par>
+                                <p:cTn id="5" presetID="10" presetClass="entr" presetSubtype="0" fill="hold" grpId="0" nodeType="clickEffect">
+                                  <p:stCondLst>
+                                    <p:cond delay="0"/>
+                                  </p:stCondLst>
+                                  <p:childTnLst>
+                                    <p:set>
+                                      <p:cBhvr>
+                                        <p:cTn id="6" dur="1" fill="hold">
+                                          <p:stCondLst>
+                                            <p:cond delay="0"/>
+                                          </p:stCondLst>
+                                        </p:cTn>
+                                        <p:tgtEl>
+                                          <p:spTgt spid="4"/>
+                                        </p:tgtEl>
+                                        <p:attrNameLst>
+                                          <p:attrName>style.visibility</p:attrName>
+                                        </p:attrNameLst>
+                                      </p:cBhvr>
+                                      <p:to>
+                                        <p:strVal val="visible"/>
+                                      </p:to>
+                                    </p:set>
+                                    <p:animEffect transition="in" filter="fade">
+                                      <p:cBhvr>
+                                        <p:cTn id="7" dur="500"/>
+                                        <p:tgtEl>
+                                          <p:spTgt spid="4"/>
+                                        </p:tgtEl>
+                                      </p:cBhvr>
+                                    </p:animEffect>
+                                  </p:childTnLst>
+                                </p:cTn>
+                              </p:par>
+                            </p:childTnLst>
+                          </p:cTn>
+                        </p:par>
+                      </p:childTnLst>
+                    </p:cTn>
+                  </p:par>
+                </p:childTnLst>
+              </p:cTn>
+              <p:prevCondLst>
+                <p:cond evt="onPrev" delay="0">
+                  <p:tgtEl>
+                    <p:sldTgt/>
+                  </p:tgtEl>
+                </p:cond>
+              </p:prevCondLst>
+              <p:nextCondLst>
+                <p:cond evt="onNext" delay="0">
+                  <p:tgtEl>
+                    <p:sldTgt/>
+                  </p:tgtEl>
+                </p:cond>
+              </p:nextCondLst>
+            </p:seq>
+          </p:childTnLst>
+        </p:cTn>
+      </p:par>
+    </p:tnLst>
+    <p:bldLst>
+      <p:bldP spid="4" grpId="0"/>
+    </p:bldLst>
+  </p:timing>
 </p:sld>
 </file>
 
@@ -28026,6 +29905,15 @@
 </file>
 
 <file path=customXml/item1.xml><?xml version="1.0" encoding="utf-8"?>
+<?mso-contentType ?>
+<FormTemplates xmlns="http://schemas.microsoft.com/sharepoint/v3/contenttype/forms">
+  <Display>DocumentLibraryForm</Display>
+  <Edit>DocumentLibraryForm</Edit>
+  <New>DocumentLibraryForm</New>
+</FormTemplates>
+</file>
+
+<file path=customXml/item2.xml><?xml version="1.0" encoding="utf-8"?>
 <p:properties xmlns:p="http://schemas.microsoft.com/office/2006/metadata/properties" xmlns:xsi="http://www.w3.org/2001/XMLSchema-instance" xmlns:pc="http://schemas.microsoft.com/office/infopath/2007/PartnerControls">
   <documentManagement>
     <lcf76f155ced4ddcb4097134ff3c332f xmlns="dd1fca98-92ba-4584-8d05-b623a44bff8b">
@@ -28034,15 +29922,6 @@
     <TaxCatchAll xmlns="510f3f9e-3839-48e4-9021-7d5705987296" xsi:nil="true"/>
   </documentManagement>
 </p:properties>
-</file>
-
-<file path=customXml/item2.xml><?xml version="1.0" encoding="utf-8"?>
-<?mso-contentType ?>
-<FormTemplates xmlns="http://schemas.microsoft.com/sharepoint/v3/contenttype/forms">
-  <Display>DocumentLibraryForm</Display>
-  <Edit>DocumentLibraryForm</Edit>
-  <New>DocumentLibraryForm</New>
-</FormTemplates>
 </file>
 
 <file path=customXml/item3.xml><?xml version="1.0" encoding="utf-8"?>
@@ -28247,6 +30126,14 @@
 </file>
 
 <file path=customXml/itemProps1.xml><?xml version="1.0" encoding="utf-8"?>
+<ds:datastoreItem xmlns:ds="http://schemas.openxmlformats.org/officeDocument/2006/customXml" ds:itemID="{5FD23921-D1B3-4277-8367-4BA3F95E1C71}">
+  <ds:schemaRefs>
+    <ds:schemaRef ds:uri="http://schemas.microsoft.com/sharepoint/v3/contenttype/forms"/>
+  </ds:schemaRefs>
+</ds:datastoreItem>
+</file>
+
+<file path=customXml/itemProps2.xml><?xml version="1.0" encoding="utf-8"?>
 <ds:datastoreItem xmlns:ds="http://schemas.openxmlformats.org/officeDocument/2006/customXml" ds:itemID="{D5EE73F2-3A4A-4C36-9D33-162B297E8156}">
   <ds:schemaRefs>
     <ds:schemaRef ds:uri="http://schemas.microsoft.com/office/2006/metadata/properties"/>
@@ -28255,14 +30142,6 @@
     <ds:schemaRef ds:uri="http://schemas.microsoft.com/office/infopath/2007/PartnerControls"/>
     <ds:schemaRef ds:uri="510f3f9e-3839-48e4-9021-7d5705987296"/>
     <ds:schemaRef ds:uri="http://www.w3.org/2001/XMLSchema-instance"/>
-  </ds:schemaRefs>
-</ds:datastoreItem>
-</file>
-
-<file path=customXml/itemProps2.xml><?xml version="1.0" encoding="utf-8"?>
-<ds:datastoreItem xmlns:ds="http://schemas.openxmlformats.org/officeDocument/2006/customXml" ds:itemID="{5FD23921-D1B3-4277-8367-4BA3F95E1C71}">
-  <ds:schemaRefs>
-    <ds:schemaRef ds:uri="http://schemas.microsoft.com/sharepoint/v3/contenttype/forms"/>
   </ds:schemaRefs>
 </ds:datastoreItem>
 </file>

--- a/ELSE26_TreasureHuntingInAzureWithKQL.pptx
+++ b/ELSE26_TreasureHuntingInAzureWithKQL.pptx
@@ -7732,13 +7732,18 @@
             <p:ph type="body" sz="quarter" idx="14"/>
           </p:nvPr>
         </p:nvSpPr>
-        <p:spPr/>
+        <p:spPr>
+          <a:xfrm>
+            <a:off x="1388410" y="3049575"/>
+            <a:ext cx="10890675" cy="2717800"/>
+          </a:xfrm>
+        </p:spPr>
         <p:txBody>
           <a:bodyPr/>
           <a:lstStyle/>
           <a:p>
             <a:r>
-              <a:rPr>
+              <a:rPr dirty="0">
                 <a:solidFill>
                   <a:srgbClr val="F7F9FF"/>
                 </a:solidFill>
@@ -7759,13 +7764,20 @@
             <p:ph type="body" sz="quarter" idx="15"/>
           </p:nvPr>
         </p:nvSpPr>
-        <p:spPr/>
+        <p:spPr>
+          <a:xfrm>
+            <a:off x="1388942" y="5143500"/>
+            <a:ext cx="9799638" cy="1358427"/>
+          </a:xfrm>
+        </p:spPr>
         <p:txBody>
-          <a:bodyPr/>
+          <a:bodyPr>
+            <a:normAutofit/>
+          </a:bodyPr>
           <a:lstStyle/>
           <a:p>
             <a:r>
-              <a:rPr sz="1700">
+              <a:rPr sz="2400" dirty="0">
                 <a:solidFill>
                   <a:srgbClr val="B8C4DC"/>
                 </a:solidFill>
@@ -7786,13 +7798,18 @@
             <p:ph type="body" sz="quarter" idx="16"/>
           </p:nvPr>
         </p:nvSpPr>
-        <p:spPr/>
+        <p:spPr>
+          <a:xfrm>
+            <a:off x="1366654" y="7153646"/>
+            <a:ext cx="4692090" cy="577850"/>
+          </a:xfrm>
+        </p:spPr>
         <p:txBody>
           <a:bodyPr/>
           <a:lstStyle/>
           <a:p>
             <a:r>
-              <a:rPr>
+              <a:rPr dirty="0">
                 <a:solidFill>
                   <a:srgbClr val="F7F9FF"/>
                 </a:solidFill>
@@ -7813,15 +7830,20 @@
             <p:ph type="body" sz="quarter" idx="18"/>
           </p:nvPr>
         </p:nvSpPr>
-        <p:spPr/>
+        <p:spPr>
+          <a:xfrm>
+            <a:off x="1366654" y="7677191"/>
+            <a:ext cx="8260268" cy="416762"/>
+          </a:xfrm>
+        </p:spPr>
         <p:txBody>
           <a:bodyPr/>
           <a:lstStyle/>
           <a:p>
             <a:r>
-              <a:rPr>
-                <a:solidFill>
-                  <a:srgbClr val="B8C4DC"/>
+              <a:rPr sz="1600" dirty="0">
+                <a:solidFill>
+                  <a:srgbClr val="FFC000"/>
                 </a:solidFill>
                 <a:latin typeface="Segoe UI"/>
               </a:rPr>
@@ -7830,35 +7852,6 @@
           </a:p>
         </p:txBody>
       </p:sp>
-      <p:pic>
-        <p:nvPicPr>
-          <p:cNvPr id="13" name="Picture Placeholder 12">
-            <a:extLst>
-              <a:ext uri="{FF2B5EF4-FFF2-40B4-BE49-F238E27FC236}">
-                <a16:creationId xmlns:a16="http://schemas.microsoft.com/office/drawing/2014/main" id="{361FA97F-EE2A-8548-B0FA-E232B9915430}"/>
-              </a:ext>
-            </a:extLst>
-          </p:cNvPr>
-          <p:cNvPicPr>
-            <a:picLocks noGrp="1" noChangeAspect="1"/>
-          </p:cNvPicPr>
-          <p:nvPr>
-            <p:ph type="pic" sz="quarter" idx="22"/>
-          </p:nvPr>
-        </p:nvPicPr>
-        <p:blipFill>
-          <a:blip r:embed="rId2"/>
-          <a:srcRect l="20" r="20"/>
-          <a:stretch>
-            <a:fillRect/>
-          </a:stretch>
-        </p:blipFill>
-        <p:spPr>
-          <a:prstGeom prst="rect">
-            <a:avLst/>
-          </a:prstGeom>
-        </p:spPr>
-      </p:pic>
       <p:sp>
         <p:nvSpPr>
           <p:cNvPr id="2" name="Rounded Rectangle 1">
@@ -8354,6 +8347,36 @@
           </a:p>
         </p:txBody>
       </p:sp>
+      <p:pic>
+        <p:nvPicPr>
+          <p:cNvPr id="14" name="Picture Placeholder 5" descr="speakerpng">
+            <a:extLst>
+              <a:ext uri="{FF2B5EF4-FFF2-40B4-BE49-F238E27FC236}">
+                <a16:creationId xmlns:a16="http://schemas.microsoft.com/office/drawing/2014/main" id="{5C1B59D3-1825-A6C4-D248-0815E5F84BC4}"/>
+              </a:ext>
+            </a:extLst>
+          </p:cNvPr>
+          <p:cNvPicPr>
+            <a:picLocks noGrp="1" noChangeAspect="1"/>
+          </p:cNvPicPr>
+          <p:nvPr>
+            <p:ph type="pic" sz="quarter" idx="22"/>
+          </p:nvPr>
+        </p:nvPicPr>
+        <p:blipFill>
+          <a:blip r:embed="rId2"/>
+          <a:srcRect t="748" b="748"/>
+          <a:stretch>
+            <a:fillRect/>
+          </a:stretch>
+        </p:blipFill>
+        <p:spPr>
+          <a:xfrm>
+            <a:off x="13849356" y="1074553"/>
+            <a:ext cx="4154328" cy="4092197"/>
+          </a:xfrm>
+        </p:spPr>
+      </p:pic>
     </p:spTree>
   </p:cSld>
   <p:clrMapOvr>
@@ -8395,13 +8418,13 @@
           <a:lstStyle/>
           <a:p>
             <a:r>
-              <a:rPr>
+              <a:rPr dirty="0">
                 <a:solidFill>
                   <a:srgbClr val="F7F9FF"/>
                 </a:solidFill>
                 <a:latin typeface="Segoe UI Semibold"/>
               </a:rPr>
-              <a:t>boosted Azure Resource Graph Explorer</a:t>
+              <a:t>Azure Resource Graph Explorer</a:t>
             </a:r>
           </a:p>
         </p:txBody>
@@ -8620,33 +8643,6 @@
           <a:chExt cx="0" cy="0"/>
         </a:xfrm>
       </p:grpSpPr>
-      <p:sp>
-        <p:nvSpPr>
-          <p:cNvPr id="9000" name="Title 1"/>
-          <p:cNvSpPr>
-            <a:spLocks noGrp="1"/>
-          </p:cNvSpPr>
-          <p:nvPr>
-            <p:ph type="title"/>
-          </p:nvPr>
-        </p:nvSpPr>
-        <p:spPr/>
-        <p:txBody>
-          <a:bodyPr/>
-          <a:lstStyle/>
-          <a:p>
-            <a:r>
-              <a:rPr>
-                <a:solidFill>
-                  <a:srgbClr val="F7F9FF"/>
-                </a:solidFill>
-                <a:latin typeface="Segoe UI Semibold"/>
-              </a:rPr>
-              <a:t>boosted Azure Resource Graph Explorer</a:t>
-            </a:r>
-          </a:p>
-        </p:txBody>
-      </p:sp>
       <p:pic>
         <p:nvPicPr>
           <p:cNvPr id="6" name="Picture 2">
@@ -8714,6 +8710,430 @@
           </a:sp3d>
         </p:spPr>
       </p:pic>
+      <p:sp>
+        <p:nvSpPr>
+          <p:cNvPr id="3" name="TextBox 2">
+            <a:extLst>
+              <a:ext uri="{FF2B5EF4-FFF2-40B4-BE49-F238E27FC236}">
+                <a16:creationId xmlns:a16="http://schemas.microsoft.com/office/drawing/2014/main" id="{22EB5539-B9D1-1AEA-372B-ADBA3AA148F5}"/>
+              </a:ext>
+            </a:extLst>
+          </p:cNvPr>
+          <p:cNvSpPr txBox="1"/>
+          <p:nvPr/>
+        </p:nvSpPr>
+        <p:spPr>
+          <a:xfrm>
+            <a:off x="1238250" y="2950146"/>
+            <a:ext cx="4724400" cy="523220"/>
+          </a:xfrm>
+          <a:prstGeom prst="rect">
+            <a:avLst/>
+          </a:prstGeom>
+          <a:noFill/>
+        </p:spPr>
+        <p:txBody>
+          <a:bodyPr wrap="square" rtlCol="0">
+            <a:spAutoFit/>
+          </a:bodyPr>
+          <a:lstStyle/>
+          <a:p>
+            <a:r>
+              <a:rPr lang="en-US" sz="2800" dirty="0">
+                <a:solidFill>
+                  <a:srgbClr val="FFC000"/>
+                </a:solidFill>
+                <a:latin typeface="Segoe UI" panose="020B0502040204020203" pitchFamily="34" charset="0"/>
+                <a:cs typeface="Segoe UI" panose="020B0502040204020203" pitchFamily="34" charset="0"/>
+              </a:rPr>
+              <a:t>IntelliSense for ARG KQL</a:t>
+            </a:r>
+          </a:p>
+        </p:txBody>
+      </p:sp>
+      <p:sp>
+        <p:nvSpPr>
+          <p:cNvPr id="4" name="TextBox 3">
+            <a:extLst>
+              <a:ext uri="{FF2B5EF4-FFF2-40B4-BE49-F238E27FC236}">
+                <a16:creationId xmlns:a16="http://schemas.microsoft.com/office/drawing/2014/main" id="{A01FCA16-310F-483C-7371-C1E88E0FD1CC}"/>
+              </a:ext>
+            </a:extLst>
+          </p:cNvPr>
+          <p:cNvSpPr txBox="1"/>
+          <p:nvPr/>
+        </p:nvSpPr>
+        <p:spPr>
+          <a:xfrm>
+            <a:off x="13257268" y="3138315"/>
+            <a:ext cx="4724400" cy="523220"/>
+          </a:xfrm>
+          <a:prstGeom prst="rect">
+            <a:avLst/>
+          </a:prstGeom>
+          <a:noFill/>
+        </p:spPr>
+        <p:txBody>
+          <a:bodyPr wrap="square" rtlCol="0">
+            <a:spAutoFit/>
+          </a:bodyPr>
+          <a:lstStyle/>
+          <a:p>
+            <a:r>
+              <a:rPr lang="en-US" sz="2800" dirty="0">
+                <a:solidFill>
+                  <a:srgbClr val="FFC000"/>
+                </a:solidFill>
+                <a:latin typeface="Segoe UI" panose="020B0502040204020203" pitchFamily="34" charset="0"/>
+                <a:cs typeface="Segoe UI" panose="020B0502040204020203" pitchFamily="34" charset="0"/>
+              </a:rPr>
+              <a:t>Syntax highlighting</a:t>
+            </a:r>
+          </a:p>
+        </p:txBody>
+      </p:sp>
+      <p:sp>
+        <p:nvSpPr>
+          <p:cNvPr id="5" name="TextBox 4">
+            <a:extLst>
+              <a:ext uri="{FF2B5EF4-FFF2-40B4-BE49-F238E27FC236}">
+                <a16:creationId xmlns:a16="http://schemas.microsoft.com/office/drawing/2014/main" id="{B4741B98-CAF5-862A-8BD1-08E46AC54BD9}"/>
+              </a:ext>
+            </a:extLst>
+          </p:cNvPr>
+          <p:cNvSpPr txBox="1"/>
+          <p:nvPr/>
+        </p:nvSpPr>
+        <p:spPr>
+          <a:xfrm>
+            <a:off x="2260068" y="4595254"/>
+            <a:ext cx="4724400" cy="523220"/>
+          </a:xfrm>
+          <a:prstGeom prst="rect">
+            <a:avLst/>
+          </a:prstGeom>
+          <a:noFill/>
+        </p:spPr>
+        <p:txBody>
+          <a:bodyPr wrap="square" rtlCol="0">
+            <a:spAutoFit/>
+          </a:bodyPr>
+          <a:lstStyle/>
+          <a:p>
+            <a:r>
+              <a:rPr lang="en-US" sz="2800" dirty="0">
+                <a:solidFill>
+                  <a:srgbClr val="FFC000"/>
+                </a:solidFill>
+                <a:latin typeface="Segoe UI" panose="020B0502040204020203" pitchFamily="34" charset="0"/>
+                <a:cs typeface="Segoe UI" panose="020B0502040204020203" pitchFamily="34" charset="0"/>
+              </a:rPr>
+              <a:t>Visualized result tables</a:t>
+            </a:r>
+          </a:p>
+        </p:txBody>
+      </p:sp>
+      <p:sp>
+        <p:nvSpPr>
+          <p:cNvPr id="7" name="TextBox 6">
+            <a:extLst>
+              <a:ext uri="{FF2B5EF4-FFF2-40B4-BE49-F238E27FC236}">
+                <a16:creationId xmlns:a16="http://schemas.microsoft.com/office/drawing/2014/main" id="{9615EAED-3A8D-7A5D-CED7-C71220D4A2AC}"/>
+              </a:ext>
+            </a:extLst>
+          </p:cNvPr>
+          <p:cNvSpPr txBox="1"/>
+          <p:nvPr/>
+        </p:nvSpPr>
+        <p:spPr>
+          <a:xfrm>
+            <a:off x="10313940" y="7946134"/>
+            <a:ext cx="4724400" cy="523220"/>
+          </a:xfrm>
+          <a:prstGeom prst="rect">
+            <a:avLst/>
+          </a:prstGeom>
+          <a:noFill/>
+        </p:spPr>
+        <p:txBody>
+          <a:bodyPr wrap="square" rtlCol="0">
+            <a:spAutoFit/>
+          </a:bodyPr>
+          <a:lstStyle/>
+          <a:p>
+            <a:r>
+              <a:rPr lang="en-US" sz="2800" dirty="0">
+                <a:solidFill>
+                  <a:srgbClr val="FFC000"/>
+                </a:solidFill>
+                <a:latin typeface="Segoe UI" panose="020B0502040204020203" pitchFamily="34" charset="0"/>
+                <a:cs typeface="Segoe UI" panose="020B0502040204020203" pitchFamily="34" charset="0"/>
+              </a:rPr>
+              <a:t>AI tooling in VS Code</a:t>
+            </a:r>
+          </a:p>
+        </p:txBody>
+      </p:sp>
+      <p:sp>
+        <p:nvSpPr>
+          <p:cNvPr id="8" name="TextBox 7">
+            <a:extLst>
+              <a:ext uri="{FF2B5EF4-FFF2-40B4-BE49-F238E27FC236}">
+                <a16:creationId xmlns:a16="http://schemas.microsoft.com/office/drawing/2014/main" id="{8AD6BF8D-7489-A47D-1B97-0CE8116F3F3A}"/>
+              </a:ext>
+            </a:extLst>
+          </p:cNvPr>
+          <p:cNvSpPr txBox="1"/>
+          <p:nvPr/>
+        </p:nvSpPr>
+        <p:spPr>
+          <a:xfrm>
+            <a:off x="4057650" y="8090842"/>
+            <a:ext cx="4724400" cy="523220"/>
+          </a:xfrm>
+          <a:prstGeom prst="rect">
+            <a:avLst/>
+          </a:prstGeom>
+          <a:noFill/>
+        </p:spPr>
+        <p:txBody>
+          <a:bodyPr wrap="square" rtlCol="0">
+            <a:spAutoFit/>
+          </a:bodyPr>
+          <a:lstStyle/>
+          <a:p>
+            <a:r>
+              <a:rPr lang="en-US" sz="2800" dirty="0">
+                <a:solidFill>
+                  <a:srgbClr val="FFC000"/>
+                </a:solidFill>
+                <a:latin typeface="Segoe UI" panose="020B0502040204020203" pitchFamily="34" charset="0"/>
+                <a:cs typeface="Segoe UI" panose="020B0502040204020203" pitchFamily="34" charset="0"/>
+              </a:rPr>
+              <a:t>Excel-like data filtering</a:t>
+            </a:r>
+          </a:p>
+        </p:txBody>
+      </p:sp>
+      <p:sp>
+        <p:nvSpPr>
+          <p:cNvPr id="9" name="TextBox 8">
+            <a:extLst>
+              <a:ext uri="{FF2B5EF4-FFF2-40B4-BE49-F238E27FC236}">
+                <a16:creationId xmlns:a16="http://schemas.microsoft.com/office/drawing/2014/main" id="{BEDB276D-CEDC-C859-6F33-5D52133BC533}"/>
+              </a:ext>
+            </a:extLst>
+          </p:cNvPr>
+          <p:cNvSpPr txBox="1"/>
+          <p:nvPr/>
+        </p:nvSpPr>
+        <p:spPr>
+          <a:xfrm>
+            <a:off x="12979408" y="6324414"/>
+            <a:ext cx="4724400" cy="523220"/>
+          </a:xfrm>
+          <a:prstGeom prst="rect">
+            <a:avLst/>
+          </a:prstGeom>
+          <a:noFill/>
+        </p:spPr>
+        <p:txBody>
+          <a:bodyPr wrap="square" rtlCol="0">
+            <a:spAutoFit/>
+          </a:bodyPr>
+          <a:lstStyle/>
+          <a:p>
+            <a:r>
+              <a:rPr lang="en-US" sz="2800" dirty="0">
+                <a:solidFill>
+                  <a:srgbClr val="FFC000"/>
+                </a:solidFill>
+                <a:latin typeface="Segoe UI" panose="020B0502040204020203" pitchFamily="34" charset="0"/>
+                <a:cs typeface="Segoe UI" panose="020B0502040204020203" pitchFamily="34" charset="0"/>
+              </a:rPr>
+              <a:t>Row comparison</a:t>
+            </a:r>
+          </a:p>
+        </p:txBody>
+      </p:sp>
+      <p:sp>
+        <p:nvSpPr>
+          <p:cNvPr id="12" name="TextBox 11">
+            <a:extLst>
+              <a:ext uri="{FF2B5EF4-FFF2-40B4-BE49-F238E27FC236}">
+                <a16:creationId xmlns:a16="http://schemas.microsoft.com/office/drawing/2014/main" id="{59A70E8B-C511-4588-94E7-53A78F849AF3}"/>
+              </a:ext>
+            </a:extLst>
+          </p:cNvPr>
+          <p:cNvSpPr txBox="1"/>
+          <p:nvPr/>
+        </p:nvSpPr>
+        <p:spPr>
+          <a:xfrm>
+            <a:off x="2050518" y="6305235"/>
+            <a:ext cx="4724400" cy="523220"/>
+          </a:xfrm>
+          <a:prstGeom prst="rect">
+            <a:avLst/>
+          </a:prstGeom>
+          <a:noFill/>
+        </p:spPr>
+        <p:txBody>
+          <a:bodyPr wrap="square" rtlCol="0">
+            <a:spAutoFit/>
+          </a:bodyPr>
+          <a:lstStyle/>
+          <a:p>
+            <a:r>
+              <a:rPr lang="en-US" sz="2800" dirty="0">
+                <a:solidFill>
+                  <a:srgbClr val="FFC000"/>
+                </a:solidFill>
+                <a:latin typeface="Segoe UI" panose="020B0502040204020203" pitchFamily="34" charset="0"/>
+                <a:cs typeface="Segoe UI" panose="020B0502040204020203" pitchFamily="34" charset="0"/>
+              </a:rPr>
+              <a:t>Entra ID identity lookups</a:t>
+            </a:r>
+          </a:p>
+        </p:txBody>
+      </p:sp>
+      <p:sp>
+        <p:nvSpPr>
+          <p:cNvPr id="13" name="TextBox 12">
+            <a:extLst>
+              <a:ext uri="{FF2B5EF4-FFF2-40B4-BE49-F238E27FC236}">
+                <a16:creationId xmlns:a16="http://schemas.microsoft.com/office/drawing/2014/main" id="{E4BBF9FB-6839-BEAA-2E4C-144A093CB2CB}"/>
+              </a:ext>
+            </a:extLst>
+          </p:cNvPr>
+          <p:cNvSpPr txBox="1"/>
+          <p:nvPr/>
+        </p:nvSpPr>
+        <p:spPr>
+          <a:xfrm>
+            <a:off x="12628620" y="4743592"/>
+            <a:ext cx="4724400" cy="523220"/>
+          </a:xfrm>
+          <a:prstGeom prst="rect">
+            <a:avLst/>
+          </a:prstGeom>
+          <a:noFill/>
+        </p:spPr>
+        <p:txBody>
+          <a:bodyPr wrap="square" rtlCol="0">
+            <a:spAutoFit/>
+          </a:bodyPr>
+          <a:lstStyle/>
+          <a:p>
+            <a:r>
+              <a:rPr lang="en-US" sz="2800" dirty="0">
+                <a:solidFill>
+                  <a:srgbClr val="FFC000"/>
+                </a:solidFill>
+                <a:latin typeface="Segoe UI" panose="020B0502040204020203" pitchFamily="34" charset="0"/>
+                <a:cs typeface="Segoe UI" panose="020B0502040204020203" pitchFamily="34" charset="0"/>
+              </a:rPr>
+              <a:t>Built-in documentation</a:t>
+            </a:r>
+          </a:p>
+        </p:txBody>
+      </p:sp>
+      <p:sp>
+        <p:nvSpPr>
+          <p:cNvPr id="18" name="Title 1">
+            <a:extLst>
+              <a:ext uri="{FF2B5EF4-FFF2-40B4-BE49-F238E27FC236}">
+                <a16:creationId xmlns:a16="http://schemas.microsoft.com/office/drawing/2014/main" id="{BAF4F5A1-5F36-1841-407B-1EFC90A4F7E1}"/>
+              </a:ext>
+            </a:extLst>
+          </p:cNvPr>
+          <p:cNvSpPr>
+            <a:spLocks noGrp="1"/>
+          </p:cNvSpPr>
+          <p:nvPr>
+            <p:ph type="title"/>
+          </p:nvPr>
+        </p:nvSpPr>
+        <p:spPr>
+          <a:xfrm>
+            <a:off x="3467100" y="664125"/>
+            <a:ext cx="15773400" cy="1351120"/>
+          </a:xfrm>
+        </p:spPr>
+        <p:txBody>
+          <a:bodyPr/>
+          <a:lstStyle/>
+          <a:p>
+            <a:r>
+              <a:rPr dirty="0">
+                <a:solidFill>
+                  <a:srgbClr val="F7F9FF"/>
+                </a:solidFill>
+                <a:latin typeface="Segoe UI Semibold"/>
+              </a:rPr>
+              <a:t>Azure Resource Graph Explorer</a:t>
+            </a:r>
+          </a:p>
+        </p:txBody>
+      </p:sp>
+      <p:sp>
+        <p:nvSpPr>
+          <p:cNvPr id="19" name="Title 1">
+            <a:extLst>
+              <a:ext uri="{FF2B5EF4-FFF2-40B4-BE49-F238E27FC236}">
+                <a16:creationId xmlns:a16="http://schemas.microsoft.com/office/drawing/2014/main" id="{710CC631-78F2-D9D3-29DC-960AD1355261}"/>
+              </a:ext>
+            </a:extLst>
+          </p:cNvPr>
+          <p:cNvSpPr txBox="1">
+            <a:spLocks/>
+          </p:cNvSpPr>
+          <p:nvPr/>
+        </p:nvSpPr>
+        <p:spPr>
+          <a:xfrm>
+            <a:off x="162030" y="688695"/>
+            <a:ext cx="15773400" cy="1351120"/>
+          </a:xfrm>
+          <a:prstGeom prst="rect">
+            <a:avLst/>
+          </a:prstGeom>
+        </p:spPr>
+        <p:txBody>
+          <a:bodyPr vert="horz" lIns="91440" tIns="45720" rIns="91440" bIns="45720" rtlCol="0" anchor="ctr">
+            <a:normAutofit/>
+          </a:bodyPr>
+          <a:lstStyle>
+            <a:lvl1pPr algn="l" defTabSz="914400" rtl="0" eaLnBrk="1" latinLnBrk="0" hangingPunct="1">
+              <a:spcBef>
+                <a:spcPct val="0"/>
+              </a:spcBef>
+              <a:buNone/>
+              <a:defRPr sz="6000" b="1" kern="1200">
+                <a:solidFill>
+                  <a:schemeClr val="accent5"/>
+                </a:solidFill>
+                <a:latin typeface="+mj-lt"/>
+                <a:ea typeface="+mj-ea"/>
+                <a:cs typeface="+mj-cs"/>
+              </a:defRPr>
+            </a:lvl1pPr>
+          </a:lstStyle>
+          <a:p>
+            <a:r>
+              <a:rPr lang="en-US" dirty="0">
+                <a:solidFill>
+                  <a:srgbClr val="FFC000"/>
+                </a:solidFill>
+                <a:latin typeface="Cascadia Code" panose="020B0609020000020004" pitchFamily="34" charset="0"/>
+                <a:ea typeface="Cascadia Code" panose="020B0609020000020004" pitchFamily="34" charset="0"/>
+                <a:cs typeface="Cascadia Code" panose="020B0609020000020004" pitchFamily="34" charset="0"/>
+              </a:rPr>
+              <a:t>boosted</a:t>
+            </a:r>
+          </a:p>
+        </p:txBody>
+      </p:sp>
     </p:spTree>
   </p:cSld>
   <p:clrMapOvr>
@@ -8731,6 +9151,470 @@
       </p:transition>
     </mc:Fallback>
   </mc:AlternateContent>
+  <p:timing>
+    <p:tnLst>
+      <p:par>
+        <p:cTn id="1" dur="indefinite" restart="never" nodeType="tmRoot">
+          <p:childTnLst>
+            <p:seq concurrent="1" nextAc="seek">
+              <p:cTn id="2" dur="indefinite" nodeType="mainSeq">
+                <p:childTnLst>
+                  <p:par>
+                    <p:cTn id="3" fill="hold">
+                      <p:stCondLst>
+                        <p:cond delay="indefinite"/>
+                      </p:stCondLst>
+                      <p:childTnLst>
+                        <p:par>
+                          <p:cTn id="4" fill="hold">
+                            <p:stCondLst>
+                              <p:cond delay="0"/>
+                            </p:stCondLst>
+                            <p:childTnLst>
+                              <p:par>
+                                <p:cTn id="5" presetID="10" presetClass="entr" presetSubtype="0" fill="hold" grpId="0" nodeType="clickEffect">
+                                  <p:stCondLst>
+                                    <p:cond delay="0"/>
+                                  </p:stCondLst>
+                                  <p:childTnLst>
+                                    <p:set>
+                                      <p:cBhvr>
+                                        <p:cTn id="6" dur="1" fill="hold">
+                                          <p:stCondLst>
+                                            <p:cond delay="0"/>
+                                          </p:stCondLst>
+                                        </p:cTn>
+                                        <p:tgtEl>
+                                          <p:spTgt spid="3"/>
+                                        </p:tgtEl>
+                                        <p:attrNameLst>
+                                          <p:attrName>style.visibility</p:attrName>
+                                        </p:attrNameLst>
+                                      </p:cBhvr>
+                                      <p:to>
+                                        <p:strVal val="visible"/>
+                                      </p:to>
+                                    </p:set>
+                                    <p:animEffect transition="in" filter="fade">
+                                      <p:cBhvr>
+                                        <p:cTn id="7" dur="500"/>
+                                        <p:tgtEl>
+                                          <p:spTgt spid="3"/>
+                                        </p:tgtEl>
+                                      </p:cBhvr>
+                                    </p:animEffect>
+                                  </p:childTnLst>
+                                </p:cTn>
+                              </p:par>
+                            </p:childTnLst>
+                          </p:cTn>
+                        </p:par>
+                      </p:childTnLst>
+                    </p:cTn>
+                  </p:par>
+                  <p:par>
+                    <p:cTn id="8" fill="hold">
+                      <p:stCondLst>
+                        <p:cond delay="indefinite"/>
+                      </p:stCondLst>
+                      <p:childTnLst>
+                        <p:par>
+                          <p:cTn id="9" fill="hold">
+                            <p:stCondLst>
+                              <p:cond delay="0"/>
+                            </p:stCondLst>
+                            <p:childTnLst>
+                              <p:par>
+                                <p:cTn id="10" presetID="10" presetClass="entr" presetSubtype="0" fill="hold" grpId="0" nodeType="clickEffect">
+                                  <p:stCondLst>
+                                    <p:cond delay="0"/>
+                                  </p:stCondLst>
+                                  <p:childTnLst>
+                                    <p:set>
+                                      <p:cBhvr>
+                                        <p:cTn id="11" dur="1" fill="hold">
+                                          <p:stCondLst>
+                                            <p:cond delay="0"/>
+                                          </p:stCondLst>
+                                        </p:cTn>
+                                        <p:tgtEl>
+                                          <p:spTgt spid="4"/>
+                                        </p:tgtEl>
+                                        <p:attrNameLst>
+                                          <p:attrName>style.visibility</p:attrName>
+                                        </p:attrNameLst>
+                                      </p:cBhvr>
+                                      <p:to>
+                                        <p:strVal val="visible"/>
+                                      </p:to>
+                                    </p:set>
+                                    <p:animEffect transition="in" filter="fade">
+                                      <p:cBhvr>
+                                        <p:cTn id="12" dur="500"/>
+                                        <p:tgtEl>
+                                          <p:spTgt spid="4"/>
+                                        </p:tgtEl>
+                                      </p:cBhvr>
+                                    </p:animEffect>
+                                  </p:childTnLst>
+                                </p:cTn>
+                              </p:par>
+                            </p:childTnLst>
+                          </p:cTn>
+                        </p:par>
+                      </p:childTnLst>
+                    </p:cTn>
+                  </p:par>
+                  <p:par>
+                    <p:cTn id="13" fill="hold">
+                      <p:stCondLst>
+                        <p:cond delay="indefinite"/>
+                      </p:stCondLst>
+                      <p:childTnLst>
+                        <p:par>
+                          <p:cTn id="14" fill="hold">
+                            <p:stCondLst>
+                              <p:cond delay="0"/>
+                            </p:stCondLst>
+                            <p:childTnLst>
+                              <p:par>
+                                <p:cTn id="15" presetID="10" presetClass="entr" presetSubtype="0" fill="hold" grpId="0" nodeType="clickEffect">
+                                  <p:stCondLst>
+                                    <p:cond delay="0"/>
+                                  </p:stCondLst>
+                                  <p:childTnLst>
+                                    <p:set>
+                                      <p:cBhvr>
+                                        <p:cTn id="16" dur="1" fill="hold">
+                                          <p:stCondLst>
+                                            <p:cond delay="0"/>
+                                          </p:stCondLst>
+                                        </p:cTn>
+                                        <p:tgtEl>
+                                          <p:spTgt spid="5"/>
+                                        </p:tgtEl>
+                                        <p:attrNameLst>
+                                          <p:attrName>style.visibility</p:attrName>
+                                        </p:attrNameLst>
+                                      </p:cBhvr>
+                                      <p:to>
+                                        <p:strVal val="visible"/>
+                                      </p:to>
+                                    </p:set>
+                                    <p:animEffect transition="in" filter="fade">
+                                      <p:cBhvr>
+                                        <p:cTn id="17" dur="500"/>
+                                        <p:tgtEl>
+                                          <p:spTgt spid="5"/>
+                                        </p:tgtEl>
+                                      </p:cBhvr>
+                                    </p:animEffect>
+                                  </p:childTnLst>
+                                </p:cTn>
+                              </p:par>
+                            </p:childTnLst>
+                          </p:cTn>
+                        </p:par>
+                      </p:childTnLst>
+                    </p:cTn>
+                  </p:par>
+                  <p:par>
+                    <p:cTn id="18" fill="hold">
+                      <p:stCondLst>
+                        <p:cond delay="indefinite"/>
+                      </p:stCondLst>
+                      <p:childTnLst>
+                        <p:par>
+                          <p:cTn id="19" fill="hold">
+                            <p:stCondLst>
+                              <p:cond delay="0"/>
+                            </p:stCondLst>
+                            <p:childTnLst>
+                              <p:par>
+                                <p:cTn id="20" presetID="10" presetClass="entr" presetSubtype="0" fill="hold" grpId="0" nodeType="clickEffect">
+                                  <p:stCondLst>
+                                    <p:cond delay="0"/>
+                                  </p:stCondLst>
+                                  <p:childTnLst>
+                                    <p:set>
+                                      <p:cBhvr>
+                                        <p:cTn id="21" dur="1" fill="hold">
+                                          <p:stCondLst>
+                                            <p:cond delay="0"/>
+                                          </p:stCondLst>
+                                        </p:cTn>
+                                        <p:tgtEl>
+                                          <p:spTgt spid="7"/>
+                                        </p:tgtEl>
+                                        <p:attrNameLst>
+                                          <p:attrName>style.visibility</p:attrName>
+                                        </p:attrNameLst>
+                                      </p:cBhvr>
+                                      <p:to>
+                                        <p:strVal val="visible"/>
+                                      </p:to>
+                                    </p:set>
+                                    <p:animEffect transition="in" filter="fade">
+                                      <p:cBhvr>
+                                        <p:cTn id="22" dur="500"/>
+                                        <p:tgtEl>
+                                          <p:spTgt spid="7"/>
+                                        </p:tgtEl>
+                                      </p:cBhvr>
+                                    </p:animEffect>
+                                  </p:childTnLst>
+                                </p:cTn>
+                              </p:par>
+                            </p:childTnLst>
+                          </p:cTn>
+                        </p:par>
+                      </p:childTnLst>
+                    </p:cTn>
+                  </p:par>
+                  <p:par>
+                    <p:cTn id="23" fill="hold">
+                      <p:stCondLst>
+                        <p:cond delay="indefinite"/>
+                      </p:stCondLst>
+                      <p:childTnLst>
+                        <p:par>
+                          <p:cTn id="24" fill="hold">
+                            <p:stCondLst>
+                              <p:cond delay="0"/>
+                            </p:stCondLst>
+                            <p:childTnLst>
+                              <p:par>
+                                <p:cTn id="25" presetID="10" presetClass="entr" presetSubtype="0" fill="hold" grpId="0" nodeType="clickEffect">
+                                  <p:stCondLst>
+                                    <p:cond delay="0"/>
+                                  </p:stCondLst>
+                                  <p:childTnLst>
+                                    <p:set>
+                                      <p:cBhvr>
+                                        <p:cTn id="26" dur="1" fill="hold">
+                                          <p:stCondLst>
+                                            <p:cond delay="0"/>
+                                          </p:stCondLst>
+                                        </p:cTn>
+                                        <p:tgtEl>
+                                          <p:spTgt spid="8"/>
+                                        </p:tgtEl>
+                                        <p:attrNameLst>
+                                          <p:attrName>style.visibility</p:attrName>
+                                        </p:attrNameLst>
+                                      </p:cBhvr>
+                                      <p:to>
+                                        <p:strVal val="visible"/>
+                                      </p:to>
+                                    </p:set>
+                                    <p:animEffect transition="in" filter="fade">
+                                      <p:cBhvr>
+                                        <p:cTn id="27" dur="500"/>
+                                        <p:tgtEl>
+                                          <p:spTgt spid="8"/>
+                                        </p:tgtEl>
+                                      </p:cBhvr>
+                                    </p:animEffect>
+                                  </p:childTnLst>
+                                </p:cTn>
+                              </p:par>
+                            </p:childTnLst>
+                          </p:cTn>
+                        </p:par>
+                      </p:childTnLst>
+                    </p:cTn>
+                  </p:par>
+                  <p:par>
+                    <p:cTn id="28" fill="hold">
+                      <p:stCondLst>
+                        <p:cond delay="indefinite"/>
+                      </p:stCondLst>
+                      <p:childTnLst>
+                        <p:par>
+                          <p:cTn id="29" fill="hold">
+                            <p:stCondLst>
+                              <p:cond delay="0"/>
+                            </p:stCondLst>
+                            <p:childTnLst>
+                              <p:par>
+                                <p:cTn id="30" presetID="10" presetClass="entr" presetSubtype="0" fill="hold" grpId="0" nodeType="clickEffect">
+                                  <p:stCondLst>
+                                    <p:cond delay="0"/>
+                                  </p:stCondLst>
+                                  <p:childTnLst>
+                                    <p:set>
+                                      <p:cBhvr>
+                                        <p:cTn id="31" dur="1" fill="hold">
+                                          <p:stCondLst>
+                                            <p:cond delay="0"/>
+                                          </p:stCondLst>
+                                        </p:cTn>
+                                        <p:tgtEl>
+                                          <p:spTgt spid="9"/>
+                                        </p:tgtEl>
+                                        <p:attrNameLst>
+                                          <p:attrName>style.visibility</p:attrName>
+                                        </p:attrNameLst>
+                                      </p:cBhvr>
+                                      <p:to>
+                                        <p:strVal val="visible"/>
+                                      </p:to>
+                                    </p:set>
+                                    <p:animEffect transition="in" filter="fade">
+                                      <p:cBhvr>
+                                        <p:cTn id="32" dur="500"/>
+                                        <p:tgtEl>
+                                          <p:spTgt spid="9"/>
+                                        </p:tgtEl>
+                                      </p:cBhvr>
+                                    </p:animEffect>
+                                  </p:childTnLst>
+                                </p:cTn>
+                              </p:par>
+                            </p:childTnLst>
+                          </p:cTn>
+                        </p:par>
+                      </p:childTnLst>
+                    </p:cTn>
+                  </p:par>
+                  <p:par>
+                    <p:cTn id="33" fill="hold">
+                      <p:stCondLst>
+                        <p:cond delay="indefinite"/>
+                      </p:stCondLst>
+                      <p:childTnLst>
+                        <p:par>
+                          <p:cTn id="34" fill="hold">
+                            <p:stCondLst>
+                              <p:cond delay="0"/>
+                            </p:stCondLst>
+                            <p:childTnLst>
+                              <p:par>
+                                <p:cTn id="35" presetID="10" presetClass="entr" presetSubtype="0" fill="hold" grpId="0" nodeType="clickEffect">
+                                  <p:stCondLst>
+                                    <p:cond delay="0"/>
+                                  </p:stCondLst>
+                                  <p:childTnLst>
+                                    <p:set>
+                                      <p:cBhvr>
+                                        <p:cTn id="36" dur="1" fill="hold">
+                                          <p:stCondLst>
+                                            <p:cond delay="0"/>
+                                          </p:stCondLst>
+                                        </p:cTn>
+                                        <p:tgtEl>
+                                          <p:spTgt spid="12"/>
+                                        </p:tgtEl>
+                                        <p:attrNameLst>
+                                          <p:attrName>style.visibility</p:attrName>
+                                        </p:attrNameLst>
+                                      </p:cBhvr>
+                                      <p:to>
+                                        <p:strVal val="visible"/>
+                                      </p:to>
+                                    </p:set>
+                                    <p:animEffect transition="in" filter="fade">
+                                      <p:cBhvr>
+                                        <p:cTn id="37" dur="500"/>
+                                        <p:tgtEl>
+                                          <p:spTgt spid="12"/>
+                                        </p:tgtEl>
+                                      </p:cBhvr>
+                                    </p:animEffect>
+                                  </p:childTnLst>
+                                </p:cTn>
+                              </p:par>
+                            </p:childTnLst>
+                          </p:cTn>
+                        </p:par>
+                      </p:childTnLst>
+                    </p:cTn>
+                  </p:par>
+                  <p:par>
+                    <p:cTn id="38" fill="hold">
+                      <p:stCondLst>
+                        <p:cond delay="indefinite"/>
+                      </p:stCondLst>
+                      <p:childTnLst>
+                        <p:par>
+                          <p:cTn id="39" fill="hold">
+                            <p:stCondLst>
+                              <p:cond delay="0"/>
+                            </p:stCondLst>
+                            <p:childTnLst>
+                              <p:par>
+                                <p:cTn id="40" presetID="10" presetClass="entr" presetSubtype="0" fill="hold" grpId="0" nodeType="clickEffect">
+                                  <p:stCondLst>
+                                    <p:cond delay="0"/>
+                                  </p:stCondLst>
+                                  <p:childTnLst>
+                                    <p:set>
+                                      <p:cBhvr>
+                                        <p:cTn id="41" dur="1" fill="hold">
+                                          <p:stCondLst>
+                                            <p:cond delay="0"/>
+                                          </p:stCondLst>
+                                        </p:cTn>
+                                        <p:tgtEl>
+                                          <p:spTgt spid="13"/>
+                                        </p:tgtEl>
+                                        <p:attrNameLst>
+                                          <p:attrName>style.visibility</p:attrName>
+                                        </p:attrNameLst>
+                                      </p:cBhvr>
+                                      <p:to>
+                                        <p:strVal val="visible"/>
+                                      </p:to>
+                                    </p:set>
+                                    <p:animEffect transition="in" filter="fade">
+                                      <p:cBhvr>
+                                        <p:cTn id="42" dur="500"/>
+                                        <p:tgtEl>
+                                          <p:spTgt spid="13"/>
+                                        </p:tgtEl>
+                                      </p:cBhvr>
+                                    </p:animEffect>
+                                  </p:childTnLst>
+                                </p:cTn>
+                              </p:par>
+                            </p:childTnLst>
+                          </p:cTn>
+                        </p:par>
+                      </p:childTnLst>
+                    </p:cTn>
+                  </p:par>
+                </p:childTnLst>
+              </p:cTn>
+              <p:prevCondLst>
+                <p:cond evt="onPrev" delay="0">
+                  <p:tgtEl>
+                    <p:sldTgt/>
+                  </p:tgtEl>
+                </p:cond>
+              </p:prevCondLst>
+              <p:nextCondLst>
+                <p:cond evt="onNext" delay="0">
+                  <p:tgtEl>
+                    <p:sldTgt/>
+                  </p:tgtEl>
+                </p:cond>
+              </p:nextCondLst>
+            </p:seq>
+          </p:childTnLst>
+        </p:cTn>
+      </p:par>
+    </p:tnLst>
+    <p:bldLst>
+      <p:bldP spid="3" grpId="0"/>
+      <p:bldP spid="4" grpId="0"/>
+      <p:bldP spid="5" grpId="0"/>
+      <p:bldP spid="7" grpId="0"/>
+      <p:bldP spid="8" grpId="0"/>
+      <p:bldP spid="9" grpId="0"/>
+      <p:bldP spid="12" grpId="0"/>
+      <p:bldP spid="13" grpId="0"/>
+    </p:bldLst>
+  </p:timing>
 </p:sld>
 </file>
 
@@ -24749,7 +25633,7 @@
                 <a:latin typeface="Segoe UI" panose="020B0502040204020203" pitchFamily="34" charset="0"/>
                 <a:cs typeface="Segoe UI" panose="020B0502040204020203" pitchFamily="34" charset="0"/>
               </a:rPr>
-              <a:t>), CLI, dashboards, alerts and more</a:t>
+              <a:t>), CLIs, dashboards, alerts and more</a:t>
             </a:r>
           </a:p>
         </p:txBody>
@@ -26551,8 +27435,8 @@
         </p:nvSpPr>
         <p:spPr>
           <a:xfrm>
-            <a:off x="11118441" y="4501532"/>
-            <a:ext cx="6858000" cy="877162"/>
+            <a:off x="12232699" y="3977236"/>
+            <a:ext cx="6858000" cy="1446550"/>
           </a:xfrm>
           <a:prstGeom prst="rect">
             <a:avLst/>
@@ -26566,7 +27450,7 @@
           <a:lstStyle/>
           <a:p>
             <a:r>
-              <a:rPr lang="en-US" sz="4800" b="1" dirty="0">
+              <a:rPr lang="en-US" sz="4400" b="1" dirty="0">
                 <a:solidFill>
                   <a:schemeClr val="tx1"/>
                 </a:solidFill>
@@ -26576,24 +27460,44 @@
               <a:t>Install </a:t>
             </a:r>
             <a:r>
-              <a:rPr lang="en-US" sz="4800" b="1" dirty="0" err="1">
-                <a:solidFill>
-                  <a:schemeClr val="tx1"/>
-                </a:solidFill>
+              <a:rPr lang="en-US" sz="4400" dirty="0" err="1">
+                <a:solidFill>
+                  <a:srgbClr val="FFC000"/>
+                </a:solidFill>
+                <a:latin typeface="Cascadia Code" panose="020B0609020000020004" pitchFamily="34" charset="0"/>
                 <a:ea typeface="Cascadia Code" panose="020B0609020000020004" pitchFamily="34" charset="0"/>
                 <a:cs typeface="Cascadia Code" panose="020B0609020000020004" pitchFamily="34" charset="0"/>
               </a:rPr>
               <a:t>bARGE</a:t>
             </a:r>
             <a:r>
-              <a:rPr lang="en-US" sz="4800" b="1" dirty="0">
+              <a:rPr lang="en-US" sz="4400" b="1" dirty="0">
                 <a:solidFill>
                   <a:schemeClr val="tx1"/>
                 </a:solidFill>
                 <a:ea typeface="Cascadia Code" panose="020B0609020000020004" pitchFamily="34" charset="0"/>
                 <a:cs typeface="Cascadia Code" panose="020B0609020000020004" pitchFamily="34" charset="0"/>
               </a:rPr>
-              <a:t> here!</a:t>
+              <a:t> here</a:t>
+            </a:r>
+            <a:br>
+              <a:rPr lang="en-US" sz="4400" b="1" dirty="0">
+                <a:solidFill>
+                  <a:schemeClr val="tx1"/>
+                </a:solidFill>
+                <a:ea typeface="Cascadia Code" panose="020B0609020000020004" pitchFamily="34" charset="0"/>
+                <a:cs typeface="Cascadia Code" panose="020B0609020000020004" pitchFamily="34" charset="0"/>
+              </a:rPr>
+            </a:br>
+            <a:r>
+              <a:rPr lang="en-US" sz="4400" b="1" dirty="0">
+                <a:solidFill>
+                  <a:schemeClr val="tx1"/>
+                </a:solidFill>
+                <a:ea typeface="Cascadia Code" panose="020B0609020000020004" pitchFamily="34" charset="0"/>
+                <a:cs typeface="Cascadia Code" panose="020B0609020000020004" pitchFamily="34" charset="0"/>
+              </a:rPr>
+              <a:t>if you’re curious</a:t>
             </a:r>
           </a:p>
         </p:txBody>

--- a/ELSE26_TreasureHuntingInAzureWithKQL.pptx
+++ b/ELSE26_TreasureHuntingInAzureWithKQL.pptx
@@ -5,10 +5,10 @@
     <p:sldMasterId id="2147483648" r:id="rId4"/>
   </p:sldMasterIdLst>
   <p:notesMasterIdLst>
-    <p:notesMasterId r:id="rId35"/>
+    <p:notesMasterId r:id="rId36"/>
   </p:notesMasterIdLst>
   <p:handoutMasterIdLst>
-    <p:handoutMasterId r:id="rId36"/>
+    <p:handoutMasterId r:id="rId37"/>
   </p:handoutMasterIdLst>
   <p:sldIdLst>
     <p:sldId id="332" r:id="rId5"/>
@@ -33,14 +33,15 @@
     <p:sldId id="360" r:id="rId24"/>
     <p:sldId id="349" r:id="rId25"/>
     <p:sldId id="350" r:id="rId26"/>
-    <p:sldId id="351" r:id="rId27"/>
-    <p:sldId id="352" r:id="rId28"/>
-    <p:sldId id="353" r:id="rId29"/>
-    <p:sldId id="354" r:id="rId30"/>
-    <p:sldId id="355" r:id="rId31"/>
-    <p:sldId id="356" r:id="rId32"/>
-    <p:sldId id="357" r:id="rId33"/>
-    <p:sldId id="324" r:id="rId34"/>
+    <p:sldId id="362" r:id="rId27"/>
+    <p:sldId id="351" r:id="rId28"/>
+    <p:sldId id="352" r:id="rId29"/>
+    <p:sldId id="353" r:id="rId30"/>
+    <p:sldId id="354" r:id="rId31"/>
+    <p:sldId id="355" r:id="rId32"/>
+    <p:sldId id="356" r:id="rId33"/>
+    <p:sldId id="357" r:id="rId34"/>
+    <p:sldId id="324" r:id="rId35"/>
   </p:sldIdLst>
   <p:sldSz cx="18288000" cy="10287000"/>
   <p:notesSz cx="10287000" cy="18288000"/>
@@ -163,6 +164,7 @@
             <p14:sldId id="360"/>
             <p14:sldId id="349"/>
             <p14:sldId id="350"/>
+            <p14:sldId id="362"/>
             <p14:sldId id="351"/>
             <p14:sldId id="352"/>
             <p14:sldId id="353"/>
@@ -289,7 +291,7 @@
           <a:p>
             <a:fld id="{E81121D3-5551-41DB-AC5C-875FAACFADC2}" type="datetimeFigureOut">
               <a:rPr lang="en-US" smtClean="0"/>
-              <a:t>10/11/26</a:t>
+              <a:t>10/12/26</a:t>
             </a:fld>
             <a:endParaRPr lang="en-US"/>
           </a:p>
@@ -1003,6 +1005,87 @@
   <p:cSld>
     <p:spTree>
       <p:nvGrpSpPr>
+        <p:cNvPr id="1" name="">
+          <a:extLst>
+            <a:ext uri="{FF2B5EF4-FFF2-40B4-BE49-F238E27FC236}">
+              <a16:creationId xmlns:a16="http://schemas.microsoft.com/office/drawing/2014/main" id="{05C2D0C7-2B24-D3EC-60D9-F089434518C2}"/>
+            </a:ext>
+          </a:extLst>
+        </p:cNvPr>
+        <p:cNvGrpSpPr/>
+        <p:nvPr/>
+      </p:nvGrpSpPr>
+      <p:grpSpPr>
+        <a:xfrm>
+          <a:off x="0" y="0"/>
+          <a:ext cx="0" cy="0"/>
+          <a:chOff x="0" y="0"/>
+          <a:chExt cx="0" cy="0"/>
+        </a:xfrm>
+      </p:grpSpPr>
+      <p:sp>
+        <p:nvSpPr>
+          <p:cNvPr id="3" name="Notes Placeholder 2">
+            <a:extLst>
+              <a:ext uri="{FF2B5EF4-FFF2-40B4-BE49-F238E27FC236}">
+                <a16:creationId xmlns:a16="http://schemas.microsoft.com/office/drawing/2014/main" id="{F3C817D7-0817-8263-94E5-2C661BCF5C18}"/>
+              </a:ext>
+            </a:extLst>
+          </p:cNvPr>
+          <p:cNvSpPr>
+            <a:spLocks noGrp="1"/>
+          </p:cNvSpPr>
+          <p:nvPr>
+            <p:ph type="body" idx="1"/>
+          </p:nvPr>
+        </p:nvSpPr>
+        <p:spPr/>
+        <p:txBody>
+          <a:bodyPr/>
+          <a:lstStyle/>
+          <a:p>
+            <a:r>
+              <a:t>https://learn.microsoft.com/en-us/azure/governance/resource-graph/concepts/query-language#resource-graph-tables</a:t>
+            </a:r>
+          </a:p>
+          <a:p>
+            <a:r>
+              <a:t>https://learn.microsoft.com/en-us/azure/azure-monitor/logs/azure-monitor-data-explorer-proxy#query-data-in-azure-resource-graph-by-using-arg-preview</a:t>
+            </a:r>
+          </a:p>
+          <a:p>
+            <a:r>
+              <a:t>https://learn.microsoft.com/en-us/azure/azure-monitor/logs/azure-monitor-data-explorer-proxy#azure-resource-graph-cross-service-query-considerations</a:t>
+            </a:r>
+          </a:p>
+          <a:p>
+            <a:r>
+              <a:t>https://learn.microsoft.com/en-us/azure/governance/resource-graph/concepts/query-language#resource-graph-custom-language-elements</a:t>
+            </a:r>
+          </a:p>
+          <a:p>
+            <a:endParaRPr/>
+          </a:p>
+        </p:txBody>
+      </p:sp>
+    </p:spTree>
+    <p:extLst>
+      <p:ext uri="{BB962C8B-B14F-4D97-AF65-F5344CB8AC3E}">
+        <p14:creationId xmlns:p14="http://schemas.microsoft.com/office/powerpoint/2010/main" val="2797164927"/>
+      </p:ext>
+    </p:extLst>
+  </p:cSld>
+  <p:clrMapOvr>
+    <a:masterClrMapping/>
+  </p:clrMapOvr>
+</p:notes>
+</file>
+
+<file path=ppt/notesSlides/notesSlide4.xml><?xml version="1.0" encoding="utf-8"?>
+<p:notes xmlns:a="http://schemas.openxmlformats.org/drawingml/2006/main" xmlns:r="http://schemas.openxmlformats.org/officeDocument/2006/relationships" xmlns:p="http://schemas.openxmlformats.org/presentationml/2006/main">
+  <p:cSld>
+    <p:spTree>
+      <p:nvGrpSpPr>
         <p:cNvPr id="1" name=""/>
         <p:cNvGrpSpPr/>
         <p:nvPr/>
@@ -1057,7 +1140,7 @@
 </p:notes>
 </file>
 
-<file path=ppt/notesSlides/notesSlide4.xml><?xml version="1.0" encoding="utf-8"?>
+<file path=ppt/notesSlides/notesSlide5.xml><?xml version="1.0" encoding="utf-8"?>
 <p:notes xmlns:a="http://schemas.openxmlformats.org/drawingml/2006/main" xmlns:r="http://schemas.openxmlformats.org/officeDocument/2006/relationships" xmlns:p="http://schemas.openxmlformats.org/presentationml/2006/main">
   <p:cSld>
     <p:spTree>
@@ -7749,7 +7832,52 @@
                 </a:solidFill>
                 <a:latin typeface="Segoe UI Semibold"/>
               </a:rPr>
-              <a:t>Treasure Hunting in Azure with KQL as Your Map</a:t>
+              <a:t>Treasure Hunting in </a:t>
+            </a:r>
+            <a:r>
+              <a:rPr dirty="0">
+                <a:solidFill>
+                  <a:srgbClr val="FFC000"/>
+                </a:solidFill>
+                <a:latin typeface="Segoe UI Semibold"/>
+              </a:rPr>
+              <a:t>Azure</a:t>
+            </a:r>
+            <a:r>
+              <a:rPr lang="en-US" dirty="0">
+                <a:solidFill>
+                  <a:srgbClr val="F7F9FF"/>
+                </a:solidFill>
+                <a:latin typeface="Segoe UI Semibold"/>
+              </a:rPr>
+              <a:t> </a:t>
+            </a:r>
+            <a:r>
+              <a:rPr dirty="0">
+                <a:solidFill>
+                  <a:srgbClr val="F7F9FF"/>
+                </a:solidFill>
+                <a:latin typeface="Segoe UI Semibold"/>
+              </a:rPr>
+              <a:t>with </a:t>
+            </a:r>
+            <a:r>
+              <a:rPr dirty="0">
+                <a:solidFill>
+                  <a:srgbClr val="FFC000"/>
+                </a:solidFill>
+                <a:latin typeface="Segoe UI Semibold"/>
+              </a:rPr>
+              <a:t>KQL</a:t>
+            </a:r>
+            <a:r>
+              <a:rPr dirty="0">
+                <a:solidFill>
+                  <a:srgbClr val="F7F9FF"/>
+                </a:solidFill>
+                <a:latin typeface="Segoe UI Semibold"/>
+              </a:rPr>
+              <a:t> as Your Map</a:t>
             </a:r>
           </a:p>
         </p:txBody>
@@ -10211,6 +10339,100 @@
           <a:effectLst/>
         </p:spPr>
       </p:pic>
+      <p:grpSp>
+        <p:nvGrpSpPr>
+          <p:cNvPr id="5" name="Group 4">
+            <a:extLst>
+              <a:ext uri="{FF2B5EF4-FFF2-40B4-BE49-F238E27FC236}">
+                <a16:creationId xmlns:a16="http://schemas.microsoft.com/office/drawing/2014/main" id="{E7C39DAD-9DCE-9EB3-3A4E-78F9F10A863D}"/>
+              </a:ext>
+            </a:extLst>
+          </p:cNvPr>
+          <p:cNvGrpSpPr/>
+          <p:nvPr/>
+        </p:nvGrpSpPr>
+        <p:grpSpPr>
+          <a:xfrm>
+            <a:off x="12893314" y="7356495"/>
+            <a:ext cx="1631502" cy="2241810"/>
+            <a:chOff x="12893314" y="7356495"/>
+            <a:chExt cx="1631502" cy="2241810"/>
+          </a:xfrm>
+        </p:grpSpPr>
+        <p:pic>
+          <p:nvPicPr>
+            <p:cNvPr id="3" name="Picture 2">
+              <a:extLst>
+                <a:ext uri="{FF2B5EF4-FFF2-40B4-BE49-F238E27FC236}">
+                  <a16:creationId xmlns:a16="http://schemas.microsoft.com/office/drawing/2014/main" id="{46586E9B-0D70-BFF7-034E-4BD1DDDCBFDB}"/>
+                </a:ext>
+              </a:extLst>
+            </p:cNvPr>
+            <p:cNvPicPr>
+              <a:picLocks noChangeAspect="1"/>
+            </p:cNvPicPr>
+            <p:nvPr/>
+          </p:nvPicPr>
+          <p:blipFill>
+            <a:blip r:embed="rId7"/>
+            <a:stretch>
+              <a:fillRect/>
+            </a:stretch>
+          </p:blipFill>
+          <p:spPr>
+            <a:xfrm>
+              <a:off x="12893314" y="7356495"/>
+              <a:ext cx="1587500" cy="1587500"/>
+            </a:xfrm>
+            <a:prstGeom prst="rect">
+              <a:avLst/>
+            </a:prstGeom>
+          </p:spPr>
+        </p:pic>
+        <p:sp>
+          <p:nvSpPr>
+            <p:cNvPr id="4" name="TextBox 3">
+              <a:extLst>
+                <a:ext uri="{FF2B5EF4-FFF2-40B4-BE49-F238E27FC236}">
+                  <a16:creationId xmlns:a16="http://schemas.microsoft.com/office/drawing/2014/main" id="{8CC4D32C-A68F-8A2E-1CBD-865B1E376AE5}"/>
+                </a:ext>
+              </a:extLst>
+            </p:cNvPr>
+            <p:cNvSpPr txBox="1"/>
+            <p:nvPr/>
+          </p:nvSpPr>
+          <p:spPr>
+            <a:xfrm>
+              <a:off x="12897447" y="9136640"/>
+              <a:ext cx="1627369" cy="461665"/>
+            </a:xfrm>
+            <a:prstGeom prst="rect">
+              <a:avLst/>
+            </a:prstGeom>
+            <a:noFill/>
+          </p:spPr>
+          <p:txBody>
+            <a:bodyPr wrap="none" rtlCol="0">
+              <a:spAutoFit/>
+            </a:bodyPr>
+            <a:lstStyle/>
+            <a:p>
+              <a:pPr algn="ctr"/>
+              <a:r>
+                <a:rPr lang="en-US" sz="2400" dirty="0">
+                  <a:solidFill>
+                    <a:schemeClr val="tx1"/>
+                  </a:solidFill>
+                  <a:latin typeface="Cascadia Code" panose="020B0609020000020004" pitchFamily="34" charset="0"/>
+                  <a:ea typeface="Cascadia Code" panose="020B0609020000020004" pitchFamily="34" charset="0"/>
+                  <a:cs typeface="Cascadia Code" panose="020B0609020000020004" pitchFamily="34" charset="0"/>
+                </a:rPr>
+                <a:t>Power BI</a:t>
+              </a:r>
+            </a:p>
+          </p:txBody>
+        </p:sp>
+      </p:grpSp>
     </p:spTree>
   </p:cSld>
   <p:clrMapOvr>
@@ -10518,6 +10740,59 @@
                                         </p:tav>
                                       </p:tavLst>
                                     </p:anim>
+                                  </p:childTnLst>
+                                </p:cTn>
+                              </p:par>
+                            </p:childTnLst>
+                          </p:cTn>
+                        </p:par>
+                      </p:childTnLst>
+                    </p:cTn>
+                  </p:par>
+                  <p:par>
+                    <p:cTn id="29" fill="hold">
+                      <p:stCondLst>
+                        <p:cond delay="indefinite"/>
+                      </p:stCondLst>
+                      <p:childTnLst>
+                        <p:par>
+                          <p:cTn id="30" fill="hold">
+                            <p:stCondLst>
+                              <p:cond delay="0"/>
+                            </p:stCondLst>
+                            <p:childTnLst>
+                              <p:par>
+                                <p:cTn id="31" presetID="10" presetClass="entr" presetSubtype="0" fill="hold" nodeType="clickEffect">
+                                  <p:stCondLst>
+                                    <p:cond delay="0"/>
+                                  </p:stCondLst>
+                                  <p:childTnLst>
+                                    <p:set>
+                                      <p:cBhvr>
+                                        <p:cTn id="32" dur="1" fill="hold">
+                                          <p:stCondLst>
+                                            <p:cond delay="0"/>
+                                          </p:stCondLst>
+                                        </p:cTn>
+                                        <p:tgtEl>
+                                          <p:spTgt spid="5"/>
+                                        </p:tgtEl>
+                                        <p:attrNameLst>
+                                          <p:attrName>style.visibility</p:attrName>
+                                        </p:attrNameLst>
+                                      </p:cBhvr>
+                                      <p:to>
+                                        <p:strVal val="visible"/>
+                                      </p:to>
+                                    </p:set>
+                                    <p:animEffect transition="in" filter="fade">
+                                      <p:cBhvr>
+                                        <p:cTn id="33" dur="500"/>
+                                        <p:tgtEl>
+                                          <p:spTgt spid="5"/>
+                                        </p:tgtEl>
+                                      </p:cBhvr>
+                                    </p:animEffect>
                                   </p:childTnLst>
                                 </p:cTn>
                               </p:par>
@@ -11714,6 +11989,26 @@
                 <a:ea typeface="Cascadia Code" panose="020B0609020000020004" pitchFamily="34" charset="0"/>
                 <a:cs typeface="Cascadia Code" panose="020B0609020000020004" pitchFamily="34" charset="0"/>
               </a:rPr>
+              <a:t>has</a:t>
+            </a:r>
+          </a:p>
+          <a:p>
+            <a:pPr marL="342900" indent="-342900">
+              <a:buClr>
+                <a:srgbClr val="336297"/>
+              </a:buClr>
+              <a:buFont typeface="Wingdings" pitchFamily="2" charset="2"/>
+              <a:buChar char="§"/>
+            </a:pPr>
+            <a:r>
+              <a:rPr lang="en-US" dirty="0">
+                <a:solidFill>
+                  <a:schemeClr val="bg2"/>
+                </a:solidFill>
+                <a:latin typeface="Cascadia Code" panose="020B0609020000020004" pitchFamily="34" charset="0"/>
+                <a:ea typeface="Cascadia Code" panose="020B0609020000020004" pitchFamily="34" charset="0"/>
+                <a:cs typeface="Cascadia Code" panose="020B0609020000020004" pitchFamily="34" charset="0"/>
+              </a:rPr>
               <a:t>project</a:t>
             </a:r>
           </a:p>
@@ -12082,7 +12377,7 @@
             <a:r>
               <a:rPr lang="en-US" sz="3000" b="0" dirty="0">
                 <a:solidFill>
-                  <a:schemeClr val="bg2"/>
+                  <a:schemeClr val="bg1"/>
                 </a:solidFill>
                 <a:effectLst/>
                 <a:latin typeface="Cascadia Code" panose="020B0609020000020004" pitchFamily="34" charset="0"/>
@@ -12093,7 +12388,7 @@
             </a:r>
             <a:endParaRPr lang="en-US" sz="3000" dirty="0">
               <a:solidFill>
-                <a:schemeClr val="bg2"/>
+                <a:schemeClr val="bg1"/>
               </a:solidFill>
               <a:latin typeface="Cascadia Code" panose="020B0609020000020004" pitchFamily="34" charset="0"/>
               <a:ea typeface="Cascadia Code" panose="020B0609020000020004" pitchFamily="34" charset="0"/>
@@ -12800,7 +13095,11 @@
                                           </p:stCondLst>
                                         </p:cTn>
                                         <p:tgtEl>
-                                          <p:spTgt spid="24"/>
+                                          <p:spTgt spid="22">
+                                            <p:txEl>
+                                              <p:pRg st="3" end="3"/>
+                                            </p:txEl>
+                                          </p:spTgt>
                                         </p:tgtEl>
                                         <p:attrNameLst>
                                           <p:attrName>style.visibility</p:attrName>
@@ -12814,7 +13113,11 @@
                                       <p:cBhvr>
                                         <p:cTn id="58" dur="500"/>
                                         <p:tgtEl>
-                                          <p:spTgt spid="24"/>
+                                          <p:spTgt spid="22">
+                                            <p:txEl>
+                                              <p:pRg st="3" end="3"/>
+                                            </p:txEl>
+                                          </p:spTgt>
                                         </p:tgtEl>
                                       </p:cBhvr>
                                     </p:animEffect>
@@ -12835,7 +13138,7 @@
                                           </p:stCondLst>
                                         </p:cTn>
                                         <p:tgtEl>
-                                          <p:spTgt spid="25"/>
+                                          <p:spTgt spid="24"/>
                                         </p:tgtEl>
                                         <p:attrNameLst>
                                           <p:attrName>style.visibility</p:attrName>
@@ -12849,7 +13152,7 @@
                                       <p:cBhvr>
                                         <p:cTn id="61" dur="500"/>
                                         <p:tgtEl>
-                                          <p:spTgt spid="25"/>
+                                          <p:spTgt spid="24"/>
                                         </p:tgtEl>
                                       </p:cBhvr>
                                     </p:animEffect>
@@ -12870,11 +13173,7 @@
                                           </p:stCondLst>
                                         </p:cTn>
                                         <p:tgtEl>
-                                          <p:spTgt spid="22">
-                                            <p:txEl>
-                                              <p:pRg st="3" end="3"/>
-                                            </p:txEl>
-                                          </p:spTgt>
+                                          <p:spTgt spid="25"/>
                                         </p:tgtEl>
                                         <p:attrNameLst>
                                           <p:attrName>style.visibility</p:attrName>
@@ -12888,11 +13187,7 @@
                                       <p:cBhvr>
                                         <p:cTn id="64" dur="500"/>
                                         <p:tgtEl>
-                                          <p:spTgt spid="22">
-                                            <p:txEl>
-                                              <p:pRg st="3" end="3"/>
-                                            </p:txEl>
-                                          </p:spTgt>
+                                          <p:spTgt spid="25"/>
                                         </p:tgtEl>
                                       </p:cBhvr>
                                     </p:animEffect>
@@ -12942,6 +13237,49 @@
                                   </p:childTnLst>
                                 </p:cTn>
                               </p:par>
+                              <p:par>
+                                <p:cTn id="68" presetID="10" presetClass="entr" presetSubtype="0" fill="hold" grpId="0" nodeType="withEffect">
+                                  <p:stCondLst>
+                                    <p:cond delay="0"/>
+                                  </p:stCondLst>
+                                  <p:childTnLst>
+                                    <p:set>
+                                      <p:cBhvr>
+                                        <p:cTn id="69" dur="1" fill="hold">
+                                          <p:stCondLst>
+                                            <p:cond delay="0"/>
+                                          </p:stCondLst>
+                                        </p:cTn>
+                                        <p:tgtEl>
+                                          <p:spTgt spid="22">
+                                            <p:txEl>
+                                              <p:pRg st="5" end="5"/>
+                                            </p:txEl>
+                                          </p:spTgt>
+                                        </p:tgtEl>
+                                        <p:attrNameLst>
+                                          <p:attrName>style.visibility</p:attrName>
+                                        </p:attrNameLst>
+                                      </p:cBhvr>
+                                      <p:to>
+                                        <p:strVal val="visible"/>
+                                      </p:to>
+                                    </p:set>
+                                    <p:animEffect transition="in" filter="fade">
+                                      <p:cBhvr>
+                                        <p:cTn id="70" dur="500"/>
+                                        <p:tgtEl>
+                                          <p:spTgt spid="22">
+                                            <p:txEl>
+                                              <p:pRg st="5" end="5"/>
+                                            </p:txEl>
+                                          </p:spTgt>
+                                        </p:tgtEl>
+                                      </p:cBhvr>
+                                    </p:animEffect>
+                                  </p:childTnLst>
+                                </p:cTn>
+                              </p:par>
                             </p:childTnLst>
                           </p:cTn>
                         </p:par>
@@ -12949,26 +13287,26 @@
                     </p:cTn>
                   </p:par>
                   <p:par>
-                    <p:cTn id="68" fill="hold">
+                    <p:cTn id="71" fill="hold">
                       <p:stCondLst>
                         <p:cond delay="indefinite"/>
                       </p:stCondLst>
                       <p:childTnLst>
                         <p:par>
-                          <p:cTn id="69" fill="hold">
+                          <p:cTn id="72" fill="hold">
                             <p:stCondLst>
                               <p:cond delay="0"/>
                             </p:stCondLst>
                             <p:childTnLst>
                               <p:par>
-                                <p:cTn id="70" presetID="10" presetClass="entr" presetSubtype="0" fill="hold" grpId="0" nodeType="clickEffect">
+                                <p:cTn id="73" presetID="10" presetClass="entr" presetSubtype="0" fill="hold" grpId="0" nodeType="clickEffect">
                                   <p:stCondLst>
                                     <p:cond delay="0"/>
                                   </p:stCondLst>
                                   <p:childTnLst>
                                     <p:set>
                                       <p:cBhvr>
-                                        <p:cTn id="71" dur="1" fill="hold">
+                                        <p:cTn id="74" dur="1" fill="hold">
                                           <p:stCondLst>
                                             <p:cond delay="0"/>
                                           </p:stCondLst>
@@ -12990,48 +13328,9 @@
                                     </p:set>
                                     <p:animEffect transition="in" filter="fade">
                                       <p:cBhvr>
-                                        <p:cTn id="72" dur="500"/>
+                                        <p:cTn id="75" dur="500"/>
                                         <p:tgtEl>
                                           <p:spTgt spid="6">
-                                            <p:txEl>
-                                              <p:pRg st="0" end="0"/>
-                                            </p:txEl>
-                                          </p:spTgt>
-                                        </p:tgtEl>
-                                      </p:cBhvr>
-                                    </p:animEffect>
-                                  </p:childTnLst>
-                                </p:cTn>
-                              </p:par>
-                              <p:par>
-                                <p:cTn id="73" presetID="9" presetClass="emph" presetSubtype="0" grpId="1" nodeType="withEffect">
-                                  <p:stCondLst>
-                                    <p:cond delay="0"/>
-                                  </p:stCondLst>
-                                  <p:childTnLst>
-                                    <p:set>
-                                      <p:cBhvr>
-                                        <p:cTn id="74" dur="indefinite"/>
-                                        <p:tgtEl>
-                                          <p:spTgt spid="22">
-                                            <p:txEl>
-                                              <p:pRg st="0" end="0"/>
-                                            </p:txEl>
-                                          </p:spTgt>
-                                        </p:tgtEl>
-                                        <p:attrNameLst>
-                                          <p:attrName>style.opacity</p:attrName>
-                                        </p:attrNameLst>
-                                      </p:cBhvr>
-                                      <p:to>
-                                        <p:strVal val="0.5"/>
-                                      </p:to>
-                                    </p:set>
-                                    <p:animEffect filter="image" prLst="opacity: 0.5">
-                                      <p:cBhvr rctx="IE">
-                                        <p:cTn id="75" dur="indefinite"/>
-                                        <p:tgtEl>
-                                          <p:spTgt spid="22">
                                             <p:txEl>
                                               <p:pRg st="0" end="0"/>
                                             </p:txEl>
@@ -13054,7 +13353,7 @@
                                         <p:tgtEl>
                                           <p:spTgt spid="22">
                                             <p:txEl>
-                                              <p:pRg st="1" end="1"/>
+                                              <p:pRg st="0" end="0"/>
                                             </p:txEl>
                                           </p:spTgt>
                                         </p:tgtEl>
@@ -13072,7 +13371,7 @@
                                         <p:tgtEl>
                                           <p:spTgt spid="22">
                                             <p:txEl>
-                                              <p:pRg st="1" end="1"/>
+                                              <p:pRg st="0" end="0"/>
                                             </p:txEl>
                                           </p:spTgt>
                                         </p:tgtEl>
@@ -13093,7 +13392,7 @@
                                         <p:tgtEl>
                                           <p:spTgt spid="22">
                                             <p:txEl>
-                                              <p:pRg st="2" end="2"/>
+                                              <p:pRg st="1" end="1"/>
                                             </p:txEl>
                                           </p:spTgt>
                                         </p:tgtEl>
@@ -13111,7 +13410,7 @@
                                         <p:tgtEl>
                                           <p:spTgt spid="22">
                                             <p:txEl>
-                                              <p:pRg st="2" end="2"/>
+                                              <p:pRg st="1" end="1"/>
                                             </p:txEl>
                                           </p:spTgt>
                                         </p:tgtEl>
@@ -13130,7 +13429,11 @@
                                       <p:cBhvr>
                                         <p:cTn id="83" dur="indefinite"/>
                                         <p:tgtEl>
-                                          <p:spTgt spid="24"/>
+                                          <p:spTgt spid="22">
+                                            <p:txEl>
+                                              <p:pRg st="2" end="2"/>
+                                            </p:txEl>
+                                          </p:spTgt>
                                         </p:tgtEl>
                                         <p:attrNameLst>
                                           <p:attrName>style.opacity</p:attrName>
@@ -13144,7 +13447,11 @@
                                       <p:cBhvr rctx="IE">
                                         <p:cTn id="84" dur="indefinite"/>
                                         <p:tgtEl>
-                                          <p:spTgt spid="24"/>
+                                          <p:spTgt spid="22">
+                                            <p:txEl>
+                                              <p:pRg st="2" end="2"/>
+                                            </p:txEl>
+                                          </p:spTgt>
                                         </p:tgtEl>
                                       </p:cBhvr>
                                     </p:animEffect>
@@ -13161,7 +13468,11 @@
                                       <p:cBhvr>
                                         <p:cTn id="86" dur="indefinite"/>
                                         <p:tgtEl>
-                                          <p:spTgt spid="25"/>
+                                          <p:spTgt spid="22">
+                                            <p:txEl>
+                                              <p:pRg st="3" end="3"/>
+                                            </p:txEl>
+                                          </p:spTgt>
                                         </p:tgtEl>
                                         <p:attrNameLst>
                                           <p:attrName>style.opacity</p:attrName>
@@ -13175,7 +13486,11 @@
                                       <p:cBhvr rctx="IE">
                                         <p:cTn id="87" dur="indefinite"/>
                                         <p:tgtEl>
-                                          <p:spTgt spid="25"/>
+                                          <p:spTgt spid="22">
+                                            <p:txEl>
+                                              <p:pRg st="3" end="3"/>
+                                            </p:txEl>
+                                          </p:spTgt>
                                         </p:tgtEl>
                                       </p:cBhvr>
                                     </p:animEffect>
@@ -13192,11 +13507,7 @@
                                       <p:cBhvr>
                                         <p:cTn id="89" dur="indefinite"/>
                                         <p:tgtEl>
-                                          <p:spTgt spid="22">
-                                            <p:txEl>
-                                              <p:pRg st="3" end="3"/>
-                                            </p:txEl>
-                                          </p:spTgt>
+                                          <p:spTgt spid="24"/>
                                         </p:tgtEl>
                                         <p:attrNameLst>
                                           <p:attrName>style.opacity</p:attrName>
@@ -13210,11 +13521,7 @@
                                       <p:cBhvr rctx="IE">
                                         <p:cTn id="90" dur="indefinite"/>
                                         <p:tgtEl>
-                                          <p:spTgt spid="22">
-                                            <p:txEl>
-                                              <p:pRg st="3" end="3"/>
-                                            </p:txEl>
-                                          </p:spTgt>
+                                          <p:spTgt spid="24"/>
                                         </p:tgtEl>
                                       </p:cBhvr>
                                     </p:animEffect>
@@ -13231,11 +13538,7 @@
                                       <p:cBhvr>
                                         <p:cTn id="92" dur="indefinite"/>
                                         <p:tgtEl>
-                                          <p:spTgt spid="22">
-                                            <p:txEl>
-                                              <p:pRg st="4" end="4"/>
-                                            </p:txEl>
-                                          </p:spTgt>
+                                          <p:spTgt spid="25"/>
                                         </p:tgtEl>
                                         <p:attrNameLst>
                                           <p:attrName>style.opacity</p:attrName>
@@ -13249,9 +13552,83 @@
                                       <p:cBhvr rctx="IE">
                                         <p:cTn id="93" dur="indefinite"/>
                                         <p:tgtEl>
+                                          <p:spTgt spid="25"/>
+                                        </p:tgtEl>
+                                      </p:cBhvr>
+                                    </p:animEffect>
+                                  </p:childTnLst>
+                                </p:cTn>
+                              </p:par>
+                              <p:par>
+                                <p:cTn id="94" presetID="9" presetClass="emph" presetSubtype="0" grpId="1" nodeType="withEffect">
+                                  <p:stCondLst>
+                                    <p:cond delay="0"/>
+                                  </p:stCondLst>
+                                  <p:childTnLst>
+                                    <p:set>
+                                      <p:cBhvr>
+                                        <p:cTn id="95" dur="indefinite"/>
+                                        <p:tgtEl>
                                           <p:spTgt spid="22">
                                             <p:txEl>
                                               <p:pRg st="4" end="4"/>
+                                            </p:txEl>
+                                          </p:spTgt>
+                                        </p:tgtEl>
+                                        <p:attrNameLst>
+                                          <p:attrName>style.opacity</p:attrName>
+                                        </p:attrNameLst>
+                                      </p:cBhvr>
+                                      <p:to>
+                                        <p:strVal val="0.5"/>
+                                      </p:to>
+                                    </p:set>
+                                    <p:animEffect filter="image" prLst="opacity: 0.5">
+                                      <p:cBhvr rctx="IE">
+                                        <p:cTn id="96" dur="indefinite"/>
+                                        <p:tgtEl>
+                                          <p:spTgt spid="22">
+                                            <p:txEl>
+                                              <p:pRg st="4" end="4"/>
+                                            </p:txEl>
+                                          </p:spTgt>
+                                        </p:tgtEl>
+                                      </p:cBhvr>
+                                    </p:animEffect>
+                                  </p:childTnLst>
+                                </p:cTn>
+                              </p:par>
+                              <p:par>
+                                <p:cTn id="97" presetID="9" presetClass="emph" presetSubtype="0" grpId="1" nodeType="withEffect">
+                                  <p:stCondLst>
+                                    <p:cond delay="0"/>
+                                  </p:stCondLst>
+                                  <p:childTnLst>
+                                    <p:set>
+                                      <p:cBhvr>
+                                        <p:cTn id="98" dur="indefinite"/>
+                                        <p:tgtEl>
+                                          <p:spTgt spid="22">
+                                            <p:txEl>
+                                              <p:pRg st="5" end="5"/>
+                                            </p:txEl>
+                                          </p:spTgt>
+                                        </p:tgtEl>
+                                        <p:attrNameLst>
+                                          <p:attrName>style.opacity</p:attrName>
+                                        </p:attrNameLst>
+                                      </p:cBhvr>
+                                      <p:to>
+                                        <p:strVal val="0.5"/>
+                                      </p:to>
+                                    </p:set>
+                                    <p:animEffect filter="image" prLst="opacity: 0.5">
+                                      <p:cBhvr rctx="IE">
+                                        <p:cTn id="99" dur="indefinite"/>
+                                        <p:tgtEl>
+                                          <p:spTgt spid="22">
+                                            <p:txEl>
+                                              <p:pRg st="5" end="5"/>
                                             </p:txEl>
                                           </p:spTgt>
                                         </p:tgtEl>
@@ -13267,105 +13644,19 @@
                     </p:cTn>
                   </p:par>
                   <p:par>
-                    <p:cTn id="94" fill="hold">
+                    <p:cTn id="100" fill="hold">
                       <p:stCondLst>
                         <p:cond delay="indefinite"/>
                       </p:stCondLst>
                       <p:childTnLst>
                         <p:par>
-                          <p:cTn id="95" fill="hold">
+                          <p:cTn id="101" fill="hold">
                             <p:stCondLst>
                               <p:cond delay="0"/>
                             </p:stCondLst>
                             <p:childTnLst>
                               <p:par>
-                                <p:cTn id="96" presetID="10" presetClass="entr" presetSubtype="0" fill="hold" grpId="0" nodeType="clickEffect">
-                                  <p:stCondLst>
-                                    <p:cond delay="0"/>
-                                  </p:stCondLst>
-                                  <p:childTnLst>
-                                    <p:set>
-                                      <p:cBhvr>
-                                        <p:cTn id="97" dur="1" fill="hold">
-                                          <p:stCondLst>
-                                            <p:cond delay="0"/>
-                                          </p:stCondLst>
-                                        </p:cTn>
-                                        <p:tgtEl>
-                                          <p:spTgt spid="6">
-                                            <p:txEl>
-                                              <p:pRg st="1" end="1"/>
-                                            </p:txEl>
-                                          </p:spTgt>
-                                        </p:tgtEl>
-                                        <p:attrNameLst>
-                                          <p:attrName>style.visibility</p:attrName>
-                                        </p:attrNameLst>
-                                      </p:cBhvr>
-                                      <p:to>
-                                        <p:strVal val="visible"/>
-                                      </p:to>
-                                    </p:set>
-                                    <p:animEffect transition="in" filter="fade">
-                                      <p:cBhvr>
-                                        <p:cTn id="98" dur="500"/>
-                                        <p:tgtEl>
-                                          <p:spTgt spid="6">
-                                            <p:txEl>
-                                              <p:pRg st="1" end="1"/>
-                                            </p:txEl>
-                                          </p:spTgt>
-                                        </p:tgtEl>
-                                      </p:cBhvr>
-                                    </p:animEffect>
-                                  </p:childTnLst>
-                                </p:cTn>
-                              </p:par>
-                              <p:par>
-                                <p:cTn id="99" presetID="10" presetClass="entr" presetSubtype="0" fill="hold" grpId="0" nodeType="withEffect">
-                                  <p:stCondLst>
-                                    <p:cond delay="0"/>
-                                  </p:stCondLst>
-                                  <p:childTnLst>
-                                    <p:set>
-                                      <p:cBhvr>
-                                        <p:cTn id="100" dur="1" fill="hold">
-                                          <p:stCondLst>
-                                            <p:cond delay="0"/>
-                                          </p:stCondLst>
-                                        </p:cTn>
-                                        <p:tgtEl>
-                                          <p:spTgt spid="6">
-                                            <p:txEl>
-                                              <p:pRg st="2" end="2"/>
-                                            </p:txEl>
-                                          </p:spTgt>
-                                        </p:tgtEl>
-                                        <p:attrNameLst>
-                                          <p:attrName>style.visibility</p:attrName>
-                                        </p:attrNameLst>
-                                      </p:cBhvr>
-                                      <p:to>
-                                        <p:strVal val="visible"/>
-                                      </p:to>
-                                    </p:set>
-                                    <p:animEffect transition="in" filter="fade">
-                                      <p:cBhvr>
-                                        <p:cTn id="101" dur="500"/>
-                                        <p:tgtEl>
-                                          <p:spTgt spid="6">
-                                            <p:txEl>
-                                              <p:pRg st="2" end="2"/>
-                                            </p:txEl>
-                                          </p:spTgt>
-                                        </p:tgtEl>
-                                      </p:cBhvr>
-                                    </p:animEffect>
-                                  </p:childTnLst>
-                                </p:cTn>
-                              </p:par>
-                              <p:par>
-                                <p:cTn id="102" presetID="10" presetClass="entr" presetSubtype="0" fill="hold" grpId="0" nodeType="withEffect">
+                                <p:cTn id="102" presetID="10" presetClass="entr" presetSubtype="0" fill="hold" grpId="0" nodeType="clickEffect">
                                   <p:stCondLst>
                                     <p:cond delay="0"/>
                                   </p:stCondLst>
@@ -13380,7 +13671,7 @@
                                         <p:tgtEl>
                                           <p:spTgt spid="6">
                                             <p:txEl>
-                                              <p:pRg st="3" end="3"/>
+                                              <p:pRg st="1" end="1"/>
                                             </p:txEl>
                                           </p:spTgt>
                                         </p:tgtEl>
@@ -13398,7 +13689,7 @@
                                         <p:tgtEl>
                                           <p:spTgt spid="6">
                                             <p:txEl>
-                                              <p:pRg st="3" end="3"/>
+                                              <p:pRg st="1" end="1"/>
                                             </p:txEl>
                                           </p:spTgt>
                                         </p:tgtEl>
@@ -13421,7 +13712,11 @@
                                           </p:stCondLst>
                                         </p:cTn>
                                         <p:tgtEl>
-                                          <p:spTgt spid="26"/>
+                                          <p:spTgt spid="6">
+                                            <p:txEl>
+                                              <p:pRg st="2" end="2"/>
+                                            </p:txEl>
+                                          </p:spTgt>
                                         </p:tgtEl>
                                         <p:attrNameLst>
                                           <p:attrName>style.visibility</p:attrName>
@@ -13435,7 +13730,11 @@
                                       <p:cBhvr>
                                         <p:cTn id="107" dur="500"/>
                                         <p:tgtEl>
-                                          <p:spTgt spid="26"/>
+                                          <p:spTgt spid="6">
+                                            <p:txEl>
+                                              <p:pRg st="2" end="2"/>
+                                            </p:txEl>
+                                          </p:spTgt>
                                         </p:tgtEl>
                                       </p:cBhvr>
                                     </p:animEffect>
@@ -13456,7 +13755,11 @@
                                           </p:stCondLst>
                                         </p:cTn>
                                         <p:tgtEl>
-                                          <p:spTgt spid="27"/>
+                                          <p:spTgt spid="6">
+                                            <p:txEl>
+                                              <p:pRg st="3" end="3"/>
+                                            </p:txEl>
+                                          </p:spTgt>
                                         </p:tgtEl>
                                         <p:attrNameLst>
                                           <p:attrName>style.visibility</p:attrName>
@@ -13470,7 +13773,11 @@
                                       <p:cBhvr>
                                         <p:cTn id="110" dur="500"/>
                                         <p:tgtEl>
-                                          <p:spTgt spid="27"/>
+                                          <p:spTgt spid="6">
+                                            <p:txEl>
+                                              <p:pRg st="3" end="3"/>
+                                            </p:txEl>
+                                          </p:spTgt>
                                         </p:tgtEl>
                                       </p:cBhvr>
                                     </p:animEffect>
@@ -13491,11 +13798,7 @@
                                           </p:stCondLst>
                                         </p:cTn>
                                         <p:tgtEl>
-                                          <p:spTgt spid="6">
-                                            <p:txEl>
-                                              <p:pRg st="4" end="4"/>
-                                            </p:txEl>
-                                          </p:spTgt>
+                                          <p:spTgt spid="26"/>
                                         </p:tgtEl>
                                         <p:attrNameLst>
                                           <p:attrName>style.visibility</p:attrName>
@@ -13508,6 +13811,80 @@
                                     <p:animEffect transition="in" filter="fade">
                                       <p:cBhvr>
                                         <p:cTn id="113" dur="500"/>
+                                        <p:tgtEl>
+                                          <p:spTgt spid="26"/>
+                                        </p:tgtEl>
+                                      </p:cBhvr>
+                                    </p:animEffect>
+                                  </p:childTnLst>
+                                </p:cTn>
+                              </p:par>
+                              <p:par>
+                                <p:cTn id="114" presetID="10" presetClass="entr" presetSubtype="0" fill="hold" grpId="0" nodeType="withEffect">
+                                  <p:stCondLst>
+                                    <p:cond delay="0"/>
+                                  </p:stCondLst>
+                                  <p:childTnLst>
+                                    <p:set>
+                                      <p:cBhvr>
+                                        <p:cTn id="115" dur="1" fill="hold">
+                                          <p:stCondLst>
+                                            <p:cond delay="0"/>
+                                          </p:stCondLst>
+                                        </p:cTn>
+                                        <p:tgtEl>
+                                          <p:spTgt spid="27"/>
+                                        </p:tgtEl>
+                                        <p:attrNameLst>
+                                          <p:attrName>style.visibility</p:attrName>
+                                        </p:attrNameLst>
+                                      </p:cBhvr>
+                                      <p:to>
+                                        <p:strVal val="visible"/>
+                                      </p:to>
+                                    </p:set>
+                                    <p:animEffect transition="in" filter="fade">
+                                      <p:cBhvr>
+                                        <p:cTn id="116" dur="500"/>
+                                        <p:tgtEl>
+                                          <p:spTgt spid="27"/>
+                                        </p:tgtEl>
+                                      </p:cBhvr>
+                                    </p:animEffect>
+                                  </p:childTnLst>
+                                </p:cTn>
+                              </p:par>
+                              <p:par>
+                                <p:cTn id="117" presetID="10" presetClass="entr" presetSubtype="0" fill="hold" grpId="0" nodeType="withEffect">
+                                  <p:stCondLst>
+                                    <p:cond delay="0"/>
+                                  </p:stCondLst>
+                                  <p:childTnLst>
+                                    <p:set>
+                                      <p:cBhvr>
+                                        <p:cTn id="118" dur="1" fill="hold">
+                                          <p:stCondLst>
+                                            <p:cond delay="0"/>
+                                          </p:stCondLst>
+                                        </p:cTn>
+                                        <p:tgtEl>
+                                          <p:spTgt spid="6">
+                                            <p:txEl>
+                                              <p:pRg st="4" end="4"/>
+                                            </p:txEl>
+                                          </p:spTgt>
+                                        </p:tgtEl>
+                                        <p:attrNameLst>
+                                          <p:attrName>style.visibility</p:attrName>
+                                        </p:attrNameLst>
+                                      </p:cBhvr>
+                                      <p:to>
+                                        <p:strVal val="visible"/>
+                                      </p:to>
+                                    </p:set>
+                                    <p:animEffect transition="in" filter="fade">
+                                      <p:cBhvr>
+                                        <p:cTn id="119" dur="500"/>
                                         <p:tgtEl>
                                           <p:spTgt spid="6">
                                             <p:txEl>
@@ -13527,26 +13904,26 @@
                     </p:cTn>
                   </p:par>
                   <p:par>
-                    <p:cTn id="114" fill="hold">
+                    <p:cTn id="120" fill="hold">
                       <p:stCondLst>
                         <p:cond delay="indefinite"/>
                       </p:stCondLst>
                       <p:childTnLst>
                         <p:par>
-                          <p:cTn id="115" fill="hold">
+                          <p:cTn id="121" fill="hold">
                             <p:stCondLst>
                               <p:cond delay="0"/>
                             </p:stCondLst>
                             <p:childTnLst>
                               <p:par>
-                                <p:cTn id="116" presetID="10" presetClass="entr" presetSubtype="0" fill="hold" grpId="0" nodeType="clickEffect">
+                                <p:cTn id="122" presetID="10" presetClass="entr" presetSubtype="0" fill="hold" grpId="0" nodeType="clickEffect">
                                   <p:stCondLst>
                                     <p:cond delay="0"/>
                                   </p:stCondLst>
                                   <p:childTnLst>
                                     <p:set>
                                       <p:cBhvr>
-                                        <p:cTn id="117" dur="1" fill="hold">
+                                        <p:cTn id="123" dur="1" fill="hold">
                                           <p:stCondLst>
                                             <p:cond delay="0"/>
                                           </p:stCondLst>
@@ -13568,89 +13945,11 @@
                                     </p:set>
                                     <p:animEffect transition="in" filter="fade">
                                       <p:cBhvr>
-                                        <p:cTn id="118" dur="500"/>
+                                        <p:cTn id="124" dur="500"/>
                                         <p:tgtEl>
                                           <p:spTgt spid="7">
                                             <p:txEl>
                                               <p:pRg st="0" end="0"/>
-                                            </p:txEl>
-                                          </p:spTgt>
-                                        </p:tgtEl>
-                                      </p:cBhvr>
-                                    </p:animEffect>
-                                  </p:childTnLst>
-                                </p:cTn>
-                              </p:par>
-                              <p:par>
-                                <p:cTn id="119" presetID="9" presetClass="emph" presetSubtype="0" grpId="1" nodeType="withEffect">
-                                  <p:stCondLst>
-                                    <p:cond delay="0"/>
-                                  </p:stCondLst>
-                                  <p:childTnLst>
-                                    <p:set>
-                                      <p:cBhvr>
-                                        <p:cTn id="120" dur="indefinite"/>
-                                        <p:tgtEl>
-                                          <p:spTgt spid="6">
-                                            <p:txEl>
-                                              <p:pRg st="0" end="0"/>
-                                            </p:txEl>
-                                          </p:spTgt>
-                                        </p:tgtEl>
-                                        <p:attrNameLst>
-                                          <p:attrName>style.opacity</p:attrName>
-                                        </p:attrNameLst>
-                                      </p:cBhvr>
-                                      <p:to>
-                                        <p:strVal val="0.5"/>
-                                      </p:to>
-                                    </p:set>
-                                    <p:animEffect filter="image" prLst="opacity: 0.5">
-                                      <p:cBhvr rctx="IE">
-                                        <p:cTn id="121" dur="indefinite"/>
-                                        <p:tgtEl>
-                                          <p:spTgt spid="6">
-                                            <p:txEl>
-                                              <p:pRg st="0" end="0"/>
-                                            </p:txEl>
-                                          </p:spTgt>
-                                        </p:tgtEl>
-                                      </p:cBhvr>
-                                    </p:animEffect>
-                                  </p:childTnLst>
-                                </p:cTn>
-                              </p:par>
-                              <p:par>
-                                <p:cTn id="122" presetID="9" presetClass="emph" presetSubtype="0" grpId="1" nodeType="withEffect">
-                                  <p:stCondLst>
-                                    <p:cond delay="0"/>
-                                  </p:stCondLst>
-                                  <p:childTnLst>
-                                    <p:set>
-                                      <p:cBhvr>
-                                        <p:cTn id="123" dur="indefinite"/>
-                                        <p:tgtEl>
-                                          <p:spTgt spid="6">
-                                            <p:txEl>
-                                              <p:pRg st="1" end="1"/>
-                                            </p:txEl>
-                                          </p:spTgt>
-                                        </p:tgtEl>
-                                        <p:attrNameLst>
-                                          <p:attrName>style.opacity</p:attrName>
-                                        </p:attrNameLst>
-                                      </p:cBhvr>
-                                      <p:to>
-                                        <p:strVal val="0.5"/>
-                                      </p:to>
-                                    </p:set>
-                                    <p:animEffect filter="image" prLst="opacity: 0.5">
-                                      <p:cBhvr rctx="IE">
-                                        <p:cTn id="124" dur="indefinite"/>
-                                        <p:tgtEl>
-                                          <p:spTgt spid="6">
-                                            <p:txEl>
-                                              <p:pRg st="1" end="1"/>
                                             </p:txEl>
                                           </p:spTgt>
                                         </p:tgtEl>
@@ -13671,7 +13970,7 @@
                                         <p:tgtEl>
                                           <p:spTgt spid="6">
                                             <p:txEl>
-                                              <p:pRg st="2" end="2"/>
+                                              <p:pRg st="0" end="0"/>
                                             </p:txEl>
                                           </p:spTgt>
                                         </p:tgtEl>
@@ -13689,7 +13988,7 @@
                                         <p:tgtEl>
                                           <p:spTgt spid="6">
                                             <p:txEl>
-                                              <p:pRg st="2" end="2"/>
+                                              <p:pRg st="0" end="0"/>
                                             </p:txEl>
                                           </p:spTgt>
                                         </p:tgtEl>
@@ -13710,7 +14009,7 @@
                                         <p:tgtEl>
                                           <p:spTgt spid="6">
                                             <p:txEl>
-                                              <p:pRg st="3" end="3"/>
+                                              <p:pRg st="1" end="1"/>
                                             </p:txEl>
                                           </p:spTgt>
                                         </p:tgtEl>
@@ -13728,7 +14027,7 @@
                                         <p:tgtEl>
                                           <p:spTgt spid="6">
                                             <p:txEl>
-                                              <p:pRg st="3" end="3"/>
+                                              <p:pRg st="1" end="1"/>
                                             </p:txEl>
                                           </p:spTgt>
                                         </p:tgtEl>
@@ -13749,7 +14048,7 @@
                                         <p:tgtEl>
                                           <p:spTgt spid="6">
                                             <p:txEl>
-                                              <p:pRg st="4" end="4"/>
+                                              <p:pRg st="2" end="2"/>
                                             </p:txEl>
                                           </p:spTgt>
                                         </p:tgtEl>
@@ -13767,7 +14066,7 @@
                                         <p:tgtEl>
                                           <p:spTgt spid="6">
                                             <p:txEl>
-                                              <p:pRg st="4" end="4"/>
+                                              <p:pRg st="2" end="2"/>
                                             </p:txEl>
                                           </p:spTgt>
                                         </p:tgtEl>
@@ -13786,7 +14085,11 @@
                                       <p:cBhvr>
                                         <p:cTn id="135" dur="indefinite"/>
                                         <p:tgtEl>
-                                          <p:spTgt spid="26"/>
+                                          <p:spTgt spid="6">
+                                            <p:txEl>
+                                              <p:pRg st="3" end="3"/>
+                                            </p:txEl>
+                                          </p:spTgt>
                                         </p:tgtEl>
                                         <p:attrNameLst>
                                           <p:attrName>style.opacity</p:attrName>
@@ -13800,7 +14103,11 @@
                                       <p:cBhvr rctx="IE">
                                         <p:cTn id="136" dur="indefinite"/>
                                         <p:tgtEl>
-                                          <p:spTgt spid="26"/>
+                                          <p:spTgt spid="6">
+                                            <p:txEl>
+                                              <p:pRg st="3" end="3"/>
+                                            </p:txEl>
+                                          </p:spTgt>
                                         </p:tgtEl>
                                       </p:cBhvr>
                                     </p:animEffect>
@@ -13817,7 +14124,11 @@
                                       <p:cBhvr>
                                         <p:cTn id="138" dur="indefinite"/>
                                         <p:tgtEl>
-                                          <p:spTgt spid="27"/>
+                                          <p:spTgt spid="6">
+                                            <p:txEl>
+                                              <p:pRg st="4" end="4"/>
+                                            </p:txEl>
+                                          </p:spTgt>
                                         </p:tgtEl>
                                         <p:attrNameLst>
                                           <p:attrName>style.opacity</p:attrName>
@@ -13830,6 +14141,72 @@
                                     <p:animEffect filter="image" prLst="opacity: 0.5">
                                       <p:cBhvr rctx="IE">
                                         <p:cTn id="139" dur="indefinite"/>
+                                        <p:tgtEl>
+                                          <p:spTgt spid="6">
+                                            <p:txEl>
+                                              <p:pRg st="4" end="4"/>
+                                            </p:txEl>
+                                          </p:spTgt>
+                                        </p:tgtEl>
+                                      </p:cBhvr>
+                                    </p:animEffect>
+                                  </p:childTnLst>
+                                </p:cTn>
+                              </p:par>
+                              <p:par>
+                                <p:cTn id="140" presetID="9" presetClass="emph" presetSubtype="0" grpId="1" nodeType="withEffect">
+                                  <p:stCondLst>
+                                    <p:cond delay="0"/>
+                                  </p:stCondLst>
+                                  <p:childTnLst>
+                                    <p:set>
+                                      <p:cBhvr>
+                                        <p:cTn id="141" dur="indefinite"/>
+                                        <p:tgtEl>
+                                          <p:spTgt spid="26"/>
+                                        </p:tgtEl>
+                                        <p:attrNameLst>
+                                          <p:attrName>style.opacity</p:attrName>
+                                        </p:attrNameLst>
+                                      </p:cBhvr>
+                                      <p:to>
+                                        <p:strVal val="0.5"/>
+                                      </p:to>
+                                    </p:set>
+                                    <p:animEffect filter="image" prLst="opacity: 0.5">
+                                      <p:cBhvr rctx="IE">
+                                        <p:cTn id="142" dur="indefinite"/>
+                                        <p:tgtEl>
+                                          <p:spTgt spid="26"/>
+                                        </p:tgtEl>
+                                      </p:cBhvr>
+                                    </p:animEffect>
+                                  </p:childTnLst>
+                                </p:cTn>
+                              </p:par>
+                              <p:par>
+                                <p:cTn id="143" presetID="9" presetClass="emph" presetSubtype="0" grpId="1" nodeType="withEffect">
+                                  <p:stCondLst>
+                                    <p:cond delay="0"/>
+                                  </p:stCondLst>
+                                  <p:childTnLst>
+                                    <p:set>
+                                      <p:cBhvr>
+                                        <p:cTn id="144" dur="indefinite"/>
+                                        <p:tgtEl>
+                                          <p:spTgt spid="27"/>
+                                        </p:tgtEl>
+                                        <p:attrNameLst>
+                                          <p:attrName>style.opacity</p:attrName>
+                                        </p:attrNameLst>
+                                      </p:cBhvr>
+                                      <p:to>
+                                        <p:strVal val="0.5"/>
+                                      </p:to>
+                                    </p:set>
+                                    <p:animEffect filter="image" prLst="opacity: 0.5">
+                                      <p:cBhvr rctx="IE">
+                                        <p:cTn id="145" dur="indefinite"/>
                                         <p:tgtEl>
                                           <p:spTgt spid="27"/>
                                         </p:tgtEl>
@@ -13845,105 +14222,19 @@
                     </p:cTn>
                   </p:par>
                   <p:par>
-                    <p:cTn id="140" fill="hold">
+                    <p:cTn id="146" fill="hold">
                       <p:stCondLst>
                         <p:cond delay="indefinite"/>
                       </p:stCondLst>
                       <p:childTnLst>
                         <p:par>
-                          <p:cTn id="141" fill="hold">
+                          <p:cTn id="147" fill="hold">
                             <p:stCondLst>
                               <p:cond delay="0"/>
                             </p:stCondLst>
                             <p:childTnLst>
                               <p:par>
-                                <p:cTn id="142" presetID="10" presetClass="entr" presetSubtype="0" fill="hold" grpId="0" nodeType="clickEffect">
-                                  <p:stCondLst>
-                                    <p:cond delay="0"/>
-                                  </p:stCondLst>
-                                  <p:childTnLst>
-                                    <p:set>
-                                      <p:cBhvr>
-                                        <p:cTn id="143" dur="1" fill="hold">
-                                          <p:stCondLst>
-                                            <p:cond delay="0"/>
-                                          </p:stCondLst>
-                                        </p:cTn>
-                                        <p:tgtEl>
-                                          <p:spTgt spid="7">
-                                            <p:txEl>
-                                              <p:pRg st="1" end="1"/>
-                                            </p:txEl>
-                                          </p:spTgt>
-                                        </p:tgtEl>
-                                        <p:attrNameLst>
-                                          <p:attrName>style.visibility</p:attrName>
-                                        </p:attrNameLst>
-                                      </p:cBhvr>
-                                      <p:to>
-                                        <p:strVal val="visible"/>
-                                      </p:to>
-                                    </p:set>
-                                    <p:animEffect transition="in" filter="fade">
-                                      <p:cBhvr>
-                                        <p:cTn id="144" dur="500"/>
-                                        <p:tgtEl>
-                                          <p:spTgt spid="7">
-                                            <p:txEl>
-                                              <p:pRg st="1" end="1"/>
-                                            </p:txEl>
-                                          </p:spTgt>
-                                        </p:tgtEl>
-                                      </p:cBhvr>
-                                    </p:animEffect>
-                                  </p:childTnLst>
-                                </p:cTn>
-                              </p:par>
-                              <p:par>
-                                <p:cTn id="145" presetID="10" presetClass="entr" presetSubtype="0" fill="hold" grpId="0" nodeType="withEffect">
-                                  <p:stCondLst>
-                                    <p:cond delay="0"/>
-                                  </p:stCondLst>
-                                  <p:childTnLst>
-                                    <p:set>
-                                      <p:cBhvr>
-                                        <p:cTn id="146" dur="1" fill="hold">
-                                          <p:stCondLst>
-                                            <p:cond delay="0"/>
-                                          </p:stCondLst>
-                                        </p:cTn>
-                                        <p:tgtEl>
-                                          <p:spTgt spid="7">
-                                            <p:txEl>
-                                              <p:pRg st="2" end="2"/>
-                                            </p:txEl>
-                                          </p:spTgt>
-                                        </p:tgtEl>
-                                        <p:attrNameLst>
-                                          <p:attrName>style.visibility</p:attrName>
-                                        </p:attrNameLst>
-                                      </p:cBhvr>
-                                      <p:to>
-                                        <p:strVal val="visible"/>
-                                      </p:to>
-                                    </p:set>
-                                    <p:animEffect transition="in" filter="fade">
-                                      <p:cBhvr>
-                                        <p:cTn id="147" dur="500"/>
-                                        <p:tgtEl>
-                                          <p:spTgt spid="7">
-                                            <p:txEl>
-                                              <p:pRg st="2" end="2"/>
-                                            </p:txEl>
-                                          </p:spTgt>
-                                        </p:tgtEl>
-                                      </p:cBhvr>
-                                    </p:animEffect>
-                                  </p:childTnLst>
-                                </p:cTn>
-                              </p:par>
-                              <p:par>
-                                <p:cTn id="148" presetID="10" presetClass="entr" presetSubtype="0" fill="hold" grpId="0" nodeType="withEffect">
+                                <p:cTn id="148" presetID="10" presetClass="entr" presetSubtype="0" fill="hold" grpId="0" nodeType="clickEffect">
                                   <p:stCondLst>
                                     <p:cond delay="0"/>
                                   </p:stCondLst>
@@ -13958,7 +14249,7 @@
                                         <p:tgtEl>
                                           <p:spTgt spid="7">
                                             <p:txEl>
-                                              <p:pRg st="3" end="3"/>
+                                              <p:pRg st="1" end="1"/>
                                             </p:txEl>
                                           </p:spTgt>
                                         </p:tgtEl>
@@ -13976,7 +14267,7 @@
                                         <p:tgtEl>
                                           <p:spTgt spid="7">
                                             <p:txEl>
-                                              <p:pRg st="3" end="3"/>
+                                              <p:pRg st="1" end="1"/>
                                             </p:txEl>
                                           </p:spTgt>
                                         </p:tgtEl>
@@ -14001,7 +14292,7 @@
                                         <p:tgtEl>
                                           <p:spTgt spid="7">
                                             <p:txEl>
-                                              <p:pRg st="4" end="4"/>
+                                              <p:pRg st="2" end="2"/>
                                             </p:txEl>
                                           </p:spTgt>
                                         </p:tgtEl>
@@ -14019,7 +14310,7 @@
                                         <p:tgtEl>
                                           <p:spTgt spid="7">
                                             <p:txEl>
-                                              <p:pRg st="4" end="4"/>
+                                              <p:pRg st="2" end="2"/>
                                             </p:txEl>
                                           </p:spTgt>
                                         </p:tgtEl>
@@ -14042,7 +14333,11 @@
                                           </p:stCondLst>
                                         </p:cTn>
                                         <p:tgtEl>
-                                          <p:spTgt spid="29"/>
+                                          <p:spTgt spid="7">
+                                            <p:txEl>
+                                              <p:pRg st="3" end="3"/>
+                                            </p:txEl>
+                                          </p:spTgt>
                                         </p:tgtEl>
                                         <p:attrNameLst>
                                           <p:attrName>style.visibility</p:attrName>
@@ -14056,7 +14351,11 @@
                                       <p:cBhvr>
                                         <p:cTn id="156" dur="500"/>
                                         <p:tgtEl>
-                                          <p:spTgt spid="29"/>
+                                          <p:spTgt spid="7">
+                                            <p:txEl>
+                                              <p:pRg st="3" end="3"/>
+                                            </p:txEl>
+                                          </p:spTgt>
                                         </p:tgtEl>
                                       </p:cBhvr>
                                     </p:animEffect>
@@ -14077,7 +14376,11 @@
                                           </p:stCondLst>
                                         </p:cTn>
                                         <p:tgtEl>
-                                          <p:spTgt spid="28"/>
+                                          <p:spTgt spid="7">
+                                            <p:txEl>
+                                              <p:pRg st="4" end="4"/>
+                                            </p:txEl>
+                                          </p:spTgt>
                                         </p:tgtEl>
                                         <p:attrNameLst>
                                           <p:attrName>style.visibility</p:attrName>
@@ -14090,6 +14393,80 @@
                                     <p:animEffect transition="in" filter="fade">
                                       <p:cBhvr>
                                         <p:cTn id="159" dur="500"/>
+                                        <p:tgtEl>
+                                          <p:spTgt spid="7">
+                                            <p:txEl>
+                                              <p:pRg st="4" end="4"/>
+                                            </p:txEl>
+                                          </p:spTgt>
+                                        </p:tgtEl>
+                                      </p:cBhvr>
+                                    </p:animEffect>
+                                  </p:childTnLst>
+                                </p:cTn>
+                              </p:par>
+                              <p:par>
+                                <p:cTn id="160" presetID="10" presetClass="entr" presetSubtype="0" fill="hold" grpId="0" nodeType="withEffect">
+                                  <p:stCondLst>
+                                    <p:cond delay="0"/>
+                                  </p:stCondLst>
+                                  <p:childTnLst>
+                                    <p:set>
+                                      <p:cBhvr>
+                                        <p:cTn id="161" dur="1" fill="hold">
+                                          <p:stCondLst>
+                                            <p:cond delay="0"/>
+                                          </p:stCondLst>
+                                        </p:cTn>
+                                        <p:tgtEl>
+                                          <p:spTgt spid="29"/>
+                                        </p:tgtEl>
+                                        <p:attrNameLst>
+                                          <p:attrName>style.visibility</p:attrName>
+                                        </p:attrNameLst>
+                                      </p:cBhvr>
+                                      <p:to>
+                                        <p:strVal val="visible"/>
+                                      </p:to>
+                                    </p:set>
+                                    <p:animEffect transition="in" filter="fade">
+                                      <p:cBhvr>
+                                        <p:cTn id="162" dur="500"/>
+                                        <p:tgtEl>
+                                          <p:spTgt spid="29"/>
+                                        </p:tgtEl>
+                                      </p:cBhvr>
+                                    </p:animEffect>
+                                  </p:childTnLst>
+                                </p:cTn>
+                              </p:par>
+                              <p:par>
+                                <p:cTn id="163" presetID="10" presetClass="entr" presetSubtype="0" fill="hold" grpId="0" nodeType="withEffect">
+                                  <p:stCondLst>
+                                    <p:cond delay="0"/>
+                                  </p:stCondLst>
+                                  <p:childTnLst>
+                                    <p:set>
+                                      <p:cBhvr>
+                                        <p:cTn id="164" dur="1" fill="hold">
+                                          <p:stCondLst>
+                                            <p:cond delay="0"/>
+                                          </p:stCondLst>
+                                        </p:cTn>
+                                        <p:tgtEl>
+                                          <p:spTgt spid="28"/>
+                                        </p:tgtEl>
+                                        <p:attrNameLst>
+                                          <p:attrName>style.visibility</p:attrName>
+                                        </p:attrNameLst>
+                                      </p:cBhvr>
+                                      <p:to>
+                                        <p:strVal val="visible"/>
+                                      </p:to>
+                                    </p:set>
+                                    <p:animEffect transition="in" filter="fade">
+                                      <p:cBhvr>
+                                        <p:cTn id="165" dur="500"/>
                                         <p:tgtEl>
                                           <p:spTgt spid="28"/>
                                         </p:tgtEl>
@@ -17664,13 +18041,13 @@
   <p:clrMapOvr>
     <a:masterClrMapping/>
   </p:clrMapOvr>
-  <mc:AlternateContent xmlns:mc="http://schemas.openxmlformats.org/markup-compatibility/2006">
-    <mc:Choice xmlns:p159="http://schemas.microsoft.com/office/powerpoint/2015/09/main" Requires="p159">
+  <mc:AlternateContent xmlns:mc="http://schemas.openxmlformats.org/markup-compatibility/2006" xmlns:p159="http://schemas.microsoft.com/office/powerpoint/2015/09/main">
+    <mc:Choice Requires="p159">
       <p:transition spd="slow">
         <p159:morph option="byObject"/>
       </p:transition>
     </mc:Choice>
-    <mc:Fallback>
+    <mc:Fallback xmlns="">
       <p:transition spd="slow">
         <p:fade/>
       </p:transition>
@@ -20736,6 +21113,18 @@
               <a:latin typeface="Segoe UI"/>
             </a:endParaRPr>
           </a:p>
+          <a:p>
+            <a:pPr lvl="1"/>
+            <a:r>
+              <a:rPr lang="en-US" sz="4400" dirty="0">
+                <a:solidFill>
+                  <a:srgbClr val="E3E8F2"/>
+                </a:solidFill>
+                <a:latin typeface="Segoe UI"/>
+              </a:rPr>
+              <a:t>Private link limitations*</a:t>
+            </a:r>
+          </a:p>
         </p:txBody>
       </p:sp>
     </p:spTree>
@@ -21241,6 +21630,67 @@
                                           <p:spTgt spid="5">
                                             <p:txEl>
                                               <p:pRg st="5" end="5"/>
+                                            </p:txEl>
+                                          </p:spTgt>
+                                        </p:tgtEl>
+                                      </p:cBhvr>
+                                    </p:animEffect>
+                                  </p:childTnLst>
+                                </p:cTn>
+                              </p:par>
+                            </p:childTnLst>
+                          </p:cTn>
+                        </p:par>
+                      </p:childTnLst>
+                    </p:cTn>
+                  </p:par>
+                  <p:par>
+                    <p:cTn id="43" fill="hold">
+                      <p:stCondLst>
+                        <p:cond delay="indefinite"/>
+                      </p:stCondLst>
+                      <p:childTnLst>
+                        <p:par>
+                          <p:cTn id="44" fill="hold">
+                            <p:stCondLst>
+                              <p:cond delay="0"/>
+                            </p:stCondLst>
+                            <p:childTnLst>
+                              <p:par>
+                                <p:cTn id="45" presetID="10" presetClass="entr" presetSubtype="0" fill="hold" grpId="0" nodeType="clickEffect">
+                                  <p:stCondLst>
+                                    <p:cond delay="0"/>
+                                  </p:stCondLst>
+                                  <p:childTnLst>
+                                    <p:set>
+                                      <p:cBhvr>
+                                        <p:cTn id="46" dur="1" fill="hold">
+                                          <p:stCondLst>
+                                            <p:cond delay="0"/>
+                                          </p:stCondLst>
+                                        </p:cTn>
+                                        <p:tgtEl>
+                                          <p:spTgt spid="5">
+                                            <p:txEl>
+                                              <p:pRg st="6" end="6"/>
+                                            </p:txEl>
+                                          </p:spTgt>
+                                        </p:tgtEl>
+                                        <p:attrNameLst>
+                                          <p:attrName>style.visibility</p:attrName>
+                                        </p:attrNameLst>
+                                      </p:cBhvr>
+                                      <p:to>
+                                        <p:strVal val="visible"/>
+                                      </p:to>
+                                    </p:set>
+                                    <p:animEffect transition="in" filter="fade">
+                                      <p:cBhvr>
+                                        <p:cTn id="47" dur="500"/>
+                                        <p:tgtEl>
+                                          <p:spTgt spid="5">
+                                            <p:txEl>
+                                              <p:pRg st="6" end="6"/>
                                             </p:txEl>
                                           </p:spTgt>
                                         </p:tgtEl>
@@ -21289,6 +21739,1148 @@
   <p:cSld>
     <p:spTree>
       <p:nvGrpSpPr>
+        <p:cNvPr id="1" name="">
+          <a:extLst>
+            <a:ext uri="{FF2B5EF4-FFF2-40B4-BE49-F238E27FC236}">
+              <a16:creationId xmlns:a16="http://schemas.microsoft.com/office/drawing/2014/main" id="{7B4D565E-0171-48DE-1B7B-AC03617FC790}"/>
+            </a:ext>
+          </a:extLst>
+        </p:cNvPr>
+        <p:cNvGrpSpPr/>
+        <p:nvPr/>
+      </p:nvGrpSpPr>
+      <p:grpSpPr>
+        <a:xfrm>
+          <a:off x="0" y="0"/>
+          <a:ext cx="0" cy="0"/>
+          <a:chOff x="0" y="0"/>
+          <a:chExt cx="0" cy="0"/>
+        </a:xfrm>
+      </p:grpSpPr>
+      <p:sp>
+        <p:nvSpPr>
+          <p:cNvPr id="2" name="Title 1">
+            <a:extLst>
+              <a:ext uri="{FF2B5EF4-FFF2-40B4-BE49-F238E27FC236}">
+                <a16:creationId xmlns:a16="http://schemas.microsoft.com/office/drawing/2014/main" id="{5BA17042-AC7D-4E9C-5380-F77FFD5538AF}"/>
+              </a:ext>
+            </a:extLst>
+          </p:cNvPr>
+          <p:cNvSpPr>
+            <a:spLocks noGrp="1"/>
+          </p:cNvSpPr>
+          <p:nvPr>
+            <p:ph type="title"/>
+          </p:nvPr>
+        </p:nvSpPr>
+        <p:spPr/>
+        <p:txBody>
+          <a:bodyPr/>
+          <a:lstStyle/>
+          <a:p>
+            <a:r>
+              <a:rPr lang="sv-SE" dirty="0">
+                <a:solidFill>
+                  <a:srgbClr val="F7F9FF"/>
+                </a:solidFill>
+                <a:latin typeface="Segoe UI Semibold"/>
+              </a:rPr>
+              <a:t>Permissions for ARG</a:t>
+            </a:r>
+            <a:endParaRPr dirty="0">
+              <a:solidFill>
+                <a:srgbClr val="F7F9FF"/>
+              </a:solidFill>
+              <a:latin typeface="Segoe UI Semibold"/>
+            </a:endParaRPr>
+          </a:p>
+        </p:txBody>
+      </p:sp>
+      <p:sp>
+        <p:nvSpPr>
+          <p:cNvPr id="5" name="Content Placeholder 2">
+            <a:extLst>
+              <a:ext uri="{FF2B5EF4-FFF2-40B4-BE49-F238E27FC236}">
+                <a16:creationId xmlns:a16="http://schemas.microsoft.com/office/drawing/2014/main" id="{310CEF55-40A5-4CA2-A190-6397D71D8AC6}"/>
+              </a:ext>
+            </a:extLst>
+          </p:cNvPr>
+          <p:cNvSpPr>
+            <a:spLocks noGrp="1"/>
+          </p:cNvSpPr>
+          <p:nvPr>
+            <p:ph sz="quarter" idx="10"/>
+          </p:nvPr>
+        </p:nvSpPr>
+        <p:spPr>
+          <a:xfrm>
+            <a:off x="241299" y="2220913"/>
+            <a:ext cx="18514534" cy="6742112"/>
+          </a:xfrm>
+        </p:spPr>
+        <p:txBody>
+          <a:bodyPr>
+            <a:normAutofit/>
+          </a:bodyPr>
+          <a:lstStyle/>
+          <a:p>
+            <a:pPr marL="457200" indent="-457200">
+              <a:buFont typeface="Arial" panose="020B0604020202020204" pitchFamily="34" charset="0"/>
+              <a:buChar char="•"/>
+            </a:pPr>
+            <a:r>
+              <a:rPr lang="sv-SE" sz="4800" dirty="0" err="1">
+                <a:solidFill>
+                  <a:srgbClr val="E3E8F2"/>
+                </a:solidFill>
+                <a:latin typeface="Segoe UI"/>
+              </a:rPr>
+              <a:t>You</a:t>
+            </a:r>
+            <a:r>
+              <a:rPr lang="sv-SE" sz="4800" dirty="0">
+                <a:solidFill>
+                  <a:srgbClr val="E3E8F2"/>
+                </a:solidFill>
+                <a:latin typeface="Segoe UI"/>
+              </a:rPr>
+              <a:t> </a:t>
+            </a:r>
+            <a:r>
+              <a:rPr lang="sv-SE" sz="4800" dirty="0" err="1">
+                <a:solidFill>
+                  <a:srgbClr val="E3E8F2"/>
+                </a:solidFill>
+                <a:latin typeface="Segoe UI"/>
+              </a:rPr>
+              <a:t>need</a:t>
+            </a:r>
+            <a:r>
+              <a:rPr lang="sv-SE" sz="4800" dirty="0">
+                <a:solidFill>
+                  <a:srgbClr val="E3E8F2"/>
+                </a:solidFill>
+                <a:latin typeface="Segoe UI"/>
+              </a:rPr>
+              <a:t> access to the </a:t>
+            </a:r>
+            <a:r>
+              <a:rPr lang="sv-SE" sz="4800" dirty="0" err="1">
+                <a:solidFill>
+                  <a:srgbClr val="E3E8F2"/>
+                </a:solidFill>
+                <a:latin typeface="Segoe UI"/>
+              </a:rPr>
+              <a:t>scope</a:t>
+            </a:r>
+            <a:endParaRPr lang="sv-SE" sz="4800" dirty="0">
+              <a:solidFill>
+                <a:srgbClr val="E3E8F2"/>
+              </a:solidFill>
+              <a:latin typeface="Segoe UI"/>
+            </a:endParaRPr>
+          </a:p>
+          <a:p>
+            <a:pPr marL="457200" indent="-457200">
+              <a:buFont typeface="Arial" panose="020B0604020202020204" pitchFamily="34" charset="0"/>
+              <a:buChar char="•"/>
+            </a:pPr>
+            <a:r>
+              <a:rPr lang="en-US" sz="4400" dirty="0">
+                <a:solidFill>
+                  <a:srgbClr val="E3E8F2"/>
+                </a:solidFill>
+                <a:latin typeface="Segoe UI"/>
+              </a:rPr>
+              <a:t>Query by access for the identity used</a:t>
+            </a:r>
+          </a:p>
+          <a:p>
+            <a:pPr marL="857250" lvl="1" indent="-457200"/>
+            <a:r>
+              <a:rPr lang="en-US" sz="4000" dirty="0" err="1">
+                <a:solidFill>
+                  <a:srgbClr val="FFC000"/>
+                </a:solidFill>
+                <a:latin typeface="Cascadia Code" panose="020B0609020000020004" pitchFamily="34" charset="0"/>
+                <a:ea typeface="Cascadia Code" panose="020B0609020000020004" pitchFamily="34" charset="0"/>
+                <a:cs typeface="Cascadia Code" panose="020B0609020000020004" pitchFamily="34" charset="0"/>
+              </a:rPr>
+              <a:t>hasPermission</a:t>
+            </a:r>
+            <a:r>
+              <a:rPr lang="en-US" sz="4000" dirty="0">
+                <a:solidFill>
+                  <a:srgbClr val="FFC000"/>
+                </a:solidFill>
+                <a:latin typeface="Cascadia Code" panose="020B0609020000020004" pitchFamily="34" charset="0"/>
+                <a:ea typeface="Cascadia Code" panose="020B0609020000020004" pitchFamily="34" charset="0"/>
+                <a:cs typeface="Cascadia Code" panose="020B0609020000020004" pitchFamily="34" charset="0"/>
+              </a:rPr>
+              <a:t>()</a:t>
+            </a:r>
+            <a:endParaRPr lang="en-US" sz="4000" dirty="0">
+              <a:solidFill>
+                <a:srgbClr val="E3E8F2"/>
+              </a:solidFill>
+              <a:latin typeface="Segoe UI"/>
+            </a:endParaRPr>
+          </a:p>
+          <a:p>
+            <a:pPr marL="857250" lvl="1" indent="-457200"/>
+            <a:r>
+              <a:rPr lang="en-US" sz="4000" dirty="0" err="1">
+                <a:solidFill>
+                  <a:srgbClr val="FFC000"/>
+                </a:solidFill>
+                <a:latin typeface="Cascadia Code" panose="020B0609020000020004" pitchFamily="34" charset="0"/>
+                <a:ea typeface="Cascadia Code" panose="020B0609020000020004" pitchFamily="34" charset="0"/>
+                <a:cs typeface="Cascadia Code" panose="020B0609020000020004" pitchFamily="34" charset="0"/>
+              </a:rPr>
+              <a:t>hasDataPermission</a:t>
+            </a:r>
+            <a:r>
+              <a:rPr lang="en-US" sz="4000" dirty="0">
+                <a:solidFill>
+                  <a:srgbClr val="FFC000"/>
+                </a:solidFill>
+                <a:latin typeface="Cascadia Code" panose="020B0609020000020004" pitchFamily="34" charset="0"/>
+                <a:ea typeface="Cascadia Code" panose="020B0609020000020004" pitchFamily="34" charset="0"/>
+                <a:cs typeface="Cascadia Code" panose="020B0609020000020004" pitchFamily="34" charset="0"/>
+              </a:rPr>
+              <a:t>()</a:t>
+            </a:r>
+          </a:p>
+          <a:p>
+            <a:pPr marL="0" indent="0"/>
+            <a:endParaRPr lang="en-US" sz="4400" dirty="0">
+              <a:solidFill>
+                <a:schemeClr val="bg1"/>
+              </a:solidFill>
+              <a:latin typeface="Segoe UI" panose="020B0502040204020203" pitchFamily="34" charset="0"/>
+              <a:ea typeface="Cascadia Code" panose="020B0609020000020004" pitchFamily="34" charset="0"/>
+              <a:cs typeface="Segoe UI" panose="020B0502040204020203" pitchFamily="34" charset="0"/>
+            </a:endParaRPr>
+          </a:p>
+        </p:txBody>
+      </p:sp>
+      <p:grpSp>
+        <p:nvGrpSpPr>
+          <p:cNvPr id="13" name="Group 12">
+            <a:extLst>
+              <a:ext uri="{FF2B5EF4-FFF2-40B4-BE49-F238E27FC236}">
+                <a16:creationId xmlns:a16="http://schemas.microsoft.com/office/drawing/2014/main" id="{66137AD3-FFF7-B809-A903-DC32D9562AFD}"/>
+              </a:ext>
+            </a:extLst>
+          </p:cNvPr>
+          <p:cNvGrpSpPr/>
+          <p:nvPr/>
+        </p:nvGrpSpPr>
+        <p:grpSpPr>
+          <a:xfrm>
+            <a:off x="241299" y="5447982"/>
+            <a:ext cx="17805402" cy="3468443"/>
+            <a:chOff x="241299" y="5447982"/>
+            <a:chExt cx="17805402" cy="3468443"/>
+          </a:xfrm>
+        </p:grpSpPr>
+        <p:sp>
+          <p:nvSpPr>
+            <p:cNvPr id="3" name="Rounded Rectangle 2">
+              <a:extLst>
+                <a:ext uri="{FF2B5EF4-FFF2-40B4-BE49-F238E27FC236}">
+                  <a16:creationId xmlns:a16="http://schemas.microsoft.com/office/drawing/2014/main" id="{71BEAA3A-9343-82FD-7EFA-A7D219C0D4DA}"/>
+                </a:ext>
+              </a:extLst>
+            </p:cNvPr>
+            <p:cNvSpPr/>
+            <p:nvPr/>
+          </p:nvSpPr>
+          <p:spPr>
+            <a:xfrm>
+              <a:off x="241299" y="5447982"/>
+              <a:ext cx="17805402" cy="3468443"/>
+            </a:xfrm>
+            <a:prstGeom prst="roundRect">
+              <a:avLst/>
+            </a:prstGeom>
+            <a:solidFill>
+              <a:schemeClr val="bg1">
+                <a:lumMod val="10000"/>
+              </a:schemeClr>
+            </a:solidFill>
+            <a:ln>
+              <a:noFill/>
+            </a:ln>
+          </p:spPr>
+          <p:style>
+            <a:lnRef idx="2">
+              <a:schemeClr val="accent1">
+                <a:shade val="15000"/>
+              </a:schemeClr>
+            </a:lnRef>
+            <a:fillRef idx="1">
+              <a:schemeClr val="accent1"/>
+            </a:fillRef>
+            <a:effectRef idx="0">
+              <a:schemeClr val="accent1"/>
+            </a:effectRef>
+            <a:fontRef idx="minor">
+              <a:schemeClr val="lt1"/>
+            </a:fontRef>
+          </p:style>
+          <p:txBody>
+            <a:bodyPr rtlCol="0" anchor="ctr"/>
+            <a:lstStyle/>
+            <a:p>
+              <a:pPr algn="ctr"/>
+              <a:endParaRPr lang="en-US" sz="1200"/>
+            </a:p>
+          </p:txBody>
+        </p:sp>
+        <p:sp>
+          <p:nvSpPr>
+            <p:cNvPr id="4" name="TextBox 3">
+              <a:extLst>
+                <a:ext uri="{FF2B5EF4-FFF2-40B4-BE49-F238E27FC236}">
+                  <a16:creationId xmlns:a16="http://schemas.microsoft.com/office/drawing/2014/main" id="{78DFBBED-53F5-E205-9A56-211F647C33B9}"/>
+                </a:ext>
+              </a:extLst>
+            </p:cNvPr>
+            <p:cNvSpPr txBox="1"/>
+            <p:nvPr/>
+          </p:nvSpPr>
+          <p:spPr>
+            <a:xfrm>
+              <a:off x="767315" y="6020171"/>
+              <a:ext cx="16956570" cy="2062103"/>
+            </a:xfrm>
+            <a:prstGeom prst="rect">
+              <a:avLst/>
+            </a:prstGeom>
+            <a:noFill/>
+          </p:spPr>
+          <p:txBody>
+            <a:bodyPr wrap="square">
+              <a:spAutoFit/>
+            </a:bodyPr>
+            <a:lstStyle/>
+            <a:p>
+              <a:pPr>
+                <a:buNone/>
+              </a:pPr>
+              <a:endParaRPr lang="en-US" sz="3200" b="0" dirty="0">
+                <a:solidFill>
+                  <a:srgbClr val="8C8C8C"/>
+                </a:solidFill>
+                <a:effectLst/>
+                <a:latin typeface="Cascadia Code" panose="020B0609020000020004" pitchFamily="34" charset="0"/>
+              </a:endParaRPr>
+            </a:p>
+            <a:p>
+              <a:pPr>
+                <a:buNone/>
+              </a:pPr>
+              <a:r>
+                <a:rPr lang="en-US" sz="3200" b="0" dirty="0">
+                  <a:solidFill>
+                    <a:srgbClr val="8C8C8C"/>
+                  </a:solidFill>
+                  <a:effectLst/>
+                  <a:latin typeface="Cascadia Code" panose="020B0609020000020004" pitchFamily="34" charset="0"/>
+                </a:rPr>
+                <a:t>| </a:t>
+              </a:r>
+              <a:r>
+                <a:rPr lang="en-US" sz="3200" dirty="0">
+                  <a:solidFill>
+                    <a:srgbClr val="C586C0"/>
+                  </a:solidFill>
+                  <a:latin typeface="Cascadia Code" panose="020B0609020000020004" pitchFamily="34" charset="0"/>
+                </a:rPr>
+                <a:t>     </a:t>
+              </a:r>
+              <a:r>
+                <a:rPr lang="en-US" sz="3200" b="0" dirty="0">
+                  <a:solidFill>
+                    <a:srgbClr val="8C8C8C"/>
+                  </a:solidFill>
+                  <a:effectLst/>
+                  <a:latin typeface="Cascadia Code" panose="020B0609020000020004" pitchFamily="34" charset="0"/>
+                </a:rPr>
+                <a:t> </a:t>
+              </a:r>
+              <a:r>
+                <a:rPr lang="en-US" sz="3200" b="0" dirty="0">
+                  <a:solidFill>
+                    <a:srgbClr val="569CD6"/>
+                  </a:solidFill>
+                  <a:effectLst/>
+                  <a:latin typeface="Cascadia Code" panose="020B0609020000020004" pitchFamily="34" charset="0"/>
+                </a:rPr>
+                <a:t>type</a:t>
+              </a:r>
+              <a:r>
+                <a:rPr lang="en-US" sz="3200" b="0" dirty="0">
+                  <a:solidFill>
+                    <a:srgbClr val="8C8C8C"/>
+                  </a:solidFill>
+                  <a:effectLst/>
+                  <a:latin typeface="Cascadia Code" panose="020B0609020000020004" pitchFamily="34" charset="0"/>
+                </a:rPr>
+                <a:t> </a:t>
+              </a:r>
+              <a:r>
+                <a:rPr lang="en-US" sz="3200" dirty="0">
+                  <a:latin typeface="Cascadia Code" panose="020B0609020000020004" pitchFamily="34" charset="0"/>
+                </a:rPr>
+                <a:t>=~</a:t>
+              </a:r>
+              <a:r>
+                <a:rPr lang="en-US" sz="3200" b="0" dirty="0">
+                  <a:solidFill>
+                    <a:srgbClr val="8C8C8C"/>
+                  </a:solidFill>
+                  <a:effectLst/>
+                  <a:latin typeface="Cascadia Code" panose="020B0609020000020004" pitchFamily="34" charset="0"/>
+                </a:rPr>
+                <a:t> </a:t>
+              </a:r>
+              <a:r>
+                <a:rPr lang="en-US" sz="3200" dirty="0">
+                  <a:solidFill>
+                    <a:srgbClr val="CE9178"/>
+                  </a:solidFill>
+                  <a:latin typeface="Cascadia Code" panose="020B0609020000020004" pitchFamily="34" charset="0"/>
+                </a:rPr>
+                <a:t>‘</a:t>
+              </a:r>
+              <a:r>
+                <a:rPr lang="en-US" sz="3200" b="0" dirty="0" err="1">
+                  <a:solidFill>
+                    <a:srgbClr val="CE9178"/>
+                  </a:solidFill>
+                  <a:effectLst/>
+                  <a:latin typeface="Cascadia Code" panose="020B0609020000020004" pitchFamily="34" charset="0"/>
+                </a:rPr>
+                <a:t>microsoft.containerregistry</a:t>
+              </a:r>
+              <a:r>
+                <a:rPr lang="en-US" sz="3200" b="0" dirty="0">
+                  <a:solidFill>
+                    <a:srgbClr val="CE9178"/>
+                  </a:solidFill>
+                  <a:effectLst/>
+                  <a:latin typeface="Cascadia Code" panose="020B0609020000020004" pitchFamily="34" charset="0"/>
+                </a:rPr>
+                <a:t>/registries’</a:t>
+              </a:r>
+            </a:p>
+            <a:p>
+              <a:r>
+                <a:rPr lang="en-US" sz="3200" dirty="0">
+                  <a:solidFill>
+                    <a:srgbClr val="8C8C8C"/>
+                  </a:solidFill>
+                  <a:latin typeface="Cascadia Code" panose="020B0609020000020004" pitchFamily="34" charset="0"/>
+                </a:rPr>
+                <a:t>|</a:t>
+              </a:r>
+              <a:r>
+                <a:rPr lang="en-US" sz="3200" dirty="0">
+                  <a:solidFill>
+                    <a:srgbClr val="569CD6"/>
+                  </a:solidFill>
+                  <a:latin typeface="Cascadia Code" panose="020B0609020000020004" pitchFamily="34" charset="0"/>
+                </a:rPr>
+                <a:t> </a:t>
+              </a:r>
+              <a:r>
+                <a:rPr lang="en-US" sz="3200" dirty="0">
+                  <a:solidFill>
+                    <a:srgbClr val="C686C1"/>
+                  </a:solidFill>
+                  <a:latin typeface="Cascadia Code" panose="020B0609020000020004" pitchFamily="34" charset="0"/>
+                </a:rPr>
+                <a:t>extend </a:t>
+              </a:r>
+              <a:r>
+                <a:rPr lang="en-US" sz="3200" dirty="0" err="1">
+                  <a:solidFill>
+                    <a:srgbClr val="E3E3E3"/>
+                  </a:solidFill>
+                  <a:latin typeface="Cascadia Code" panose="020B0609020000020004" pitchFamily="34" charset="0"/>
+                </a:rPr>
+                <a:t>canPush</a:t>
+              </a:r>
+              <a:r>
+                <a:rPr lang="en-US" sz="3200" dirty="0">
+                  <a:solidFill>
+                    <a:srgbClr val="E3E3E3"/>
+                  </a:solidFill>
+                  <a:latin typeface="Cascadia Code" panose="020B0609020000020004" pitchFamily="34" charset="0"/>
+                </a:rPr>
+                <a:t> =</a:t>
+              </a:r>
+              <a:endParaRPr lang="en-US" sz="3200" dirty="0">
+                <a:solidFill>
+                  <a:srgbClr val="C686C1"/>
+                </a:solidFill>
+                <a:latin typeface="Cascadia Code" panose="020B0609020000020004" pitchFamily="34" charset="0"/>
+              </a:endParaRPr>
+            </a:p>
+            <a:p>
+              <a:r>
+                <a:rPr lang="en-US" sz="3200" dirty="0">
+                  <a:solidFill>
+                    <a:srgbClr val="C686C1"/>
+                  </a:solidFill>
+                  <a:latin typeface="Cascadia Code" panose="020B0609020000020004" pitchFamily="34" charset="0"/>
+                </a:rPr>
+                <a:t>	</a:t>
+              </a:r>
+              <a:r>
+                <a:rPr lang="en-US" sz="3200" dirty="0" err="1">
+                  <a:solidFill>
+                    <a:srgbClr val="EAC000"/>
+                  </a:solidFill>
+                  <a:latin typeface="Cascadia Code" panose="020B0609020000020004" pitchFamily="34" charset="0"/>
+                </a:rPr>
+                <a:t>hasPermission</a:t>
+              </a:r>
+              <a:r>
+                <a:rPr lang="en-US" sz="3200" dirty="0">
+                  <a:solidFill>
+                    <a:srgbClr val="EAC000"/>
+                  </a:solidFill>
+                  <a:latin typeface="Cascadia Code" panose="020B0609020000020004" pitchFamily="34" charset="0"/>
+                </a:rPr>
+                <a:t>(</a:t>
+              </a:r>
+              <a:r>
+                <a:rPr lang="en-US" sz="3200" dirty="0">
+                  <a:solidFill>
+                    <a:srgbClr val="CE9278"/>
+                  </a:solidFill>
+                  <a:latin typeface="Cascadia Code" panose="020B0609020000020004" pitchFamily="34" charset="0"/>
+                </a:rPr>
+                <a:t>'</a:t>
+              </a:r>
+              <a:r>
+                <a:rPr lang="en-US" sz="3200" dirty="0" err="1">
+                  <a:solidFill>
+                    <a:srgbClr val="CE9278"/>
+                  </a:solidFill>
+                  <a:latin typeface="Cascadia Code" panose="020B0609020000020004" pitchFamily="34" charset="0"/>
+                </a:rPr>
+                <a:t>Microsoft.ContainerRegistry</a:t>
+              </a:r>
+              <a:r>
+                <a:rPr lang="en-US" sz="3200" dirty="0">
+                  <a:solidFill>
+                    <a:srgbClr val="CE9278"/>
+                  </a:solidFill>
+                  <a:latin typeface="Cascadia Code" panose="020B0609020000020004" pitchFamily="34" charset="0"/>
+                </a:rPr>
+                <a:t>/registries/push/write'</a:t>
+              </a:r>
+              <a:r>
+                <a:rPr lang="en-US" sz="3200" dirty="0">
+                  <a:solidFill>
+                    <a:srgbClr val="EAC000"/>
+                  </a:solidFill>
+                  <a:latin typeface="Cascadia Code" panose="020B0609020000020004" pitchFamily="34" charset="0"/>
+                </a:rPr>
+                <a:t>)</a:t>
+              </a:r>
+              <a:endParaRPr lang="en-US" sz="3200" b="0" dirty="0">
+                <a:solidFill>
+                  <a:srgbClr val="EAC000"/>
+                </a:solidFill>
+                <a:effectLst/>
+                <a:latin typeface="Cascadia Code" panose="020B0609020000020004" pitchFamily="34" charset="0"/>
+              </a:endParaRPr>
+            </a:p>
+          </p:txBody>
+        </p:sp>
+        <p:sp>
+          <p:nvSpPr>
+            <p:cNvPr id="6" name="TextBox 5">
+              <a:extLst>
+                <a:ext uri="{FF2B5EF4-FFF2-40B4-BE49-F238E27FC236}">
+                  <a16:creationId xmlns:a16="http://schemas.microsoft.com/office/drawing/2014/main" id="{4F52B64F-93CE-300A-3DCD-CE9074097E30}"/>
+                </a:ext>
+              </a:extLst>
+            </p:cNvPr>
+            <p:cNvSpPr txBox="1"/>
+            <p:nvPr/>
+          </p:nvSpPr>
+          <p:spPr>
+            <a:xfrm>
+              <a:off x="767316" y="6020171"/>
+              <a:ext cx="3371985" cy="584775"/>
+            </a:xfrm>
+            <a:prstGeom prst="rect">
+              <a:avLst/>
+            </a:prstGeom>
+            <a:noFill/>
+          </p:spPr>
+          <p:txBody>
+            <a:bodyPr wrap="square">
+              <a:spAutoFit/>
+            </a:bodyPr>
+            <a:lstStyle/>
+            <a:p>
+              <a:pPr>
+                <a:buNone/>
+              </a:pPr>
+              <a:r>
+                <a:rPr lang="en-US" sz="3200" b="0" dirty="0">
+                  <a:solidFill>
+                    <a:srgbClr val="569CD6"/>
+                  </a:solidFill>
+                  <a:effectLst/>
+                  <a:latin typeface="Cascadia Code" panose="020B0609020000020004" pitchFamily="34" charset="0"/>
+                </a:rPr>
+                <a:t>resources</a:t>
+              </a:r>
+            </a:p>
+          </p:txBody>
+        </p:sp>
+        <p:sp>
+          <p:nvSpPr>
+            <p:cNvPr id="7" name="TextBox 6">
+              <a:extLst>
+                <a:ext uri="{FF2B5EF4-FFF2-40B4-BE49-F238E27FC236}">
+                  <a16:creationId xmlns:a16="http://schemas.microsoft.com/office/drawing/2014/main" id="{BA8B2542-2120-1573-831A-DFF464F227AD}"/>
+                </a:ext>
+              </a:extLst>
+            </p:cNvPr>
+            <p:cNvSpPr txBox="1"/>
+            <p:nvPr/>
+          </p:nvSpPr>
+          <p:spPr>
+            <a:xfrm>
+              <a:off x="1294698" y="6500896"/>
+              <a:ext cx="2116327" cy="584775"/>
+            </a:xfrm>
+            <a:prstGeom prst="rect">
+              <a:avLst/>
+            </a:prstGeom>
+            <a:noFill/>
+          </p:spPr>
+          <p:txBody>
+            <a:bodyPr wrap="square">
+              <a:spAutoFit/>
+            </a:bodyPr>
+            <a:lstStyle/>
+            <a:p>
+              <a:r>
+                <a:rPr lang="en-US" sz="3200" b="0" dirty="0">
+                  <a:solidFill>
+                    <a:srgbClr val="C586C0"/>
+                  </a:solidFill>
+                  <a:effectLst/>
+                  <a:latin typeface="Cascadia Code" panose="020B0609020000020004" pitchFamily="34" charset="0"/>
+                </a:rPr>
+                <a:t>where</a:t>
+              </a:r>
+              <a:endParaRPr lang="en-US" sz="3200" dirty="0">
+                <a:solidFill>
+                  <a:srgbClr val="C586C0"/>
+                </a:solidFill>
+              </a:endParaRPr>
+            </a:p>
+          </p:txBody>
+        </p:sp>
+      </p:grpSp>
+    </p:spTree>
+    <p:extLst>
+      <p:ext uri="{BB962C8B-B14F-4D97-AF65-F5344CB8AC3E}">
+        <p14:creationId xmlns:p14="http://schemas.microsoft.com/office/powerpoint/2010/main" val="2548438563"/>
+      </p:ext>
+    </p:extLst>
+  </p:cSld>
+  <p:clrMapOvr>
+    <a:masterClrMapping/>
+  </p:clrMapOvr>
+  <p:timing>
+    <p:tnLst>
+      <p:par>
+        <p:cTn id="1" dur="indefinite" restart="never" nodeType="tmRoot">
+          <p:childTnLst>
+            <p:seq concurrent="1" nextAc="seek">
+              <p:cTn id="2" dur="indefinite" nodeType="mainSeq">
+                <p:childTnLst>
+                  <p:par>
+                    <p:cTn id="3" fill="hold">
+                      <p:stCondLst>
+                        <p:cond delay="indefinite"/>
+                      </p:stCondLst>
+                      <p:childTnLst>
+                        <p:par>
+                          <p:cTn id="4" fill="hold">
+                            <p:stCondLst>
+                              <p:cond delay="0"/>
+                            </p:stCondLst>
+                            <p:childTnLst>
+                              <p:par>
+                                <p:cTn id="5" presetID="10" presetClass="entr" presetSubtype="0" fill="hold" grpId="0" nodeType="clickEffect">
+                                  <p:stCondLst>
+                                    <p:cond delay="0"/>
+                                  </p:stCondLst>
+                                  <p:childTnLst>
+                                    <p:set>
+                                      <p:cBhvr>
+                                        <p:cTn id="6" dur="1" fill="hold">
+                                          <p:stCondLst>
+                                            <p:cond delay="0"/>
+                                          </p:stCondLst>
+                                        </p:cTn>
+                                        <p:tgtEl>
+                                          <p:spTgt spid="5">
+                                            <p:txEl>
+                                              <p:pRg st="0" end="0"/>
+                                            </p:txEl>
+                                          </p:spTgt>
+                                        </p:tgtEl>
+                                        <p:attrNameLst>
+                                          <p:attrName>style.visibility</p:attrName>
+                                        </p:attrNameLst>
+                                      </p:cBhvr>
+                                      <p:to>
+                                        <p:strVal val="visible"/>
+                                      </p:to>
+                                    </p:set>
+                                    <p:animEffect transition="in" filter="fade">
+                                      <p:cBhvr>
+                                        <p:cTn id="7" dur="500"/>
+                                        <p:tgtEl>
+                                          <p:spTgt spid="5">
+                                            <p:txEl>
+                                              <p:pRg st="0" end="0"/>
+                                            </p:txEl>
+                                          </p:spTgt>
+                                        </p:tgtEl>
+                                      </p:cBhvr>
+                                    </p:animEffect>
+                                  </p:childTnLst>
+                                </p:cTn>
+                              </p:par>
+                            </p:childTnLst>
+                          </p:cTn>
+                        </p:par>
+                      </p:childTnLst>
+                    </p:cTn>
+                  </p:par>
+                  <p:par>
+                    <p:cTn id="8" fill="hold">
+                      <p:stCondLst>
+                        <p:cond delay="indefinite"/>
+                      </p:stCondLst>
+                      <p:childTnLst>
+                        <p:par>
+                          <p:cTn id="9" fill="hold">
+                            <p:stCondLst>
+                              <p:cond delay="0"/>
+                            </p:stCondLst>
+                            <p:childTnLst>
+                              <p:par>
+                                <p:cTn id="10" presetID="10" presetClass="entr" presetSubtype="0" fill="hold" grpId="0" nodeType="clickEffect">
+                                  <p:stCondLst>
+                                    <p:cond delay="0"/>
+                                  </p:stCondLst>
+                                  <p:childTnLst>
+                                    <p:set>
+                                      <p:cBhvr>
+                                        <p:cTn id="11" dur="1" fill="hold">
+                                          <p:stCondLst>
+                                            <p:cond delay="0"/>
+                                          </p:stCondLst>
+                                        </p:cTn>
+                                        <p:tgtEl>
+                                          <p:spTgt spid="5">
+                                            <p:txEl>
+                                              <p:pRg st="1" end="1"/>
+                                            </p:txEl>
+                                          </p:spTgt>
+                                        </p:tgtEl>
+                                        <p:attrNameLst>
+                                          <p:attrName>style.visibility</p:attrName>
+                                        </p:attrNameLst>
+                                      </p:cBhvr>
+                                      <p:to>
+                                        <p:strVal val="visible"/>
+                                      </p:to>
+                                    </p:set>
+                                    <p:animEffect transition="in" filter="fade">
+                                      <p:cBhvr>
+                                        <p:cTn id="12" dur="500"/>
+                                        <p:tgtEl>
+                                          <p:spTgt spid="5">
+                                            <p:txEl>
+                                              <p:pRg st="1" end="1"/>
+                                            </p:txEl>
+                                          </p:spTgt>
+                                        </p:tgtEl>
+                                      </p:cBhvr>
+                                    </p:animEffect>
+                                  </p:childTnLst>
+                                </p:cTn>
+                              </p:par>
+                              <p:par>
+                                <p:cTn id="13" presetID="9" presetClass="emph" presetSubtype="0" grpId="1" nodeType="withEffect">
+                                  <p:stCondLst>
+                                    <p:cond delay="0"/>
+                                  </p:stCondLst>
+                                  <p:childTnLst>
+                                    <p:set>
+                                      <p:cBhvr>
+                                        <p:cTn id="14" dur="indefinite"/>
+                                        <p:tgtEl>
+                                          <p:spTgt spid="5">
+                                            <p:txEl>
+                                              <p:pRg st="0" end="0"/>
+                                            </p:txEl>
+                                          </p:spTgt>
+                                        </p:tgtEl>
+                                        <p:attrNameLst>
+                                          <p:attrName>style.opacity</p:attrName>
+                                        </p:attrNameLst>
+                                      </p:cBhvr>
+                                      <p:to>
+                                        <p:strVal val="0.5"/>
+                                      </p:to>
+                                    </p:set>
+                                    <p:animEffect filter="image" prLst="opacity: 0.5">
+                                      <p:cBhvr rctx="IE">
+                                        <p:cTn id="15" dur="indefinite"/>
+                                        <p:tgtEl>
+                                          <p:spTgt spid="5">
+                                            <p:txEl>
+                                              <p:pRg st="0" end="0"/>
+                                            </p:txEl>
+                                          </p:spTgt>
+                                        </p:tgtEl>
+                                      </p:cBhvr>
+                                    </p:animEffect>
+                                  </p:childTnLst>
+                                </p:cTn>
+                              </p:par>
+                            </p:childTnLst>
+                          </p:cTn>
+                        </p:par>
+                      </p:childTnLst>
+                    </p:cTn>
+                  </p:par>
+                  <p:par>
+                    <p:cTn id="16" fill="hold">
+                      <p:stCondLst>
+                        <p:cond delay="indefinite"/>
+                      </p:stCondLst>
+                      <p:childTnLst>
+                        <p:par>
+                          <p:cTn id="17" fill="hold">
+                            <p:stCondLst>
+                              <p:cond delay="0"/>
+                            </p:stCondLst>
+                            <p:childTnLst>
+                              <p:par>
+                                <p:cTn id="18" presetID="10" presetClass="entr" presetSubtype="0" fill="hold" grpId="0" nodeType="clickEffect">
+                                  <p:stCondLst>
+                                    <p:cond delay="0"/>
+                                  </p:stCondLst>
+                                  <p:childTnLst>
+                                    <p:set>
+                                      <p:cBhvr>
+                                        <p:cTn id="19" dur="1" fill="hold">
+                                          <p:stCondLst>
+                                            <p:cond delay="0"/>
+                                          </p:stCondLst>
+                                        </p:cTn>
+                                        <p:tgtEl>
+                                          <p:spTgt spid="5">
+                                            <p:txEl>
+                                              <p:pRg st="2" end="2"/>
+                                            </p:txEl>
+                                          </p:spTgt>
+                                        </p:tgtEl>
+                                        <p:attrNameLst>
+                                          <p:attrName>style.visibility</p:attrName>
+                                        </p:attrNameLst>
+                                      </p:cBhvr>
+                                      <p:to>
+                                        <p:strVal val="visible"/>
+                                      </p:to>
+                                    </p:set>
+                                    <p:animEffect transition="in" filter="fade">
+                                      <p:cBhvr>
+                                        <p:cTn id="20" dur="500"/>
+                                        <p:tgtEl>
+                                          <p:spTgt spid="5">
+                                            <p:txEl>
+                                              <p:pRg st="2" end="2"/>
+                                            </p:txEl>
+                                          </p:spTgt>
+                                        </p:tgtEl>
+                                      </p:cBhvr>
+                                    </p:animEffect>
+                                  </p:childTnLst>
+                                </p:cTn>
+                              </p:par>
+                              <p:par>
+                                <p:cTn id="21" presetID="10" presetClass="entr" presetSubtype="0" fill="hold" grpId="0" nodeType="withEffect">
+                                  <p:stCondLst>
+                                    <p:cond delay="0"/>
+                                  </p:stCondLst>
+                                  <p:childTnLst>
+                                    <p:set>
+                                      <p:cBhvr>
+                                        <p:cTn id="22" dur="1" fill="hold">
+                                          <p:stCondLst>
+                                            <p:cond delay="0"/>
+                                          </p:stCondLst>
+                                        </p:cTn>
+                                        <p:tgtEl>
+                                          <p:spTgt spid="5">
+                                            <p:txEl>
+                                              <p:pRg st="3" end="3"/>
+                                            </p:txEl>
+                                          </p:spTgt>
+                                        </p:tgtEl>
+                                        <p:attrNameLst>
+                                          <p:attrName>style.visibility</p:attrName>
+                                        </p:attrNameLst>
+                                      </p:cBhvr>
+                                      <p:to>
+                                        <p:strVal val="visible"/>
+                                      </p:to>
+                                    </p:set>
+                                    <p:animEffect transition="in" filter="fade">
+                                      <p:cBhvr>
+                                        <p:cTn id="23" dur="500"/>
+                                        <p:tgtEl>
+                                          <p:spTgt spid="5">
+                                            <p:txEl>
+                                              <p:pRg st="3" end="3"/>
+                                            </p:txEl>
+                                          </p:spTgt>
+                                        </p:tgtEl>
+                                      </p:cBhvr>
+                                    </p:animEffect>
+                                  </p:childTnLst>
+                                </p:cTn>
+                              </p:par>
+                            </p:childTnLst>
+                          </p:cTn>
+                        </p:par>
+                      </p:childTnLst>
+                    </p:cTn>
+                  </p:par>
+                  <p:par>
+                    <p:cTn id="24" fill="hold">
+                      <p:stCondLst>
+                        <p:cond delay="indefinite"/>
+                      </p:stCondLst>
+                      <p:childTnLst>
+                        <p:par>
+                          <p:cTn id="25" fill="hold">
+                            <p:stCondLst>
+                              <p:cond delay="0"/>
+                            </p:stCondLst>
+                            <p:childTnLst>
+                              <p:par>
+                                <p:cTn id="26" presetID="10" presetClass="entr" presetSubtype="0" fill="hold" nodeType="clickEffect">
+                                  <p:stCondLst>
+                                    <p:cond delay="0"/>
+                                  </p:stCondLst>
+                                  <p:childTnLst>
+                                    <p:set>
+                                      <p:cBhvr>
+                                        <p:cTn id="27" dur="1" fill="hold">
+                                          <p:stCondLst>
+                                            <p:cond delay="0"/>
+                                          </p:stCondLst>
+                                        </p:cTn>
+                                        <p:tgtEl>
+                                          <p:spTgt spid="13"/>
+                                        </p:tgtEl>
+                                        <p:attrNameLst>
+                                          <p:attrName>style.visibility</p:attrName>
+                                        </p:attrNameLst>
+                                      </p:cBhvr>
+                                      <p:to>
+                                        <p:strVal val="visible"/>
+                                      </p:to>
+                                    </p:set>
+                                    <p:animEffect transition="in" filter="fade">
+                                      <p:cBhvr>
+                                        <p:cTn id="28" dur="500"/>
+                                        <p:tgtEl>
+                                          <p:spTgt spid="13"/>
+                                        </p:tgtEl>
+                                      </p:cBhvr>
+                                    </p:animEffect>
+                                  </p:childTnLst>
+                                </p:cTn>
+                              </p:par>
+                              <p:par>
+                                <p:cTn id="29" presetID="9" presetClass="emph" presetSubtype="0" grpId="1" nodeType="withEffect">
+                                  <p:stCondLst>
+                                    <p:cond delay="0"/>
+                                  </p:stCondLst>
+                                  <p:childTnLst>
+                                    <p:set>
+                                      <p:cBhvr>
+                                        <p:cTn id="30" dur="indefinite"/>
+                                        <p:tgtEl>
+                                          <p:spTgt spid="5">
+                                            <p:txEl>
+                                              <p:pRg st="1" end="1"/>
+                                            </p:txEl>
+                                          </p:spTgt>
+                                        </p:tgtEl>
+                                        <p:attrNameLst>
+                                          <p:attrName>style.opacity</p:attrName>
+                                        </p:attrNameLst>
+                                      </p:cBhvr>
+                                      <p:to>
+                                        <p:strVal val="0.5"/>
+                                      </p:to>
+                                    </p:set>
+                                    <p:animEffect filter="image" prLst="opacity: 0.5">
+                                      <p:cBhvr rctx="IE">
+                                        <p:cTn id="31" dur="indefinite"/>
+                                        <p:tgtEl>
+                                          <p:spTgt spid="5">
+                                            <p:txEl>
+                                              <p:pRg st="1" end="1"/>
+                                            </p:txEl>
+                                          </p:spTgt>
+                                        </p:tgtEl>
+                                      </p:cBhvr>
+                                    </p:animEffect>
+                                  </p:childTnLst>
+                                </p:cTn>
+                              </p:par>
+                              <p:par>
+                                <p:cTn id="32" presetID="9" presetClass="emph" presetSubtype="0" grpId="1" nodeType="withEffect">
+                                  <p:stCondLst>
+                                    <p:cond delay="0"/>
+                                  </p:stCondLst>
+                                  <p:childTnLst>
+                                    <p:set>
+                                      <p:cBhvr>
+                                        <p:cTn id="33" dur="indefinite"/>
+                                        <p:tgtEl>
+                                          <p:spTgt spid="5">
+                                            <p:txEl>
+                                              <p:pRg st="2" end="2"/>
+                                            </p:txEl>
+                                          </p:spTgt>
+                                        </p:tgtEl>
+                                        <p:attrNameLst>
+                                          <p:attrName>style.opacity</p:attrName>
+                                        </p:attrNameLst>
+                                      </p:cBhvr>
+                                      <p:to>
+                                        <p:strVal val="0.5"/>
+                                      </p:to>
+                                    </p:set>
+                                    <p:animEffect filter="image" prLst="opacity: 0.5">
+                                      <p:cBhvr rctx="IE">
+                                        <p:cTn id="34" dur="indefinite"/>
+                                        <p:tgtEl>
+                                          <p:spTgt spid="5">
+                                            <p:txEl>
+                                              <p:pRg st="2" end="2"/>
+                                            </p:txEl>
+                                          </p:spTgt>
+                                        </p:tgtEl>
+                                      </p:cBhvr>
+                                    </p:animEffect>
+                                  </p:childTnLst>
+                                </p:cTn>
+                              </p:par>
+                              <p:par>
+                                <p:cTn id="35" presetID="9" presetClass="emph" presetSubtype="0" grpId="1" nodeType="withEffect">
+                                  <p:stCondLst>
+                                    <p:cond delay="0"/>
+                                  </p:stCondLst>
+                                  <p:childTnLst>
+                                    <p:set>
+                                      <p:cBhvr>
+                                        <p:cTn id="36" dur="indefinite"/>
+                                        <p:tgtEl>
+                                          <p:spTgt spid="5">
+                                            <p:txEl>
+                                              <p:pRg st="3" end="3"/>
+                                            </p:txEl>
+                                          </p:spTgt>
+                                        </p:tgtEl>
+                                        <p:attrNameLst>
+                                          <p:attrName>style.opacity</p:attrName>
+                                        </p:attrNameLst>
+                                      </p:cBhvr>
+                                      <p:to>
+                                        <p:strVal val="0.5"/>
+                                      </p:to>
+                                    </p:set>
+                                    <p:animEffect filter="image" prLst="opacity: 0.5">
+                                      <p:cBhvr rctx="IE">
+                                        <p:cTn id="37" dur="indefinite"/>
+                                        <p:tgtEl>
+                                          <p:spTgt spid="5">
+                                            <p:txEl>
+                                              <p:pRg st="3" end="3"/>
+                                            </p:txEl>
+                                          </p:spTgt>
+                                        </p:tgtEl>
+                                      </p:cBhvr>
+                                    </p:animEffect>
+                                  </p:childTnLst>
+                                </p:cTn>
+                              </p:par>
+                            </p:childTnLst>
+                          </p:cTn>
+                        </p:par>
+                      </p:childTnLst>
+                    </p:cTn>
+                  </p:par>
+                </p:childTnLst>
+              </p:cTn>
+              <p:prevCondLst>
+                <p:cond evt="onPrev" delay="0">
+                  <p:tgtEl>
+                    <p:sldTgt/>
+                  </p:tgtEl>
+                </p:cond>
+              </p:prevCondLst>
+              <p:nextCondLst>
+                <p:cond evt="onNext" delay="0">
+                  <p:tgtEl>
+                    <p:sldTgt/>
+                  </p:tgtEl>
+                </p:cond>
+              </p:nextCondLst>
+            </p:seq>
+          </p:childTnLst>
+        </p:cTn>
+      </p:par>
+    </p:tnLst>
+    <p:bldLst>
+      <p:bldP spid="5" grpId="0" uiExpand="1" build="p"/>
+      <p:bldP spid="5" grpId="1" uiExpand="1" build="p"/>
+    </p:bldLst>
+  </p:timing>
+</p:sld>
+</file>
+
+<file path=ppt/slides/slide24.xml><?xml version="1.0" encoding="utf-8"?>
+<p:sld xmlns:a="http://schemas.openxmlformats.org/drawingml/2006/main" xmlns:r="http://schemas.openxmlformats.org/officeDocument/2006/relationships" xmlns:p="http://schemas.openxmlformats.org/presentationml/2006/main">
+  <p:cSld>
+    <p:spTree>
+      <p:nvGrpSpPr>
         <p:cNvPr id="1" name=""/>
         <p:cNvGrpSpPr/>
         <p:nvPr/>
@@ -21427,7 +23019,7 @@
                 </a:solidFill>
                 <a:latin typeface="Segoe UI"/>
               </a:rPr>
-              <a:t>FinOps – Someone creates </a:t>
+              <a:t>FinOps – </a:t>
             </a:r>
             <a:r>
               <a:rPr lang="en-US" sz="4400" b="1" dirty="0">
@@ -21436,7 +23028,7 @@
                 </a:solidFill>
                 <a:latin typeface="Segoe UI"/>
               </a:rPr>
-              <a:t>allowed</a:t>
+              <a:t>Allowed</a:t>
             </a:r>
             <a:r>
               <a:rPr lang="en-US" sz="4400" dirty="0">
@@ -21445,7 +23037,7 @@
                 </a:solidFill>
                 <a:latin typeface="Segoe UI"/>
               </a:rPr>
-              <a:t>, but high-cost resources</a:t>
+              <a:t> but high-cost resource created</a:t>
             </a:r>
             <a:endParaRPr sz="4400" dirty="0">
               <a:solidFill>
@@ -21463,7 +23055,7 @@
                 </a:solidFill>
                 <a:latin typeface="Segoe UI"/>
               </a:rPr>
-              <a:t>Operational – </a:t>
+              <a:t>Security – </a:t>
             </a:r>
             <a:r>
               <a:rPr lang="en-US" sz="4400" b="1" dirty="0" err="1">
@@ -21484,6 +23076,72 @@
                 <a:latin typeface="Segoe UI"/>
               </a:rPr>
               <a:t> in sensitive scopes</a:t>
+            </a:r>
+          </a:p>
+          <a:p>
+            <a:pPr lvl="1"/>
+            <a:r>
+              <a:rPr lang="sv-SE" sz="4400" dirty="0" err="1">
+                <a:solidFill>
+                  <a:srgbClr val="E3E8F2"/>
+                </a:solidFill>
+                <a:latin typeface="Segoe UI"/>
+              </a:rPr>
+              <a:t>Operational</a:t>
+            </a:r>
+            <a:r>
+              <a:rPr lang="sv-SE" sz="4400" dirty="0">
+                <a:solidFill>
+                  <a:srgbClr val="E3E8F2"/>
+                </a:solidFill>
+                <a:latin typeface="Segoe UI"/>
+              </a:rPr>
+              <a:t> – </a:t>
+            </a:r>
+            <a:r>
+              <a:rPr lang="sv-SE" sz="4400" dirty="0" err="1">
+                <a:solidFill>
+                  <a:srgbClr val="E3E8F2"/>
+                </a:solidFill>
+                <a:latin typeface="Segoe UI"/>
+              </a:rPr>
+              <a:t>Certificates</a:t>
+            </a:r>
+            <a:r>
+              <a:rPr lang="sv-SE" sz="4400" dirty="0">
+                <a:solidFill>
+                  <a:srgbClr val="E3E8F2"/>
+                </a:solidFill>
+                <a:latin typeface="Segoe UI"/>
+              </a:rPr>
+              <a:t> </a:t>
+            </a:r>
+            <a:r>
+              <a:rPr lang="sv-SE" sz="4400" dirty="0" err="1">
+                <a:solidFill>
+                  <a:srgbClr val="E3E8F2"/>
+                </a:solidFill>
+                <a:latin typeface="Segoe UI"/>
+              </a:rPr>
+              <a:t>nearing</a:t>
+            </a:r>
+            <a:r>
+              <a:rPr lang="sv-SE" sz="4400" dirty="0">
+                <a:solidFill>
+                  <a:srgbClr val="E3E8F2"/>
+                </a:solidFill>
+                <a:latin typeface="Segoe UI"/>
+              </a:rPr>
+              <a:t> </a:t>
+            </a:r>
+            <a:r>
+              <a:rPr lang="sv-SE" sz="4400" dirty="0" err="1">
+                <a:solidFill>
+                  <a:srgbClr val="E3E8F2"/>
+                </a:solidFill>
+                <a:latin typeface="Segoe UI"/>
+              </a:rPr>
+              <a:t>expiry</a:t>
             </a:r>
             <a:endParaRPr sz="4400" dirty="0">
               <a:solidFill>
@@ -21501,7 +23159,7 @@
                 </a:solidFill>
                 <a:latin typeface="Segoe UI"/>
               </a:rPr>
-              <a:t>Security – Resource-related events, permissions and roles</a:t>
+              <a:t>Audit – Resource events, permissions and role changes</a:t>
             </a:r>
             <a:endParaRPr sz="4400" dirty="0">
               <a:solidFill>
@@ -22178,162 +23836,6 @@
                                   </p:childTnLst>
                                 </p:cTn>
                               </p:par>
-                              <p:par>
-                                <p:cTn id="44" presetID="9" presetClass="emph" presetSubtype="0" grpId="1" nodeType="withEffect">
-                                  <p:stCondLst>
-                                    <p:cond delay="0"/>
-                                  </p:stCondLst>
-                                  <p:childTnLst>
-                                    <p:set>
-                                      <p:cBhvr>
-                                        <p:cTn id="45" dur="indefinite"/>
-                                        <p:tgtEl>
-                                          <p:spTgt spid="13">
-                                            <p:txEl>
-                                              <p:pRg st="2" end="2"/>
-                                            </p:txEl>
-                                          </p:spTgt>
-                                        </p:tgtEl>
-                                        <p:attrNameLst>
-                                          <p:attrName>style.opacity</p:attrName>
-                                        </p:attrNameLst>
-                                      </p:cBhvr>
-                                      <p:to>
-                                        <p:strVal val="0.5"/>
-                                      </p:to>
-                                    </p:set>
-                                    <p:animEffect filter="image" prLst="opacity: 0.5">
-                                      <p:cBhvr rctx="IE">
-                                        <p:cTn id="46" dur="indefinite"/>
-                                        <p:tgtEl>
-                                          <p:spTgt spid="13">
-                                            <p:txEl>
-                                              <p:pRg st="2" end="2"/>
-                                            </p:txEl>
-                                          </p:spTgt>
-                                        </p:tgtEl>
-                                      </p:cBhvr>
-                                    </p:animEffect>
-                                  </p:childTnLst>
-                                </p:cTn>
-                              </p:par>
-                              <p:par>
-                                <p:cTn id="47" presetID="9" presetClass="emph" presetSubtype="0" grpId="1" nodeType="withEffect">
-                                  <p:stCondLst>
-                                    <p:cond delay="0"/>
-                                  </p:stCondLst>
-                                  <p:childTnLst>
-                                    <p:set>
-                                      <p:cBhvr>
-                                        <p:cTn id="48" dur="indefinite"/>
-                                        <p:tgtEl>
-                                          <p:spTgt spid="13">
-                                            <p:txEl>
-                                              <p:pRg st="3" end="3"/>
-                                            </p:txEl>
-                                          </p:spTgt>
-                                        </p:tgtEl>
-                                        <p:attrNameLst>
-                                          <p:attrName>style.opacity</p:attrName>
-                                        </p:attrNameLst>
-                                      </p:cBhvr>
-                                      <p:to>
-                                        <p:strVal val="0.5"/>
-                                      </p:to>
-                                    </p:set>
-                                    <p:animEffect filter="image" prLst="opacity: 0.5">
-                                      <p:cBhvr rctx="IE">
-                                        <p:cTn id="49" dur="indefinite"/>
-                                        <p:tgtEl>
-                                          <p:spTgt spid="13">
-                                            <p:txEl>
-                                              <p:pRg st="3" end="3"/>
-                                            </p:txEl>
-                                          </p:spTgt>
-                                        </p:tgtEl>
-                                      </p:cBhvr>
-                                    </p:animEffect>
-                                  </p:childTnLst>
-                                </p:cTn>
-                              </p:par>
-                              <p:par>
-                                <p:cTn id="50" presetID="9" presetClass="emph" presetSubtype="0" grpId="1" nodeType="withEffect">
-                                  <p:stCondLst>
-                                    <p:cond delay="0"/>
-                                  </p:stCondLst>
-                                  <p:childTnLst>
-                                    <p:set>
-                                      <p:cBhvr>
-                                        <p:cTn id="51" dur="indefinite"/>
-                                        <p:tgtEl>
-                                          <p:spTgt spid="13">
-                                            <p:txEl>
-                                              <p:pRg st="4" end="4"/>
-                                            </p:txEl>
-                                          </p:spTgt>
-                                        </p:tgtEl>
-                                        <p:attrNameLst>
-                                          <p:attrName>style.opacity</p:attrName>
-                                        </p:attrNameLst>
-                                      </p:cBhvr>
-                                      <p:to>
-                                        <p:strVal val="0.5"/>
-                                      </p:to>
-                                    </p:set>
-                                    <p:animEffect filter="image" prLst="opacity: 0.5">
-                                      <p:cBhvr rctx="IE">
-                                        <p:cTn id="52" dur="indefinite"/>
-                                        <p:tgtEl>
-                                          <p:spTgt spid="13">
-                                            <p:txEl>
-                                              <p:pRg st="4" end="4"/>
-                                            </p:txEl>
-                                          </p:spTgt>
-                                        </p:tgtEl>
-                                      </p:cBhvr>
-                                    </p:animEffect>
-                                  </p:childTnLst>
-                                </p:cTn>
-                              </p:par>
-                              <p:par>
-                                <p:cTn id="53" presetID="9" presetClass="emph" presetSubtype="0" grpId="1" nodeType="withEffect">
-                                  <p:stCondLst>
-                                    <p:cond delay="0"/>
-                                  </p:stCondLst>
-                                  <p:childTnLst>
-                                    <p:set>
-                                      <p:cBhvr>
-                                        <p:cTn id="54" dur="indefinite"/>
-                                        <p:tgtEl>
-                                          <p:spTgt spid="13">
-                                            <p:txEl>
-                                              <p:pRg st="5" end="5"/>
-                                            </p:txEl>
-                                          </p:spTgt>
-                                        </p:tgtEl>
-                                        <p:attrNameLst>
-                                          <p:attrName>style.opacity</p:attrName>
-                                        </p:attrNameLst>
-                                      </p:cBhvr>
-                                      <p:to>
-                                        <p:strVal val="0.5"/>
-                                      </p:to>
-                                    </p:set>
-                                    <p:animEffect filter="image" prLst="opacity: 0.5">
-                                      <p:cBhvr rctx="IE">
-                                        <p:cTn id="55" dur="indefinite"/>
-                                        <p:tgtEl>
-                                          <p:spTgt spid="13">
-                                            <p:txEl>
-                                              <p:pRg st="5" end="5"/>
-                                            </p:txEl>
-                                          </p:spTgt>
-                                        </p:tgtEl>
-                                      </p:cBhvr>
-                                    </p:animEffect>
-                                  </p:childTnLst>
-                                </p:cTn>
-                              </p:par>
                             </p:childTnLst>
                           </p:cTn>
                         </p:par>
@@ -22341,26 +23843,26 @@
                     </p:cTn>
                   </p:par>
                   <p:par>
-                    <p:cTn id="56" fill="hold">
+                    <p:cTn id="44" fill="hold">
                       <p:stCondLst>
                         <p:cond delay="indefinite"/>
                       </p:stCondLst>
                       <p:childTnLst>
                         <p:par>
-                          <p:cTn id="57" fill="hold">
+                          <p:cTn id="45" fill="hold">
                             <p:stCondLst>
                               <p:cond delay="0"/>
                             </p:stCondLst>
                             <p:childTnLst>
                               <p:par>
-                                <p:cTn id="58" presetID="10" presetClass="entr" presetSubtype="0" fill="hold" grpId="0" nodeType="clickEffect">
+                                <p:cTn id="46" presetID="10" presetClass="entr" presetSubtype="0" fill="hold" grpId="0" nodeType="clickEffect">
                                   <p:stCondLst>
                                     <p:cond delay="0"/>
                                   </p:stCondLst>
                                   <p:childTnLst>
                                     <p:set>
                                       <p:cBhvr>
-                                        <p:cTn id="59" dur="1" fill="hold">
+                                        <p:cTn id="47" dur="1" fill="hold">
                                           <p:stCondLst>
                                             <p:cond delay="0"/>
                                           </p:stCondLst>
@@ -22382,11 +23884,167 @@
                                     </p:set>
                                     <p:animEffect transition="in" filter="fade">
                                       <p:cBhvr>
-                                        <p:cTn id="60" dur="500"/>
+                                        <p:cTn id="48" dur="500"/>
                                         <p:tgtEl>
                                           <p:spTgt spid="13">
                                             <p:txEl>
                                               <p:pRg st="7" end="7"/>
+                                            </p:txEl>
+                                          </p:spTgt>
+                                        </p:tgtEl>
+                                      </p:cBhvr>
+                                    </p:animEffect>
+                                  </p:childTnLst>
+                                </p:cTn>
+                              </p:par>
+                              <p:par>
+                                <p:cTn id="49" presetID="9" presetClass="emph" presetSubtype="0" grpId="1" nodeType="withEffect">
+                                  <p:stCondLst>
+                                    <p:cond delay="0"/>
+                                  </p:stCondLst>
+                                  <p:childTnLst>
+                                    <p:set>
+                                      <p:cBhvr>
+                                        <p:cTn id="50" dur="indefinite"/>
+                                        <p:tgtEl>
+                                          <p:spTgt spid="13">
+                                            <p:txEl>
+                                              <p:pRg st="2" end="2"/>
+                                            </p:txEl>
+                                          </p:spTgt>
+                                        </p:tgtEl>
+                                        <p:attrNameLst>
+                                          <p:attrName>style.opacity</p:attrName>
+                                        </p:attrNameLst>
+                                      </p:cBhvr>
+                                      <p:to>
+                                        <p:strVal val="0.5"/>
+                                      </p:to>
+                                    </p:set>
+                                    <p:animEffect filter="image" prLst="opacity: 0.5">
+                                      <p:cBhvr rctx="IE">
+                                        <p:cTn id="51" dur="indefinite"/>
+                                        <p:tgtEl>
+                                          <p:spTgt spid="13">
+                                            <p:txEl>
+                                              <p:pRg st="2" end="2"/>
+                                            </p:txEl>
+                                          </p:spTgt>
+                                        </p:tgtEl>
+                                      </p:cBhvr>
+                                    </p:animEffect>
+                                  </p:childTnLst>
+                                </p:cTn>
+                              </p:par>
+                              <p:par>
+                                <p:cTn id="52" presetID="9" presetClass="emph" presetSubtype="0" grpId="1" nodeType="withEffect">
+                                  <p:stCondLst>
+                                    <p:cond delay="0"/>
+                                  </p:stCondLst>
+                                  <p:childTnLst>
+                                    <p:set>
+                                      <p:cBhvr>
+                                        <p:cTn id="53" dur="indefinite"/>
+                                        <p:tgtEl>
+                                          <p:spTgt spid="13">
+                                            <p:txEl>
+                                              <p:pRg st="3" end="3"/>
+                                            </p:txEl>
+                                          </p:spTgt>
+                                        </p:tgtEl>
+                                        <p:attrNameLst>
+                                          <p:attrName>style.opacity</p:attrName>
+                                        </p:attrNameLst>
+                                      </p:cBhvr>
+                                      <p:to>
+                                        <p:strVal val="0.5"/>
+                                      </p:to>
+                                    </p:set>
+                                    <p:animEffect filter="image" prLst="opacity: 0.5">
+                                      <p:cBhvr rctx="IE">
+                                        <p:cTn id="54" dur="indefinite"/>
+                                        <p:tgtEl>
+                                          <p:spTgt spid="13">
+                                            <p:txEl>
+                                              <p:pRg st="3" end="3"/>
+                                            </p:txEl>
+                                          </p:spTgt>
+                                        </p:tgtEl>
+                                      </p:cBhvr>
+                                    </p:animEffect>
+                                  </p:childTnLst>
+                                </p:cTn>
+                              </p:par>
+                              <p:par>
+                                <p:cTn id="55" presetID="9" presetClass="emph" presetSubtype="0" grpId="1" nodeType="withEffect">
+                                  <p:stCondLst>
+                                    <p:cond delay="0"/>
+                                  </p:stCondLst>
+                                  <p:childTnLst>
+                                    <p:set>
+                                      <p:cBhvr>
+                                        <p:cTn id="56" dur="indefinite"/>
+                                        <p:tgtEl>
+                                          <p:spTgt spid="13">
+                                            <p:txEl>
+                                              <p:pRg st="4" end="4"/>
+                                            </p:txEl>
+                                          </p:spTgt>
+                                        </p:tgtEl>
+                                        <p:attrNameLst>
+                                          <p:attrName>style.opacity</p:attrName>
+                                        </p:attrNameLst>
+                                      </p:cBhvr>
+                                      <p:to>
+                                        <p:strVal val="0.5"/>
+                                      </p:to>
+                                    </p:set>
+                                    <p:animEffect filter="image" prLst="opacity: 0.5">
+                                      <p:cBhvr rctx="IE">
+                                        <p:cTn id="57" dur="indefinite"/>
+                                        <p:tgtEl>
+                                          <p:spTgt spid="13">
+                                            <p:txEl>
+                                              <p:pRg st="4" end="4"/>
+                                            </p:txEl>
+                                          </p:spTgt>
+                                        </p:tgtEl>
+                                      </p:cBhvr>
+                                    </p:animEffect>
+                                  </p:childTnLst>
+                                </p:cTn>
+                              </p:par>
+                              <p:par>
+                                <p:cTn id="58" presetID="9" presetClass="emph" presetSubtype="0" grpId="1" nodeType="withEffect">
+                                  <p:stCondLst>
+                                    <p:cond delay="0"/>
+                                  </p:stCondLst>
+                                  <p:childTnLst>
+                                    <p:set>
+                                      <p:cBhvr>
+                                        <p:cTn id="59" dur="indefinite"/>
+                                        <p:tgtEl>
+                                          <p:spTgt spid="13">
+                                            <p:txEl>
+                                              <p:pRg st="5" end="5"/>
+                                            </p:txEl>
+                                          </p:spTgt>
+                                        </p:tgtEl>
+                                        <p:attrNameLst>
+                                          <p:attrName>style.opacity</p:attrName>
+                                        </p:attrNameLst>
+                                      </p:cBhvr>
+                                      <p:to>
+                                        <p:strVal val="0.5"/>
+                                      </p:to>
+                                    </p:set>
+                                    <p:animEffect filter="image" prLst="opacity: 0.5">
+                                      <p:cBhvr rctx="IE">
+                                        <p:cTn id="60" dur="indefinite"/>
+                                        <p:tgtEl>
+                                          <p:spTgt spid="13">
+                                            <p:txEl>
+                                              <p:pRg st="5" end="5"/>
                                             </p:txEl>
                                           </p:spTgt>
                                         </p:tgtEl>
@@ -22495,6 +24153,45 @@
                                   </p:childTnLst>
                                 </p:cTn>
                               </p:par>
+                              <p:par>
+                                <p:cTn id="69" presetID="9" presetClass="emph" presetSubtype="0" grpId="1" nodeType="withEffect">
+                                  <p:stCondLst>
+                                    <p:cond delay="0"/>
+                                  </p:stCondLst>
+                                  <p:childTnLst>
+                                    <p:set>
+                                      <p:cBhvr>
+                                        <p:cTn id="70" dur="indefinite"/>
+                                        <p:tgtEl>
+                                          <p:spTgt spid="13">
+                                            <p:txEl>
+                                              <p:pRg st="7" end="7"/>
+                                            </p:txEl>
+                                          </p:spTgt>
+                                        </p:tgtEl>
+                                        <p:attrNameLst>
+                                          <p:attrName>style.opacity</p:attrName>
+                                        </p:attrNameLst>
+                                      </p:cBhvr>
+                                      <p:to>
+                                        <p:strVal val="0.5"/>
+                                      </p:to>
+                                    </p:set>
+                                    <p:animEffect filter="image" prLst="opacity: 0.5">
+                                      <p:cBhvr rctx="IE">
+                                        <p:cTn id="71" dur="indefinite"/>
+                                        <p:tgtEl>
+                                          <p:spTgt spid="13">
+                                            <p:txEl>
+                                              <p:pRg st="7" end="7"/>
+                                            </p:txEl>
+                                          </p:spTgt>
+                                        </p:tgtEl>
+                                      </p:cBhvr>
+                                    </p:animEffect>
+                                  </p:childTnLst>
+                                </p:cTn>
+                              </p:par>
                             </p:childTnLst>
                           </p:cTn>
                         </p:par>
@@ -22502,26 +24199,26 @@
                     </p:cTn>
                   </p:par>
                   <p:par>
-                    <p:cTn id="69" fill="hold">
+                    <p:cTn id="72" fill="hold">
                       <p:stCondLst>
                         <p:cond delay="indefinite"/>
                       </p:stCondLst>
                       <p:childTnLst>
                         <p:par>
-                          <p:cTn id="70" fill="hold">
+                          <p:cTn id="73" fill="hold">
                             <p:stCondLst>
                               <p:cond delay="0"/>
                             </p:stCondLst>
                             <p:childTnLst>
                               <p:par>
-                                <p:cTn id="71" presetID="10" presetClass="entr" presetSubtype="0" fill="hold" grpId="0" nodeType="clickEffect">
+                                <p:cTn id="74" presetID="10" presetClass="entr" presetSubtype="0" fill="hold" grpId="0" nodeType="clickEffect">
                                   <p:stCondLst>
                                     <p:cond delay="0"/>
                                   </p:stCondLst>
                                   <p:childTnLst>
                                     <p:set>
                                       <p:cBhvr>
-                                        <p:cTn id="72" dur="1" fill="hold">
+                                        <p:cTn id="75" dur="1" fill="hold">
                                           <p:stCondLst>
                                             <p:cond delay="0"/>
                                           </p:stCondLst>
@@ -22543,11 +24240,72 @@
                                     </p:set>
                                     <p:animEffect transition="in" filter="fade">
                                       <p:cBhvr>
-                                        <p:cTn id="73" dur="500"/>
+                                        <p:cTn id="76" dur="500"/>
                                         <p:tgtEl>
                                           <p:spTgt spid="13">
                                             <p:txEl>
                                               <p:pRg st="9" end="9"/>
+                                            </p:txEl>
+                                          </p:spTgt>
+                                        </p:tgtEl>
+                                      </p:cBhvr>
+                                    </p:animEffect>
+                                  </p:childTnLst>
+                                </p:cTn>
+                              </p:par>
+                            </p:childTnLst>
+                          </p:cTn>
+                        </p:par>
+                      </p:childTnLst>
+                    </p:cTn>
+                  </p:par>
+                  <p:par>
+                    <p:cTn id="77" fill="hold">
+                      <p:stCondLst>
+                        <p:cond delay="indefinite"/>
+                      </p:stCondLst>
+                      <p:childTnLst>
+                        <p:par>
+                          <p:cTn id="78" fill="hold">
+                            <p:stCondLst>
+                              <p:cond delay="0"/>
+                            </p:stCondLst>
+                            <p:childTnLst>
+                              <p:par>
+                                <p:cTn id="79" presetID="10" presetClass="entr" presetSubtype="0" fill="hold" grpId="0" nodeType="clickEffect">
+                                  <p:stCondLst>
+                                    <p:cond delay="0"/>
+                                  </p:stCondLst>
+                                  <p:childTnLst>
+                                    <p:set>
+                                      <p:cBhvr>
+                                        <p:cTn id="80" dur="1" fill="hold">
+                                          <p:stCondLst>
+                                            <p:cond delay="0"/>
+                                          </p:stCondLst>
+                                        </p:cTn>
+                                        <p:tgtEl>
+                                          <p:spTgt spid="13">
+                                            <p:txEl>
+                                              <p:pRg st="10" end="10"/>
+                                            </p:txEl>
+                                          </p:spTgt>
+                                        </p:tgtEl>
+                                        <p:attrNameLst>
+                                          <p:attrName>style.visibility</p:attrName>
+                                        </p:attrNameLst>
+                                      </p:cBhvr>
+                                      <p:to>
+                                        <p:strVal val="visible"/>
+                                      </p:to>
+                                    </p:set>
+                                    <p:animEffect transition="in" filter="fade">
+                                      <p:cBhvr>
+                                        <p:cTn id="81" dur="500"/>
+                                        <p:tgtEl>
+                                          <p:spTgt spid="13">
+                                            <p:txEl>
+                                              <p:pRg st="10" end="10"/>
                                             </p:txEl>
                                           </p:spTgt>
                                         </p:tgtEl>
@@ -22591,7 +24349,7 @@
 </p:sld>
 </file>
 
-<file path=ppt/slides/slide24.xml><?xml version="1.0" encoding="utf-8"?>
+<file path=ppt/slides/slide25.xml><?xml version="1.0" encoding="utf-8"?>
 <p:sld xmlns:a="http://schemas.openxmlformats.org/drawingml/2006/main" xmlns:r="http://schemas.openxmlformats.org/officeDocument/2006/relationships" xmlns:p="http://schemas.openxmlformats.org/presentationml/2006/main">
   <p:cSld>
     <p:spTree>
@@ -22637,7 +24395,7 @@
 </p:sld>
 </file>
 
-<file path=ppt/slides/slide25.xml><?xml version="1.0" encoding="utf-8"?>
+<file path=ppt/slides/slide26.xml><?xml version="1.0" encoding="utf-8"?>
 <p:sld xmlns:a="http://schemas.openxmlformats.org/drawingml/2006/main" xmlns:r="http://schemas.openxmlformats.org/officeDocument/2006/relationships" xmlns:p="http://schemas.openxmlformats.org/presentationml/2006/main">
   <p:cSld>
     <p:spTree>
@@ -22707,7 +24465,7 @@
         <p:spPr>
           <a:xfrm>
             <a:off x="1257300" y="1909436"/>
-            <a:ext cx="14727766" cy="3995738"/>
+            <a:ext cx="14727766" cy="7132964"/>
           </a:xfrm>
           <a:prstGeom prst="rect">
             <a:avLst/>
@@ -22987,6 +24745,28 @@
                 <a:cs typeface="Segoe UI" panose="020B0502040204020203" pitchFamily="34" charset="0"/>
               </a:rPr>
               <a:t>10 000 subscriptions limit for wide queries</a:t>
+            </a:r>
+          </a:p>
+          <a:p>
+            <a:r>
+              <a:rPr lang="en-US" sz="6000" dirty="0">
+                <a:latin typeface="Segoe UI" panose="020B0502040204020203" pitchFamily="34" charset="0"/>
+                <a:cs typeface="Segoe UI" panose="020B0502040204020203" pitchFamily="34" charset="0"/>
+              </a:rPr>
+              <a:t>Mostly in sync with ARM</a:t>
+            </a:r>
+          </a:p>
+          <a:p>
+            <a:pPr lvl="1"/>
+            <a:r>
+              <a:rPr lang="en-US" sz="5400" dirty="0">
+                <a:solidFill>
+                  <a:srgbClr val="FFC000"/>
+                </a:solidFill>
+                <a:latin typeface="Segoe UI" panose="020B0502040204020203" pitchFamily="34" charset="0"/>
+                <a:cs typeface="Segoe UI" panose="020B0502040204020203" pitchFamily="34" charset="0"/>
+              </a:rPr>
+              <a:t> Consideration for sensitive operations</a:t>
             </a:r>
           </a:p>
           <a:p>
@@ -23743,6 +25523,149 @@
                       </p:childTnLst>
                     </p:cTn>
                   </p:par>
+                  <p:par>
+                    <p:cTn id="54" fill="hold">
+                      <p:stCondLst>
+                        <p:cond delay="indefinite"/>
+                      </p:stCondLst>
+                      <p:childTnLst>
+                        <p:par>
+                          <p:cTn id="55" fill="hold">
+                            <p:stCondLst>
+                              <p:cond delay="0"/>
+                            </p:stCondLst>
+                            <p:childTnLst>
+                              <p:par>
+                                <p:cTn id="56" presetID="10" presetClass="entr" presetSubtype="0" fill="hold" grpId="0" nodeType="clickEffect">
+                                  <p:stCondLst>
+                                    <p:cond delay="0"/>
+                                  </p:stCondLst>
+                                  <p:childTnLst>
+                                    <p:set>
+                                      <p:cBhvr>
+                                        <p:cTn id="57" dur="1" fill="hold">
+                                          <p:stCondLst>
+                                            <p:cond delay="0"/>
+                                          </p:stCondLst>
+                                        </p:cTn>
+                                        <p:tgtEl>
+                                          <p:spTgt spid="5">
+                                            <p:txEl>
+                                              <p:pRg st="5" end="5"/>
+                                            </p:txEl>
+                                          </p:spTgt>
+                                        </p:tgtEl>
+                                        <p:attrNameLst>
+                                          <p:attrName>style.visibility</p:attrName>
+                                        </p:attrNameLst>
+                                      </p:cBhvr>
+                                      <p:to>
+                                        <p:strVal val="visible"/>
+                                      </p:to>
+                                    </p:set>
+                                    <p:animEffect transition="in" filter="fade">
+                                      <p:cBhvr>
+                                        <p:cTn id="58" dur="500"/>
+                                        <p:tgtEl>
+                                          <p:spTgt spid="5">
+                                            <p:txEl>
+                                              <p:pRg st="5" end="5"/>
+                                            </p:txEl>
+                                          </p:spTgt>
+                                        </p:tgtEl>
+                                      </p:cBhvr>
+                                    </p:animEffect>
+                                  </p:childTnLst>
+                                </p:cTn>
+                              </p:par>
+                              <p:par>
+                                <p:cTn id="59" presetID="10" presetClass="entr" presetSubtype="0" fill="hold" grpId="0" nodeType="withEffect">
+                                  <p:stCondLst>
+                                    <p:cond delay="0"/>
+                                  </p:stCondLst>
+                                  <p:childTnLst>
+                                    <p:set>
+                                      <p:cBhvr>
+                                        <p:cTn id="60" dur="1" fill="hold">
+                                          <p:stCondLst>
+                                            <p:cond delay="0"/>
+                                          </p:stCondLst>
+                                        </p:cTn>
+                                        <p:tgtEl>
+                                          <p:spTgt spid="5">
+                                            <p:txEl>
+                                              <p:pRg st="6" end="6"/>
+                                            </p:txEl>
+                                          </p:spTgt>
+                                        </p:tgtEl>
+                                        <p:attrNameLst>
+                                          <p:attrName>style.visibility</p:attrName>
+                                        </p:attrNameLst>
+                                      </p:cBhvr>
+                                      <p:to>
+                                        <p:strVal val="visible"/>
+                                      </p:to>
+                                    </p:set>
+                                    <p:animEffect transition="in" filter="fade">
+                                      <p:cBhvr>
+                                        <p:cTn id="61" dur="500"/>
+                                        <p:tgtEl>
+                                          <p:spTgt spid="5">
+                                            <p:txEl>
+                                              <p:pRg st="6" end="6"/>
+                                            </p:txEl>
+                                          </p:spTgt>
+                                        </p:tgtEl>
+                                      </p:cBhvr>
+                                    </p:animEffect>
+                                  </p:childTnLst>
+                                </p:cTn>
+                              </p:par>
+                              <p:par>
+                                <p:cTn id="62" presetID="9" presetClass="emph" presetSubtype="0" nodeType="withEffect">
+                                  <p:stCondLst>
+                                    <p:cond delay="0"/>
+                                  </p:stCondLst>
+                                  <p:childTnLst>
+                                    <p:set>
+                                      <p:cBhvr>
+                                        <p:cTn id="63" dur="indefinite"/>
+                                        <p:tgtEl>
+                                          <p:spTgt spid="5">
+                                            <p:txEl>
+                                              <p:pRg st="4" end="4"/>
+                                            </p:txEl>
+                                          </p:spTgt>
+                                        </p:tgtEl>
+                                        <p:attrNameLst>
+                                          <p:attrName>style.opacity</p:attrName>
+                                        </p:attrNameLst>
+                                      </p:cBhvr>
+                                      <p:to>
+                                        <p:strVal val="0.5"/>
+                                      </p:to>
+                                    </p:set>
+                                    <p:animEffect filter="image" prLst="opacity: 0.5">
+                                      <p:cBhvr rctx="IE">
+                                        <p:cTn id="64" dur="indefinite"/>
+                                        <p:tgtEl>
+                                          <p:spTgt spid="5">
+                                            <p:txEl>
+                                              <p:pRg st="4" end="4"/>
+                                            </p:txEl>
+                                          </p:spTgt>
+                                        </p:tgtEl>
+                                      </p:cBhvr>
+                                    </p:animEffect>
+                                  </p:childTnLst>
+                                </p:cTn>
+                              </p:par>
+                            </p:childTnLst>
+                          </p:cTn>
+                        </p:par>
+                      </p:childTnLst>
+                    </p:cTn>
+                  </p:par>
                 </p:childTnLst>
               </p:cTn>
               <p:prevCondLst>
@@ -23772,7 +25695,7 @@
 </p:sld>
 </file>
 
-<file path=ppt/slides/slide26.xml><?xml version="1.0" encoding="utf-8"?>
+<file path=ppt/slides/slide27.xml><?xml version="1.0" encoding="utf-8"?>
 <p:sld xmlns:a="http://schemas.openxmlformats.org/drawingml/2006/main" xmlns:r="http://schemas.openxmlformats.org/officeDocument/2006/relationships" xmlns:p="http://schemas.openxmlformats.org/presentationml/2006/main">
   <p:cSld>
     <p:spTree>
@@ -25369,7 +27292,7 @@
 </p:sld>
 </file>
 
-<file path=ppt/slides/slide27.xml><?xml version="1.0" encoding="utf-8"?>
+<file path=ppt/slides/slide28.xml><?xml version="1.0" encoding="utf-8"?>
 <p:sld xmlns:a="http://schemas.openxmlformats.org/drawingml/2006/main" xmlns:r="http://schemas.openxmlformats.org/officeDocument/2006/relationships" xmlns:p="http://schemas.openxmlformats.org/presentationml/2006/main">
   <p:cSld>
     <p:spTree>
@@ -25466,7 +27389,7 @@
 </p:sld>
 </file>
 
-<file path=ppt/slides/slide28.xml><?xml version="1.0" encoding="utf-8"?>
+<file path=ppt/slides/slide29.xml><?xml version="1.0" encoding="utf-8"?>
 <p:sld xmlns:a="http://schemas.openxmlformats.org/drawingml/2006/main" xmlns:r="http://schemas.openxmlformats.org/officeDocument/2006/relationships" xmlns:p="http://schemas.openxmlformats.org/presentationml/2006/main">
   <p:cSld>
     <p:spTree>
@@ -25509,834 +27432,6 @@
   <p:clrMapOvr>
     <a:masterClrMapping/>
   </p:clrMapOvr>
-</p:sld>
-</file>
-
-<file path=ppt/slides/slide29.xml><?xml version="1.0" encoding="utf-8"?>
-<p:sld xmlns:a="http://schemas.openxmlformats.org/drawingml/2006/main" xmlns:r="http://schemas.openxmlformats.org/officeDocument/2006/relationships" xmlns:p="http://schemas.openxmlformats.org/presentationml/2006/main">
-  <p:cSld>
-    <p:spTree>
-      <p:nvGrpSpPr>
-        <p:cNvPr id="1" name=""/>
-        <p:cNvGrpSpPr/>
-        <p:nvPr/>
-      </p:nvGrpSpPr>
-      <p:grpSpPr>
-        <a:xfrm>
-          <a:off x="0" y="0"/>
-          <a:ext cx="0" cy="0"/>
-          <a:chOff x="0" y="0"/>
-          <a:chExt cx="0" cy="0"/>
-        </a:xfrm>
-      </p:grpSpPr>
-      <p:sp>
-        <p:nvSpPr>
-          <p:cNvPr id="3" name="Text Placeholder 1"/>
-          <p:cNvSpPr>
-            <a:spLocks noGrp="1"/>
-          </p:cNvSpPr>
-          <p:nvPr>
-            <p:ph type="body" sz="quarter" idx="10"/>
-          </p:nvPr>
-        </p:nvSpPr>
-        <p:spPr>
-          <a:xfrm>
-            <a:off x="844550" y="3836988"/>
-            <a:ext cx="17125398" cy="4081462"/>
-          </a:xfrm>
-        </p:spPr>
-        <p:txBody>
-          <a:bodyPr>
-            <a:noAutofit/>
-          </a:bodyPr>
-          <a:lstStyle/>
-          <a:p>
-            <a:r>
-              <a:rPr lang="en-US" sz="4400" dirty="0">
-                <a:latin typeface="Segoe UI" panose="020B0502040204020203" pitchFamily="34" charset="0"/>
-                <a:cs typeface="Segoe UI" panose="020B0502040204020203" pitchFamily="34" charset="0"/>
-              </a:rPr>
-              <a:t> Navigate the cloudy sea</a:t>
-            </a:r>
-          </a:p>
-          <a:p>
-            <a:pPr lvl="1"/>
-            <a:r>
-              <a:rPr lang="en-US" sz="4000" dirty="0">
-                <a:solidFill>
-                  <a:srgbClr val="FFC000"/>
-                </a:solidFill>
-                <a:latin typeface="Segoe UI" panose="020B0502040204020203" pitchFamily="34" charset="0"/>
-                <a:cs typeface="Segoe UI" panose="020B0502040204020203" pitchFamily="34" charset="0"/>
-              </a:rPr>
-              <a:t> ARG lets you query at scale</a:t>
-            </a:r>
-          </a:p>
-          <a:p>
-            <a:r>
-              <a:rPr lang="en-US" sz="4400" dirty="0">
-                <a:latin typeface="Segoe UI" panose="020B0502040204020203" pitchFamily="34" charset="0"/>
-                <a:cs typeface="Segoe UI" panose="020B0502040204020203" pitchFamily="34" charset="0"/>
-              </a:rPr>
-              <a:t> Find hidden treasures</a:t>
-            </a:r>
-          </a:p>
-          <a:p>
-            <a:pPr lvl="1"/>
-            <a:r>
-              <a:rPr lang="en-US" sz="4000" dirty="0">
-                <a:solidFill>
-                  <a:srgbClr val="FFC000"/>
-                </a:solidFill>
-                <a:latin typeface="Segoe UI" panose="020B0502040204020203" pitchFamily="34" charset="0"/>
-                <a:cs typeface="Segoe UI" panose="020B0502040204020203" pitchFamily="34" charset="0"/>
-              </a:rPr>
-              <a:t> Identify differences, misconfigurations, details</a:t>
-            </a:r>
-          </a:p>
-          <a:p>
-            <a:r>
-              <a:rPr lang="en-US" sz="4400" dirty="0">
-                <a:latin typeface="Segoe UI" panose="020B0502040204020203" pitchFamily="34" charset="0"/>
-                <a:cs typeface="Segoe UI" panose="020B0502040204020203" pitchFamily="34" charset="0"/>
-              </a:rPr>
-              <a:t> Hoist your sails anywhere</a:t>
-            </a:r>
-          </a:p>
-          <a:p>
-            <a:pPr lvl="1"/>
-            <a:r>
-              <a:rPr lang="en-US" sz="4000" dirty="0">
-                <a:solidFill>
-                  <a:srgbClr val="FFC000"/>
-                </a:solidFill>
-                <a:latin typeface="Segoe UI" panose="020B0502040204020203" pitchFamily="34" charset="0"/>
-                <a:cs typeface="Segoe UI" panose="020B0502040204020203" pitchFamily="34" charset="0"/>
-              </a:rPr>
-              <a:t> Use from Portal, VS Code (</a:t>
-            </a:r>
-            <a:r>
-              <a:rPr lang="en-US" sz="4000" dirty="0" err="1">
-                <a:solidFill>
-                  <a:srgbClr val="FFC000"/>
-                </a:solidFill>
-                <a:latin typeface="Segoe UI" panose="020B0502040204020203" pitchFamily="34" charset="0"/>
-                <a:cs typeface="Segoe UI" panose="020B0502040204020203" pitchFamily="34" charset="0"/>
-              </a:rPr>
-              <a:t>bARGE</a:t>
-            </a:r>
-            <a:r>
-              <a:rPr lang="en-US" sz="4000" dirty="0">
-                <a:solidFill>
-                  <a:srgbClr val="FFC000"/>
-                </a:solidFill>
-                <a:latin typeface="Segoe UI" panose="020B0502040204020203" pitchFamily="34" charset="0"/>
-                <a:cs typeface="Segoe UI" panose="020B0502040204020203" pitchFamily="34" charset="0"/>
-              </a:rPr>
-              <a:t>), CLIs, dashboards, alerts and more</a:t>
-            </a:r>
-          </a:p>
-        </p:txBody>
-      </p:sp>
-      <p:grpSp>
-        <p:nvGrpSpPr>
-          <p:cNvPr id="12" name="Group 11">
-            <a:extLst>
-              <a:ext uri="{FF2B5EF4-FFF2-40B4-BE49-F238E27FC236}">
-                <a16:creationId xmlns:a16="http://schemas.microsoft.com/office/drawing/2014/main" id="{002EC189-BAB5-A069-D15C-6BCC0ED0CA3E}"/>
-              </a:ext>
-            </a:extLst>
-          </p:cNvPr>
-          <p:cNvGrpSpPr/>
-          <p:nvPr/>
-        </p:nvGrpSpPr>
-        <p:grpSpPr>
-          <a:xfrm>
-            <a:off x="229635" y="9470382"/>
-            <a:ext cx="2200000" cy="511955"/>
-            <a:chOff x="9775935" y="6229126"/>
-            <a:chExt cx="1691379" cy="393596"/>
-          </a:xfrm>
-        </p:grpSpPr>
-        <p:pic>
-          <p:nvPicPr>
-            <p:cNvPr id="13" name="Graphic 56">
-              <a:extLst>
-                <a:ext uri="{FF2B5EF4-FFF2-40B4-BE49-F238E27FC236}">
-                  <a16:creationId xmlns:a16="http://schemas.microsoft.com/office/drawing/2014/main" id="{2A2DC6F3-9A88-72E8-D65C-2960114891CD}"/>
-                </a:ext>
-              </a:extLst>
-            </p:cNvPr>
-            <p:cNvPicPr>
-              <a:picLocks noChangeAspect="1"/>
-            </p:cNvPicPr>
-            <p:nvPr/>
-          </p:nvPicPr>
-          <p:blipFill>
-            <a:blip>
-              <a:extLst>
-                <a:ext uri="{96DAC541-7B7A-43D3-8B79-37D633B846F1}">
-                  <asvg:svgBlip xmlns:asvg="http://schemas.microsoft.com/office/drawing/2016/SVG/main" r:embed="rId2"/>
-                </a:ext>
-              </a:extLst>
-            </a:blip>
-            <a:srcRect/>
-            <a:stretch/>
-          </p:blipFill>
-          <p:spPr>
-            <a:xfrm>
-              <a:off x="10280577" y="6229126"/>
-              <a:ext cx="391207" cy="383223"/>
-            </a:xfrm>
-            <a:prstGeom prst="rect">
-              <a:avLst/>
-            </a:prstGeom>
-            <a:effectLst/>
-          </p:spPr>
-        </p:pic>
-        <p:pic>
-          <p:nvPicPr>
-            <p:cNvPr id="14" name="Graphic 56">
-              <a:extLst>
-                <a:ext uri="{FF2B5EF4-FFF2-40B4-BE49-F238E27FC236}">
-                  <a16:creationId xmlns:a16="http://schemas.microsoft.com/office/drawing/2014/main" id="{3F619B66-E565-FA04-2496-F7DC352A9BB8}"/>
-                </a:ext>
-              </a:extLst>
-            </p:cNvPr>
-            <p:cNvPicPr>
-              <a:picLocks noChangeAspect="1"/>
-            </p:cNvPicPr>
-            <p:nvPr/>
-          </p:nvPicPr>
-          <p:blipFill>
-            <a:blip r:embed="rId3"/>
-            <a:srcRect/>
-            <a:stretch/>
-          </p:blipFill>
-          <p:spPr>
-            <a:xfrm>
-              <a:off x="10696834" y="6263498"/>
-              <a:ext cx="320788" cy="327874"/>
-            </a:xfrm>
-            <a:prstGeom prst="rect">
-              <a:avLst/>
-            </a:prstGeom>
-            <a:effectLst/>
-          </p:spPr>
-        </p:pic>
-        <p:pic>
-          <p:nvPicPr>
-            <p:cNvPr id="15" name="Picture 14" descr="A black and white logo&#10;&#10;Description automatically generated">
-              <a:extLst>
-                <a:ext uri="{FF2B5EF4-FFF2-40B4-BE49-F238E27FC236}">
-                  <a16:creationId xmlns:a16="http://schemas.microsoft.com/office/drawing/2014/main" id="{0B82BB6F-ADC7-9511-BB28-0CDDA5B50003}"/>
-                </a:ext>
-              </a:extLst>
-            </p:cNvPr>
-            <p:cNvPicPr>
-              <a:picLocks noChangeAspect="1"/>
-            </p:cNvPicPr>
-            <p:nvPr/>
-          </p:nvPicPr>
-          <p:blipFill>
-            <a:blip r:embed="rId4"/>
-            <a:stretch>
-              <a:fillRect/>
-            </a:stretch>
-          </p:blipFill>
-          <p:spPr>
-            <a:xfrm>
-              <a:off x="11083688" y="6239096"/>
-              <a:ext cx="383626" cy="383626"/>
-            </a:xfrm>
-            <a:prstGeom prst="rect">
-              <a:avLst/>
-            </a:prstGeom>
-          </p:spPr>
-        </p:pic>
-        <p:pic>
-          <p:nvPicPr>
-            <p:cNvPr id="16" name="Picture 15" descr="A blue butterfly on a black background&#10;&#10;AI-generated content may be incorrect.">
-              <a:extLst>
-                <a:ext uri="{FF2B5EF4-FFF2-40B4-BE49-F238E27FC236}">
-                  <a16:creationId xmlns:a16="http://schemas.microsoft.com/office/drawing/2014/main" id="{0FCF77FA-238D-FBC0-366F-94F44C3B36E2}"/>
-                </a:ext>
-              </a:extLst>
-            </p:cNvPr>
-            <p:cNvPicPr>
-              <a:picLocks noChangeAspect="1"/>
-            </p:cNvPicPr>
-            <p:nvPr/>
-          </p:nvPicPr>
-          <p:blipFill>
-            <a:blip r:embed="rId5">
-              <a:biLevel thresh="25000"/>
-              <a:extLst>
-                <a:ext uri="{28A0092B-C50C-407E-A947-70E740481C1C}">
-                  <a14:useLocalDpi xmlns:a14="http://schemas.microsoft.com/office/drawing/2010/main" val="0"/>
-                </a:ext>
-              </a:extLst>
-            </a:blip>
-            <a:stretch>
-              <a:fillRect/>
-            </a:stretch>
-          </p:blipFill>
-          <p:spPr>
-            <a:xfrm>
-              <a:off x="9775935" y="6240132"/>
-              <a:ext cx="438576" cy="382589"/>
-            </a:xfrm>
-            <a:prstGeom prst="rect">
-              <a:avLst/>
-            </a:prstGeom>
-            <a:noFill/>
-            <a:ln>
-              <a:noFill/>
-            </a:ln>
-          </p:spPr>
-        </p:pic>
-      </p:grpSp>
-      <p:sp>
-        <p:nvSpPr>
-          <p:cNvPr id="17" name="TextBox 16"/>
-          <p:cNvSpPr txBox="1"/>
-          <p:nvPr/>
-        </p:nvSpPr>
-        <p:spPr>
-          <a:xfrm>
-            <a:off x="2429635" y="9444628"/>
-            <a:ext cx="3085525" cy="584775"/>
-          </a:xfrm>
-          <a:prstGeom prst="rect">
-            <a:avLst/>
-          </a:prstGeom>
-          <a:noFill/>
-        </p:spPr>
-        <p:txBody>
-          <a:bodyPr wrap="none" anchor="ctr">
-            <a:spAutoFit/>
-          </a:bodyPr>
-          <a:lstStyle/>
-          <a:p>
-            <a:r>
-              <a:rPr sz="3200">
-                <a:solidFill>
-                  <a:schemeClr val="bg1"/>
-                </a:solidFill>
-                <a:latin typeface="Segoe UI Semibold"/>
-              </a:rPr>
-              <a:t>@PalmEmanuel</a:t>
-            </a:r>
-          </a:p>
-        </p:txBody>
-      </p:sp>
-    </p:spTree>
-  </p:cSld>
-  <p:clrMapOvr>
-    <a:masterClrMapping/>
-  </p:clrMapOvr>
-  <p:timing>
-    <p:tnLst>
-      <p:par>
-        <p:cTn id="1" dur="indefinite" restart="never" nodeType="tmRoot">
-          <p:childTnLst>
-            <p:seq concurrent="1" nextAc="seek">
-              <p:cTn id="2" dur="indefinite" nodeType="mainSeq">
-                <p:childTnLst>
-                  <p:par>
-                    <p:cTn id="3" fill="hold">
-                      <p:stCondLst>
-                        <p:cond delay="indefinite"/>
-                      </p:stCondLst>
-                      <p:childTnLst>
-                        <p:par>
-                          <p:cTn id="4" fill="hold">
-                            <p:stCondLst>
-                              <p:cond delay="0"/>
-                            </p:stCondLst>
-                            <p:childTnLst>
-                              <p:par>
-                                <p:cTn id="5" presetID="10" presetClass="entr" presetSubtype="0" fill="hold" grpId="0" nodeType="clickEffect">
-                                  <p:stCondLst>
-                                    <p:cond delay="0"/>
-                                  </p:stCondLst>
-                                  <p:childTnLst>
-                                    <p:set>
-                                      <p:cBhvr>
-                                        <p:cTn id="6" dur="1" fill="hold">
-                                          <p:stCondLst>
-                                            <p:cond delay="0"/>
-                                          </p:stCondLst>
-                                        </p:cTn>
-                                        <p:tgtEl>
-                                          <p:spTgt spid="3">
-                                            <p:txEl>
-                                              <p:pRg st="0" end="0"/>
-                                            </p:txEl>
-                                          </p:spTgt>
-                                        </p:tgtEl>
-                                        <p:attrNameLst>
-                                          <p:attrName>style.visibility</p:attrName>
-                                        </p:attrNameLst>
-                                      </p:cBhvr>
-                                      <p:to>
-                                        <p:strVal val="visible"/>
-                                      </p:to>
-                                    </p:set>
-                                    <p:animEffect transition="in" filter="fade">
-                                      <p:cBhvr>
-                                        <p:cTn id="7" dur="500"/>
-                                        <p:tgtEl>
-                                          <p:spTgt spid="3">
-                                            <p:txEl>
-                                              <p:pRg st="0" end="0"/>
-                                            </p:txEl>
-                                          </p:spTgt>
-                                        </p:tgtEl>
-                                      </p:cBhvr>
-                                    </p:animEffect>
-                                  </p:childTnLst>
-                                </p:cTn>
-                              </p:par>
-                              <p:par>
-                                <p:cTn id="8" presetID="10" presetClass="entr" presetSubtype="0" fill="hold" grpId="0" nodeType="withEffect">
-                                  <p:stCondLst>
-                                    <p:cond delay="0"/>
-                                  </p:stCondLst>
-                                  <p:childTnLst>
-                                    <p:set>
-                                      <p:cBhvr>
-                                        <p:cTn id="9" dur="1" fill="hold">
-                                          <p:stCondLst>
-                                            <p:cond delay="0"/>
-                                          </p:stCondLst>
-                                        </p:cTn>
-                                        <p:tgtEl>
-                                          <p:spTgt spid="3">
-                                            <p:txEl>
-                                              <p:pRg st="1" end="1"/>
-                                            </p:txEl>
-                                          </p:spTgt>
-                                        </p:tgtEl>
-                                        <p:attrNameLst>
-                                          <p:attrName>style.visibility</p:attrName>
-                                        </p:attrNameLst>
-                                      </p:cBhvr>
-                                      <p:to>
-                                        <p:strVal val="visible"/>
-                                      </p:to>
-                                    </p:set>
-                                    <p:animEffect transition="in" filter="fade">
-                                      <p:cBhvr>
-                                        <p:cTn id="10" dur="500"/>
-                                        <p:tgtEl>
-                                          <p:spTgt spid="3">
-                                            <p:txEl>
-                                              <p:pRg st="1" end="1"/>
-                                            </p:txEl>
-                                          </p:spTgt>
-                                        </p:tgtEl>
-                                      </p:cBhvr>
-                                    </p:animEffect>
-                                  </p:childTnLst>
-                                </p:cTn>
-                              </p:par>
-                            </p:childTnLst>
-                          </p:cTn>
-                        </p:par>
-                      </p:childTnLst>
-                    </p:cTn>
-                  </p:par>
-                  <p:par>
-                    <p:cTn id="11" fill="hold">
-                      <p:stCondLst>
-                        <p:cond delay="indefinite"/>
-                      </p:stCondLst>
-                      <p:childTnLst>
-                        <p:par>
-                          <p:cTn id="12" fill="hold">
-                            <p:stCondLst>
-                              <p:cond delay="0"/>
-                            </p:stCondLst>
-                            <p:childTnLst>
-                              <p:par>
-                                <p:cTn id="13" presetID="10" presetClass="entr" presetSubtype="0" fill="hold" grpId="0" nodeType="clickEffect">
-                                  <p:stCondLst>
-                                    <p:cond delay="0"/>
-                                  </p:stCondLst>
-                                  <p:childTnLst>
-                                    <p:set>
-                                      <p:cBhvr>
-                                        <p:cTn id="14" dur="1" fill="hold">
-                                          <p:stCondLst>
-                                            <p:cond delay="0"/>
-                                          </p:stCondLst>
-                                        </p:cTn>
-                                        <p:tgtEl>
-                                          <p:spTgt spid="3">
-                                            <p:txEl>
-                                              <p:pRg st="2" end="2"/>
-                                            </p:txEl>
-                                          </p:spTgt>
-                                        </p:tgtEl>
-                                        <p:attrNameLst>
-                                          <p:attrName>style.visibility</p:attrName>
-                                        </p:attrNameLst>
-                                      </p:cBhvr>
-                                      <p:to>
-                                        <p:strVal val="visible"/>
-                                      </p:to>
-                                    </p:set>
-                                    <p:animEffect transition="in" filter="fade">
-                                      <p:cBhvr>
-                                        <p:cTn id="15" dur="500"/>
-                                        <p:tgtEl>
-                                          <p:spTgt spid="3">
-                                            <p:txEl>
-                                              <p:pRg st="2" end="2"/>
-                                            </p:txEl>
-                                          </p:spTgt>
-                                        </p:tgtEl>
-                                      </p:cBhvr>
-                                    </p:animEffect>
-                                  </p:childTnLst>
-                                </p:cTn>
-                              </p:par>
-                              <p:par>
-                                <p:cTn id="16" presetID="10" presetClass="entr" presetSubtype="0" fill="hold" grpId="0" nodeType="withEffect">
-                                  <p:stCondLst>
-                                    <p:cond delay="0"/>
-                                  </p:stCondLst>
-                                  <p:childTnLst>
-                                    <p:set>
-                                      <p:cBhvr>
-                                        <p:cTn id="17" dur="1" fill="hold">
-                                          <p:stCondLst>
-                                            <p:cond delay="0"/>
-                                          </p:stCondLst>
-                                        </p:cTn>
-                                        <p:tgtEl>
-                                          <p:spTgt spid="3">
-                                            <p:txEl>
-                                              <p:pRg st="3" end="3"/>
-                                            </p:txEl>
-                                          </p:spTgt>
-                                        </p:tgtEl>
-                                        <p:attrNameLst>
-                                          <p:attrName>style.visibility</p:attrName>
-                                        </p:attrNameLst>
-                                      </p:cBhvr>
-                                      <p:to>
-                                        <p:strVal val="visible"/>
-                                      </p:to>
-                                    </p:set>
-                                    <p:animEffect transition="in" filter="fade">
-                                      <p:cBhvr>
-                                        <p:cTn id="18" dur="500"/>
-                                        <p:tgtEl>
-                                          <p:spTgt spid="3">
-                                            <p:txEl>
-                                              <p:pRg st="3" end="3"/>
-                                            </p:txEl>
-                                          </p:spTgt>
-                                        </p:tgtEl>
-                                      </p:cBhvr>
-                                    </p:animEffect>
-                                  </p:childTnLst>
-                                </p:cTn>
-                              </p:par>
-                              <p:par>
-                                <p:cTn id="19" presetID="9" presetClass="emph" presetSubtype="0" grpId="1" nodeType="withEffect">
-                                  <p:stCondLst>
-                                    <p:cond delay="0"/>
-                                  </p:stCondLst>
-                                  <p:childTnLst>
-                                    <p:set>
-                                      <p:cBhvr>
-                                        <p:cTn id="20" dur="indefinite"/>
-                                        <p:tgtEl>
-                                          <p:spTgt spid="3">
-                                            <p:txEl>
-                                              <p:pRg st="0" end="0"/>
-                                            </p:txEl>
-                                          </p:spTgt>
-                                        </p:tgtEl>
-                                        <p:attrNameLst>
-                                          <p:attrName>style.opacity</p:attrName>
-                                        </p:attrNameLst>
-                                      </p:cBhvr>
-                                      <p:to>
-                                        <p:strVal val="0.5"/>
-                                      </p:to>
-                                    </p:set>
-                                    <p:animEffect filter="image" prLst="opacity: 0.5">
-                                      <p:cBhvr rctx="IE">
-                                        <p:cTn id="21" dur="indefinite"/>
-                                        <p:tgtEl>
-                                          <p:spTgt spid="3">
-                                            <p:txEl>
-                                              <p:pRg st="0" end="0"/>
-                                            </p:txEl>
-                                          </p:spTgt>
-                                        </p:tgtEl>
-                                      </p:cBhvr>
-                                    </p:animEffect>
-                                  </p:childTnLst>
-                                </p:cTn>
-                              </p:par>
-                              <p:par>
-                                <p:cTn id="22" presetID="9" presetClass="emph" presetSubtype="0" grpId="1" nodeType="withEffect">
-                                  <p:stCondLst>
-                                    <p:cond delay="0"/>
-                                  </p:stCondLst>
-                                  <p:childTnLst>
-                                    <p:set>
-                                      <p:cBhvr>
-                                        <p:cTn id="23" dur="indefinite"/>
-                                        <p:tgtEl>
-                                          <p:spTgt spid="3">
-                                            <p:txEl>
-                                              <p:pRg st="1" end="1"/>
-                                            </p:txEl>
-                                          </p:spTgt>
-                                        </p:tgtEl>
-                                        <p:attrNameLst>
-                                          <p:attrName>style.opacity</p:attrName>
-                                        </p:attrNameLst>
-                                      </p:cBhvr>
-                                      <p:to>
-                                        <p:strVal val="0.5"/>
-                                      </p:to>
-                                    </p:set>
-                                    <p:animEffect filter="image" prLst="opacity: 0.5">
-                                      <p:cBhvr rctx="IE">
-                                        <p:cTn id="24" dur="indefinite"/>
-                                        <p:tgtEl>
-                                          <p:spTgt spid="3">
-                                            <p:txEl>
-                                              <p:pRg st="1" end="1"/>
-                                            </p:txEl>
-                                          </p:spTgt>
-                                        </p:tgtEl>
-                                      </p:cBhvr>
-                                    </p:animEffect>
-                                  </p:childTnLst>
-                                </p:cTn>
-                              </p:par>
-                            </p:childTnLst>
-                          </p:cTn>
-                        </p:par>
-                      </p:childTnLst>
-                    </p:cTn>
-                  </p:par>
-                  <p:par>
-                    <p:cTn id="25" fill="hold">
-                      <p:stCondLst>
-                        <p:cond delay="indefinite"/>
-                      </p:stCondLst>
-                      <p:childTnLst>
-                        <p:par>
-                          <p:cTn id="26" fill="hold">
-                            <p:stCondLst>
-                              <p:cond delay="0"/>
-                            </p:stCondLst>
-                            <p:childTnLst>
-                              <p:par>
-                                <p:cTn id="27" presetID="10" presetClass="entr" presetSubtype="0" fill="hold" grpId="0" nodeType="clickEffect">
-                                  <p:stCondLst>
-                                    <p:cond delay="0"/>
-                                  </p:stCondLst>
-                                  <p:childTnLst>
-                                    <p:set>
-                                      <p:cBhvr>
-                                        <p:cTn id="28" dur="1" fill="hold">
-                                          <p:stCondLst>
-                                            <p:cond delay="0"/>
-                                          </p:stCondLst>
-                                        </p:cTn>
-                                        <p:tgtEl>
-                                          <p:spTgt spid="3">
-                                            <p:txEl>
-                                              <p:pRg st="4" end="4"/>
-                                            </p:txEl>
-                                          </p:spTgt>
-                                        </p:tgtEl>
-                                        <p:attrNameLst>
-                                          <p:attrName>style.visibility</p:attrName>
-                                        </p:attrNameLst>
-                                      </p:cBhvr>
-                                      <p:to>
-                                        <p:strVal val="visible"/>
-                                      </p:to>
-                                    </p:set>
-                                    <p:animEffect transition="in" filter="fade">
-                                      <p:cBhvr>
-                                        <p:cTn id="29" dur="500"/>
-                                        <p:tgtEl>
-                                          <p:spTgt spid="3">
-                                            <p:txEl>
-                                              <p:pRg st="4" end="4"/>
-                                            </p:txEl>
-                                          </p:spTgt>
-                                        </p:tgtEl>
-                                      </p:cBhvr>
-                                    </p:animEffect>
-                                  </p:childTnLst>
-                                </p:cTn>
-                              </p:par>
-                              <p:par>
-                                <p:cTn id="30" presetID="10" presetClass="entr" presetSubtype="0" fill="hold" grpId="0" nodeType="withEffect">
-                                  <p:stCondLst>
-                                    <p:cond delay="0"/>
-                                  </p:stCondLst>
-                                  <p:childTnLst>
-                                    <p:set>
-                                      <p:cBhvr>
-                                        <p:cTn id="31" dur="1" fill="hold">
-                                          <p:stCondLst>
-                                            <p:cond delay="0"/>
-                                          </p:stCondLst>
-                                        </p:cTn>
-                                        <p:tgtEl>
-                                          <p:spTgt spid="3">
-                                            <p:txEl>
-                                              <p:pRg st="5" end="5"/>
-                                            </p:txEl>
-                                          </p:spTgt>
-                                        </p:tgtEl>
-                                        <p:attrNameLst>
-                                          <p:attrName>style.visibility</p:attrName>
-                                        </p:attrNameLst>
-                                      </p:cBhvr>
-                                      <p:to>
-                                        <p:strVal val="visible"/>
-                                      </p:to>
-                                    </p:set>
-                                    <p:animEffect transition="in" filter="fade">
-                                      <p:cBhvr>
-                                        <p:cTn id="32" dur="500"/>
-                                        <p:tgtEl>
-                                          <p:spTgt spid="3">
-                                            <p:txEl>
-                                              <p:pRg st="5" end="5"/>
-                                            </p:txEl>
-                                          </p:spTgt>
-                                        </p:tgtEl>
-                                      </p:cBhvr>
-                                    </p:animEffect>
-                                  </p:childTnLst>
-                                </p:cTn>
-                              </p:par>
-                              <p:par>
-                                <p:cTn id="33" presetID="9" presetClass="emph" presetSubtype="0" grpId="1" nodeType="withEffect">
-                                  <p:stCondLst>
-                                    <p:cond delay="0"/>
-                                  </p:stCondLst>
-                                  <p:childTnLst>
-                                    <p:set>
-                                      <p:cBhvr>
-                                        <p:cTn id="34" dur="indefinite"/>
-                                        <p:tgtEl>
-                                          <p:spTgt spid="3">
-                                            <p:txEl>
-                                              <p:pRg st="2" end="2"/>
-                                            </p:txEl>
-                                          </p:spTgt>
-                                        </p:tgtEl>
-                                        <p:attrNameLst>
-                                          <p:attrName>style.opacity</p:attrName>
-                                        </p:attrNameLst>
-                                      </p:cBhvr>
-                                      <p:to>
-                                        <p:strVal val="0.5"/>
-                                      </p:to>
-                                    </p:set>
-                                    <p:animEffect filter="image" prLst="opacity: 0.5">
-                                      <p:cBhvr rctx="IE">
-                                        <p:cTn id="35" dur="indefinite"/>
-                                        <p:tgtEl>
-                                          <p:spTgt spid="3">
-                                            <p:txEl>
-                                              <p:pRg st="2" end="2"/>
-                                            </p:txEl>
-                                          </p:spTgt>
-                                        </p:tgtEl>
-                                      </p:cBhvr>
-                                    </p:animEffect>
-                                  </p:childTnLst>
-                                </p:cTn>
-                              </p:par>
-                              <p:par>
-                                <p:cTn id="36" presetID="9" presetClass="emph" presetSubtype="0" grpId="1" nodeType="withEffect">
-                                  <p:stCondLst>
-                                    <p:cond delay="0"/>
-                                  </p:stCondLst>
-                                  <p:childTnLst>
-                                    <p:set>
-                                      <p:cBhvr>
-                                        <p:cTn id="37" dur="indefinite"/>
-                                        <p:tgtEl>
-                                          <p:spTgt spid="3">
-                                            <p:txEl>
-                                              <p:pRg st="3" end="3"/>
-                                            </p:txEl>
-                                          </p:spTgt>
-                                        </p:tgtEl>
-                                        <p:attrNameLst>
-                                          <p:attrName>style.opacity</p:attrName>
-                                        </p:attrNameLst>
-                                      </p:cBhvr>
-                                      <p:to>
-                                        <p:strVal val="0.5"/>
-                                      </p:to>
-                                    </p:set>
-                                    <p:animEffect filter="image" prLst="opacity: 0.5">
-                                      <p:cBhvr rctx="IE">
-                                        <p:cTn id="38" dur="indefinite"/>
-                                        <p:tgtEl>
-                                          <p:spTgt spid="3">
-                                            <p:txEl>
-                                              <p:pRg st="3" end="3"/>
-                                            </p:txEl>
-                                          </p:spTgt>
-                                        </p:tgtEl>
-                                      </p:cBhvr>
-                                    </p:animEffect>
-                                  </p:childTnLst>
-                                </p:cTn>
-                              </p:par>
-                            </p:childTnLst>
-                          </p:cTn>
-                        </p:par>
-                      </p:childTnLst>
-                    </p:cTn>
-                  </p:par>
-                </p:childTnLst>
-              </p:cTn>
-              <p:prevCondLst>
-                <p:cond evt="onPrev" delay="0">
-                  <p:tgtEl>
-                    <p:sldTgt/>
-                  </p:tgtEl>
-                </p:cond>
-              </p:prevCondLst>
-              <p:nextCondLst>
-                <p:cond evt="onNext" delay="0">
-                  <p:tgtEl>
-                    <p:sldTgt/>
-                  </p:tgtEl>
-                </p:cond>
-              </p:nextCondLst>
-            </p:seq>
-          </p:childTnLst>
-        </p:cTn>
-      </p:par>
-    </p:tnLst>
-    <p:bldLst>
-      <p:bldP spid="3" grpId="0" uiExpand="1" build="p"/>
-      <p:bldP spid="3" grpId="1" uiExpand="1" build="p"/>
-    </p:bldLst>
-  </p:timing>
 </p:sld>
 </file>
 
@@ -27099,6 +28194,834 @@
           <a:chExt cx="0" cy="0"/>
         </a:xfrm>
       </p:grpSpPr>
+      <p:sp>
+        <p:nvSpPr>
+          <p:cNvPr id="3" name="Text Placeholder 1"/>
+          <p:cNvSpPr>
+            <a:spLocks noGrp="1"/>
+          </p:cNvSpPr>
+          <p:nvPr>
+            <p:ph type="body" sz="quarter" idx="10"/>
+          </p:nvPr>
+        </p:nvSpPr>
+        <p:spPr>
+          <a:xfrm>
+            <a:off x="844550" y="3836988"/>
+            <a:ext cx="17125398" cy="4081462"/>
+          </a:xfrm>
+        </p:spPr>
+        <p:txBody>
+          <a:bodyPr>
+            <a:noAutofit/>
+          </a:bodyPr>
+          <a:lstStyle/>
+          <a:p>
+            <a:r>
+              <a:rPr lang="en-US" sz="4400" dirty="0">
+                <a:latin typeface="Segoe UI" panose="020B0502040204020203" pitchFamily="34" charset="0"/>
+                <a:cs typeface="Segoe UI" panose="020B0502040204020203" pitchFamily="34" charset="0"/>
+              </a:rPr>
+              <a:t> Navigate the cloudy sea</a:t>
+            </a:r>
+          </a:p>
+          <a:p>
+            <a:pPr lvl="1"/>
+            <a:r>
+              <a:rPr lang="en-US" sz="4000" dirty="0">
+                <a:solidFill>
+                  <a:srgbClr val="FFC000"/>
+                </a:solidFill>
+                <a:latin typeface="Segoe UI" panose="020B0502040204020203" pitchFamily="34" charset="0"/>
+                <a:cs typeface="Segoe UI" panose="020B0502040204020203" pitchFamily="34" charset="0"/>
+              </a:rPr>
+              <a:t> ARG lets you query at scale</a:t>
+            </a:r>
+          </a:p>
+          <a:p>
+            <a:r>
+              <a:rPr lang="en-US" sz="4400" dirty="0">
+                <a:latin typeface="Segoe UI" panose="020B0502040204020203" pitchFamily="34" charset="0"/>
+                <a:cs typeface="Segoe UI" panose="020B0502040204020203" pitchFamily="34" charset="0"/>
+              </a:rPr>
+              <a:t> Find hidden treasures</a:t>
+            </a:r>
+          </a:p>
+          <a:p>
+            <a:pPr lvl="1"/>
+            <a:r>
+              <a:rPr lang="en-US" sz="4000" dirty="0">
+                <a:solidFill>
+                  <a:srgbClr val="FFC000"/>
+                </a:solidFill>
+                <a:latin typeface="Segoe UI" panose="020B0502040204020203" pitchFamily="34" charset="0"/>
+                <a:cs typeface="Segoe UI" panose="020B0502040204020203" pitchFamily="34" charset="0"/>
+              </a:rPr>
+              <a:t> Identify differences, misconfigurations, details</a:t>
+            </a:r>
+          </a:p>
+          <a:p>
+            <a:r>
+              <a:rPr lang="en-US" sz="4400" dirty="0">
+                <a:latin typeface="Segoe UI" panose="020B0502040204020203" pitchFamily="34" charset="0"/>
+                <a:cs typeface="Segoe UI" panose="020B0502040204020203" pitchFamily="34" charset="0"/>
+              </a:rPr>
+              <a:t> Hoist your sails anywhere</a:t>
+            </a:r>
+          </a:p>
+          <a:p>
+            <a:pPr lvl="1"/>
+            <a:r>
+              <a:rPr lang="en-US" sz="4000" dirty="0">
+                <a:solidFill>
+                  <a:srgbClr val="FFC000"/>
+                </a:solidFill>
+                <a:latin typeface="Segoe UI" panose="020B0502040204020203" pitchFamily="34" charset="0"/>
+                <a:cs typeface="Segoe UI" panose="020B0502040204020203" pitchFamily="34" charset="0"/>
+              </a:rPr>
+              <a:t> Use from Portal, VS Code (</a:t>
+            </a:r>
+            <a:r>
+              <a:rPr lang="en-US" sz="4000" dirty="0" err="1">
+                <a:solidFill>
+                  <a:srgbClr val="FFC000"/>
+                </a:solidFill>
+                <a:latin typeface="Segoe UI" panose="020B0502040204020203" pitchFamily="34" charset="0"/>
+                <a:cs typeface="Segoe UI" panose="020B0502040204020203" pitchFamily="34" charset="0"/>
+              </a:rPr>
+              <a:t>bARGE</a:t>
+            </a:r>
+            <a:r>
+              <a:rPr lang="en-US" sz="4000" dirty="0">
+                <a:solidFill>
+                  <a:srgbClr val="FFC000"/>
+                </a:solidFill>
+                <a:latin typeface="Segoe UI" panose="020B0502040204020203" pitchFamily="34" charset="0"/>
+                <a:cs typeface="Segoe UI" panose="020B0502040204020203" pitchFamily="34" charset="0"/>
+              </a:rPr>
+              <a:t>), CLIs, dashboards, alerts and more</a:t>
+            </a:r>
+          </a:p>
+        </p:txBody>
+      </p:sp>
+      <p:grpSp>
+        <p:nvGrpSpPr>
+          <p:cNvPr id="12" name="Group 11">
+            <a:extLst>
+              <a:ext uri="{FF2B5EF4-FFF2-40B4-BE49-F238E27FC236}">
+                <a16:creationId xmlns:a16="http://schemas.microsoft.com/office/drawing/2014/main" id="{002EC189-BAB5-A069-D15C-6BCC0ED0CA3E}"/>
+              </a:ext>
+            </a:extLst>
+          </p:cNvPr>
+          <p:cNvGrpSpPr/>
+          <p:nvPr/>
+        </p:nvGrpSpPr>
+        <p:grpSpPr>
+          <a:xfrm>
+            <a:off x="229635" y="9470382"/>
+            <a:ext cx="2200000" cy="511955"/>
+            <a:chOff x="9775935" y="6229126"/>
+            <a:chExt cx="1691379" cy="393596"/>
+          </a:xfrm>
+        </p:grpSpPr>
+        <p:pic>
+          <p:nvPicPr>
+            <p:cNvPr id="13" name="Graphic 56">
+              <a:extLst>
+                <a:ext uri="{FF2B5EF4-FFF2-40B4-BE49-F238E27FC236}">
+                  <a16:creationId xmlns:a16="http://schemas.microsoft.com/office/drawing/2014/main" id="{2A2DC6F3-9A88-72E8-D65C-2960114891CD}"/>
+                </a:ext>
+              </a:extLst>
+            </p:cNvPr>
+            <p:cNvPicPr>
+              <a:picLocks noChangeAspect="1"/>
+            </p:cNvPicPr>
+            <p:nvPr/>
+          </p:nvPicPr>
+          <p:blipFill>
+            <a:blip>
+              <a:extLst>
+                <a:ext uri="{96DAC541-7B7A-43D3-8B79-37D633B846F1}">
+                  <asvg:svgBlip xmlns:asvg="http://schemas.microsoft.com/office/drawing/2016/SVG/main" r:embed="rId2"/>
+                </a:ext>
+              </a:extLst>
+            </a:blip>
+            <a:srcRect/>
+            <a:stretch/>
+          </p:blipFill>
+          <p:spPr>
+            <a:xfrm>
+              <a:off x="10280577" y="6229126"/>
+              <a:ext cx="391207" cy="383223"/>
+            </a:xfrm>
+            <a:prstGeom prst="rect">
+              <a:avLst/>
+            </a:prstGeom>
+            <a:effectLst/>
+          </p:spPr>
+        </p:pic>
+        <p:pic>
+          <p:nvPicPr>
+            <p:cNvPr id="14" name="Graphic 56">
+              <a:extLst>
+                <a:ext uri="{FF2B5EF4-FFF2-40B4-BE49-F238E27FC236}">
+                  <a16:creationId xmlns:a16="http://schemas.microsoft.com/office/drawing/2014/main" id="{3F619B66-E565-FA04-2496-F7DC352A9BB8}"/>
+                </a:ext>
+              </a:extLst>
+            </p:cNvPr>
+            <p:cNvPicPr>
+              <a:picLocks noChangeAspect="1"/>
+            </p:cNvPicPr>
+            <p:nvPr/>
+          </p:nvPicPr>
+          <p:blipFill>
+            <a:blip r:embed="rId3"/>
+            <a:srcRect/>
+            <a:stretch/>
+          </p:blipFill>
+          <p:spPr>
+            <a:xfrm>
+              <a:off x="10696834" y="6263498"/>
+              <a:ext cx="320788" cy="327874"/>
+            </a:xfrm>
+            <a:prstGeom prst="rect">
+              <a:avLst/>
+            </a:prstGeom>
+            <a:effectLst/>
+          </p:spPr>
+        </p:pic>
+        <p:pic>
+          <p:nvPicPr>
+            <p:cNvPr id="15" name="Picture 14" descr="A black and white logo&#10;&#10;Description automatically generated">
+              <a:extLst>
+                <a:ext uri="{FF2B5EF4-FFF2-40B4-BE49-F238E27FC236}">
+                  <a16:creationId xmlns:a16="http://schemas.microsoft.com/office/drawing/2014/main" id="{0B82BB6F-ADC7-9511-BB28-0CDDA5B50003}"/>
+                </a:ext>
+              </a:extLst>
+            </p:cNvPr>
+            <p:cNvPicPr>
+              <a:picLocks noChangeAspect="1"/>
+            </p:cNvPicPr>
+            <p:nvPr/>
+          </p:nvPicPr>
+          <p:blipFill>
+            <a:blip r:embed="rId4"/>
+            <a:stretch>
+              <a:fillRect/>
+            </a:stretch>
+          </p:blipFill>
+          <p:spPr>
+            <a:xfrm>
+              <a:off x="11083688" y="6239096"/>
+              <a:ext cx="383626" cy="383626"/>
+            </a:xfrm>
+            <a:prstGeom prst="rect">
+              <a:avLst/>
+            </a:prstGeom>
+          </p:spPr>
+        </p:pic>
+        <p:pic>
+          <p:nvPicPr>
+            <p:cNvPr id="16" name="Picture 15" descr="A blue butterfly on a black background&#10;&#10;AI-generated content may be incorrect.">
+              <a:extLst>
+                <a:ext uri="{FF2B5EF4-FFF2-40B4-BE49-F238E27FC236}">
+                  <a16:creationId xmlns:a16="http://schemas.microsoft.com/office/drawing/2014/main" id="{0FCF77FA-238D-FBC0-366F-94F44C3B36E2}"/>
+                </a:ext>
+              </a:extLst>
+            </p:cNvPr>
+            <p:cNvPicPr>
+              <a:picLocks noChangeAspect="1"/>
+            </p:cNvPicPr>
+            <p:nvPr/>
+          </p:nvPicPr>
+          <p:blipFill>
+            <a:blip r:embed="rId5">
+              <a:biLevel thresh="25000"/>
+              <a:extLst>
+                <a:ext uri="{28A0092B-C50C-407E-A947-70E740481C1C}">
+                  <a14:useLocalDpi xmlns:a14="http://schemas.microsoft.com/office/drawing/2010/main" val="0"/>
+                </a:ext>
+              </a:extLst>
+            </a:blip>
+            <a:stretch>
+              <a:fillRect/>
+            </a:stretch>
+          </p:blipFill>
+          <p:spPr>
+            <a:xfrm>
+              <a:off x="9775935" y="6240132"/>
+              <a:ext cx="438576" cy="382589"/>
+            </a:xfrm>
+            <a:prstGeom prst="rect">
+              <a:avLst/>
+            </a:prstGeom>
+            <a:noFill/>
+            <a:ln>
+              <a:noFill/>
+            </a:ln>
+          </p:spPr>
+        </p:pic>
+      </p:grpSp>
+      <p:sp>
+        <p:nvSpPr>
+          <p:cNvPr id="17" name="TextBox 16"/>
+          <p:cNvSpPr txBox="1"/>
+          <p:nvPr/>
+        </p:nvSpPr>
+        <p:spPr>
+          <a:xfrm>
+            <a:off x="2429635" y="9444628"/>
+            <a:ext cx="3085525" cy="584775"/>
+          </a:xfrm>
+          <a:prstGeom prst="rect">
+            <a:avLst/>
+          </a:prstGeom>
+          <a:noFill/>
+        </p:spPr>
+        <p:txBody>
+          <a:bodyPr wrap="none" anchor="ctr">
+            <a:spAutoFit/>
+          </a:bodyPr>
+          <a:lstStyle/>
+          <a:p>
+            <a:r>
+              <a:rPr sz="3200">
+                <a:solidFill>
+                  <a:schemeClr val="bg1"/>
+                </a:solidFill>
+                <a:latin typeface="Segoe UI Semibold"/>
+              </a:rPr>
+              <a:t>@PalmEmanuel</a:t>
+            </a:r>
+          </a:p>
+        </p:txBody>
+      </p:sp>
+    </p:spTree>
+  </p:cSld>
+  <p:clrMapOvr>
+    <a:masterClrMapping/>
+  </p:clrMapOvr>
+  <p:timing>
+    <p:tnLst>
+      <p:par>
+        <p:cTn id="1" dur="indefinite" restart="never" nodeType="tmRoot">
+          <p:childTnLst>
+            <p:seq concurrent="1" nextAc="seek">
+              <p:cTn id="2" dur="indefinite" nodeType="mainSeq">
+                <p:childTnLst>
+                  <p:par>
+                    <p:cTn id="3" fill="hold">
+                      <p:stCondLst>
+                        <p:cond delay="indefinite"/>
+                      </p:stCondLst>
+                      <p:childTnLst>
+                        <p:par>
+                          <p:cTn id="4" fill="hold">
+                            <p:stCondLst>
+                              <p:cond delay="0"/>
+                            </p:stCondLst>
+                            <p:childTnLst>
+                              <p:par>
+                                <p:cTn id="5" presetID="10" presetClass="entr" presetSubtype="0" fill="hold" grpId="0" nodeType="clickEffect">
+                                  <p:stCondLst>
+                                    <p:cond delay="0"/>
+                                  </p:stCondLst>
+                                  <p:childTnLst>
+                                    <p:set>
+                                      <p:cBhvr>
+                                        <p:cTn id="6" dur="1" fill="hold">
+                                          <p:stCondLst>
+                                            <p:cond delay="0"/>
+                                          </p:stCondLst>
+                                        </p:cTn>
+                                        <p:tgtEl>
+                                          <p:spTgt spid="3">
+                                            <p:txEl>
+                                              <p:pRg st="0" end="0"/>
+                                            </p:txEl>
+                                          </p:spTgt>
+                                        </p:tgtEl>
+                                        <p:attrNameLst>
+                                          <p:attrName>style.visibility</p:attrName>
+                                        </p:attrNameLst>
+                                      </p:cBhvr>
+                                      <p:to>
+                                        <p:strVal val="visible"/>
+                                      </p:to>
+                                    </p:set>
+                                    <p:animEffect transition="in" filter="fade">
+                                      <p:cBhvr>
+                                        <p:cTn id="7" dur="500"/>
+                                        <p:tgtEl>
+                                          <p:spTgt spid="3">
+                                            <p:txEl>
+                                              <p:pRg st="0" end="0"/>
+                                            </p:txEl>
+                                          </p:spTgt>
+                                        </p:tgtEl>
+                                      </p:cBhvr>
+                                    </p:animEffect>
+                                  </p:childTnLst>
+                                </p:cTn>
+                              </p:par>
+                              <p:par>
+                                <p:cTn id="8" presetID="10" presetClass="entr" presetSubtype="0" fill="hold" grpId="0" nodeType="withEffect">
+                                  <p:stCondLst>
+                                    <p:cond delay="0"/>
+                                  </p:stCondLst>
+                                  <p:childTnLst>
+                                    <p:set>
+                                      <p:cBhvr>
+                                        <p:cTn id="9" dur="1" fill="hold">
+                                          <p:stCondLst>
+                                            <p:cond delay="0"/>
+                                          </p:stCondLst>
+                                        </p:cTn>
+                                        <p:tgtEl>
+                                          <p:spTgt spid="3">
+                                            <p:txEl>
+                                              <p:pRg st="1" end="1"/>
+                                            </p:txEl>
+                                          </p:spTgt>
+                                        </p:tgtEl>
+                                        <p:attrNameLst>
+                                          <p:attrName>style.visibility</p:attrName>
+                                        </p:attrNameLst>
+                                      </p:cBhvr>
+                                      <p:to>
+                                        <p:strVal val="visible"/>
+                                      </p:to>
+                                    </p:set>
+                                    <p:animEffect transition="in" filter="fade">
+                                      <p:cBhvr>
+                                        <p:cTn id="10" dur="500"/>
+                                        <p:tgtEl>
+                                          <p:spTgt spid="3">
+                                            <p:txEl>
+                                              <p:pRg st="1" end="1"/>
+                                            </p:txEl>
+                                          </p:spTgt>
+                                        </p:tgtEl>
+                                      </p:cBhvr>
+                                    </p:animEffect>
+                                  </p:childTnLst>
+                                </p:cTn>
+                              </p:par>
+                            </p:childTnLst>
+                          </p:cTn>
+                        </p:par>
+                      </p:childTnLst>
+                    </p:cTn>
+                  </p:par>
+                  <p:par>
+                    <p:cTn id="11" fill="hold">
+                      <p:stCondLst>
+                        <p:cond delay="indefinite"/>
+                      </p:stCondLst>
+                      <p:childTnLst>
+                        <p:par>
+                          <p:cTn id="12" fill="hold">
+                            <p:stCondLst>
+                              <p:cond delay="0"/>
+                            </p:stCondLst>
+                            <p:childTnLst>
+                              <p:par>
+                                <p:cTn id="13" presetID="10" presetClass="entr" presetSubtype="0" fill="hold" grpId="0" nodeType="clickEffect">
+                                  <p:stCondLst>
+                                    <p:cond delay="0"/>
+                                  </p:stCondLst>
+                                  <p:childTnLst>
+                                    <p:set>
+                                      <p:cBhvr>
+                                        <p:cTn id="14" dur="1" fill="hold">
+                                          <p:stCondLst>
+                                            <p:cond delay="0"/>
+                                          </p:stCondLst>
+                                        </p:cTn>
+                                        <p:tgtEl>
+                                          <p:spTgt spid="3">
+                                            <p:txEl>
+                                              <p:pRg st="2" end="2"/>
+                                            </p:txEl>
+                                          </p:spTgt>
+                                        </p:tgtEl>
+                                        <p:attrNameLst>
+                                          <p:attrName>style.visibility</p:attrName>
+                                        </p:attrNameLst>
+                                      </p:cBhvr>
+                                      <p:to>
+                                        <p:strVal val="visible"/>
+                                      </p:to>
+                                    </p:set>
+                                    <p:animEffect transition="in" filter="fade">
+                                      <p:cBhvr>
+                                        <p:cTn id="15" dur="500"/>
+                                        <p:tgtEl>
+                                          <p:spTgt spid="3">
+                                            <p:txEl>
+                                              <p:pRg st="2" end="2"/>
+                                            </p:txEl>
+                                          </p:spTgt>
+                                        </p:tgtEl>
+                                      </p:cBhvr>
+                                    </p:animEffect>
+                                  </p:childTnLst>
+                                </p:cTn>
+                              </p:par>
+                              <p:par>
+                                <p:cTn id="16" presetID="10" presetClass="entr" presetSubtype="0" fill="hold" grpId="0" nodeType="withEffect">
+                                  <p:stCondLst>
+                                    <p:cond delay="0"/>
+                                  </p:stCondLst>
+                                  <p:childTnLst>
+                                    <p:set>
+                                      <p:cBhvr>
+                                        <p:cTn id="17" dur="1" fill="hold">
+                                          <p:stCondLst>
+                                            <p:cond delay="0"/>
+                                          </p:stCondLst>
+                                        </p:cTn>
+                                        <p:tgtEl>
+                                          <p:spTgt spid="3">
+                                            <p:txEl>
+                                              <p:pRg st="3" end="3"/>
+                                            </p:txEl>
+                                          </p:spTgt>
+                                        </p:tgtEl>
+                                        <p:attrNameLst>
+                                          <p:attrName>style.visibility</p:attrName>
+                                        </p:attrNameLst>
+                                      </p:cBhvr>
+                                      <p:to>
+                                        <p:strVal val="visible"/>
+                                      </p:to>
+                                    </p:set>
+                                    <p:animEffect transition="in" filter="fade">
+                                      <p:cBhvr>
+                                        <p:cTn id="18" dur="500"/>
+                                        <p:tgtEl>
+                                          <p:spTgt spid="3">
+                                            <p:txEl>
+                                              <p:pRg st="3" end="3"/>
+                                            </p:txEl>
+                                          </p:spTgt>
+                                        </p:tgtEl>
+                                      </p:cBhvr>
+                                    </p:animEffect>
+                                  </p:childTnLst>
+                                </p:cTn>
+                              </p:par>
+                              <p:par>
+                                <p:cTn id="19" presetID="9" presetClass="emph" presetSubtype="0" grpId="1" nodeType="withEffect">
+                                  <p:stCondLst>
+                                    <p:cond delay="0"/>
+                                  </p:stCondLst>
+                                  <p:childTnLst>
+                                    <p:set>
+                                      <p:cBhvr>
+                                        <p:cTn id="20" dur="indefinite"/>
+                                        <p:tgtEl>
+                                          <p:spTgt spid="3">
+                                            <p:txEl>
+                                              <p:pRg st="0" end="0"/>
+                                            </p:txEl>
+                                          </p:spTgt>
+                                        </p:tgtEl>
+                                        <p:attrNameLst>
+                                          <p:attrName>style.opacity</p:attrName>
+                                        </p:attrNameLst>
+                                      </p:cBhvr>
+                                      <p:to>
+                                        <p:strVal val="0.5"/>
+                                      </p:to>
+                                    </p:set>
+                                    <p:animEffect filter="image" prLst="opacity: 0.5">
+                                      <p:cBhvr rctx="IE">
+                                        <p:cTn id="21" dur="indefinite"/>
+                                        <p:tgtEl>
+                                          <p:spTgt spid="3">
+                                            <p:txEl>
+                                              <p:pRg st="0" end="0"/>
+                                            </p:txEl>
+                                          </p:spTgt>
+                                        </p:tgtEl>
+                                      </p:cBhvr>
+                                    </p:animEffect>
+                                  </p:childTnLst>
+                                </p:cTn>
+                              </p:par>
+                              <p:par>
+                                <p:cTn id="22" presetID="9" presetClass="emph" presetSubtype="0" grpId="1" nodeType="withEffect">
+                                  <p:stCondLst>
+                                    <p:cond delay="0"/>
+                                  </p:stCondLst>
+                                  <p:childTnLst>
+                                    <p:set>
+                                      <p:cBhvr>
+                                        <p:cTn id="23" dur="indefinite"/>
+                                        <p:tgtEl>
+                                          <p:spTgt spid="3">
+                                            <p:txEl>
+                                              <p:pRg st="1" end="1"/>
+                                            </p:txEl>
+                                          </p:spTgt>
+                                        </p:tgtEl>
+                                        <p:attrNameLst>
+                                          <p:attrName>style.opacity</p:attrName>
+                                        </p:attrNameLst>
+                                      </p:cBhvr>
+                                      <p:to>
+                                        <p:strVal val="0.5"/>
+                                      </p:to>
+                                    </p:set>
+                                    <p:animEffect filter="image" prLst="opacity: 0.5">
+                                      <p:cBhvr rctx="IE">
+                                        <p:cTn id="24" dur="indefinite"/>
+                                        <p:tgtEl>
+                                          <p:spTgt spid="3">
+                                            <p:txEl>
+                                              <p:pRg st="1" end="1"/>
+                                            </p:txEl>
+                                          </p:spTgt>
+                                        </p:tgtEl>
+                                      </p:cBhvr>
+                                    </p:animEffect>
+                                  </p:childTnLst>
+                                </p:cTn>
+                              </p:par>
+                            </p:childTnLst>
+                          </p:cTn>
+                        </p:par>
+                      </p:childTnLst>
+                    </p:cTn>
+                  </p:par>
+                  <p:par>
+                    <p:cTn id="25" fill="hold">
+                      <p:stCondLst>
+                        <p:cond delay="indefinite"/>
+                      </p:stCondLst>
+                      <p:childTnLst>
+                        <p:par>
+                          <p:cTn id="26" fill="hold">
+                            <p:stCondLst>
+                              <p:cond delay="0"/>
+                            </p:stCondLst>
+                            <p:childTnLst>
+                              <p:par>
+                                <p:cTn id="27" presetID="10" presetClass="entr" presetSubtype="0" fill="hold" grpId="0" nodeType="clickEffect">
+                                  <p:stCondLst>
+                                    <p:cond delay="0"/>
+                                  </p:stCondLst>
+                                  <p:childTnLst>
+                                    <p:set>
+                                      <p:cBhvr>
+                                        <p:cTn id="28" dur="1" fill="hold">
+                                          <p:stCondLst>
+                                            <p:cond delay="0"/>
+                                          </p:stCondLst>
+                                        </p:cTn>
+                                        <p:tgtEl>
+                                          <p:spTgt spid="3">
+                                            <p:txEl>
+                                              <p:pRg st="4" end="4"/>
+                                            </p:txEl>
+                                          </p:spTgt>
+                                        </p:tgtEl>
+                                        <p:attrNameLst>
+                                          <p:attrName>style.visibility</p:attrName>
+                                        </p:attrNameLst>
+                                      </p:cBhvr>
+                                      <p:to>
+                                        <p:strVal val="visible"/>
+                                      </p:to>
+                                    </p:set>
+                                    <p:animEffect transition="in" filter="fade">
+                                      <p:cBhvr>
+                                        <p:cTn id="29" dur="500"/>
+                                        <p:tgtEl>
+                                          <p:spTgt spid="3">
+                                            <p:txEl>
+                                              <p:pRg st="4" end="4"/>
+                                            </p:txEl>
+                                          </p:spTgt>
+                                        </p:tgtEl>
+                                      </p:cBhvr>
+                                    </p:animEffect>
+                                  </p:childTnLst>
+                                </p:cTn>
+                              </p:par>
+                              <p:par>
+                                <p:cTn id="30" presetID="10" presetClass="entr" presetSubtype="0" fill="hold" grpId="0" nodeType="withEffect">
+                                  <p:stCondLst>
+                                    <p:cond delay="0"/>
+                                  </p:stCondLst>
+                                  <p:childTnLst>
+                                    <p:set>
+                                      <p:cBhvr>
+                                        <p:cTn id="31" dur="1" fill="hold">
+                                          <p:stCondLst>
+                                            <p:cond delay="0"/>
+                                          </p:stCondLst>
+                                        </p:cTn>
+                                        <p:tgtEl>
+                                          <p:spTgt spid="3">
+                                            <p:txEl>
+                                              <p:pRg st="5" end="5"/>
+                                            </p:txEl>
+                                          </p:spTgt>
+                                        </p:tgtEl>
+                                        <p:attrNameLst>
+                                          <p:attrName>style.visibility</p:attrName>
+                                        </p:attrNameLst>
+                                      </p:cBhvr>
+                                      <p:to>
+                                        <p:strVal val="visible"/>
+                                      </p:to>
+                                    </p:set>
+                                    <p:animEffect transition="in" filter="fade">
+                                      <p:cBhvr>
+                                        <p:cTn id="32" dur="500"/>
+                                        <p:tgtEl>
+                                          <p:spTgt spid="3">
+                                            <p:txEl>
+                                              <p:pRg st="5" end="5"/>
+                                            </p:txEl>
+                                          </p:spTgt>
+                                        </p:tgtEl>
+                                      </p:cBhvr>
+                                    </p:animEffect>
+                                  </p:childTnLst>
+                                </p:cTn>
+                              </p:par>
+                              <p:par>
+                                <p:cTn id="33" presetID="9" presetClass="emph" presetSubtype="0" grpId="1" nodeType="withEffect">
+                                  <p:stCondLst>
+                                    <p:cond delay="0"/>
+                                  </p:stCondLst>
+                                  <p:childTnLst>
+                                    <p:set>
+                                      <p:cBhvr>
+                                        <p:cTn id="34" dur="indefinite"/>
+                                        <p:tgtEl>
+                                          <p:spTgt spid="3">
+                                            <p:txEl>
+                                              <p:pRg st="2" end="2"/>
+                                            </p:txEl>
+                                          </p:spTgt>
+                                        </p:tgtEl>
+                                        <p:attrNameLst>
+                                          <p:attrName>style.opacity</p:attrName>
+                                        </p:attrNameLst>
+                                      </p:cBhvr>
+                                      <p:to>
+                                        <p:strVal val="0.5"/>
+                                      </p:to>
+                                    </p:set>
+                                    <p:animEffect filter="image" prLst="opacity: 0.5">
+                                      <p:cBhvr rctx="IE">
+                                        <p:cTn id="35" dur="indefinite"/>
+                                        <p:tgtEl>
+                                          <p:spTgt spid="3">
+                                            <p:txEl>
+                                              <p:pRg st="2" end="2"/>
+                                            </p:txEl>
+                                          </p:spTgt>
+                                        </p:tgtEl>
+                                      </p:cBhvr>
+                                    </p:animEffect>
+                                  </p:childTnLst>
+                                </p:cTn>
+                              </p:par>
+                              <p:par>
+                                <p:cTn id="36" presetID="9" presetClass="emph" presetSubtype="0" grpId="1" nodeType="withEffect">
+                                  <p:stCondLst>
+                                    <p:cond delay="0"/>
+                                  </p:stCondLst>
+                                  <p:childTnLst>
+                                    <p:set>
+                                      <p:cBhvr>
+                                        <p:cTn id="37" dur="indefinite"/>
+                                        <p:tgtEl>
+                                          <p:spTgt spid="3">
+                                            <p:txEl>
+                                              <p:pRg st="3" end="3"/>
+                                            </p:txEl>
+                                          </p:spTgt>
+                                        </p:tgtEl>
+                                        <p:attrNameLst>
+                                          <p:attrName>style.opacity</p:attrName>
+                                        </p:attrNameLst>
+                                      </p:cBhvr>
+                                      <p:to>
+                                        <p:strVal val="0.5"/>
+                                      </p:to>
+                                    </p:set>
+                                    <p:animEffect filter="image" prLst="opacity: 0.5">
+                                      <p:cBhvr rctx="IE">
+                                        <p:cTn id="38" dur="indefinite"/>
+                                        <p:tgtEl>
+                                          <p:spTgt spid="3">
+                                            <p:txEl>
+                                              <p:pRg st="3" end="3"/>
+                                            </p:txEl>
+                                          </p:spTgt>
+                                        </p:tgtEl>
+                                      </p:cBhvr>
+                                    </p:animEffect>
+                                  </p:childTnLst>
+                                </p:cTn>
+                              </p:par>
+                            </p:childTnLst>
+                          </p:cTn>
+                        </p:par>
+                      </p:childTnLst>
+                    </p:cTn>
+                  </p:par>
+                </p:childTnLst>
+              </p:cTn>
+              <p:prevCondLst>
+                <p:cond evt="onPrev" delay="0">
+                  <p:tgtEl>
+                    <p:sldTgt/>
+                  </p:tgtEl>
+                </p:cond>
+              </p:prevCondLst>
+              <p:nextCondLst>
+                <p:cond evt="onNext" delay="0">
+                  <p:tgtEl>
+                    <p:sldTgt/>
+                  </p:tgtEl>
+                </p:cond>
+              </p:nextCondLst>
+            </p:seq>
+          </p:childTnLst>
+        </p:cTn>
+      </p:par>
+    </p:tnLst>
+    <p:bldLst>
+      <p:bldP spid="3" grpId="0" uiExpand="1" build="p"/>
+      <p:bldP spid="3" grpId="1" uiExpand="1" build="p"/>
+    </p:bldLst>
+  </p:timing>
+</p:sld>
+</file>
+
+<file path=ppt/slides/slide31.xml><?xml version="1.0" encoding="utf-8"?>
+<p:sld xmlns:a="http://schemas.openxmlformats.org/drawingml/2006/main" xmlns:r="http://schemas.openxmlformats.org/officeDocument/2006/relationships" xmlns:p="http://schemas.openxmlformats.org/presentationml/2006/main">
+  <p:cSld>
+    <p:spTree>
+      <p:nvGrpSpPr>
+        <p:cNvPr id="1" name=""/>
+        <p:cNvGrpSpPr/>
+        <p:nvPr/>
+      </p:nvGrpSpPr>
+      <p:grpSpPr>
+        <a:xfrm>
+          <a:off x="0" y="0"/>
+          <a:ext cx="0" cy="0"/>
+          <a:chOff x="0" y="0"/>
+          <a:chExt cx="0" cy="0"/>
+        </a:xfrm>
+      </p:grpSpPr>
       <p:grpSp>
         <p:nvGrpSpPr>
           <p:cNvPr id="2" name="Group 1">
@@ -27873,18 +29796,60 @@
           </a:p>
         </p:txBody>
       </p:sp>
+      <p:sp>
+        <p:nvSpPr>
+          <p:cNvPr id="5" name="TextBox 4">
+            <a:extLst>
+              <a:ext uri="{FF2B5EF4-FFF2-40B4-BE49-F238E27FC236}">
+                <a16:creationId xmlns:a16="http://schemas.microsoft.com/office/drawing/2014/main" id="{F8CC8CF5-B623-98CB-61D4-8A93086CC0E3}"/>
+              </a:ext>
+            </a:extLst>
+          </p:cNvPr>
+          <p:cNvSpPr txBox="1"/>
+          <p:nvPr/>
+        </p:nvSpPr>
+        <p:spPr>
+          <a:xfrm>
+            <a:off x="7729846" y="4997854"/>
+            <a:ext cx="9144000" cy="3416320"/>
+          </a:xfrm>
+          <a:prstGeom prst="rect">
+            <a:avLst/>
+          </a:prstGeom>
+          <a:noFill/>
+        </p:spPr>
+        <p:txBody>
+          <a:bodyPr wrap="square">
+            <a:spAutoFit/>
+          </a:bodyPr>
+          <a:lstStyle/>
+          <a:p>
+            <a:pPr algn="ctr"/>
+            <a:r>
+              <a:rPr lang="en-US" sz="7200" dirty="0">
+                <a:solidFill>
+                  <a:schemeClr val="bg1"/>
+                </a:solidFill>
+                <a:latin typeface="+mn-lt"/>
+              </a:rPr>
+              <a:t>And always make sure to filter left and format right!</a:t>
+            </a:r>
+            <a:endParaRPr lang="en-US" sz="1600" dirty="0"/>
+          </a:p>
+        </p:txBody>
+      </p:sp>
     </p:spTree>
   </p:cSld>
   <p:clrMapOvr>
     <a:masterClrMapping/>
   </p:clrMapOvr>
-  <mc:AlternateContent xmlns:mc="http://schemas.openxmlformats.org/markup-compatibility/2006">
-    <mc:Choice xmlns:p159="http://schemas.microsoft.com/office/powerpoint/2015/09/main" Requires="p159">
+  <mc:AlternateContent xmlns:mc="http://schemas.openxmlformats.org/markup-compatibility/2006" xmlns:p159="http://schemas.microsoft.com/office/powerpoint/2015/09/main">
+    <mc:Choice Requires="p159">
       <p:transition xmlns:p14="http://schemas.microsoft.com/office/powerpoint/2010/main" spd="slow" p14:dur="2000">
         <p159:morph option="byObject"/>
       </p:transition>
     </mc:Choice>
-    <mc:Fallback>
+    <mc:Fallback xmlns="">
       <p:transition spd="slow">
         <p:fade/>
       </p:transition>
@@ -27951,6 +29916,94 @@
                       </p:childTnLst>
                     </p:cTn>
                   </p:par>
+                  <p:par>
+                    <p:cTn id="8" fill="hold">
+                      <p:stCondLst>
+                        <p:cond delay="indefinite"/>
+                      </p:stCondLst>
+                      <p:childTnLst>
+                        <p:par>
+                          <p:cTn id="9" fill="hold">
+                            <p:stCondLst>
+                              <p:cond delay="0"/>
+                            </p:stCondLst>
+                            <p:childTnLst>
+                              <p:par>
+                                <p:cTn id="10" presetID="10" presetClass="exit" presetSubtype="0" fill="hold" grpId="2" nodeType="clickEffect">
+                                  <p:stCondLst>
+                                    <p:cond delay="0"/>
+                                  </p:stCondLst>
+                                  <p:childTnLst>
+                                    <p:animEffect transition="out" filter="fade">
+                                      <p:cBhvr>
+                                        <p:cTn id="11" dur="500"/>
+                                        <p:tgtEl>
+                                          <p:spTgt spid="4"/>
+                                        </p:tgtEl>
+                                      </p:cBhvr>
+                                    </p:animEffect>
+                                    <p:set>
+                                      <p:cBhvr>
+                                        <p:cTn id="12" dur="1" fill="hold">
+                                          <p:stCondLst>
+                                            <p:cond delay="499"/>
+                                          </p:stCondLst>
+                                        </p:cTn>
+                                        <p:tgtEl>
+                                          <p:spTgt spid="4"/>
+                                        </p:tgtEl>
+                                        <p:attrNameLst>
+                                          <p:attrName>style.visibility</p:attrName>
+                                        </p:attrNameLst>
+                                      </p:cBhvr>
+                                      <p:to>
+                                        <p:strVal val="hidden"/>
+                                      </p:to>
+                                    </p:set>
+                                  </p:childTnLst>
+                                </p:cTn>
+                              </p:par>
+                              <p:par>
+                                <p:cTn id="13" presetID="10" presetClass="entr" presetSubtype="0" fill="hold" grpId="0" nodeType="withEffect">
+                                  <p:stCondLst>
+                                    <p:cond delay="500"/>
+                                  </p:stCondLst>
+                                  <p:childTnLst>
+                                    <p:set>
+                                      <p:cBhvr>
+                                        <p:cTn id="14" dur="1" fill="hold">
+                                          <p:stCondLst>
+                                            <p:cond delay="0"/>
+                                          </p:stCondLst>
+                                        </p:cTn>
+                                        <p:tgtEl>
+                                          <p:spTgt spid="5"/>
+                                        </p:tgtEl>
+                                        <p:attrNameLst>
+                                          <p:attrName>style.visibility</p:attrName>
+                                        </p:attrNameLst>
+                                      </p:cBhvr>
+                                      <p:to>
+                                        <p:strVal val="visible"/>
+                                      </p:to>
+                                    </p:set>
+                                    <p:animEffect transition="in" filter="fade">
+                                      <p:cBhvr>
+                                        <p:cTn id="15" dur="500"/>
+                                        <p:tgtEl>
+                                          <p:spTgt spid="5"/>
+                                        </p:tgtEl>
+                                      </p:cBhvr>
+                                    </p:animEffect>
+                                  </p:childTnLst>
+                                </p:cTn>
+                              </p:par>
+                            </p:childTnLst>
+                          </p:cTn>
+                        </p:par>
+                      </p:childTnLst>
+                    </p:cTn>
+                  </p:par>
                 </p:childTnLst>
               </p:cTn>
               <p:prevCondLst>
@@ -27974,6 +30027,8 @@
     </p:tnLst>
     <p:bldLst>
       <p:bldP spid="4" grpId="0"/>
+      <p:bldP spid="4" grpId="2"/>
+      <p:bldP spid="5" grpId="0"/>
     </p:bldLst>
   </p:timing>
 </p:sld>
@@ -30809,15 +32864,6 @@
 </file>
 
 <file path=customXml/item1.xml><?xml version="1.0" encoding="utf-8"?>
-<?mso-contentType ?>
-<FormTemplates xmlns="http://schemas.microsoft.com/sharepoint/v3/contenttype/forms">
-  <Display>DocumentLibraryForm</Display>
-  <Edit>DocumentLibraryForm</Edit>
-  <New>DocumentLibraryForm</New>
-</FormTemplates>
-</file>
-
-<file path=customXml/item2.xml><?xml version="1.0" encoding="utf-8"?>
 <p:properties xmlns:p="http://schemas.microsoft.com/office/2006/metadata/properties" xmlns:xsi="http://www.w3.org/2001/XMLSchema-instance" xmlns:pc="http://schemas.microsoft.com/office/infopath/2007/PartnerControls">
   <documentManagement>
     <lcf76f155ced4ddcb4097134ff3c332f xmlns="dd1fca98-92ba-4584-8d05-b623a44bff8b">
@@ -30826,6 +32872,15 @@
     <TaxCatchAll xmlns="510f3f9e-3839-48e4-9021-7d5705987296" xsi:nil="true"/>
   </documentManagement>
 </p:properties>
+</file>
+
+<file path=customXml/item2.xml><?xml version="1.0" encoding="utf-8"?>
+<?mso-contentType ?>
+<FormTemplates xmlns="http://schemas.microsoft.com/sharepoint/v3/contenttype/forms">
+  <Display>DocumentLibraryForm</Display>
+  <Edit>DocumentLibraryForm</Edit>
+  <New>DocumentLibraryForm</New>
+</FormTemplates>
 </file>
 
 <file path=customXml/item3.xml><?xml version="1.0" encoding="utf-8"?>
@@ -31030,14 +33085,6 @@
 </file>
 
 <file path=customXml/itemProps1.xml><?xml version="1.0" encoding="utf-8"?>
-<ds:datastoreItem xmlns:ds="http://schemas.openxmlformats.org/officeDocument/2006/customXml" ds:itemID="{5FD23921-D1B3-4277-8367-4BA3F95E1C71}">
-  <ds:schemaRefs>
-    <ds:schemaRef ds:uri="http://schemas.microsoft.com/sharepoint/v3/contenttype/forms"/>
-  </ds:schemaRefs>
-</ds:datastoreItem>
-</file>
-
-<file path=customXml/itemProps2.xml><?xml version="1.0" encoding="utf-8"?>
 <ds:datastoreItem xmlns:ds="http://schemas.openxmlformats.org/officeDocument/2006/customXml" ds:itemID="{D5EE73F2-3A4A-4C36-9D33-162B297E8156}">
   <ds:schemaRefs>
     <ds:schemaRef ds:uri="http://schemas.microsoft.com/office/2006/metadata/properties"/>
@@ -31046,6 +33093,14 @@
     <ds:schemaRef ds:uri="http://schemas.microsoft.com/office/infopath/2007/PartnerControls"/>
     <ds:schemaRef ds:uri="510f3f9e-3839-48e4-9021-7d5705987296"/>
     <ds:schemaRef ds:uri="http://www.w3.org/2001/XMLSchema-instance"/>
+  </ds:schemaRefs>
+</ds:datastoreItem>
+</file>
+
+<file path=customXml/itemProps2.xml><?xml version="1.0" encoding="utf-8"?>
+<ds:datastoreItem xmlns:ds="http://schemas.openxmlformats.org/officeDocument/2006/customXml" ds:itemID="{5FD23921-D1B3-4277-8367-4BA3F95E1C71}">
+  <ds:schemaRefs>
+    <ds:schemaRef ds:uri="http://schemas.microsoft.com/sharepoint/v3/contenttype/forms"/>
   </ds:schemaRefs>
 </ds:datastoreItem>
 </file>

--- a/ELSE26_TreasureHuntingInAzureWithKQL.pptx
+++ b/ELSE26_TreasureHuntingInAzureWithKQL.pptx
@@ -8058,7 +8058,7 @@
         </p:nvSpPr>
         <p:spPr>
           <a:xfrm>
-            <a:off x="3969514" y="1282567"/>
+            <a:off x="4020314" y="1282567"/>
             <a:ext cx="7254653" cy="323165"/>
           </a:xfrm>
           <a:prstGeom prst="rect">
@@ -8469,7 +8469,11 @@
           </a:lstStyle>
           <a:p>
             <a:r>
-              <a:rPr lang="en-US" dirty="0"/>
+              <a:rPr lang="en-US" dirty="0">
+                <a:solidFill>
+                  <a:srgbClr val="EAC000"/>
+                </a:solidFill>
+              </a:rPr>
               <a:t>15:40</a:t>
             </a:r>
           </a:p>
